--- a/deck/salesforce-process-intelligence.pptx
+++ b/deck/salesforce-process-intelligence.pptx
@@ -114,26 +114,26 @@
   <p:extLst>
     <p:ext uri="{521415D9-36F7-43E2-AB2F-B90AF26B5E84}">
       <p14:sectionLst xmlns:p14="http://schemas.microsoft.com/office/powerpoint/2010/main">
-        <p14:section name="Opening" id="{265c1982-e116-42ff-b7c0-7eb38206bb40}">
+        <p14:section name="Opening" id="{a4b3c557-0be0-875a-af16-44097121777e}">
           <p14:sldIdLst>
             <p14:sldId id="256"/>
             <p14:sldId id="257"/>
           </p14:sldIdLst>
         </p14:section>
-        <p14:section name="Evidence" id="{b9487968-4089-d078-fd6e-081c9d20f1ee}">
+        <p14:section name="Evidence" id="{1869a031-5bf5-68c7-8c0c-75d62cb4f232}">
           <p14:sldIdLst>
             <p14:sldId id="258"/>
             <p14:sldId id="259"/>
             <p14:sldId id="260"/>
           </p14:sldIdLst>
         </p14:section>
-        <p14:section name="Value" id="{44fde5f1-9f9c-12e1-7191-e2eeed9c23e3}">
+        <p14:section name="Value" id="{c0af868d-a5ac-7acf-f0d4-c9d3b96d5243}">
           <p14:sldIdLst>
             <p14:sldId id="261"/>
             <p14:sldId id="262"/>
           </p14:sldIdLst>
         </p14:section>
-        <p14:section name="Close" id="{a03e89e3-c33c-0394-1be4-17f4daac1a2e}">
+        <p14:section name="Close" id="{98258e1b-94e0-b7f2-5b6c-9004f71b6963}">
           <p14:sldIdLst>
             <p14:sldId id="263"/>
           </p14:sldIdLst>
@@ -2862,7 +2862,7 @@
                   <a:schemeClr val="accent3"/>
                 </a:solidFill>
               </a:rPr>
-              <a:t>Lead-to-close process intelligence: a working demo built for Apromore</a:t>
+              <a:t>Lead-to-close process intelligence: a working demo build</a:t>
             </a:r>
             <a:endParaRPr lang="en-US" sz="2000" dirty="0"/>
           </a:p>

--- a/deck/salesforce-process-intelligence.pptx
+++ b/deck/salesforce-process-intelligence.pptx
@@ -13,9 +13,12 @@
     <p:sldId id="261" r:id="rId7"/>
     <p:sldId id="262" r:id="rId8"/>
     <p:sldId id="263" r:id="rId9"/>
+    <p:sldId id="264" r:id="rId10"/>
+    <p:sldId id="265" r:id="rId11"/>
+    <p:sldId id="266" r:id="rId12"/>
   </p:sldIdLst>
   <p:notesMasterIdLst>
-    <p:notesMasterId r:id="rId10"/>
+    <p:notesMasterId r:id="rId13"/>
   </p:notesMasterIdLst>
   <p:sldSz cx="12192000" cy="6858000"/>
   <p:notesSz cx="6858000" cy="12192000"/>
@@ -114,28 +117,35 @@
   <p:extLst>
     <p:ext uri="{521415D9-36F7-43E2-AB2F-B90AF26B5E84}">
       <p14:sectionLst xmlns:p14="http://schemas.microsoft.com/office/powerpoint/2010/main">
-        <p14:section name="Opening" id="{a4b3c557-0be0-875a-af16-44097121777e}">
+        <p14:section name="Opening" id="{17795403-9396-725d-c414-501f866fd073}">
           <p14:sldIdLst>
             <p14:sldId id="256"/>
             <p14:sldId id="257"/>
           </p14:sldIdLst>
         </p14:section>
-        <p14:section name="Evidence" id="{1869a031-5bf5-68c7-8c0c-75d62cb4f232}">
+        <p14:section name="Evidence" id="{85fbde82-9cec-8f78-a242-6c9daccd6540}">
           <p14:sldIdLst>
             <p14:sldId id="258"/>
             <p14:sldId id="259"/>
+          </p14:sldIdLst>
+        </p14:section>
+        <p14:section name="Value" id="{4e8a13c5-3957-4d6a-c99e-4405ca997d95}">
+          <p14:sldIdLst>
             <p14:sldId id="260"/>
           </p14:sldIdLst>
         </p14:section>
-        <p14:section name="Value" id="{c0af868d-a5ac-7acf-f0d4-c9d3b96d5243}">
+        <p14:section name="Tech setup" id="{3dbcbcab-7b09-ad4a-5235-2ed2a77eab95}">
           <p14:sldIdLst>
             <p14:sldId id="261"/>
             <p14:sldId id="262"/>
+            <p14:sldId id="263"/>
+            <p14:sldId id="264"/>
+            <p14:sldId id="265"/>
           </p14:sldIdLst>
         </p14:section>
-        <p14:section name="Close" id="{98258e1b-94e0-b7f2-5b6c-9004f71b6963}">
+        <p14:section name="Close" id="{e0829fee-14ba-deb4-2c72-d7f9c20bbb32}">
           <p14:sldIdLst>
-            <p14:sldId id="263"/>
+            <p14:sldId id="266"/>
           </p14:sldIdLst>
         </p14:section>
       </p14:sectionLst>
@@ -1429,6 +1439,182 @@
 </p:notes>
 </file>
 
+<file path=ppt/notesSlides/notesSlide10.xml><?xml version="1.0" encoding="utf-8"?>
+<p:notes xmlns:a="http://schemas.openxmlformats.org/drawingml/2006/main" xmlns:r="http://schemas.openxmlformats.org/officeDocument/2006/relationships" xmlns:p="http://schemas.openxmlformats.org/presentationml/2006/main">
+  <p:cSld>
+    <p:spTree>
+      <p:nvGrpSpPr>
+        <p:cNvPr id="1" name=""/>
+        <p:cNvGrpSpPr/>
+        <p:nvPr/>
+      </p:nvGrpSpPr>
+      <p:grpSpPr>
+        <a:xfrm>
+          <a:off x="0" y="0"/>
+          <a:ext cx="0" cy="0"/>
+          <a:chOff x="0" y="0"/>
+          <a:chExt cx="0" cy="0"/>
+        </a:xfrm>
+      </p:grpSpPr>
+      <p:sp>
+        <p:nvSpPr>
+          <p:cNvPr id="2" name="Slide Image Placeholder 1"/>
+          <p:cNvSpPr>
+            <a:spLocks noGrp="1" noRot="1" noChangeAspect="1"/>
+          </p:cNvSpPr>
+          <p:nvPr>
+            <p:ph type="sldImg"/>
+          </p:nvPr>
+        </p:nvSpPr>
+        <p:spPr/>
+      </p:sp>
+      <p:sp>
+        <p:nvSpPr>
+          <p:cNvPr id="3" name="Notes Placeholder 2"/>
+          <p:cNvSpPr>
+            <a:spLocks noGrp="1"/>
+          </p:cNvSpPr>
+          <p:nvPr>
+            <p:ph type="body" idx="1"/>
+          </p:nvPr>
+        </p:nvSpPr>
+        <p:spPr/>
+        <p:txBody>
+          <a:bodyPr/>
+          <a:lstStyle/>
+          <a:p>
+            <a:r>
+              <a:rPr lang="en-US" dirty="0"/>
+              <a:t>All of this is hosted. The repo has the pipeline, the seeding script and the README with the setup gotchas I hit on a new trial org.</a:t>
+            </a:r>
+            <a:endParaRPr lang="en-US" dirty="0"/>
+          </a:p>
+        </p:txBody>
+      </p:sp>
+      <p:sp>
+        <p:nvSpPr>
+          <p:cNvPr id="4" name="Slide Number Placeholder 3"/>
+          <p:cNvSpPr>
+            <a:spLocks noGrp="1"/>
+          </p:cNvSpPr>
+          <p:nvPr>
+            <p:ph type="sldNum" sz="quarter" idx="10"/>
+          </p:nvPr>
+        </p:nvSpPr>
+        <p:spPr/>
+        <p:txBody>
+          <a:bodyPr/>
+          <a:lstStyle/>
+          <a:p>
+            <a:fld id="{F7021451-1387-4CA6-816F-3879F97B5CBC}" type="slidenum">
+              <a:rPr lang="en-US"/>
+              <a:t>10</a:t>
+            </a:fld>
+            <a:endParaRPr lang="en-US"/>
+          </a:p>
+        </p:txBody>
+      </p:sp>
+    </p:spTree>
+    <p:extLst>
+      <p:ext uri="{BB962C8B-B14F-4D97-AF65-F5344CB8AC3E}">
+        <p14:creationId xmlns:p14="http://schemas.microsoft.com/office/powerpoint/2010/main" val="1024086991"/>
+      </p:ext>
+    </p:extLst>
+  </p:cSld>
+  <p:clrMapOvr>
+    <a:masterClrMapping/>
+  </p:clrMapOvr>
+</p:notes>
+</file>
+
+<file path=ppt/notesSlides/notesSlide11.xml><?xml version="1.0" encoding="utf-8"?>
+<p:notes xmlns:a="http://schemas.openxmlformats.org/drawingml/2006/main" xmlns:r="http://schemas.openxmlformats.org/officeDocument/2006/relationships" xmlns:p="http://schemas.openxmlformats.org/presentationml/2006/main">
+  <p:cSld>
+    <p:spTree>
+      <p:nvGrpSpPr>
+        <p:cNvPr id="1" name=""/>
+        <p:cNvGrpSpPr/>
+        <p:nvPr/>
+      </p:nvGrpSpPr>
+      <p:grpSpPr>
+        <a:xfrm>
+          <a:off x="0" y="0"/>
+          <a:ext cx="0" cy="0"/>
+          <a:chOff x="0" y="0"/>
+          <a:chExt cx="0" cy="0"/>
+        </a:xfrm>
+      </p:grpSpPr>
+      <p:sp>
+        <p:nvSpPr>
+          <p:cNvPr id="2" name="Slide Image Placeholder 1"/>
+          <p:cNvSpPr>
+            <a:spLocks noGrp="1" noRot="1" noChangeAspect="1"/>
+          </p:cNvSpPr>
+          <p:nvPr>
+            <p:ph type="sldImg"/>
+          </p:nvPr>
+        </p:nvSpPr>
+        <p:spPr/>
+      </p:sp>
+      <p:sp>
+        <p:nvSpPr>
+          <p:cNvPr id="3" name="Notes Placeholder 2"/>
+          <p:cNvSpPr>
+            <a:spLocks noGrp="1"/>
+          </p:cNvSpPr>
+          <p:nvPr>
+            <p:ph type="body" idx="1"/>
+          </p:nvPr>
+        </p:nvSpPr>
+        <p:spPr/>
+        <p:txBody>
+          <a:bodyPr/>
+          <a:lstStyle/>
+          <a:p>
+            <a:r>
+              <a:rPr lang="en-US" dirty="0"/>
+              <a:t>Close on the decision: validate on production data, pilot one policy change, then monitor value realised in Apromore.</a:t>
+            </a:r>
+            <a:endParaRPr lang="en-US" dirty="0"/>
+          </a:p>
+        </p:txBody>
+      </p:sp>
+      <p:sp>
+        <p:nvSpPr>
+          <p:cNvPr id="4" name="Slide Number Placeholder 3"/>
+          <p:cNvSpPr>
+            <a:spLocks noGrp="1"/>
+          </p:cNvSpPr>
+          <p:nvPr>
+            <p:ph type="sldNum" sz="quarter" idx="10"/>
+          </p:nvPr>
+        </p:nvSpPr>
+        <p:spPr/>
+        <p:txBody>
+          <a:bodyPr/>
+          <a:lstStyle/>
+          <a:p>
+            <a:fld id="{F7021451-1387-4CA6-816F-3879F97B5CBC}" type="slidenum">
+              <a:rPr lang="en-US"/>
+              <a:t>11</a:t>
+            </a:fld>
+            <a:endParaRPr lang="en-US"/>
+          </a:p>
+        </p:txBody>
+      </p:sp>
+    </p:spTree>
+    <p:extLst>
+      <p:ext uri="{BB962C8B-B14F-4D97-AF65-F5344CB8AC3E}">
+        <p14:creationId xmlns:p14="http://schemas.microsoft.com/office/powerpoint/2010/main" val="1024086991"/>
+      </p:ext>
+    </p:extLst>
+  </p:cSld>
+  <p:clrMapOvr>
+    <a:masterClrMapping/>
+  </p:clrMapOvr>
+</p:notes>
+</file>
+
 <file path=ppt/notesSlides/notesSlide2.xml><?xml version="1.0" encoding="utf-8"?>
 <p:notes xmlns:a="http://schemas.openxmlformats.org/drawingml/2006/main" xmlns:r="http://schemas.openxmlformats.org/officeDocument/2006/relationships" xmlns:p="http://schemas.openxmlformats.org/presentationml/2006/main">
   <p:cSld>
@@ -1563,7 +1749,7 @@
           <a:p>
             <a:r>
               <a:rPr lang="en-US" dirty="0"/>
-              <a:t>Opportunity is the case. Trial orgs can't backdate history, so the 10-month dataset is simulated in the exact Salesforce shape; the extractor runs unchanged against the live org, as the band at the bottom shows.</a:t>
+              <a:t>This is the directly-follows map from the hosted dashboard. Fourteen percent conformance is the hook: the CRM shows the stage, process mining shows the path.</a:t>
             </a:r>
             <a:endParaRPr lang="en-US" dirty="0"/>
           </a:p>
@@ -1651,7 +1837,7 @@
           <a:p>
             <a:r>
               <a:rPr lang="en-US" dirty="0"/>
-              <a:t>This is the directly-follows map from the hosted dashboard. Fourteen percent conformance is the hook: the CRM shows the stage, process mining shows the path.</a:t>
+              <a:t>Orange marks the problem cohort in each chart. Win-rate gaps compare like with like, for example only deals that reached Negotiation for re-quotes.</a:t>
             </a:r>
             <a:endParaRPr lang="en-US" dirty="0"/>
           </a:p>
@@ -1739,7 +1925,7 @@
           <a:p>
             <a:r>
               <a:rPr lang="en-US" dirty="0"/>
-              <a:t>Orange marks the problem cohort in each chart. Win-rate gaps compare like with like, for example only deals that reached Negotiation for re-quotes.</a:t>
+              <a:t>This follows my value framing format: challenge, root cause, solution, then a multiplicative value chain. The customer owns the improvement assumption; we own the evidence. Root cause is labelled 'to capture' because it needs reason codes the CRM doesn't hold yet.</a:t>
             </a:r>
             <a:endParaRPr lang="en-US" dirty="0"/>
           </a:p>
@@ -1827,7 +2013,7 @@
           <a:p>
             <a:r>
               <a:rPr lang="en-US" dirty="0"/>
-              <a:t>This follows my value framing format: challenge, root cause, solution, then a multiplicative value chain. The customer owns the improvement assumption; we own the evidence. Root cause is labelled 'to capture' because it needs reason codes the CRM doesn't hold yet.</a:t>
+              <a:t>For the technical audience: the pipeline, the data model, and what it took to run it against a brand-new trial org.</a:t>
             </a:r>
             <a:endParaRPr lang="en-US" dirty="0"/>
           </a:p>
@@ -1915,7 +2101,7 @@
           <a:p>
             <a:r>
               <a:rPr lang="en-US" dirty="0"/>
-              <a:t>All of this is hosted. The repo has the pipeline, the seeding script and the README with the setup gotchas I hit on a new trial org.</a:t>
+              <a:t>Opportunity is the case. Trial orgs can't backdate history, so the 10-month dataset is simulated in the exact Salesforce shape; the extractor runs unchanged against the live org, as the band at the bottom shows.</a:t>
             </a:r>
             <a:endParaRPr lang="en-US" dirty="0"/>
           </a:p>
@@ -2003,7 +2189,7 @@
           <a:p>
             <a:r>
               <a:rPr lang="en-US" dirty="0"/>
-              <a:t>Close on the decision: validate on production data, pilot one policy change, then monitor value realised in Apromore.</a:t>
+              <a:t>Opportunity is the case notion. Leads join through the converted opportunity, tasks through WhatId. History tables write a row on any field change, so the transform keeps only real stage transitions.</a:t>
             </a:r>
             <a:endParaRPr lang="en-US" dirty="0"/>
           </a:p>
@@ -2027,6 +2213,94 @@
             <a:fld id="{F7021451-1387-4CA6-816F-3879F97B5CBC}" type="slidenum">
               <a:rPr lang="en-US"/>
               <a:t>8</a:t>
+            </a:fld>
+            <a:endParaRPr lang="en-US"/>
+          </a:p>
+        </p:txBody>
+      </p:sp>
+    </p:spTree>
+    <p:extLst>
+      <p:ext uri="{BB962C8B-B14F-4D97-AF65-F5344CB8AC3E}">
+        <p14:creationId xmlns:p14="http://schemas.microsoft.com/office/powerpoint/2010/main" val="1024086991"/>
+      </p:ext>
+    </p:extLst>
+  </p:cSld>
+  <p:clrMapOvr>
+    <a:masterClrMapping/>
+  </p:clrMapOvr>
+</p:notes>
+</file>
+
+<file path=ppt/notesSlides/notesSlide9.xml><?xml version="1.0" encoding="utf-8"?>
+<p:notes xmlns:a="http://schemas.openxmlformats.org/drawingml/2006/main" xmlns:r="http://schemas.openxmlformats.org/officeDocument/2006/relationships" xmlns:p="http://schemas.openxmlformats.org/presentationml/2006/main">
+  <p:cSld>
+    <p:spTree>
+      <p:nvGrpSpPr>
+        <p:cNvPr id="1" name=""/>
+        <p:cNvGrpSpPr/>
+        <p:nvPr/>
+      </p:nvGrpSpPr>
+      <p:grpSpPr>
+        <a:xfrm>
+          <a:off x="0" y="0"/>
+          <a:ext cx="0" cy="0"/>
+          <a:chOff x="0" y="0"/>
+          <a:chExt cx="0" cy="0"/>
+        </a:xfrm>
+      </p:grpSpPr>
+      <p:sp>
+        <p:nvSpPr>
+          <p:cNvPr id="2" name="Slide Image Placeholder 1"/>
+          <p:cNvSpPr>
+            <a:spLocks noGrp="1" noRot="1" noChangeAspect="1"/>
+          </p:cNvSpPr>
+          <p:nvPr>
+            <p:ph type="sldImg"/>
+          </p:nvPr>
+        </p:nvSpPr>
+        <p:spPr/>
+      </p:sp>
+      <p:sp>
+        <p:nvSpPr>
+          <p:cNvPr id="3" name="Notes Placeholder 2"/>
+          <p:cNvSpPr>
+            <a:spLocks noGrp="1"/>
+          </p:cNvSpPr>
+          <p:nvPr>
+            <p:ph type="body" idx="1"/>
+          </p:nvPr>
+        </p:nvSpPr>
+        <p:spPr/>
+        <p:txBody>
+          <a:bodyPr/>
+          <a:lstStyle/>
+          <a:p>
+            <a:r>
+              <a:rPr lang="en-US" dirty="0"/>
+              <a:t>These are the things that would trip up a customer's first technical session; each one is solved in the repo and written up in the README.</a:t>
+            </a:r>
+            <a:endParaRPr lang="en-US" dirty="0"/>
+          </a:p>
+        </p:txBody>
+      </p:sp>
+      <p:sp>
+        <p:nvSpPr>
+          <p:cNvPr id="4" name="Slide Number Placeholder 3"/>
+          <p:cNvSpPr>
+            <a:spLocks noGrp="1"/>
+          </p:cNvSpPr>
+          <p:nvPr>
+            <p:ph type="sldNum" sz="quarter" idx="10"/>
+          </p:nvPr>
+        </p:nvSpPr>
+        <p:spPr/>
+        <p:txBody>
+          <a:bodyPr/>
+          <a:lstStyle/>
+          <a:p>
+            <a:fld id="{F7021451-1387-4CA6-816F-3879F97B5CBC}" type="slidenum">
+              <a:rPr lang="en-US"/>
+              <a:t>9</a:t>
             </a:fld>
             <a:endParaRPr lang="en-US"/>
           </a:p>
@@ -2339,6 +2613,116 @@
 
 <file path=ppt/slideLayouts/slideLayout4.xml><?xml version="1.0" encoding="utf-8"?>
 <p:sldLayout xmlns:a="http://schemas.openxmlformats.org/drawingml/2006/main" xmlns:r="http://schemas.openxmlformats.org/officeDocument/2006/relationships" xmlns:p="http://schemas.openxmlformats.org/presentationml/2006/main" preserve="1">
+  <p:cSld name="SECTION_DARK">
+    <p:bg>
+      <p:bgPr>
+        <a:solidFill>
+          <a:schemeClr val="tx2"/>
+        </a:solidFill>
+      </p:bgPr>
+    </p:bg>
+    <p:spTree>
+      <p:nvGrpSpPr>
+        <p:cNvPr id="1" name=""/>
+        <p:cNvGrpSpPr/>
+        <p:nvPr/>
+      </p:nvGrpSpPr>
+      <p:grpSpPr>
+        <a:xfrm>
+          <a:off x="0" y="0"/>
+          <a:ext cx="0" cy="0"/>
+          <a:chOff x="0" y="0"/>
+          <a:chExt cx="0" cy="0"/>
+        </a:xfrm>
+      </p:grpSpPr>
+      <p:sp>
+        <p:nvSpPr>
+          <p:cNvPr id="2" name="Text 0"/>
+          <p:cNvSpPr/>
+          <p:nvPr>
+            <p:ph idx="100" type="title" hasCustomPrompt="1"/>
+          </p:nvPr>
+        </p:nvSpPr>
+        <p:spPr>
+          <a:xfrm>
+            <a:off x="731520" y="2377440"/>
+            <a:ext cx="7863840" cy="1097280"/>
+          </a:xfrm>
+          <a:prstGeom prst="rect">
+            <a:avLst/>
+          </a:prstGeom>
+          <a:noFill/>
+          <a:ln/>
+        </p:spPr>
+        <p:txBody>
+          <a:bodyPr wrap="square" rtlCol="0"/>
+          <a:lstStyle>
+            <a:lvl1pPr algn="l" indent="0" marL="0">
+              <a:buNone/>
+              <a:defRPr lang="en-US" sz="4400" b="1" dirty="0">
+                <a:solidFill>
+                  <a:schemeClr val="bg1"/>
+                </a:solidFill>
+              </a:defRPr>
+            </a:lvl1pPr>
+          </a:lstStyle>
+          <a:p>
+            <a:pPr algn="l" indent="0" marL="0">
+              <a:buNone/>
+            </a:pPr>
+            <a:endParaRPr lang="en-US" sz="4400" dirty="0"/>
+          </a:p>
+        </p:txBody>
+      </p:sp>
+      <p:sp>
+        <p:nvSpPr>
+          <p:cNvPr id="3" name="Text 0"/>
+          <p:cNvSpPr/>
+          <p:nvPr>
+            <p:ph idx="101" type="body" hasCustomPrompt="1"/>
+          </p:nvPr>
+        </p:nvSpPr>
+        <p:spPr>
+          <a:xfrm>
+            <a:off x="731520" y="3657600"/>
+            <a:ext cx="7315200" cy="914400"/>
+          </a:xfrm>
+          <a:prstGeom prst="rect">
+            <a:avLst/>
+          </a:prstGeom>
+          <a:noFill/>
+          <a:ln/>
+        </p:spPr>
+        <p:txBody>
+          <a:bodyPr wrap="square" rtlCol="0"/>
+          <a:lstStyle>
+            <a:lvl1pPr algn="l" indent="0" marL="0">
+              <a:buNone/>
+              <a:defRPr lang="en-US" sz="2000" dirty="0">
+                <a:solidFill>
+                  <a:schemeClr val="accent3"/>
+                </a:solidFill>
+              </a:defRPr>
+            </a:lvl1pPr>
+          </a:lstStyle>
+          <a:p>
+            <a:pPr algn="l" indent="0" marL="0">
+              <a:buNone/>
+            </a:pPr>
+            <a:endParaRPr lang="en-US" sz="2000" dirty="0"/>
+          </a:p>
+        </p:txBody>
+      </p:sp>
+    </p:spTree>
+  </p:cSld>
+  <p:clrMapOvr>
+    <a:masterClrMapping/>
+  </p:clrMapOvr>
+</p:sldLayout>
+</file>
+
+<file path=ppt/slideLayouts/slideLayout5.xml><?xml version="1.0" encoding="utf-8"?>
+<p:sldLayout xmlns:a="http://schemas.openxmlformats.org/drawingml/2006/main" xmlns:r="http://schemas.openxmlformats.org/officeDocument/2006/relationships" xmlns:p="http://schemas.openxmlformats.org/presentationml/2006/main" preserve="1">
   <p:cSld name="CLOSING_DARK">
     <p:bg>
       <p:bgPr>
@@ -2478,6 +2862,7 @@
     <p:sldLayoutId id="2147483650" r:id="rId2"/>
     <p:sldLayoutId id="2147483651" r:id="rId3"/>
     <p:sldLayoutId id="2147483652" r:id="rId4"/>
+    <p:sldLayoutId id="2147483653" r:id="rId5"/>
   </p:sldLayoutIdLst>
   <p:hf sldNum="0" hdr="0" ftr="0" dt="0"/>
   <p:txStyles>
@@ -2912,6 +3297,1194 @@
 </p:sld>
 </file>
 
+<file path=ppt/slides/slide10.xml><?xml version="1.0" encoding="utf-8"?>
+<p:sld xmlns:a="http://schemas.openxmlformats.org/drawingml/2006/main" xmlns:r="http://schemas.openxmlformats.org/officeDocument/2006/relationships" xmlns:p="http://schemas.openxmlformats.org/presentationml/2006/main">
+  <p:cSld name="Slide 10">
+    <p:spTree>
+      <p:nvGrpSpPr>
+        <p:cNvPr id="1" name=""/>
+        <p:cNvGrpSpPr/>
+        <p:nvPr/>
+      </p:nvGrpSpPr>
+      <p:grpSpPr>
+        <a:xfrm>
+          <a:off x="0" y="0"/>
+          <a:ext cx="0" cy="0"/>
+          <a:chOff x="0" y="0"/>
+          <a:chExt cx="0" cy="0"/>
+        </a:xfrm>
+      </p:grpSpPr>
+      <p:sp>
+        <p:nvSpPr>
+          <p:cNvPr id="2" name="Text 0"/>
+          <p:cNvSpPr/>
+          <p:nvPr>
+            <p:ph idx="100" type="title" hasCustomPrompt="1"/>
+          </p:nvPr>
+        </p:nvSpPr>
+        <p:spPr>
+          <a:xfrm>
+            <a:off x="548640" y="320040"/>
+            <a:ext cx="11064240" cy="822960"/>
+          </a:xfrm>
+          <a:prstGeom prst="rect">
+            <a:avLst/>
+          </a:prstGeom>
+          <a:noFill/>
+          <a:ln/>
+        </p:spPr>
+        <p:txBody>
+          <a:bodyPr wrap="square" lIns="0" tIns="0" rIns="0" bIns="0" rtlCol="0" anchor="ctr"/>
+          <a:lstStyle/>
+          <a:p>
+            <a:pPr algn="l" indent="0" marL="0">
+              <a:buNone/>
+            </a:pPr>
+            <a:r>
+              <a:rPr lang="en-US" sz="3000" b="1" dirty="0">
+                <a:solidFill>
+                  <a:schemeClr val="tx2"/>
+                </a:solidFill>
+              </a:rPr>
+              <a:t>Everything is live and open to inspect</a:t>
+            </a:r>
+            <a:endParaRPr lang="en-US" sz="3000" dirty="0"/>
+          </a:p>
+        </p:txBody>
+      </p:sp>
+      <p:sp>
+        <p:nvSpPr>
+          <p:cNvPr id="3" name="Proof 1"/>
+          <p:cNvSpPr/>
+          <p:nvPr/>
+        </p:nvSpPr>
+        <p:spPr>
+          <a:xfrm>
+            <a:off x="548640" y="1417320"/>
+            <a:ext cx="6035040" cy="960120"/>
+          </a:xfrm>
+          <a:prstGeom prst="roundRect">
+            <a:avLst>
+              <a:gd name="adj" fmla="val 11429"/>
+            </a:avLst>
+          </a:prstGeom>
+          <a:solidFill>
+            <a:schemeClr val="bg2"/>
+          </a:solidFill>
+          <a:ln/>
+        </p:spPr>
+      </p:sp>
+      <p:sp>
+        <p:nvSpPr>
+          <p:cNvPr id="4" name="Proof 1 marker"/>
+          <p:cNvSpPr/>
+          <p:nvPr/>
+        </p:nvSpPr>
+        <p:spPr>
+          <a:xfrm>
+            <a:off x="749808" y="1691640"/>
+            <a:ext cx="411480" cy="411480"/>
+          </a:xfrm>
+          <a:prstGeom prst="ellipse">
+            <a:avLst/>
+          </a:prstGeom>
+          <a:solidFill>
+            <a:schemeClr val="accent1"/>
+          </a:solidFill>
+          <a:ln/>
+        </p:spPr>
+      </p:sp>
+      <p:sp>
+        <p:nvSpPr>
+          <p:cNvPr id="5" name="Proof 1 glyph"/>
+          <p:cNvSpPr txBox="1"/>
+          <p:nvPr/>
+        </p:nvSpPr>
+        <p:spPr>
+          <a:xfrm>
+            <a:off x="749808" y="1691640"/>
+            <a:ext cx="411480" cy="411480"/>
+          </a:xfrm>
+          <a:prstGeom prst="rect">
+            <a:avLst/>
+          </a:prstGeom>
+          <a:noFill/>
+          <a:ln/>
+        </p:spPr>
+        <p:txBody>
+          <a:bodyPr wrap="square" lIns="0" tIns="0" rIns="0" bIns="0" rtlCol="0" anchor="ctr"/>
+          <a:lstStyle/>
+          <a:p>
+            <a:pPr algn="ctr" indent="0" marL="0">
+              <a:buNone/>
+            </a:pPr>
+            <a:r>
+              <a:rPr lang="en-US" sz="1600" b="1" dirty="0">
+                <a:solidFill>
+                  <a:schemeClr val="bg1"/>
+                </a:solidFill>
+              </a:rPr>
+              <a:t>→</a:t>
+            </a:r>
+            <a:endParaRPr lang="en-US" sz="1600" dirty="0"/>
+          </a:p>
+        </p:txBody>
+      </p:sp>
+      <p:sp>
+        <p:nvSpPr>
+          <p:cNvPr id="6" name="Proof 1 label"/>
+          <p:cNvSpPr txBox="1"/>
+          <p:nvPr/>
+        </p:nvSpPr>
+        <p:spPr>
+          <a:xfrm>
+            <a:off x="1325880" y="1545336"/>
+            <a:ext cx="5120640" cy="347472"/>
+          </a:xfrm>
+          <a:prstGeom prst="rect">
+            <a:avLst/>
+          </a:prstGeom>
+          <a:noFill/>
+          <a:ln/>
+        </p:spPr>
+        <p:txBody>
+          <a:bodyPr wrap="square" lIns="0" tIns="0" rIns="0" bIns="0" rtlCol="0" anchor="t"/>
+          <a:lstStyle/>
+          <a:p>
+            <a:pPr indent="0" marL="0">
+              <a:buNone/>
+            </a:pPr>
+            <a:r>
+              <a:rPr lang="en-US" sz="1600" b="1" dirty="0">
+                <a:solidFill>
+                  <a:schemeClr val="tx2"/>
+                </a:solidFill>
+              </a:rPr>
+              <a:t>Process dashboard</a:t>
+            </a:r>
+            <a:endParaRPr lang="en-US" sz="1600" dirty="0"/>
+          </a:p>
+        </p:txBody>
+      </p:sp>
+      <p:sp>
+        <p:nvSpPr>
+          <p:cNvPr id="7" name="Proof 1 link"/>
+          <p:cNvSpPr txBox="1"/>
+          <p:nvPr/>
+        </p:nvSpPr>
+        <p:spPr>
+          <a:xfrm>
+            <a:off x="1325880" y="1911096"/>
+            <a:ext cx="5120640" cy="347472"/>
+          </a:xfrm>
+          <a:prstGeom prst="rect">
+            <a:avLst/>
+          </a:prstGeom>
+          <a:noFill/>
+          <a:ln/>
+        </p:spPr>
+        <p:txBody>
+          <a:bodyPr wrap="square" lIns="0" tIns="0" rIns="0" bIns="0" rtlCol="0" anchor="t"/>
+          <a:lstStyle/>
+          <a:p>
+            <a:pPr indent="0" marL="0">
+              <a:buNone/>
+            </a:pPr>
+            <a:r>
+              <a:rPr lang="en-US" sz="1400" u="sng" dirty="0">
+                <a:solidFill>
+                  <a:schemeClr val="accent6"/>
+                </a:solidFill>
+                <a:hlinkClick r:id="rId1" invalidUrl="" action="" tgtFrame="" tooltip="" history="1" highlightClick="0" endSnd="0">
+                  <a:extLst>
+                    <a:ext uri="{A12FA001-AC4F-418D-AE19-62706E023703}">
+                      <ahyp:hlinkClr xmlns:ahyp="http://schemas.microsoft.com/office/drawing/2018/hyperlinkcolor" val="tx"/>
+                    </a:ext>
+                  </a:extLst>
+                </a:hlinkClick>
+              </a:rPr>
+              <a:t>salesforce-process-intelligence.vercel.app</a:t>
+            </a:r>
+            <a:endParaRPr lang="en-US" sz="1400" dirty="0"/>
+          </a:p>
+        </p:txBody>
+      </p:sp>
+      <p:sp>
+        <p:nvSpPr>
+          <p:cNvPr id="8" name="Proof 2"/>
+          <p:cNvSpPr/>
+          <p:nvPr/>
+        </p:nvSpPr>
+        <p:spPr>
+          <a:xfrm>
+            <a:off x="548640" y="2532888"/>
+            <a:ext cx="6035040" cy="960120"/>
+          </a:xfrm>
+          <a:prstGeom prst="roundRect">
+            <a:avLst>
+              <a:gd name="adj" fmla="val 11429"/>
+            </a:avLst>
+          </a:prstGeom>
+          <a:solidFill>
+            <a:schemeClr val="bg2"/>
+          </a:solidFill>
+          <a:ln/>
+        </p:spPr>
+      </p:sp>
+      <p:sp>
+        <p:nvSpPr>
+          <p:cNvPr id="9" name="Proof 2 marker"/>
+          <p:cNvSpPr/>
+          <p:nvPr/>
+        </p:nvSpPr>
+        <p:spPr>
+          <a:xfrm>
+            <a:off x="749808" y="2807208"/>
+            <a:ext cx="411480" cy="411480"/>
+          </a:xfrm>
+          <a:prstGeom prst="ellipse">
+            <a:avLst/>
+          </a:prstGeom>
+          <a:solidFill>
+            <a:schemeClr val="accent1"/>
+          </a:solidFill>
+          <a:ln/>
+        </p:spPr>
+      </p:sp>
+      <p:sp>
+        <p:nvSpPr>
+          <p:cNvPr id="10" name="Proof 2 glyph"/>
+          <p:cNvSpPr txBox="1"/>
+          <p:nvPr/>
+        </p:nvSpPr>
+        <p:spPr>
+          <a:xfrm>
+            <a:off x="749808" y="2807208"/>
+            <a:ext cx="411480" cy="411480"/>
+          </a:xfrm>
+          <a:prstGeom prst="rect">
+            <a:avLst/>
+          </a:prstGeom>
+          <a:noFill/>
+          <a:ln/>
+        </p:spPr>
+        <p:txBody>
+          <a:bodyPr wrap="square" lIns="0" tIns="0" rIns="0" bIns="0" rtlCol="0" anchor="ctr"/>
+          <a:lstStyle/>
+          <a:p>
+            <a:pPr algn="ctr" indent="0" marL="0">
+              <a:buNone/>
+            </a:pPr>
+            <a:r>
+              <a:rPr lang="en-US" sz="1600" b="1" dirty="0">
+                <a:solidFill>
+                  <a:schemeClr val="bg1"/>
+                </a:solidFill>
+              </a:rPr>
+              <a:t>→</a:t>
+            </a:r>
+            <a:endParaRPr lang="en-US" sz="1600" dirty="0"/>
+          </a:p>
+        </p:txBody>
+      </p:sp>
+      <p:sp>
+        <p:nvSpPr>
+          <p:cNvPr id="11" name="Proof 2 label"/>
+          <p:cNvSpPr txBox="1"/>
+          <p:nvPr/>
+        </p:nvSpPr>
+        <p:spPr>
+          <a:xfrm>
+            <a:off x="1325880" y="2660904"/>
+            <a:ext cx="5120640" cy="347472"/>
+          </a:xfrm>
+          <a:prstGeom prst="rect">
+            <a:avLst/>
+          </a:prstGeom>
+          <a:noFill/>
+          <a:ln/>
+        </p:spPr>
+        <p:txBody>
+          <a:bodyPr wrap="square" lIns="0" tIns="0" rIns="0" bIns="0" rtlCol="0" anchor="t"/>
+          <a:lstStyle/>
+          <a:p>
+            <a:pPr indent="0" marL="0">
+              <a:buNone/>
+            </a:pPr>
+            <a:r>
+              <a:rPr lang="en-US" sz="1600" b="1" dirty="0">
+                <a:solidFill>
+                  <a:schemeClr val="tx2"/>
+                </a:solidFill>
+              </a:rPr>
+              <a:t>Value case one-pager</a:t>
+            </a:r>
+            <a:endParaRPr lang="en-US" sz="1600" dirty="0"/>
+          </a:p>
+        </p:txBody>
+      </p:sp>
+      <p:sp>
+        <p:nvSpPr>
+          <p:cNvPr id="12" name="Proof 2 link"/>
+          <p:cNvSpPr txBox="1"/>
+          <p:nvPr/>
+        </p:nvSpPr>
+        <p:spPr>
+          <a:xfrm>
+            <a:off x="1325880" y="3026664"/>
+            <a:ext cx="5120640" cy="347472"/>
+          </a:xfrm>
+          <a:prstGeom prst="rect">
+            <a:avLst/>
+          </a:prstGeom>
+          <a:noFill/>
+          <a:ln/>
+        </p:spPr>
+        <p:txBody>
+          <a:bodyPr wrap="square" lIns="0" tIns="0" rIns="0" bIns="0" rtlCol="0" anchor="t"/>
+          <a:lstStyle/>
+          <a:p>
+            <a:pPr indent="0" marL="0">
+              <a:buNone/>
+            </a:pPr>
+            <a:r>
+              <a:rPr lang="en-US" sz="1400" u="sng" dirty="0">
+                <a:solidFill>
+                  <a:schemeClr val="accent6"/>
+                </a:solidFill>
+                <a:hlinkClick r:id="rId2" invalidUrl="" action="" tgtFrame="" tooltip="" history="1" highlightClick="0" endSnd="0">
+                  <a:extLst>
+                    <a:ext uri="{A12FA001-AC4F-418D-AE19-62706E023703}">
+                      <ahyp:hlinkClr xmlns:ahyp="http://schemas.microsoft.com/office/drawing/2018/hyperlinkcolor" val="tx"/>
+                    </a:ext>
+                  </a:extLst>
+                </a:hlinkClick>
+              </a:rPr>
+              <a:t>salesforce-process-intelligence.vercel.app/value-case.html</a:t>
+            </a:r>
+            <a:endParaRPr lang="en-US" sz="1400" dirty="0"/>
+          </a:p>
+        </p:txBody>
+      </p:sp>
+      <p:sp>
+        <p:nvSpPr>
+          <p:cNvPr id="13" name="Proof 3"/>
+          <p:cNvSpPr/>
+          <p:nvPr/>
+        </p:nvSpPr>
+        <p:spPr>
+          <a:xfrm>
+            <a:off x="548640" y="3648456"/>
+            <a:ext cx="6035040" cy="960120"/>
+          </a:xfrm>
+          <a:prstGeom prst="roundRect">
+            <a:avLst>
+              <a:gd name="adj" fmla="val 11429"/>
+            </a:avLst>
+          </a:prstGeom>
+          <a:solidFill>
+            <a:schemeClr val="bg2"/>
+          </a:solidFill>
+          <a:ln/>
+        </p:spPr>
+      </p:sp>
+      <p:sp>
+        <p:nvSpPr>
+          <p:cNvPr id="14" name="Proof 3 marker"/>
+          <p:cNvSpPr/>
+          <p:nvPr/>
+        </p:nvSpPr>
+        <p:spPr>
+          <a:xfrm>
+            <a:off x="749808" y="3922776"/>
+            <a:ext cx="411480" cy="411480"/>
+          </a:xfrm>
+          <a:prstGeom prst="ellipse">
+            <a:avLst/>
+          </a:prstGeom>
+          <a:solidFill>
+            <a:schemeClr val="accent1"/>
+          </a:solidFill>
+          <a:ln/>
+        </p:spPr>
+      </p:sp>
+      <p:sp>
+        <p:nvSpPr>
+          <p:cNvPr id="15" name="Proof 3 glyph"/>
+          <p:cNvSpPr txBox="1"/>
+          <p:nvPr/>
+        </p:nvSpPr>
+        <p:spPr>
+          <a:xfrm>
+            <a:off x="749808" y="3922776"/>
+            <a:ext cx="411480" cy="411480"/>
+          </a:xfrm>
+          <a:prstGeom prst="rect">
+            <a:avLst/>
+          </a:prstGeom>
+          <a:noFill/>
+          <a:ln/>
+        </p:spPr>
+        <p:txBody>
+          <a:bodyPr wrap="square" lIns="0" tIns="0" rIns="0" bIns="0" rtlCol="0" anchor="ctr"/>
+          <a:lstStyle/>
+          <a:p>
+            <a:pPr algn="ctr" indent="0" marL="0">
+              <a:buNone/>
+            </a:pPr>
+            <a:r>
+              <a:rPr lang="en-US" sz="1600" b="1" dirty="0">
+                <a:solidFill>
+                  <a:schemeClr val="bg1"/>
+                </a:solidFill>
+              </a:rPr>
+              <a:t>→</a:t>
+            </a:r>
+            <a:endParaRPr lang="en-US" sz="1600" dirty="0"/>
+          </a:p>
+        </p:txBody>
+      </p:sp>
+      <p:sp>
+        <p:nvSpPr>
+          <p:cNvPr id="16" name="Proof 3 label"/>
+          <p:cNvSpPr txBox="1"/>
+          <p:nvPr/>
+        </p:nvSpPr>
+        <p:spPr>
+          <a:xfrm>
+            <a:off x="1325880" y="3776472"/>
+            <a:ext cx="5120640" cy="347472"/>
+          </a:xfrm>
+          <a:prstGeom prst="rect">
+            <a:avLst/>
+          </a:prstGeom>
+          <a:noFill/>
+          <a:ln/>
+        </p:spPr>
+        <p:txBody>
+          <a:bodyPr wrap="square" lIns="0" tIns="0" rIns="0" bIns="0" rtlCol="0" anchor="t"/>
+          <a:lstStyle/>
+          <a:p>
+            <a:pPr indent="0" marL="0">
+              <a:buNone/>
+            </a:pPr>
+            <a:r>
+              <a:rPr lang="en-US" sz="1600" b="1" dirty="0">
+                <a:solidFill>
+                  <a:schemeClr val="tx2"/>
+                </a:solidFill>
+              </a:rPr>
+              <a:t>Live Salesforce extract</a:t>
+            </a:r>
+            <a:endParaRPr lang="en-US" sz="1600" dirty="0"/>
+          </a:p>
+        </p:txBody>
+      </p:sp>
+      <p:sp>
+        <p:nvSpPr>
+          <p:cNvPr id="17" name="Proof 3 link"/>
+          <p:cNvSpPr txBox="1"/>
+          <p:nvPr/>
+        </p:nvSpPr>
+        <p:spPr>
+          <a:xfrm>
+            <a:off x="1325880" y="4142232"/>
+            <a:ext cx="5120640" cy="347472"/>
+          </a:xfrm>
+          <a:prstGeom prst="rect">
+            <a:avLst/>
+          </a:prstGeom>
+          <a:noFill/>
+          <a:ln/>
+        </p:spPr>
+        <p:txBody>
+          <a:bodyPr wrap="square" lIns="0" tIns="0" rIns="0" bIns="0" rtlCol="0" anchor="t"/>
+          <a:lstStyle/>
+          <a:p>
+            <a:pPr indent="0" marL="0">
+              <a:buNone/>
+            </a:pPr>
+            <a:r>
+              <a:rPr lang="en-US" sz="1400" u="sng" dirty="0">
+                <a:solidFill>
+                  <a:schemeClr val="accent6"/>
+                </a:solidFill>
+                <a:hlinkClick r:id="rId3" invalidUrl="" action="" tgtFrame="" tooltip="" history="1" highlightClick="0" endSnd="0">
+                  <a:extLst>
+                    <a:ext uri="{A12FA001-AC4F-418D-AE19-62706E023703}">
+                      <ahyp:hlinkClr xmlns:ahyp="http://schemas.microsoft.com/office/drawing/2018/hyperlinkcolor" val="tx"/>
+                    </a:ext>
+                  </a:extLst>
+                </a:hlinkClick>
+              </a:rPr>
+              <a:t>salesforce-process-intelligence.vercel.app/live.html</a:t>
+            </a:r>
+            <a:endParaRPr lang="en-US" sz="1400" dirty="0"/>
+          </a:p>
+        </p:txBody>
+      </p:sp>
+      <p:sp>
+        <p:nvSpPr>
+          <p:cNvPr id="18" name="Proof 4"/>
+          <p:cNvSpPr/>
+          <p:nvPr/>
+        </p:nvSpPr>
+        <p:spPr>
+          <a:xfrm>
+            <a:off x="548640" y="4764024"/>
+            <a:ext cx="6035040" cy="960120"/>
+          </a:xfrm>
+          <a:prstGeom prst="roundRect">
+            <a:avLst>
+              <a:gd name="adj" fmla="val 11429"/>
+            </a:avLst>
+          </a:prstGeom>
+          <a:solidFill>
+            <a:schemeClr val="bg2"/>
+          </a:solidFill>
+          <a:ln/>
+        </p:spPr>
+      </p:sp>
+      <p:sp>
+        <p:nvSpPr>
+          <p:cNvPr id="19" name="Proof 4 marker"/>
+          <p:cNvSpPr/>
+          <p:nvPr/>
+        </p:nvSpPr>
+        <p:spPr>
+          <a:xfrm>
+            <a:off x="749808" y="5038344"/>
+            <a:ext cx="411480" cy="411480"/>
+          </a:xfrm>
+          <a:prstGeom prst="ellipse">
+            <a:avLst/>
+          </a:prstGeom>
+          <a:solidFill>
+            <a:schemeClr val="accent1"/>
+          </a:solidFill>
+          <a:ln/>
+        </p:spPr>
+      </p:sp>
+      <p:sp>
+        <p:nvSpPr>
+          <p:cNvPr id="20" name="Proof 4 glyph"/>
+          <p:cNvSpPr txBox="1"/>
+          <p:nvPr/>
+        </p:nvSpPr>
+        <p:spPr>
+          <a:xfrm>
+            <a:off x="749808" y="5038344"/>
+            <a:ext cx="411480" cy="411480"/>
+          </a:xfrm>
+          <a:prstGeom prst="rect">
+            <a:avLst/>
+          </a:prstGeom>
+          <a:noFill/>
+          <a:ln/>
+        </p:spPr>
+        <p:txBody>
+          <a:bodyPr wrap="square" lIns="0" tIns="0" rIns="0" bIns="0" rtlCol="0" anchor="ctr"/>
+          <a:lstStyle/>
+          <a:p>
+            <a:pPr algn="ctr" indent="0" marL="0">
+              <a:buNone/>
+            </a:pPr>
+            <a:r>
+              <a:rPr lang="en-US" sz="1600" b="1" dirty="0">
+                <a:solidFill>
+                  <a:schemeClr val="bg1"/>
+                </a:solidFill>
+              </a:rPr>
+              <a:t>→</a:t>
+            </a:r>
+            <a:endParaRPr lang="en-US" sz="1600" dirty="0"/>
+          </a:p>
+        </p:txBody>
+      </p:sp>
+      <p:sp>
+        <p:nvSpPr>
+          <p:cNvPr id="21" name="Proof 4 label"/>
+          <p:cNvSpPr txBox="1"/>
+          <p:nvPr/>
+        </p:nvSpPr>
+        <p:spPr>
+          <a:xfrm>
+            <a:off x="1325880" y="4892040"/>
+            <a:ext cx="5120640" cy="347472"/>
+          </a:xfrm>
+          <a:prstGeom prst="rect">
+            <a:avLst/>
+          </a:prstGeom>
+          <a:noFill/>
+          <a:ln/>
+        </p:spPr>
+        <p:txBody>
+          <a:bodyPr wrap="square" lIns="0" tIns="0" rIns="0" bIns="0" rtlCol="0" anchor="t"/>
+          <a:lstStyle/>
+          <a:p>
+            <a:pPr indent="0" marL="0">
+              <a:buNone/>
+            </a:pPr>
+            <a:r>
+              <a:rPr lang="en-US" sz="1600" b="1" dirty="0">
+                <a:solidFill>
+                  <a:schemeClr val="tx2"/>
+                </a:solidFill>
+              </a:rPr>
+              <a:t>Source code and event logs</a:t>
+            </a:r>
+            <a:endParaRPr lang="en-US" sz="1600" dirty="0"/>
+          </a:p>
+        </p:txBody>
+      </p:sp>
+      <p:sp>
+        <p:nvSpPr>
+          <p:cNvPr id="22" name="Proof 4 link"/>
+          <p:cNvSpPr txBox="1"/>
+          <p:nvPr/>
+        </p:nvSpPr>
+        <p:spPr>
+          <a:xfrm>
+            <a:off x="1325880" y="5257800"/>
+            <a:ext cx="5120640" cy="347472"/>
+          </a:xfrm>
+          <a:prstGeom prst="rect">
+            <a:avLst/>
+          </a:prstGeom>
+          <a:noFill/>
+          <a:ln/>
+        </p:spPr>
+        <p:txBody>
+          <a:bodyPr wrap="square" lIns="0" tIns="0" rIns="0" bIns="0" rtlCol="0" anchor="t"/>
+          <a:lstStyle/>
+          <a:p>
+            <a:pPr indent="0" marL="0">
+              <a:buNone/>
+            </a:pPr>
+            <a:r>
+              <a:rPr lang="en-US" sz="1400" u="sng" dirty="0">
+                <a:solidFill>
+                  <a:schemeClr val="accent6"/>
+                </a:solidFill>
+                <a:hlinkClick r:id="rId4" invalidUrl="" action="" tgtFrame="" tooltip="" history="1" highlightClick="0" endSnd="0">
+                  <a:extLst>
+                    <a:ext uri="{A12FA001-AC4F-418D-AE19-62706E023703}">
+                      <ahyp:hlinkClr xmlns:ahyp="http://schemas.microsoft.com/office/drawing/2018/hyperlinkcolor" val="tx"/>
+                    </a:ext>
+                  </a:extLst>
+                </a:hlinkClick>
+              </a:rPr>
+              <a:t>github.com/ch-lukas/salesforce-process-intelligence</a:t>
+            </a:r>
+            <a:endParaRPr lang="en-US" sz="1400" dirty="0"/>
+          </a:p>
+        </p:txBody>
+      </p:sp>
+      <p:sp>
+        <p:nvSpPr>
+          <p:cNvPr id="23" name="Screenshot frame"/>
+          <p:cNvSpPr/>
+          <p:nvPr/>
+        </p:nvSpPr>
+        <p:spPr>
+          <a:xfrm>
+            <a:off x="6903720" y="1371600"/>
+            <a:ext cx="4802925" cy="4434840"/>
+          </a:xfrm>
+          <a:prstGeom prst="rect">
+            <a:avLst/>
+          </a:prstGeom>
+          <a:solidFill>
+            <a:schemeClr val="bg1"/>
+          </a:solidFill>
+          <a:ln w="12700">
+            <a:solidFill>
+              <a:schemeClr val="accent3"/>
+            </a:solidFill>
+            <a:prstDash val="solid"/>
+          </a:ln>
+        </p:spPr>
+      </p:sp>
+      <p:pic>
+        <p:nvPicPr>
+          <p:cNvPr id="24" name="Value case screenshot" descr="Value case one-pager on the hosted site">    </p:cNvPr>
+          <p:cNvPicPr>
+            <a:picLocks noChangeAspect="1"/>
+          </p:cNvPicPr>
+          <p:nvPr/>
+        </p:nvPicPr>
+        <p:blipFill>
+          <a:blip r:embed="rId5"/>
+          <a:stretch>
+            <a:fillRect/>
+          </a:stretch>
+        </p:blipFill>
+        <p:spPr>
+          <a:xfrm>
+            <a:off x="6949440" y="1417320"/>
+            <a:ext cx="4711485" cy="4343400"/>
+          </a:xfrm>
+          <a:prstGeom prst="rect">
+            <a:avLst/>
+          </a:prstGeom>
+        </p:spPr>
+      </p:pic>
+      <p:sp>
+        <p:nvSpPr>
+          <p:cNvPr id="25" name="Slide Number Placeholder 0"/>
+          <p:cNvSpPr>
+            <a:spLocks noGrp="1"/>
+          </p:cNvSpPr>
+          <p:nvPr>
+            <p:ph type="sldNum" sz="quarter" idx="4294967295"/>
+          </p:nvPr>
+        </p:nvSpPr>
+        <p:spPr>
+          <a:xfrm>
+            <a:off x="11155680" y="6400800"/>
+            <a:ext cx="457200" cy="274320"/>
+          </a:xfrm>
+          <a:prstGeom prst="rect">
+            <a:avLst/>
+          </a:prstGeom>
+          <a:extLst>
+            <a:ext uri="{C572A759-6A51-4108-AA02-DFA0A04FC94B}">
+              <ma14:wrappingTextBoxFlag xmlns:ma14="http://schemas.microsoft.com/office/mac/drawingml/2011/main" val="0"/>
+            </a:ext>
+          </a:extLst>
+        </p:spPr>
+        <p:txBody>
+          <a:bodyPr/>
+          <a:lstStyle>
+            <a:lvl1pPr>
+              <a:defRPr sz="1000">
+                <a:solidFill>
+                  <a:schemeClr val="accent6"/>
+                </a:solidFill>
+              </a:defRPr>
+            </a:lvl1pPr>
+          </a:lstStyle>
+          <a:p>
+            <a:pPr algn="r"/>
+            <a:fld id="{F7021451-1387-4CA6-816F-3879F97B5CBC}" type="slidenum">
+              <a:rPr b="0" lang="en-US"/>
+              <a:t>10</a:t>
+            </a:fld>
+            <a:endParaRPr lang="en-US"/>
+          </a:p>
+        </p:txBody>
+      </p:sp>
+    </p:spTree>
+  </p:cSld>
+  <p:clrMapOvr>
+    <a:masterClrMapping/>
+  </p:clrMapOvr>
+</p:sld>
+</file>
+
+<file path=ppt/slides/slide11.xml><?xml version="1.0" encoding="utf-8"?>
+<p:sld xmlns:a="http://schemas.openxmlformats.org/drawingml/2006/main" xmlns:r="http://schemas.openxmlformats.org/officeDocument/2006/relationships" xmlns:p="http://schemas.openxmlformats.org/presentationml/2006/main">
+  <p:cSld name="Slide 11">
+    <p:spTree>
+      <p:nvGrpSpPr>
+        <p:cNvPr id="1" name=""/>
+        <p:cNvGrpSpPr/>
+        <p:nvPr/>
+      </p:nvGrpSpPr>
+      <p:grpSpPr>
+        <a:xfrm>
+          <a:off x="0" y="0"/>
+          <a:ext cx="0" cy="0"/>
+          <a:chOff x="0" y="0"/>
+          <a:chExt cx="0" cy="0"/>
+        </a:xfrm>
+      </p:grpSpPr>
+      <p:sp>
+        <p:nvSpPr>
+          <p:cNvPr id="2" name="Decor circle large"/>
+          <p:cNvSpPr/>
+          <p:nvPr/>
+        </p:nvSpPr>
+        <p:spPr>
+          <a:xfrm>
+            <a:off x="9326880" y="4023360"/>
+            <a:ext cx="4937760" cy="4937760"/>
+          </a:xfrm>
+          <a:prstGeom prst="ellipse">
+            <a:avLst/>
+          </a:prstGeom>
+          <a:solidFill>
+            <a:schemeClr val="accent1">
+              <a:alpha val="25000"/>
+            </a:schemeClr>
+          </a:solidFill>
+          <a:ln/>
+        </p:spPr>
+      </p:sp>
+      <p:sp>
+        <p:nvSpPr>
+          <p:cNvPr id="3" name="Text 0"/>
+          <p:cNvSpPr/>
+          <p:nvPr>
+            <p:ph idx="100" type="title" hasCustomPrompt="1"/>
+          </p:nvPr>
+        </p:nvSpPr>
+        <p:spPr>
+          <a:xfrm>
+            <a:off x="731520" y="548640"/>
+            <a:ext cx="10698480" cy="914400"/>
+          </a:xfrm>
+          <a:prstGeom prst="rect">
+            <a:avLst/>
+          </a:prstGeom>
+          <a:noFill/>
+          <a:ln/>
+        </p:spPr>
+        <p:txBody>
+          <a:bodyPr wrap="square" lIns="0" tIns="0" rIns="0" bIns="0" rtlCol="0" anchor="ctr"/>
+          <a:lstStyle/>
+          <a:p>
+            <a:pPr algn="l" indent="0" marL="0">
+              <a:buNone/>
+            </a:pPr>
+            <a:r>
+              <a:rPr lang="en-US" sz="3600" b="1" dirty="0">
+                <a:solidFill>
+                  <a:schemeClr val="bg1"/>
+                </a:solidFill>
+              </a:rPr>
+              <a:t>Turning the finding into a decision</a:t>
+            </a:r>
+            <a:endParaRPr lang="en-US" sz="3600" dirty="0"/>
+          </a:p>
+        </p:txBody>
+      </p:sp>
+      <p:sp>
+        <p:nvSpPr>
+          <p:cNvPr id="4" name="Next 1 card"/>
+          <p:cNvSpPr/>
+          <p:nvPr/>
+        </p:nvSpPr>
+        <p:spPr>
+          <a:xfrm>
+            <a:off x="731520" y="1828800"/>
+            <a:ext cx="3337560" cy="2286000"/>
+          </a:xfrm>
+          <a:prstGeom prst="roundRect">
+            <a:avLst>
+              <a:gd name="adj" fmla="val 4800"/>
+            </a:avLst>
+          </a:prstGeom>
+          <a:solidFill>
+            <a:schemeClr val="accent6"/>
+          </a:solidFill>
+          <a:ln/>
+        </p:spPr>
+      </p:sp>
+      <p:sp>
+        <p:nvSpPr>
+          <p:cNvPr id="5" name="Next 1 heading"/>
+          <p:cNvSpPr txBox="1"/>
+          <p:nvPr/>
+        </p:nvSpPr>
+        <p:spPr>
+          <a:xfrm>
+            <a:off x="1005840" y="2103120"/>
+            <a:ext cx="2788920" cy="457200"/>
+          </a:xfrm>
+          <a:prstGeom prst="rect">
+            <a:avLst/>
+          </a:prstGeom>
+          <a:noFill/>
+          <a:ln/>
+        </p:spPr>
+        <p:txBody>
+          <a:bodyPr wrap="square" lIns="0" tIns="0" rIns="0" bIns="0" rtlCol="0" anchor="t"/>
+          <a:lstStyle/>
+          <a:p>
+            <a:pPr indent="0" marL="0">
+              <a:buNone/>
+            </a:pPr>
+            <a:r>
+              <a:rPr lang="en-US" sz="2200" b="1" dirty="0">
+                <a:solidFill>
+                  <a:schemeClr val="accent3"/>
+                </a:solidFill>
+              </a:rPr>
+              <a:t>Validate</a:t>
+            </a:r>
+            <a:endParaRPr lang="en-US" sz="2200" dirty="0"/>
+          </a:p>
+        </p:txBody>
+      </p:sp>
+      <p:sp>
+        <p:nvSpPr>
+          <p:cNvPr id="6" name="Next 1 body"/>
+          <p:cNvSpPr txBox="1"/>
+          <p:nvPr/>
+        </p:nvSpPr>
+        <p:spPr>
+          <a:xfrm>
+            <a:off x="1005840" y="2697480"/>
+            <a:ext cx="2788920" cy="1280160"/>
+          </a:xfrm>
+          <a:prstGeom prst="rect">
+            <a:avLst/>
+          </a:prstGeom>
+          <a:noFill/>
+          <a:ln/>
+        </p:spPr>
+        <p:txBody>
+          <a:bodyPr wrap="square" lIns="0" tIns="0" rIns="0" bIns="0" rtlCol="0" anchor="t"/>
+          <a:lstStyle/>
+          <a:p>
+            <a:pPr indent="0" marL="0">
+              <a:buNone/>
+            </a:pPr>
+            <a:r>
+              <a:rPr lang="en-US" sz="1600" dirty="0">
+                <a:solidFill>
+                  <a:schemeClr val="bg1"/>
+                </a:solidFill>
+              </a:rPr>
+              <a:t>Run the same extract on the production org and confirm approval waits and re-quote rates with RevOps.</a:t>
+            </a:r>
+            <a:endParaRPr lang="en-US" sz="1600" dirty="0"/>
+          </a:p>
+        </p:txBody>
+      </p:sp>
+      <p:sp>
+        <p:nvSpPr>
+          <p:cNvPr id="7" name="Next 2 card"/>
+          <p:cNvSpPr/>
+          <p:nvPr/>
+        </p:nvSpPr>
+        <p:spPr>
+          <a:xfrm>
+            <a:off x="4343400" y="1828800"/>
+            <a:ext cx="3337560" cy="2286000"/>
+          </a:xfrm>
+          <a:prstGeom prst="roundRect">
+            <a:avLst>
+              <a:gd name="adj" fmla="val 4800"/>
+            </a:avLst>
+          </a:prstGeom>
+          <a:solidFill>
+            <a:schemeClr val="accent6"/>
+          </a:solidFill>
+          <a:ln/>
+        </p:spPr>
+      </p:sp>
+      <p:sp>
+        <p:nvSpPr>
+          <p:cNvPr id="8" name="Next 2 heading"/>
+          <p:cNvSpPr txBox="1"/>
+          <p:nvPr/>
+        </p:nvSpPr>
+        <p:spPr>
+          <a:xfrm>
+            <a:off x="4617720" y="2103120"/>
+            <a:ext cx="2788920" cy="457200"/>
+          </a:xfrm>
+          <a:prstGeom prst="rect">
+            <a:avLst/>
+          </a:prstGeom>
+          <a:noFill/>
+          <a:ln/>
+        </p:spPr>
+        <p:txBody>
+          <a:bodyPr wrap="square" lIns="0" tIns="0" rIns="0" bIns="0" rtlCol="0" anchor="t"/>
+          <a:lstStyle/>
+          <a:p>
+            <a:pPr indent="0" marL="0">
+              <a:buNone/>
+            </a:pPr>
+            <a:r>
+              <a:rPr lang="en-US" sz="2200" b="1" dirty="0">
+                <a:solidFill>
+                  <a:schemeClr val="accent3"/>
+                </a:solidFill>
+              </a:rPr>
+              <a:t>Act</a:t>
+            </a:r>
+            <a:endParaRPr lang="en-US" sz="2200" dirty="0"/>
+          </a:p>
+        </p:txBody>
+      </p:sp>
+      <p:sp>
+        <p:nvSpPr>
+          <p:cNvPr id="9" name="Next 2 body"/>
+          <p:cNvSpPr txBox="1"/>
+          <p:nvPr/>
+        </p:nvSpPr>
+        <p:spPr>
+          <a:xfrm>
+            <a:off x="4617720" y="2697480"/>
+            <a:ext cx="2788920" cy="1280160"/>
+          </a:xfrm>
+          <a:prstGeom prst="rect">
+            <a:avLst/>
+          </a:prstGeom>
+          <a:noFill/>
+          <a:ln/>
+        </p:spPr>
+        <p:txBody>
+          <a:bodyPr wrap="square" lIns="0" tIns="0" rIns="0" bIns="0" rtlCol="0" anchor="t"/>
+          <a:lstStyle/>
+          <a:p>
+            <a:pPr indent="0" marL="0">
+              <a:buNone/>
+            </a:pPr>
+            <a:r>
+              <a:rPr lang="en-US" sz="1600" dirty="0">
+                <a:solidFill>
+                  <a:schemeClr val="bg1"/>
+                </a:solidFill>
+              </a:rPr>
+              <a:t>Pilot a delegated approval threshold for EMEA discounts up to 30% and make Qualification a required gate.</a:t>
+            </a:r>
+            <a:endParaRPr lang="en-US" sz="1600" dirty="0"/>
+          </a:p>
+        </p:txBody>
+      </p:sp>
+      <p:sp>
+        <p:nvSpPr>
+          <p:cNvPr id="10" name="Next 3 card"/>
+          <p:cNvSpPr/>
+          <p:nvPr/>
+        </p:nvSpPr>
+        <p:spPr>
+          <a:xfrm>
+            <a:off x="7955280" y="1828800"/>
+            <a:ext cx="3337560" cy="2286000"/>
+          </a:xfrm>
+          <a:prstGeom prst="roundRect">
+            <a:avLst>
+              <a:gd name="adj" fmla="val 4800"/>
+            </a:avLst>
+          </a:prstGeom>
+          <a:solidFill>
+            <a:schemeClr val="accent6"/>
+          </a:solidFill>
+          <a:ln/>
+        </p:spPr>
+      </p:sp>
+      <p:sp>
+        <p:nvSpPr>
+          <p:cNvPr id="11" name="Next 3 heading"/>
+          <p:cNvSpPr txBox="1"/>
+          <p:nvPr/>
+        </p:nvSpPr>
+        <p:spPr>
+          <a:xfrm>
+            <a:off x="8229600" y="2103120"/>
+            <a:ext cx="2788920" cy="457200"/>
+          </a:xfrm>
+          <a:prstGeom prst="rect">
+            <a:avLst/>
+          </a:prstGeom>
+          <a:noFill/>
+          <a:ln/>
+        </p:spPr>
+        <p:txBody>
+          <a:bodyPr wrap="square" lIns="0" tIns="0" rIns="0" bIns="0" rtlCol="0" anchor="t"/>
+          <a:lstStyle/>
+          <a:p>
+            <a:pPr indent="0" marL="0">
+              <a:buNone/>
+            </a:pPr>
+            <a:r>
+              <a:rPr lang="en-US" sz="2200" b="1" dirty="0">
+                <a:solidFill>
+                  <a:schemeClr val="accent3"/>
+                </a:solidFill>
+              </a:rPr>
+              <a:t>Monitor</a:t>
+            </a:r>
+            <a:endParaRPr lang="en-US" sz="2200" dirty="0"/>
+          </a:p>
+        </p:txBody>
+      </p:sp>
+      <p:sp>
+        <p:nvSpPr>
+          <p:cNvPr id="12" name="Next 3 body"/>
+          <p:cNvSpPr txBox="1"/>
+          <p:nvPr/>
+        </p:nvSpPr>
+        <p:spPr>
+          <a:xfrm>
+            <a:off x="8229600" y="2697480"/>
+            <a:ext cx="2788920" cy="1280160"/>
+          </a:xfrm>
+          <a:prstGeom prst="rect">
+            <a:avLst/>
+          </a:prstGeom>
+          <a:noFill/>
+          <a:ln/>
+        </p:spPr>
+        <p:txBody>
+          <a:bodyPr wrap="square" lIns="0" tIns="0" rIns="0" bIns="0" rtlCol="0" anchor="t"/>
+          <a:lstStyle/>
+          <a:p>
+            <a:pPr indent="0" marL="0">
+              <a:buNone/>
+            </a:pPr>
+            <a:r>
+              <a:rPr lang="en-US" sz="1600" dirty="0">
+                <a:solidFill>
+                  <a:schemeClr val="bg1"/>
+                </a:solidFill>
+              </a:rPr>
+              <a:t>Schedule the extract into Apromore, track the KPIs against target and report value realised quarterly.</a:t>
+            </a:r>
+            <a:endParaRPr lang="en-US" sz="1600" dirty="0"/>
+          </a:p>
+        </p:txBody>
+      </p:sp>
+      <p:sp>
+        <p:nvSpPr>
+          <p:cNvPr id="13" name="Closing contact"/>
+          <p:cNvSpPr txBox="1"/>
+          <p:nvPr/>
+        </p:nvSpPr>
+        <p:spPr>
+          <a:xfrm>
+            <a:off x="731520" y="5943600"/>
+            <a:ext cx="7315200" cy="365760"/>
+          </a:xfrm>
+          <a:prstGeom prst="rect">
+            <a:avLst/>
+          </a:prstGeom>
+          <a:noFill/>
+          <a:ln/>
+        </p:spPr>
+        <p:txBody>
+          <a:bodyPr wrap="square" lIns="0" tIns="0" rIns="0" bIns="0" rtlCol="0" anchor="t"/>
+          <a:lstStyle/>
+          <a:p>
+            <a:pPr indent="0" marL="0">
+              <a:buNone/>
+            </a:pPr>
+            <a:r>
+              <a:rPr lang="en-US" sz="1400" dirty="0">
+                <a:solidFill>
+                  <a:schemeClr val="accent3"/>
+                </a:solidFill>
+              </a:rPr>
+              <a:t>salesforce-process-intelligence.vercel.app  ·  Luke Audie</a:t>
+            </a:r>
+            <a:endParaRPr lang="en-US" sz="1400" dirty="0"/>
+          </a:p>
+        </p:txBody>
+      </p:sp>
+    </p:spTree>
+  </p:cSld>
+  <p:clrMapOvr>
+    <a:masterClrMapping/>
+  </p:clrMapOvr>
+</p:sld>
+</file>
+
 <file path=ppt/slides/slide2.xml><?xml version="1.0" encoding="utf-8"?>
 <p:sld xmlns:a="http://schemas.openxmlformats.org/drawingml/2006/main" xmlns:r="http://schemas.openxmlformats.org/officeDocument/2006/relationships" xmlns:p="http://schemas.openxmlformats.org/presentationml/2006/main">
   <p:cSld name="Slide 2">
@@ -3998,7 +5571,7 @@
                   <a:schemeClr val="tx2"/>
                 </a:solidFill>
               </a:rPr>
-              <a:t>Salesforce to Apromore in four steps</a:t>
+              <a:t>Discover: the process as it actually runs</a:t>
             </a:r>
             <a:endParaRPr lang="en-US" sz="3000" dirty="0"/>
           </a:p>
@@ -4006,877 +5579,305 @@
       </p:sp>
       <p:sp>
         <p:nvSpPr>
-          <p:cNvPr id="3" name="Step 1 card"/>
+          <p:cNvPr id="3" name="Discover stat 1"/>
+          <p:cNvSpPr txBox="1"/>
+          <p:nvPr/>
+        </p:nvSpPr>
+        <p:spPr>
+          <a:xfrm>
+            <a:off x="548640" y="1508760"/>
+            <a:ext cx="2651760" cy="822960"/>
+          </a:xfrm>
+          <a:prstGeom prst="rect">
+            <a:avLst/>
+          </a:prstGeom>
+          <a:noFill/>
+          <a:ln/>
+        </p:spPr>
+        <p:txBody>
+          <a:bodyPr wrap="square" lIns="0" tIns="0" rIns="0" bIns="0" rtlCol="0" anchor="ctr"/>
+          <a:lstStyle/>
+          <a:p>
+            <a:pPr indent="0" marL="0">
+              <a:buNone/>
+            </a:pPr>
+            <a:r>
+              <a:rPr lang="en-US" sz="4400" b="1" dirty="0">
+                <a:solidFill>
+                  <a:schemeClr val="accent1"/>
+                </a:solidFill>
+              </a:rPr>
+              <a:t>14%</a:t>
+            </a:r>
+            <a:endParaRPr lang="en-US" sz="4400" dirty="0"/>
+          </a:p>
+        </p:txBody>
+      </p:sp>
+      <p:sp>
+        <p:nvSpPr>
+          <p:cNvPr id="4" name="Discover label 1"/>
+          <p:cNvSpPr txBox="1"/>
+          <p:nvPr/>
+        </p:nvSpPr>
+        <p:spPr>
+          <a:xfrm>
+            <a:off x="3291840" y="1508760"/>
+            <a:ext cx="3566160" cy="822960"/>
+          </a:xfrm>
+          <a:prstGeom prst="rect">
+            <a:avLst/>
+          </a:prstGeom>
+          <a:noFill/>
+          <a:ln/>
+        </p:spPr>
+        <p:txBody>
+          <a:bodyPr wrap="square" lIns="0" tIns="0" rIns="0" bIns="0" rtlCol="0" anchor="ctr"/>
+          <a:lstStyle/>
+          <a:p>
+            <a:pPr indent="0" marL="0">
+              <a:buNone/>
+            </a:pPr>
+            <a:r>
+              <a:rPr lang="en-US" sz="1800" dirty="0">
+                <a:solidFill>
+                  <a:schemeClr val="tx2"/>
+                </a:solidFill>
+              </a:rPr>
+              <a:t>of deals follow the designed happy path</a:t>
+            </a:r>
+            <a:endParaRPr lang="en-US" sz="1800" dirty="0"/>
+          </a:p>
+        </p:txBody>
+      </p:sp>
+      <p:sp>
+        <p:nvSpPr>
+          <p:cNvPr id="5" name="Discover stat 2"/>
+          <p:cNvSpPr txBox="1"/>
+          <p:nvPr/>
+        </p:nvSpPr>
+        <p:spPr>
+          <a:xfrm>
+            <a:off x="548640" y="2926080"/>
+            <a:ext cx="2651760" cy="822960"/>
+          </a:xfrm>
+          <a:prstGeom prst="rect">
+            <a:avLst/>
+          </a:prstGeom>
+          <a:noFill/>
+          <a:ln/>
+        </p:spPr>
+        <p:txBody>
+          <a:bodyPr wrap="square" lIns="0" tIns="0" rIns="0" bIns="0" rtlCol="0" anchor="ctr"/>
+          <a:lstStyle/>
+          <a:p>
+            <a:pPr indent="0" marL="0">
+              <a:buNone/>
+            </a:pPr>
+            <a:r>
+              <a:rPr lang="en-US" sz="4400" b="1" dirty="0">
+                <a:solidFill>
+                  <a:schemeClr val="accent1"/>
+                </a:solidFill>
+              </a:rPr>
+              <a:t>67</a:t>
+            </a:r>
+            <a:endParaRPr lang="en-US" sz="4400" dirty="0"/>
+          </a:p>
+        </p:txBody>
+      </p:sp>
+      <p:sp>
+        <p:nvSpPr>
+          <p:cNvPr id="6" name="Discover label 2"/>
+          <p:cNvSpPr txBox="1"/>
+          <p:nvPr/>
+        </p:nvSpPr>
+        <p:spPr>
+          <a:xfrm>
+            <a:off x="3291840" y="2926080"/>
+            <a:ext cx="3566160" cy="822960"/>
+          </a:xfrm>
+          <a:prstGeom prst="rect">
+            <a:avLst/>
+          </a:prstGeom>
+          <a:noFill/>
+          <a:ln/>
+        </p:spPr>
+        <p:txBody>
+          <a:bodyPr wrap="square" lIns="0" tIns="0" rIns="0" bIns="0" rtlCol="0" anchor="ctr"/>
+          <a:lstStyle/>
+          <a:p>
+            <a:pPr indent="0" marL="0">
+              <a:buNone/>
+            </a:pPr>
+            <a:r>
+              <a:rPr lang="en-US" sz="1800" dirty="0">
+                <a:solidFill>
+                  <a:schemeClr val="tx2"/>
+                </a:solidFill>
+              </a:rPr>
+              <a:t>distinct paths across 800 deals</a:t>
+            </a:r>
+            <a:endParaRPr lang="en-US" sz="1800" dirty="0"/>
+          </a:p>
+        </p:txBody>
+      </p:sp>
+      <p:sp>
+        <p:nvSpPr>
+          <p:cNvPr id="7" name="Discover stat 3"/>
+          <p:cNvSpPr txBox="1"/>
+          <p:nvPr/>
+        </p:nvSpPr>
+        <p:spPr>
+          <a:xfrm>
+            <a:off x="548640" y="4343400"/>
+            <a:ext cx="2651760" cy="822960"/>
+          </a:xfrm>
+          <a:prstGeom prst="rect">
+            <a:avLst/>
+          </a:prstGeom>
+          <a:noFill/>
+          <a:ln/>
+        </p:spPr>
+        <p:txBody>
+          <a:bodyPr wrap="square" lIns="0" tIns="0" rIns="0" bIns="0" rtlCol="0" anchor="ctr"/>
+          <a:lstStyle/>
+          <a:p>
+            <a:pPr indent="0" marL="0">
+              <a:buNone/>
+            </a:pPr>
+            <a:r>
+              <a:rPr lang="en-US" sz="4400" b="1" dirty="0">
+                <a:solidFill>
+                  <a:schemeClr val="accent1"/>
+                </a:solidFill>
+              </a:rPr>
+              <a:t>7.0 days</a:t>
+            </a:r>
+            <a:endParaRPr lang="en-US" sz="4400" dirty="0"/>
+          </a:p>
+        </p:txBody>
+      </p:sp>
+      <p:sp>
+        <p:nvSpPr>
+          <p:cNvPr id="8" name="Discover label 3"/>
+          <p:cNvSpPr txBox="1"/>
+          <p:nvPr/>
+        </p:nvSpPr>
+        <p:spPr>
+          <a:xfrm>
+            <a:off x="3291840" y="4343400"/>
+            <a:ext cx="3566160" cy="822960"/>
+          </a:xfrm>
+          <a:prstGeom prst="rect">
+            <a:avLst/>
+          </a:prstGeom>
+          <a:noFill/>
+          <a:ln/>
+        </p:spPr>
+        <p:txBody>
+          <a:bodyPr wrap="square" lIns="0" tIns="0" rIns="0" bIns="0" rtlCol="0" anchor="ctr"/>
+          <a:lstStyle/>
+          <a:p>
+            <a:pPr indent="0" marL="0">
+              <a:buNone/>
+            </a:pPr>
+            <a:r>
+              <a:rPr lang="en-US" sz="1800" dirty="0">
+                <a:solidFill>
+                  <a:schemeClr val="tx2"/>
+                </a:solidFill>
+              </a:rPr>
+              <a:t>median EMEA approval wait, the slowest hand-off</a:t>
+            </a:r>
+            <a:endParaRPr lang="en-US" sz="1800" dirty="0"/>
+          </a:p>
+        </p:txBody>
+      </p:sp>
+      <p:sp>
+        <p:nvSpPr>
+          <p:cNvPr id="9" name="Discover note"/>
+          <p:cNvSpPr txBox="1"/>
+          <p:nvPr/>
+        </p:nvSpPr>
+        <p:spPr>
+          <a:xfrm>
+            <a:off x="548640" y="5715000"/>
+            <a:ext cx="6309360" cy="457200"/>
+          </a:xfrm>
+          <a:prstGeom prst="rect">
+            <a:avLst/>
+          </a:prstGeom>
+          <a:noFill/>
+          <a:ln/>
+        </p:spPr>
+        <p:txBody>
+          <a:bodyPr wrap="square" lIns="0" tIns="0" rIns="0" bIns="0" rtlCol="0" anchor="t"/>
+          <a:lstStyle/>
+          <a:p>
+            <a:pPr indent="0" marL="0">
+              <a:buNone/>
+            </a:pPr>
+            <a:r>
+              <a:rPr lang="en-US" sz="1400" i="1" dirty="0">
+                <a:solidFill>
+                  <a:schemeClr val="accent6"/>
+                </a:solidFill>
+              </a:rPr>
+              <a:t>Approval steps and re-quote loops show up as detours from the designed path.</a:t>
+            </a:r>
+            <a:endParaRPr lang="en-US" sz="1400" dirty="0"/>
+          </a:p>
+        </p:txBody>
+      </p:sp>
+      <p:sp>
+        <p:nvSpPr>
+          <p:cNvPr id="10" name="Map frame"/>
           <p:cNvSpPr/>
           <p:nvPr/>
         </p:nvSpPr>
         <p:spPr>
           <a:xfrm>
-            <a:off x="548640" y="1371600"/>
-            <a:ext cx="2514600" cy="3291840"/>
-          </a:xfrm>
-          <a:prstGeom prst="roundRect">
-            <a:avLst>
-              <a:gd name="adj" fmla="val 4364"/>
-            </a:avLst>
+            <a:off x="7419442" y="1280160"/>
+            <a:ext cx="4239158" cy="4892040"/>
+          </a:xfrm>
+          <a:prstGeom prst="rect">
+            <a:avLst/>
           </a:prstGeom>
           <a:solidFill>
-            <a:schemeClr val="bg2"/>
+            <a:schemeClr val="bg1"/>
           </a:solidFill>
-          <a:ln/>
-        </p:spPr>
-      </p:sp>
-      <p:sp>
-        <p:nvSpPr>
-          <p:cNvPr id="4" name="Step 1 marker"/>
-          <p:cNvSpPr/>
-          <p:nvPr/>
-        </p:nvSpPr>
-        <p:spPr>
-          <a:xfrm>
-            <a:off x="777240" y="1600200"/>
-            <a:ext cx="502920" cy="502920"/>
-          </a:xfrm>
-          <a:prstGeom prst="ellipse">
-            <a:avLst/>
-          </a:prstGeom>
-          <a:solidFill>
-            <a:schemeClr val="accent1"/>
-          </a:solidFill>
-          <a:ln/>
-        </p:spPr>
-      </p:sp>
-      <p:sp>
-        <p:nvSpPr>
-          <p:cNvPr id="5" name="Step 1 number"/>
-          <p:cNvSpPr txBox="1"/>
-          <p:nvPr/>
-        </p:nvSpPr>
-        <p:spPr>
-          <a:xfrm>
-            <a:off x="777240" y="1600200"/>
-            <a:ext cx="502920" cy="502920"/>
-          </a:xfrm>
-          <a:prstGeom prst="rect">
-            <a:avLst/>
-          </a:prstGeom>
-          <a:noFill/>
-          <a:ln/>
-        </p:spPr>
-        <p:txBody>
-          <a:bodyPr wrap="square" lIns="0" tIns="0" rIns="0" bIns="0" rtlCol="0" anchor="ctr"/>
-          <a:lstStyle/>
-          <a:p>
-            <a:pPr algn="ctr" indent="0" marL="0">
-              <a:buNone/>
-            </a:pPr>
-            <a:r>
-              <a:rPr lang="en-US" sz="1800" b="1" dirty="0">
-                <a:solidFill>
-                  <a:schemeClr val="bg1"/>
-                </a:solidFill>
-              </a:rPr>
-              <a:t>1</a:t>
-            </a:r>
-            <a:endParaRPr lang="en-US" sz="1800" dirty="0"/>
-          </a:p>
-        </p:txBody>
-      </p:sp>
-      <p:sp>
-        <p:nvSpPr>
-          <p:cNvPr id="6" name="Step 1 label"/>
-          <p:cNvSpPr txBox="1"/>
-          <p:nvPr/>
-        </p:nvSpPr>
-        <p:spPr>
-          <a:xfrm>
-            <a:off x="777240" y="2286000"/>
-            <a:ext cx="2103120" cy="274320"/>
-          </a:xfrm>
-          <a:prstGeom prst="rect">
-            <a:avLst/>
-          </a:prstGeom>
-          <a:noFill/>
-          <a:ln/>
-        </p:spPr>
-        <p:txBody>
-          <a:bodyPr wrap="square" lIns="0" tIns="0" rIns="0" bIns="0" rtlCol="0" anchor="t"/>
-          <a:lstStyle/>
-          <a:p>
-            <a:pPr indent="0" marL="0">
-              <a:buNone/>
-            </a:pPr>
-            <a:r>
-              <a:rPr lang="en-US" sz="1200" b="1" dirty="0">
-                <a:solidFill>
-                  <a:schemeClr val="accent6"/>
-                </a:solidFill>
-              </a:rPr>
-              <a:t>Extract</a:t>
-            </a:r>
-            <a:endParaRPr lang="en-US" sz="1200" dirty="0"/>
-          </a:p>
-        </p:txBody>
-      </p:sp>
-      <p:sp>
-        <p:nvSpPr>
-          <p:cNvPr id="7" name="Step 1 title"/>
-          <p:cNvSpPr txBox="1"/>
-          <p:nvPr/>
-        </p:nvSpPr>
-        <p:spPr>
-          <a:xfrm>
-            <a:off x="777240" y="2578608"/>
-            <a:ext cx="2103120" cy="411480"/>
-          </a:xfrm>
-          <a:prstGeom prst="rect">
-            <a:avLst/>
-          </a:prstGeom>
-          <a:noFill/>
-          <a:ln/>
-        </p:spPr>
-        <p:txBody>
-          <a:bodyPr wrap="square" lIns="0" tIns="0" rIns="0" bIns="0" rtlCol="0" anchor="t"/>
-          <a:lstStyle/>
-          <a:p>
-            <a:pPr indent="0" marL="0">
-              <a:buNone/>
-            </a:pPr>
-            <a:r>
-              <a:rPr lang="en-US" sz="1800" b="1" dirty="0">
-                <a:solidFill>
-                  <a:schemeClr val="tx2"/>
-                </a:solidFill>
-              </a:rPr>
-              <a:t>SOQL over REST</a:t>
-            </a:r>
-            <a:endParaRPr lang="en-US" sz="1800" dirty="0"/>
-          </a:p>
-        </p:txBody>
-      </p:sp>
-      <p:sp>
-        <p:nvSpPr>
-          <p:cNvPr id="8" name="Step 1 body"/>
-          <p:cNvSpPr txBox="1"/>
-          <p:nvPr/>
-        </p:nvSpPr>
-        <p:spPr>
-          <a:xfrm>
-            <a:off x="777240" y="3063240"/>
-            <a:ext cx="2103120" cy="1508760"/>
-          </a:xfrm>
-          <a:prstGeom prst="rect">
-            <a:avLst/>
-          </a:prstGeom>
-          <a:noFill/>
-          <a:ln/>
-        </p:spPr>
-        <p:txBody>
-          <a:bodyPr wrap="square" lIns="0" tIns="0" rIns="0" bIns="0" rtlCol="0" anchor="t"/>
-          <a:lstStyle/>
-          <a:p>
-            <a:pPr indent="0" marL="0">
-              <a:buNone/>
-            </a:pPr>
-            <a:r>
-              <a:rPr lang="en-US" sz="1400" dirty="0">
-                <a:solidFill>
-                  <a:schemeClr val="tx1"/>
-                </a:solidFill>
-              </a:rPr>
-              <a:t>Lead, Opportunity, OpportunityHistory and Task, signed by the Salesforce CLI session. No stored credentials.</a:t>
-            </a:r>
-            <a:endParaRPr lang="en-US" sz="1400" dirty="0"/>
-          </a:p>
-        </p:txBody>
-      </p:sp>
-      <p:sp>
-        <p:nvSpPr>
-          <p:cNvPr id="9" name="Step 1 arrow"/>
-          <p:cNvSpPr/>
-          <p:nvPr/>
-        </p:nvSpPr>
-        <p:spPr>
-          <a:xfrm>
-            <a:off x="3127248" y="2852928"/>
-            <a:ext cx="219456" cy="329184"/>
-          </a:xfrm>
-          <a:prstGeom prst="rightArrow">
-            <a:avLst/>
-          </a:prstGeom>
-          <a:solidFill>
-            <a:schemeClr val="accent2"/>
-          </a:solidFill>
-          <a:ln/>
-        </p:spPr>
-      </p:sp>
-      <p:sp>
-        <p:nvSpPr>
-          <p:cNvPr id="10" name="Step 2 card"/>
-          <p:cNvSpPr/>
-          <p:nvPr/>
-        </p:nvSpPr>
-        <p:spPr>
-          <a:xfrm>
-            <a:off x="3401568" y="1371600"/>
-            <a:ext cx="2514600" cy="3291840"/>
-          </a:xfrm>
-          <a:prstGeom prst="roundRect">
-            <a:avLst>
-              <a:gd name="adj" fmla="val 4364"/>
-            </a:avLst>
-          </a:prstGeom>
-          <a:solidFill>
-            <a:schemeClr val="bg2"/>
-          </a:solidFill>
-          <a:ln/>
-        </p:spPr>
-      </p:sp>
-      <p:sp>
-        <p:nvSpPr>
-          <p:cNvPr id="11" name="Step 2 marker"/>
-          <p:cNvSpPr/>
-          <p:nvPr/>
-        </p:nvSpPr>
-        <p:spPr>
-          <a:xfrm>
-            <a:off x="3630168" y="1600200"/>
-            <a:ext cx="502920" cy="502920"/>
-          </a:xfrm>
-          <a:prstGeom prst="ellipse">
-            <a:avLst/>
-          </a:prstGeom>
-          <a:solidFill>
-            <a:schemeClr val="accent1"/>
-          </a:solidFill>
-          <a:ln/>
-        </p:spPr>
-      </p:sp>
-      <p:sp>
-        <p:nvSpPr>
-          <p:cNvPr id="12" name="Step 2 number"/>
-          <p:cNvSpPr txBox="1"/>
-          <p:nvPr/>
-        </p:nvSpPr>
-        <p:spPr>
-          <a:xfrm>
-            <a:off x="3630168" y="1600200"/>
-            <a:ext cx="502920" cy="502920"/>
-          </a:xfrm>
-          <a:prstGeom prst="rect">
-            <a:avLst/>
-          </a:prstGeom>
-          <a:noFill/>
-          <a:ln/>
-        </p:spPr>
-        <p:txBody>
-          <a:bodyPr wrap="square" lIns="0" tIns="0" rIns="0" bIns="0" rtlCol="0" anchor="ctr"/>
-          <a:lstStyle/>
-          <a:p>
-            <a:pPr algn="ctr" indent="0" marL="0">
-              <a:buNone/>
-            </a:pPr>
-            <a:r>
-              <a:rPr lang="en-US" sz="1800" b="1" dirty="0">
-                <a:solidFill>
-                  <a:schemeClr val="bg1"/>
-                </a:solidFill>
-              </a:rPr>
-              <a:t>2</a:t>
-            </a:r>
-            <a:endParaRPr lang="en-US" sz="1800" dirty="0"/>
-          </a:p>
-        </p:txBody>
-      </p:sp>
-      <p:sp>
-        <p:nvSpPr>
-          <p:cNvPr id="13" name="Step 2 label"/>
-          <p:cNvSpPr txBox="1"/>
-          <p:nvPr/>
-        </p:nvSpPr>
-        <p:spPr>
-          <a:xfrm>
-            <a:off x="3630168" y="2286000"/>
-            <a:ext cx="2103120" cy="274320"/>
-          </a:xfrm>
-          <a:prstGeom prst="rect">
-            <a:avLst/>
-          </a:prstGeom>
-          <a:noFill/>
-          <a:ln/>
-        </p:spPr>
-        <p:txBody>
-          <a:bodyPr wrap="square" lIns="0" tIns="0" rIns="0" bIns="0" rtlCol="0" anchor="t"/>
-          <a:lstStyle/>
-          <a:p>
-            <a:pPr indent="0" marL="0">
-              <a:buNone/>
-            </a:pPr>
-            <a:r>
-              <a:rPr lang="en-US" sz="1200" b="1" dirty="0">
-                <a:solidFill>
-                  <a:schemeClr val="accent6"/>
-                </a:solidFill>
-              </a:rPr>
-              <a:t>Correlate</a:t>
-            </a:r>
-            <a:endParaRPr lang="en-US" sz="1200" dirty="0"/>
-          </a:p>
-        </p:txBody>
-      </p:sp>
-      <p:sp>
-        <p:nvSpPr>
-          <p:cNvPr id="14" name="Step 2 title"/>
-          <p:cNvSpPr txBox="1"/>
-          <p:nvPr/>
-        </p:nvSpPr>
-        <p:spPr>
-          <a:xfrm>
-            <a:off x="3630168" y="2578608"/>
-            <a:ext cx="2103120" cy="411480"/>
-          </a:xfrm>
-          <a:prstGeom prst="rect">
-            <a:avLst/>
-          </a:prstGeom>
-          <a:noFill/>
-          <a:ln/>
-        </p:spPr>
-        <p:txBody>
-          <a:bodyPr wrap="square" lIns="0" tIns="0" rIns="0" bIns="0" rtlCol="0" anchor="t"/>
-          <a:lstStyle/>
-          <a:p>
-            <a:pPr indent="0" marL="0">
-              <a:buNone/>
-            </a:pPr>
-            <a:r>
-              <a:rPr lang="en-US" sz="1800" b="1" dirty="0">
-                <a:solidFill>
-                  <a:schemeClr val="tx2"/>
-                </a:solidFill>
-              </a:rPr>
-              <a:t>One case per deal</a:t>
-            </a:r>
-            <a:endParaRPr lang="en-US" sz="1800" dirty="0"/>
-          </a:p>
-        </p:txBody>
-      </p:sp>
-      <p:sp>
-        <p:nvSpPr>
-          <p:cNvPr id="15" name="Step 2 body"/>
-          <p:cNvSpPr txBox="1"/>
-          <p:nvPr/>
-        </p:nvSpPr>
-        <p:spPr>
-          <a:xfrm>
-            <a:off x="3630168" y="3063240"/>
-            <a:ext cx="2103120" cy="1508760"/>
-          </a:xfrm>
-          <a:prstGeom prst="rect">
-            <a:avLst/>
-          </a:prstGeom>
-          <a:noFill/>
-          <a:ln/>
-        </p:spPr>
-        <p:txBody>
-          <a:bodyPr wrap="square" lIns="0" tIns="0" rIns="0" bIns="0" rtlCol="0" anchor="t"/>
-          <a:lstStyle/>
-          <a:p>
-            <a:pPr indent="0" marL="0">
-              <a:buNone/>
-            </a:pPr>
-            <a:r>
-              <a:rPr lang="en-US" sz="1400" dirty="0">
-                <a:solidFill>
-                  <a:schemeClr val="tx1"/>
-                </a:solidFill>
-              </a:rPr>
-              <a:t>Case ID = Opportunity Id. Tasks join on WhatId, Leads on ConvertedOpportunityId.</a:t>
-            </a:r>
-            <a:endParaRPr lang="en-US" sz="1400" dirty="0"/>
-          </a:p>
-        </p:txBody>
-      </p:sp>
-      <p:sp>
-        <p:nvSpPr>
-          <p:cNvPr id="16" name="Step 2 arrow"/>
-          <p:cNvSpPr/>
-          <p:nvPr/>
-        </p:nvSpPr>
-        <p:spPr>
-          <a:xfrm>
-            <a:off x="5980176" y="2852928"/>
-            <a:ext cx="219456" cy="329184"/>
-          </a:xfrm>
-          <a:prstGeom prst="rightArrow">
-            <a:avLst/>
-          </a:prstGeom>
-          <a:solidFill>
-            <a:schemeClr val="accent2"/>
-          </a:solidFill>
-          <a:ln/>
-        </p:spPr>
-      </p:sp>
-      <p:sp>
-        <p:nvSpPr>
-          <p:cNvPr id="17" name="Step 3 card"/>
-          <p:cNvSpPr/>
-          <p:nvPr/>
-        </p:nvSpPr>
-        <p:spPr>
-          <a:xfrm>
-            <a:off x="6254496" y="1371600"/>
-            <a:ext cx="2514600" cy="3291840"/>
-          </a:xfrm>
-          <a:prstGeom prst="roundRect">
-            <a:avLst>
-              <a:gd name="adj" fmla="val 4364"/>
-            </a:avLst>
-          </a:prstGeom>
-          <a:solidFill>
-            <a:schemeClr val="bg2"/>
-          </a:solidFill>
-          <a:ln/>
-        </p:spPr>
-      </p:sp>
-      <p:sp>
-        <p:nvSpPr>
-          <p:cNvPr id="18" name="Step 3 marker"/>
-          <p:cNvSpPr/>
-          <p:nvPr/>
-        </p:nvSpPr>
-        <p:spPr>
-          <a:xfrm>
-            <a:off x="6483096" y="1600200"/>
-            <a:ext cx="502920" cy="502920"/>
-          </a:xfrm>
-          <a:prstGeom prst="ellipse">
-            <a:avLst/>
-          </a:prstGeom>
-          <a:solidFill>
-            <a:schemeClr val="accent1"/>
-          </a:solidFill>
-          <a:ln/>
-        </p:spPr>
-      </p:sp>
-      <p:sp>
-        <p:nvSpPr>
-          <p:cNvPr id="19" name="Step 3 number"/>
-          <p:cNvSpPr txBox="1"/>
-          <p:nvPr/>
-        </p:nvSpPr>
-        <p:spPr>
-          <a:xfrm>
-            <a:off x="6483096" y="1600200"/>
-            <a:ext cx="502920" cy="502920"/>
-          </a:xfrm>
-          <a:prstGeom prst="rect">
-            <a:avLst/>
-          </a:prstGeom>
-          <a:noFill/>
-          <a:ln/>
-        </p:spPr>
-        <p:txBody>
-          <a:bodyPr wrap="square" lIns="0" tIns="0" rIns="0" bIns="0" rtlCol="0" anchor="ctr"/>
-          <a:lstStyle/>
-          <a:p>
-            <a:pPr algn="ctr" indent="0" marL="0">
-              <a:buNone/>
-            </a:pPr>
-            <a:r>
-              <a:rPr lang="en-US" sz="1800" b="1" dirty="0">
-                <a:solidFill>
-                  <a:schemeClr val="bg1"/>
-                </a:solidFill>
-              </a:rPr>
-              <a:t>3</a:t>
-            </a:r>
-            <a:endParaRPr lang="en-US" sz="1800" dirty="0"/>
-          </a:p>
-        </p:txBody>
-      </p:sp>
-      <p:sp>
-        <p:nvSpPr>
-          <p:cNvPr id="20" name="Step 3 label"/>
-          <p:cNvSpPr txBox="1"/>
-          <p:nvPr/>
-        </p:nvSpPr>
-        <p:spPr>
-          <a:xfrm>
-            <a:off x="6483096" y="2286000"/>
-            <a:ext cx="2103120" cy="274320"/>
-          </a:xfrm>
-          <a:prstGeom prst="rect">
-            <a:avLst/>
-          </a:prstGeom>
-          <a:noFill/>
-          <a:ln/>
-        </p:spPr>
-        <p:txBody>
-          <a:bodyPr wrap="square" lIns="0" tIns="0" rIns="0" bIns="0" rtlCol="0" anchor="t"/>
-          <a:lstStyle/>
-          <a:p>
-            <a:pPr indent="0" marL="0">
-              <a:buNone/>
-            </a:pPr>
-            <a:r>
-              <a:rPr lang="en-US" sz="1200" b="1" dirty="0">
-                <a:solidFill>
-                  <a:schemeClr val="accent6"/>
-                </a:solidFill>
-              </a:rPr>
-              <a:t>Load</a:t>
-            </a:r>
-            <a:endParaRPr lang="en-US" sz="1200" dirty="0"/>
-          </a:p>
-        </p:txBody>
-      </p:sp>
-      <p:sp>
-        <p:nvSpPr>
-          <p:cNvPr id="21" name="Step 3 title"/>
-          <p:cNvSpPr txBox="1"/>
-          <p:nvPr/>
-        </p:nvSpPr>
-        <p:spPr>
-          <a:xfrm>
-            <a:off x="6483096" y="2578608"/>
-            <a:ext cx="2103120" cy="411480"/>
-          </a:xfrm>
-          <a:prstGeom prst="rect">
-            <a:avLst/>
-          </a:prstGeom>
-          <a:noFill/>
-          <a:ln/>
-        </p:spPr>
-        <p:txBody>
-          <a:bodyPr wrap="square" lIns="0" tIns="0" rIns="0" bIns="0" rtlCol="0" anchor="t"/>
-          <a:lstStyle/>
-          <a:p>
-            <a:pPr indent="0" marL="0">
-              <a:buNone/>
-            </a:pPr>
-            <a:r>
-              <a:rPr lang="en-US" sz="1800" b="1" dirty="0">
-                <a:solidFill>
-                  <a:schemeClr val="tx2"/>
-                </a:solidFill>
-              </a:rPr>
-              <a:t>Event log</a:t>
-            </a:r>
-            <a:endParaRPr lang="en-US" sz="1800" dirty="0"/>
-          </a:p>
-        </p:txBody>
-      </p:sp>
-      <p:sp>
-        <p:nvSpPr>
-          <p:cNvPr id="22" name="Step 3 body"/>
-          <p:cNvSpPr txBox="1"/>
-          <p:nvPr/>
-        </p:nvSpPr>
-        <p:spPr>
-          <a:xfrm>
-            <a:off x="6483096" y="3063240"/>
-            <a:ext cx="2103120" cy="1508760"/>
-          </a:xfrm>
-          <a:prstGeom prst="rect">
-            <a:avLst/>
-          </a:prstGeom>
-          <a:noFill/>
-          <a:ln/>
-        </p:spPr>
-        <p:txBody>
-          <a:bodyPr wrap="square" lIns="0" tIns="0" rIns="0" bIns="0" rtlCol="0" anchor="t"/>
-          <a:lstStyle/>
-          <a:p>
-            <a:pPr indent="0" marL="0">
-              <a:buNone/>
-            </a:pPr>
-            <a:r>
-              <a:rPr lang="en-US" sz="1400" dirty="0">
-                <a:solidFill>
-                  <a:schemeClr val="tx1"/>
-                </a:solidFill>
-              </a:rPr>
-              <a:t>CSV and IEEE XES with activity, timestamps, resource and case attributes, ready for Apromore.</a:t>
-            </a:r>
-            <a:endParaRPr lang="en-US" sz="1400" dirty="0"/>
-          </a:p>
-        </p:txBody>
-      </p:sp>
-      <p:sp>
-        <p:nvSpPr>
-          <p:cNvPr id="23" name="Step 3 arrow"/>
-          <p:cNvSpPr/>
-          <p:nvPr/>
-        </p:nvSpPr>
-        <p:spPr>
-          <a:xfrm>
-            <a:off x="8833104" y="2852928"/>
-            <a:ext cx="219456" cy="329184"/>
-          </a:xfrm>
-          <a:prstGeom prst="rightArrow">
-            <a:avLst/>
-          </a:prstGeom>
-          <a:solidFill>
-            <a:schemeClr val="accent2"/>
-          </a:solidFill>
-          <a:ln/>
-        </p:spPr>
-      </p:sp>
-      <p:sp>
-        <p:nvSpPr>
-          <p:cNvPr id="24" name="Step 4 card"/>
-          <p:cNvSpPr/>
-          <p:nvPr/>
-        </p:nvSpPr>
-        <p:spPr>
-          <a:xfrm>
-            <a:off x="9107424" y="1371600"/>
-            <a:ext cx="2514600" cy="3291840"/>
-          </a:xfrm>
-          <a:prstGeom prst="roundRect">
-            <a:avLst>
-              <a:gd name="adj" fmla="val 4364"/>
-            </a:avLst>
-          </a:prstGeom>
-          <a:solidFill>
-            <a:schemeClr val="bg2"/>
-          </a:solidFill>
-          <a:ln/>
-        </p:spPr>
-      </p:sp>
-      <p:sp>
-        <p:nvSpPr>
-          <p:cNvPr id="25" name="Step 4 marker"/>
-          <p:cNvSpPr/>
-          <p:nvPr/>
-        </p:nvSpPr>
-        <p:spPr>
-          <a:xfrm>
-            <a:off x="9336024" y="1600200"/>
-            <a:ext cx="502920" cy="502920"/>
-          </a:xfrm>
-          <a:prstGeom prst="ellipse">
-            <a:avLst/>
-          </a:prstGeom>
-          <a:solidFill>
-            <a:schemeClr val="accent1"/>
-          </a:solidFill>
-          <a:ln/>
-        </p:spPr>
-      </p:sp>
-      <p:sp>
-        <p:nvSpPr>
-          <p:cNvPr id="26" name="Step 4 number"/>
-          <p:cNvSpPr txBox="1"/>
-          <p:nvPr/>
-        </p:nvSpPr>
-        <p:spPr>
-          <a:xfrm>
-            <a:off x="9336024" y="1600200"/>
-            <a:ext cx="502920" cy="502920"/>
-          </a:xfrm>
-          <a:prstGeom prst="rect">
-            <a:avLst/>
-          </a:prstGeom>
-          <a:noFill/>
-          <a:ln/>
-        </p:spPr>
-        <p:txBody>
-          <a:bodyPr wrap="square" lIns="0" tIns="0" rIns="0" bIns="0" rtlCol="0" anchor="ctr"/>
-          <a:lstStyle/>
-          <a:p>
-            <a:pPr algn="ctr" indent="0" marL="0">
-              <a:buNone/>
-            </a:pPr>
-            <a:r>
-              <a:rPr lang="en-US" sz="1800" b="1" dirty="0">
-                <a:solidFill>
-                  <a:schemeClr val="bg1"/>
-                </a:solidFill>
-              </a:rPr>
-              <a:t>4</a:t>
-            </a:r>
-            <a:endParaRPr lang="en-US" sz="1800" dirty="0"/>
-          </a:p>
-        </p:txBody>
-      </p:sp>
-      <p:sp>
-        <p:nvSpPr>
-          <p:cNvPr id="27" name="Step 4 label"/>
-          <p:cNvSpPr txBox="1"/>
-          <p:nvPr/>
-        </p:nvSpPr>
-        <p:spPr>
-          <a:xfrm>
-            <a:off x="9336024" y="2286000"/>
-            <a:ext cx="2103120" cy="274320"/>
-          </a:xfrm>
-          <a:prstGeom prst="rect">
-            <a:avLst/>
-          </a:prstGeom>
-          <a:noFill/>
-          <a:ln/>
-        </p:spPr>
-        <p:txBody>
-          <a:bodyPr wrap="square" lIns="0" tIns="0" rIns="0" bIns="0" rtlCol="0" anchor="t"/>
-          <a:lstStyle/>
-          <a:p>
-            <a:pPr indent="0" marL="0">
-              <a:buNone/>
-            </a:pPr>
-            <a:r>
-              <a:rPr lang="en-US" sz="1200" b="1" dirty="0">
-                <a:solidFill>
-                  <a:schemeClr val="accent6"/>
-                </a:solidFill>
-              </a:rPr>
-              <a:t>Mine and size</a:t>
-            </a:r>
-            <a:endParaRPr lang="en-US" sz="1200" dirty="0"/>
-          </a:p>
-        </p:txBody>
-      </p:sp>
-      <p:sp>
-        <p:nvSpPr>
-          <p:cNvPr id="28" name="Step 4 title"/>
-          <p:cNvSpPr txBox="1"/>
-          <p:nvPr/>
-        </p:nvSpPr>
-        <p:spPr>
-          <a:xfrm>
-            <a:off x="9336024" y="2578608"/>
-            <a:ext cx="2103120" cy="411480"/>
-          </a:xfrm>
-          <a:prstGeom prst="rect">
-            <a:avLst/>
-          </a:prstGeom>
-          <a:noFill/>
-          <a:ln/>
-        </p:spPr>
-        <p:txBody>
-          <a:bodyPr wrap="square" lIns="0" tIns="0" rIns="0" bIns="0" rtlCol="0" anchor="t"/>
-          <a:lstStyle/>
-          <a:p>
-            <a:pPr indent="0" marL="0">
-              <a:buNone/>
-            </a:pPr>
-            <a:r>
-              <a:rPr lang="en-US" sz="1800" b="1" dirty="0">
-                <a:solidFill>
-                  <a:schemeClr val="tx2"/>
-                </a:solidFill>
-              </a:rPr>
-              <a:t>Map and value</a:t>
-            </a:r>
-            <a:endParaRPr lang="en-US" sz="1800" dirty="0"/>
-          </a:p>
-        </p:txBody>
-      </p:sp>
-      <p:sp>
-        <p:nvSpPr>
-          <p:cNvPr id="29" name="Step 4 body"/>
-          <p:cNvSpPr txBox="1"/>
-          <p:nvPr/>
-        </p:nvSpPr>
-        <p:spPr>
-          <a:xfrm>
-            <a:off x="9336024" y="3063240"/>
-            <a:ext cx="2103120" cy="1508760"/>
-          </a:xfrm>
-          <a:prstGeom prst="rect">
-            <a:avLst/>
-          </a:prstGeom>
-          <a:noFill/>
-          <a:ln/>
-        </p:spPr>
-        <p:txBody>
-          <a:bodyPr wrap="square" lIns="0" tIns="0" rIns="0" bIns="0" rtlCol="0" anchor="t"/>
-          <a:lstStyle/>
-          <a:p>
-            <a:pPr indent="0" marL="0">
-              <a:buNone/>
-            </a:pPr>
-            <a:r>
-              <a:rPr lang="en-US" sz="1400" dirty="0">
-                <a:solidFill>
-                  <a:schemeClr val="tx1"/>
-                </a:solidFill>
-              </a:rPr>
-              <a:t>Directly-follows graph, variant analysis, cohort win rates and a driver-based value model.</a:t>
-            </a:r>
-            <a:endParaRPr lang="en-US" sz="1400" dirty="0"/>
-          </a:p>
-        </p:txBody>
-      </p:sp>
-      <p:sp>
-        <p:nvSpPr>
-          <p:cNvPr id="30" name="Live run band"/>
-          <p:cNvSpPr/>
-          <p:nvPr/>
-        </p:nvSpPr>
-        <p:spPr>
-          <a:xfrm>
-            <a:off x="548640" y="4983480"/>
-            <a:ext cx="11064240" cy="1051560"/>
-          </a:xfrm>
-          <a:prstGeom prst="roundRect">
-            <a:avLst>
-              <a:gd name="adj" fmla="val 10435"/>
-            </a:avLst>
-          </a:prstGeom>
-          <a:solidFill>
-            <a:schemeClr val="tx2"/>
-          </a:solidFill>
-          <a:ln/>
-        </p:spPr>
-      </p:sp>
-      <p:sp>
-        <p:nvSpPr>
-          <p:cNvPr id="31" name="Live run text"/>
-          <p:cNvSpPr txBox="1"/>
-          <p:nvPr/>
-        </p:nvSpPr>
-        <p:spPr>
-          <a:xfrm>
-            <a:off x="822960" y="4983480"/>
-            <a:ext cx="10515600" cy="1051560"/>
-          </a:xfrm>
-          <a:prstGeom prst="rect">
-            <a:avLst/>
-          </a:prstGeom>
-          <a:noFill/>
-          <a:ln/>
-        </p:spPr>
-        <p:txBody>
-          <a:bodyPr wrap="square" lIns="0" tIns="0" rIns="0" bIns="0" rtlCol="0" anchor="ctr"/>
-          <a:lstStyle/>
-          <a:p>
-            <a:pPr indent="0" marL="0">
-              <a:buNone/>
-            </a:pPr>
-            <a:r>
-              <a:rPr lang="en-US" sz="1600" b="1" dirty="0">
-                <a:solidFill>
-                  <a:schemeClr val="accent3"/>
-                </a:solidFill>
-              </a:rPr>
-              <a:t>Live run on a Salesforce trial org:  </a:t>
-            </a:r>
-            <a:pPr indent="0" marL="0">
-              <a:buNone/>
-            </a:pPr>
-            <a:r>
-              <a:rPr lang="en-US" sz="1600" dirty="0">
-                <a:solidFill>
-                  <a:schemeClr val="bg1"/>
-                </a:solidFill>
-              </a:rPr>
-              <a:t>40 opportunities  ·  351 events  ·  2 objects joined  ·  CSV + XES for Apromore</a:t>
-            </a:r>
-            <a:endParaRPr lang="en-US" sz="1600" dirty="0"/>
-          </a:p>
-        </p:txBody>
-      </p:sp>
+          <a:ln w="12700">
+            <a:solidFill>
+              <a:schemeClr val="accent3"/>
+            </a:solidFill>
+            <a:prstDash val="solid"/>
+          </a:ln>
+        </p:spPr>
+      </p:sp>
+      <p:pic>
+        <p:nvPicPr>
+          <p:cNvPr id="11" name="Process map" descr="Process map from the hosted dashboard">    </p:cNvPr>
+          <p:cNvPicPr>
+            <a:picLocks noChangeAspect="1"/>
+          </p:cNvPicPr>
+          <p:nvPr/>
+        </p:nvPicPr>
+        <p:blipFill>
+          <a:blip r:embed="rId1"/>
+          <a:stretch>
+            <a:fillRect/>
+          </a:stretch>
+        </p:blipFill>
+        <p:spPr>
+          <a:xfrm>
+            <a:off x="7465162" y="1325880"/>
+            <a:ext cx="4147718" cy="4800600"/>
+          </a:xfrm>
+          <a:prstGeom prst="rect">
+            <a:avLst/>
+          </a:prstGeom>
+        </p:spPr>
+      </p:pic>
       <p:sp>
         <p:nvSpPr>
           <p:cNvPr id="25" name="Slide Number Placeholder 0"/>
@@ -4979,22 +5980,60 @@
                   <a:schemeClr val="tx2"/>
                 </a:solidFill>
               </a:rPr>
-              <a:t>Discover: the process as it actually runs</a:t>
+              <a:t>Diagnose: three deviations explain most of the lost value</a:t>
             </a:r>
             <a:endParaRPr lang="en-US" sz="3000" dirty="0"/>
           </a:p>
         </p:txBody>
       </p:sp>
-      <p:sp>
-        <p:nvSpPr>
-          <p:cNvPr id="3" name="Discover stat 1"/>
-          <p:cNvSpPr txBox="1"/>
-          <p:nvPr/>
-        </p:nvSpPr>
-        <p:spPr>
-          <a:xfrm>
-            <a:off x="548640" y="1508760"/>
-            <a:ext cx="2651760" cy="822960"/>
+      <p:graphicFrame>
+        <p:nvGraphicFramePr>
+          <p:cNvPr id="3" name="Chart 1" descr=""/>
+          <p:cNvGraphicFramePr/>
+          <p:nvPr/>
+        </p:nvGraphicFramePr>
+        <p:xfrm>
+          <a:off x="548640" y="1325880"/>
+          <a:ext cx="3529584" cy="3383280"/>
+        </p:xfrm>
+        <a:graphic xmlns:a="http://schemas.openxmlformats.org/drawingml/2006/main">
+          <a:graphicData uri="http://schemas.openxmlformats.org/drawingml/2006/chart">
+            <c:chart xmlns:c="http://schemas.openxmlformats.org/drawingml/2006/chart" r:id="rId1"/>
+          </a:graphicData>
+        </a:graphic>
+      </p:graphicFrame>
+      <p:sp>
+        <p:nvSpPr>
+          <p:cNvPr id="4" name="Takeaway 1"/>
+          <p:cNvSpPr/>
+          <p:nvPr/>
+        </p:nvSpPr>
+        <p:spPr>
+          <a:xfrm>
+            <a:off x="548640" y="4846320"/>
+            <a:ext cx="3529584" cy="1234440"/>
+          </a:xfrm>
+          <a:prstGeom prst="roundRect">
+            <a:avLst>
+              <a:gd name="adj" fmla="val 8889"/>
+            </a:avLst>
+          </a:prstGeom>
+          <a:solidFill>
+            <a:schemeClr val="bg2"/>
+          </a:solidFill>
+          <a:ln/>
+        </p:spPr>
+      </p:sp>
+      <p:sp>
+        <p:nvSpPr>
+          <p:cNvPr id="5" name="Takeaway 1 text"/>
+          <p:cNvSpPr txBox="1"/>
+          <p:nvPr/>
+        </p:nvSpPr>
+        <p:spPr>
+          <a:xfrm>
+            <a:off x="731520" y="4956048"/>
+            <a:ext cx="3163824" cy="1005840"/>
           </a:xfrm>
           <a:prstGeom prst="rect">
             <a:avLst/>
@@ -5010,27 +6049,65 @@
               <a:buNone/>
             </a:pPr>
             <a:r>
-              <a:rPr lang="en-US" sz="4400" b="1" dirty="0">
-                <a:solidFill>
-                  <a:schemeClr val="accent1"/>
-                </a:solidFill>
-              </a:rPr>
-              <a:t>14%</a:t>
-            </a:r>
-            <a:endParaRPr lang="en-US" sz="4400" dirty="0"/>
-          </a:p>
-        </p:txBody>
-      </p:sp>
-      <p:sp>
-        <p:nvSpPr>
-          <p:cNvPr id="4" name="Discover label 1"/>
-          <p:cNvSpPr txBox="1"/>
-          <p:nvPr/>
-        </p:nvSpPr>
-        <p:spPr>
-          <a:xfrm>
-            <a:off x="3291840" y="1508760"/>
-            <a:ext cx="3566160" cy="822960"/>
+              <a:rPr lang="en-US" sz="1400" dirty="0">
+                <a:solidFill>
+                  <a:schemeClr val="tx2"/>
+                </a:solidFill>
+              </a:rPr>
+              <a:t>EMEA's single approver adds about 6 days per discounted deal.</a:t>
+            </a:r>
+            <a:endParaRPr lang="en-US" sz="1400" dirty="0"/>
+          </a:p>
+        </p:txBody>
+      </p:sp>
+      <p:graphicFrame>
+        <p:nvGraphicFramePr>
+          <p:cNvPr id="6" name="Chart 2" descr=""/>
+          <p:cNvGraphicFramePr/>
+          <p:nvPr/>
+        </p:nvGraphicFramePr>
+        <p:xfrm>
+          <a:off x="4315968" y="1325880"/>
+          <a:ext cx="3529584" cy="3383280"/>
+        </p:xfrm>
+        <a:graphic xmlns:a="http://schemas.openxmlformats.org/drawingml/2006/main">
+          <a:graphicData uri="http://schemas.openxmlformats.org/drawingml/2006/chart">
+            <c:chart xmlns:c="http://schemas.openxmlformats.org/drawingml/2006/chart" r:id="rId2"/>
+          </a:graphicData>
+        </a:graphic>
+      </p:graphicFrame>
+      <p:sp>
+        <p:nvSpPr>
+          <p:cNvPr id="7" name="Takeaway 2"/>
+          <p:cNvSpPr/>
+          <p:nvPr/>
+        </p:nvSpPr>
+        <p:spPr>
+          <a:xfrm>
+            <a:off x="4315968" y="4846320"/>
+            <a:ext cx="3529584" cy="1234440"/>
+          </a:xfrm>
+          <a:prstGeom prst="roundRect">
+            <a:avLst>
+              <a:gd name="adj" fmla="val 8889"/>
+            </a:avLst>
+          </a:prstGeom>
+          <a:solidFill>
+            <a:schemeClr val="bg2"/>
+          </a:solidFill>
+          <a:ln/>
+        </p:spPr>
+      </p:sp>
+      <p:sp>
+        <p:nvSpPr>
+          <p:cNvPr id="8" name="Takeaway 2 text"/>
+          <p:cNvSpPr txBox="1"/>
+          <p:nvPr/>
+        </p:nvSpPr>
+        <p:spPr>
+          <a:xfrm>
+            <a:off x="4498848" y="4956048"/>
+            <a:ext cx="3163824" cy="1005840"/>
           </a:xfrm>
           <a:prstGeom prst="rect">
             <a:avLst/>
@@ -5046,27 +6123,65 @@
               <a:buNone/>
             </a:pPr>
             <a:r>
-              <a:rPr lang="en-US" sz="1800" dirty="0">
+              <a:rPr lang="en-US" sz="1400" dirty="0">
                 <a:solidFill>
                   <a:schemeClr val="tx2"/>
                 </a:solidFill>
               </a:rPr>
-              <a:t>of deals follow the designed happy path</a:t>
-            </a:r>
-            <a:endParaRPr lang="en-US" sz="1800" dirty="0"/>
-          </a:p>
-        </p:txBody>
-      </p:sp>
-      <p:sp>
-        <p:nvSpPr>
-          <p:cNvPr id="5" name="Discover stat 2"/>
-          <p:cNvSpPr txBox="1"/>
-          <p:nvPr/>
-        </p:nvSpPr>
-        <p:spPr>
-          <a:xfrm>
-            <a:off x="548640" y="2926080"/>
-            <a:ext cx="2651760" cy="822960"/>
+              <a:t>19% of negotiated deals are re-quoted, and they win 18 points less often.</a:t>
+            </a:r>
+            <a:endParaRPr lang="en-US" sz="1400" dirty="0"/>
+          </a:p>
+        </p:txBody>
+      </p:sp>
+      <p:graphicFrame>
+        <p:nvGraphicFramePr>
+          <p:cNvPr id="9" name="Chart 3" descr=""/>
+          <p:cNvGraphicFramePr/>
+          <p:nvPr/>
+        </p:nvGraphicFramePr>
+        <p:xfrm>
+          <a:off x="8083296" y="1325880"/>
+          <a:ext cx="3529584" cy="3383280"/>
+        </p:xfrm>
+        <a:graphic xmlns:a="http://schemas.openxmlformats.org/drawingml/2006/main">
+          <a:graphicData uri="http://schemas.openxmlformats.org/drawingml/2006/chart">
+            <c:chart xmlns:c="http://schemas.openxmlformats.org/drawingml/2006/chart" r:id="rId3"/>
+          </a:graphicData>
+        </a:graphic>
+      </p:graphicFrame>
+      <p:sp>
+        <p:nvSpPr>
+          <p:cNvPr id="10" name="Takeaway 3"/>
+          <p:cNvSpPr/>
+          <p:nvPr/>
+        </p:nvSpPr>
+        <p:spPr>
+          <a:xfrm>
+            <a:off x="8083296" y="4846320"/>
+            <a:ext cx="3529584" cy="1234440"/>
+          </a:xfrm>
+          <a:prstGeom prst="roundRect">
+            <a:avLst>
+              <a:gd name="adj" fmla="val 8889"/>
+            </a:avLst>
+          </a:prstGeom>
+          <a:solidFill>
+            <a:schemeClr val="bg2"/>
+          </a:solidFill>
+          <a:ln/>
+        </p:spPr>
+      </p:sp>
+      <p:sp>
+        <p:nvSpPr>
+          <p:cNvPr id="11" name="Takeaway 3 text"/>
+          <p:cNvSpPr txBox="1"/>
+          <p:nvPr/>
+        </p:nvSpPr>
+        <p:spPr>
+          <a:xfrm>
+            <a:off x="8266176" y="4956048"/>
+            <a:ext cx="3163824" cy="1005840"/>
           </a:xfrm>
           <a:prstGeom prst="rect">
             <a:avLst/>
@@ -5082,210 +6197,17 @@
               <a:buNone/>
             </a:pPr>
             <a:r>
-              <a:rPr lang="en-US" sz="4400" b="1" dirty="0">
-                <a:solidFill>
-                  <a:schemeClr val="accent1"/>
-                </a:solidFill>
-              </a:rPr>
-              <a:t>67</a:t>
-            </a:r>
-            <a:endParaRPr lang="en-US" sz="4400" dirty="0"/>
-          </a:p>
-        </p:txBody>
-      </p:sp>
-      <p:sp>
-        <p:nvSpPr>
-          <p:cNvPr id="6" name="Discover label 2"/>
-          <p:cNvSpPr txBox="1"/>
-          <p:nvPr/>
-        </p:nvSpPr>
-        <p:spPr>
-          <a:xfrm>
-            <a:off x="3291840" y="2926080"/>
-            <a:ext cx="3566160" cy="822960"/>
-          </a:xfrm>
-          <a:prstGeom prst="rect">
-            <a:avLst/>
-          </a:prstGeom>
-          <a:noFill/>
-          <a:ln/>
-        </p:spPr>
-        <p:txBody>
-          <a:bodyPr wrap="square" lIns="0" tIns="0" rIns="0" bIns="0" rtlCol="0" anchor="ctr"/>
-          <a:lstStyle/>
-          <a:p>
-            <a:pPr indent="0" marL="0">
-              <a:buNone/>
-            </a:pPr>
-            <a:r>
-              <a:rPr lang="en-US" sz="1800" dirty="0">
+              <a:rPr lang="en-US" sz="1400" dirty="0">
                 <a:solidFill>
                   <a:schemeClr val="tx2"/>
                 </a:solidFill>
               </a:rPr>
-              <a:t>distinct paths across 800 deals</a:t>
-            </a:r>
-            <a:endParaRPr lang="en-US" sz="1800" dirty="0"/>
-          </a:p>
-        </p:txBody>
-      </p:sp>
-      <p:sp>
-        <p:nvSpPr>
-          <p:cNvPr id="7" name="Discover stat 3"/>
-          <p:cNvSpPr txBox="1"/>
-          <p:nvPr/>
-        </p:nvSpPr>
-        <p:spPr>
-          <a:xfrm>
-            <a:off x="548640" y="4343400"/>
-            <a:ext cx="2651760" cy="822960"/>
-          </a:xfrm>
-          <a:prstGeom prst="rect">
-            <a:avLst/>
-          </a:prstGeom>
-          <a:noFill/>
-          <a:ln/>
-        </p:spPr>
-        <p:txBody>
-          <a:bodyPr wrap="square" lIns="0" tIns="0" rIns="0" bIns="0" rtlCol="0" anchor="ctr"/>
-          <a:lstStyle/>
-          <a:p>
-            <a:pPr indent="0" marL="0">
-              <a:buNone/>
-            </a:pPr>
-            <a:r>
-              <a:rPr lang="en-US" sz="4400" b="1" dirty="0">
-                <a:solidFill>
-                  <a:schemeClr val="accent1"/>
-                </a:solidFill>
-              </a:rPr>
-              <a:t>7.0 days</a:t>
-            </a:r>
-            <a:endParaRPr lang="en-US" sz="4400" dirty="0"/>
-          </a:p>
-        </p:txBody>
-      </p:sp>
-      <p:sp>
-        <p:nvSpPr>
-          <p:cNvPr id="8" name="Discover label 3"/>
-          <p:cNvSpPr txBox="1"/>
-          <p:nvPr/>
-        </p:nvSpPr>
-        <p:spPr>
-          <a:xfrm>
-            <a:off x="3291840" y="4343400"/>
-            <a:ext cx="3566160" cy="822960"/>
-          </a:xfrm>
-          <a:prstGeom prst="rect">
-            <a:avLst/>
-          </a:prstGeom>
-          <a:noFill/>
-          <a:ln/>
-        </p:spPr>
-        <p:txBody>
-          <a:bodyPr wrap="square" lIns="0" tIns="0" rIns="0" bIns="0" rtlCol="0" anchor="ctr"/>
-          <a:lstStyle/>
-          <a:p>
-            <a:pPr indent="0" marL="0">
-              <a:buNone/>
-            </a:pPr>
-            <a:r>
-              <a:rPr lang="en-US" sz="1800" dirty="0">
-                <a:solidFill>
-                  <a:schemeClr val="tx2"/>
-                </a:solidFill>
-              </a:rPr>
-              <a:t>median EMEA approval wait, the slowest hand-off</a:t>
-            </a:r>
-            <a:endParaRPr lang="en-US" sz="1800" dirty="0"/>
-          </a:p>
-        </p:txBody>
-      </p:sp>
-      <p:sp>
-        <p:nvSpPr>
-          <p:cNvPr id="9" name="Discover note"/>
-          <p:cNvSpPr txBox="1"/>
-          <p:nvPr/>
-        </p:nvSpPr>
-        <p:spPr>
-          <a:xfrm>
-            <a:off x="548640" y="5715000"/>
-            <a:ext cx="6309360" cy="457200"/>
-          </a:xfrm>
-          <a:prstGeom prst="rect">
-            <a:avLst/>
-          </a:prstGeom>
-          <a:noFill/>
-          <a:ln/>
-        </p:spPr>
-        <p:txBody>
-          <a:bodyPr wrap="square" lIns="0" tIns="0" rIns="0" bIns="0" rtlCol="0" anchor="t"/>
-          <a:lstStyle/>
-          <a:p>
-            <a:pPr indent="0" marL="0">
-              <a:buNone/>
-            </a:pPr>
-            <a:r>
-              <a:rPr lang="en-US" sz="1400" i="1" dirty="0">
-                <a:solidFill>
-                  <a:schemeClr val="accent6"/>
-                </a:solidFill>
-              </a:rPr>
-              <a:t>Approval steps and re-quote loops show up as detours from the designed path.</a:t>
+              <a:t>12% of deals skip Qualification and win less than half as often.</a:t>
             </a:r>
             <a:endParaRPr lang="en-US" sz="1400" dirty="0"/>
           </a:p>
         </p:txBody>
       </p:sp>
-      <p:sp>
-        <p:nvSpPr>
-          <p:cNvPr id="10" name="Map frame"/>
-          <p:cNvSpPr/>
-          <p:nvPr/>
-        </p:nvSpPr>
-        <p:spPr>
-          <a:xfrm>
-            <a:off x="7419442" y="1280160"/>
-            <a:ext cx="4239158" cy="4892040"/>
-          </a:xfrm>
-          <a:prstGeom prst="rect">
-            <a:avLst/>
-          </a:prstGeom>
-          <a:solidFill>
-            <a:schemeClr val="bg1"/>
-          </a:solidFill>
-          <a:ln w="12700">
-            <a:solidFill>
-              <a:schemeClr val="accent3"/>
-            </a:solidFill>
-            <a:prstDash val="solid"/>
-          </a:ln>
-        </p:spPr>
-      </p:sp>
-      <p:pic>
-        <p:nvPicPr>
-          <p:cNvPr id="11" name="Process map" descr="Process map from the hosted dashboard">    </p:cNvPr>
-          <p:cNvPicPr>
-            <a:picLocks noChangeAspect="1"/>
-          </p:cNvPicPr>
-          <p:nvPr/>
-        </p:nvPicPr>
-        <p:blipFill>
-          <a:blip r:embed="rId1"/>
-          <a:stretch>
-            <a:fillRect/>
-          </a:stretch>
-        </p:blipFill>
-        <p:spPr>
-          <a:xfrm>
-            <a:off x="7465162" y="1325880"/>
-            <a:ext cx="4147718" cy="4800600"/>
-          </a:xfrm>
-          <a:prstGeom prst="rect">
-            <a:avLst/>
-          </a:prstGeom>
-        </p:spPr>
-      </p:pic>
       <p:sp>
         <p:nvSpPr>
           <p:cNvPr id="25" name="Slide Number Placeholder 0"/>
@@ -5388,38 +6310,1066 @@
                   <a:schemeClr val="tx2"/>
                 </a:solidFill>
               </a:rPr>
-              <a:t>Diagnose: three deviations explain most of the lost value</a:t>
+              <a:t>Value case: reduce re-quotes in quote-to-close</a:t>
             </a:r>
             <a:endParaRPr lang="en-US" sz="3000" dirty="0"/>
           </a:p>
         </p:txBody>
       </p:sp>
-      <p:graphicFrame>
-        <p:nvGraphicFramePr>
-          <p:cNvPr id="3" name="Chart 1" descr=""/>
-          <p:cNvGraphicFramePr/>
-          <p:nvPr/>
-        </p:nvGraphicFramePr>
-        <p:xfrm>
-          <a:off x="548640" y="1325880"/>
-          <a:ext cx="3529584" cy="3383280"/>
-        </p:xfrm>
-        <a:graphic xmlns:a="http://schemas.openxmlformats.org/drawingml/2006/main">
-          <a:graphicData uri="http://schemas.openxmlformats.org/drawingml/2006/chart">
-            <c:chart xmlns:c="http://schemas.openxmlformats.org/drawingml/2006/chart" r:id="rId1"/>
-          </a:graphicData>
-        </a:graphic>
-      </p:graphicFrame>
-      <p:sp>
-        <p:nvSpPr>
-          <p:cNvPr id="4" name="Takeaway 1"/>
+      <p:sp>
+        <p:nvSpPr>
+          <p:cNvPr id="3" name="Filter bar"/>
           <p:cNvSpPr/>
           <p:nvPr/>
         </p:nvSpPr>
         <p:spPr>
           <a:xfrm>
-            <a:off x="548640" y="4846320"/>
-            <a:ext cx="3529584" cy="1234440"/>
+            <a:off x="548640" y="1234440"/>
+            <a:ext cx="11064240" cy="411480"/>
+          </a:xfrm>
+          <a:prstGeom prst="roundRect">
+            <a:avLst>
+              <a:gd name="adj" fmla="val 26667"/>
+            </a:avLst>
+          </a:prstGeom>
+          <a:solidFill>
+            <a:schemeClr val="bg2"/>
+          </a:solidFill>
+          <a:ln/>
+        </p:spPr>
+      </p:sp>
+      <p:sp>
+        <p:nvSpPr>
+          <p:cNvPr id="4" name="Filter text"/>
+          <p:cNvSpPr txBox="1"/>
+          <p:nvPr/>
+        </p:nvSpPr>
+        <p:spPr>
+          <a:xfrm>
+            <a:off x="777240" y="1234440"/>
+            <a:ext cx="10607040" cy="411480"/>
+          </a:xfrm>
+          <a:prstGeom prst="rect">
+            <a:avLst/>
+          </a:prstGeom>
+          <a:noFill/>
+          <a:ln/>
+        </p:spPr>
+        <p:txBody>
+          <a:bodyPr wrap="square" lIns="0" tIns="0" rIns="0" bIns="0" rtlCol="0" anchor="ctr"/>
+          <a:lstStyle/>
+          <a:p>
+            <a:pPr indent="0" marL="0">
+              <a:buNone/>
+            </a:pPr>
+            <a:r>
+              <a:rPr lang="en-US" sz="1200" dirty="0">
+                <a:solidFill>
+                  <a:schemeClr val="tx2"/>
+                </a:solidFill>
+              </a:rPr>
+              <a:t>Time frame: 2025-10 to 2026-09   ·   New business   ·   Deals that reached Negotiation   ·   Owner: VP Revenue Operations</a:t>
+            </a:r>
+            <a:endParaRPr lang="en-US" sz="1200" dirty="0"/>
+          </a:p>
+        </p:txBody>
+      </p:sp>
+      <p:sp>
+        <p:nvSpPr>
+          <p:cNvPr id="5" name="Value column 1 heading"/>
+          <p:cNvSpPr txBox="1"/>
+          <p:nvPr/>
+        </p:nvSpPr>
+        <p:spPr>
+          <a:xfrm>
+            <a:off x="548640" y="1828800"/>
+            <a:ext cx="3529584" cy="365760"/>
+          </a:xfrm>
+          <a:prstGeom prst="rect">
+            <a:avLst/>
+          </a:prstGeom>
+          <a:noFill/>
+          <a:ln/>
+        </p:spPr>
+        <p:txBody>
+          <a:bodyPr wrap="square" lIns="0" tIns="0" rIns="0" bIns="0" rtlCol="0" anchor="t"/>
+          <a:lstStyle/>
+          <a:p>
+            <a:pPr indent="0" marL="0">
+              <a:buNone/>
+            </a:pPr>
+            <a:r>
+              <a:rPr lang="en-US" sz="1600" b="1" dirty="0">
+                <a:solidFill>
+                  <a:schemeClr val="accent6"/>
+                </a:solidFill>
+              </a:rPr>
+              <a:t>Challenge</a:t>
+            </a:r>
+            <a:endParaRPr lang="en-US" sz="1600" dirty="0"/>
+          </a:p>
+        </p:txBody>
+      </p:sp>
+      <p:sp>
+        <p:nvSpPr>
+          <p:cNvPr id="6" name="Value column 1 body"/>
+          <p:cNvSpPr txBox="1"/>
+          <p:nvPr/>
+        </p:nvSpPr>
+        <p:spPr>
+          <a:xfrm>
+            <a:off x="548640" y="2240280"/>
+            <a:ext cx="3529584" cy="1828800"/>
+          </a:xfrm>
+          <a:prstGeom prst="rect">
+            <a:avLst/>
+          </a:prstGeom>
+          <a:noFill/>
+          <a:ln/>
+        </p:spPr>
+        <p:txBody>
+          <a:bodyPr wrap="square" lIns="0" tIns="0" rIns="0" bIns="0" rtlCol="0" anchor="t"/>
+          <a:lstStyle/>
+          <a:p>
+            <a:pPr marL="342900" indent="-342900">
+              <a:spcAft>
+                <a:spcPts val="600"/>
+              </a:spcAft>
+              <a:buSzPct val="100000"/>
+              <a:buChar char="•"/>
+            </a:pPr>
+            <a:r>
+              <a:rPr lang="en-US" sz="1400" dirty="0">
+                <a:solidFill>
+                  <a:schemeClr val="tx1"/>
+                </a:solidFill>
+              </a:rPr>
+              <a:t>750 negotiated deals a year; 19% loop back for a re-quote</a:t>
+            </a:r>
+            <a:endParaRPr lang="en-US" sz="1400" dirty="0"/>
+          </a:p>
+          <a:p>
+            <a:pPr marL="342900" indent="-342900">
+              <a:spcAft>
+                <a:spcPts val="600"/>
+              </a:spcAft>
+              <a:buSzPct val="100000"/>
+              <a:buChar char="•"/>
+            </a:pPr>
+            <a:r>
+              <a:rPr lang="en-US" sz="1400" dirty="0">
+                <a:solidFill>
+                  <a:schemeClr val="tx1"/>
+                </a:solidFill>
+              </a:rPr>
+              <a:t>Re-quoted deals win 31% vs 49%</a:t>
+            </a:r>
+            <a:endParaRPr lang="en-US" sz="1400" dirty="0"/>
+          </a:p>
+          <a:p>
+            <a:pPr marL="342900" indent="-342900">
+              <a:spcAft>
+                <a:spcPts val="600"/>
+              </a:spcAft>
+              <a:buSzPct val="100000"/>
+              <a:buChar char="•"/>
+            </a:pPr>
+            <a:r>
+              <a:rPr lang="en-US" sz="1400" dirty="0">
+                <a:solidFill>
+                  <a:schemeClr val="tx1"/>
+                </a:solidFill>
+              </a:rPr>
+              <a:t>EMEA approvals take 7.0 days vs 1.2</a:t>
+            </a:r>
+            <a:endParaRPr lang="en-US" sz="1400" dirty="0"/>
+          </a:p>
+        </p:txBody>
+      </p:sp>
+      <p:sp>
+        <p:nvSpPr>
+          <p:cNvPr id="7" name="Value column 2 heading"/>
+          <p:cNvSpPr txBox="1"/>
+          <p:nvPr/>
+        </p:nvSpPr>
+        <p:spPr>
+          <a:xfrm>
+            <a:off x="4315968" y="1828800"/>
+            <a:ext cx="3529584" cy="365760"/>
+          </a:xfrm>
+          <a:prstGeom prst="rect">
+            <a:avLst/>
+          </a:prstGeom>
+          <a:noFill/>
+          <a:ln/>
+        </p:spPr>
+        <p:txBody>
+          <a:bodyPr wrap="square" lIns="0" tIns="0" rIns="0" bIns="0" rtlCol="0" anchor="t"/>
+          <a:lstStyle/>
+          <a:p>
+            <a:pPr indent="0" marL="0">
+              <a:buNone/>
+            </a:pPr>
+            <a:r>
+              <a:rPr lang="en-US" sz="1600" b="1" dirty="0">
+                <a:solidFill>
+                  <a:schemeClr val="accent6"/>
+                </a:solidFill>
+              </a:rPr>
+              <a:t>Root cause (to capture)</a:t>
+            </a:r>
+            <a:endParaRPr lang="en-US" sz="1600" dirty="0"/>
+          </a:p>
+        </p:txBody>
+      </p:sp>
+      <p:sp>
+        <p:nvSpPr>
+          <p:cNvPr id="8" name="Value column 2 body"/>
+          <p:cNvSpPr txBox="1"/>
+          <p:nvPr/>
+        </p:nvSpPr>
+        <p:spPr>
+          <a:xfrm>
+            <a:off x="4315968" y="2240280"/>
+            <a:ext cx="3529584" cy="1828800"/>
+          </a:xfrm>
+          <a:prstGeom prst="rect">
+            <a:avLst/>
+          </a:prstGeom>
+          <a:noFill/>
+          <a:ln/>
+        </p:spPr>
+        <p:txBody>
+          <a:bodyPr wrap="square" lIns="0" tIns="0" rIns="0" bIns="0" rtlCol="0" anchor="t"/>
+          <a:lstStyle/>
+          <a:p>
+            <a:pPr marL="342900" indent="-342900">
+              <a:spcAft>
+                <a:spcPts val="600"/>
+              </a:spcAft>
+              <a:buSzPct val="100000"/>
+              <a:buChar char="•"/>
+            </a:pPr>
+            <a:r>
+              <a:rPr lang="en-US" sz="1400" dirty="0">
+                <a:solidFill>
+                  <a:schemeClr val="tx1"/>
+                </a:solidFill>
+              </a:rPr>
+              <a:t>Reason codes: quote expired, discount, scope, pricing error</a:t>
+            </a:r>
+            <a:endParaRPr lang="en-US" sz="1400" dirty="0"/>
+          </a:p>
+          <a:p>
+            <a:pPr marL="342900" indent="-342900">
+              <a:spcAft>
+                <a:spcPts val="600"/>
+              </a:spcAft>
+              <a:buSzPct val="100000"/>
+              <a:buChar char="•"/>
+            </a:pPr>
+            <a:r>
+              <a:rPr lang="en-US" sz="1400" dirty="0">
+                <a:solidFill>
+                  <a:schemeClr val="tx1"/>
+                </a:solidFill>
+              </a:rPr>
+              <a:t>Hotspots by approver queue, region and rep</a:t>
+            </a:r>
+            <a:endParaRPr lang="en-US" sz="1400" dirty="0"/>
+          </a:p>
+          <a:p>
+            <a:pPr marL="342900" indent="-342900">
+              <a:spcAft>
+                <a:spcPts val="600"/>
+              </a:spcAft>
+              <a:buSzPct val="100000"/>
+              <a:buChar char="•"/>
+            </a:pPr>
+            <a:r>
+              <a:rPr lang="en-US" sz="1400" dirty="0">
+                <a:solidFill>
+                  <a:schemeClr val="tx1"/>
+                </a:solidFill>
+              </a:rPr>
+              <a:t>Confirm: slow approval → expired quote → re-quote</a:t>
+            </a:r>
+            <a:endParaRPr lang="en-US" sz="1400" dirty="0"/>
+          </a:p>
+        </p:txBody>
+      </p:sp>
+      <p:sp>
+        <p:nvSpPr>
+          <p:cNvPr id="9" name="Value column 3 heading"/>
+          <p:cNvSpPr txBox="1"/>
+          <p:nvPr/>
+        </p:nvSpPr>
+        <p:spPr>
+          <a:xfrm>
+            <a:off x="8083296" y="1828800"/>
+            <a:ext cx="3529584" cy="365760"/>
+          </a:xfrm>
+          <a:prstGeom prst="rect">
+            <a:avLst/>
+          </a:prstGeom>
+          <a:noFill/>
+          <a:ln/>
+        </p:spPr>
+        <p:txBody>
+          <a:bodyPr wrap="square" lIns="0" tIns="0" rIns="0" bIns="0" rtlCol="0" anchor="t"/>
+          <a:lstStyle/>
+          <a:p>
+            <a:pPr indent="0" marL="0">
+              <a:buNone/>
+            </a:pPr>
+            <a:r>
+              <a:rPr lang="en-US" sz="1600" b="1" dirty="0">
+                <a:solidFill>
+                  <a:schemeClr val="accent6"/>
+                </a:solidFill>
+              </a:rPr>
+              <a:t>Solution with Apromore</a:t>
+            </a:r>
+            <a:endParaRPr lang="en-US" sz="1600" dirty="0"/>
+          </a:p>
+        </p:txBody>
+      </p:sp>
+      <p:sp>
+        <p:nvSpPr>
+          <p:cNvPr id="10" name="Value column 3 body"/>
+          <p:cNvSpPr txBox="1"/>
+          <p:nvPr/>
+        </p:nvSpPr>
+        <p:spPr>
+          <a:xfrm>
+            <a:off x="8083296" y="2240280"/>
+            <a:ext cx="3529584" cy="1828800"/>
+          </a:xfrm>
+          <a:prstGeom prst="rect">
+            <a:avLst/>
+          </a:prstGeom>
+          <a:noFill/>
+          <a:ln/>
+        </p:spPr>
+        <p:txBody>
+          <a:bodyPr wrap="square" lIns="0" tIns="0" rIns="0" bIns="0" rtlCol="0" anchor="t"/>
+          <a:lstStyle/>
+          <a:p>
+            <a:pPr marL="342900" indent="-342900">
+              <a:spcAft>
+                <a:spcPts val="600"/>
+              </a:spcAft>
+              <a:buSzPct val="100000"/>
+              <a:buChar char="•"/>
+            </a:pPr>
+            <a:r>
+              <a:rPr lang="en-US" sz="1400" dirty="0">
+                <a:solidFill>
+                  <a:schemeClr val="tx1"/>
+                </a:solidFill>
+              </a:rPr>
+              <a:t>Performance views show where quotes wait and loop</a:t>
+            </a:r>
+            <a:endParaRPr lang="en-US" sz="1400" dirty="0"/>
+          </a:p>
+          <a:p>
+            <a:pPr marL="342900" indent="-342900">
+              <a:spcAft>
+                <a:spcPts val="600"/>
+              </a:spcAft>
+              <a:buSzPct val="100000"/>
+              <a:buChar char="•"/>
+            </a:pPr>
+            <a:r>
+              <a:rPr lang="en-US" sz="1400" dirty="0">
+                <a:solidFill>
+                  <a:schemeClr val="tx1"/>
+                </a:solidFill>
+              </a:rPr>
+              <a:t>Conformance checking flags skipped steps</a:t>
+            </a:r>
+            <a:endParaRPr lang="en-US" sz="1400" dirty="0"/>
+          </a:p>
+          <a:p>
+            <a:pPr marL="342900" indent="-342900">
+              <a:spcAft>
+                <a:spcPts val="600"/>
+              </a:spcAft>
+              <a:buSzPct val="100000"/>
+              <a:buChar char="•"/>
+            </a:pPr>
+            <a:r>
+              <a:rPr lang="en-US" sz="1400" dirty="0">
+                <a:solidFill>
+                  <a:schemeClr val="tx1"/>
+                </a:solidFill>
+              </a:rPr>
+              <a:t>Simulate a delegated EMEA approval threshold first</a:t>
+            </a:r>
+            <a:endParaRPr lang="en-US" sz="1400" dirty="0"/>
+          </a:p>
+        </p:txBody>
+      </p:sp>
+      <p:sp>
+        <p:nvSpPr>
+          <p:cNvPr id="11" name="Chain 1 label"/>
+          <p:cNvSpPr txBox="1"/>
+          <p:nvPr/>
+        </p:nvSpPr>
+        <p:spPr>
+          <a:xfrm>
+            <a:off x="548640" y="4251960"/>
+            <a:ext cx="1508760" cy="411480"/>
+          </a:xfrm>
+          <a:prstGeom prst="rect">
+            <a:avLst/>
+          </a:prstGeom>
+          <a:noFill/>
+          <a:ln/>
+        </p:spPr>
+        <p:txBody>
+          <a:bodyPr wrap="square" lIns="0" tIns="0" rIns="0" bIns="0" rtlCol="0" anchor="b"/>
+          <a:lstStyle/>
+          <a:p>
+            <a:pPr algn="ctr" indent="0" marL="0">
+              <a:buNone/>
+            </a:pPr>
+            <a:r>
+              <a:rPr lang="en-US" sz="1200" b="1" dirty="0">
+                <a:solidFill>
+                  <a:schemeClr val="tx2"/>
+                </a:solidFill>
+              </a:rPr>
+              <a:t>Negotiated deals / yr</a:t>
+            </a:r>
+            <a:endParaRPr lang="en-US" sz="1200" dirty="0"/>
+          </a:p>
+        </p:txBody>
+      </p:sp>
+      <p:sp>
+        <p:nvSpPr>
+          <p:cNvPr id="12" name="Chain 1 box"/>
+          <p:cNvSpPr/>
+          <p:nvPr/>
+        </p:nvSpPr>
+        <p:spPr>
+          <a:xfrm>
+            <a:off x="548640" y="4709160"/>
+            <a:ext cx="1508760" cy="777240"/>
+          </a:xfrm>
+          <a:prstGeom prst="roundRect">
+            <a:avLst>
+              <a:gd name="adj" fmla="val 14118"/>
+            </a:avLst>
+          </a:prstGeom>
+          <a:solidFill>
+            <a:schemeClr val="bg2"/>
+          </a:solidFill>
+          <a:ln/>
+        </p:spPr>
+      </p:sp>
+      <p:sp>
+        <p:nvSpPr>
+          <p:cNvPr id="13" name="Chain 1 value"/>
+          <p:cNvSpPr txBox="1"/>
+          <p:nvPr/>
+        </p:nvSpPr>
+        <p:spPr>
+          <a:xfrm>
+            <a:off x="548640" y="4709160"/>
+            <a:ext cx="1508760" cy="777240"/>
+          </a:xfrm>
+          <a:prstGeom prst="rect">
+            <a:avLst/>
+          </a:prstGeom>
+          <a:noFill/>
+          <a:ln/>
+        </p:spPr>
+        <p:txBody>
+          <a:bodyPr wrap="square" lIns="0" tIns="0" rIns="0" bIns="0" rtlCol="0" anchor="ctr"/>
+          <a:lstStyle/>
+          <a:p>
+            <a:pPr algn="ctr" indent="0" marL="0">
+              <a:buNone/>
+            </a:pPr>
+            <a:r>
+              <a:rPr lang="en-US" sz="2200" b="1" dirty="0">
+                <a:solidFill>
+                  <a:schemeClr val="tx2"/>
+                </a:solidFill>
+              </a:rPr>
+              <a:t>750</a:t>
+            </a:r>
+            <a:endParaRPr lang="en-US" sz="2200" dirty="0"/>
+          </a:p>
+        </p:txBody>
+      </p:sp>
+      <p:sp>
+        <p:nvSpPr>
+          <p:cNvPr id="14" name="Chain 1 operator"/>
+          <p:cNvSpPr txBox="1"/>
+          <p:nvPr/>
+        </p:nvSpPr>
+        <p:spPr>
+          <a:xfrm>
+            <a:off x="2057400" y="4709160"/>
+            <a:ext cx="274320" cy="777240"/>
+          </a:xfrm>
+          <a:prstGeom prst="rect">
+            <a:avLst/>
+          </a:prstGeom>
+          <a:noFill/>
+          <a:ln/>
+        </p:spPr>
+        <p:txBody>
+          <a:bodyPr wrap="square" lIns="0" tIns="0" rIns="0" bIns="0" rtlCol="0" anchor="ctr"/>
+          <a:lstStyle/>
+          <a:p>
+            <a:pPr algn="ctr" indent="0" marL="0">
+              <a:buNone/>
+            </a:pPr>
+            <a:r>
+              <a:rPr lang="en-US" sz="2000" dirty="0">
+                <a:solidFill>
+                  <a:schemeClr val="accent6"/>
+                </a:solidFill>
+              </a:rPr>
+              <a:t>×</a:t>
+            </a:r>
+            <a:endParaRPr lang="en-US" sz="2000" dirty="0"/>
+          </a:p>
+        </p:txBody>
+      </p:sp>
+      <p:sp>
+        <p:nvSpPr>
+          <p:cNvPr id="15" name="Chain 2 label"/>
+          <p:cNvSpPr txBox="1"/>
+          <p:nvPr/>
+        </p:nvSpPr>
+        <p:spPr>
+          <a:xfrm>
+            <a:off x="2331720" y="4251960"/>
+            <a:ext cx="1508760" cy="411480"/>
+          </a:xfrm>
+          <a:prstGeom prst="rect">
+            <a:avLst/>
+          </a:prstGeom>
+          <a:noFill/>
+          <a:ln/>
+        </p:spPr>
+        <p:txBody>
+          <a:bodyPr wrap="square" lIns="0" tIns="0" rIns="0" bIns="0" rtlCol="0" anchor="b"/>
+          <a:lstStyle/>
+          <a:p>
+            <a:pPr algn="ctr" indent="0" marL="0">
+              <a:buNone/>
+            </a:pPr>
+            <a:r>
+              <a:rPr lang="en-US" sz="1200" b="1" dirty="0">
+                <a:solidFill>
+                  <a:schemeClr val="tx2"/>
+                </a:solidFill>
+              </a:rPr>
+              <a:t>Re-quotes per deal</a:t>
+            </a:r>
+            <a:endParaRPr lang="en-US" sz="1200" dirty="0"/>
+          </a:p>
+        </p:txBody>
+      </p:sp>
+      <p:sp>
+        <p:nvSpPr>
+          <p:cNvPr id="16" name="Chain 2 box"/>
+          <p:cNvSpPr/>
+          <p:nvPr/>
+        </p:nvSpPr>
+        <p:spPr>
+          <a:xfrm>
+            <a:off x="2331720" y="4709160"/>
+            <a:ext cx="1508760" cy="777240"/>
+          </a:xfrm>
+          <a:prstGeom prst="roundRect">
+            <a:avLst>
+              <a:gd name="adj" fmla="val 14118"/>
+            </a:avLst>
+          </a:prstGeom>
+          <a:solidFill>
+            <a:schemeClr val="bg2"/>
+          </a:solidFill>
+          <a:ln/>
+        </p:spPr>
+      </p:sp>
+      <p:sp>
+        <p:nvSpPr>
+          <p:cNvPr id="17" name="Chain 2 value"/>
+          <p:cNvSpPr txBox="1"/>
+          <p:nvPr/>
+        </p:nvSpPr>
+        <p:spPr>
+          <a:xfrm>
+            <a:off x="2331720" y="4709160"/>
+            <a:ext cx="1508760" cy="777240"/>
+          </a:xfrm>
+          <a:prstGeom prst="rect">
+            <a:avLst/>
+          </a:prstGeom>
+          <a:noFill/>
+          <a:ln/>
+        </p:spPr>
+        <p:txBody>
+          <a:bodyPr wrap="square" lIns="0" tIns="0" rIns="0" bIns="0" rtlCol="0" anchor="ctr"/>
+          <a:lstStyle/>
+          <a:p>
+            <a:pPr algn="ctr" indent="0" marL="0">
+              <a:buNone/>
+            </a:pPr>
+            <a:r>
+              <a:rPr lang="en-US" sz="2200" b="1" dirty="0">
+                <a:solidFill>
+                  <a:schemeClr val="tx2"/>
+                </a:solidFill>
+              </a:rPr>
+              <a:t>0.19</a:t>
+            </a:r>
+            <a:endParaRPr lang="en-US" sz="2200" dirty="0"/>
+          </a:p>
+        </p:txBody>
+      </p:sp>
+      <p:sp>
+        <p:nvSpPr>
+          <p:cNvPr id="18" name="Chain 2 operator"/>
+          <p:cNvSpPr txBox="1"/>
+          <p:nvPr/>
+        </p:nvSpPr>
+        <p:spPr>
+          <a:xfrm>
+            <a:off x="3840480" y="4709160"/>
+            <a:ext cx="274320" cy="777240"/>
+          </a:xfrm>
+          <a:prstGeom prst="rect">
+            <a:avLst/>
+          </a:prstGeom>
+          <a:noFill/>
+          <a:ln/>
+        </p:spPr>
+        <p:txBody>
+          <a:bodyPr wrap="square" lIns="0" tIns="0" rIns="0" bIns="0" rtlCol="0" anchor="ctr"/>
+          <a:lstStyle/>
+          <a:p>
+            <a:pPr algn="ctr" indent="0" marL="0">
+              <a:buNone/>
+            </a:pPr>
+            <a:r>
+              <a:rPr lang="en-US" sz="2000" dirty="0">
+                <a:solidFill>
+                  <a:schemeClr val="accent6"/>
+                </a:solidFill>
+              </a:rPr>
+              <a:t>×</a:t>
+            </a:r>
+            <a:endParaRPr lang="en-US" sz="2000" dirty="0"/>
+          </a:p>
+        </p:txBody>
+      </p:sp>
+      <p:sp>
+        <p:nvSpPr>
+          <p:cNvPr id="19" name="Chain 3 label"/>
+          <p:cNvSpPr txBox="1"/>
+          <p:nvPr/>
+        </p:nvSpPr>
+        <p:spPr>
+          <a:xfrm>
+            <a:off x="4114800" y="4251960"/>
+            <a:ext cx="1508760" cy="411480"/>
+          </a:xfrm>
+          <a:prstGeom prst="rect">
+            <a:avLst/>
+          </a:prstGeom>
+          <a:noFill/>
+          <a:ln/>
+        </p:spPr>
+        <p:txBody>
+          <a:bodyPr wrap="square" lIns="0" tIns="0" rIns="0" bIns="0" rtlCol="0" anchor="b"/>
+          <a:lstStyle/>
+          <a:p>
+            <a:pPr algn="ctr" indent="0" marL="0">
+              <a:buNone/>
+            </a:pPr>
+            <a:r>
+              <a:rPr lang="en-US" sz="1200" b="1" dirty="0">
+                <a:solidFill>
+                  <a:schemeClr val="tx2"/>
+                </a:solidFill>
+              </a:rPr>
+              <a:t>Win-rate gap</a:t>
+            </a:r>
+            <a:endParaRPr lang="en-US" sz="1200" dirty="0"/>
+          </a:p>
+        </p:txBody>
+      </p:sp>
+      <p:sp>
+        <p:nvSpPr>
+          <p:cNvPr id="20" name="Chain 3 box"/>
+          <p:cNvSpPr/>
+          <p:nvPr/>
+        </p:nvSpPr>
+        <p:spPr>
+          <a:xfrm>
+            <a:off x="4114800" y="4709160"/>
+            <a:ext cx="1508760" cy="777240"/>
+          </a:xfrm>
+          <a:prstGeom prst="roundRect">
+            <a:avLst>
+              <a:gd name="adj" fmla="val 14118"/>
+            </a:avLst>
+          </a:prstGeom>
+          <a:solidFill>
+            <a:schemeClr val="bg2"/>
+          </a:solidFill>
+          <a:ln/>
+        </p:spPr>
+      </p:sp>
+      <p:sp>
+        <p:nvSpPr>
+          <p:cNvPr id="21" name="Chain 3 value"/>
+          <p:cNvSpPr txBox="1"/>
+          <p:nvPr/>
+        </p:nvSpPr>
+        <p:spPr>
+          <a:xfrm>
+            <a:off x="4114800" y="4709160"/>
+            <a:ext cx="1508760" cy="777240"/>
+          </a:xfrm>
+          <a:prstGeom prst="rect">
+            <a:avLst/>
+          </a:prstGeom>
+          <a:noFill/>
+          <a:ln/>
+        </p:spPr>
+        <p:txBody>
+          <a:bodyPr wrap="square" lIns="0" tIns="0" rIns="0" bIns="0" rtlCol="0" anchor="ctr"/>
+          <a:lstStyle/>
+          <a:p>
+            <a:pPr algn="ctr" indent="0" marL="0">
+              <a:buNone/>
+            </a:pPr>
+            <a:r>
+              <a:rPr lang="en-US" sz="2200" b="1" dirty="0">
+                <a:solidFill>
+                  <a:schemeClr val="tx2"/>
+                </a:solidFill>
+              </a:rPr>
+              <a:t>17.5 pts</a:t>
+            </a:r>
+            <a:endParaRPr lang="en-US" sz="2200" dirty="0"/>
+          </a:p>
+        </p:txBody>
+      </p:sp>
+      <p:sp>
+        <p:nvSpPr>
+          <p:cNvPr id="22" name="Chain 3 operator"/>
+          <p:cNvSpPr txBox="1"/>
+          <p:nvPr/>
+        </p:nvSpPr>
+        <p:spPr>
+          <a:xfrm>
+            <a:off x="5623560" y="4709160"/>
+            <a:ext cx="274320" cy="777240"/>
+          </a:xfrm>
+          <a:prstGeom prst="rect">
+            <a:avLst/>
+          </a:prstGeom>
+          <a:noFill/>
+          <a:ln/>
+        </p:spPr>
+        <p:txBody>
+          <a:bodyPr wrap="square" lIns="0" tIns="0" rIns="0" bIns="0" rtlCol="0" anchor="ctr"/>
+          <a:lstStyle/>
+          <a:p>
+            <a:pPr algn="ctr" indent="0" marL="0">
+              <a:buNone/>
+            </a:pPr>
+            <a:r>
+              <a:rPr lang="en-US" sz="2000" dirty="0">
+                <a:solidFill>
+                  <a:schemeClr val="accent6"/>
+                </a:solidFill>
+              </a:rPr>
+              <a:t>×</a:t>
+            </a:r>
+            <a:endParaRPr lang="en-US" sz="2000" dirty="0"/>
+          </a:p>
+        </p:txBody>
+      </p:sp>
+      <p:sp>
+        <p:nvSpPr>
+          <p:cNvPr id="23" name="Chain 4 label"/>
+          <p:cNvSpPr txBox="1"/>
+          <p:nvPr/>
+        </p:nvSpPr>
+        <p:spPr>
+          <a:xfrm>
+            <a:off x="5897880" y="4251960"/>
+            <a:ext cx="1508760" cy="411480"/>
+          </a:xfrm>
+          <a:prstGeom prst="rect">
+            <a:avLst/>
+          </a:prstGeom>
+          <a:noFill/>
+          <a:ln/>
+        </p:spPr>
+        <p:txBody>
+          <a:bodyPr wrap="square" lIns="0" tIns="0" rIns="0" bIns="0" rtlCol="0" anchor="b"/>
+          <a:lstStyle/>
+          <a:p>
+            <a:pPr algn="ctr" indent="0" marL="0">
+              <a:buNone/>
+            </a:pPr>
+            <a:r>
+              <a:rPr lang="en-US" sz="1200" b="1" dirty="0">
+                <a:solidFill>
+                  <a:schemeClr val="tx2"/>
+                </a:solidFill>
+              </a:rPr>
+              <a:t>Average won deal</a:t>
+            </a:r>
+            <a:endParaRPr lang="en-US" sz="1200" dirty="0"/>
+          </a:p>
+        </p:txBody>
+      </p:sp>
+      <p:sp>
+        <p:nvSpPr>
+          <p:cNvPr id="24" name="Chain 4 box"/>
+          <p:cNvSpPr/>
+          <p:nvPr/>
+        </p:nvSpPr>
+        <p:spPr>
+          <a:xfrm>
+            <a:off x="5897880" y="4709160"/>
+            <a:ext cx="1508760" cy="777240"/>
+          </a:xfrm>
+          <a:prstGeom prst="roundRect">
+            <a:avLst>
+              <a:gd name="adj" fmla="val 14118"/>
+            </a:avLst>
+          </a:prstGeom>
+          <a:solidFill>
+            <a:schemeClr val="bg2"/>
+          </a:solidFill>
+          <a:ln/>
+        </p:spPr>
+      </p:sp>
+      <p:sp>
+        <p:nvSpPr>
+          <p:cNvPr id="25" name="Chain 4 value"/>
+          <p:cNvSpPr txBox="1"/>
+          <p:nvPr/>
+        </p:nvSpPr>
+        <p:spPr>
+          <a:xfrm>
+            <a:off x="5897880" y="4709160"/>
+            <a:ext cx="1508760" cy="777240"/>
+          </a:xfrm>
+          <a:prstGeom prst="rect">
+            <a:avLst/>
+          </a:prstGeom>
+          <a:noFill/>
+          <a:ln/>
+        </p:spPr>
+        <p:txBody>
+          <a:bodyPr wrap="square" lIns="0" tIns="0" rIns="0" bIns="0" rtlCol="0" anchor="ctr"/>
+          <a:lstStyle/>
+          <a:p>
+            <a:pPr algn="ctr" indent="0" marL="0">
+              <a:buNone/>
+            </a:pPr>
+            <a:r>
+              <a:rPr lang="en-US" sz="2200" b="1" dirty="0">
+                <a:solidFill>
+                  <a:schemeClr val="tx2"/>
+                </a:solidFill>
+              </a:rPr>
+              <a:t>$53k</a:t>
+            </a:r>
+            <a:endParaRPr lang="en-US" sz="2200" dirty="0"/>
+          </a:p>
+        </p:txBody>
+      </p:sp>
+      <p:sp>
+        <p:nvSpPr>
+          <p:cNvPr id="26" name="Chain 4 operator"/>
+          <p:cNvSpPr txBox="1"/>
+          <p:nvPr/>
+        </p:nvSpPr>
+        <p:spPr>
+          <a:xfrm>
+            <a:off x="7406640" y="4709160"/>
+            <a:ext cx="274320" cy="777240"/>
+          </a:xfrm>
+          <a:prstGeom prst="rect">
+            <a:avLst/>
+          </a:prstGeom>
+          <a:noFill/>
+          <a:ln/>
+        </p:spPr>
+        <p:txBody>
+          <a:bodyPr wrap="square" lIns="0" tIns="0" rIns="0" bIns="0" rtlCol="0" anchor="ctr"/>
+          <a:lstStyle/>
+          <a:p>
+            <a:pPr algn="ctr" indent="0" marL="0">
+              <a:buNone/>
+            </a:pPr>
+            <a:r>
+              <a:rPr lang="en-US" sz="2000" dirty="0">
+                <a:solidFill>
+                  <a:schemeClr val="accent6"/>
+                </a:solidFill>
+              </a:rPr>
+              <a:t>×</a:t>
+            </a:r>
+            <a:endParaRPr lang="en-US" sz="2000" dirty="0"/>
+          </a:p>
+        </p:txBody>
+      </p:sp>
+      <p:sp>
+        <p:nvSpPr>
+          <p:cNvPr id="27" name="Chain 5 label"/>
+          <p:cNvSpPr txBox="1"/>
+          <p:nvPr/>
+        </p:nvSpPr>
+        <p:spPr>
+          <a:xfrm>
+            <a:off x="7680960" y="4251960"/>
+            <a:ext cx="1508760" cy="411480"/>
+          </a:xfrm>
+          <a:prstGeom prst="rect">
+            <a:avLst/>
+          </a:prstGeom>
+          <a:noFill/>
+          <a:ln/>
+        </p:spPr>
+        <p:txBody>
+          <a:bodyPr wrap="square" lIns="0" tIns="0" rIns="0" bIns="0" rtlCol="0" anchor="b"/>
+          <a:lstStyle/>
+          <a:p>
+            <a:pPr algn="ctr" indent="0" marL="0">
+              <a:buNone/>
+            </a:pPr>
+            <a:r>
+              <a:rPr lang="en-US" sz="1200" b="1" dirty="0">
+                <a:solidFill>
+                  <a:schemeClr val="tx2"/>
+                </a:solidFill>
+              </a:rPr>
+              <a:t>Improvement</a:t>
+            </a:r>
+            <a:endParaRPr lang="en-US" sz="1200" dirty="0"/>
+          </a:p>
+        </p:txBody>
+      </p:sp>
+      <p:sp>
+        <p:nvSpPr>
+          <p:cNvPr id="28" name="Chain 5 box"/>
+          <p:cNvSpPr/>
+          <p:nvPr/>
+        </p:nvSpPr>
+        <p:spPr>
+          <a:xfrm>
+            <a:off x="7680960" y="4709160"/>
+            <a:ext cx="1508760" cy="777240"/>
+          </a:xfrm>
+          <a:prstGeom prst="roundRect">
+            <a:avLst>
+              <a:gd name="adj" fmla="val 14118"/>
+            </a:avLst>
+          </a:prstGeom>
+          <a:solidFill>
+            <a:schemeClr val="bg2"/>
+          </a:solidFill>
+          <a:ln/>
+        </p:spPr>
+      </p:sp>
+      <p:sp>
+        <p:nvSpPr>
+          <p:cNvPr id="29" name="Chain 5 value"/>
+          <p:cNvSpPr txBox="1"/>
+          <p:nvPr/>
+        </p:nvSpPr>
+        <p:spPr>
+          <a:xfrm>
+            <a:off x="7680960" y="4709160"/>
+            <a:ext cx="1508760" cy="777240"/>
+          </a:xfrm>
+          <a:prstGeom prst="rect">
+            <a:avLst/>
+          </a:prstGeom>
+          <a:noFill/>
+          <a:ln/>
+        </p:spPr>
+        <p:txBody>
+          <a:bodyPr wrap="square" lIns="0" tIns="0" rIns="0" bIns="0" rtlCol="0" anchor="ctr"/>
+          <a:lstStyle/>
+          <a:p>
+            <a:pPr algn="ctr" indent="0" marL="0">
+              <a:buNone/>
+            </a:pPr>
+            <a:r>
+              <a:rPr lang="en-US" sz="2200" b="1" dirty="0">
+                <a:solidFill>
+                  <a:schemeClr val="tx2"/>
+                </a:solidFill>
+              </a:rPr>
+              <a:t>50%</a:t>
+            </a:r>
+            <a:endParaRPr lang="en-US" sz="2200" dirty="0"/>
+          </a:p>
+        </p:txBody>
+      </p:sp>
+      <p:sp>
+        <p:nvSpPr>
+          <p:cNvPr id="30" name="Chain 5 operator"/>
+          <p:cNvSpPr txBox="1"/>
+          <p:nvPr/>
+        </p:nvSpPr>
+        <p:spPr>
+          <a:xfrm>
+            <a:off x="9189720" y="4709160"/>
+            <a:ext cx="274320" cy="777240"/>
+          </a:xfrm>
+          <a:prstGeom prst="rect">
+            <a:avLst/>
+          </a:prstGeom>
+          <a:noFill/>
+          <a:ln/>
+        </p:spPr>
+        <p:txBody>
+          <a:bodyPr wrap="square" lIns="0" tIns="0" rIns="0" bIns="0" rtlCol="0" anchor="ctr"/>
+          <a:lstStyle/>
+          <a:p>
+            <a:pPr algn="ctr" indent="0" marL="0">
+              <a:buNone/>
+            </a:pPr>
+            <a:r>
+              <a:rPr lang="en-US" sz="2000" dirty="0">
+                <a:solidFill>
+                  <a:schemeClr val="accent6"/>
+                </a:solidFill>
+              </a:rPr>
+              <a:t>=</a:t>
+            </a:r>
+            <a:endParaRPr lang="en-US" sz="2000" dirty="0"/>
+          </a:p>
+        </p:txBody>
+      </p:sp>
+      <p:sp>
+        <p:nvSpPr>
+          <p:cNvPr id="31" name="Framed value pill"/>
+          <p:cNvSpPr/>
+          <p:nvPr/>
+        </p:nvSpPr>
+        <p:spPr>
+          <a:xfrm>
+            <a:off x="9509760" y="4251960"/>
+            <a:ext cx="2103120" cy="1234440"/>
           </a:xfrm>
           <a:prstGeom prst="roundRect">
             <a:avLst>
@@ -5427,21 +7377,21 @@
             </a:avLst>
           </a:prstGeom>
           <a:solidFill>
-            <a:schemeClr val="bg2"/>
+            <a:schemeClr val="tx2"/>
           </a:solidFill>
           <a:ln/>
         </p:spPr>
       </p:sp>
       <p:sp>
         <p:nvSpPr>
-          <p:cNvPr id="5" name="Takeaway 1 text"/>
-          <p:cNvSpPr txBox="1"/>
-          <p:nvPr/>
-        </p:nvSpPr>
-        <p:spPr>
-          <a:xfrm>
-            <a:off x="731520" y="4956048"/>
-            <a:ext cx="3163824" cy="1005840"/>
+          <p:cNvPr id="32" name="Framed value"/>
+          <p:cNvSpPr txBox="1"/>
+          <p:nvPr/>
+        </p:nvSpPr>
+        <p:spPr>
+          <a:xfrm>
+            <a:off x="9509760" y="4251960"/>
+            <a:ext cx="2103120" cy="1234440"/>
           </a:xfrm>
           <a:prstGeom prst="rect">
             <a:avLst/>
@@ -5453,166 +7403,68 @@
           <a:bodyPr wrap="square" lIns="0" tIns="0" rIns="0" bIns="0" rtlCol="0" anchor="ctr"/>
           <a:lstStyle/>
           <a:p>
+            <a:pPr algn="ctr" indent="0" marL="0">
+              <a:buNone/>
+            </a:pPr>
+            <a:r>
+              <a:rPr lang="en-US" sz="3000" b="1" dirty="0">
+                <a:solidFill>
+                  <a:schemeClr val="bg1"/>
+                </a:solidFill>
+              </a:rPr>
+              <a:t>≈ $669k</a:t>
+            </a:r>
+            <a:endParaRPr lang="en-US" sz="1400" dirty="0"/>
+          </a:p>
+          <a:p>
+            <a:pPr algn="ctr" indent="0" marL="0">
+              <a:buNone/>
+            </a:pPr>
+            <a:r>
+              <a:rPr lang="en-US" sz="1200" dirty="0">
+                <a:solidFill>
+                  <a:schemeClr val="accent3"/>
+                </a:solidFill>
+              </a:rPr>
+              <a:t>revenue upside p.a.</a:t>
+            </a:r>
+            <a:endParaRPr lang="en-US" sz="1400" dirty="0"/>
+          </a:p>
+        </p:txBody>
+      </p:sp>
+      <p:sp>
+        <p:nvSpPr>
+          <p:cNvPr id="33" name="Assumptions"/>
+          <p:cNvSpPr txBox="1"/>
+          <p:nvPr/>
+        </p:nvSpPr>
+        <p:spPr>
+          <a:xfrm>
+            <a:off x="548640" y="5669280"/>
+            <a:ext cx="11064240" cy="457200"/>
+          </a:xfrm>
+          <a:prstGeom prst="rect">
+            <a:avLst/>
+          </a:prstGeom>
+          <a:noFill/>
+          <a:ln/>
+        </p:spPr>
+        <p:txBody>
+          <a:bodyPr wrap="square" lIns="0" tIns="0" rIns="0" bIns="0" rtlCol="0" anchor="t"/>
+          <a:lstStyle/>
+          <a:p>
             <a:pPr indent="0" marL="0">
               <a:buNone/>
             </a:pPr>
             <a:r>
-              <a:rPr lang="en-US" sz="1400" dirty="0">
-                <a:solidFill>
-                  <a:schemeClr val="tx2"/>
-                </a:solidFill>
-              </a:rPr>
-              <a:t>EMEA's single approver adds about 6 days per discounted deal.</a:t>
-            </a:r>
-            <a:endParaRPr lang="en-US" sz="1400" dirty="0"/>
-          </a:p>
-        </p:txBody>
-      </p:sp>
-      <p:graphicFrame>
-        <p:nvGraphicFramePr>
-          <p:cNvPr id="6" name="Chart 2" descr=""/>
-          <p:cNvGraphicFramePr/>
-          <p:nvPr/>
-        </p:nvGraphicFramePr>
-        <p:xfrm>
-          <a:off x="4315968" y="1325880"/>
-          <a:ext cx="3529584" cy="3383280"/>
-        </p:xfrm>
-        <a:graphic xmlns:a="http://schemas.openxmlformats.org/drawingml/2006/main">
-          <a:graphicData uri="http://schemas.openxmlformats.org/drawingml/2006/chart">
-            <c:chart xmlns:c="http://schemas.openxmlformats.org/drawingml/2006/chart" r:id="rId2"/>
-          </a:graphicData>
-        </a:graphic>
-      </p:graphicFrame>
-      <p:sp>
-        <p:nvSpPr>
-          <p:cNvPr id="7" name="Takeaway 2"/>
-          <p:cNvSpPr/>
-          <p:nvPr/>
-        </p:nvSpPr>
-        <p:spPr>
-          <a:xfrm>
-            <a:off x="4315968" y="4846320"/>
-            <a:ext cx="3529584" cy="1234440"/>
-          </a:xfrm>
-          <a:prstGeom prst="roundRect">
-            <a:avLst>
-              <a:gd name="adj" fmla="val 8889"/>
-            </a:avLst>
-          </a:prstGeom>
-          <a:solidFill>
-            <a:schemeClr val="bg2"/>
-          </a:solidFill>
-          <a:ln/>
-        </p:spPr>
-      </p:sp>
-      <p:sp>
-        <p:nvSpPr>
-          <p:cNvPr id="8" name="Takeaway 2 text"/>
-          <p:cNvSpPr txBox="1"/>
-          <p:nvPr/>
-        </p:nvSpPr>
-        <p:spPr>
-          <a:xfrm>
-            <a:off x="4498848" y="4956048"/>
-            <a:ext cx="3163824" cy="1005840"/>
-          </a:xfrm>
-          <a:prstGeom prst="rect">
-            <a:avLst/>
-          </a:prstGeom>
-          <a:noFill/>
-          <a:ln/>
-        </p:spPr>
-        <p:txBody>
-          <a:bodyPr wrap="square" lIns="0" tIns="0" rIns="0" bIns="0" rtlCol="0" anchor="ctr"/>
-          <a:lstStyle/>
-          <a:p>
-            <a:pPr indent="0" marL="0">
-              <a:buNone/>
-            </a:pPr>
-            <a:r>
-              <a:rPr lang="en-US" sz="1400" dirty="0">
-                <a:solidFill>
-                  <a:schemeClr val="tx2"/>
-                </a:solidFill>
-              </a:rPr>
-              <a:t>19% of negotiated deals are re-quoted, and they win 18 points less often.</a:t>
-            </a:r>
-            <a:endParaRPr lang="en-US" sz="1400" dirty="0"/>
-          </a:p>
-        </p:txBody>
-      </p:sp>
-      <p:graphicFrame>
-        <p:nvGraphicFramePr>
-          <p:cNvPr id="9" name="Chart 3" descr=""/>
-          <p:cNvGraphicFramePr/>
-          <p:nvPr/>
-        </p:nvGraphicFramePr>
-        <p:xfrm>
-          <a:off x="8083296" y="1325880"/>
-          <a:ext cx="3529584" cy="3383280"/>
-        </p:xfrm>
-        <a:graphic xmlns:a="http://schemas.openxmlformats.org/drawingml/2006/main">
-          <a:graphicData uri="http://schemas.openxmlformats.org/drawingml/2006/chart">
-            <c:chart xmlns:c="http://schemas.openxmlformats.org/drawingml/2006/chart" r:id="rId3"/>
-          </a:graphicData>
-        </a:graphic>
-      </p:graphicFrame>
-      <p:sp>
-        <p:nvSpPr>
-          <p:cNvPr id="10" name="Takeaway 3"/>
-          <p:cNvSpPr/>
-          <p:nvPr/>
-        </p:nvSpPr>
-        <p:spPr>
-          <a:xfrm>
-            <a:off x="8083296" y="4846320"/>
-            <a:ext cx="3529584" cy="1234440"/>
-          </a:xfrm>
-          <a:prstGeom prst="roundRect">
-            <a:avLst>
-              <a:gd name="adj" fmla="val 8889"/>
-            </a:avLst>
-          </a:prstGeom>
-          <a:solidFill>
-            <a:schemeClr val="bg2"/>
-          </a:solidFill>
-          <a:ln/>
-        </p:spPr>
-      </p:sp>
-      <p:sp>
-        <p:nvSpPr>
-          <p:cNvPr id="11" name="Takeaway 3 text"/>
-          <p:cNvSpPr txBox="1"/>
-          <p:nvPr/>
-        </p:nvSpPr>
-        <p:spPr>
-          <a:xfrm>
-            <a:off x="8266176" y="4956048"/>
-            <a:ext cx="3163824" cy="1005840"/>
-          </a:xfrm>
-          <a:prstGeom prst="rect">
-            <a:avLst/>
-          </a:prstGeom>
-          <a:noFill/>
-          <a:ln/>
-        </p:spPr>
-        <p:txBody>
-          <a:bodyPr wrap="square" lIns="0" tIns="0" rIns="0" bIns="0" rtlCol="0" anchor="ctr"/>
-          <a:lstStyle/>
-          <a:p>
-            <a:pPr indent="0" marL="0">
-              <a:buNone/>
-            </a:pPr>
-            <a:r>
-              <a:rPr lang="en-US" sz="1400" dirty="0">
-                <a:solidFill>
-                  <a:schemeClr val="tx2"/>
-                </a:solidFill>
-              </a:rPr>
-              <a:t>12% of deals skip Qualification and win less than half as often.</a:t>
-            </a:r>
-            <a:endParaRPr lang="en-US" sz="1400" dirty="0"/>
+              <a:rPr lang="en-US" sz="1100" i="1" dirty="0">
+                <a:solidFill>
+                  <a:schemeClr val="accent6"/>
+                </a:solidFill>
+              </a:rPr>
+              <a:t>Assumptions: annualised from 10 months of history; win-rate gap compares only deals that reached Negotiation; cycle-time gains not counted; half of the gap closed.</a:t>
+            </a:r>
+            <a:endParaRPr lang="en-US" sz="1100" dirty="0"/>
           </a:p>
         </p:txBody>
       </p:sp>
@@ -5688,7 +7540,49 @@
       </p:grpSpPr>
       <p:sp>
         <p:nvSpPr>
-          <p:cNvPr id="2" name="Text 0"/>
+          <p:cNvPr id="2" name="Decor circle large"/>
+          <p:cNvSpPr/>
+          <p:nvPr/>
+        </p:nvSpPr>
+        <p:spPr>
+          <a:xfrm>
+            <a:off x="8595360" y="3108960"/>
+            <a:ext cx="6035040" cy="6035040"/>
+          </a:xfrm>
+          <a:prstGeom prst="ellipse">
+            <a:avLst/>
+          </a:prstGeom>
+          <a:solidFill>
+            <a:schemeClr val="accent1">
+              <a:alpha val="30000"/>
+            </a:schemeClr>
+          </a:solidFill>
+          <a:ln/>
+        </p:spPr>
+      </p:sp>
+      <p:sp>
+        <p:nvSpPr>
+          <p:cNvPr id="3" name="Decor circle small"/>
+          <p:cNvSpPr/>
+          <p:nvPr/>
+        </p:nvSpPr>
+        <p:spPr>
+          <a:xfrm>
+            <a:off x="9692640" y="2377440"/>
+            <a:ext cx="685800" cy="685800"/>
+          </a:xfrm>
+          <a:prstGeom prst="ellipse">
+            <a:avLst/>
+          </a:prstGeom>
+          <a:solidFill>
+            <a:schemeClr val="accent3"/>
+          </a:solidFill>
+          <a:ln/>
+        </p:spPr>
+      </p:sp>
+      <p:sp>
+        <p:nvSpPr>
+          <p:cNvPr id="4" name="Text 0"/>
           <p:cNvSpPr/>
           <p:nvPr>
             <p:ph idx="100" type="title" hasCustomPrompt="1"/>
@@ -5696,102 +7590,46 @@
         </p:nvSpPr>
         <p:spPr>
           <a:xfrm>
-            <a:off x="548640" y="320040"/>
-            <a:ext cx="11064240" cy="822960"/>
-          </a:xfrm>
-          <a:prstGeom prst="rect">
-            <a:avLst/>
-          </a:prstGeom>
-          <a:noFill/>
-          <a:ln/>
-        </p:spPr>
-        <p:txBody>
-          <a:bodyPr wrap="square" lIns="0" tIns="0" rIns="0" bIns="0" rtlCol="0" anchor="ctr"/>
+            <a:off x="731520" y="2377440"/>
+            <a:ext cx="7863840" cy="1097280"/>
+          </a:xfrm>
+          <a:prstGeom prst="rect">
+            <a:avLst/>
+          </a:prstGeom>
+          <a:noFill/>
+          <a:ln/>
+        </p:spPr>
+        <p:txBody>
+          <a:bodyPr wrap="square" lIns="0" tIns="0" rIns="0" bIns="0" rtlCol="0" anchor="b"/>
           <a:lstStyle/>
           <a:p>
             <a:pPr algn="l" indent="0" marL="0">
               <a:buNone/>
             </a:pPr>
             <a:r>
-              <a:rPr lang="en-US" sz="3000" b="1" dirty="0">
-                <a:solidFill>
-                  <a:schemeClr val="tx2"/>
-                </a:solidFill>
-              </a:rPr>
-              <a:t>Value case: reduce re-quotes in quote-to-close</a:t>
-            </a:r>
-            <a:endParaRPr lang="en-US" sz="3000" dirty="0"/>
-          </a:p>
-        </p:txBody>
-      </p:sp>
-      <p:sp>
-        <p:nvSpPr>
-          <p:cNvPr id="3" name="Filter bar"/>
+              <a:rPr lang="en-US" sz="4400" b="1" dirty="0">
+                <a:solidFill>
+                  <a:schemeClr val="bg1"/>
+                </a:solidFill>
+              </a:rPr>
+              <a:t>Tech setup</a:t>
+            </a:r>
+            <a:endParaRPr lang="en-US" sz="4400" dirty="0"/>
+          </a:p>
+        </p:txBody>
+      </p:sp>
+      <p:sp>
+        <p:nvSpPr>
+          <p:cNvPr id="5" name="Text 0"/>
           <p:cNvSpPr/>
-          <p:nvPr/>
-        </p:nvSpPr>
-        <p:spPr>
-          <a:xfrm>
-            <a:off x="548640" y="1234440"/>
-            <a:ext cx="11064240" cy="411480"/>
-          </a:xfrm>
-          <a:prstGeom prst="roundRect">
-            <a:avLst>
-              <a:gd name="adj" fmla="val 26667"/>
-            </a:avLst>
-          </a:prstGeom>
-          <a:solidFill>
-            <a:schemeClr val="bg2"/>
-          </a:solidFill>
-          <a:ln/>
-        </p:spPr>
-      </p:sp>
-      <p:sp>
-        <p:nvSpPr>
-          <p:cNvPr id="4" name="Filter text"/>
-          <p:cNvSpPr txBox="1"/>
-          <p:nvPr/>
-        </p:nvSpPr>
-        <p:spPr>
-          <a:xfrm>
-            <a:off x="777240" y="1234440"/>
-            <a:ext cx="10607040" cy="411480"/>
-          </a:xfrm>
-          <a:prstGeom prst="rect">
-            <a:avLst/>
-          </a:prstGeom>
-          <a:noFill/>
-          <a:ln/>
-        </p:spPr>
-        <p:txBody>
-          <a:bodyPr wrap="square" lIns="0" tIns="0" rIns="0" bIns="0" rtlCol="0" anchor="ctr"/>
-          <a:lstStyle/>
-          <a:p>
-            <a:pPr indent="0" marL="0">
-              <a:buNone/>
-            </a:pPr>
-            <a:r>
-              <a:rPr lang="en-US" sz="1200" dirty="0">
-                <a:solidFill>
-                  <a:schemeClr val="tx2"/>
-                </a:solidFill>
-              </a:rPr>
-              <a:t>Time frame: 2025-10 to 2026-09   ·   New business   ·   Deals that reached Negotiation   ·   Owner: VP Revenue Operations</a:t>
-            </a:r>
-            <a:endParaRPr lang="en-US" sz="1200" dirty="0"/>
-          </a:p>
-        </p:txBody>
-      </p:sp>
-      <p:sp>
-        <p:nvSpPr>
-          <p:cNvPr id="5" name="Value column 1 heading"/>
-          <p:cNvSpPr txBox="1"/>
-          <p:nvPr/>
-        </p:nvSpPr>
-        <p:spPr>
-          <a:xfrm>
-            <a:off x="548640" y="1828800"/>
-            <a:ext cx="3529584" cy="365760"/>
+          <p:nvPr>
+            <p:ph idx="101" type="body" hasCustomPrompt="1"/>
+          </p:nvPr>
+        </p:nvSpPr>
+        <p:spPr>
+          <a:xfrm>
+            <a:off x="731520" y="3657600"/>
+            <a:ext cx="7315200" cy="914400"/>
           </a:xfrm>
           <a:prstGeom prst="rect">
             <a:avLst/>
@@ -5803,1121 +7641,18 @@
           <a:bodyPr wrap="square" lIns="0" tIns="0" rIns="0" bIns="0" rtlCol="0" anchor="t"/>
           <a:lstStyle/>
           <a:p>
-            <a:pPr indent="0" marL="0">
-              <a:buNone/>
-            </a:pPr>
-            <a:r>
-              <a:rPr lang="en-US" sz="1600" b="1" dirty="0">
-                <a:solidFill>
-                  <a:schemeClr val="accent6"/>
-                </a:solidFill>
-              </a:rPr>
-              <a:t>Challenge</a:t>
-            </a:r>
-            <a:endParaRPr lang="en-US" sz="1600" dirty="0"/>
-          </a:p>
-        </p:txBody>
-      </p:sp>
-      <p:sp>
-        <p:nvSpPr>
-          <p:cNvPr id="6" name="Value column 1 body"/>
-          <p:cNvSpPr txBox="1"/>
-          <p:nvPr/>
-        </p:nvSpPr>
-        <p:spPr>
-          <a:xfrm>
-            <a:off x="548640" y="2240280"/>
-            <a:ext cx="3529584" cy="1828800"/>
-          </a:xfrm>
-          <a:prstGeom prst="rect">
-            <a:avLst/>
-          </a:prstGeom>
-          <a:noFill/>
-          <a:ln/>
-        </p:spPr>
-        <p:txBody>
-          <a:bodyPr wrap="square" lIns="0" tIns="0" rIns="0" bIns="0" rtlCol="0" anchor="t"/>
-          <a:lstStyle/>
-          <a:p>
-            <a:pPr marL="342900" indent="-342900">
-              <a:spcAft>
-                <a:spcPts val="600"/>
-              </a:spcAft>
-              <a:buSzPct val="100000"/>
-              <a:buChar char="•"/>
-            </a:pPr>
-            <a:r>
-              <a:rPr lang="en-US" sz="1400" dirty="0">
-                <a:solidFill>
-                  <a:schemeClr val="tx1"/>
-                </a:solidFill>
-              </a:rPr>
-              <a:t>750 negotiated deals a year; 19% loop back for a re-quote</a:t>
-            </a:r>
-            <a:endParaRPr lang="en-US" sz="1400" dirty="0"/>
-          </a:p>
-          <a:p>
-            <a:pPr marL="342900" indent="-342900">
-              <a:spcAft>
-                <a:spcPts val="600"/>
-              </a:spcAft>
-              <a:buSzPct val="100000"/>
-              <a:buChar char="•"/>
-            </a:pPr>
-            <a:r>
-              <a:rPr lang="en-US" sz="1400" dirty="0">
-                <a:solidFill>
-                  <a:schemeClr val="tx1"/>
-                </a:solidFill>
-              </a:rPr>
-              <a:t>Re-quoted deals win 31% vs 49%</a:t>
-            </a:r>
-            <a:endParaRPr lang="en-US" sz="1400" dirty="0"/>
-          </a:p>
-          <a:p>
-            <a:pPr marL="342900" indent="-342900">
-              <a:spcAft>
-                <a:spcPts val="600"/>
-              </a:spcAft>
-              <a:buSzPct val="100000"/>
-              <a:buChar char="•"/>
-            </a:pPr>
-            <a:r>
-              <a:rPr lang="en-US" sz="1400" dirty="0">
-                <a:solidFill>
-                  <a:schemeClr val="tx1"/>
-                </a:solidFill>
-              </a:rPr>
-              <a:t>EMEA approvals take 7.0 days vs 1.2</a:t>
-            </a:r>
-            <a:endParaRPr lang="en-US" sz="1400" dirty="0"/>
-          </a:p>
-        </p:txBody>
-      </p:sp>
-      <p:sp>
-        <p:nvSpPr>
-          <p:cNvPr id="7" name="Value column 2 heading"/>
-          <p:cNvSpPr txBox="1"/>
-          <p:nvPr/>
-        </p:nvSpPr>
-        <p:spPr>
-          <a:xfrm>
-            <a:off x="4315968" y="1828800"/>
-            <a:ext cx="3529584" cy="365760"/>
-          </a:xfrm>
-          <a:prstGeom prst="rect">
-            <a:avLst/>
-          </a:prstGeom>
-          <a:noFill/>
-          <a:ln/>
-        </p:spPr>
-        <p:txBody>
-          <a:bodyPr wrap="square" lIns="0" tIns="0" rIns="0" bIns="0" rtlCol="0" anchor="t"/>
-          <a:lstStyle/>
-          <a:p>
-            <a:pPr indent="0" marL="0">
-              <a:buNone/>
-            </a:pPr>
-            <a:r>
-              <a:rPr lang="en-US" sz="1600" b="1" dirty="0">
-                <a:solidFill>
-                  <a:schemeClr val="accent6"/>
-                </a:solidFill>
-              </a:rPr>
-              <a:t>Root cause (to capture)</a:t>
-            </a:r>
-            <a:endParaRPr lang="en-US" sz="1600" dirty="0"/>
-          </a:p>
-        </p:txBody>
-      </p:sp>
-      <p:sp>
-        <p:nvSpPr>
-          <p:cNvPr id="8" name="Value column 2 body"/>
-          <p:cNvSpPr txBox="1"/>
-          <p:nvPr/>
-        </p:nvSpPr>
-        <p:spPr>
-          <a:xfrm>
-            <a:off x="4315968" y="2240280"/>
-            <a:ext cx="3529584" cy="1828800"/>
-          </a:xfrm>
-          <a:prstGeom prst="rect">
-            <a:avLst/>
-          </a:prstGeom>
-          <a:noFill/>
-          <a:ln/>
-        </p:spPr>
-        <p:txBody>
-          <a:bodyPr wrap="square" lIns="0" tIns="0" rIns="0" bIns="0" rtlCol="0" anchor="t"/>
-          <a:lstStyle/>
-          <a:p>
-            <a:pPr marL="342900" indent="-342900">
-              <a:spcAft>
-                <a:spcPts val="600"/>
-              </a:spcAft>
-              <a:buSzPct val="100000"/>
-              <a:buChar char="•"/>
-            </a:pPr>
-            <a:r>
-              <a:rPr lang="en-US" sz="1400" dirty="0">
-                <a:solidFill>
-                  <a:schemeClr val="tx1"/>
-                </a:solidFill>
-              </a:rPr>
-              <a:t>Reason codes: quote expired, discount, scope, pricing error</a:t>
-            </a:r>
-            <a:endParaRPr lang="en-US" sz="1400" dirty="0"/>
-          </a:p>
-          <a:p>
-            <a:pPr marL="342900" indent="-342900">
-              <a:spcAft>
-                <a:spcPts val="600"/>
-              </a:spcAft>
-              <a:buSzPct val="100000"/>
-              <a:buChar char="•"/>
-            </a:pPr>
-            <a:r>
-              <a:rPr lang="en-US" sz="1400" dirty="0">
-                <a:solidFill>
-                  <a:schemeClr val="tx1"/>
-                </a:solidFill>
-              </a:rPr>
-              <a:t>Hotspots by approver queue, region and rep</a:t>
-            </a:r>
-            <a:endParaRPr lang="en-US" sz="1400" dirty="0"/>
-          </a:p>
-          <a:p>
-            <a:pPr marL="342900" indent="-342900">
-              <a:spcAft>
-                <a:spcPts val="600"/>
-              </a:spcAft>
-              <a:buSzPct val="100000"/>
-              <a:buChar char="•"/>
-            </a:pPr>
-            <a:r>
-              <a:rPr lang="en-US" sz="1400" dirty="0">
-                <a:solidFill>
-                  <a:schemeClr val="tx1"/>
-                </a:solidFill>
-              </a:rPr>
-              <a:t>Confirm: slow approval → expired quote → re-quote</a:t>
-            </a:r>
-            <a:endParaRPr lang="en-US" sz="1400" dirty="0"/>
-          </a:p>
-        </p:txBody>
-      </p:sp>
-      <p:sp>
-        <p:nvSpPr>
-          <p:cNvPr id="9" name="Value column 3 heading"/>
-          <p:cNvSpPr txBox="1"/>
-          <p:nvPr/>
-        </p:nvSpPr>
-        <p:spPr>
-          <a:xfrm>
-            <a:off x="8083296" y="1828800"/>
-            <a:ext cx="3529584" cy="365760"/>
-          </a:xfrm>
-          <a:prstGeom prst="rect">
-            <a:avLst/>
-          </a:prstGeom>
-          <a:noFill/>
-          <a:ln/>
-        </p:spPr>
-        <p:txBody>
-          <a:bodyPr wrap="square" lIns="0" tIns="0" rIns="0" bIns="0" rtlCol="0" anchor="t"/>
-          <a:lstStyle/>
-          <a:p>
-            <a:pPr indent="0" marL="0">
-              <a:buNone/>
-            </a:pPr>
-            <a:r>
-              <a:rPr lang="en-US" sz="1600" b="1" dirty="0">
-                <a:solidFill>
-                  <a:schemeClr val="accent6"/>
-                </a:solidFill>
-              </a:rPr>
-              <a:t>Solution with Apromore</a:t>
-            </a:r>
-            <a:endParaRPr lang="en-US" sz="1600" dirty="0"/>
-          </a:p>
-        </p:txBody>
-      </p:sp>
-      <p:sp>
-        <p:nvSpPr>
-          <p:cNvPr id="10" name="Value column 3 body"/>
-          <p:cNvSpPr txBox="1"/>
-          <p:nvPr/>
-        </p:nvSpPr>
-        <p:spPr>
-          <a:xfrm>
-            <a:off x="8083296" y="2240280"/>
-            <a:ext cx="3529584" cy="1828800"/>
-          </a:xfrm>
-          <a:prstGeom prst="rect">
-            <a:avLst/>
-          </a:prstGeom>
-          <a:noFill/>
-          <a:ln/>
-        </p:spPr>
-        <p:txBody>
-          <a:bodyPr wrap="square" lIns="0" tIns="0" rIns="0" bIns="0" rtlCol="0" anchor="t"/>
-          <a:lstStyle/>
-          <a:p>
-            <a:pPr marL="342900" indent="-342900">
-              <a:spcAft>
-                <a:spcPts val="600"/>
-              </a:spcAft>
-              <a:buSzPct val="100000"/>
-              <a:buChar char="•"/>
-            </a:pPr>
-            <a:r>
-              <a:rPr lang="en-US" sz="1400" dirty="0">
-                <a:solidFill>
-                  <a:schemeClr val="tx1"/>
-                </a:solidFill>
-              </a:rPr>
-              <a:t>Performance views show where quotes wait and loop</a:t>
-            </a:r>
-            <a:endParaRPr lang="en-US" sz="1400" dirty="0"/>
-          </a:p>
-          <a:p>
-            <a:pPr marL="342900" indent="-342900">
-              <a:spcAft>
-                <a:spcPts val="600"/>
-              </a:spcAft>
-              <a:buSzPct val="100000"/>
-              <a:buChar char="•"/>
-            </a:pPr>
-            <a:r>
-              <a:rPr lang="en-US" sz="1400" dirty="0">
-                <a:solidFill>
-                  <a:schemeClr val="tx1"/>
-                </a:solidFill>
-              </a:rPr>
-              <a:t>Conformance checking flags skipped steps</a:t>
-            </a:r>
-            <a:endParaRPr lang="en-US" sz="1400" dirty="0"/>
-          </a:p>
-          <a:p>
-            <a:pPr marL="342900" indent="-342900">
-              <a:spcAft>
-                <a:spcPts val="600"/>
-              </a:spcAft>
-              <a:buSzPct val="100000"/>
-              <a:buChar char="•"/>
-            </a:pPr>
-            <a:r>
-              <a:rPr lang="en-US" sz="1400" dirty="0">
-                <a:solidFill>
-                  <a:schemeClr val="tx1"/>
-                </a:solidFill>
-              </a:rPr>
-              <a:t>Simulate a delegated EMEA approval threshold first</a:t>
-            </a:r>
-            <a:endParaRPr lang="en-US" sz="1400" dirty="0"/>
-          </a:p>
-        </p:txBody>
-      </p:sp>
-      <p:sp>
-        <p:nvSpPr>
-          <p:cNvPr id="11" name="Chain 1 label"/>
-          <p:cNvSpPr txBox="1"/>
-          <p:nvPr/>
-        </p:nvSpPr>
-        <p:spPr>
-          <a:xfrm>
-            <a:off x="548640" y="4251960"/>
-            <a:ext cx="1508760" cy="411480"/>
-          </a:xfrm>
-          <a:prstGeom prst="rect">
-            <a:avLst/>
-          </a:prstGeom>
-          <a:noFill/>
-          <a:ln/>
-        </p:spPr>
-        <p:txBody>
-          <a:bodyPr wrap="square" lIns="0" tIns="0" rIns="0" bIns="0" rtlCol="0" anchor="b"/>
-          <a:lstStyle/>
-          <a:p>
-            <a:pPr algn="ctr" indent="0" marL="0">
-              <a:buNone/>
-            </a:pPr>
-            <a:r>
-              <a:rPr lang="en-US" sz="1200" b="1" dirty="0">
-                <a:solidFill>
-                  <a:schemeClr val="tx2"/>
-                </a:solidFill>
-              </a:rPr>
-              <a:t>Negotiated deals / yr</a:t>
-            </a:r>
-            <a:endParaRPr lang="en-US" sz="1200" dirty="0"/>
-          </a:p>
-        </p:txBody>
-      </p:sp>
-      <p:sp>
-        <p:nvSpPr>
-          <p:cNvPr id="12" name="Chain 1 box"/>
-          <p:cNvSpPr/>
-          <p:nvPr/>
-        </p:nvSpPr>
-        <p:spPr>
-          <a:xfrm>
-            <a:off x="548640" y="4709160"/>
-            <a:ext cx="1508760" cy="777240"/>
-          </a:xfrm>
-          <a:prstGeom prst="roundRect">
-            <a:avLst>
-              <a:gd name="adj" fmla="val 14118"/>
-            </a:avLst>
-          </a:prstGeom>
-          <a:solidFill>
-            <a:schemeClr val="bg2"/>
-          </a:solidFill>
-          <a:ln/>
-        </p:spPr>
-      </p:sp>
-      <p:sp>
-        <p:nvSpPr>
-          <p:cNvPr id="13" name="Chain 1 value"/>
-          <p:cNvSpPr txBox="1"/>
-          <p:nvPr/>
-        </p:nvSpPr>
-        <p:spPr>
-          <a:xfrm>
-            <a:off x="548640" y="4709160"/>
-            <a:ext cx="1508760" cy="777240"/>
-          </a:xfrm>
-          <a:prstGeom prst="rect">
-            <a:avLst/>
-          </a:prstGeom>
-          <a:noFill/>
-          <a:ln/>
-        </p:spPr>
-        <p:txBody>
-          <a:bodyPr wrap="square" lIns="0" tIns="0" rIns="0" bIns="0" rtlCol="0" anchor="ctr"/>
-          <a:lstStyle/>
-          <a:p>
-            <a:pPr algn="ctr" indent="0" marL="0">
-              <a:buNone/>
-            </a:pPr>
-            <a:r>
-              <a:rPr lang="en-US" sz="2200" b="1" dirty="0">
-                <a:solidFill>
-                  <a:schemeClr val="tx2"/>
-                </a:solidFill>
-              </a:rPr>
-              <a:t>750</a:t>
-            </a:r>
-            <a:endParaRPr lang="en-US" sz="2200" dirty="0"/>
-          </a:p>
-        </p:txBody>
-      </p:sp>
-      <p:sp>
-        <p:nvSpPr>
-          <p:cNvPr id="14" name="Chain 1 operator"/>
-          <p:cNvSpPr txBox="1"/>
-          <p:nvPr/>
-        </p:nvSpPr>
-        <p:spPr>
-          <a:xfrm>
-            <a:off x="2057400" y="4709160"/>
-            <a:ext cx="274320" cy="777240"/>
-          </a:xfrm>
-          <a:prstGeom prst="rect">
-            <a:avLst/>
-          </a:prstGeom>
-          <a:noFill/>
-          <a:ln/>
-        </p:spPr>
-        <p:txBody>
-          <a:bodyPr wrap="square" lIns="0" tIns="0" rIns="0" bIns="0" rtlCol="0" anchor="ctr"/>
-          <a:lstStyle/>
-          <a:p>
-            <a:pPr algn="ctr" indent="0" marL="0">
+            <a:pPr algn="l" indent="0" marL="0">
               <a:buNone/>
             </a:pPr>
             <a:r>
               <a:rPr lang="en-US" sz="2000" dirty="0">
                 <a:solidFill>
-                  <a:schemeClr val="accent6"/>
-                </a:solidFill>
-              </a:rPr>
-              <a:t>×</a:t>
+                  <a:schemeClr val="accent3"/>
+                </a:solidFill>
+              </a:rPr>
+              <a:t>How the data gets from a Salesforce org into an Apromore-ready event log</a:t>
             </a:r>
             <a:endParaRPr lang="en-US" sz="2000" dirty="0"/>
-          </a:p>
-        </p:txBody>
-      </p:sp>
-      <p:sp>
-        <p:nvSpPr>
-          <p:cNvPr id="15" name="Chain 2 label"/>
-          <p:cNvSpPr txBox="1"/>
-          <p:nvPr/>
-        </p:nvSpPr>
-        <p:spPr>
-          <a:xfrm>
-            <a:off x="2331720" y="4251960"/>
-            <a:ext cx="1508760" cy="411480"/>
-          </a:xfrm>
-          <a:prstGeom prst="rect">
-            <a:avLst/>
-          </a:prstGeom>
-          <a:noFill/>
-          <a:ln/>
-        </p:spPr>
-        <p:txBody>
-          <a:bodyPr wrap="square" lIns="0" tIns="0" rIns="0" bIns="0" rtlCol="0" anchor="b"/>
-          <a:lstStyle/>
-          <a:p>
-            <a:pPr algn="ctr" indent="0" marL="0">
-              <a:buNone/>
-            </a:pPr>
-            <a:r>
-              <a:rPr lang="en-US" sz="1200" b="1" dirty="0">
-                <a:solidFill>
-                  <a:schemeClr val="tx2"/>
-                </a:solidFill>
-              </a:rPr>
-              <a:t>Re-quotes per deal</a:t>
-            </a:r>
-            <a:endParaRPr lang="en-US" sz="1200" dirty="0"/>
-          </a:p>
-        </p:txBody>
-      </p:sp>
-      <p:sp>
-        <p:nvSpPr>
-          <p:cNvPr id="16" name="Chain 2 box"/>
-          <p:cNvSpPr/>
-          <p:nvPr/>
-        </p:nvSpPr>
-        <p:spPr>
-          <a:xfrm>
-            <a:off x="2331720" y="4709160"/>
-            <a:ext cx="1508760" cy="777240"/>
-          </a:xfrm>
-          <a:prstGeom prst="roundRect">
-            <a:avLst>
-              <a:gd name="adj" fmla="val 14118"/>
-            </a:avLst>
-          </a:prstGeom>
-          <a:solidFill>
-            <a:schemeClr val="bg2"/>
-          </a:solidFill>
-          <a:ln/>
-        </p:spPr>
-      </p:sp>
-      <p:sp>
-        <p:nvSpPr>
-          <p:cNvPr id="17" name="Chain 2 value"/>
-          <p:cNvSpPr txBox="1"/>
-          <p:nvPr/>
-        </p:nvSpPr>
-        <p:spPr>
-          <a:xfrm>
-            <a:off x="2331720" y="4709160"/>
-            <a:ext cx="1508760" cy="777240"/>
-          </a:xfrm>
-          <a:prstGeom prst="rect">
-            <a:avLst/>
-          </a:prstGeom>
-          <a:noFill/>
-          <a:ln/>
-        </p:spPr>
-        <p:txBody>
-          <a:bodyPr wrap="square" lIns="0" tIns="0" rIns="0" bIns="0" rtlCol="0" anchor="ctr"/>
-          <a:lstStyle/>
-          <a:p>
-            <a:pPr algn="ctr" indent="0" marL="0">
-              <a:buNone/>
-            </a:pPr>
-            <a:r>
-              <a:rPr lang="en-US" sz="2200" b="1" dirty="0">
-                <a:solidFill>
-                  <a:schemeClr val="tx2"/>
-                </a:solidFill>
-              </a:rPr>
-              <a:t>0.19</a:t>
-            </a:r>
-            <a:endParaRPr lang="en-US" sz="2200" dirty="0"/>
-          </a:p>
-        </p:txBody>
-      </p:sp>
-      <p:sp>
-        <p:nvSpPr>
-          <p:cNvPr id="18" name="Chain 2 operator"/>
-          <p:cNvSpPr txBox="1"/>
-          <p:nvPr/>
-        </p:nvSpPr>
-        <p:spPr>
-          <a:xfrm>
-            <a:off x="3840480" y="4709160"/>
-            <a:ext cx="274320" cy="777240"/>
-          </a:xfrm>
-          <a:prstGeom prst="rect">
-            <a:avLst/>
-          </a:prstGeom>
-          <a:noFill/>
-          <a:ln/>
-        </p:spPr>
-        <p:txBody>
-          <a:bodyPr wrap="square" lIns="0" tIns="0" rIns="0" bIns="0" rtlCol="0" anchor="ctr"/>
-          <a:lstStyle/>
-          <a:p>
-            <a:pPr algn="ctr" indent="0" marL="0">
-              <a:buNone/>
-            </a:pPr>
-            <a:r>
-              <a:rPr lang="en-US" sz="2000" dirty="0">
-                <a:solidFill>
-                  <a:schemeClr val="accent6"/>
-                </a:solidFill>
-              </a:rPr>
-              <a:t>×</a:t>
-            </a:r>
-            <a:endParaRPr lang="en-US" sz="2000" dirty="0"/>
-          </a:p>
-        </p:txBody>
-      </p:sp>
-      <p:sp>
-        <p:nvSpPr>
-          <p:cNvPr id="19" name="Chain 3 label"/>
-          <p:cNvSpPr txBox="1"/>
-          <p:nvPr/>
-        </p:nvSpPr>
-        <p:spPr>
-          <a:xfrm>
-            <a:off x="4114800" y="4251960"/>
-            <a:ext cx="1508760" cy="411480"/>
-          </a:xfrm>
-          <a:prstGeom prst="rect">
-            <a:avLst/>
-          </a:prstGeom>
-          <a:noFill/>
-          <a:ln/>
-        </p:spPr>
-        <p:txBody>
-          <a:bodyPr wrap="square" lIns="0" tIns="0" rIns="0" bIns="0" rtlCol="0" anchor="b"/>
-          <a:lstStyle/>
-          <a:p>
-            <a:pPr algn="ctr" indent="0" marL="0">
-              <a:buNone/>
-            </a:pPr>
-            <a:r>
-              <a:rPr lang="en-US" sz="1200" b="1" dirty="0">
-                <a:solidFill>
-                  <a:schemeClr val="tx2"/>
-                </a:solidFill>
-              </a:rPr>
-              <a:t>Win-rate gap</a:t>
-            </a:r>
-            <a:endParaRPr lang="en-US" sz="1200" dirty="0"/>
-          </a:p>
-        </p:txBody>
-      </p:sp>
-      <p:sp>
-        <p:nvSpPr>
-          <p:cNvPr id="20" name="Chain 3 box"/>
-          <p:cNvSpPr/>
-          <p:nvPr/>
-        </p:nvSpPr>
-        <p:spPr>
-          <a:xfrm>
-            <a:off x="4114800" y="4709160"/>
-            <a:ext cx="1508760" cy="777240"/>
-          </a:xfrm>
-          <a:prstGeom prst="roundRect">
-            <a:avLst>
-              <a:gd name="adj" fmla="val 14118"/>
-            </a:avLst>
-          </a:prstGeom>
-          <a:solidFill>
-            <a:schemeClr val="bg2"/>
-          </a:solidFill>
-          <a:ln/>
-        </p:spPr>
-      </p:sp>
-      <p:sp>
-        <p:nvSpPr>
-          <p:cNvPr id="21" name="Chain 3 value"/>
-          <p:cNvSpPr txBox="1"/>
-          <p:nvPr/>
-        </p:nvSpPr>
-        <p:spPr>
-          <a:xfrm>
-            <a:off x="4114800" y="4709160"/>
-            <a:ext cx="1508760" cy="777240"/>
-          </a:xfrm>
-          <a:prstGeom prst="rect">
-            <a:avLst/>
-          </a:prstGeom>
-          <a:noFill/>
-          <a:ln/>
-        </p:spPr>
-        <p:txBody>
-          <a:bodyPr wrap="square" lIns="0" tIns="0" rIns="0" bIns="0" rtlCol="0" anchor="ctr"/>
-          <a:lstStyle/>
-          <a:p>
-            <a:pPr algn="ctr" indent="0" marL="0">
-              <a:buNone/>
-            </a:pPr>
-            <a:r>
-              <a:rPr lang="en-US" sz="2200" b="1" dirty="0">
-                <a:solidFill>
-                  <a:schemeClr val="tx2"/>
-                </a:solidFill>
-              </a:rPr>
-              <a:t>17.5 pts</a:t>
-            </a:r>
-            <a:endParaRPr lang="en-US" sz="2200" dirty="0"/>
-          </a:p>
-        </p:txBody>
-      </p:sp>
-      <p:sp>
-        <p:nvSpPr>
-          <p:cNvPr id="22" name="Chain 3 operator"/>
-          <p:cNvSpPr txBox="1"/>
-          <p:nvPr/>
-        </p:nvSpPr>
-        <p:spPr>
-          <a:xfrm>
-            <a:off x="5623560" y="4709160"/>
-            <a:ext cx="274320" cy="777240"/>
-          </a:xfrm>
-          <a:prstGeom prst="rect">
-            <a:avLst/>
-          </a:prstGeom>
-          <a:noFill/>
-          <a:ln/>
-        </p:spPr>
-        <p:txBody>
-          <a:bodyPr wrap="square" lIns="0" tIns="0" rIns="0" bIns="0" rtlCol="0" anchor="ctr"/>
-          <a:lstStyle/>
-          <a:p>
-            <a:pPr algn="ctr" indent="0" marL="0">
-              <a:buNone/>
-            </a:pPr>
-            <a:r>
-              <a:rPr lang="en-US" sz="2000" dirty="0">
-                <a:solidFill>
-                  <a:schemeClr val="accent6"/>
-                </a:solidFill>
-              </a:rPr>
-              <a:t>×</a:t>
-            </a:r>
-            <a:endParaRPr lang="en-US" sz="2000" dirty="0"/>
-          </a:p>
-        </p:txBody>
-      </p:sp>
-      <p:sp>
-        <p:nvSpPr>
-          <p:cNvPr id="23" name="Chain 4 label"/>
-          <p:cNvSpPr txBox="1"/>
-          <p:nvPr/>
-        </p:nvSpPr>
-        <p:spPr>
-          <a:xfrm>
-            <a:off x="5897880" y="4251960"/>
-            <a:ext cx="1508760" cy="411480"/>
-          </a:xfrm>
-          <a:prstGeom prst="rect">
-            <a:avLst/>
-          </a:prstGeom>
-          <a:noFill/>
-          <a:ln/>
-        </p:spPr>
-        <p:txBody>
-          <a:bodyPr wrap="square" lIns="0" tIns="0" rIns="0" bIns="0" rtlCol="0" anchor="b"/>
-          <a:lstStyle/>
-          <a:p>
-            <a:pPr algn="ctr" indent="0" marL="0">
-              <a:buNone/>
-            </a:pPr>
-            <a:r>
-              <a:rPr lang="en-US" sz="1200" b="1" dirty="0">
-                <a:solidFill>
-                  <a:schemeClr val="tx2"/>
-                </a:solidFill>
-              </a:rPr>
-              <a:t>Average won deal</a:t>
-            </a:r>
-            <a:endParaRPr lang="en-US" sz="1200" dirty="0"/>
-          </a:p>
-        </p:txBody>
-      </p:sp>
-      <p:sp>
-        <p:nvSpPr>
-          <p:cNvPr id="24" name="Chain 4 box"/>
-          <p:cNvSpPr/>
-          <p:nvPr/>
-        </p:nvSpPr>
-        <p:spPr>
-          <a:xfrm>
-            <a:off x="5897880" y="4709160"/>
-            <a:ext cx="1508760" cy="777240"/>
-          </a:xfrm>
-          <a:prstGeom prst="roundRect">
-            <a:avLst>
-              <a:gd name="adj" fmla="val 14118"/>
-            </a:avLst>
-          </a:prstGeom>
-          <a:solidFill>
-            <a:schemeClr val="bg2"/>
-          </a:solidFill>
-          <a:ln/>
-        </p:spPr>
-      </p:sp>
-      <p:sp>
-        <p:nvSpPr>
-          <p:cNvPr id="25" name="Chain 4 value"/>
-          <p:cNvSpPr txBox="1"/>
-          <p:nvPr/>
-        </p:nvSpPr>
-        <p:spPr>
-          <a:xfrm>
-            <a:off x="5897880" y="4709160"/>
-            <a:ext cx="1508760" cy="777240"/>
-          </a:xfrm>
-          <a:prstGeom prst="rect">
-            <a:avLst/>
-          </a:prstGeom>
-          <a:noFill/>
-          <a:ln/>
-        </p:spPr>
-        <p:txBody>
-          <a:bodyPr wrap="square" lIns="0" tIns="0" rIns="0" bIns="0" rtlCol="0" anchor="ctr"/>
-          <a:lstStyle/>
-          <a:p>
-            <a:pPr algn="ctr" indent="0" marL="0">
-              <a:buNone/>
-            </a:pPr>
-            <a:r>
-              <a:rPr lang="en-US" sz="2200" b="1" dirty="0">
-                <a:solidFill>
-                  <a:schemeClr val="tx2"/>
-                </a:solidFill>
-              </a:rPr>
-              <a:t>$53k</a:t>
-            </a:r>
-            <a:endParaRPr lang="en-US" sz="2200" dirty="0"/>
-          </a:p>
-        </p:txBody>
-      </p:sp>
-      <p:sp>
-        <p:nvSpPr>
-          <p:cNvPr id="26" name="Chain 4 operator"/>
-          <p:cNvSpPr txBox="1"/>
-          <p:nvPr/>
-        </p:nvSpPr>
-        <p:spPr>
-          <a:xfrm>
-            <a:off x="7406640" y="4709160"/>
-            <a:ext cx="274320" cy="777240"/>
-          </a:xfrm>
-          <a:prstGeom prst="rect">
-            <a:avLst/>
-          </a:prstGeom>
-          <a:noFill/>
-          <a:ln/>
-        </p:spPr>
-        <p:txBody>
-          <a:bodyPr wrap="square" lIns="0" tIns="0" rIns="0" bIns="0" rtlCol="0" anchor="ctr"/>
-          <a:lstStyle/>
-          <a:p>
-            <a:pPr algn="ctr" indent="0" marL="0">
-              <a:buNone/>
-            </a:pPr>
-            <a:r>
-              <a:rPr lang="en-US" sz="2000" dirty="0">
-                <a:solidFill>
-                  <a:schemeClr val="accent6"/>
-                </a:solidFill>
-              </a:rPr>
-              <a:t>×</a:t>
-            </a:r>
-            <a:endParaRPr lang="en-US" sz="2000" dirty="0"/>
-          </a:p>
-        </p:txBody>
-      </p:sp>
-      <p:sp>
-        <p:nvSpPr>
-          <p:cNvPr id="27" name="Chain 5 label"/>
-          <p:cNvSpPr txBox="1"/>
-          <p:nvPr/>
-        </p:nvSpPr>
-        <p:spPr>
-          <a:xfrm>
-            <a:off x="7680960" y="4251960"/>
-            <a:ext cx="1508760" cy="411480"/>
-          </a:xfrm>
-          <a:prstGeom prst="rect">
-            <a:avLst/>
-          </a:prstGeom>
-          <a:noFill/>
-          <a:ln/>
-        </p:spPr>
-        <p:txBody>
-          <a:bodyPr wrap="square" lIns="0" tIns="0" rIns="0" bIns="0" rtlCol="0" anchor="b"/>
-          <a:lstStyle/>
-          <a:p>
-            <a:pPr algn="ctr" indent="0" marL="0">
-              <a:buNone/>
-            </a:pPr>
-            <a:r>
-              <a:rPr lang="en-US" sz="1200" b="1" dirty="0">
-                <a:solidFill>
-                  <a:schemeClr val="tx2"/>
-                </a:solidFill>
-              </a:rPr>
-              <a:t>Improvement</a:t>
-            </a:r>
-            <a:endParaRPr lang="en-US" sz="1200" dirty="0"/>
-          </a:p>
-        </p:txBody>
-      </p:sp>
-      <p:sp>
-        <p:nvSpPr>
-          <p:cNvPr id="28" name="Chain 5 box"/>
-          <p:cNvSpPr/>
-          <p:nvPr/>
-        </p:nvSpPr>
-        <p:spPr>
-          <a:xfrm>
-            <a:off x="7680960" y="4709160"/>
-            <a:ext cx="1508760" cy="777240"/>
-          </a:xfrm>
-          <a:prstGeom prst="roundRect">
-            <a:avLst>
-              <a:gd name="adj" fmla="val 14118"/>
-            </a:avLst>
-          </a:prstGeom>
-          <a:solidFill>
-            <a:schemeClr val="bg2"/>
-          </a:solidFill>
-          <a:ln/>
-        </p:spPr>
-      </p:sp>
-      <p:sp>
-        <p:nvSpPr>
-          <p:cNvPr id="29" name="Chain 5 value"/>
-          <p:cNvSpPr txBox="1"/>
-          <p:nvPr/>
-        </p:nvSpPr>
-        <p:spPr>
-          <a:xfrm>
-            <a:off x="7680960" y="4709160"/>
-            <a:ext cx="1508760" cy="777240"/>
-          </a:xfrm>
-          <a:prstGeom prst="rect">
-            <a:avLst/>
-          </a:prstGeom>
-          <a:noFill/>
-          <a:ln/>
-        </p:spPr>
-        <p:txBody>
-          <a:bodyPr wrap="square" lIns="0" tIns="0" rIns="0" bIns="0" rtlCol="0" anchor="ctr"/>
-          <a:lstStyle/>
-          <a:p>
-            <a:pPr algn="ctr" indent="0" marL="0">
-              <a:buNone/>
-            </a:pPr>
-            <a:r>
-              <a:rPr lang="en-US" sz="2200" b="1" dirty="0">
-                <a:solidFill>
-                  <a:schemeClr val="tx2"/>
-                </a:solidFill>
-              </a:rPr>
-              <a:t>50%</a:t>
-            </a:r>
-            <a:endParaRPr lang="en-US" sz="2200" dirty="0"/>
-          </a:p>
-        </p:txBody>
-      </p:sp>
-      <p:sp>
-        <p:nvSpPr>
-          <p:cNvPr id="30" name="Chain 5 operator"/>
-          <p:cNvSpPr txBox="1"/>
-          <p:nvPr/>
-        </p:nvSpPr>
-        <p:spPr>
-          <a:xfrm>
-            <a:off x="9189720" y="4709160"/>
-            <a:ext cx="274320" cy="777240"/>
-          </a:xfrm>
-          <a:prstGeom prst="rect">
-            <a:avLst/>
-          </a:prstGeom>
-          <a:noFill/>
-          <a:ln/>
-        </p:spPr>
-        <p:txBody>
-          <a:bodyPr wrap="square" lIns="0" tIns="0" rIns="0" bIns="0" rtlCol="0" anchor="ctr"/>
-          <a:lstStyle/>
-          <a:p>
-            <a:pPr algn="ctr" indent="0" marL="0">
-              <a:buNone/>
-            </a:pPr>
-            <a:r>
-              <a:rPr lang="en-US" sz="2000" dirty="0">
-                <a:solidFill>
-                  <a:schemeClr val="accent6"/>
-                </a:solidFill>
-              </a:rPr>
-              <a:t>=</a:t>
-            </a:r>
-            <a:endParaRPr lang="en-US" sz="2000" dirty="0"/>
-          </a:p>
-        </p:txBody>
-      </p:sp>
-      <p:sp>
-        <p:nvSpPr>
-          <p:cNvPr id="31" name="Framed value pill"/>
-          <p:cNvSpPr/>
-          <p:nvPr/>
-        </p:nvSpPr>
-        <p:spPr>
-          <a:xfrm>
-            <a:off x="9509760" y="4251960"/>
-            <a:ext cx="2103120" cy="1234440"/>
-          </a:xfrm>
-          <a:prstGeom prst="roundRect">
-            <a:avLst>
-              <a:gd name="adj" fmla="val 8889"/>
-            </a:avLst>
-          </a:prstGeom>
-          <a:solidFill>
-            <a:schemeClr val="tx2"/>
-          </a:solidFill>
-          <a:ln/>
-        </p:spPr>
-      </p:sp>
-      <p:sp>
-        <p:nvSpPr>
-          <p:cNvPr id="32" name="Framed value"/>
-          <p:cNvSpPr txBox="1"/>
-          <p:nvPr/>
-        </p:nvSpPr>
-        <p:spPr>
-          <a:xfrm>
-            <a:off x="9509760" y="4251960"/>
-            <a:ext cx="2103120" cy="1234440"/>
-          </a:xfrm>
-          <a:prstGeom prst="rect">
-            <a:avLst/>
-          </a:prstGeom>
-          <a:noFill/>
-          <a:ln/>
-        </p:spPr>
-        <p:txBody>
-          <a:bodyPr wrap="square" lIns="0" tIns="0" rIns="0" bIns="0" rtlCol="0" anchor="ctr"/>
-          <a:lstStyle/>
-          <a:p>
-            <a:pPr algn="ctr" indent="0" marL="0">
-              <a:buNone/>
-            </a:pPr>
-            <a:r>
-              <a:rPr lang="en-US" sz="3000" b="1" dirty="0">
-                <a:solidFill>
-                  <a:schemeClr val="bg1"/>
-                </a:solidFill>
-              </a:rPr>
-              <a:t>≈ $669k</a:t>
-            </a:r>
-            <a:endParaRPr lang="en-US" sz="1400" dirty="0"/>
-          </a:p>
-          <a:p>
-            <a:pPr algn="ctr" indent="0" marL="0">
-              <a:buNone/>
-            </a:pPr>
-            <a:r>
-              <a:rPr lang="en-US" sz="1200" dirty="0">
-                <a:solidFill>
-                  <a:schemeClr val="accent3"/>
-                </a:solidFill>
-              </a:rPr>
-              <a:t>revenue upside p.a.</a:t>
-            </a:r>
-            <a:endParaRPr lang="en-US" sz="1400" dirty="0"/>
-          </a:p>
-        </p:txBody>
-      </p:sp>
-      <p:sp>
-        <p:nvSpPr>
-          <p:cNvPr id="33" name="Assumptions"/>
-          <p:cNvSpPr txBox="1"/>
-          <p:nvPr/>
-        </p:nvSpPr>
-        <p:spPr>
-          <a:xfrm>
-            <a:off x="548640" y="5669280"/>
-            <a:ext cx="11064240" cy="457200"/>
-          </a:xfrm>
-          <a:prstGeom prst="rect">
-            <a:avLst/>
-          </a:prstGeom>
-          <a:noFill/>
-          <a:ln/>
-        </p:spPr>
-        <p:txBody>
-          <a:bodyPr wrap="square" lIns="0" tIns="0" rIns="0" bIns="0" rtlCol="0" anchor="t"/>
-          <a:lstStyle/>
-          <a:p>
-            <a:pPr indent="0" marL="0">
-              <a:buNone/>
-            </a:pPr>
-            <a:r>
-              <a:rPr lang="en-US" sz="1100" i="1" dirty="0">
-                <a:solidFill>
-                  <a:schemeClr val="accent6"/>
-                </a:solidFill>
-              </a:rPr>
-              <a:t>Assumptions: annualised from 10 months of history; win-rate gap compares only deals that reached Negotiation; cycle-time gains not counted; half of the gap closed.</a:t>
-            </a:r>
-            <a:endParaRPr lang="en-US" sz="1100" dirty="0"/>
-          </a:p>
-        </p:txBody>
-      </p:sp>
-      <p:sp>
-        <p:nvSpPr>
-          <p:cNvPr id="25" name="Slide Number Placeholder 0"/>
-          <p:cNvSpPr>
-            <a:spLocks noGrp="1"/>
-          </p:cNvSpPr>
-          <p:nvPr>
-            <p:ph type="sldNum" sz="quarter" idx="4294967295"/>
-          </p:nvPr>
-        </p:nvSpPr>
-        <p:spPr>
-          <a:xfrm>
-            <a:off x="11155680" y="6400800"/>
-            <a:ext cx="457200" cy="274320"/>
-          </a:xfrm>
-          <a:prstGeom prst="rect">
-            <a:avLst/>
-          </a:prstGeom>
-          <a:extLst>
-            <a:ext uri="{C572A759-6A51-4108-AA02-DFA0A04FC94B}">
-              <ma14:wrappingTextBoxFlag xmlns:ma14="http://schemas.microsoft.com/office/mac/drawingml/2011/main" val="0"/>
-            </a:ext>
-          </a:extLst>
-        </p:spPr>
-        <p:txBody>
-          <a:bodyPr/>
-          <a:lstStyle>
-            <a:lvl1pPr>
-              <a:defRPr sz="1000">
-                <a:solidFill>
-                  <a:schemeClr val="accent6"/>
-                </a:solidFill>
-              </a:defRPr>
-            </a:lvl1pPr>
-          </a:lstStyle>
-          <a:p>
-            <a:pPr algn="r"/>
-            <a:fld id="{F7021451-1387-4CA6-816F-3879F97B5CBC}" type="slidenum">
-              <a:rPr b="0" lang="en-US"/>
-              <a:t>6</a:t>
-            </a:fld>
-            <a:endParaRPr lang="en-US"/>
           </a:p>
         </p:txBody>
       </p:sp>
@@ -6978,7 +7713,7 @@
                   <a:schemeClr val="tx2"/>
                 </a:solidFill>
               </a:rPr>
-              <a:t>Everything is live and open to inspect</a:t>
+              <a:t>Salesforce to Apromore in four steps</a:t>
             </a:r>
             <a:endParaRPr lang="en-US" sz="3000" dirty="0"/>
           </a:p>
@@ -6986,18 +7721,18 @@
       </p:sp>
       <p:sp>
         <p:nvSpPr>
-          <p:cNvPr id="3" name="Proof 1"/>
+          <p:cNvPr id="3" name="Step 1 card"/>
           <p:cNvSpPr/>
           <p:nvPr/>
         </p:nvSpPr>
         <p:spPr>
           <a:xfrm>
-            <a:off x="548640" y="1417320"/>
-            <a:ext cx="6035040" cy="960120"/>
+            <a:off x="548640" y="1371600"/>
+            <a:ext cx="2514600" cy="3291840"/>
           </a:xfrm>
           <a:prstGeom prst="roundRect">
             <a:avLst>
-              <a:gd name="adj" fmla="val 11429"/>
+              <a:gd name="adj" fmla="val 4364"/>
             </a:avLst>
           </a:prstGeom>
           <a:solidFill>
@@ -7008,14 +7743,14 @@
       </p:sp>
       <p:sp>
         <p:nvSpPr>
-          <p:cNvPr id="4" name="Proof 1 marker"/>
+          <p:cNvPr id="4" name="Step 1 marker"/>
           <p:cNvSpPr/>
           <p:nvPr/>
         </p:nvSpPr>
         <p:spPr>
           <a:xfrm>
-            <a:off x="749808" y="1691640"/>
-            <a:ext cx="411480" cy="411480"/>
+            <a:off x="777240" y="1600200"/>
+            <a:ext cx="502920" cy="502920"/>
           </a:xfrm>
           <a:prstGeom prst="ellipse">
             <a:avLst/>
@@ -7028,14 +7763,14 @@
       </p:sp>
       <p:sp>
         <p:nvSpPr>
-          <p:cNvPr id="5" name="Proof 1 glyph"/>
-          <p:cNvSpPr txBox="1"/>
-          <p:nvPr/>
-        </p:nvSpPr>
-        <p:spPr>
-          <a:xfrm>
-            <a:off x="749808" y="1691640"/>
-            <a:ext cx="411480" cy="411480"/>
+          <p:cNvPr id="5" name="Step 1 number"/>
+          <p:cNvSpPr txBox="1"/>
+          <p:nvPr/>
+        </p:nvSpPr>
+        <p:spPr>
+          <a:xfrm>
+            <a:off x="777240" y="1600200"/>
+            <a:ext cx="502920" cy="502920"/>
           </a:xfrm>
           <a:prstGeom prst="rect">
             <a:avLst/>
@@ -7051,27 +7786,27 @@
               <a:buNone/>
             </a:pPr>
             <a:r>
-              <a:rPr lang="en-US" sz="1600" b="1" dirty="0">
+              <a:rPr lang="en-US" sz="1800" b="1" dirty="0">
                 <a:solidFill>
                   <a:schemeClr val="bg1"/>
                 </a:solidFill>
               </a:rPr>
-              <a:t>→</a:t>
-            </a:r>
-            <a:endParaRPr lang="en-US" sz="1600" dirty="0"/>
-          </a:p>
-        </p:txBody>
-      </p:sp>
-      <p:sp>
-        <p:nvSpPr>
-          <p:cNvPr id="6" name="Proof 1 label"/>
-          <p:cNvSpPr txBox="1"/>
-          <p:nvPr/>
-        </p:nvSpPr>
-        <p:spPr>
-          <a:xfrm>
-            <a:off x="1325880" y="1545336"/>
-            <a:ext cx="5120640" cy="347472"/>
+              <a:t>1</a:t>
+            </a:r>
+            <a:endParaRPr lang="en-US" sz="1800" dirty="0"/>
+          </a:p>
+        </p:txBody>
+      </p:sp>
+      <p:sp>
+        <p:nvSpPr>
+          <p:cNvPr id="6" name="Step 1 label"/>
+          <p:cNvSpPr txBox="1"/>
+          <p:nvPr/>
+        </p:nvSpPr>
+        <p:spPr>
+          <a:xfrm>
+            <a:off x="777240" y="2286000"/>
+            <a:ext cx="2103120" cy="274320"/>
           </a:xfrm>
           <a:prstGeom prst="rect">
             <a:avLst/>
@@ -7087,27 +7822,63 @@
               <a:buNone/>
             </a:pPr>
             <a:r>
-              <a:rPr lang="en-US" sz="1600" b="1" dirty="0">
+              <a:rPr lang="en-US" sz="1200" b="1" dirty="0">
+                <a:solidFill>
+                  <a:schemeClr val="accent6"/>
+                </a:solidFill>
+              </a:rPr>
+              <a:t>Extract</a:t>
+            </a:r>
+            <a:endParaRPr lang="en-US" sz="1200" dirty="0"/>
+          </a:p>
+        </p:txBody>
+      </p:sp>
+      <p:sp>
+        <p:nvSpPr>
+          <p:cNvPr id="7" name="Step 1 title"/>
+          <p:cNvSpPr txBox="1"/>
+          <p:nvPr/>
+        </p:nvSpPr>
+        <p:spPr>
+          <a:xfrm>
+            <a:off x="777240" y="2578608"/>
+            <a:ext cx="2103120" cy="411480"/>
+          </a:xfrm>
+          <a:prstGeom prst="rect">
+            <a:avLst/>
+          </a:prstGeom>
+          <a:noFill/>
+          <a:ln/>
+        </p:spPr>
+        <p:txBody>
+          <a:bodyPr wrap="square" lIns="0" tIns="0" rIns="0" bIns="0" rtlCol="0" anchor="t"/>
+          <a:lstStyle/>
+          <a:p>
+            <a:pPr indent="0" marL="0">
+              <a:buNone/>
+            </a:pPr>
+            <a:r>
+              <a:rPr lang="en-US" sz="1800" b="1" dirty="0">
                 <a:solidFill>
                   <a:schemeClr val="tx2"/>
                 </a:solidFill>
               </a:rPr>
-              <a:t>Process dashboard</a:t>
-            </a:r>
-            <a:endParaRPr lang="en-US" sz="1600" dirty="0"/>
-          </a:p>
-        </p:txBody>
-      </p:sp>
-      <p:sp>
-        <p:nvSpPr>
-          <p:cNvPr id="7" name="Proof 1 link"/>
-          <p:cNvSpPr txBox="1"/>
-          <p:nvPr/>
-        </p:nvSpPr>
-        <p:spPr>
-          <a:xfrm>
-            <a:off x="1325880" y="1911096"/>
-            <a:ext cx="5120640" cy="347472"/>
+              <a:t>SOQL over REST</a:t>
+            </a:r>
+            <a:endParaRPr lang="en-US" sz="1800" dirty="0"/>
+          </a:p>
+        </p:txBody>
+      </p:sp>
+      <p:sp>
+        <p:nvSpPr>
+          <p:cNvPr id="8" name="Step 1 body"/>
+          <p:cNvSpPr txBox="1"/>
+          <p:nvPr/>
+        </p:nvSpPr>
+        <p:spPr>
+          <a:xfrm>
+            <a:off x="777240" y="3063240"/>
+            <a:ext cx="2103120" cy="1508760"/>
           </a:xfrm>
           <a:prstGeom prst="rect">
             <a:avLst/>
@@ -7123,19 +7894,12 @@
               <a:buNone/>
             </a:pPr>
             <a:r>
-              <a:rPr lang="en-US" sz="1400" u="sng" dirty="0">
-                <a:solidFill>
-                  <a:schemeClr val="accent6"/>
-                </a:solidFill>
-                <a:hlinkClick r:id="rId1" invalidUrl="" action="" tgtFrame="" tooltip="" history="1" highlightClick="0" endSnd="0">
-                  <a:extLst>
-                    <a:ext uri="{A12FA001-AC4F-418D-AE19-62706E023703}">
-                      <ahyp:hlinkClr xmlns:ahyp="http://schemas.microsoft.com/office/drawing/2018/hyperlinkcolor" val="tx"/>
-                    </a:ext>
-                  </a:extLst>
-                </a:hlinkClick>
-              </a:rPr>
-              <a:t>salesforce-process-intelligence.vercel.app</a:t>
+              <a:rPr lang="en-US" sz="1400" dirty="0">
+                <a:solidFill>
+                  <a:schemeClr val="tx1"/>
+                </a:solidFill>
+              </a:rPr>
+              <a:t>Lead, Opportunity, OpportunityHistory and Task, signed by the Salesforce CLI session. No stored credentials.</a:t>
             </a:r>
             <a:endParaRPr lang="en-US" sz="1400" dirty="0"/>
           </a:p>
@@ -7143,18 +7907,38 @@
       </p:sp>
       <p:sp>
         <p:nvSpPr>
-          <p:cNvPr id="8" name="Proof 2"/>
+          <p:cNvPr id="9" name="Step 1 arrow"/>
           <p:cNvSpPr/>
           <p:nvPr/>
         </p:nvSpPr>
         <p:spPr>
           <a:xfrm>
-            <a:off x="548640" y="2532888"/>
-            <a:ext cx="6035040" cy="960120"/>
+            <a:off x="3127248" y="2852928"/>
+            <a:ext cx="219456" cy="329184"/>
+          </a:xfrm>
+          <a:prstGeom prst="rightArrow">
+            <a:avLst/>
+          </a:prstGeom>
+          <a:solidFill>
+            <a:schemeClr val="accent2"/>
+          </a:solidFill>
+          <a:ln/>
+        </p:spPr>
+      </p:sp>
+      <p:sp>
+        <p:nvSpPr>
+          <p:cNvPr id="10" name="Step 2 card"/>
+          <p:cNvSpPr/>
+          <p:nvPr/>
+        </p:nvSpPr>
+        <p:spPr>
+          <a:xfrm>
+            <a:off x="3401568" y="1371600"/>
+            <a:ext cx="2514600" cy="3291840"/>
           </a:xfrm>
           <a:prstGeom prst="roundRect">
             <a:avLst>
-              <a:gd name="adj" fmla="val 11429"/>
+              <a:gd name="adj" fmla="val 4364"/>
             </a:avLst>
           </a:prstGeom>
           <a:solidFill>
@@ -7165,14 +7949,14 @@
       </p:sp>
       <p:sp>
         <p:nvSpPr>
-          <p:cNvPr id="9" name="Proof 2 marker"/>
+          <p:cNvPr id="11" name="Step 2 marker"/>
           <p:cNvSpPr/>
           <p:nvPr/>
         </p:nvSpPr>
         <p:spPr>
           <a:xfrm>
-            <a:off x="749808" y="2807208"/>
-            <a:ext cx="411480" cy="411480"/>
+            <a:off x="3630168" y="1600200"/>
+            <a:ext cx="502920" cy="502920"/>
           </a:xfrm>
           <a:prstGeom prst="ellipse">
             <a:avLst/>
@@ -7185,14 +7969,14 @@
       </p:sp>
       <p:sp>
         <p:nvSpPr>
-          <p:cNvPr id="10" name="Proof 2 glyph"/>
-          <p:cNvSpPr txBox="1"/>
-          <p:nvPr/>
-        </p:nvSpPr>
-        <p:spPr>
-          <a:xfrm>
-            <a:off x="749808" y="2807208"/>
-            <a:ext cx="411480" cy="411480"/>
+          <p:cNvPr id="12" name="Step 2 number"/>
+          <p:cNvSpPr txBox="1"/>
+          <p:nvPr/>
+        </p:nvSpPr>
+        <p:spPr>
+          <a:xfrm>
+            <a:off x="3630168" y="1600200"/>
+            <a:ext cx="502920" cy="502920"/>
           </a:xfrm>
           <a:prstGeom prst="rect">
             <a:avLst/>
@@ -7208,27 +7992,27 @@
               <a:buNone/>
             </a:pPr>
             <a:r>
-              <a:rPr lang="en-US" sz="1600" b="1" dirty="0">
+              <a:rPr lang="en-US" sz="1800" b="1" dirty="0">
                 <a:solidFill>
                   <a:schemeClr val="bg1"/>
                 </a:solidFill>
               </a:rPr>
-              <a:t>→</a:t>
-            </a:r>
-            <a:endParaRPr lang="en-US" sz="1600" dirty="0"/>
-          </a:p>
-        </p:txBody>
-      </p:sp>
-      <p:sp>
-        <p:nvSpPr>
-          <p:cNvPr id="11" name="Proof 2 label"/>
-          <p:cNvSpPr txBox="1"/>
-          <p:nvPr/>
-        </p:nvSpPr>
-        <p:spPr>
-          <a:xfrm>
-            <a:off x="1325880" y="2660904"/>
-            <a:ext cx="5120640" cy="347472"/>
+              <a:t>2</a:t>
+            </a:r>
+            <a:endParaRPr lang="en-US" sz="1800" dirty="0"/>
+          </a:p>
+        </p:txBody>
+      </p:sp>
+      <p:sp>
+        <p:nvSpPr>
+          <p:cNvPr id="13" name="Step 2 label"/>
+          <p:cNvSpPr txBox="1"/>
+          <p:nvPr/>
+        </p:nvSpPr>
+        <p:spPr>
+          <a:xfrm>
+            <a:off x="3630168" y="2286000"/>
+            <a:ext cx="2103120" cy="274320"/>
           </a:xfrm>
           <a:prstGeom prst="rect">
             <a:avLst/>
@@ -7244,27 +8028,63 @@
               <a:buNone/>
             </a:pPr>
             <a:r>
-              <a:rPr lang="en-US" sz="1600" b="1" dirty="0">
+              <a:rPr lang="en-US" sz="1200" b="1" dirty="0">
+                <a:solidFill>
+                  <a:schemeClr val="accent6"/>
+                </a:solidFill>
+              </a:rPr>
+              <a:t>Correlate</a:t>
+            </a:r>
+            <a:endParaRPr lang="en-US" sz="1200" dirty="0"/>
+          </a:p>
+        </p:txBody>
+      </p:sp>
+      <p:sp>
+        <p:nvSpPr>
+          <p:cNvPr id="14" name="Step 2 title"/>
+          <p:cNvSpPr txBox="1"/>
+          <p:nvPr/>
+        </p:nvSpPr>
+        <p:spPr>
+          <a:xfrm>
+            <a:off x="3630168" y="2578608"/>
+            <a:ext cx="2103120" cy="411480"/>
+          </a:xfrm>
+          <a:prstGeom prst="rect">
+            <a:avLst/>
+          </a:prstGeom>
+          <a:noFill/>
+          <a:ln/>
+        </p:spPr>
+        <p:txBody>
+          <a:bodyPr wrap="square" lIns="0" tIns="0" rIns="0" bIns="0" rtlCol="0" anchor="t"/>
+          <a:lstStyle/>
+          <a:p>
+            <a:pPr indent="0" marL="0">
+              <a:buNone/>
+            </a:pPr>
+            <a:r>
+              <a:rPr lang="en-US" sz="1800" b="1" dirty="0">
                 <a:solidFill>
                   <a:schemeClr val="tx2"/>
                 </a:solidFill>
               </a:rPr>
-              <a:t>Value case one-pager</a:t>
-            </a:r>
-            <a:endParaRPr lang="en-US" sz="1600" dirty="0"/>
-          </a:p>
-        </p:txBody>
-      </p:sp>
-      <p:sp>
-        <p:nvSpPr>
-          <p:cNvPr id="12" name="Proof 2 link"/>
-          <p:cNvSpPr txBox="1"/>
-          <p:nvPr/>
-        </p:nvSpPr>
-        <p:spPr>
-          <a:xfrm>
-            <a:off x="1325880" y="3026664"/>
-            <a:ext cx="5120640" cy="347472"/>
+              <a:t>One case per deal</a:t>
+            </a:r>
+            <a:endParaRPr lang="en-US" sz="1800" dirty="0"/>
+          </a:p>
+        </p:txBody>
+      </p:sp>
+      <p:sp>
+        <p:nvSpPr>
+          <p:cNvPr id="15" name="Step 2 body"/>
+          <p:cNvSpPr txBox="1"/>
+          <p:nvPr/>
+        </p:nvSpPr>
+        <p:spPr>
+          <a:xfrm>
+            <a:off x="3630168" y="3063240"/>
+            <a:ext cx="2103120" cy="1508760"/>
           </a:xfrm>
           <a:prstGeom prst="rect">
             <a:avLst/>
@@ -7280,19 +8100,12 @@
               <a:buNone/>
             </a:pPr>
             <a:r>
-              <a:rPr lang="en-US" sz="1400" u="sng" dirty="0">
-                <a:solidFill>
-                  <a:schemeClr val="accent6"/>
-                </a:solidFill>
-                <a:hlinkClick r:id="rId2" invalidUrl="" action="" tgtFrame="" tooltip="" history="1" highlightClick="0" endSnd="0">
-                  <a:extLst>
-                    <a:ext uri="{A12FA001-AC4F-418D-AE19-62706E023703}">
-                      <ahyp:hlinkClr xmlns:ahyp="http://schemas.microsoft.com/office/drawing/2018/hyperlinkcolor" val="tx"/>
-                    </a:ext>
-                  </a:extLst>
-                </a:hlinkClick>
-              </a:rPr>
-              <a:t>salesforce-process-intelligence.vercel.app/value-case.html</a:t>
+              <a:rPr lang="en-US" sz="1400" dirty="0">
+                <a:solidFill>
+                  <a:schemeClr val="tx1"/>
+                </a:solidFill>
+              </a:rPr>
+              <a:t>Case ID = Opportunity Id. Tasks join on WhatId, Leads on ConvertedOpportunityId.</a:t>
             </a:r>
             <a:endParaRPr lang="en-US" sz="1400" dirty="0"/>
           </a:p>
@@ -7300,18 +8113,38 @@
       </p:sp>
       <p:sp>
         <p:nvSpPr>
-          <p:cNvPr id="13" name="Proof 3"/>
+          <p:cNvPr id="16" name="Step 2 arrow"/>
           <p:cNvSpPr/>
           <p:nvPr/>
         </p:nvSpPr>
         <p:spPr>
           <a:xfrm>
-            <a:off x="548640" y="3648456"/>
-            <a:ext cx="6035040" cy="960120"/>
+            <a:off x="5980176" y="2852928"/>
+            <a:ext cx="219456" cy="329184"/>
+          </a:xfrm>
+          <a:prstGeom prst="rightArrow">
+            <a:avLst/>
+          </a:prstGeom>
+          <a:solidFill>
+            <a:schemeClr val="accent2"/>
+          </a:solidFill>
+          <a:ln/>
+        </p:spPr>
+      </p:sp>
+      <p:sp>
+        <p:nvSpPr>
+          <p:cNvPr id="17" name="Step 3 card"/>
+          <p:cNvSpPr/>
+          <p:nvPr/>
+        </p:nvSpPr>
+        <p:spPr>
+          <a:xfrm>
+            <a:off x="6254496" y="1371600"/>
+            <a:ext cx="2514600" cy="3291840"/>
           </a:xfrm>
           <a:prstGeom prst="roundRect">
             <a:avLst>
-              <a:gd name="adj" fmla="val 11429"/>
+              <a:gd name="adj" fmla="val 4364"/>
             </a:avLst>
           </a:prstGeom>
           <a:solidFill>
@@ -7322,14 +8155,14 @@
       </p:sp>
       <p:sp>
         <p:nvSpPr>
-          <p:cNvPr id="14" name="Proof 3 marker"/>
+          <p:cNvPr id="18" name="Step 3 marker"/>
           <p:cNvSpPr/>
           <p:nvPr/>
         </p:nvSpPr>
         <p:spPr>
           <a:xfrm>
-            <a:off x="749808" y="3922776"/>
-            <a:ext cx="411480" cy="411480"/>
+            <a:off x="6483096" y="1600200"/>
+            <a:ext cx="502920" cy="502920"/>
           </a:xfrm>
           <a:prstGeom prst="ellipse">
             <a:avLst/>
@@ -7342,14 +8175,14 @@
       </p:sp>
       <p:sp>
         <p:nvSpPr>
-          <p:cNvPr id="15" name="Proof 3 glyph"/>
-          <p:cNvSpPr txBox="1"/>
-          <p:nvPr/>
-        </p:nvSpPr>
-        <p:spPr>
-          <a:xfrm>
-            <a:off x="749808" y="3922776"/>
-            <a:ext cx="411480" cy="411480"/>
+          <p:cNvPr id="19" name="Step 3 number"/>
+          <p:cNvSpPr txBox="1"/>
+          <p:nvPr/>
+        </p:nvSpPr>
+        <p:spPr>
+          <a:xfrm>
+            <a:off x="6483096" y="1600200"/>
+            <a:ext cx="502920" cy="502920"/>
           </a:xfrm>
           <a:prstGeom prst="rect">
             <a:avLst/>
@@ -7365,27 +8198,27 @@
               <a:buNone/>
             </a:pPr>
             <a:r>
-              <a:rPr lang="en-US" sz="1600" b="1" dirty="0">
+              <a:rPr lang="en-US" sz="1800" b="1" dirty="0">
                 <a:solidFill>
                   <a:schemeClr val="bg1"/>
                 </a:solidFill>
               </a:rPr>
-              <a:t>→</a:t>
-            </a:r>
-            <a:endParaRPr lang="en-US" sz="1600" dirty="0"/>
-          </a:p>
-        </p:txBody>
-      </p:sp>
-      <p:sp>
-        <p:nvSpPr>
-          <p:cNvPr id="16" name="Proof 3 label"/>
-          <p:cNvSpPr txBox="1"/>
-          <p:nvPr/>
-        </p:nvSpPr>
-        <p:spPr>
-          <a:xfrm>
-            <a:off x="1325880" y="3776472"/>
-            <a:ext cx="5120640" cy="347472"/>
+              <a:t>3</a:t>
+            </a:r>
+            <a:endParaRPr lang="en-US" sz="1800" dirty="0"/>
+          </a:p>
+        </p:txBody>
+      </p:sp>
+      <p:sp>
+        <p:nvSpPr>
+          <p:cNvPr id="20" name="Step 3 label"/>
+          <p:cNvSpPr txBox="1"/>
+          <p:nvPr/>
+        </p:nvSpPr>
+        <p:spPr>
+          <a:xfrm>
+            <a:off x="6483096" y="2286000"/>
+            <a:ext cx="2103120" cy="274320"/>
           </a:xfrm>
           <a:prstGeom prst="rect">
             <a:avLst/>
@@ -7401,27 +8234,63 @@
               <a:buNone/>
             </a:pPr>
             <a:r>
-              <a:rPr lang="en-US" sz="1600" b="1" dirty="0">
+              <a:rPr lang="en-US" sz="1200" b="1" dirty="0">
+                <a:solidFill>
+                  <a:schemeClr val="accent6"/>
+                </a:solidFill>
+              </a:rPr>
+              <a:t>Load</a:t>
+            </a:r>
+            <a:endParaRPr lang="en-US" sz="1200" dirty="0"/>
+          </a:p>
+        </p:txBody>
+      </p:sp>
+      <p:sp>
+        <p:nvSpPr>
+          <p:cNvPr id="21" name="Step 3 title"/>
+          <p:cNvSpPr txBox="1"/>
+          <p:nvPr/>
+        </p:nvSpPr>
+        <p:spPr>
+          <a:xfrm>
+            <a:off x="6483096" y="2578608"/>
+            <a:ext cx="2103120" cy="411480"/>
+          </a:xfrm>
+          <a:prstGeom prst="rect">
+            <a:avLst/>
+          </a:prstGeom>
+          <a:noFill/>
+          <a:ln/>
+        </p:spPr>
+        <p:txBody>
+          <a:bodyPr wrap="square" lIns="0" tIns="0" rIns="0" bIns="0" rtlCol="0" anchor="t"/>
+          <a:lstStyle/>
+          <a:p>
+            <a:pPr indent="0" marL="0">
+              <a:buNone/>
+            </a:pPr>
+            <a:r>
+              <a:rPr lang="en-US" sz="1800" b="1" dirty="0">
                 <a:solidFill>
                   <a:schemeClr val="tx2"/>
                 </a:solidFill>
               </a:rPr>
-              <a:t>Live Salesforce extract</a:t>
-            </a:r>
-            <a:endParaRPr lang="en-US" sz="1600" dirty="0"/>
-          </a:p>
-        </p:txBody>
-      </p:sp>
-      <p:sp>
-        <p:nvSpPr>
-          <p:cNvPr id="17" name="Proof 3 link"/>
-          <p:cNvSpPr txBox="1"/>
-          <p:nvPr/>
-        </p:nvSpPr>
-        <p:spPr>
-          <a:xfrm>
-            <a:off x="1325880" y="4142232"/>
-            <a:ext cx="5120640" cy="347472"/>
+              <a:t>Event log</a:t>
+            </a:r>
+            <a:endParaRPr lang="en-US" sz="1800" dirty="0"/>
+          </a:p>
+        </p:txBody>
+      </p:sp>
+      <p:sp>
+        <p:nvSpPr>
+          <p:cNvPr id="22" name="Step 3 body"/>
+          <p:cNvSpPr txBox="1"/>
+          <p:nvPr/>
+        </p:nvSpPr>
+        <p:spPr>
+          <a:xfrm>
+            <a:off x="6483096" y="3063240"/>
+            <a:ext cx="2103120" cy="1508760"/>
           </a:xfrm>
           <a:prstGeom prst="rect">
             <a:avLst/>
@@ -7437,19 +8306,12 @@
               <a:buNone/>
             </a:pPr>
             <a:r>
-              <a:rPr lang="en-US" sz="1400" u="sng" dirty="0">
-                <a:solidFill>
-                  <a:schemeClr val="accent6"/>
-                </a:solidFill>
-                <a:hlinkClick r:id="rId3" invalidUrl="" action="" tgtFrame="" tooltip="" history="1" highlightClick="0" endSnd="0">
-                  <a:extLst>
-                    <a:ext uri="{A12FA001-AC4F-418D-AE19-62706E023703}">
-                      <ahyp:hlinkClr xmlns:ahyp="http://schemas.microsoft.com/office/drawing/2018/hyperlinkcolor" val="tx"/>
-                    </a:ext>
-                  </a:extLst>
-                </a:hlinkClick>
-              </a:rPr>
-              <a:t>salesforce-process-intelligence.vercel.app/live.html</a:t>
+              <a:rPr lang="en-US" sz="1400" dirty="0">
+                <a:solidFill>
+                  <a:schemeClr val="tx1"/>
+                </a:solidFill>
+              </a:rPr>
+              <a:t>CSV and IEEE XES with activity, timestamps, resource and case attributes, ready for Apromore.</a:t>
             </a:r>
             <a:endParaRPr lang="en-US" sz="1400" dirty="0"/>
           </a:p>
@@ -7457,18 +8319,38 @@
       </p:sp>
       <p:sp>
         <p:nvSpPr>
-          <p:cNvPr id="18" name="Proof 4"/>
+          <p:cNvPr id="23" name="Step 3 arrow"/>
           <p:cNvSpPr/>
           <p:nvPr/>
         </p:nvSpPr>
         <p:spPr>
           <a:xfrm>
-            <a:off x="548640" y="4764024"/>
-            <a:ext cx="6035040" cy="960120"/>
+            <a:off x="8833104" y="2852928"/>
+            <a:ext cx="219456" cy="329184"/>
+          </a:xfrm>
+          <a:prstGeom prst="rightArrow">
+            <a:avLst/>
+          </a:prstGeom>
+          <a:solidFill>
+            <a:schemeClr val="accent2"/>
+          </a:solidFill>
+          <a:ln/>
+        </p:spPr>
+      </p:sp>
+      <p:sp>
+        <p:nvSpPr>
+          <p:cNvPr id="24" name="Step 4 card"/>
+          <p:cNvSpPr/>
+          <p:nvPr/>
+        </p:nvSpPr>
+        <p:spPr>
+          <a:xfrm>
+            <a:off x="9107424" y="1371600"/>
+            <a:ext cx="2514600" cy="3291840"/>
           </a:xfrm>
           <a:prstGeom prst="roundRect">
             <a:avLst>
-              <a:gd name="adj" fmla="val 11429"/>
+              <a:gd name="adj" fmla="val 4364"/>
             </a:avLst>
           </a:prstGeom>
           <a:solidFill>
@@ -7479,14 +8361,14 @@
       </p:sp>
       <p:sp>
         <p:nvSpPr>
-          <p:cNvPr id="19" name="Proof 4 marker"/>
+          <p:cNvPr id="25" name="Step 4 marker"/>
           <p:cNvSpPr/>
           <p:nvPr/>
         </p:nvSpPr>
         <p:spPr>
           <a:xfrm>
-            <a:off x="749808" y="5038344"/>
-            <a:ext cx="411480" cy="411480"/>
+            <a:off x="9336024" y="1600200"/>
+            <a:ext cx="502920" cy="502920"/>
           </a:xfrm>
           <a:prstGeom prst="ellipse">
             <a:avLst/>
@@ -7499,14 +8381,14 @@
       </p:sp>
       <p:sp>
         <p:nvSpPr>
-          <p:cNvPr id="20" name="Proof 4 glyph"/>
-          <p:cNvSpPr txBox="1"/>
-          <p:nvPr/>
-        </p:nvSpPr>
-        <p:spPr>
-          <a:xfrm>
-            <a:off x="749808" y="5038344"/>
-            <a:ext cx="411480" cy="411480"/>
+          <p:cNvPr id="26" name="Step 4 number"/>
+          <p:cNvSpPr txBox="1"/>
+          <p:nvPr/>
+        </p:nvSpPr>
+        <p:spPr>
+          <a:xfrm>
+            <a:off x="9336024" y="1600200"/>
+            <a:ext cx="502920" cy="502920"/>
           </a:xfrm>
           <a:prstGeom prst="rect">
             <a:avLst/>
@@ -7522,145 +8404,194 @@
               <a:buNone/>
             </a:pPr>
             <a:r>
+              <a:rPr lang="en-US" sz="1800" b="1" dirty="0">
+                <a:solidFill>
+                  <a:schemeClr val="bg1"/>
+                </a:solidFill>
+              </a:rPr>
+              <a:t>4</a:t>
+            </a:r>
+            <a:endParaRPr lang="en-US" sz="1800" dirty="0"/>
+          </a:p>
+        </p:txBody>
+      </p:sp>
+      <p:sp>
+        <p:nvSpPr>
+          <p:cNvPr id="27" name="Step 4 label"/>
+          <p:cNvSpPr txBox="1"/>
+          <p:nvPr/>
+        </p:nvSpPr>
+        <p:spPr>
+          <a:xfrm>
+            <a:off x="9336024" y="2286000"/>
+            <a:ext cx="2103120" cy="274320"/>
+          </a:xfrm>
+          <a:prstGeom prst="rect">
+            <a:avLst/>
+          </a:prstGeom>
+          <a:noFill/>
+          <a:ln/>
+        </p:spPr>
+        <p:txBody>
+          <a:bodyPr wrap="square" lIns="0" tIns="0" rIns="0" bIns="0" rtlCol="0" anchor="t"/>
+          <a:lstStyle/>
+          <a:p>
+            <a:pPr indent="0" marL="0">
+              <a:buNone/>
+            </a:pPr>
+            <a:r>
+              <a:rPr lang="en-US" sz="1200" b="1" dirty="0">
+                <a:solidFill>
+                  <a:schemeClr val="accent6"/>
+                </a:solidFill>
+              </a:rPr>
+              <a:t>Mine and size</a:t>
+            </a:r>
+            <a:endParaRPr lang="en-US" sz="1200" dirty="0"/>
+          </a:p>
+        </p:txBody>
+      </p:sp>
+      <p:sp>
+        <p:nvSpPr>
+          <p:cNvPr id="28" name="Step 4 title"/>
+          <p:cNvSpPr txBox="1"/>
+          <p:nvPr/>
+        </p:nvSpPr>
+        <p:spPr>
+          <a:xfrm>
+            <a:off x="9336024" y="2578608"/>
+            <a:ext cx="2103120" cy="411480"/>
+          </a:xfrm>
+          <a:prstGeom prst="rect">
+            <a:avLst/>
+          </a:prstGeom>
+          <a:noFill/>
+          <a:ln/>
+        </p:spPr>
+        <p:txBody>
+          <a:bodyPr wrap="square" lIns="0" tIns="0" rIns="0" bIns="0" rtlCol="0" anchor="t"/>
+          <a:lstStyle/>
+          <a:p>
+            <a:pPr indent="0" marL="0">
+              <a:buNone/>
+            </a:pPr>
+            <a:r>
+              <a:rPr lang="en-US" sz="1800" b="1" dirty="0">
+                <a:solidFill>
+                  <a:schemeClr val="tx2"/>
+                </a:solidFill>
+              </a:rPr>
+              <a:t>Map and value</a:t>
+            </a:r>
+            <a:endParaRPr lang="en-US" sz="1800" dirty="0"/>
+          </a:p>
+        </p:txBody>
+      </p:sp>
+      <p:sp>
+        <p:nvSpPr>
+          <p:cNvPr id="29" name="Step 4 body"/>
+          <p:cNvSpPr txBox="1"/>
+          <p:nvPr/>
+        </p:nvSpPr>
+        <p:spPr>
+          <a:xfrm>
+            <a:off x="9336024" y="3063240"/>
+            <a:ext cx="2103120" cy="1508760"/>
+          </a:xfrm>
+          <a:prstGeom prst="rect">
+            <a:avLst/>
+          </a:prstGeom>
+          <a:noFill/>
+          <a:ln/>
+        </p:spPr>
+        <p:txBody>
+          <a:bodyPr wrap="square" lIns="0" tIns="0" rIns="0" bIns="0" rtlCol="0" anchor="t"/>
+          <a:lstStyle/>
+          <a:p>
+            <a:pPr indent="0" marL="0">
+              <a:buNone/>
+            </a:pPr>
+            <a:r>
+              <a:rPr lang="en-US" sz="1400" dirty="0">
+                <a:solidFill>
+                  <a:schemeClr val="tx1"/>
+                </a:solidFill>
+              </a:rPr>
+              <a:t>Directly-follows graph, variant analysis, cohort win rates and a driver-based value model.</a:t>
+            </a:r>
+            <a:endParaRPr lang="en-US" sz="1400" dirty="0"/>
+          </a:p>
+        </p:txBody>
+      </p:sp>
+      <p:sp>
+        <p:nvSpPr>
+          <p:cNvPr id="30" name="Live run band"/>
+          <p:cNvSpPr/>
+          <p:nvPr/>
+        </p:nvSpPr>
+        <p:spPr>
+          <a:xfrm>
+            <a:off x="548640" y="4983480"/>
+            <a:ext cx="11064240" cy="1051560"/>
+          </a:xfrm>
+          <a:prstGeom prst="roundRect">
+            <a:avLst>
+              <a:gd name="adj" fmla="val 10435"/>
+            </a:avLst>
+          </a:prstGeom>
+          <a:solidFill>
+            <a:schemeClr val="tx2"/>
+          </a:solidFill>
+          <a:ln/>
+        </p:spPr>
+      </p:sp>
+      <p:sp>
+        <p:nvSpPr>
+          <p:cNvPr id="31" name="Live run text"/>
+          <p:cNvSpPr txBox="1"/>
+          <p:nvPr/>
+        </p:nvSpPr>
+        <p:spPr>
+          <a:xfrm>
+            <a:off x="822960" y="4983480"/>
+            <a:ext cx="10515600" cy="1051560"/>
+          </a:xfrm>
+          <a:prstGeom prst="rect">
+            <a:avLst/>
+          </a:prstGeom>
+          <a:noFill/>
+          <a:ln/>
+        </p:spPr>
+        <p:txBody>
+          <a:bodyPr wrap="square" lIns="0" tIns="0" rIns="0" bIns="0" rtlCol="0" anchor="ctr"/>
+          <a:lstStyle/>
+          <a:p>
+            <a:pPr indent="0" marL="0">
+              <a:buNone/>
+            </a:pPr>
+            <a:r>
               <a:rPr lang="en-US" sz="1600" b="1" dirty="0">
                 <a:solidFill>
+                  <a:schemeClr val="accent3"/>
+                </a:solidFill>
+              </a:rPr>
+              <a:t>Live run on a Salesforce trial org:  </a:t>
+            </a:r>
+            <a:pPr indent="0" marL="0">
+              <a:buNone/>
+            </a:pPr>
+            <a:r>
+              <a:rPr lang="en-US" sz="1600" dirty="0">
+                <a:solidFill>
                   <a:schemeClr val="bg1"/>
                 </a:solidFill>
               </a:rPr>
-              <a:t>→</a:t>
+              <a:t>40 opportunities  ·  351 events  ·  2 objects joined  ·  CSV + XES for Apromore</a:t>
             </a:r>
             <a:endParaRPr lang="en-US" sz="1600" dirty="0"/>
           </a:p>
         </p:txBody>
       </p:sp>
-      <p:sp>
-        <p:nvSpPr>
-          <p:cNvPr id="21" name="Proof 4 label"/>
-          <p:cNvSpPr txBox="1"/>
-          <p:nvPr/>
-        </p:nvSpPr>
-        <p:spPr>
-          <a:xfrm>
-            <a:off x="1325880" y="4892040"/>
-            <a:ext cx="5120640" cy="347472"/>
-          </a:xfrm>
-          <a:prstGeom prst="rect">
-            <a:avLst/>
-          </a:prstGeom>
-          <a:noFill/>
-          <a:ln/>
-        </p:spPr>
-        <p:txBody>
-          <a:bodyPr wrap="square" lIns="0" tIns="0" rIns="0" bIns="0" rtlCol="0" anchor="t"/>
-          <a:lstStyle/>
-          <a:p>
-            <a:pPr indent="0" marL="0">
-              <a:buNone/>
-            </a:pPr>
-            <a:r>
-              <a:rPr lang="en-US" sz="1600" b="1" dirty="0">
-                <a:solidFill>
-                  <a:schemeClr val="tx2"/>
-                </a:solidFill>
-              </a:rPr>
-              <a:t>Source code and event logs</a:t>
-            </a:r>
-            <a:endParaRPr lang="en-US" sz="1600" dirty="0"/>
-          </a:p>
-        </p:txBody>
-      </p:sp>
-      <p:sp>
-        <p:nvSpPr>
-          <p:cNvPr id="22" name="Proof 4 link"/>
-          <p:cNvSpPr txBox="1"/>
-          <p:nvPr/>
-        </p:nvSpPr>
-        <p:spPr>
-          <a:xfrm>
-            <a:off x="1325880" y="5257800"/>
-            <a:ext cx="5120640" cy="347472"/>
-          </a:xfrm>
-          <a:prstGeom prst="rect">
-            <a:avLst/>
-          </a:prstGeom>
-          <a:noFill/>
-          <a:ln/>
-        </p:spPr>
-        <p:txBody>
-          <a:bodyPr wrap="square" lIns="0" tIns="0" rIns="0" bIns="0" rtlCol="0" anchor="t"/>
-          <a:lstStyle/>
-          <a:p>
-            <a:pPr indent="0" marL="0">
-              <a:buNone/>
-            </a:pPr>
-            <a:r>
-              <a:rPr lang="en-US" sz="1400" u="sng" dirty="0">
-                <a:solidFill>
-                  <a:schemeClr val="accent6"/>
-                </a:solidFill>
-                <a:hlinkClick r:id="rId4" invalidUrl="" action="" tgtFrame="" tooltip="" history="1" highlightClick="0" endSnd="0">
-                  <a:extLst>
-                    <a:ext uri="{A12FA001-AC4F-418D-AE19-62706E023703}">
-                      <ahyp:hlinkClr xmlns:ahyp="http://schemas.microsoft.com/office/drawing/2018/hyperlinkcolor" val="tx"/>
-                    </a:ext>
-                  </a:extLst>
-                </a:hlinkClick>
-              </a:rPr>
-              <a:t>github.com/ch-lukas/salesforce-process-intelligence</a:t>
-            </a:r>
-            <a:endParaRPr lang="en-US" sz="1400" dirty="0"/>
-          </a:p>
-        </p:txBody>
-      </p:sp>
-      <p:sp>
-        <p:nvSpPr>
-          <p:cNvPr id="23" name="Screenshot frame"/>
-          <p:cNvSpPr/>
-          <p:nvPr/>
-        </p:nvSpPr>
-        <p:spPr>
-          <a:xfrm>
-            <a:off x="6903720" y="1371600"/>
-            <a:ext cx="4802925" cy="4434840"/>
-          </a:xfrm>
-          <a:prstGeom prst="rect">
-            <a:avLst/>
-          </a:prstGeom>
-          <a:solidFill>
-            <a:schemeClr val="bg1"/>
-          </a:solidFill>
-          <a:ln w="12700">
-            <a:solidFill>
-              <a:schemeClr val="accent3"/>
-            </a:solidFill>
-            <a:prstDash val="solid"/>
-          </a:ln>
-        </p:spPr>
-      </p:sp>
-      <p:pic>
-        <p:nvPicPr>
-          <p:cNvPr id="24" name="Value case screenshot" descr="Value case one-pager on the hosted site">    </p:cNvPr>
-          <p:cNvPicPr>
-            <a:picLocks noChangeAspect="1"/>
-          </p:cNvPicPr>
-          <p:nvPr/>
-        </p:nvPicPr>
-        <p:blipFill>
-          <a:blip r:embed="rId5"/>
-          <a:stretch>
-            <a:fillRect/>
-          </a:stretch>
-        </p:blipFill>
-        <p:spPr>
-          <a:xfrm>
-            <a:off x="6949440" y="1417320"/>
-            <a:ext cx="4711485" cy="4343400"/>
-          </a:xfrm>
-          <a:prstGeom prst="rect">
-            <a:avLst/>
-          </a:prstGeom>
-        </p:spPr>
-      </p:pic>
       <p:sp>
         <p:nvSpPr>
           <p:cNvPr id="25" name="Slide Number Placeholder 0"/>
@@ -7733,29 +8664,7 @@
       </p:grpSpPr>
       <p:sp>
         <p:nvSpPr>
-          <p:cNvPr id="2" name="Decor circle large"/>
-          <p:cNvSpPr/>
-          <p:nvPr/>
-        </p:nvSpPr>
-        <p:spPr>
-          <a:xfrm>
-            <a:off x="9326880" y="4023360"/>
-            <a:ext cx="4937760" cy="4937760"/>
-          </a:xfrm>
-          <a:prstGeom prst="ellipse">
-            <a:avLst/>
-          </a:prstGeom>
-          <a:solidFill>
-            <a:schemeClr val="accent1">
-              <a:alpha val="25000"/>
-            </a:schemeClr>
-          </a:solidFill>
-          <a:ln/>
-        </p:spPr>
-      </p:sp>
-      <p:sp>
-        <p:nvSpPr>
-          <p:cNvPr id="3" name="Text 0"/>
+          <p:cNvPr id="2" name="Text 0"/>
           <p:cNvSpPr/>
           <p:nvPr>
             <p:ph idx="100" type="title" hasCustomPrompt="1"/>
@@ -7763,8 +8672,8 @@
         </p:nvSpPr>
         <p:spPr>
           <a:xfrm>
-            <a:off x="731520" y="548640"/>
-            <a:ext cx="10698480" cy="914400"/>
+            <a:off x="548640" y="320040"/>
+            <a:ext cx="11064240" cy="822960"/>
           </a:xfrm>
           <a:prstGeom prst="rect">
             <a:avLst/>
@@ -7780,49 +8689,947 @@
               <a:buNone/>
             </a:pPr>
             <a:r>
-              <a:rPr lang="en-US" sz="3600" b="1" dirty="0">
-                <a:solidFill>
-                  <a:schemeClr val="bg1"/>
-                </a:solidFill>
-              </a:rPr>
-              <a:t>Turning the finding into a decision</a:t>
-            </a:r>
-            <a:endParaRPr lang="en-US" sz="3600" dirty="0"/>
-          </a:p>
-        </p:txBody>
-      </p:sp>
-      <p:sp>
-        <p:nvSpPr>
-          <p:cNvPr id="4" name="Next 1 card"/>
+              <a:rPr lang="en-US" sz="3000" b="1" dirty="0">
+                <a:solidFill>
+                  <a:schemeClr val="tx2"/>
+                </a:solidFill>
+              </a:rPr>
+              <a:t>Data model: Salesforce objects to an event log</a:t>
+            </a:r>
+            <a:endParaRPr lang="en-US" sz="3000" dirty="0"/>
+          </a:p>
+        </p:txBody>
+      </p:sp>
+      <p:graphicFrame>
+        <p:nvGraphicFramePr>
+          <p:cNvPr id="9" name="Data model table"/>
+          <p:cNvGraphicFramePr>
+            <a:graphicFrameLocks noGrp="1"/>
+          </p:cNvGraphicFramePr>
+          <p:nvPr>
+            <p:extLst>
+              <p:ext uri="{D42A27DB-BD31-4B8C-83A1-F6EECF244321}">
+                <p14:modId xmlns:p14="http://schemas.microsoft.com/office/powerpoint/2010/main" val="1579011935"/>
+              </p:ext>
+            </p:extLst>
+          </p:nvPr>
+        </p:nvGraphicFramePr>
+        <p:xfrm>
+          <a:off x="548640" y="1371600"/>
+          <a:ext cx="6949440" cy="914400"/>
+        </p:xfrm>
+        <a:graphic>
+          <a:graphicData uri="http://schemas.openxmlformats.org/drawingml/2006/table">
+            <a:tbl>
+              <a:tblPr/>
+              <a:tblGrid>
+                <a:gridCol w="1920240"/>
+                <a:gridCol w="5029200"/>
+              </a:tblGrid>
+              <a:tr h="0">
+                <a:tc>
+                  <a:txBody>
+                    <a:bodyPr/>
+                    <a:lstStyle/>
+                    <a:p>
+                      <a:pPr indent="0" marL="0">
+                        <a:buNone/>
+                      </a:pPr>
+                      <a:r>
+                        <a:rPr lang="en-US" sz="1400" b="1" dirty="0">
+                          <a:solidFill>
+                            <a:schemeClr val="bg1"/>
+                          </a:solidFill>
+                        </a:rPr>
+                        <a:t>Event log field</a:t>
+                      </a:r>
+                      <a:endParaRPr lang="en-US" sz="1400" dirty="0"/>
+                    </a:p>
+                  </a:txBody>
+                  <a:tcPr marL="109728" marR="109728" marT="54864" marB="54864" anchor="ctr">
+                    <a:lnL w="9525" cap="flat" cmpd="sng" algn="ctr">
+                      <a:solidFill>
+                        <a:srgbClr val="CFE9FE"/>
+                      </a:solidFill>
+                      <a:prstDash val="solid"/>
+                      <a:round/>
+                      <a:headEnd type="none" w="med" len="med"/>
+                      <a:tailEnd type="none" w="med" len="med"/>
+                    </a:lnL>
+                    <a:lnR w="9525" cap="flat" cmpd="sng" algn="ctr">
+                      <a:solidFill>
+                        <a:srgbClr val="CFE9FE"/>
+                      </a:solidFill>
+                      <a:prstDash val="solid"/>
+                      <a:round/>
+                      <a:headEnd type="none" w="med" len="med"/>
+                      <a:tailEnd type="none" w="med" len="med"/>
+                    </a:lnR>
+                    <a:lnT w="9525" cap="flat" cmpd="sng" algn="ctr">
+                      <a:solidFill>
+                        <a:srgbClr val="CFE9FE"/>
+                      </a:solidFill>
+                      <a:prstDash val="solid"/>
+                      <a:round/>
+                      <a:headEnd type="none" w="med" len="med"/>
+                      <a:tailEnd type="none" w="med" len="med"/>
+                    </a:lnT>
+                    <a:lnB w="9525" cap="flat" cmpd="sng" algn="ctr">
+                      <a:solidFill>
+                        <a:srgbClr val="CFE9FE"/>
+                      </a:solidFill>
+                      <a:prstDash val="solid"/>
+                      <a:round/>
+                      <a:headEnd type="none" w="med" len="med"/>
+                      <a:tailEnd type="none" w="med" len="med"/>
+                    </a:lnB>
+                    <a:solidFill>
+                      <a:schemeClr val="tx2"/>
+                    </a:solidFill>
+                  </a:tcPr>
+                </a:tc>
+                <a:tc>
+                  <a:txBody>
+                    <a:bodyPr/>
+                    <a:lstStyle/>
+                    <a:p>
+                      <a:pPr indent="0" marL="0">
+                        <a:buNone/>
+                      </a:pPr>
+                      <a:r>
+                        <a:rPr lang="en-US" sz="1400" b="1" dirty="0">
+                          <a:solidFill>
+                            <a:schemeClr val="bg1"/>
+                          </a:solidFill>
+                        </a:rPr>
+                        <a:t>Salesforce source</a:t>
+                      </a:r>
+                      <a:endParaRPr lang="en-US" sz="1400" dirty="0"/>
+                    </a:p>
+                  </a:txBody>
+                  <a:tcPr marL="109728" marR="109728" marT="54864" marB="54864" anchor="ctr">
+                    <a:lnL w="9525" cap="flat" cmpd="sng" algn="ctr">
+                      <a:solidFill>
+                        <a:srgbClr val="CFE9FE"/>
+                      </a:solidFill>
+                      <a:prstDash val="solid"/>
+                      <a:round/>
+                      <a:headEnd type="none" w="med" len="med"/>
+                      <a:tailEnd type="none" w="med" len="med"/>
+                    </a:lnL>
+                    <a:lnR w="9525" cap="flat" cmpd="sng" algn="ctr">
+                      <a:solidFill>
+                        <a:srgbClr val="CFE9FE"/>
+                      </a:solidFill>
+                      <a:prstDash val="solid"/>
+                      <a:round/>
+                      <a:headEnd type="none" w="med" len="med"/>
+                      <a:tailEnd type="none" w="med" len="med"/>
+                    </a:lnR>
+                    <a:lnT w="9525" cap="flat" cmpd="sng" algn="ctr">
+                      <a:solidFill>
+                        <a:srgbClr val="CFE9FE"/>
+                      </a:solidFill>
+                      <a:prstDash val="solid"/>
+                      <a:round/>
+                      <a:headEnd type="none" w="med" len="med"/>
+                      <a:tailEnd type="none" w="med" len="med"/>
+                    </a:lnT>
+                    <a:lnB w="9525" cap="flat" cmpd="sng" algn="ctr">
+                      <a:solidFill>
+                        <a:srgbClr val="CFE9FE"/>
+                      </a:solidFill>
+                      <a:prstDash val="solid"/>
+                      <a:round/>
+                      <a:headEnd type="none" w="med" len="med"/>
+                      <a:tailEnd type="none" w="med" len="med"/>
+                    </a:lnB>
+                    <a:solidFill>
+                      <a:schemeClr val="tx2"/>
+                    </a:solidFill>
+                  </a:tcPr>
+                </a:tc>
+              </a:tr>
+              <a:tr h="0">
+                <a:tc>
+                  <a:txBody>
+                    <a:bodyPr/>
+                    <a:lstStyle/>
+                    <a:p>
+                      <a:pPr indent="0" marL="0">
+                        <a:buNone/>
+                      </a:pPr>
+                      <a:r>
+                        <a:rPr lang="en-US" sz="1400" dirty="0">
+                          <a:solidFill>
+                            <a:schemeClr val="tx1"/>
+                          </a:solidFill>
+                        </a:rPr>
+                        <a:t>Case ID</a:t>
+                      </a:r>
+                      <a:endParaRPr lang="en-US" sz="1400" dirty="0"/>
+                    </a:p>
+                  </a:txBody>
+                  <a:tcPr marL="109728" marR="109728" marT="54864" marB="54864" anchor="ctr">
+                    <a:lnL w="9525" cap="flat" cmpd="sng" algn="ctr">
+                      <a:solidFill>
+                        <a:srgbClr val="CFE9FE"/>
+                      </a:solidFill>
+                      <a:prstDash val="solid"/>
+                      <a:round/>
+                      <a:headEnd type="none" w="med" len="med"/>
+                      <a:tailEnd type="none" w="med" len="med"/>
+                    </a:lnL>
+                    <a:lnR w="9525" cap="flat" cmpd="sng" algn="ctr">
+                      <a:solidFill>
+                        <a:srgbClr val="CFE9FE"/>
+                      </a:solidFill>
+                      <a:prstDash val="solid"/>
+                      <a:round/>
+                      <a:headEnd type="none" w="med" len="med"/>
+                      <a:tailEnd type="none" w="med" len="med"/>
+                    </a:lnR>
+                    <a:lnT w="9525" cap="flat" cmpd="sng" algn="ctr">
+                      <a:solidFill>
+                        <a:srgbClr val="CFE9FE"/>
+                      </a:solidFill>
+                      <a:prstDash val="solid"/>
+                      <a:round/>
+                      <a:headEnd type="none" w="med" len="med"/>
+                      <a:tailEnd type="none" w="med" len="med"/>
+                    </a:lnT>
+                    <a:lnB w="9525" cap="flat" cmpd="sng" algn="ctr">
+                      <a:solidFill>
+                        <a:srgbClr val="CFE9FE"/>
+                      </a:solidFill>
+                      <a:prstDash val="solid"/>
+                      <a:round/>
+                      <a:headEnd type="none" w="med" len="med"/>
+                      <a:tailEnd type="none" w="med" len="med"/>
+                    </a:lnB>
+                    <a:solidFill>
+                      <a:schemeClr val="bg2"/>
+                    </a:solidFill>
+                  </a:tcPr>
+                </a:tc>
+                <a:tc>
+                  <a:txBody>
+                    <a:bodyPr/>
+                    <a:lstStyle/>
+                    <a:p>
+                      <a:pPr indent="0" marL="0">
+                        <a:buNone/>
+                      </a:pPr>
+                      <a:r>
+                        <a:rPr lang="en-US" sz="1400" dirty="0">
+                          <a:solidFill>
+                            <a:schemeClr val="tx1"/>
+                          </a:solidFill>
+                        </a:rPr>
+                        <a:t>Opportunity.Id</a:t>
+                      </a:r>
+                      <a:endParaRPr lang="en-US" sz="1400" dirty="0"/>
+                    </a:p>
+                  </a:txBody>
+                  <a:tcPr marL="109728" marR="109728" marT="54864" marB="54864" anchor="ctr">
+                    <a:lnL w="9525" cap="flat" cmpd="sng" algn="ctr">
+                      <a:solidFill>
+                        <a:srgbClr val="CFE9FE"/>
+                      </a:solidFill>
+                      <a:prstDash val="solid"/>
+                      <a:round/>
+                      <a:headEnd type="none" w="med" len="med"/>
+                      <a:tailEnd type="none" w="med" len="med"/>
+                    </a:lnL>
+                    <a:lnR w="9525" cap="flat" cmpd="sng" algn="ctr">
+                      <a:solidFill>
+                        <a:srgbClr val="CFE9FE"/>
+                      </a:solidFill>
+                      <a:prstDash val="solid"/>
+                      <a:round/>
+                      <a:headEnd type="none" w="med" len="med"/>
+                      <a:tailEnd type="none" w="med" len="med"/>
+                    </a:lnR>
+                    <a:lnT w="9525" cap="flat" cmpd="sng" algn="ctr">
+                      <a:solidFill>
+                        <a:srgbClr val="CFE9FE"/>
+                      </a:solidFill>
+                      <a:prstDash val="solid"/>
+                      <a:round/>
+                      <a:headEnd type="none" w="med" len="med"/>
+                      <a:tailEnd type="none" w="med" len="med"/>
+                    </a:lnT>
+                    <a:lnB w="9525" cap="flat" cmpd="sng" algn="ctr">
+                      <a:solidFill>
+                        <a:srgbClr val="CFE9FE"/>
+                      </a:solidFill>
+                      <a:prstDash val="solid"/>
+                      <a:round/>
+                      <a:headEnd type="none" w="med" len="med"/>
+                      <a:tailEnd type="none" w="med" len="med"/>
+                    </a:lnB>
+                    <a:solidFill>
+                      <a:schemeClr val="bg2"/>
+                    </a:solidFill>
+                  </a:tcPr>
+                </a:tc>
+              </a:tr>
+              <a:tr h="0">
+                <a:tc>
+                  <a:txBody>
+                    <a:bodyPr/>
+                    <a:lstStyle/>
+                    <a:p>
+                      <a:pPr indent="0" marL="0">
+                        <a:buNone/>
+                      </a:pPr>
+                      <a:r>
+                        <a:rPr lang="en-US" sz="1400" dirty="0">
+                          <a:solidFill>
+                            <a:schemeClr val="tx1"/>
+                          </a:solidFill>
+                        </a:rPr>
+                        <a:t>Lead Created</a:t>
+                      </a:r>
+                      <a:endParaRPr lang="en-US" sz="1400" dirty="0"/>
+                    </a:p>
+                  </a:txBody>
+                  <a:tcPr marL="109728" marR="109728" marT="54864" marB="54864" anchor="ctr">
+                    <a:lnL w="9525" cap="flat" cmpd="sng" algn="ctr">
+                      <a:solidFill>
+                        <a:srgbClr val="CFE9FE"/>
+                      </a:solidFill>
+                      <a:prstDash val="solid"/>
+                      <a:round/>
+                      <a:headEnd type="none" w="med" len="med"/>
+                      <a:tailEnd type="none" w="med" len="med"/>
+                    </a:lnL>
+                    <a:lnR w="9525" cap="flat" cmpd="sng" algn="ctr">
+                      <a:solidFill>
+                        <a:srgbClr val="CFE9FE"/>
+                      </a:solidFill>
+                      <a:prstDash val="solid"/>
+                      <a:round/>
+                      <a:headEnd type="none" w="med" len="med"/>
+                      <a:tailEnd type="none" w="med" len="med"/>
+                    </a:lnR>
+                    <a:lnT w="9525" cap="flat" cmpd="sng" algn="ctr">
+                      <a:solidFill>
+                        <a:srgbClr val="CFE9FE"/>
+                      </a:solidFill>
+                      <a:prstDash val="solid"/>
+                      <a:round/>
+                      <a:headEnd type="none" w="med" len="med"/>
+                      <a:tailEnd type="none" w="med" len="med"/>
+                    </a:lnT>
+                    <a:lnB w="9525" cap="flat" cmpd="sng" algn="ctr">
+                      <a:solidFill>
+                        <a:srgbClr val="CFE9FE"/>
+                      </a:solidFill>
+                      <a:prstDash val="solid"/>
+                      <a:round/>
+                      <a:headEnd type="none" w="med" len="med"/>
+                      <a:tailEnd type="none" w="med" len="med"/>
+                    </a:lnB>
+                    <a:solidFill>
+                      <a:schemeClr val="bg1"/>
+                    </a:solidFill>
+                  </a:tcPr>
+                </a:tc>
+                <a:tc>
+                  <a:txBody>
+                    <a:bodyPr/>
+                    <a:lstStyle/>
+                    <a:p>
+                      <a:pPr indent="0" marL="0">
+                        <a:buNone/>
+                      </a:pPr>
+                      <a:r>
+                        <a:rPr lang="en-US" sz="1400" dirty="0">
+                          <a:solidFill>
+                            <a:schemeClr val="tx1"/>
+                          </a:solidFill>
+                        </a:rPr>
+                        <a:t>Lead.CreatedDate, joined on Lead.ConvertedOpportunityId</a:t>
+                      </a:r>
+                      <a:endParaRPr lang="en-US" sz="1400" dirty="0"/>
+                    </a:p>
+                  </a:txBody>
+                  <a:tcPr marL="109728" marR="109728" marT="54864" marB="54864" anchor="ctr">
+                    <a:lnL w="9525" cap="flat" cmpd="sng" algn="ctr">
+                      <a:solidFill>
+                        <a:srgbClr val="CFE9FE"/>
+                      </a:solidFill>
+                      <a:prstDash val="solid"/>
+                      <a:round/>
+                      <a:headEnd type="none" w="med" len="med"/>
+                      <a:tailEnd type="none" w="med" len="med"/>
+                    </a:lnL>
+                    <a:lnR w="9525" cap="flat" cmpd="sng" algn="ctr">
+                      <a:solidFill>
+                        <a:srgbClr val="CFE9FE"/>
+                      </a:solidFill>
+                      <a:prstDash val="solid"/>
+                      <a:round/>
+                      <a:headEnd type="none" w="med" len="med"/>
+                      <a:tailEnd type="none" w="med" len="med"/>
+                    </a:lnR>
+                    <a:lnT w="9525" cap="flat" cmpd="sng" algn="ctr">
+                      <a:solidFill>
+                        <a:srgbClr val="CFE9FE"/>
+                      </a:solidFill>
+                      <a:prstDash val="solid"/>
+                      <a:round/>
+                      <a:headEnd type="none" w="med" len="med"/>
+                      <a:tailEnd type="none" w="med" len="med"/>
+                    </a:lnT>
+                    <a:lnB w="9525" cap="flat" cmpd="sng" algn="ctr">
+                      <a:solidFill>
+                        <a:srgbClr val="CFE9FE"/>
+                      </a:solidFill>
+                      <a:prstDash val="solid"/>
+                      <a:round/>
+                      <a:headEnd type="none" w="med" len="med"/>
+                      <a:tailEnd type="none" w="med" len="med"/>
+                    </a:lnB>
+                    <a:solidFill>
+                      <a:schemeClr val="bg1"/>
+                    </a:solidFill>
+                  </a:tcPr>
+                </a:tc>
+              </a:tr>
+              <a:tr h="0">
+                <a:tc>
+                  <a:txBody>
+                    <a:bodyPr/>
+                    <a:lstStyle/>
+                    <a:p>
+                      <a:pPr indent="0" marL="0">
+                        <a:buNone/>
+                      </a:pPr>
+                      <a:r>
+                        <a:rPr lang="en-US" sz="1400" dirty="0">
+                          <a:solidFill>
+                            <a:schemeClr val="tx1"/>
+                          </a:solidFill>
+                        </a:rPr>
+                        <a:t>Stage activities</a:t>
+                      </a:r>
+                      <a:endParaRPr lang="en-US" sz="1400" dirty="0"/>
+                    </a:p>
+                  </a:txBody>
+                  <a:tcPr marL="109728" marR="109728" marT="54864" marB="54864" anchor="ctr">
+                    <a:lnL w="9525" cap="flat" cmpd="sng" algn="ctr">
+                      <a:solidFill>
+                        <a:srgbClr val="CFE9FE"/>
+                      </a:solidFill>
+                      <a:prstDash val="solid"/>
+                      <a:round/>
+                      <a:headEnd type="none" w="med" len="med"/>
+                      <a:tailEnd type="none" w="med" len="med"/>
+                    </a:lnL>
+                    <a:lnR w="9525" cap="flat" cmpd="sng" algn="ctr">
+                      <a:solidFill>
+                        <a:srgbClr val="CFE9FE"/>
+                      </a:solidFill>
+                      <a:prstDash val="solid"/>
+                      <a:round/>
+                      <a:headEnd type="none" w="med" len="med"/>
+                      <a:tailEnd type="none" w="med" len="med"/>
+                    </a:lnR>
+                    <a:lnT w="9525" cap="flat" cmpd="sng" algn="ctr">
+                      <a:solidFill>
+                        <a:srgbClr val="CFE9FE"/>
+                      </a:solidFill>
+                      <a:prstDash val="solid"/>
+                      <a:round/>
+                      <a:headEnd type="none" w="med" len="med"/>
+                      <a:tailEnd type="none" w="med" len="med"/>
+                    </a:lnT>
+                    <a:lnB w="9525" cap="flat" cmpd="sng" algn="ctr">
+                      <a:solidFill>
+                        <a:srgbClr val="CFE9FE"/>
+                      </a:solidFill>
+                      <a:prstDash val="solid"/>
+                      <a:round/>
+                      <a:headEnd type="none" w="med" len="med"/>
+                      <a:tailEnd type="none" w="med" len="med"/>
+                    </a:lnB>
+                    <a:solidFill>
+                      <a:schemeClr val="bg2"/>
+                    </a:solidFill>
+                  </a:tcPr>
+                </a:tc>
+                <a:tc>
+                  <a:txBody>
+                    <a:bodyPr/>
+                    <a:lstStyle/>
+                    <a:p>
+                      <a:pPr indent="0" marL="0">
+                        <a:buNone/>
+                      </a:pPr>
+                      <a:r>
+                        <a:rPr lang="en-US" sz="1400" dirty="0">
+                          <a:solidFill>
+                            <a:schemeClr val="tx1"/>
+                          </a:solidFill>
+                        </a:rPr>
+                        <a:t>OpportunityHistory.StageName and CreatedDate; repeated rows collapse to real stage changes</a:t>
+                      </a:r>
+                      <a:endParaRPr lang="en-US" sz="1400" dirty="0"/>
+                    </a:p>
+                  </a:txBody>
+                  <a:tcPr marL="109728" marR="109728" marT="54864" marB="54864" anchor="ctr">
+                    <a:lnL w="9525" cap="flat" cmpd="sng" algn="ctr">
+                      <a:solidFill>
+                        <a:srgbClr val="CFE9FE"/>
+                      </a:solidFill>
+                      <a:prstDash val="solid"/>
+                      <a:round/>
+                      <a:headEnd type="none" w="med" len="med"/>
+                      <a:tailEnd type="none" w="med" len="med"/>
+                    </a:lnL>
+                    <a:lnR w="9525" cap="flat" cmpd="sng" algn="ctr">
+                      <a:solidFill>
+                        <a:srgbClr val="CFE9FE"/>
+                      </a:solidFill>
+                      <a:prstDash val="solid"/>
+                      <a:round/>
+                      <a:headEnd type="none" w="med" len="med"/>
+                      <a:tailEnd type="none" w="med" len="med"/>
+                    </a:lnR>
+                    <a:lnT w="9525" cap="flat" cmpd="sng" algn="ctr">
+                      <a:solidFill>
+                        <a:srgbClr val="CFE9FE"/>
+                      </a:solidFill>
+                      <a:prstDash val="solid"/>
+                      <a:round/>
+                      <a:headEnd type="none" w="med" len="med"/>
+                      <a:tailEnd type="none" w="med" len="med"/>
+                    </a:lnT>
+                    <a:lnB w="9525" cap="flat" cmpd="sng" algn="ctr">
+                      <a:solidFill>
+                        <a:srgbClr val="CFE9FE"/>
+                      </a:solidFill>
+                      <a:prstDash val="solid"/>
+                      <a:round/>
+                      <a:headEnd type="none" w="med" len="med"/>
+                      <a:tailEnd type="none" w="med" len="med"/>
+                    </a:lnB>
+                    <a:solidFill>
+                      <a:schemeClr val="bg2"/>
+                    </a:solidFill>
+                  </a:tcPr>
+                </a:tc>
+              </a:tr>
+              <a:tr h="0">
+                <a:tc>
+                  <a:txBody>
+                    <a:bodyPr/>
+                    <a:lstStyle/>
+                    <a:p>
+                      <a:pPr indent="0" marL="0">
+                        <a:buNone/>
+                      </a:pPr>
+                      <a:r>
+                        <a:rPr lang="en-US" sz="1400" dirty="0">
+                          <a:solidFill>
+                            <a:schemeClr val="tx1"/>
+                          </a:solidFill>
+                        </a:rPr>
+                        <a:t>Task activities</a:t>
+                      </a:r>
+                      <a:endParaRPr lang="en-US" sz="1400" dirty="0"/>
+                    </a:p>
+                  </a:txBody>
+                  <a:tcPr marL="109728" marR="109728" marT="54864" marB="54864" anchor="ctr">
+                    <a:lnL w="9525" cap="flat" cmpd="sng" algn="ctr">
+                      <a:solidFill>
+                        <a:srgbClr val="CFE9FE"/>
+                      </a:solidFill>
+                      <a:prstDash val="solid"/>
+                      <a:round/>
+                      <a:headEnd type="none" w="med" len="med"/>
+                      <a:tailEnd type="none" w="med" len="med"/>
+                    </a:lnL>
+                    <a:lnR w="9525" cap="flat" cmpd="sng" algn="ctr">
+                      <a:solidFill>
+                        <a:srgbClr val="CFE9FE"/>
+                      </a:solidFill>
+                      <a:prstDash val="solid"/>
+                      <a:round/>
+                      <a:headEnd type="none" w="med" len="med"/>
+                      <a:tailEnd type="none" w="med" len="med"/>
+                    </a:lnR>
+                    <a:lnT w="9525" cap="flat" cmpd="sng" algn="ctr">
+                      <a:solidFill>
+                        <a:srgbClr val="CFE9FE"/>
+                      </a:solidFill>
+                      <a:prstDash val="solid"/>
+                      <a:round/>
+                      <a:headEnd type="none" w="med" len="med"/>
+                      <a:tailEnd type="none" w="med" len="med"/>
+                    </a:lnT>
+                    <a:lnB w="9525" cap="flat" cmpd="sng" algn="ctr">
+                      <a:solidFill>
+                        <a:srgbClr val="CFE9FE"/>
+                      </a:solidFill>
+                      <a:prstDash val="solid"/>
+                      <a:round/>
+                      <a:headEnd type="none" w="med" len="med"/>
+                      <a:tailEnd type="none" w="med" len="med"/>
+                    </a:lnB>
+                    <a:solidFill>
+                      <a:schemeClr val="bg1"/>
+                    </a:solidFill>
+                  </a:tcPr>
+                </a:tc>
+                <a:tc>
+                  <a:txBody>
+                    <a:bodyPr/>
+                    <a:lstStyle/>
+                    <a:p>
+                      <a:pPr indent="0" marL="0">
+                        <a:buNone/>
+                      </a:pPr>
+                      <a:r>
+                        <a:rPr lang="en-US" sz="1400" dirty="0">
+                          <a:solidFill>
+                            <a:schemeClr val="tx1"/>
+                          </a:solidFill>
+                        </a:rPr>
+                        <a:t>Task.Subject, CreatedDate → CompletedDateTime, joined on Task.WhatId</a:t>
+                      </a:r>
+                      <a:endParaRPr lang="en-US" sz="1400" dirty="0"/>
+                    </a:p>
+                  </a:txBody>
+                  <a:tcPr marL="109728" marR="109728" marT="54864" marB="54864" anchor="ctr">
+                    <a:lnL w="9525" cap="flat" cmpd="sng" algn="ctr">
+                      <a:solidFill>
+                        <a:srgbClr val="CFE9FE"/>
+                      </a:solidFill>
+                      <a:prstDash val="solid"/>
+                      <a:round/>
+                      <a:headEnd type="none" w="med" len="med"/>
+                      <a:tailEnd type="none" w="med" len="med"/>
+                    </a:lnL>
+                    <a:lnR w="9525" cap="flat" cmpd="sng" algn="ctr">
+                      <a:solidFill>
+                        <a:srgbClr val="CFE9FE"/>
+                      </a:solidFill>
+                      <a:prstDash val="solid"/>
+                      <a:round/>
+                      <a:headEnd type="none" w="med" len="med"/>
+                      <a:tailEnd type="none" w="med" len="med"/>
+                    </a:lnR>
+                    <a:lnT w="9525" cap="flat" cmpd="sng" algn="ctr">
+                      <a:solidFill>
+                        <a:srgbClr val="CFE9FE"/>
+                      </a:solidFill>
+                      <a:prstDash val="solid"/>
+                      <a:round/>
+                      <a:headEnd type="none" w="med" len="med"/>
+                      <a:tailEnd type="none" w="med" len="med"/>
+                    </a:lnT>
+                    <a:lnB w="9525" cap="flat" cmpd="sng" algn="ctr">
+                      <a:solidFill>
+                        <a:srgbClr val="CFE9FE"/>
+                      </a:solidFill>
+                      <a:prstDash val="solid"/>
+                      <a:round/>
+                      <a:headEnd type="none" w="med" len="med"/>
+                      <a:tailEnd type="none" w="med" len="med"/>
+                    </a:lnB>
+                    <a:solidFill>
+                      <a:schemeClr val="bg1"/>
+                    </a:solidFill>
+                  </a:tcPr>
+                </a:tc>
+              </a:tr>
+              <a:tr h="0">
+                <a:tc>
+                  <a:txBody>
+                    <a:bodyPr/>
+                    <a:lstStyle/>
+                    <a:p>
+                      <a:pPr indent="0" marL="0">
+                        <a:buNone/>
+                      </a:pPr>
+                      <a:r>
+                        <a:rPr lang="en-US" sz="1400" dirty="0">
+                          <a:solidFill>
+                            <a:schemeClr val="tx1"/>
+                          </a:solidFill>
+                        </a:rPr>
+                        <a:t>Resource</a:t>
+                      </a:r>
+                      <a:endParaRPr lang="en-US" sz="1400" dirty="0"/>
+                    </a:p>
+                  </a:txBody>
+                  <a:tcPr marL="109728" marR="109728" marT="54864" marB="54864" anchor="ctr">
+                    <a:lnL w="9525" cap="flat" cmpd="sng" algn="ctr">
+                      <a:solidFill>
+                        <a:srgbClr val="CFE9FE"/>
+                      </a:solidFill>
+                      <a:prstDash val="solid"/>
+                      <a:round/>
+                      <a:headEnd type="none" w="med" len="med"/>
+                      <a:tailEnd type="none" w="med" len="med"/>
+                    </a:lnL>
+                    <a:lnR w="9525" cap="flat" cmpd="sng" algn="ctr">
+                      <a:solidFill>
+                        <a:srgbClr val="CFE9FE"/>
+                      </a:solidFill>
+                      <a:prstDash val="solid"/>
+                      <a:round/>
+                      <a:headEnd type="none" w="med" len="med"/>
+                      <a:tailEnd type="none" w="med" len="med"/>
+                    </a:lnR>
+                    <a:lnT w="9525" cap="flat" cmpd="sng" algn="ctr">
+                      <a:solidFill>
+                        <a:srgbClr val="CFE9FE"/>
+                      </a:solidFill>
+                      <a:prstDash val="solid"/>
+                      <a:round/>
+                      <a:headEnd type="none" w="med" len="med"/>
+                      <a:tailEnd type="none" w="med" len="med"/>
+                    </a:lnT>
+                    <a:lnB w="9525" cap="flat" cmpd="sng" algn="ctr">
+                      <a:solidFill>
+                        <a:srgbClr val="CFE9FE"/>
+                      </a:solidFill>
+                      <a:prstDash val="solid"/>
+                      <a:round/>
+                      <a:headEnd type="none" w="med" len="med"/>
+                      <a:tailEnd type="none" w="med" len="med"/>
+                    </a:lnB>
+                    <a:solidFill>
+                      <a:schemeClr val="bg2"/>
+                    </a:solidFill>
+                  </a:tcPr>
+                </a:tc>
+                <a:tc>
+                  <a:txBody>
+                    <a:bodyPr/>
+                    <a:lstStyle/>
+                    <a:p>
+                      <a:pPr indent="0" marL="0">
+                        <a:buNone/>
+                      </a:pPr>
+                      <a:r>
+                        <a:rPr lang="en-US" sz="1400" dirty="0">
+                          <a:solidFill>
+                            <a:schemeClr val="tx1"/>
+                          </a:solidFill>
+                        </a:rPr>
+                        <a:t>CreatedBy.Name (stage changes), Owner.Name (tasks)</a:t>
+                      </a:r>
+                      <a:endParaRPr lang="en-US" sz="1400" dirty="0"/>
+                    </a:p>
+                  </a:txBody>
+                  <a:tcPr marL="109728" marR="109728" marT="54864" marB="54864" anchor="ctr">
+                    <a:lnL w="9525" cap="flat" cmpd="sng" algn="ctr">
+                      <a:solidFill>
+                        <a:srgbClr val="CFE9FE"/>
+                      </a:solidFill>
+                      <a:prstDash val="solid"/>
+                      <a:round/>
+                      <a:headEnd type="none" w="med" len="med"/>
+                      <a:tailEnd type="none" w="med" len="med"/>
+                    </a:lnL>
+                    <a:lnR w="9525" cap="flat" cmpd="sng" algn="ctr">
+                      <a:solidFill>
+                        <a:srgbClr val="CFE9FE"/>
+                      </a:solidFill>
+                      <a:prstDash val="solid"/>
+                      <a:round/>
+                      <a:headEnd type="none" w="med" len="med"/>
+                      <a:tailEnd type="none" w="med" len="med"/>
+                    </a:lnR>
+                    <a:lnT w="9525" cap="flat" cmpd="sng" algn="ctr">
+                      <a:solidFill>
+                        <a:srgbClr val="CFE9FE"/>
+                      </a:solidFill>
+                      <a:prstDash val="solid"/>
+                      <a:round/>
+                      <a:headEnd type="none" w="med" len="med"/>
+                      <a:tailEnd type="none" w="med" len="med"/>
+                    </a:lnT>
+                    <a:lnB w="9525" cap="flat" cmpd="sng" algn="ctr">
+                      <a:solidFill>
+                        <a:srgbClr val="CFE9FE"/>
+                      </a:solidFill>
+                      <a:prstDash val="solid"/>
+                      <a:round/>
+                      <a:headEnd type="none" w="med" len="med"/>
+                      <a:tailEnd type="none" w="med" len="med"/>
+                    </a:lnB>
+                    <a:solidFill>
+                      <a:schemeClr val="bg2"/>
+                    </a:solidFill>
+                  </a:tcPr>
+                </a:tc>
+              </a:tr>
+              <a:tr h="0">
+                <a:tc>
+                  <a:txBody>
+                    <a:bodyPr/>
+                    <a:lstStyle/>
+                    <a:p>
+                      <a:pPr indent="0" marL="0">
+                        <a:buNone/>
+                      </a:pPr>
+                      <a:r>
+                        <a:rPr lang="en-US" sz="1400" dirty="0">
+                          <a:solidFill>
+                            <a:schemeClr val="tx1"/>
+                          </a:solidFill>
+                        </a:rPr>
+                        <a:t>Case attributes</a:t>
+                      </a:r>
+                      <a:endParaRPr lang="en-US" sz="1400" dirty="0"/>
+                    </a:p>
+                  </a:txBody>
+                  <a:tcPr marL="109728" marR="109728" marT="54864" marB="54864" anchor="ctr">
+                    <a:lnL w="9525" cap="flat" cmpd="sng" algn="ctr">
+                      <a:solidFill>
+                        <a:srgbClr val="CFE9FE"/>
+                      </a:solidFill>
+                      <a:prstDash val="solid"/>
+                      <a:round/>
+                      <a:headEnd type="none" w="med" len="med"/>
+                      <a:tailEnd type="none" w="med" len="med"/>
+                    </a:lnL>
+                    <a:lnR w="9525" cap="flat" cmpd="sng" algn="ctr">
+                      <a:solidFill>
+                        <a:srgbClr val="CFE9FE"/>
+                      </a:solidFill>
+                      <a:prstDash val="solid"/>
+                      <a:round/>
+                      <a:headEnd type="none" w="med" len="med"/>
+                      <a:tailEnd type="none" w="med" len="med"/>
+                    </a:lnR>
+                    <a:lnT w="9525" cap="flat" cmpd="sng" algn="ctr">
+                      <a:solidFill>
+                        <a:srgbClr val="CFE9FE"/>
+                      </a:solidFill>
+                      <a:prstDash val="solid"/>
+                      <a:round/>
+                      <a:headEnd type="none" w="med" len="med"/>
+                      <a:tailEnd type="none" w="med" len="med"/>
+                    </a:lnT>
+                    <a:lnB w="9525" cap="flat" cmpd="sng" algn="ctr">
+                      <a:solidFill>
+                        <a:srgbClr val="CFE9FE"/>
+                      </a:solidFill>
+                      <a:prstDash val="solid"/>
+                      <a:round/>
+                      <a:headEnd type="none" w="med" len="med"/>
+                      <a:tailEnd type="none" w="med" len="med"/>
+                    </a:lnB>
+                    <a:solidFill>
+                      <a:schemeClr val="bg1"/>
+                    </a:solidFill>
+                  </a:tcPr>
+                </a:tc>
+                <a:tc>
+                  <a:txBody>
+                    <a:bodyPr/>
+                    <a:lstStyle/>
+                    <a:p>
+                      <a:pPr indent="0" marL="0">
+                        <a:buNone/>
+                      </a:pPr>
+                      <a:r>
+                        <a:rPr lang="en-US" sz="1400" dirty="0">
+                          <a:solidFill>
+                            <a:schemeClr val="tx1"/>
+                          </a:solidFill>
+                        </a:rPr>
+                        <a:t>Opportunity.Amount, LeadSource, IsWon; Account.Industry, BillingCountry → region</a:t>
+                      </a:r>
+                      <a:endParaRPr lang="en-US" sz="1400" dirty="0"/>
+                    </a:p>
+                  </a:txBody>
+                  <a:tcPr marL="109728" marR="109728" marT="54864" marB="54864" anchor="ctr">
+                    <a:lnL w="9525" cap="flat" cmpd="sng" algn="ctr">
+                      <a:solidFill>
+                        <a:srgbClr val="CFE9FE"/>
+                      </a:solidFill>
+                      <a:prstDash val="solid"/>
+                      <a:round/>
+                      <a:headEnd type="none" w="med" len="med"/>
+                      <a:tailEnd type="none" w="med" len="med"/>
+                    </a:lnL>
+                    <a:lnR w="9525" cap="flat" cmpd="sng" algn="ctr">
+                      <a:solidFill>
+                        <a:srgbClr val="CFE9FE"/>
+                      </a:solidFill>
+                      <a:prstDash val="solid"/>
+                      <a:round/>
+                      <a:headEnd type="none" w="med" len="med"/>
+                      <a:tailEnd type="none" w="med" len="med"/>
+                    </a:lnR>
+                    <a:lnT w="9525" cap="flat" cmpd="sng" algn="ctr">
+                      <a:solidFill>
+                        <a:srgbClr val="CFE9FE"/>
+                      </a:solidFill>
+                      <a:prstDash val="solid"/>
+                      <a:round/>
+                      <a:headEnd type="none" w="med" len="med"/>
+                      <a:tailEnd type="none" w="med" len="med"/>
+                    </a:lnT>
+                    <a:lnB w="9525" cap="flat" cmpd="sng" algn="ctr">
+                      <a:solidFill>
+                        <a:srgbClr val="CFE9FE"/>
+                      </a:solidFill>
+                      <a:prstDash val="solid"/>
+                      <a:round/>
+                      <a:headEnd type="none" w="med" len="med"/>
+                      <a:tailEnd type="none" w="med" len="med"/>
+                    </a:lnB>
+                    <a:solidFill>
+                      <a:schemeClr val="bg1"/>
+                    </a:solidFill>
+                  </a:tcPr>
+                </a:tc>
+              </a:tr>
+            </a:tbl>
+          </a:graphicData>
+        </a:graphic>
+      </p:graphicFrame>
+      <p:sp>
+        <p:nvSpPr>
+          <p:cNvPr id="4" name="Output card"/>
           <p:cNvSpPr/>
           <p:nvPr/>
         </p:nvSpPr>
         <p:spPr>
           <a:xfrm>
-            <a:off x="731520" y="1828800"/>
-            <a:ext cx="3337560" cy="2286000"/>
+            <a:off x="7863840" y="1371600"/>
+            <a:ext cx="3749040" cy="3063240"/>
           </a:xfrm>
           <a:prstGeom prst="roundRect">
             <a:avLst>
-              <a:gd name="adj" fmla="val 4800"/>
+              <a:gd name="adj" fmla="val 3582"/>
             </a:avLst>
           </a:prstGeom>
           <a:solidFill>
-            <a:schemeClr val="accent6"/>
+            <a:schemeClr val="bg2"/>
           </a:solidFill>
           <a:ln/>
         </p:spPr>
       </p:sp>
       <p:sp>
         <p:nvSpPr>
-          <p:cNvPr id="5" name="Next 1 heading"/>
-          <p:cNvSpPr txBox="1"/>
-          <p:nvPr/>
-        </p:nvSpPr>
-        <p:spPr>
-          <a:xfrm>
-            <a:off x="1005840" y="2103120"/>
-            <a:ext cx="2788920" cy="457200"/>
+          <p:cNvPr id="5" name="Output heading"/>
+          <p:cNvSpPr txBox="1"/>
+          <p:nvPr/>
+        </p:nvSpPr>
+        <p:spPr>
+          <a:xfrm>
+            <a:off x="8092440" y="1554480"/>
+            <a:ext cx="3291840" cy="365760"/>
           </a:xfrm>
           <a:prstGeom prst="rect">
             <a:avLst/>
@@ -7838,27 +9645,27 @@
               <a:buNone/>
             </a:pPr>
             <a:r>
-              <a:rPr lang="en-US" sz="2200" b="1" dirty="0">
-                <a:solidFill>
-                  <a:schemeClr val="accent3"/>
-                </a:solidFill>
-              </a:rPr>
-              <a:t>Validate</a:t>
-            </a:r>
-            <a:endParaRPr lang="en-US" sz="2200" dirty="0"/>
-          </a:p>
-        </p:txBody>
-      </p:sp>
-      <p:sp>
-        <p:nvSpPr>
-          <p:cNvPr id="6" name="Next 1 body"/>
-          <p:cNvSpPr txBox="1"/>
-          <p:nvPr/>
-        </p:nvSpPr>
-        <p:spPr>
-          <a:xfrm>
-            <a:off x="1005840" y="2697480"/>
-            <a:ext cx="2788920" cy="1280160"/>
+              <a:rPr lang="en-US" sz="1600" b="1" dirty="0">
+                <a:solidFill>
+                  <a:schemeClr val="tx2"/>
+                </a:solidFill>
+              </a:rPr>
+              <a:t>Output: one row per event</a:t>
+            </a:r>
+            <a:endParaRPr lang="en-US" sz="1600" dirty="0"/>
+          </a:p>
+        </p:txBody>
+      </p:sp>
+      <p:sp>
+        <p:nvSpPr>
+          <p:cNvPr id="6" name="Output columns"/>
+          <p:cNvSpPr txBox="1"/>
+          <p:nvPr/>
+        </p:nvSpPr>
+        <p:spPr>
+          <a:xfrm>
+            <a:off x="8092440" y="1965960"/>
+            <a:ext cx="3291840" cy="914400"/>
           </a:xfrm>
           <a:prstGeom prst="rect">
             <a:avLst/>
@@ -7874,12 +9681,321 @@
               <a:buNone/>
             </a:pPr>
             <a:r>
-              <a:rPr lang="en-US" sz="1600" dirty="0">
+              <a:rPr lang="en-US" sz="1200" dirty="0">
+                <a:solidFill>
+                  <a:schemeClr val="accent6"/>
+                </a:solidFill>
+              </a:rPr>
+              <a:t>case_id, activity, start_time, end_time, resource, source_object, region, industry, lead_source, amount, outcome</a:t>
+            </a:r>
+            <a:endParaRPr lang="en-US" sz="1200" dirty="0"/>
+          </a:p>
+        </p:txBody>
+      </p:sp>
+      <p:sp>
+        <p:nvSpPr>
+          <p:cNvPr id="7" name="Output sample"/>
+          <p:cNvSpPr txBox="1"/>
+          <p:nvPr/>
+        </p:nvSpPr>
+        <p:spPr>
+          <a:xfrm>
+            <a:off x="8092440" y="2788920"/>
+            <a:ext cx="3291840" cy="777240"/>
+          </a:xfrm>
+          <a:prstGeom prst="rect">
+            <a:avLst/>
+          </a:prstGeom>
+          <a:noFill/>
+          <a:ln/>
+        </p:spPr>
+        <p:txBody>
+          <a:bodyPr wrap="square" lIns="0" tIns="0" rIns="0" bIns="0" rtlCol="0" anchor="t"/>
+          <a:lstStyle/>
+          <a:p>
+            <a:pPr indent="0" marL="0">
+              <a:buNone/>
+            </a:pPr>
+            <a:r>
+              <a:rPr lang="en-US" sz="1200" dirty="0">
+                <a:solidFill>
+                  <a:schemeClr val="tx2"/>
+                </a:solidFill>
+                <a:latin typeface="Courier New" pitchFamily="34" charset="0"/>
+                <a:ea typeface="Courier New" pitchFamily="34" charset="-122"/>
+                <a:cs typeface="Courier New" pitchFamily="34" charset="-120"/>
+              </a:rPr>
+              <a:t>006WV…YAB  Qualify</a:t>
+            </a:r>
+            <a:endParaRPr lang="en-US" sz="1200" dirty="0"/>
+          </a:p>
+          <a:p>
+            <a:pPr indent="0" marL="0">
+              <a:buNone/>
+            </a:pPr>
+            <a:r>
+              <a:rPr lang="en-US" sz="1200" dirty="0">
+                <a:solidFill>
+                  <a:schemeClr val="tx2"/>
+                </a:solidFill>
+                <a:latin typeface="Courier New" pitchFamily="34" charset="0"/>
+                <a:ea typeface="Courier New" pitchFamily="34" charset="-122"/>
+                <a:cs typeface="Courier New" pitchFamily="34" charset="-120"/>
+              </a:rPr>
+              <a:t>006WV…YAB  Discovery Call</a:t>
+            </a:r>
+            <a:endParaRPr lang="en-US" sz="1200" dirty="0"/>
+          </a:p>
+          <a:p>
+            <a:pPr indent="0" marL="0">
+              <a:buNone/>
+            </a:pPr>
+            <a:r>
+              <a:rPr lang="en-US" sz="1200" dirty="0">
+                <a:solidFill>
+                  <a:schemeClr val="tx2"/>
+                </a:solidFill>
+                <a:latin typeface="Courier New" pitchFamily="34" charset="0"/>
+                <a:ea typeface="Courier New" pitchFamily="34" charset="-122"/>
+                <a:cs typeface="Courier New" pitchFamily="34" charset="-120"/>
+              </a:rPr>
+              <a:t>006WV…YAB  Closed Lost</a:t>
+            </a:r>
+            <a:endParaRPr lang="en-US" sz="1200" dirty="0"/>
+          </a:p>
+        </p:txBody>
+      </p:sp>
+      <p:sp>
+        <p:nvSpPr>
+          <p:cNvPr id="8" name="Output formats"/>
+          <p:cNvSpPr txBox="1"/>
+          <p:nvPr/>
+        </p:nvSpPr>
+        <p:spPr>
+          <a:xfrm>
+            <a:off x="8092440" y="3657600"/>
+            <a:ext cx="3291840" cy="685800"/>
+          </a:xfrm>
+          <a:prstGeom prst="rect">
+            <a:avLst/>
+          </a:prstGeom>
+          <a:noFill/>
+          <a:ln/>
+        </p:spPr>
+        <p:txBody>
+          <a:bodyPr wrap="square" lIns="0" tIns="0" rIns="0" bIns="0" rtlCol="0" anchor="t"/>
+          <a:lstStyle/>
+          <a:p>
+            <a:pPr indent="0" marL="0">
+              <a:buNone/>
+            </a:pPr>
+            <a:r>
+              <a:rPr lang="en-US" sz="1400" dirty="0">
+                <a:solidFill>
+                  <a:schemeClr val="tx1"/>
+                </a:solidFill>
+              </a:rPr>
+              <a:t>Written as CSV for Apromore's import and as IEEE XES with start/complete lifecycle events.</a:t>
+            </a:r>
+            <a:endParaRPr lang="en-US" sz="1400" dirty="0"/>
+          </a:p>
+        </p:txBody>
+      </p:sp>
+      <p:sp>
+        <p:nvSpPr>
+          <p:cNvPr id="25" name="Slide Number Placeholder 0"/>
+          <p:cNvSpPr>
+            <a:spLocks noGrp="1"/>
+          </p:cNvSpPr>
+          <p:nvPr>
+            <p:ph type="sldNum" sz="quarter" idx="4294967295"/>
+          </p:nvPr>
+        </p:nvSpPr>
+        <p:spPr>
+          <a:xfrm>
+            <a:off x="11155680" y="6400800"/>
+            <a:ext cx="457200" cy="274320"/>
+          </a:xfrm>
+          <a:prstGeom prst="rect">
+            <a:avLst/>
+          </a:prstGeom>
+          <a:extLst>
+            <a:ext uri="{C572A759-6A51-4108-AA02-DFA0A04FC94B}">
+              <ma14:wrappingTextBoxFlag xmlns:ma14="http://schemas.microsoft.com/office/mac/drawingml/2011/main" val="0"/>
+            </a:ext>
+          </a:extLst>
+        </p:spPr>
+        <p:txBody>
+          <a:bodyPr/>
+          <a:lstStyle>
+            <a:lvl1pPr>
+              <a:defRPr sz="1000">
+                <a:solidFill>
+                  <a:schemeClr val="accent6"/>
+                </a:solidFill>
+              </a:defRPr>
+            </a:lvl1pPr>
+          </a:lstStyle>
+          <a:p>
+            <a:pPr algn="r"/>
+            <a:fld id="{F7021451-1387-4CA6-816F-3879F97B5CBC}" type="slidenum">
+              <a:rPr b="0" lang="en-US"/>
+              <a:t>8</a:t>
+            </a:fld>
+            <a:endParaRPr lang="en-US"/>
+          </a:p>
+        </p:txBody>
+      </p:sp>
+    </p:spTree>
+  </p:cSld>
+  <p:clrMapOvr>
+    <a:masterClrMapping/>
+  </p:clrMapOvr>
+</p:sld>
+</file>
+
+<file path=ppt/slides/slide9.xml><?xml version="1.0" encoding="utf-8"?>
+<p:sld xmlns:a="http://schemas.openxmlformats.org/drawingml/2006/main" xmlns:r="http://schemas.openxmlformats.org/officeDocument/2006/relationships" xmlns:p="http://schemas.openxmlformats.org/presentationml/2006/main">
+  <p:cSld name="Slide 9">
+    <p:spTree>
+      <p:nvGrpSpPr>
+        <p:cNvPr id="1" name=""/>
+        <p:cNvGrpSpPr/>
+        <p:nvPr/>
+      </p:nvGrpSpPr>
+      <p:grpSpPr>
+        <a:xfrm>
+          <a:off x="0" y="0"/>
+          <a:ext cx="0" cy="0"/>
+          <a:chOff x="0" y="0"/>
+          <a:chExt cx="0" cy="0"/>
+        </a:xfrm>
+      </p:grpSpPr>
+      <p:sp>
+        <p:nvSpPr>
+          <p:cNvPr id="2" name="Text 0"/>
+          <p:cNvSpPr/>
+          <p:nvPr>
+            <p:ph idx="100" type="title" hasCustomPrompt="1"/>
+          </p:nvPr>
+        </p:nvSpPr>
+        <p:spPr>
+          <a:xfrm>
+            <a:off x="548640" y="320040"/>
+            <a:ext cx="11064240" cy="822960"/>
+          </a:xfrm>
+          <a:prstGeom prst="rect">
+            <a:avLst/>
+          </a:prstGeom>
+          <a:noFill/>
+          <a:ln/>
+        </p:spPr>
+        <p:txBody>
+          <a:bodyPr wrap="square" lIns="0" tIns="0" rIns="0" bIns="0" rtlCol="0" anchor="ctr"/>
+          <a:lstStyle/>
+          <a:p>
+            <a:pPr algn="l" indent="0" marL="0">
+              <a:buNone/>
+            </a:pPr>
+            <a:r>
+              <a:rPr lang="en-US" sz="3000" b="1" dirty="0">
+                <a:solidFill>
+                  <a:schemeClr val="tx2"/>
+                </a:solidFill>
+              </a:rPr>
+              <a:t>Running it against a brand-new trial org</a:t>
+            </a:r>
+            <a:endParaRPr lang="en-US" sz="3000" dirty="0"/>
+          </a:p>
+        </p:txBody>
+      </p:sp>
+      <p:sp>
+        <p:nvSpPr>
+          <p:cNvPr id="3" name="Steps heading"/>
+          <p:cNvSpPr txBox="1"/>
+          <p:nvPr/>
+        </p:nvSpPr>
+        <p:spPr>
+          <a:xfrm>
+            <a:off x="548640" y="1325880"/>
+            <a:ext cx="5120640" cy="365760"/>
+          </a:xfrm>
+          <a:prstGeom prst="rect">
+            <a:avLst/>
+          </a:prstGeom>
+          <a:noFill/>
+          <a:ln/>
+        </p:spPr>
+        <p:txBody>
+          <a:bodyPr wrap="square" lIns="0" tIns="0" rIns="0" bIns="0" rtlCol="0" anchor="t"/>
+          <a:lstStyle/>
+          <a:p>
+            <a:pPr indent="0" marL="0">
+              <a:buNone/>
+            </a:pPr>
+            <a:r>
+              <a:rPr lang="en-US" sz="1600" b="1" dirty="0">
+                <a:solidFill>
+                  <a:schemeClr val="accent6"/>
+                </a:solidFill>
+              </a:rPr>
+              <a:t>Steps</a:t>
+            </a:r>
+            <a:endParaRPr lang="en-US" sz="1600" dirty="0"/>
+          </a:p>
+        </p:txBody>
+      </p:sp>
+      <p:sp>
+        <p:nvSpPr>
+          <p:cNvPr id="4" name="Run step 1 marker"/>
+          <p:cNvSpPr/>
+          <p:nvPr/>
+        </p:nvSpPr>
+        <p:spPr>
+          <a:xfrm>
+            <a:off x="548640" y="1828800"/>
+            <a:ext cx="457200" cy="457200"/>
+          </a:xfrm>
+          <a:prstGeom prst="ellipse">
+            <a:avLst/>
+          </a:prstGeom>
+          <a:solidFill>
+            <a:schemeClr val="accent1"/>
+          </a:solidFill>
+          <a:ln/>
+        </p:spPr>
+      </p:sp>
+      <p:sp>
+        <p:nvSpPr>
+          <p:cNvPr id="5" name="Run step 1 number"/>
+          <p:cNvSpPr txBox="1"/>
+          <p:nvPr/>
+        </p:nvSpPr>
+        <p:spPr>
+          <a:xfrm>
+            <a:off x="548640" y="1828800"/>
+            <a:ext cx="457200" cy="457200"/>
+          </a:xfrm>
+          <a:prstGeom prst="rect">
+            <a:avLst/>
+          </a:prstGeom>
+          <a:noFill/>
+          <a:ln/>
+        </p:spPr>
+        <p:txBody>
+          <a:bodyPr wrap="square" lIns="0" tIns="0" rIns="0" bIns="0" rtlCol="0" anchor="ctr"/>
+          <a:lstStyle/>
+          <a:p>
+            <a:pPr algn="ctr" indent="0" marL="0">
+              <a:buNone/>
+            </a:pPr>
+            <a:r>
+              <a:rPr lang="en-US" sz="1600" b="1" dirty="0">
                 <a:solidFill>
                   <a:schemeClr val="bg1"/>
                 </a:solidFill>
               </a:rPr>
-              <a:t>Run the same extract on the production org and confirm approval waits and re-quote rates with RevOps.</a:t>
+              <a:t>1</a:t>
             </a:r>
             <a:endParaRPr lang="en-US" sz="1600" dirty="0"/>
           </a:p>
@@ -7887,36 +10003,528 @@
       </p:sp>
       <p:sp>
         <p:nvSpPr>
-          <p:cNvPr id="7" name="Next 2 card"/>
+          <p:cNvPr id="6" name="Run step 1 title"/>
+          <p:cNvSpPr txBox="1"/>
+          <p:nvPr/>
+        </p:nvSpPr>
+        <p:spPr>
+          <a:xfrm>
+            <a:off x="1188720" y="1783080"/>
+            <a:ext cx="4480560" cy="320040"/>
+          </a:xfrm>
+          <a:prstGeom prst="rect">
+            <a:avLst/>
+          </a:prstGeom>
+          <a:noFill/>
+          <a:ln/>
+        </p:spPr>
+        <p:txBody>
+          <a:bodyPr wrap="square" lIns="0" tIns="0" rIns="0" bIns="0" rtlCol="0" anchor="t"/>
+          <a:lstStyle/>
+          <a:p>
+            <a:pPr indent="0" marL="0">
+              <a:buNone/>
+            </a:pPr>
+            <a:r>
+              <a:rPr lang="en-US" sz="1600" b="1" dirty="0">
+                <a:solidFill>
+                  <a:schemeClr val="tx2"/>
+                </a:solidFill>
+              </a:rPr>
+              <a:t>Authenticate</a:t>
+            </a:r>
+            <a:endParaRPr lang="en-US" sz="1600" dirty="0"/>
+          </a:p>
+        </p:txBody>
+      </p:sp>
+      <p:sp>
+        <p:nvSpPr>
+          <p:cNvPr id="7" name="Run step 1 body"/>
+          <p:cNvSpPr txBox="1"/>
+          <p:nvPr/>
+        </p:nvSpPr>
+        <p:spPr>
+          <a:xfrm>
+            <a:off x="1188720" y="2130552"/>
+            <a:ext cx="4480560" cy="594360"/>
+          </a:xfrm>
+          <a:prstGeom prst="rect">
+            <a:avLst/>
+          </a:prstGeom>
+          <a:noFill/>
+          <a:ln/>
+        </p:spPr>
+        <p:txBody>
+          <a:bodyPr wrap="square" lIns="0" tIns="0" rIns="0" bIns="0" rtlCol="0" anchor="t"/>
+          <a:lstStyle/>
+          <a:p>
+            <a:pPr indent="0" marL="0">
+              <a:buNone/>
+            </a:pPr>
+            <a:r>
+              <a:rPr lang="en-US" sz="1400" dirty="0">
+                <a:solidFill>
+                  <a:schemeClr val="tx1"/>
+                </a:solidFill>
+              </a:rPr>
+              <a:t>sf org login web: the CLI session signs every API call; no stored passwords.</a:t>
+            </a:r>
+            <a:endParaRPr lang="en-US" sz="1400" dirty="0"/>
+          </a:p>
+        </p:txBody>
+      </p:sp>
+      <p:sp>
+        <p:nvSpPr>
+          <p:cNvPr id="8" name="Run step 2 marker"/>
           <p:cNvSpPr/>
           <p:nvPr/>
         </p:nvSpPr>
         <p:spPr>
           <a:xfrm>
-            <a:off x="4343400" y="1828800"/>
-            <a:ext cx="3337560" cy="2286000"/>
+            <a:off x="548640" y="2880360"/>
+            <a:ext cx="457200" cy="457200"/>
+          </a:xfrm>
+          <a:prstGeom prst="ellipse">
+            <a:avLst/>
+          </a:prstGeom>
+          <a:solidFill>
+            <a:schemeClr val="accent1"/>
+          </a:solidFill>
+          <a:ln/>
+        </p:spPr>
+      </p:sp>
+      <p:sp>
+        <p:nvSpPr>
+          <p:cNvPr id="9" name="Run step 2 number"/>
+          <p:cNvSpPr txBox="1"/>
+          <p:nvPr/>
+        </p:nvSpPr>
+        <p:spPr>
+          <a:xfrm>
+            <a:off x="548640" y="2880360"/>
+            <a:ext cx="457200" cy="457200"/>
+          </a:xfrm>
+          <a:prstGeom prst="rect">
+            <a:avLst/>
+          </a:prstGeom>
+          <a:noFill/>
+          <a:ln/>
+        </p:spPr>
+        <p:txBody>
+          <a:bodyPr wrap="square" lIns="0" tIns="0" rIns="0" bIns="0" rtlCol="0" anchor="ctr"/>
+          <a:lstStyle/>
+          <a:p>
+            <a:pPr algn="ctr" indent="0" marL="0">
+              <a:buNone/>
+            </a:pPr>
+            <a:r>
+              <a:rPr lang="en-US" sz="1600" b="1" dirty="0">
+                <a:solidFill>
+                  <a:schemeClr val="bg1"/>
+                </a:solidFill>
+              </a:rPr>
+              <a:t>2</a:t>
+            </a:r>
+            <a:endParaRPr lang="en-US" sz="1600" dirty="0"/>
+          </a:p>
+        </p:txBody>
+      </p:sp>
+      <p:sp>
+        <p:nvSpPr>
+          <p:cNvPr id="10" name="Run step 2 title"/>
+          <p:cNvSpPr txBox="1"/>
+          <p:nvPr/>
+        </p:nvSpPr>
+        <p:spPr>
+          <a:xfrm>
+            <a:off x="1188720" y="2834640"/>
+            <a:ext cx="4480560" cy="320040"/>
+          </a:xfrm>
+          <a:prstGeom prst="rect">
+            <a:avLst/>
+          </a:prstGeom>
+          <a:noFill/>
+          <a:ln/>
+        </p:spPr>
+        <p:txBody>
+          <a:bodyPr wrap="square" lIns="0" tIns="0" rIns="0" bIns="0" rtlCol="0" anchor="t"/>
+          <a:lstStyle/>
+          <a:p>
+            <a:pPr indent="0" marL="0">
+              <a:buNone/>
+            </a:pPr>
+            <a:r>
+              <a:rPr lang="en-US" sz="1600" b="1" dirty="0">
+                <a:solidFill>
+                  <a:schemeClr val="tx2"/>
+                </a:solidFill>
+              </a:rPr>
+              <a:t>Seed</a:t>
+            </a:r>
+            <a:endParaRPr lang="en-US" sz="1600" dirty="0"/>
+          </a:p>
+        </p:txBody>
+      </p:sp>
+      <p:sp>
+        <p:nvSpPr>
+          <p:cNvPr id="11" name="Run step 2 body"/>
+          <p:cNvSpPr txBox="1"/>
+          <p:nvPr/>
+        </p:nvSpPr>
+        <p:spPr>
+          <a:xfrm>
+            <a:off x="1188720" y="3182112"/>
+            <a:ext cx="4480560" cy="594360"/>
+          </a:xfrm>
+          <a:prstGeom prst="rect">
+            <a:avLst/>
+          </a:prstGeom>
+          <a:noFill/>
+          <a:ln/>
+        </p:spPr>
+        <p:txBody>
+          <a:bodyPr wrap="square" lIns="0" tIns="0" rIns="0" bIns="0" rtlCol="0" anchor="t"/>
+          <a:lstStyle/>
+          <a:p>
+            <a:pPr indent="0" marL="0">
+              <a:buNone/>
+            </a:pPr>
+            <a:r>
+              <a:rPr lang="en-US" sz="1400" dirty="0">
+                <a:solidFill>
+                  <a:schemeClr val="tx1"/>
+                </a:solidFill>
+              </a:rPr>
+              <a:t>seed.py loads 40 [Demo] deals and walks them through stages via the Composite API.</a:t>
+            </a:r>
+            <a:endParaRPr lang="en-US" sz="1400" dirty="0"/>
+          </a:p>
+        </p:txBody>
+      </p:sp>
+      <p:sp>
+        <p:nvSpPr>
+          <p:cNvPr id="12" name="Run step 3 marker"/>
+          <p:cNvSpPr/>
+          <p:nvPr/>
+        </p:nvSpPr>
+        <p:spPr>
+          <a:xfrm>
+            <a:off x="548640" y="3931920"/>
+            <a:ext cx="457200" cy="457200"/>
+          </a:xfrm>
+          <a:prstGeom prst="ellipse">
+            <a:avLst/>
+          </a:prstGeom>
+          <a:solidFill>
+            <a:schemeClr val="accent1"/>
+          </a:solidFill>
+          <a:ln/>
+        </p:spPr>
+      </p:sp>
+      <p:sp>
+        <p:nvSpPr>
+          <p:cNvPr id="13" name="Run step 3 number"/>
+          <p:cNvSpPr txBox="1"/>
+          <p:nvPr/>
+        </p:nvSpPr>
+        <p:spPr>
+          <a:xfrm>
+            <a:off x="548640" y="3931920"/>
+            <a:ext cx="457200" cy="457200"/>
+          </a:xfrm>
+          <a:prstGeom prst="rect">
+            <a:avLst/>
+          </a:prstGeom>
+          <a:noFill/>
+          <a:ln/>
+        </p:spPr>
+        <p:txBody>
+          <a:bodyPr wrap="square" lIns="0" tIns="0" rIns="0" bIns="0" rtlCol="0" anchor="ctr"/>
+          <a:lstStyle/>
+          <a:p>
+            <a:pPr algn="ctr" indent="0" marL="0">
+              <a:buNone/>
+            </a:pPr>
+            <a:r>
+              <a:rPr lang="en-US" sz="1600" b="1" dirty="0">
+                <a:solidFill>
+                  <a:schemeClr val="bg1"/>
+                </a:solidFill>
+              </a:rPr>
+              <a:t>3</a:t>
+            </a:r>
+            <a:endParaRPr lang="en-US" sz="1600" dirty="0"/>
+          </a:p>
+        </p:txBody>
+      </p:sp>
+      <p:sp>
+        <p:nvSpPr>
+          <p:cNvPr id="14" name="Run step 3 title"/>
+          <p:cNvSpPr txBox="1"/>
+          <p:nvPr/>
+        </p:nvSpPr>
+        <p:spPr>
+          <a:xfrm>
+            <a:off x="1188720" y="3886200"/>
+            <a:ext cx="4480560" cy="320040"/>
+          </a:xfrm>
+          <a:prstGeom prst="rect">
+            <a:avLst/>
+          </a:prstGeom>
+          <a:noFill/>
+          <a:ln/>
+        </p:spPr>
+        <p:txBody>
+          <a:bodyPr wrap="square" lIns="0" tIns="0" rIns="0" bIns="0" rtlCol="0" anchor="t"/>
+          <a:lstStyle/>
+          <a:p>
+            <a:pPr indent="0" marL="0">
+              <a:buNone/>
+            </a:pPr>
+            <a:r>
+              <a:rPr lang="en-US" sz="1600" b="1" dirty="0">
+                <a:solidFill>
+                  <a:schemeClr val="tx2"/>
+                </a:solidFill>
+              </a:rPr>
+              <a:t>Extract and mine</a:t>
+            </a:r>
+            <a:endParaRPr lang="en-US" sz="1600" dirty="0"/>
+          </a:p>
+        </p:txBody>
+      </p:sp>
+      <p:sp>
+        <p:nvSpPr>
+          <p:cNvPr id="15" name="Run step 3 body"/>
+          <p:cNvSpPr txBox="1"/>
+          <p:nvPr/>
+        </p:nvSpPr>
+        <p:spPr>
+          <a:xfrm>
+            <a:off x="1188720" y="4233672"/>
+            <a:ext cx="4480560" cy="594360"/>
+          </a:xfrm>
+          <a:prstGeom prst="rect">
+            <a:avLst/>
+          </a:prstGeom>
+          <a:noFill/>
+          <a:ln/>
+        </p:spPr>
+        <p:txBody>
+          <a:bodyPr wrap="square" lIns="0" tIns="0" rIns="0" bIns="0" rtlCol="0" anchor="t"/>
+          <a:lstStyle/>
+          <a:p>
+            <a:pPr indent="0" marL="0">
+              <a:buNone/>
+            </a:pPr>
+            <a:r>
+              <a:rPr lang="en-US" sz="1400" dirty="0">
+                <a:solidFill>
+                  <a:schemeClr val="tx1"/>
+                </a:solidFill>
+              </a:rPr>
+              <a:t>extract.py → transform.py → mine.py write the event log and insights.</a:t>
+            </a:r>
+            <a:endParaRPr lang="en-US" sz="1400" dirty="0"/>
+          </a:p>
+        </p:txBody>
+      </p:sp>
+      <p:sp>
+        <p:nvSpPr>
+          <p:cNvPr id="16" name="Run step 4 marker"/>
+          <p:cNvSpPr/>
+          <p:nvPr/>
+        </p:nvSpPr>
+        <p:spPr>
+          <a:xfrm>
+            <a:off x="548640" y="4983480"/>
+            <a:ext cx="457200" cy="457200"/>
+          </a:xfrm>
+          <a:prstGeom prst="ellipse">
+            <a:avLst/>
+          </a:prstGeom>
+          <a:solidFill>
+            <a:schemeClr val="accent1"/>
+          </a:solidFill>
+          <a:ln/>
+        </p:spPr>
+      </p:sp>
+      <p:sp>
+        <p:nvSpPr>
+          <p:cNvPr id="17" name="Run step 4 number"/>
+          <p:cNvSpPr txBox="1"/>
+          <p:nvPr/>
+        </p:nvSpPr>
+        <p:spPr>
+          <a:xfrm>
+            <a:off x="548640" y="4983480"/>
+            <a:ext cx="457200" cy="457200"/>
+          </a:xfrm>
+          <a:prstGeom prst="rect">
+            <a:avLst/>
+          </a:prstGeom>
+          <a:noFill/>
+          <a:ln/>
+        </p:spPr>
+        <p:txBody>
+          <a:bodyPr wrap="square" lIns="0" tIns="0" rIns="0" bIns="0" rtlCol="0" anchor="ctr"/>
+          <a:lstStyle/>
+          <a:p>
+            <a:pPr algn="ctr" indent="0" marL="0">
+              <a:buNone/>
+            </a:pPr>
+            <a:r>
+              <a:rPr lang="en-US" sz="1600" b="1" dirty="0">
+                <a:solidFill>
+                  <a:schemeClr val="bg1"/>
+                </a:solidFill>
+              </a:rPr>
+              <a:t>4</a:t>
+            </a:r>
+            <a:endParaRPr lang="en-US" sz="1600" dirty="0"/>
+          </a:p>
+        </p:txBody>
+      </p:sp>
+      <p:sp>
+        <p:nvSpPr>
+          <p:cNvPr id="18" name="Run step 4 title"/>
+          <p:cNvSpPr txBox="1"/>
+          <p:nvPr/>
+        </p:nvSpPr>
+        <p:spPr>
+          <a:xfrm>
+            <a:off x="1188720" y="4937760"/>
+            <a:ext cx="4480560" cy="320040"/>
+          </a:xfrm>
+          <a:prstGeom prst="rect">
+            <a:avLst/>
+          </a:prstGeom>
+          <a:noFill/>
+          <a:ln/>
+        </p:spPr>
+        <p:txBody>
+          <a:bodyPr wrap="square" lIns="0" tIns="0" rIns="0" bIns="0" rtlCol="0" anchor="t"/>
+          <a:lstStyle/>
+          <a:p>
+            <a:pPr indent="0" marL="0">
+              <a:buNone/>
+            </a:pPr>
+            <a:r>
+              <a:rPr lang="en-US" sz="1600" b="1" dirty="0">
+                <a:solidFill>
+                  <a:schemeClr val="tx2"/>
+                </a:solidFill>
+              </a:rPr>
+              <a:t>Publish</a:t>
+            </a:r>
+            <a:endParaRPr lang="en-US" sz="1600" dirty="0"/>
+          </a:p>
+        </p:txBody>
+      </p:sp>
+      <p:sp>
+        <p:nvSpPr>
+          <p:cNvPr id="19" name="Run step 4 body"/>
+          <p:cNvSpPr txBox="1"/>
+          <p:nvPr/>
+        </p:nvSpPr>
+        <p:spPr>
+          <a:xfrm>
+            <a:off x="1188720" y="5285232"/>
+            <a:ext cx="4480560" cy="594360"/>
+          </a:xfrm>
+          <a:prstGeom prst="rect">
+            <a:avLst/>
+          </a:prstGeom>
+          <a:noFill/>
+          <a:ln/>
+        </p:spPr>
+        <p:txBody>
+          <a:bodyPr wrap="square" lIns="0" tIns="0" rIns="0" bIns="0" rtlCol="0" anchor="t"/>
+          <a:lstStyle/>
+          <a:p>
+            <a:pPr indent="0" marL="0">
+              <a:buNone/>
+            </a:pPr>
+            <a:r>
+              <a:rPr lang="en-US" sz="1400" dirty="0">
+                <a:solidFill>
+                  <a:schemeClr val="tx1"/>
+                </a:solidFill>
+              </a:rPr>
+              <a:t>build_site.py renders the dashboard and value case; deployed to Vercel.</a:t>
+            </a:r>
+            <a:endParaRPr lang="en-US" sz="1400" dirty="0"/>
+          </a:p>
+        </p:txBody>
+      </p:sp>
+      <p:sp>
+        <p:nvSpPr>
+          <p:cNvPr id="20" name="Gotchas heading"/>
+          <p:cNvSpPr txBox="1"/>
+          <p:nvPr/>
+        </p:nvSpPr>
+        <p:spPr>
+          <a:xfrm>
+            <a:off x="6309360" y="1325880"/>
+            <a:ext cx="5303520" cy="365760"/>
+          </a:xfrm>
+          <a:prstGeom prst="rect">
+            <a:avLst/>
+          </a:prstGeom>
+          <a:noFill/>
+          <a:ln/>
+        </p:spPr>
+        <p:txBody>
+          <a:bodyPr wrap="square" lIns="0" tIns="0" rIns="0" bIns="0" rtlCol="0" anchor="t"/>
+          <a:lstStyle/>
+          <a:p>
+            <a:pPr indent="0" marL="0">
+              <a:buNone/>
+            </a:pPr>
+            <a:r>
+              <a:rPr lang="en-US" sz="1600" b="1" dirty="0">
+                <a:solidFill>
+                  <a:schemeClr val="accent6"/>
+                </a:solidFill>
+              </a:rPr>
+              <a:t>Problems solved along the way</a:t>
+            </a:r>
+            <a:endParaRPr lang="en-US" sz="1600" dirty="0"/>
+          </a:p>
+        </p:txBody>
+      </p:sp>
+      <p:sp>
+        <p:nvSpPr>
+          <p:cNvPr id="21" name="Gotcha 1"/>
+          <p:cNvSpPr/>
+          <p:nvPr/>
+        </p:nvSpPr>
+        <p:spPr>
+          <a:xfrm>
+            <a:off x="6309360" y="1783080"/>
+            <a:ext cx="5303520" cy="914400"/>
           </a:xfrm>
           <a:prstGeom prst="roundRect">
             <a:avLst>
-              <a:gd name="adj" fmla="val 4800"/>
+              <a:gd name="adj" fmla="val 12000"/>
             </a:avLst>
           </a:prstGeom>
           <a:solidFill>
-            <a:schemeClr val="accent6"/>
+            <a:schemeClr val="bg2"/>
           </a:solidFill>
           <a:ln/>
         </p:spPr>
       </p:sp>
       <p:sp>
         <p:nvSpPr>
-          <p:cNvPr id="8" name="Next 2 heading"/>
-          <p:cNvSpPr txBox="1"/>
-          <p:nvPr/>
-        </p:nvSpPr>
-        <p:spPr>
-          <a:xfrm>
-            <a:off x="4617720" y="2103120"/>
-            <a:ext cx="2788920" cy="457200"/>
+          <p:cNvPr id="22" name="Gotcha 1 title"/>
+          <p:cNvSpPr txBox="1"/>
+          <p:nvPr/>
+        </p:nvSpPr>
+        <p:spPr>
+          <a:xfrm>
+            <a:off x="6537960" y="1874520"/>
+            <a:ext cx="4892040" cy="320040"/>
           </a:xfrm>
           <a:prstGeom prst="rect">
             <a:avLst/>
@@ -7932,27 +10540,27 @@
               <a:buNone/>
             </a:pPr>
             <a:r>
-              <a:rPr lang="en-US" sz="2200" b="1" dirty="0">
-                <a:solidFill>
-                  <a:schemeClr val="accent3"/>
-                </a:solidFill>
-              </a:rPr>
-              <a:t>Act</a:t>
-            </a:r>
-            <a:endParaRPr lang="en-US" sz="2200" dirty="0"/>
-          </a:p>
-        </p:txBody>
-      </p:sp>
-      <p:sp>
-        <p:nvSpPr>
-          <p:cNvPr id="9" name="Next 2 body"/>
-          <p:cNvSpPr txBox="1"/>
-          <p:nvPr/>
-        </p:nvSpPr>
-        <p:spPr>
-          <a:xfrm>
-            <a:off x="4617720" y="2697480"/>
-            <a:ext cx="2788920" cy="1280160"/>
+              <a:rPr lang="en-US" sz="1400" b="1" dirty="0">
+                <a:solidFill>
+                  <a:schemeClr val="tx2"/>
+                </a:solidFill>
+              </a:rPr>
+              <a:t>New orgs block uninstalled connected apps</a:t>
+            </a:r>
+            <a:endParaRPr lang="en-US" sz="1400" dirty="0"/>
+          </a:p>
+        </p:txBody>
+      </p:sp>
+      <p:sp>
+        <p:nvSpPr>
+          <p:cNvPr id="23" name="Gotcha 1 fix"/>
+          <p:cNvSpPr txBox="1"/>
+          <p:nvPr/>
+        </p:nvSpPr>
+        <p:spPr>
+          <a:xfrm>
+            <a:off x="6537960" y="2240280"/>
+            <a:ext cx="4892040" cy="365760"/>
           </a:xfrm>
           <a:prstGeom prst="rect">
             <a:avLst/>
@@ -7968,49 +10576,49 @@
               <a:buNone/>
             </a:pPr>
             <a:r>
-              <a:rPr lang="en-US" sz="1600" dirty="0">
-                <a:solidFill>
-                  <a:schemeClr val="bg1"/>
-                </a:solidFill>
-              </a:rPr>
-              <a:t>Pilot a delegated approval threshold for EMEA discounts up to 30% and make Qualification a required gate.</a:t>
-            </a:r>
-            <a:endParaRPr lang="en-US" sz="1600" dirty="0"/>
-          </a:p>
-        </p:txBody>
-      </p:sp>
-      <p:sp>
-        <p:nvSpPr>
-          <p:cNvPr id="10" name="Next 3 card"/>
+              <a:rPr lang="en-US" sz="1400" dirty="0">
+                <a:solidFill>
+                  <a:schemeClr val="tx1"/>
+                </a:solidFill>
+              </a:rPr>
+              <a:t>Installed Salesforce CLI under Connected Apps OAuth Usage.</a:t>
+            </a:r>
+            <a:endParaRPr lang="en-US" sz="1400" dirty="0"/>
+          </a:p>
+        </p:txBody>
+      </p:sp>
+      <p:sp>
+        <p:nvSpPr>
+          <p:cNvPr id="24" name="Gotcha 2"/>
           <p:cNvSpPr/>
           <p:nvPr/>
         </p:nvSpPr>
         <p:spPr>
           <a:xfrm>
-            <a:off x="7955280" y="1828800"/>
-            <a:ext cx="3337560" cy="2286000"/>
+            <a:off x="6309360" y="2834640"/>
+            <a:ext cx="5303520" cy="914400"/>
           </a:xfrm>
           <a:prstGeom prst="roundRect">
             <a:avLst>
-              <a:gd name="adj" fmla="val 4800"/>
+              <a:gd name="adj" fmla="val 12000"/>
             </a:avLst>
           </a:prstGeom>
           <a:solidFill>
-            <a:schemeClr val="accent6"/>
+            <a:schemeClr val="bg2"/>
           </a:solidFill>
           <a:ln/>
         </p:spPr>
       </p:sp>
       <p:sp>
         <p:nvSpPr>
-          <p:cNvPr id="11" name="Next 3 heading"/>
-          <p:cNvSpPr txBox="1"/>
-          <p:nvPr/>
-        </p:nvSpPr>
-        <p:spPr>
-          <a:xfrm>
-            <a:off x="8229600" y="2103120"/>
-            <a:ext cx="2788920" cy="457200"/>
+          <p:cNvPr id="25" name="Gotcha 2 title"/>
+          <p:cNvSpPr txBox="1"/>
+          <p:nvPr/>
+        </p:nvSpPr>
+        <p:spPr>
+          <a:xfrm>
+            <a:off x="6537960" y="2926080"/>
+            <a:ext cx="4892040" cy="320040"/>
           </a:xfrm>
           <a:prstGeom prst="rect">
             <a:avLst/>
@@ -8026,27 +10634,27 @@
               <a:buNone/>
             </a:pPr>
             <a:r>
-              <a:rPr lang="en-US" sz="2200" b="1" dirty="0">
-                <a:solidFill>
-                  <a:schemeClr val="accent3"/>
-                </a:solidFill>
-              </a:rPr>
-              <a:t>Monitor</a:t>
-            </a:r>
-            <a:endParaRPr lang="en-US" sz="2200" dirty="0"/>
-          </a:p>
-        </p:txBody>
-      </p:sp>
-      <p:sp>
-        <p:nvSpPr>
-          <p:cNvPr id="12" name="Next 3 body"/>
-          <p:cNvSpPr txBox="1"/>
-          <p:nvPr/>
-        </p:nvSpPr>
-        <p:spPr>
-          <a:xfrm>
-            <a:off x="8229600" y="2697480"/>
-            <a:ext cx="2788920" cy="1280160"/>
+              <a:rPr lang="en-US" sz="1400" b="1" dirty="0">
+                <a:solidFill>
+                  <a:schemeClr val="tx2"/>
+                </a:solidFill>
+              </a:rPr>
+              <a:t>Starter orgs use a shorter sales process</a:t>
+            </a:r>
+            <a:endParaRPr lang="en-US" sz="1400" dirty="0"/>
+          </a:p>
+        </p:txBody>
+      </p:sp>
+      <p:sp>
+        <p:nvSpPr>
+          <p:cNvPr id="26" name="Gotcha 2 fix"/>
+          <p:cNvSpPr txBox="1"/>
+          <p:nvPr/>
+        </p:nvSpPr>
+        <p:spPr>
+          <a:xfrm>
+            <a:off x="6537960" y="3291840"/>
+            <a:ext cx="4892040" cy="365760"/>
           </a:xfrm>
           <a:prstGeom prst="rect">
             <a:avLst/>
@@ -8062,27 +10670,49 @@
               <a:buNone/>
             </a:pPr>
             <a:r>
-              <a:rPr lang="en-US" sz="1600" dirty="0">
-                <a:solidFill>
-                  <a:schemeClr val="bg1"/>
-                </a:solidFill>
-              </a:rPr>
-              <a:t>Schedule the extract into Apromore, track the KPIs against target and report value realised quarterly.</a:t>
-            </a:r>
-            <a:endParaRPr lang="en-US" sz="1600" dirty="0"/>
-          </a:p>
-        </p:txBody>
-      </p:sp>
-      <p:sp>
-        <p:nvSpPr>
-          <p:cNvPr id="13" name="Closing contact"/>
-          <p:cNvSpPr txBox="1"/>
-          <p:nvPr/>
-        </p:nvSpPr>
-        <p:spPr>
-          <a:xfrm>
-            <a:off x="731520" y="5943600"/>
-            <a:ext cx="7315200" cy="365760"/>
+              <a:rPr lang="en-US" sz="1400" dirty="0">
+                <a:solidFill>
+                  <a:schemeClr val="tx1"/>
+                </a:solidFill>
+              </a:rPr>
+              <a:t>Stages auto-map to Qualify → Propose → Negotiate.</a:t>
+            </a:r>
+            <a:endParaRPr lang="en-US" sz="1400" dirty="0"/>
+          </a:p>
+        </p:txBody>
+      </p:sp>
+      <p:sp>
+        <p:nvSpPr>
+          <p:cNvPr id="27" name="Gotcha 3"/>
+          <p:cNvSpPr/>
+          <p:nvPr/>
+        </p:nvSpPr>
+        <p:spPr>
+          <a:xfrm>
+            <a:off x="6309360" y="3886200"/>
+            <a:ext cx="5303520" cy="914400"/>
+          </a:xfrm>
+          <a:prstGeom prst="roundRect">
+            <a:avLst>
+              <a:gd name="adj" fmla="val 12000"/>
+            </a:avLst>
+          </a:prstGeom>
+          <a:solidFill>
+            <a:schemeClr val="bg2"/>
+          </a:solidFill>
+          <a:ln/>
+        </p:spPr>
+      </p:sp>
+      <p:sp>
+        <p:nvSpPr>
+          <p:cNvPr id="28" name="Gotcha 3 title"/>
+          <p:cNvSpPr txBox="1"/>
+          <p:nvPr/>
+        </p:nvSpPr>
+        <p:spPr>
+          <a:xfrm>
+            <a:off x="6537960" y="3977640"/>
+            <a:ext cx="4892040" cy="320040"/>
           </a:xfrm>
           <a:prstGeom prst="rect">
             <a:avLst/>
@@ -8098,14 +10728,189 @@
               <a:buNone/>
             </a:pPr>
             <a:r>
+              <a:rPr lang="en-US" sz="1400" b="1" dirty="0">
+                <a:solidFill>
+                  <a:schemeClr val="tx2"/>
+                </a:solidFill>
+              </a:rPr>
+              <a:t>The CLI redacts access tokens</a:t>
+            </a:r>
+            <a:endParaRPr lang="en-US" sz="1400" dirty="0"/>
+          </a:p>
+        </p:txBody>
+      </p:sp>
+      <p:sp>
+        <p:nvSpPr>
+          <p:cNvPr id="29" name="Gotcha 3 fix"/>
+          <p:cNvSpPr txBox="1"/>
+          <p:nvPr/>
+        </p:nvSpPr>
+        <p:spPr>
+          <a:xfrm>
+            <a:off x="6537960" y="4343400"/>
+            <a:ext cx="4892040" cy="365760"/>
+          </a:xfrm>
+          <a:prstGeom prst="rect">
+            <a:avLst/>
+          </a:prstGeom>
+          <a:noFill/>
+          <a:ln/>
+        </p:spPr>
+        <p:txBody>
+          <a:bodyPr wrap="square" lIns="0" tIns="0" rIns="0" bIns="0" rtlCol="0" anchor="t"/>
+          <a:lstStyle/>
+          <a:p>
+            <a:pPr indent="0" marL="0">
+              <a:buNone/>
+            </a:pPr>
+            <a:r>
               <a:rPr lang="en-US" sz="1400" dirty="0">
                 <a:solidFill>
-                  <a:schemeClr val="accent3"/>
-                </a:solidFill>
-              </a:rPr>
-              <a:t>salesforce-process-intelligence.vercel.app  ·  Luke Audie</a:t>
+                  <a:schemeClr val="tx1"/>
+                </a:solidFill>
+              </a:rPr>
+              <a:t>Calls go through sf api request rest instead.</a:t>
             </a:r>
             <a:endParaRPr lang="en-US" sz="1400" dirty="0"/>
+          </a:p>
+        </p:txBody>
+      </p:sp>
+      <p:sp>
+        <p:nvSpPr>
+          <p:cNvPr id="30" name="Gotcha 4"/>
+          <p:cNvSpPr/>
+          <p:nvPr/>
+        </p:nvSpPr>
+        <p:spPr>
+          <a:xfrm>
+            <a:off x="6309360" y="4937760"/>
+            <a:ext cx="5303520" cy="914400"/>
+          </a:xfrm>
+          <a:prstGeom prst="roundRect">
+            <a:avLst>
+              <a:gd name="adj" fmla="val 12000"/>
+            </a:avLst>
+          </a:prstGeom>
+          <a:solidFill>
+            <a:schemeClr val="bg2"/>
+          </a:solidFill>
+          <a:ln/>
+        </p:spPr>
+      </p:sp>
+      <p:sp>
+        <p:nvSpPr>
+          <p:cNvPr id="31" name="Gotcha 4 title"/>
+          <p:cNvSpPr txBox="1"/>
+          <p:nvPr/>
+        </p:nvSpPr>
+        <p:spPr>
+          <a:xfrm>
+            <a:off x="6537960" y="5029200"/>
+            <a:ext cx="4892040" cy="320040"/>
+          </a:xfrm>
+          <a:prstGeom prst="rect">
+            <a:avLst/>
+          </a:prstGeom>
+          <a:noFill/>
+          <a:ln/>
+        </p:spPr>
+        <p:txBody>
+          <a:bodyPr wrap="square" lIns="0" tIns="0" rIns="0" bIns="0" rtlCol="0" anchor="t"/>
+          <a:lstStyle/>
+          <a:p>
+            <a:pPr indent="0" marL="0">
+              <a:buNone/>
+            </a:pPr>
+            <a:r>
+              <a:rPr lang="en-US" sz="1400" b="1" dirty="0">
+                <a:solidFill>
+                  <a:schemeClr val="tx2"/>
+                </a:solidFill>
+              </a:rPr>
+              <a:t>History can't be backdated</a:t>
+            </a:r>
+            <a:endParaRPr lang="en-US" sz="1400" dirty="0"/>
+          </a:p>
+        </p:txBody>
+      </p:sp>
+      <p:sp>
+        <p:nvSpPr>
+          <p:cNvPr id="32" name="Gotcha 4 fix"/>
+          <p:cNvSpPr txBox="1"/>
+          <p:nvPr/>
+        </p:nvSpPr>
+        <p:spPr>
+          <a:xfrm>
+            <a:off x="6537960" y="5394960"/>
+            <a:ext cx="4892040" cy="365760"/>
+          </a:xfrm>
+          <a:prstGeom prst="rect">
+            <a:avLst/>
+          </a:prstGeom>
+          <a:noFill/>
+          <a:ln/>
+        </p:spPr>
+        <p:txBody>
+          <a:bodyPr wrap="square" lIns="0" tIns="0" rIns="0" bIns="0" rtlCol="0" anchor="t"/>
+          <a:lstStyle/>
+          <a:p>
+            <a:pPr indent="0" marL="0">
+              <a:buNone/>
+            </a:pPr>
+            <a:r>
+              <a:rPr lang="en-US" sz="1400" dirty="0">
+                <a:solidFill>
+                  <a:schemeClr val="tx1"/>
+                </a:solidFill>
+              </a:rPr>
+              <a:t>The 10-month dataset is simulated in the same object shape.</a:t>
+            </a:r>
+            <a:endParaRPr lang="en-US" sz="1400" dirty="0"/>
+          </a:p>
+        </p:txBody>
+      </p:sp>
+      <p:sp>
+        <p:nvSpPr>
+          <p:cNvPr id="25" name="Slide Number Placeholder 0"/>
+          <p:cNvSpPr>
+            <a:spLocks noGrp="1"/>
+          </p:cNvSpPr>
+          <p:nvPr>
+            <p:ph type="sldNum" sz="quarter" idx="4294967295"/>
+          </p:nvPr>
+        </p:nvSpPr>
+        <p:spPr>
+          <a:xfrm>
+            <a:off x="11155680" y="6400800"/>
+            <a:ext cx="457200" cy="274320"/>
+          </a:xfrm>
+          <a:prstGeom prst="rect">
+            <a:avLst/>
+          </a:prstGeom>
+          <a:extLst>
+            <a:ext uri="{C572A759-6A51-4108-AA02-DFA0A04FC94B}">
+              <ma14:wrappingTextBoxFlag xmlns:ma14="http://schemas.microsoft.com/office/mac/drawingml/2011/main" val="0"/>
+            </a:ext>
+          </a:extLst>
+        </p:spPr>
+        <p:txBody>
+          <a:bodyPr/>
+          <a:lstStyle>
+            <a:lvl1pPr>
+              <a:defRPr sz="1000">
+                <a:solidFill>
+                  <a:schemeClr val="accent6"/>
+                </a:solidFill>
+              </a:defRPr>
+            </a:lvl1pPr>
+          </a:lstStyle>
+          <a:p>
+            <a:pPr algn="r"/>
+            <a:fld id="{F7021451-1387-4CA6-816F-3879F97B5CBC}" type="slidenum">
+              <a:rPr b="0" lang="en-US"/>
+              <a:t>9</a:t>
+            </a:fld>
+            <a:endParaRPr lang="en-US"/>
           </a:p>
         </p:txBody>
       </p:sp>

--- a/deck/salesforce-process-intelligence.pptx
+++ b/deck/salesforce-process-intelligence.pptx
@@ -117,24 +117,24 @@
   <p:extLst>
     <p:ext uri="{521415D9-36F7-43E2-AB2F-B90AF26B5E84}">
       <p14:sectionLst xmlns:p14="http://schemas.microsoft.com/office/powerpoint/2010/main">
-        <p14:section name="Opening" id="{17795403-9396-725d-c414-501f866fd073}">
+        <p14:section name="Opening" id="{e805174c-0229-0f1b-e826-91d80d34e528}">
           <p14:sldIdLst>
             <p14:sldId id="256"/>
             <p14:sldId id="257"/>
           </p14:sldIdLst>
         </p14:section>
-        <p14:section name="Evidence" id="{85fbde82-9cec-8f78-a242-6c9daccd6540}">
+        <p14:section name="Evidence" id="{9ef25b4b-9ee7-d7b3-ef9a-49cf16364c4c}">
           <p14:sldIdLst>
             <p14:sldId id="258"/>
             <p14:sldId id="259"/>
           </p14:sldIdLst>
         </p14:section>
-        <p14:section name="Value" id="{4e8a13c5-3957-4d6a-c99e-4405ca997d95}">
+        <p14:section name="Value" id="{c6365106-2ab8-5c23-76b4-2b329aa871da}">
           <p14:sldIdLst>
             <p14:sldId id="260"/>
           </p14:sldIdLst>
         </p14:section>
-        <p14:section name="Tech setup" id="{3dbcbcab-7b09-ad4a-5235-2ed2a77eab95}">
+        <p14:section name="Tech setup" id="{e50cd908-5653-644e-7159-4db781577120}">
           <p14:sldIdLst>
             <p14:sldId id="261"/>
             <p14:sldId id="262"/>
@@ -143,7 +143,7 @@
             <p14:sldId id="265"/>
           </p14:sldIdLst>
         </p14:section>
-        <p14:section name="Close" id="{e0829fee-14ba-deb4-2c72-d7f9c20bbb32}">
+        <p14:section name="Close" id="{98250bfe-6674-2e8d-5467-4f149f44f630}">
           <p14:sldIdLst>
             <p14:sldId id="266"/>
           </p14:sldIdLst>
@@ -7713,7 +7713,7 @@
                   <a:schemeClr val="tx2"/>
                 </a:solidFill>
               </a:rPr>
-              <a:t>Salesforce to Apromore in four steps</a:t>
+              <a:t>From Salesforce to an event log in four steps</a:t>
             </a:r>
             <a:endParaRPr lang="en-US" sz="3000" dirty="0"/>
           </a:p>

--- a/deck/salesforce-process-intelligence.pptx
+++ b/deck/salesforce-process-intelligence.pptx
@@ -117,24 +117,24 @@
   <p:extLst>
     <p:ext uri="{521415D9-36F7-43E2-AB2F-B90AF26B5E84}">
       <p14:sectionLst xmlns:p14="http://schemas.microsoft.com/office/powerpoint/2010/main">
-        <p14:section name="Opening" id="{e805174c-0229-0f1b-e826-91d80d34e528}">
+        <p14:section name="Opening" id="{a7c3dd03-6d0e-8dd6-8c09-7ed018a74820}">
           <p14:sldIdLst>
             <p14:sldId id="256"/>
             <p14:sldId id="257"/>
           </p14:sldIdLst>
         </p14:section>
-        <p14:section name="Evidence" id="{9ef25b4b-9ee7-d7b3-ef9a-49cf16364c4c}">
+        <p14:section name="Evidence" id="{276d2888-9cc2-7be6-21f5-2af5d535dc77}">
           <p14:sldIdLst>
             <p14:sldId id="258"/>
             <p14:sldId id="259"/>
           </p14:sldIdLst>
         </p14:section>
-        <p14:section name="Value" id="{c6365106-2ab8-5c23-76b4-2b329aa871da}">
+        <p14:section name="Value" id="{4edf3d9e-2f83-3f93-eb13-3fdb082ff20c}">
           <p14:sldIdLst>
             <p14:sldId id="260"/>
           </p14:sldIdLst>
         </p14:section>
-        <p14:section name="Tech setup" id="{e50cd908-5653-644e-7159-4db781577120}">
+        <p14:section name="Tech setup" id="{ae01f3ea-67c4-6dfe-349f-8da434d6687f}">
           <p14:sldIdLst>
             <p14:sldId id="261"/>
             <p14:sldId id="262"/>
@@ -143,7 +143,7 @@
             <p14:sldId id="265"/>
           </p14:sldIdLst>
         </p14:section>
-        <p14:section name="Close" id="{98250bfe-6674-2e8d-5467-4f149f44f630}">
+        <p14:section name="Close" id="{4091b444-0ca7-1f79-d4d2-2cee50fe67b4}">
           <p14:sldIdLst>
             <p14:sldId id="266"/>
           </p14:sldIdLst>
@@ -7713,7 +7713,7 @@
                   <a:schemeClr val="tx2"/>
                 </a:solidFill>
               </a:rPr>
-              <a:t>From Salesforce to an event log in four steps</a:t>
+              <a:t>From Salesforce to Process Intelligence in four steps</a:t>
             </a:r>
             <a:endParaRPr lang="en-US" sz="3000" dirty="0"/>
           </a:p>

--- a/deck/salesforce-process-intelligence.pptx
+++ b/deck/salesforce-process-intelligence.pptx
@@ -16,9 +16,11 @@
     <p:sldId id="264" r:id="rId10"/>
     <p:sldId id="265" r:id="rId11"/>
     <p:sldId id="266" r:id="rId12"/>
+    <p:sldId id="267" r:id="rId13"/>
+    <p:sldId id="268" r:id="rId14"/>
   </p:sldIdLst>
   <p:notesMasterIdLst>
-    <p:notesMasterId r:id="rId13"/>
+    <p:notesMasterId r:id="rId15"/>
   </p:notesMasterIdLst>
   <p:sldSz cx="12192000" cy="6858000"/>
   <p:notesSz cx="6858000" cy="12192000"/>
@@ -117,35 +119,37 @@
   <p:extLst>
     <p:ext uri="{521415D9-36F7-43E2-AB2F-B90AF26B5E84}">
       <p14:sectionLst xmlns:p14="http://schemas.microsoft.com/office/powerpoint/2010/main">
-        <p14:section name="Opening" id="{6c6590f9-e8a5-5243-748b-3cf507d1915d}">
+        <p14:section name="Opening" id="{9606f73f-5352-0c8a-1b6f-cbb2013955f7}">
           <p14:sldIdLst>
             <p14:sldId id="256"/>
             <p14:sldId id="257"/>
           </p14:sldIdLst>
         </p14:section>
-        <p14:section name="Evidence" id="{198eac98-c4a5-d914-07c7-d118c680445a}">
+        <p14:section name="Evidence" id="{8cf8c4fc-a79b-9a67-e68f-69c85841a29d}">
           <p14:sldIdLst>
             <p14:sldId id="258"/>
             <p14:sldId id="259"/>
           </p14:sldIdLst>
         </p14:section>
-        <p14:section name="Value" id="{ce1b0900-b3d0-c401-65e7-95ebc29c5c24}">
+        <p14:section name="Value" id="{0be3f633-c937-c010-eacf-ec605e49bbc5}">
           <p14:sldIdLst>
             <p14:sldId id="260"/>
             <p14:sldId id="261"/>
           </p14:sldIdLst>
         </p14:section>
-        <p14:section name="Close" id="{a089c8f5-d164-c9be-a68b-f82a152f2c23}">
+        <p14:section name="Close" id="{719c482f-b896-b042-f53d-40a1b96093d9}">
           <p14:sldIdLst>
             <p14:sldId id="262"/>
           </p14:sldIdLst>
         </p14:section>
-        <p14:section name="Tech setup" id="{e10e8d4c-9f91-41b2-bf2e-dfd7241242a9}">
+        <p14:section name="Tech setup" id="{fee289be-66a8-9486-f37d-5bb09447e84f}">
           <p14:sldIdLst>
             <p14:sldId id="263"/>
             <p14:sldId id="264"/>
             <p14:sldId id="265"/>
             <p14:sldId id="266"/>
+            <p14:sldId id="267"/>
+            <p14:sldId id="268"/>
           </p14:sldIdLst>
         </p14:section>
       </p14:sectionLst>
@@ -1597,6 +1601,182 @@
             <a:fld id="{F7021451-1387-4CA6-816F-3879F97B5CBC}" type="slidenum">
               <a:rPr lang="en-US"/>
               <a:t>11</a:t>
+            </a:fld>
+            <a:endParaRPr lang="en-US"/>
+          </a:p>
+        </p:txBody>
+      </p:sp>
+    </p:spTree>
+    <p:extLst>
+      <p:ext uri="{BB962C8B-B14F-4D97-AF65-F5344CB8AC3E}">
+        <p14:creationId xmlns:p14="http://schemas.microsoft.com/office/powerpoint/2010/main" val="1024086991"/>
+      </p:ext>
+    </p:extLst>
+  </p:cSld>
+  <p:clrMapOvr>
+    <a:masterClrMapping/>
+  </p:clrMapOvr>
+</p:notes>
+</file>
+
+<file path=ppt/notesSlides/notesSlide12.xml><?xml version="1.0" encoding="utf-8"?>
+<p:notes xmlns:a="http://schemas.openxmlformats.org/drawingml/2006/main" xmlns:r="http://schemas.openxmlformats.org/officeDocument/2006/relationships" xmlns:p="http://schemas.openxmlformats.org/presentationml/2006/main">
+  <p:cSld>
+    <p:spTree>
+      <p:nvGrpSpPr>
+        <p:cNvPr id="1" name=""/>
+        <p:cNvGrpSpPr/>
+        <p:nvPr/>
+      </p:nvGrpSpPr>
+      <p:grpSpPr>
+        <a:xfrm>
+          <a:off x="0" y="0"/>
+          <a:ext cx="0" cy="0"/>
+          <a:chOff x="0" y="0"/>
+          <a:chExt cx="0" cy="0"/>
+        </a:xfrm>
+      </p:grpSpPr>
+      <p:sp>
+        <p:nvSpPr>
+          <p:cNvPr id="2" name="Slide Image Placeholder 1"/>
+          <p:cNvSpPr>
+            <a:spLocks noGrp="1" noRot="1" noChangeAspect="1"/>
+          </p:cNvSpPr>
+          <p:nvPr>
+            <p:ph type="sldImg"/>
+          </p:nvPr>
+        </p:nvSpPr>
+        <p:spPr/>
+      </p:sp>
+      <p:sp>
+        <p:nvSpPr>
+          <p:cNvPr id="3" name="Notes Placeholder 2"/>
+          <p:cNvSpPr>
+            <a:spLocks noGrp="1"/>
+          </p:cNvSpPr>
+          <p:nvPr>
+            <p:ph type="body" idx="1"/>
+          </p:nvPr>
+        </p:nvSpPr>
+        <p:spPr/>
+        <p:txBody>
+          <a:bodyPr/>
+          <a:lstStyle/>
+          <a:p>
+            <a:r>
+              <a:rPr lang="en-US" dirty="0"/>
+              <a:t>Screenshots from the trial org. Every record is tagged [Demo] and can be removed with seed.py --cleanup.</a:t>
+            </a:r>
+            <a:endParaRPr lang="en-US" dirty="0"/>
+          </a:p>
+        </p:txBody>
+      </p:sp>
+      <p:sp>
+        <p:nvSpPr>
+          <p:cNvPr id="4" name="Slide Number Placeholder 3"/>
+          <p:cNvSpPr>
+            <a:spLocks noGrp="1"/>
+          </p:cNvSpPr>
+          <p:nvPr>
+            <p:ph type="sldNum" sz="quarter" idx="10"/>
+          </p:nvPr>
+        </p:nvSpPr>
+        <p:spPr/>
+        <p:txBody>
+          <a:bodyPr/>
+          <a:lstStyle/>
+          <a:p>
+            <a:fld id="{F7021451-1387-4CA6-816F-3879F97B5CBC}" type="slidenum">
+              <a:rPr lang="en-US"/>
+              <a:t>12</a:t>
+            </a:fld>
+            <a:endParaRPr lang="en-US"/>
+          </a:p>
+        </p:txBody>
+      </p:sp>
+    </p:spTree>
+    <p:extLst>
+      <p:ext uri="{BB962C8B-B14F-4D97-AF65-F5344CB8AC3E}">
+        <p14:creationId xmlns:p14="http://schemas.microsoft.com/office/powerpoint/2010/main" val="1024086991"/>
+      </p:ext>
+    </p:extLst>
+  </p:cSld>
+  <p:clrMapOvr>
+    <a:masterClrMapping/>
+  </p:clrMapOvr>
+</p:notes>
+</file>
+
+<file path=ppt/notesSlides/notesSlide13.xml><?xml version="1.0" encoding="utf-8"?>
+<p:notes xmlns:a="http://schemas.openxmlformats.org/drawingml/2006/main" xmlns:r="http://schemas.openxmlformats.org/officeDocument/2006/relationships" xmlns:p="http://schemas.openxmlformats.org/presentationml/2006/main">
+  <p:cSld>
+    <p:spTree>
+      <p:nvGrpSpPr>
+        <p:cNvPr id="1" name=""/>
+        <p:cNvGrpSpPr/>
+        <p:nvPr/>
+      </p:nvGrpSpPr>
+      <p:grpSpPr>
+        <a:xfrm>
+          <a:off x="0" y="0"/>
+          <a:ext cx="0" cy="0"/>
+          <a:chOff x="0" y="0"/>
+          <a:chExt cx="0" cy="0"/>
+        </a:xfrm>
+      </p:grpSpPr>
+      <p:sp>
+        <p:nvSpPr>
+          <p:cNvPr id="2" name="Slide Image Placeholder 1"/>
+          <p:cNvSpPr>
+            <a:spLocks noGrp="1" noRot="1" noChangeAspect="1"/>
+          </p:cNvSpPr>
+          <p:nvPr>
+            <p:ph type="sldImg"/>
+          </p:nvPr>
+        </p:nvSpPr>
+        <p:spPr/>
+      </p:sp>
+      <p:sp>
+        <p:nvSpPr>
+          <p:cNvPr id="3" name="Notes Placeholder 2"/>
+          <p:cNvSpPr>
+            <a:spLocks noGrp="1"/>
+          </p:cNvSpPr>
+          <p:nvPr>
+            <p:ph type="body" idx="1"/>
+          </p:nvPr>
+        </p:nvSpPr>
+        <p:spPr/>
+        <p:txBody>
+          <a:bodyPr/>
+          <a:lstStyle/>
+          <a:p>
+            <a:r>
+              <a:rPr lang="en-US" dirty="0"/>
+              <a:t>The stage history is the raw material for the event log: each row becomes an event. The setup screen is the one-click fix for new orgs that block uninstalled connected apps.</a:t>
+            </a:r>
+            <a:endParaRPr lang="en-US" dirty="0"/>
+          </a:p>
+        </p:txBody>
+      </p:sp>
+      <p:sp>
+        <p:nvSpPr>
+          <p:cNvPr id="4" name="Slide Number Placeholder 3"/>
+          <p:cNvSpPr>
+            <a:spLocks noGrp="1"/>
+          </p:cNvSpPr>
+          <p:nvPr>
+            <p:ph type="sldNum" sz="quarter" idx="10"/>
+          </p:nvPr>
+        </p:nvSpPr>
+        <p:spPr/>
+        <p:txBody>
+          <a:bodyPr/>
+          <a:lstStyle/>
+          <a:p>
+            <a:fld id="{F7021451-1387-4CA6-816F-3879F97B5CBC}" type="slidenum">
+              <a:rPr lang="en-US"/>
+              <a:t>13</a:t>
             </a:fld>
             <a:endParaRPr lang="en-US"/>
           </a:p>
@@ -5574,6 +5754,562 @@
 </p:sld>
 </file>
 
+<file path=ppt/slides/slide12.xml><?xml version="1.0" encoding="utf-8"?>
+<p:sld xmlns:a="http://schemas.openxmlformats.org/drawingml/2006/main" xmlns:r="http://schemas.openxmlformats.org/officeDocument/2006/relationships" xmlns:p="http://schemas.openxmlformats.org/presentationml/2006/main">
+  <p:cSld name="Slide 12">
+    <p:spTree>
+      <p:nvGrpSpPr>
+        <p:cNvPr id="1" name=""/>
+        <p:cNvGrpSpPr/>
+        <p:nvPr/>
+      </p:nvGrpSpPr>
+      <p:grpSpPr>
+        <a:xfrm>
+          <a:off x="0" y="0"/>
+          <a:ext cx="0" cy="0"/>
+          <a:chOff x="0" y="0"/>
+          <a:chExt cx="0" cy="0"/>
+        </a:xfrm>
+      </p:grpSpPr>
+      <p:sp>
+        <p:nvSpPr>
+          <p:cNvPr id="2" name="Text 0"/>
+          <p:cNvSpPr/>
+          <p:nvPr>
+            <p:ph idx="100" type="title" hasCustomPrompt="1"/>
+          </p:nvPr>
+        </p:nvSpPr>
+        <p:spPr>
+          <a:xfrm>
+            <a:off x="548640" y="320040"/>
+            <a:ext cx="11064240" cy="822960"/>
+          </a:xfrm>
+          <a:prstGeom prst="rect">
+            <a:avLst/>
+          </a:prstGeom>
+          <a:noFill/>
+          <a:ln/>
+        </p:spPr>
+        <p:txBody>
+          <a:bodyPr wrap="square" lIns="0" tIns="0" rIns="0" bIns="0" rtlCol="0" anchor="ctr"/>
+          <a:lstStyle/>
+          <a:p>
+            <a:pPr algn="l" indent="0" marL="0">
+              <a:buNone/>
+            </a:pPr>
+            <a:r>
+              <a:rPr lang="en-US" sz="3000" b="1" dirty="0">
+                <a:solidFill>
+                  <a:schemeClr val="tx2"/>
+                </a:solidFill>
+              </a:rPr>
+              <a:t>Evidence: the seeded deals live in Salesforce</a:t>
+            </a:r>
+            <a:endParaRPr lang="en-US" sz="3000" dirty="0"/>
+          </a:p>
+        </p:txBody>
+      </p:sp>
+      <p:sp>
+        <p:nvSpPr>
+          <p:cNvPr id="3" name="Accounts list frame"/>
+          <p:cNvSpPr/>
+          <p:nvPr/>
+        </p:nvSpPr>
+        <p:spPr>
+          <a:xfrm>
+            <a:off x="512064" y="1335024"/>
+            <a:ext cx="5786737" cy="3410712"/>
+          </a:xfrm>
+          <a:prstGeom prst="rect">
+            <a:avLst/>
+          </a:prstGeom>
+          <a:solidFill>
+            <a:schemeClr val="bg1"/>
+          </a:solidFill>
+          <a:ln w="12700">
+            <a:solidFill>
+              <a:schemeClr val="accent3"/>
+            </a:solidFill>
+            <a:prstDash val="solid"/>
+          </a:ln>
+        </p:spPr>
+      </p:sp>
+      <p:pic>
+        <p:nvPicPr>
+          <p:cNvPr id="4" name="Accounts list" descr="40 [Demo] accounts created through the Composite API, each with an industry and country.">    </p:cNvPr>
+          <p:cNvPicPr>
+            <a:picLocks noChangeAspect="1"/>
+          </p:cNvPicPr>
+          <p:nvPr/>
+        </p:nvPicPr>
+        <p:blipFill>
+          <a:blip r:embed="rId1"/>
+          <a:stretch>
+            <a:fillRect/>
+          </a:stretch>
+        </p:blipFill>
+        <p:spPr>
+          <a:xfrm>
+            <a:off x="548640" y="1371600"/>
+            <a:ext cx="5713585" cy="3337560"/>
+          </a:xfrm>
+          <a:prstGeom prst="rect">
+            <a:avLst/>
+          </a:prstGeom>
+        </p:spPr>
+      </p:pic>
+      <p:sp>
+        <p:nvSpPr>
+          <p:cNvPr id="5" name="Accounts list caption"/>
+          <p:cNvSpPr txBox="1"/>
+          <p:nvPr/>
+        </p:nvSpPr>
+        <p:spPr>
+          <a:xfrm>
+            <a:off x="548640" y="4892040"/>
+            <a:ext cx="5713585" cy="685800"/>
+          </a:xfrm>
+          <a:prstGeom prst="rect">
+            <a:avLst/>
+          </a:prstGeom>
+          <a:noFill/>
+          <a:ln/>
+        </p:spPr>
+        <p:txBody>
+          <a:bodyPr wrap="square" lIns="0" tIns="0" rIns="0" bIns="0" rtlCol="0" anchor="t"/>
+          <a:lstStyle/>
+          <a:p>
+            <a:pPr indent="0" marL="0">
+              <a:buNone/>
+            </a:pPr>
+            <a:r>
+              <a:rPr lang="en-US" sz="1400" dirty="0">
+                <a:solidFill>
+                  <a:schemeClr val="tx2"/>
+                </a:solidFill>
+              </a:rPr>
+              <a:t>40 [Demo] accounts created through the Composite API, each with an industry and country.</a:t>
+            </a:r>
+            <a:endParaRPr lang="en-US" sz="1400" dirty="0"/>
+          </a:p>
+        </p:txBody>
+      </p:sp>
+      <p:sp>
+        <p:nvSpPr>
+          <p:cNvPr id="6" name="Opportunities list frame"/>
+          <p:cNvSpPr/>
+          <p:nvPr/>
+        </p:nvSpPr>
+        <p:spPr>
+          <a:xfrm>
+            <a:off x="6499969" y="1335024"/>
+            <a:ext cx="5036066" cy="3410712"/>
+          </a:xfrm>
+          <a:prstGeom prst="rect">
+            <a:avLst/>
+          </a:prstGeom>
+          <a:solidFill>
+            <a:schemeClr val="bg1"/>
+          </a:solidFill>
+          <a:ln w="12700">
+            <a:solidFill>
+              <a:schemeClr val="accent3"/>
+            </a:solidFill>
+            <a:prstDash val="solid"/>
+          </a:ln>
+        </p:spPr>
+      </p:sp>
+      <p:pic>
+        <p:nvPicPr>
+          <p:cNvPr id="7" name="Opportunities list" descr="40 opportunities walked through the org's own sales stages.">    </p:cNvPr>
+          <p:cNvPicPr>
+            <a:picLocks noChangeAspect="1"/>
+          </p:cNvPicPr>
+          <p:nvPr/>
+        </p:nvPicPr>
+        <p:blipFill>
+          <a:blip r:embed="rId2"/>
+          <a:stretch>
+            <a:fillRect/>
+          </a:stretch>
+        </p:blipFill>
+        <p:spPr>
+          <a:xfrm>
+            <a:off x="6536545" y="1371600"/>
+            <a:ext cx="4962914" cy="3337560"/>
+          </a:xfrm>
+          <a:prstGeom prst="rect">
+            <a:avLst/>
+          </a:prstGeom>
+        </p:spPr>
+      </p:pic>
+      <p:sp>
+        <p:nvSpPr>
+          <p:cNvPr id="8" name="Opportunities list caption"/>
+          <p:cNvSpPr txBox="1"/>
+          <p:nvPr/>
+        </p:nvSpPr>
+        <p:spPr>
+          <a:xfrm>
+            <a:off x="6536545" y="4892040"/>
+            <a:ext cx="4962914" cy="685800"/>
+          </a:xfrm>
+          <a:prstGeom prst="rect">
+            <a:avLst/>
+          </a:prstGeom>
+          <a:noFill/>
+          <a:ln/>
+        </p:spPr>
+        <p:txBody>
+          <a:bodyPr wrap="square" lIns="0" tIns="0" rIns="0" bIns="0" rtlCol="0" anchor="t"/>
+          <a:lstStyle/>
+          <a:p>
+            <a:pPr indent="0" marL="0">
+              <a:buNone/>
+            </a:pPr>
+            <a:r>
+              <a:rPr lang="en-US" sz="1400" dirty="0">
+                <a:solidFill>
+                  <a:schemeClr val="tx2"/>
+                </a:solidFill>
+              </a:rPr>
+              <a:t>40 opportunities walked through the org's own sales stages.</a:t>
+            </a:r>
+            <a:endParaRPr lang="en-US" sz="1400" dirty="0"/>
+          </a:p>
+        </p:txBody>
+      </p:sp>
+      <p:sp>
+        <p:nvSpPr>
+          <p:cNvPr id="25" name="Slide Number Placeholder 0"/>
+          <p:cNvSpPr>
+            <a:spLocks noGrp="1"/>
+          </p:cNvSpPr>
+          <p:nvPr>
+            <p:ph type="sldNum" sz="quarter" idx="4294967295"/>
+          </p:nvPr>
+        </p:nvSpPr>
+        <p:spPr>
+          <a:xfrm>
+            <a:off x="11155680" y="6400800"/>
+            <a:ext cx="457200" cy="274320"/>
+          </a:xfrm>
+          <a:prstGeom prst="rect">
+            <a:avLst/>
+          </a:prstGeom>
+          <a:extLst>
+            <a:ext uri="{C572A759-6A51-4108-AA02-DFA0A04FC94B}">
+              <ma14:wrappingTextBoxFlag xmlns:ma14="http://schemas.microsoft.com/office/mac/drawingml/2011/main" val="0"/>
+            </a:ext>
+          </a:extLst>
+        </p:spPr>
+        <p:txBody>
+          <a:bodyPr/>
+          <a:lstStyle>
+            <a:lvl1pPr>
+              <a:defRPr sz="1000">
+                <a:solidFill>
+                  <a:schemeClr val="accent6"/>
+                </a:solidFill>
+              </a:defRPr>
+            </a:lvl1pPr>
+          </a:lstStyle>
+          <a:p>
+            <a:pPr algn="r"/>
+            <a:fld id="{F7021451-1387-4CA6-816F-3879F97B5CBC}" type="slidenum">
+              <a:rPr b="0" lang="en-US"/>
+              <a:t>12</a:t>
+            </a:fld>
+            <a:endParaRPr lang="en-US"/>
+          </a:p>
+        </p:txBody>
+      </p:sp>
+    </p:spTree>
+  </p:cSld>
+  <p:clrMapOvr>
+    <a:masterClrMapping/>
+  </p:clrMapOvr>
+</p:sld>
+</file>
+
+<file path=ppt/slides/slide13.xml><?xml version="1.0" encoding="utf-8"?>
+<p:sld xmlns:a="http://schemas.openxmlformats.org/drawingml/2006/main" xmlns:r="http://schemas.openxmlformats.org/officeDocument/2006/relationships" xmlns:p="http://schemas.openxmlformats.org/presentationml/2006/main">
+  <p:cSld name="Slide 13">
+    <p:spTree>
+      <p:nvGrpSpPr>
+        <p:cNvPr id="1" name=""/>
+        <p:cNvGrpSpPr/>
+        <p:nvPr/>
+      </p:nvGrpSpPr>
+      <p:grpSpPr>
+        <a:xfrm>
+          <a:off x="0" y="0"/>
+          <a:ext cx="0" cy="0"/>
+          <a:chOff x="0" y="0"/>
+          <a:chExt cx="0" cy="0"/>
+        </a:xfrm>
+      </p:grpSpPr>
+      <p:sp>
+        <p:nvSpPr>
+          <p:cNvPr id="2" name="Text 0"/>
+          <p:cNvSpPr/>
+          <p:nvPr>
+            <p:ph idx="100" type="title" hasCustomPrompt="1"/>
+          </p:nvPr>
+        </p:nvSpPr>
+        <p:spPr>
+          <a:xfrm>
+            <a:off x="548640" y="320040"/>
+            <a:ext cx="11064240" cy="822960"/>
+          </a:xfrm>
+          <a:prstGeom prst="rect">
+            <a:avLst/>
+          </a:prstGeom>
+          <a:noFill/>
+          <a:ln/>
+        </p:spPr>
+        <p:txBody>
+          <a:bodyPr wrap="square" lIns="0" tIns="0" rIns="0" bIns="0" rtlCol="0" anchor="ctr"/>
+          <a:lstStyle/>
+          <a:p>
+            <a:pPr algn="l" indent="0" marL="0">
+              <a:buNone/>
+            </a:pPr>
+            <a:r>
+              <a:rPr lang="en-US" sz="3000" b="1" dirty="0">
+                <a:solidFill>
+                  <a:schemeClr val="tx2"/>
+                </a:solidFill>
+              </a:rPr>
+              <a:t>Evidence: what the extract reads</a:t>
+            </a:r>
+            <a:endParaRPr lang="en-US" sz="3000" dirty="0"/>
+          </a:p>
+        </p:txBody>
+      </p:sp>
+      <p:sp>
+        <p:nvSpPr>
+          <p:cNvPr id="3" name="Stage history frame"/>
+          <p:cNvSpPr/>
+          <p:nvPr/>
+        </p:nvSpPr>
+        <p:spPr>
+          <a:xfrm>
+            <a:off x="512064" y="1335024"/>
+            <a:ext cx="5898118" cy="3182112"/>
+          </a:xfrm>
+          <a:prstGeom prst="rect">
+            <a:avLst/>
+          </a:prstGeom>
+          <a:solidFill>
+            <a:schemeClr val="bg1"/>
+          </a:solidFill>
+          <a:ln w="12700">
+            <a:solidFill>
+              <a:schemeClr val="accent3"/>
+            </a:solidFill>
+            <a:prstDash val="solid"/>
+          </a:ln>
+        </p:spPr>
+      </p:sp>
+      <p:pic>
+        <p:nvPicPr>
+          <p:cNvPr id="4" name="Stage history" descr="OpportunityHistory for one deal: Propose → Negotiate twice before Closed Won. This is the re-quote loop the dashboard measures.">    </p:cNvPr>
+          <p:cNvPicPr>
+            <a:picLocks noChangeAspect="1"/>
+          </p:cNvPicPr>
+          <p:nvPr/>
+        </p:nvPicPr>
+        <p:blipFill>
+          <a:blip r:embed="rId1"/>
+          <a:stretch>
+            <a:fillRect/>
+          </a:stretch>
+        </p:blipFill>
+        <p:spPr>
+          <a:xfrm>
+            <a:off x="548640" y="1371600"/>
+            <a:ext cx="5824966" cy="3108960"/>
+          </a:xfrm>
+          <a:prstGeom prst="rect">
+            <a:avLst/>
+          </a:prstGeom>
+        </p:spPr>
+      </p:pic>
+      <p:sp>
+        <p:nvSpPr>
+          <p:cNvPr id="5" name="Stage history caption"/>
+          <p:cNvSpPr txBox="1"/>
+          <p:nvPr/>
+        </p:nvSpPr>
+        <p:spPr>
+          <a:xfrm>
+            <a:off x="548640" y="4663440"/>
+            <a:ext cx="5824966" cy="685800"/>
+          </a:xfrm>
+          <a:prstGeom prst="rect">
+            <a:avLst/>
+          </a:prstGeom>
+          <a:noFill/>
+          <a:ln/>
+        </p:spPr>
+        <p:txBody>
+          <a:bodyPr wrap="square" lIns="0" tIns="0" rIns="0" bIns="0" rtlCol="0" anchor="t"/>
+          <a:lstStyle/>
+          <a:p>
+            <a:pPr indent="0" marL="0">
+              <a:buNone/>
+            </a:pPr>
+            <a:r>
+              <a:rPr lang="en-US" sz="1400" dirty="0">
+                <a:solidFill>
+                  <a:schemeClr val="tx2"/>
+                </a:solidFill>
+              </a:rPr>
+              <a:t>OpportunityHistory for one deal: Propose → Negotiate twice before Closed Won. This is the re-quote loop the dashboard measures.</a:t>
+            </a:r>
+            <a:endParaRPr lang="en-US" sz="1400" dirty="0"/>
+          </a:p>
+        </p:txBody>
+      </p:sp>
+      <p:sp>
+        <p:nvSpPr>
+          <p:cNvPr id="6" name="Connected apps frame"/>
+          <p:cNvSpPr/>
+          <p:nvPr/>
+        </p:nvSpPr>
+        <p:spPr>
+          <a:xfrm>
+            <a:off x="6611350" y="1335024"/>
+            <a:ext cx="4722713" cy="3182112"/>
+          </a:xfrm>
+          <a:prstGeom prst="rect">
+            <a:avLst/>
+          </a:prstGeom>
+          <a:solidFill>
+            <a:schemeClr val="bg1"/>
+          </a:solidFill>
+          <a:ln w="12700">
+            <a:solidFill>
+              <a:schemeClr val="accent3"/>
+            </a:solidFill>
+            <a:prstDash val="solid"/>
+          </a:ln>
+        </p:spPr>
+      </p:sp>
+      <p:pic>
+        <p:nvPicPr>
+          <p:cNvPr id="7" name="Connected apps" descr="Setup: Salesforce CLI installed and allowed, which unblocked API access on the new org.">    </p:cNvPr>
+          <p:cNvPicPr>
+            <a:picLocks noChangeAspect="1"/>
+          </p:cNvPicPr>
+          <p:nvPr/>
+        </p:nvPicPr>
+        <p:blipFill>
+          <a:blip r:embed="rId2"/>
+          <a:stretch>
+            <a:fillRect/>
+          </a:stretch>
+        </p:blipFill>
+        <p:spPr>
+          <a:xfrm>
+            <a:off x="6647926" y="1371600"/>
+            <a:ext cx="4649561" cy="3108960"/>
+          </a:xfrm>
+          <a:prstGeom prst="rect">
+            <a:avLst/>
+          </a:prstGeom>
+        </p:spPr>
+      </p:pic>
+      <p:sp>
+        <p:nvSpPr>
+          <p:cNvPr id="8" name="Connected apps caption"/>
+          <p:cNvSpPr txBox="1"/>
+          <p:nvPr/>
+        </p:nvSpPr>
+        <p:spPr>
+          <a:xfrm>
+            <a:off x="6647926" y="4663440"/>
+            <a:ext cx="4649561" cy="685800"/>
+          </a:xfrm>
+          <a:prstGeom prst="rect">
+            <a:avLst/>
+          </a:prstGeom>
+          <a:noFill/>
+          <a:ln/>
+        </p:spPr>
+        <p:txBody>
+          <a:bodyPr wrap="square" lIns="0" tIns="0" rIns="0" bIns="0" rtlCol="0" anchor="t"/>
+          <a:lstStyle/>
+          <a:p>
+            <a:pPr indent="0" marL="0">
+              <a:buNone/>
+            </a:pPr>
+            <a:r>
+              <a:rPr lang="en-US" sz="1400" dirty="0">
+                <a:solidFill>
+                  <a:schemeClr val="tx2"/>
+                </a:solidFill>
+              </a:rPr>
+              <a:t>Setup: Salesforce CLI installed and allowed, which unblocked API access on the new org.</a:t>
+            </a:r>
+            <a:endParaRPr lang="en-US" sz="1400" dirty="0"/>
+          </a:p>
+        </p:txBody>
+      </p:sp>
+      <p:sp>
+        <p:nvSpPr>
+          <p:cNvPr id="25" name="Slide Number Placeholder 0"/>
+          <p:cNvSpPr>
+            <a:spLocks noGrp="1"/>
+          </p:cNvSpPr>
+          <p:nvPr>
+            <p:ph type="sldNum" sz="quarter" idx="4294967295"/>
+          </p:nvPr>
+        </p:nvSpPr>
+        <p:spPr>
+          <a:xfrm>
+            <a:off x="11155680" y="6400800"/>
+            <a:ext cx="457200" cy="274320"/>
+          </a:xfrm>
+          <a:prstGeom prst="rect">
+            <a:avLst/>
+          </a:prstGeom>
+          <a:extLst>
+            <a:ext uri="{C572A759-6A51-4108-AA02-DFA0A04FC94B}">
+              <ma14:wrappingTextBoxFlag xmlns:ma14="http://schemas.microsoft.com/office/mac/drawingml/2011/main" val="0"/>
+            </a:ext>
+          </a:extLst>
+        </p:spPr>
+        <p:txBody>
+          <a:bodyPr/>
+          <a:lstStyle>
+            <a:lvl1pPr>
+              <a:defRPr sz="1000">
+                <a:solidFill>
+                  <a:schemeClr val="accent6"/>
+                </a:solidFill>
+              </a:defRPr>
+            </a:lvl1pPr>
+          </a:lstStyle>
+          <a:p>
+            <a:pPr algn="r"/>
+            <a:fld id="{F7021451-1387-4CA6-816F-3879F97B5CBC}" type="slidenum">
+              <a:rPr b="0" lang="en-US"/>
+              <a:t>13</a:t>
+            </a:fld>
+            <a:endParaRPr lang="en-US"/>
+          </a:p>
+        </p:txBody>
+      </p:sp>
+    </p:spTree>
+  </p:cSld>
+  <p:clrMapOvr>
+    <a:masterClrMapping/>
+  </p:clrMapOvr>
+</p:sld>
+</file>
+
 <file path=ppt/slides/slide2.xml><?xml version="1.0" encoding="utf-8"?>
 <p:sld xmlns:a="http://schemas.openxmlformats.org/drawingml/2006/main" xmlns:r="http://schemas.openxmlformats.org/officeDocument/2006/relationships" xmlns:p="http://schemas.openxmlformats.org/presentationml/2006/main">
   <p:cSld name="Slide 2">

--- a/deck/salesforce-process-intelligence.pptx
+++ b/deck/salesforce-process-intelligence.pptx
@@ -13,14 +13,9 @@
     <p:sldId id="261" r:id="rId7"/>
     <p:sldId id="262" r:id="rId8"/>
     <p:sldId id="263" r:id="rId9"/>
-    <p:sldId id="264" r:id="rId10"/>
-    <p:sldId id="265" r:id="rId11"/>
-    <p:sldId id="266" r:id="rId12"/>
-    <p:sldId id="267" r:id="rId13"/>
-    <p:sldId id="268" r:id="rId14"/>
   </p:sldIdLst>
   <p:notesMasterIdLst>
-    <p:notesMasterId r:id="rId15"/>
+    <p:notesMasterId r:id="rId10"/>
   </p:notesMasterIdLst>
   <p:sldSz cx="12192000" cy="6858000"/>
   <p:notesSz cx="6858000" cy="12192000"/>
@@ -119,37 +114,32 @@
   <p:extLst>
     <p:ext uri="{521415D9-36F7-43E2-AB2F-B90AF26B5E84}">
       <p14:sectionLst xmlns:p14="http://schemas.microsoft.com/office/powerpoint/2010/main">
-        <p14:section name="Opening" id="{9606f73f-5352-0c8a-1b6f-cbb2013955f7}">
+        <p14:section name="Opening" id="{6d4e9b07-343f-868e-eeea-517fcf0838c2}">
           <p14:sldIdLst>
             <p14:sldId id="256"/>
             <p14:sldId id="257"/>
           </p14:sldIdLst>
         </p14:section>
-        <p14:section name="Evidence" id="{8cf8c4fc-a79b-9a67-e68f-69c85841a29d}">
+        <p14:section name="Evidence" id="{1dd6c548-78cb-5c1c-5b65-d0d9a3c71872}">
           <p14:sldIdLst>
             <p14:sldId id="258"/>
             <p14:sldId id="259"/>
           </p14:sldIdLst>
         </p14:section>
-        <p14:section name="Value" id="{0be3f633-c937-c010-eacf-ec605e49bbc5}">
+        <p14:section name="Value" id="{c8cb17a7-d113-2aac-648b-11b8cd1aa483}">
           <p14:sldIdLst>
             <p14:sldId id="260"/>
-            <p14:sldId id="261"/>
           </p14:sldIdLst>
         </p14:section>
-        <p14:section name="Close" id="{719c482f-b896-b042-f53d-40a1b96093d9}">
+        <p14:section name="Tech setup" id="{88a7235b-cfa3-08a1-0eb0-c01130c35b4e}">
           <p14:sldIdLst>
+            <p14:sldId id="261"/>
             <p14:sldId id="262"/>
           </p14:sldIdLst>
         </p14:section>
-        <p14:section name="Tech setup" id="{fee289be-66a8-9486-f37d-5bb09447e84f}">
+        <p14:section name="Close" id="{08e747ec-fce7-5748-f1b8-2b3585baebcf}">
           <p14:sldIdLst>
             <p14:sldId id="263"/>
-            <p14:sldId id="264"/>
-            <p14:sldId id="265"/>
-            <p14:sldId id="266"/>
-            <p14:sldId id="267"/>
-            <p14:sldId id="268"/>
           </p14:sldIdLst>
         </p14:section>
       </p14:sectionLst>
@@ -1443,358 +1433,6 @@
 </p:notes>
 </file>
 
-<file path=ppt/notesSlides/notesSlide10.xml><?xml version="1.0" encoding="utf-8"?>
-<p:notes xmlns:a="http://schemas.openxmlformats.org/drawingml/2006/main" xmlns:r="http://schemas.openxmlformats.org/officeDocument/2006/relationships" xmlns:p="http://schemas.openxmlformats.org/presentationml/2006/main">
-  <p:cSld>
-    <p:spTree>
-      <p:nvGrpSpPr>
-        <p:cNvPr id="1" name=""/>
-        <p:cNvGrpSpPr/>
-        <p:nvPr/>
-      </p:nvGrpSpPr>
-      <p:grpSpPr>
-        <a:xfrm>
-          <a:off x="0" y="0"/>
-          <a:ext cx="0" cy="0"/>
-          <a:chOff x="0" y="0"/>
-          <a:chExt cx="0" cy="0"/>
-        </a:xfrm>
-      </p:grpSpPr>
-      <p:sp>
-        <p:nvSpPr>
-          <p:cNvPr id="2" name="Slide Image Placeholder 1"/>
-          <p:cNvSpPr>
-            <a:spLocks noGrp="1" noRot="1" noChangeAspect="1"/>
-          </p:cNvSpPr>
-          <p:nvPr>
-            <p:ph type="sldImg"/>
-          </p:nvPr>
-        </p:nvSpPr>
-        <p:spPr/>
-      </p:sp>
-      <p:sp>
-        <p:nvSpPr>
-          <p:cNvPr id="3" name="Notes Placeholder 2"/>
-          <p:cNvSpPr>
-            <a:spLocks noGrp="1"/>
-          </p:cNvSpPr>
-          <p:nvPr>
-            <p:ph type="body" idx="1"/>
-          </p:nvPr>
-        </p:nvSpPr>
-        <p:spPr/>
-        <p:txBody>
-          <a:bodyPr/>
-          <a:lstStyle/>
-          <a:p>
-            <a:r>
-              <a:rPr lang="en-US" dirty="0"/>
-              <a:t>Opportunity is the case notion. Leads join through the converted opportunity, tasks through WhatId. History tables write a row on any field change, so the transform keeps only real stage transitions.</a:t>
-            </a:r>
-            <a:endParaRPr lang="en-US" dirty="0"/>
-          </a:p>
-        </p:txBody>
-      </p:sp>
-      <p:sp>
-        <p:nvSpPr>
-          <p:cNvPr id="4" name="Slide Number Placeholder 3"/>
-          <p:cNvSpPr>
-            <a:spLocks noGrp="1"/>
-          </p:cNvSpPr>
-          <p:nvPr>
-            <p:ph type="sldNum" sz="quarter" idx="10"/>
-          </p:nvPr>
-        </p:nvSpPr>
-        <p:spPr/>
-        <p:txBody>
-          <a:bodyPr/>
-          <a:lstStyle/>
-          <a:p>
-            <a:fld id="{F7021451-1387-4CA6-816F-3879F97B5CBC}" type="slidenum">
-              <a:rPr lang="en-US"/>
-              <a:t>10</a:t>
-            </a:fld>
-            <a:endParaRPr lang="en-US"/>
-          </a:p>
-        </p:txBody>
-      </p:sp>
-    </p:spTree>
-    <p:extLst>
-      <p:ext uri="{BB962C8B-B14F-4D97-AF65-F5344CB8AC3E}">
-        <p14:creationId xmlns:p14="http://schemas.microsoft.com/office/powerpoint/2010/main" val="1024086991"/>
-      </p:ext>
-    </p:extLst>
-  </p:cSld>
-  <p:clrMapOvr>
-    <a:masterClrMapping/>
-  </p:clrMapOvr>
-</p:notes>
-</file>
-
-<file path=ppt/notesSlides/notesSlide11.xml><?xml version="1.0" encoding="utf-8"?>
-<p:notes xmlns:a="http://schemas.openxmlformats.org/drawingml/2006/main" xmlns:r="http://schemas.openxmlformats.org/officeDocument/2006/relationships" xmlns:p="http://schemas.openxmlformats.org/presentationml/2006/main">
-  <p:cSld>
-    <p:spTree>
-      <p:nvGrpSpPr>
-        <p:cNvPr id="1" name=""/>
-        <p:cNvGrpSpPr/>
-        <p:nvPr/>
-      </p:nvGrpSpPr>
-      <p:grpSpPr>
-        <a:xfrm>
-          <a:off x="0" y="0"/>
-          <a:ext cx="0" cy="0"/>
-          <a:chOff x="0" y="0"/>
-          <a:chExt cx="0" cy="0"/>
-        </a:xfrm>
-      </p:grpSpPr>
-      <p:sp>
-        <p:nvSpPr>
-          <p:cNvPr id="2" name="Slide Image Placeholder 1"/>
-          <p:cNvSpPr>
-            <a:spLocks noGrp="1" noRot="1" noChangeAspect="1"/>
-          </p:cNvSpPr>
-          <p:nvPr>
-            <p:ph type="sldImg"/>
-          </p:nvPr>
-        </p:nvSpPr>
-        <p:spPr/>
-      </p:sp>
-      <p:sp>
-        <p:nvSpPr>
-          <p:cNvPr id="3" name="Notes Placeholder 2"/>
-          <p:cNvSpPr>
-            <a:spLocks noGrp="1"/>
-          </p:cNvSpPr>
-          <p:nvPr>
-            <p:ph type="body" idx="1"/>
-          </p:nvPr>
-        </p:nvSpPr>
-        <p:spPr/>
-        <p:txBody>
-          <a:bodyPr/>
-          <a:lstStyle/>
-          <a:p>
-            <a:r>
-              <a:rPr lang="en-US" dirty="0"/>
-              <a:t>These are the things that would trip up a customer's first technical session; each one is solved in the repo and written up in the README.</a:t>
-            </a:r>
-            <a:endParaRPr lang="en-US" dirty="0"/>
-          </a:p>
-        </p:txBody>
-      </p:sp>
-      <p:sp>
-        <p:nvSpPr>
-          <p:cNvPr id="4" name="Slide Number Placeholder 3"/>
-          <p:cNvSpPr>
-            <a:spLocks noGrp="1"/>
-          </p:cNvSpPr>
-          <p:nvPr>
-            <p:ph type="sldNum" sz="quarter" idx="10"/>
-          </p:nvPr>
-        </p:nvSpPr>
-        <p:spPr/>
-        <p:txBody>
-          <a:bodyPr/>
-          <a:lstStyle/>
-          <a:p>
-            <a:fld id="{F7021451-1387-4CA6-816F-3879F97B5CBC}" type="slidenum">
-              <a:rPr lang="en-US"/>
-              <a:t>11</a:t>
-            </a:fld>
-            <a:endParaRPr lang="en-US"/>
-          </a:p>
-        </p:txBody>
-      </p:sp>
-    </p:spTree>
-    <p:extLst>
-      <p:ext uri="{BB962C8B-B14F-4D97-AF65-F5344CB8AC3E}">
-        <p14:creationId xmlns:p14="http://schemas.microsoft.com/office/powerpoint/2010/main" val="1024086991"/>
-      </p:ext>
-    </p:extLst>
-  </p:cSld>
-  <p:clrMapOvr>
-    <a:masterClrMapping/>
-  </p:clrMapOvr>
-</p:notes>
-</file>
-
-<file path=ppt/notesSlides/notesSlide12.xml><?xml version="1.0" encoding="utf-8"?>
-<p:notes xmlns:a="http://schemas.openxmlformats.org/drawingml/2006/main" xmlns:r="http://schemas.openxmlformats.org/officeDocument/2006/relationships" xmlns:p="http://schemas.openxmlformats.org/presentationml/2006/main">
-  <p:cSld>
-    <p:spTree>
-      <p:nvGrpSpPr>
-        <p:cNvPr id="1" name=""/>
-        <p:cNvGrpSpPr/>
-        <p:nvPr/>
-      </p:nvGrpSpPr>
-      <p:grpSpPr>
-        <a:xfrm>
-          <a:off x="0" y="0"/>
-          <a:ext cx="0" cy="0"/>
-          <a:chOff x="0" y="0"/>
-          <a:chExt cx="0" cy="0"/>
-        </a:xfrm>
-      </p:grpSpPr>
-      <p:sp>
-        <p:nvSpPr>
-          <p:cNvPr id="2" name="Slide Image Placeholder 1"/>
-          <p:cNvSpPr>
-            <a:spLocks noGrp="1" noRot="1" noChangeAspect="1"/>
-          </p:cNvSpPr>
-          <p:nvPr>
-            <p:ph type="sldImg"/>
-          </p:nvPr>
-        </p:nvSpPr>
-        <p:spPr/>
-      </p:sp>
-      <p:sp>
-        <p:nvSpPr>
-          <p:cNvPr id="3" name="Notes Placeholder 2"/>
-          <p:cNvSpPr>
-            <a:spLocks noGrp="1"/>
-          </p:cNvSpPr>
-          <p:nvPr>
-            <p:ph type="body" idx="1"/>
-          </p:nvPr>
-        </p:nvSpPr>
-        <p:spPr/>
-        <p:txBody>
-          <a:bodyPr/>
-          <a:lstStyle/>
-          <a:p>
-            <a:r>
-              <a:rPr lang="en-US" dirty="0"/>
-              <a:t>Screenshots from the trial org. Every record is tagged [Demo] and can be removed with seed.py --cleanup.</a:t>
-            </a:r>
-            <a:endParaRPr lang="en-US" dirty="0"/>
-          </a:p>
-        </p:txBody>
-      </p:sp>
-      <p:sp>
-        <p:nvSpPr>
-          <p:cNvPr id="4" name="Slide Number Placeholder 3"/>
-          <p:cNvSpPr>
-            <a:spLocks noGrp="1"/>
-          </p:cNvSpPr>
-          <p:nvPr>
-            <p:ph type="sldNum" sz="quarter" idx="10"/>
-          </p:nvPr>
-        </p:nvSpPr>
-        <p:spPr/>
-        <p:txBody>
-          <a:bodyPr/>
-          <a:lstStyle/>
-          <a:p>
-            <a:fld id="{F7021451-1387-4CA6-816F-3879F97B5CBC}" type="slidenum">
-              <a:rPr lang="en-US"/>
-              <a:t>12</a:t>
-            </a:fld>
-            <a:endParaRPr lang="en-US"/>
-          </a:p>
-        </p:txBody>
-      </p:sp>
-    </p:spTree>
-    <p:extLst>
-      <p:ext uri="{BB962C8B-B14F-4D97-AF65-F5344CB8AC3E}">
-        <p14:creationId xmlns:p14="http://schemas.microsoft.com/office/powerpoint/2010/main" val="1024086991"/>
-      </p:ext>
-    </p:extLst>
-  </p:cSld>
-  <p:clrMapOvr>
-    <a:masterClrMapping/>
-  </p:clrMapOvr>
-</p:notes>
-</file>
-
-<file path=ppt/notesSlides/notesSlide13.xml><?xml version="1.0" encoding="utf-8"?>
-<p:notes xmlns:a="http://schemas.openxmlformats.org/drawingml/2006/main" xmlns:r="http://schemas.openxmlformats.org/officeDocument/2006/relationships" xmlns:p="http://schemas.openxmlformats.org/presentationml/2006/main">
-  <p:cSld>
-    <p:spTree>
-      <p:nvGrpSpPr>
-        <p:cNvPr id="1" name=""/>
-        <p:cNvGrpSpPr/>
-        <p:nvPr/>
-      </p:nvGrpSpPr>
-      <p:grpSpPr>
-        <a:xfrm>
-          <a:off x="0" y="0"/>
-          <a:ext cx="0" cy="0"/>
-          <a:chOff x="0" y="0"/>
-          <a:chExt cx="0" cy="0"/>
-        </a:xfrm>
-      </p:grpSpPr>
-      <p:sp>
-        <p:nvSpPr>
-          <p:cNvPr id="2" name="Slide Image Placeholder 1"/>
-          <p:cNvSpPr>
-            <a:spLocks noGrp="1" noRot="1" noChangeAspect="1"/>
-          </p:cNvSpPr>
-          <p:nvPr>
-            <p:ph type="sldImg"/>
-          </p:nvPr>
-        </p:nvSpPr>
-        <p:spPr/>
-      </p:sp>
-      <p:sp>
-        <p:nvSpPr>
-          <p:cNvPr id="3" name="Notes Placeholder 2"/>
-          <p:cNvSpPr>
-            <a:spLocks noGrp="1"/>
-          </p:cNvSpPr>
-          <p:nvPr>
-            <p:ph type="body" idx="1"/>
-          </p:nvPr>
-        </p:nvSpPr>
-        <p:spPr/>
-        <p:txBody>
-          <a:bodyPr/>
-          <a:lstStyle/>
-          <a:p>
-            <a:r>
-              <a:rPr lang="en-US" dirty="0"/>
-              <a:t>The stage history is the raw material for the event log: each row becomes an event. The setup screen is the one-click fix for new orgs that block uninstalled connected apps.</a:t>
-            </a:r>
-            <a:endParaRPr lang="en-US" dirty="0"/>
-          </a:p>
-        </p:txBody>
-      </p:sp>
-      <p:sp>
-        <p:nvSpPr>
-          <p:cNvPr id="4" name="Slide Number Placeholder 3"/>
-          <p:cNvSpPr>
-            <a:spLocks noGrp="1"/>
-          </p:cNvSpPr>
-          <p:nvPr>
-            <p:ph type="sldNum" sz="quarter" idx="10"/>
-          </p:nvPr>
-        </p:nvSpPr>
-        <p:spPr/>
-        <p:txBody>
-          <a:bodyPr/>
-          <a:lstStyle/>
-          <a:p>
-            <a:fld id="{F7021451-1387-4CA6-816F-3879F97B5CBC}" type="slidenum">
-              <a:rPr lang="en-US"/>
-              <a:t>13</a:t>
-            </a:fld>
-            <a:endParaRPr lang="en-US"/>
-          </a:p>
-        </p:txBody>
-      </p:sp>
-    </p:spTree>
-    <p:extLst>
-      <p:ext uri="{BB962C8B-B14F-4D97-AF65-F5344CB8AC3E}">
-        <p14:creationId xmlns:p14="http://schemas.microsoft.com/office/powerpoint/2010/main" val="1024086991"/>
-      </p:ext>
-    </p:extLst>
-  </p:cSld>
-  <p:clrMapOvr>
-    <a:masterClrMapping/>
-  </p:clrMapOvr>
-</p:notes>
-</file>
-
 <file path=ppt/notesSlides/notesSlide2.xml><?xml version="1.0" encoding="utf-8"?>
 <p:notes xmlns:a="http://schemas.openxmlformats.org/drawingml/2006/main" xmlns:r="http://schemas.openxmlformats.org/officeDocument/2006/relationships" xmlns:p="http://schemas.openxmlformats.org/presentationml/2006/main">
   <p:cSld>
@@ -2193,7 +1831,7 @@
           <a:p>
             <a:r>
               <a:rPr lang="en-US" dirty="0"/>
-              <a:t>All of this is hosted. The repo has the pipeline, the seeding script and the README with the setup gotchas I hit on a new trial org.</a:t>
+              <a:t>Every step is real: the CLI fix in Setup, the seeded deals, the raw stage history the extract reads, and the published output. Opportunity is the case; leads join via ConvertedOpportunityId and tasks via WhatId. Trial orgs can't backdate history, so the 10-month dataset is simulated in the same object shape.</a:t>
             </a:r>
             <a:endParaRPr lang="en-US" dirty="0"/>
           </a:p>
@@ -2281,7 +1919,7 @@
           <a:p>
             <a:r>
               <a:rPr lang="en-US" dirty="0"/>
-              <a:t>Close on the decision: validate on production data, pilot one policy change, then monitor value realised in Apromore.</a:t>
+              <a:t>All of this is hosted. The repo has the pipeline, the seeding script and the README with the setup gotchas I hit on a new trial org.</a:t>
             </a:r>
             <a:endParaRPr lang="en-US" dirty="0"/>
           </a:p>
@@ -2369,7 +2007,7 @@
           <a:p>
             <a:r>
               <a:rPr lang="en-US" dirty="0"/>
-              <a:t>For the technical audience: the pipeline, the data model, and what it took to run it against a brand-new trial org.</a:t>
+              <a:t>Close on the decision: validate on production data, pilot one policy change, then monitor value realised in Apromore.</a:t>
             </a:r>
             <a:endParaRPr lang="en-US" dirty="0"/>
           </a:p>
@@ -2393,94 +2031,6 @@
             <a:fld id="{F7021451-1387-4CA6-816F-3879F97B5CBC}" type="slidenum">
               <a:rPr lang="en-US"/>
               <a:t>8</a:t>
-            </a:fld>
-            <a:endParaRPr lang="en-US"/>
-          </a:p>
-        </p:txBody>
-      </p:sp>
-    </p:spTree>
-    <p:extLst>
-      <p:ext uri="{BB962C8B-B14F-4D97-AF65-F5344CB8AC3E}">
-        <p14:creationId xmlns:p14="http://schemas.microsoft.com/office/powerpoint/2010/main" val="1024086991"/>
-      </p:ext>
-    </p:extLst>
-  </p:cSld>
-  <p:clrMapOvr>
-    <a:masterClrMapping/>
-  </p:clrMapOvr>
-</p:notes>
-</file>
-
-<file path=ppt/notesSlides/notesSlide9.xml><?xml version="1.0" encoding="utf-8"?>
-<p:notes xmlns:a="http://schemas.openxmlformats.org/drawingml/2006/main" xmlns:r="http://schemas.openxmlformats.org/officeDocument/2006/relationships" xmlns:p="http://schemas.openxmlformats.org/presentationml/2006/main">
-  <p:cSld>
-    <p:spTree>
-      <p:nvGrpSpPr>
-        <p:cNvPr id="1" name=""/>
-        <p:cNvGrpSpPr/>
-        <p:nvPr/>
-      </p:nvGrpSpPr>
-      <p:grpSpPr>
-        <a:xfrm>
-          <a:off x="0" y="0"/>
-          <a:ext cx="0" cy="0"/>
-          <a:chOff x="0" y="0"/>
-          <a:chExt cx="0" cy="0"/>
-        </a:xfrm>
-      </p:grpSpPr>
-      <p:sp>
-        <p:nvSpPr>
-          <p:cNvPr id="2" name="Slide Image Placeholder 1"/>
-          <p:cNvSpPr>
-            <a:spLocks noGrp="1" noRot="1" noChangeAspect="1"/>
-          </p:cNvSpPr>
-          <p:nvPr>
-            <p:ph type="sldImg"/>
-          </p:nvPr>
-        </p:nvSpPr>
-        <p:spPr/>
-      </p:sp>
-      <p:sp>
-        <p:nvSpPr>
-          <p:cNvPr id="3" name="Notes Placeholder 2"/>
-          <p:cNvSpPr>
-            <a:spLocks noGrp="1"/>
-          </p:cNvSpPr>
-          <p:nvPr>
-            <p:ph type="body" idx="1"/>
-          </p:nvPr>
-        </p:nvSpPr>
-        <p:spPr/>
-        <p:txBody>
-          <a:bodyPr/>
-          <a:lstStyle/>
-          <a:p>
-            <a:r>
-              <a:rPr lang="en-US" dirty="0"/>
-              <a:t>Opportunity is the case. Trial orgs can't backdate history, so the 10-month dataset is simulated in the exact Salesforce shape; the extractor runs unchanged against the live org, as the band at the bottom shows.</a:t>
-            </a:r>
-            <a:endParaRPr lang="en-US" dirty="0"/>
-          </a:p>
-        </p:txBody>
-      </p:sp>
-      <p:sp>
-        <p:nvSpPr>
-          <p:cNvPr id="4" name="Slide Number Placeholder 3"/>
-          <p:cNvSpPr>
-            <a:spLocks noGrp="1"/>
-          </p:cNvSpPr>
-          <p:nvPr>
-            <p:ph type="sldNum" sz="quarter" idx="10"/>
-          </p:nvPr>
-        </p:nvSpPr>
-        <p:spPr/>
-        <p:txBody>
-          <a:bodyPr/>
-          <a:lstStyle/>
-          <a:p>
-            <a:fld id="{F7021451-1387-4CA6-816F-3879F97B5CBC}" type="slidenum">
-              <a:rPr lang="en-US"/>
-              <a:t>9</a:t>
             </a:fld>
             <a:endParaRPr lang="en-US"/>
           </a:p>
@@ -3477,2839 +3027,6 @@
 </p:sld>
 </file>
 
-<file path=ppt/slides/slide10.xml><?xml version="1.0" encoding="utf-8"?>
-<p:sld xmlns:a="http://schemas.openxmlformats.org/drawingml/2006/main" xmlns:r="http://schemas.openxmlformats.org/officeDocument/2006/relationships" xmlns:p="http://schemas.openxmlformats.org/presentationml/2006/main">
-  <p:cSld name="Slide 10">
-    <p:spTree>
-      <p:nvGrpSpPr>
-        <p:cNvPr id="1" name=""/>
-        <p:cNvGrpSpPr/>
-        <p:nvPr/>
-      </p:nvGrpSpPr>
-      <p:grpSpPr>
-        <a:xfrm>
-          <a:off x="0" y="0"/>
-          <a:ext cx="0" cy="0"/>
-          <a:chOff x="0" y="0"/>
-          <a:chExt cx="0" cy="0"/>
-        </a:xfrm>
-      </p:grpSpPr>
-      <p:sp>
-        <p:nvSpPr>
-          <p:cNvPr id="2" name="Text 0"/>
-          <p:cNvSpPr/>
-          <p:nvPr>
-            <p:ph idx="100" type="title" hasCustomPrompt="1"/>
-          </p:nvPr>
-        </p:nvSpPr>
-        <p:spPr>
-          <a:xfrm>
-            <a:off x="548640" y="320040"/>
-            <a:ext cx="11064240" cy="822960"/>
-          </a:xfrm>
-          <a:prstGeom prst="rect">
-            <a:avLst/>
-          </a:prstGeom>
-          <a:noFill/>
-          <a:ln/>
-        </p:spPr>
-        <p:txBody>
-          <a:bodyPr wrap="square" lIns="0" tIns="0" rIns="0" bIns="0" rtlCol="0" anchor="ctr"/>
-          <a:lstStyle/>
-          <a:p>
-            <a:pPr algn="l" indent="0" marL="0">
-              <a:buNone/>
-            </a:pPr>
-            <a:r>
-              <a:rPr lang="en-US" sz="3000" b="1" dirty="0">
-                <a:solidFill>
-                  <a:schemeClr val="tx2"/>
-                </a:solidFill>
-              </a:rPr>
-              <a:t>Data model: Salesforce objects to an event log</a:t>
-            </a:r>
-            <a:endParaRPr lang="en-US" sz="3000" dirty="0"/>
-          </a:p>
-        </p:txBody>
-      </p:sp>
-      <p:graphicFrame>
-        <p:nvGraphicFramePr>
-          <p:cNvPr id="11" name="Data model table"/>
-          <p:cNvGraphicFramePr>
-            <a:graphicFrameLocks noGrp="1"/>
-          </p:cNvGraphicFramePr>
-          <p:nvPr>
-            <p:extLst>
-              <p:ext uri="{D42A27DB-BD31-4B8C-83A1-F6EECF244321}">
-                <p14:modId xmlns:p14="http://schemas.microsoft.com/office/powerpoint/2010/main" val="1579011935"/>
-              </p:ext>
-            </p:extLst>
-          </p:nvPr>
-        </p:nvGraphicFramePr>
-        <p:xfrm>
-          <a:off x="548640" y="1371600"/>
-          <a:ext cx="6949440" cy="914400"/>
-        </p:xfrm>
-        <a:graphic>
-          <a:graphicData uri="http://schemas.openxmlformats.org/drawingml/2006/table">
-            <a:tbl>
-              <a:tblPr/>
-              <a:tblGrid>
-                <a:gridCol w="1920240"/>
-                <a:gridCol w="5029200"/>
-              </a:tblGrid>
-              <a:tr h="0">
-                <a:tc>
-                  <a:txBody>
-                    <a:bodyPr/>
-                    <a:lstStyle/>
-                    <a:p>
-                      <a:pPr indent="0" marL="0">
-                        <a:buNone/>
-                      </a:pPr>
-                      <a:r>
-                        <a:rPr lang="en-US" sz="1400" b="1" dirty="0">
-                          <a:solidFill>
-                            <a:schemeClr val="bg1"/>
-                          </a:solidFill>
-                        </a:rPr>
-                        <a:t>Event log field</a:t>
-                      </a:r>
-                      <a:endParaRPr lang="en-US" sz="1400" dirty="0"/>
-                    </a:p>
-                  </a:txBody>
-                  <a:tcPr marL="109728" marR="109728" marT="54864" marB="54864" anchor="ctr">
-                    <a:lnL w="9525" cap="flat" cmpd="sng" algn="ctr">
-                      <a:solidFill>
-                        <a:srgbClr val="CFE9FE"/>
-                      </a:solidFill>
-                      <a:prstDash val="solid"/>
-                      <a:round/>
-                      <a:headEnd type="none" w="med" len="med"/>
-                      <a:tailEnd type="none" w="med" len="med"/>
-                    </a:lnL>
-                    <a:lnR w="9525" cap="flat" cmpd="sng" algn="ctr">
-                      <a:solidFill>
-                        <a:srgbClr val="CFE9FE"/>
-                      </a:solidFill>
-                      <a:prstDash val="solid"/>
-                      <a:round/>
-                      <a:headEnd type="none" w="med" len="med"/>
-                      <a:tailEnd type="none" w="med" len="med"/>
-                    </a:lnR>
-                    <a:lnT w="9525" cap="flat" cmpd="sng" algn="ctr">
-                      <a:solidFill>
-                        <a:srgbClr val="CFE9FE"/>
-                      </a:solidFill>
-                      <a:prstDash val="solid"/>
-                      <a:round/>
-                      <a:headEnd type="none" w="med" len="med"/>
-                      <a:tailEnd type="none" w="med" len="med"/>
-                    </a:lnT>
-                    <a:lnB w="9525" cap="flat" cmpd="sng" algn="ctr">
-                      <a:solidFill>
-                        <a:srgbClr val="CFE9FE"/>
-                      </a:solidFill>
-                      <a:prstDash val="solid"/>
-                      <a:round/>
-                      <a:headEnd type="none" w="med" len="med"/>
-                      <a:tailEnd type="none" w="med" len="med"/>
-                    </a:lnB>
-                    <a:solidFill>
-                      <a:schemeClr val="tx2"/>
-                    </a:solidFill>
-                  </a:tcPr>
-                </a:tc>
-                <a:tc>
-                  <a:txBody>
-                    <a:bodyPr/>
-                    <a:lstStyle/>
-                    <a:p>
-                      <a:pPr indent="0" marL="0">
-                        <a:buNone/>
-                      </a:pPr>
-                      <a:r>
-                        <a:rPr lang="en-US" sz="1400" b="1" dirty="0">
-                          <a:solidFill>
-                            <a:schemeClr val="bg1"/>
-                          </a:solidFill>
-                        </a:rPr>
-                        <a:t>Salesforce source</a:t>
-                      </a:r>
-                      <a:endParaRPr lang="en-US" sz="1400" dirty="0"/>
-                    </a:p>
-                  </a:txBody>
-                  <a:tcPr marL="109728" marR="109728" marT="54864" marB="54864" anchor="ctr">
-                    <a:lnL w="9525" cap="flat" cmpd="sng" algn="ctr">
-                      <a:solidFill>
-                        <a:srgbClr val="CFE9FE"/>
-                      </a:solidFill>
-                      <a:prstDash val="solid"/>
-                      <a:round/>
-                      <a:headEnd type="none" w="med" len="med"/>
-                      <a:tailEnd type="none" w="med" len="med"/>
-                    </a:lnL>
-                    <a:lnR w="9525" cap="flat" cmpd="sng" algn="ctr">
-                      <a:solidFill>
-                        <a:srgbClr val="CFE9FE"/>
-                      </a:solidFill>
-                      <a:prstDash val="solid"/>
-                      <a:round/>
-                      <a:headEnd type="none" w="med" len="med"/>
-                      <a:tailEnd type="none" w="med" len="med"/>
-                    </a:lnR>
-                    <a:lnT w="9525" cap="flat" cmpd="sng" algn="ctr">
-                      <a:solidFill>
-                        <a:srgbClr val="CFE9FE"/>
-                      </a:solidFill>
-                      <a:prstDash val="solid"/>
-                      <a:round/>
-                      <a:headEnd type="none" w="med" len="med"/>
-                      <a:tailEnd type="none" w="med" len="med"/>
-                    </a:lnT>
-                    <a:lnB w="9525" cap="flat" cmpd="sng" algn="ctr">
-                      <a:solidFill>
-                        <a:srgbClr val="CFE9FE"/>
-                      </a:solidFill>
-                      <a:prstDash val="solid"/>
-                      <a:round/>
-                      <a:headEnd type="none" w="med" len="med"/>
-                      <a:tailEnd type="none" w="med" len="med"/>
-                    </a:lnB>
-                    <a:solidFill>
-                      <a:schemeClr val="tx2"/>
-                    </a:solidFill>
-                  </a:tcPr>
-                </a:tc>
-              </a:tr>
-              <a:tr h="0">
-                <a:tc>
-                  <a:txBody>
-                    <a:bodyPr/>
-                    <a:lstStyle/>
-                    <a:p>
-                      <a:pPr indent="0" marL="0">
-                        <a:buNone/>
-                      </a:pPr>
-                      <a:r>
-                        <a:rPr lang="en-US" sz="1400" dirty="0">
-                          <a:solidFill>
-                            <a:schemeClr val="tx1"/>
-                          </a:solidFill>
-                        </a:rPr>
-                        <a:t>Case ID</a:t>
-                      </a:r>
-                      <a:endParaRPr lang="en-US" sz="1400" dirty="0"/>
-                    </a:p>
-                  </a:txBody>
-                  <a:tcPr marL="109728" marR="109728" marT="54864" marB="54864" anchor="ctr">
-                    <a:lnL w="9525" cap="flat" cmpd="sng" algn="ctr">
-                      <a:solidFill>
-                        <a:srgbClr val="CFE9FE"/>
-                      </a:solidFill>
-                      <a:prstDash val="solid"/>
-                      <a:round/>
-                      <a:headEnd type="none" w="med" len="med"/>
-                      <a:tailEnd type="none" w="med" len="med"/>
-                    </a:lnL>
-                    <a:lnR w="9525" cap="flat" cmpd="sng" algn="ctr">
-                      <a:solidFill>
-                        <a:srgbClr val="CFE9FE"/>
-                      </a:solidFill>
-                      <a:prstDash val="solid"/>
-                      <a:round/>
-                      <a:headEnd type="none" w="med" len="med"/>
-                      <a:tailEnd type="none" w="med" len="med"/>
-                    </a:lnR>
-                    <a:lnT w="9525" cap="flat" cmpd="sng" algn="ctr">
-                      <a:solidFill>
-                        <a:srgbClr val="CFE9FE"/>
-                      </a:solidFill>
-                      <a:prstDash val="solid"/>
-                      <a:round/>
-                      <a:headEnd type="none" w="med" len="med"/>
-                      <a:tailEnd type="none" w="med" len="med"/>
-                    </a:lnT>
-                    <a:lnB w="9525" cap="flat" cmpd="sng" algn="ctr">
-                      <a:solidFill>
-                        <a:srgbClr val="CFE9FE"/>
-                      </a:solidFill>
-                      <a:prstDash val="solid"/>
-                      <a:round/>
-                      <a:headEnd type="none" w="med" len="med"/>
-                      <a:tailEnd type="none" w="med" len="med"/>
-                    </a:lnB>
-                    <a:solidFill>
-                      <a:schemeClr val="bg2"/>
-                    </a:solidFill>
-                  </a:tcPr>
-                </a:tc>
-                <a:tc>
-                  <a:txBody>
-                    <a:bodyPr/>
-                    <a:lstStyle/>
-                    <a:p>
-                      <a:pPr indent="0" marL="0">
-                        <a:buNone/>
-                      </a:pPr>
-                      <a:r>
-                        <a:rPr lang="en-US" sz="1400" dirty="0">
-                          <a:solidFill>
-                            <a:schemeClr val="tx1"/>
-                          </a:solidFill>
-                        </a:rPr>
-                        <a:t>Opportunity.Id</a:t>
-                      </a:r>
-                      <a:endParaRPr lang="en-US" sz="1400" dirty="0"/>
-                    </a:p>
-                  </a:txBody>
-                  <a:tcPr marL="109728" marR="109728" marT="54864" marB="54864" anchor="ctr">
-                    <a:lnL w="9525" cap="flat" cmpd="sng" algn="ctr">
-                      <a:solidFill>
-                        <a:srgbClr val="CFE9FE"/>
-                      </a:solidFill>
-                      <a:prstDash val="solid"/>
-                      <a:round/>
-                      <a:headEnd type="none" w="med" len="med"/>
-                      <a:tailEnd type="none" w="med" len="med"/>
-                    </a:lnL>
-                    <a:lnR w="9525" cap="flat" cmpd="sng" algn="ctr">
-                      <a:solidFill>
-                        <a:srgbClr val="CFE9FE"/>
-                      </a:solidFill>
-                      <a:prstDash val="solid"/>
-                      <a:round/>
-                      <a:headEnd type="none" w="med" len="med"/>
-                      <a:tailEnd type="none" w="med" len="med"/>
-                    </a:lnR>
-                    <a:lnT w="9525" cap="flat" cmpd="sng" algn="ctr">
-                      <a:solidFill>
-                        <a:srgbClr val="CFE9FE"/>
-                      </a:solidFill>
-                      <a:prstDash val="solid"/>
-                      <a:round/>
-                      <a:headEnd type="none" w="med" len="med"/>
-                      <a:tailEnd type="none" w="med" len="med"/>
-                    </a:lnT>
-                    <a:lnB w="9525" cap="flat" cmpd="sng" algn="ctr">
-                      <a:solidFill>
-                        <a:srgbClr val="CFE9FE"/>
-                      </a:solidFill>
-                      <a:prstDash val="solid"/>
-                      <a:round/>
-                      <a:headEnd type="none" w="med" len="med"/>
-                      <a:tailEnd type="none" w="med" len="med"/>
-                    </a:lnB>
-                    <a:solidFill>
-                      <a:schemeClr val="bg2"/>
-                    </a:solidFill>
-                  </a:tcPr>
-                </a:tc>
-              </a:tr>
-              <a:tr h="0">
-                <a:tc>
-                  <a:txBody>
-                    <a:bodyPr/>
-                    <a:lstStyle/>
-                    <a:p>
-                      <a:pPr indent="0" marL="0">
-                        <a:buNone/>
-                      </a:pPr>
-                      <a:r>
-                        <a:rPr lang="en-US" sz="1400" dirty="0">
-                          <a:solidFill>
-                            <a:schemeClr val="tx1"/>
-                          </a:solidFill>
-                        </a:rPr>
-                        <a:t>Lead Created</a:t>
-                      </a:r>
-                      <a:endParaRPr lang="en-US" sz="1400" dirty="0"/>
-                    </a:p>
-                  </a:txBody>
-                  <a:tcPr marL="109728" marR="109728" marT="54864" marB="54864" anchor="ctr">
-                    <a:lnL w="9525" cap="flat" cmpd="sng" algn="ctr">
-                      <a:solidFill>
-                        <a:srgbClr val="CFE9FE"/>
-                      </a:solidFill>
-                      <a:prstDash val="solid"/>
-                      <a:round/>
-                      <a:headEnd type="none" w="med" len="med"/>
-                      <a:tailEnd type="none" w="med" len="med"/>
-                    </a:lnL>
-                    <a:lnR w="9525" cap="flat" cmpd="sng" algn="ctr">
-                      <a:solidFill>
-                        <a:srgbClr val="CFE9FE"/>
-                      </a:solidFill>
-                      <a:prstDash val="solid"/>
-                      <a:round/>
-                      <a:headEnd type="none" w="med" len="med"/>
-                      <a:tailEnd type="none" w="med" len="med"/>
-                    </a:lnR>
-                    <a:lnT w="9525" cap="flat" cmpd="sng" algn="ctr">
-                      <a:solidFill>
-                        <a:srgbClr val="CFE9FE"/>
-                      </a:solidFill>
-                      <a:prstDash val="solid"/>
-                      <a:round/>
-                      <a:headEnd type="none" w="med" len="med"/>
-                      <a:tailEnd type="none" w="med" len="med"/>
-                    </a:lnT>
-                    <a:lnB w="9525" cap="flat" cmpd="sng" algn="ctr">
-                      <a:solidFill>
-                        <a:srgbClr val="CFE9FE"/>
-                      </a:solidFill>
-                      <a:prstDash val="solid"/>
-                      <a:round/>
-                      <a:headEnd type="none" w="med" len="med"/>
-                      <a:tailEnd type="none" w="med" len="med"/>
-                    </a:lnB>
-                    <a:solidFill>
-                      <a:schemeClr val="bg1"/>
-                    </a:solidFill>
-                  </a:tcPr>
-                </a:tc>
-                <a:tc>
-                  <a:txBody>
-                    <a:bodyPr/>
-                    <a:lstStyle/>
-                    <a:p>
-                      <a:pPr indent="0" marL="0">
-                        <a:buNone/>
-                      </a:pPr>
-                      <a:r>
-                        <a:rPr lang="en-US" sz="1400" dirty="0">
-                          <a:solidFill>
-                            <a:schemeClr val="tx1"/>
-                          </a:solidFill>
-                        </a:rPr>
-                        <a:t>Lead.CreatedDate, joined on Lead.ConvertedOpportunityId</a:t>
-                      </a:r>
-                      <a:endParaRPr lang="en-US" sz="1400" dirty="0"/>
-                    </a:p>
-                  </a:txBody>
-                  <a:tcPr marL="109728" marR="109728" marT="54864" marB="54864" anchor="ctr">
-                    <a:lnL w="9525" cap="flat" cmpd="sng" algn="ctr">
-                      <a:solidFill>
-                        <a:srgbClr val="CFE9FE"/>
-                      </a:solidFill>
-                      <a:prstDash val="solid"/>
-                      <a:round/>
-                      <a:headEnd type="none" w="med" len="med"/>
-                      <a:tailEnd type="none" w="med" len="med"/>
-                    </a:lnL>
-                    <a:lnR w="9525" cap="flat" cmpd="sng" algn="ctr">
-                      <a:solidFill>
-                        <a:srgbClr val="CFE9FE"/>
-                      </a:solidFill>
-                      <a:prstDash val="solid"/>
-                      <a:round/>
-                      <a:headEnd type="none" w="med" len="med"/>
-                      <a:tailEnd type="none" w="med" len="med"/>
-                    </a:lnR>
-                    <a:lnT w="9525" cap="flat" cmpd="sng" algn="ctr">
-                      <a:solidFill>
-                        <a:srgbClr val="CFE9FE"/>
-                      </a:solidFill>
-                      <a:prstDash val="solid"/>
-                      <a:round/>
-                      <a:headEnd type="none" w="med" len="med"/>
-                      <a:tailEnd type="none" w="med" len="med"/>
-                    </a:lnT>
-                    <a:lnB w="9525" cap="flat" cmpd="sng" algn="ctr">
-                      <a:solidFill>
-                        <a:srgbClr val="CFE9FE"/>
-                      </a:solidFill>
-                      <a:prstDash val="solid"/>
-                      <a:round/>
-                      <a:headEnd type="none" w="med" len="med"/>
-                      <a:tailEnd type="none" w="med" len="med"/>
-                    </a:lnB>
-                    <a:solidFill>
-                      <a:schemeClr val="bg1"/>
-                    </a:solidFill>
-                  </a:tcPr>
-                </a:tc>
-              </a:tr>
-              <a:tr h="0">
-                <a:tc>
-                  <a:txBody>
-                    <a:bodyPr/>
-                    <a:lstStyle/>
-                    <a:p>
-                      <a:pPr indent="0" marL="0">
-                        <a:buNone/>
-                      </a:pPr>
-                      <a:r>
-                        <a:rPr lang="en-US" sz="1400" dirty="0">
-                          <a:solidFill>
-                            <a:schemeClr val="tx1"/>
-                          </a:solidFill>
-                        </a:rPr>
-                        <a:t>Stage activities</a:t>
-                      </a:r>
-                      <a:endParaRPr lang="en-US" sz="1400" dirty="0"/>
-                    </a:p>
-                  </a:txBody>
-                  <a:tcPr marL="109728" marR="109728" marT="54864" marB="54864" anchor="ctr">
-                    <a:lnL w="9525" cap="flat" cmpd="sng" algn="ctr">
-                      <a:solidFill>
-                        <a:srgbClr val="CFE9FE"/>
-                      </a:solidFill>
-                      <a:prstDash val="solid"/>
-                      <a:round/>
-                      <a:headEnd type="none" w="med" len="med"/>
-                      <a:tailEnd type="none" w="med" len="med"/>
-                    </a:lnL>
-                    <a:lnR w="9525" cap="flat" cmpd="sng" algn="ctr">
-                      <a:solidFill>
-                        <a:srgbClr val="CFE9FE"/>
-                      </a:solidFill>
-                      <a:prstDash val="solid"/>
-                      <a:round/>
-                      <a:headEnd type="none" w="med" len="med"/>
-                      <a:tailEnd type="none" w="med" len="med"/>
-                    </a:lnR>
-                    <a:lnT w="9525" cap="flat" cmpd="sng" algn="ctr">
-                      <a:solidFill>
-                        <a:srgbClr val="CFE9FE"/>
-                      </a:solidFill>
-                      <a:prstDash val="solid"/>
-                      <a:round/>
-                      <a:headEnd type="none" w="med" len="med"/>
-                      <a:tailEnd type="none" w="med" len="med"/>
-                    </a:lnT>
-                    <a:lnB w="9525" cap="flat" cmpd="sng" algn="ctr">
-                      <a:solidFill>
-                        <a:srgbClr val="CFE9FE"/>
-                      </a:solidFill>
-                      <a:prstDash val="solid"/>
-                      <a:round/>
-                      <a:headEnd type="none" w="med" len="med"/>
-                      <a:tailEnd type="none" w="med" len="med"/>
-                    </a:lnB>
-                    <a:solidFill>
-                      <a:schemeClr val="bg2"/>
-                    </a:solidFill>
-                  </a:tcPr>
-                </a:tc>
-                <a:tc>
-                  <a:txBody>
-                    <a:bodyPr/>
-                    <a:lstStyle/>
-                    <a:p>
-                      <a:pPr indent="0" marL="0">
-                        <a:buNone/>
-                      </a:pPr>
-                      <a:r>
-                        <a:rPr lang="en-US" sz="1400" dirty="0">
-                          <a:solidFill>
-                            <a:schemeClr val="tx1"/>
-                          </a:solidFill>
-                        </a:rPr>
-                        <a:t>OpportunityHistory.StageName and CreatedDate; repeated rows collapse to real stage changes</a:t>
-                      </a:r>
-                      <a:endParaRPr lang="en-US" sz="1400" dirty="0"/>
-                    </a:p>
-                  </a:txBody>
-                  <a:tcPr marL="109728" marR="109728" marT="54864" marB="54864" anchor="ctr">
-                    <a:lnL w="9525" cap="flat" cmpd="sng" algn="ctr">
-                      <a:solidFill>
-                        <a:srgbClr val="CFE9FE"/>
-                      </a:solidFill>
-                      <a:prstDash val="solid"/>
-                      <a:round/>
-                      <a:headEnd type="none" w="med" len="med"/>
-                      <a:tailEnd type="none" w="med" len="med"/>
-                    </a:lnL>
-                    <a:lnR w="9525" cap="flat" cmpd="sng" algn="ctr">
-                      <a:solidFill>
-                        <a:srgbClr val="CFE9FE"/>
-                      </a:solidFill>
-                      <a:prstDash val="solid"/>
-                      <a:round/>
-                      <a:headEnd type="none" w="med" len="med"/>
-                      <a:tailEnd type="none" w="med" len="med"/>
-                    </a:lnR>
-                    <a:lnT w="9525" cap="flat" cmpd="sng" algn="ctr">
-                      <a:solidFill>
-                        <a:srgbClr val="CFE9FE"/>
-                      </a:solidFill>
-                      <a:prstDash val="solid"/>
-                      <a:round/>
-                      <a:headEnd type="none" w="med" len="med"/>
-                      <a:tailEnd type="none" w="med" len="med"/>
-                    </a:lnT>
-                    <a:lnB w="9525" cap="flat" cmpd="sng" algn="ctr">
-                      <a:solidFill>
-                        <a:srgbClr val="CFE9FE"/>
-                      </a:solidFill>
-                      <a:prstDash val="solid"/>
-                      <a:round/>
-                      <a:headEnd type="none" w="med" len="med"/>
-                      <a:tailEnd type="none" w="med" len="med"/>
-                    </a:lnB>
-                    <a:solidFill>
-                      <a:schemeClr val="bg2"/>
-                    </a:solidFill>
-                  </a:tcPr>
-                </a:tc>
-              </a:tr>
-              <a:tr h="0">
-                <a:tc>
-                  <a:txBody>
-                    <a:bodyPr/>
-                    <a:lstStyle/>
-                    <a:p>
-                      <a:pPr indent="0" marL="0">
-                        <a:buNone/>
-                      </a:pPr>
-                      <a:r>
-                        <a:rPr lang="en-US" sz="1400" dirty="0">
-                          <a:solidFill>
-                            <a:schemeClr val="tx1"/>
-                          </a:solidFill>
-                        </a:rPr>
-                        <a:t>Task activities</a:t>
-                      </a:r>
-                      <a:endParaRPr lang="en-US" sz="1400" dirty="0"/>
-                    </a:p>
-                  </a:txBody>
-                  <a:tcPr marL="109728" marR="109728" marT="54864" marB="54864" anchor="ctr">
-                    <a:lnL w="9525" cap="flat" cmpd="sng" algn="ctr">
-                      <a:solidFill>
-                        <a:srgbClr val="CFE9FE"/>
-                      </a:solidFill>
-                      <a:prstDash val="solid"/>
-                      <a:round/>
-                      <a:headEnd type="none" w="med" len="med"/>
-                      <a:tailEnd type="none" w="med" len="med"/>
-                    </a:lnL>
-                    <a:lnR w="9525" cap="flat" cmpd="sng" algn="ctr">
-                      <a:solidFill>
-                        <a:srgbClr val="CFE9FE"/>
-                      </a:solidFill>
-                      <a:prstDash val="solid"/>
-                      <a:round/>
-                      <a:headEnd type="none" w="med" len="med"/>
-                      <a:tailEnd type="none" w="med" len="med"/>
-                    </a:lnR>
-                    <a:lnT w="9525" cap="flat" cmpd="sng" algn="ctr">
-                      <a:solidFill>
-                        <a:srgbClr val="CFE9FE"/>
-                      </a:solidFill>
-                      <a:prstDash val="solid"/>
-                      <a:round/>
-                      <a:headEnd type="none" w="med" len="med"/>
-                      <a:tailEnd type="none" w="med" len="med"/>
-                    </a:lnT>
-                    <a:lnB w="9525" cap="flat" cmpd="sng" algn="ctr">
-                      <a:solidFill>
-                        <a:srgbClr val="CFE9FE"/>
-                      </a:solidFill>
-                      <a:prstDash val="solid"/>
-                      <a:round/>
-                      <a:headEnd type="none" w="med" len="med"/>
-                      <a:tailEnd type="none" w="med" len="med"/>
-                    </a:lnB>
-                    <a:solidFill>
-                      <a:schemeClr val="bg1"/>
-                    </a:solidFill>
-                  </a:tcPr>
-                </a:tc>
-                <a:tc>
-                  <a:txBody>
-                    <a:bodyPr/>
-                    <a:lstStyle/>
-                    <a:p>
-                      <a:pPr indent="0" marL="0">
-                        <a:buNone/>
-                      </a:pPr>
-                      <a:r>
-                        <a:rPr lang="en-US" sz="1400" dirty="0">
-                          <a:solidFill>
-                            <a:schemeClr val="tx1"/>
-                          </a:solidFill>
-                        </a:rPr>
-                        <a:t>Task.Subject, CreatedDate → CompletedDateTime, joined on Task.WhatId</a:t>
-                      </a:r>
-                      <a:endParaRPr lang="en-US" sz="1400" dirty="0"/>
-                    </a:p>
-                  </a:txBody>
-                  <a:tcPr marL="109728" marR="109728" marT="54864" marB="54864" anchor="ctr">
-                    <a:lnL w="9525" cap="flat" cmpd="sng" algn="ctr">
-                      <a:solidFill>
-                        <a:srgbClr val="CFE9FE"/>
-                      </a:solidFill>
-                      <a:prstDash val="solid"/>
-                      <a:round/>
-                      <a:headEnd type="none" w="med" len="med"/>
-                      <a:tailEnd type="none" w="med" len="med"/>
-                    </a:lnL>
-                    <a:lnR w="9525" cap="flat" cmpd="sng" algn="ctr">
-                      <a:solidFill>
-                        <a:srgbClr val="CFE9FE"/>
-                      </a:solidFill>
-                      <a:prstDash val="solid"/>
-                      <a:round/>
-                      <a:headEnd type="none" w="med" len="med"/>
-                      <a:tailEnd type="none" w="med" len="med"/>
-                    </a:lnR>
-                    <a:lnT w="9525" cap="flat" cmpd="sng" algn="ctr">
-                      <a:solidFill>
-                        <a:srgbClr val="CFE9FE"/>
-                      </a:solidFill>
-                      <a:prstDash val="solid"/>
-                      <a:round/>
-                      <a:headEnd type="none" w="med" len="med"/>
-                      <a:tailEnd type="none" w="med" len="med"/>
-                    </a:lnT>
-                    <a:lnB w="9525" cap="flat" cmpd="sng" algn="ctr">
-                      <a:solidFill>
-                        <a:srgbClr val="CFE9FE"/>
-                      </a:solidFill>
-                      <a:prstDash val="solid"/>
-                      <a:round/>
-                      <a:headEnd type="none" w="med" len="med"/>
-                      <a:tailEnd type="none" w="med" len="med"/>
-                    </a:lnB>
-                    <a:solidFill>
-                      <a:schemeClr val="bg1"/>
-                    </a:solidFill>
-                  </a:tcPr>
-                </a:tc>
-              </a:tr>
-              <a:tr h="0">
-                <a:tc>
-                  <a:txBody>
-                    <a:bodyPr/>
-                    <a:lstStyle/>
-                    <a:p>
-                      <a:pPr indent="0" marL="0">
-                        <a:buNone/>
-                      </a:pPr>
-                      <a:r>
-                        <a:rPr lang="en-US" sz="1400" dirty="0">
-                          <a:solidFill>
-                            <a:schemeClr val="tx1"/>
-                          </a:solidFill>
-                        </a:rPr>
-                        <a:t>Resource</a:t>
-                      </a:r>
-                      <a:endParaRPr lang="en-US" sz="1400" dirty="0"/>
-                    </a:p>
-                  </a:txBody>
-                  <a:tcPr marL="109728" marR="109728" marT="54864" marB="54864" anchor="ctr">
-                    <a:lnL w="9525" cap="flat" cmpd="sng" algn="ctr">
-                      <a:solidFill>
-                        <a:srgbClr val="CFE9FE"/>
-                      </a:solidFill>
-                      <a:prstDash val="solid"/>
-                      <a:round/>
-                      <a:headEnd type="none" w="med" len="med"/>
-                      <a:tailEnd type="none" w="med" len="med"/>
-                    </a:lnL>
-                    <a:lnR w="9525" cap="flat" cmpd="sng" algn="ctr">
-                      <a:solidFill>
-                        <a:srgbClr val="CFE9FE"/>
-                      </a:solidFill>
-                      <a:prstDash val="solid"/>
-                      <a:round/>
-                      <a:headEnd type="none" w="med" len="med"/>
-                      <a:tailEnd type="none" w="med" len="med"/>
-                    </a:lnR>
-                    <a:lnT w="9525" cap="flat" cmpd="sng" algn="ctr">
-                      <a:solidFill>
-                        <a:srgbClr val="CFE9FE"/>
-                      </a:solidFill>
-                      <a:prstDash val="solid"/>
-                      <a:round/>
-                      <a:headEnd type="none" w="med" len="med"/>
-                      <a:tailEnd type="none" w="med" len="med"/>
-                    </a:lnT>
-                    <a:lnB w="9525" cap="flat" cmpd="sng" algn="ctr">
-                      <a:solidFill>
-                        <a:srgbClr val="CFE9FE"/>
-                      </a:solidFill>
-                      <a:prstDash val="solid"/>
-                      <a:round/>
-                      <a:headEnd type="none" w="med" len="med"/>
-                      <a:tailEnd type="none" w="med" len="med"/>
-                    </a:lnB>
-                    <a:solidFill>
-                      <a:schemeClr val="bg2"/>
-                    </a:solidFill>
-                  </a:tcPr>
-                </a:tc>
-                <a:tc>
-                  <a:txBody>
-                    <a:bodyPr/>
-                    <a:lstStyle/>
-                    <a:p>
-                      <a:pPr indent="0" marL="0">
-                        <a:buNone/>
-                      </a:pPr>
-                      <a:r>
-                        <a:rPr lang="en-US" sz="1400" dirty="0">
-                          <a:solidFill>
-                            <a:schemeClr val="tx1"/>
-                          </a:solidFill>
-                        </a:rPr>
-                        <a:t>CreatedBy.Name (stage changes), Owner.Name (tasks)</a:t>
-                      </a:r>
-                      <a:endParaRPr lang="en-US" sz="1400" dirty="0"/>
-                    </a:p>
-                  </a:txBody>
-                  <a:tcPr marL="109728" marR="109728" marT="54864" marB="54864" anchor="ctr">
-                    <a:lnL w="9525" cap="flat" cmpd="sng" algn="ctr">
-                      <a:solidFill>
-                        <a:srgbClr val="CFE9FE"/>
-                      </a:solidFill>
-                      <a:prstDash val="solid"/>
-                      <a:round/>
-                      <a:headEnd type="none" w="med" len="med"/>
-                      <a:tailEnd type="none" w="med" len="med"/>
-                    </a:lnL>
-                    <a:lnR w="9525" cap="flat" cmpd="sng" algn="ctr">
-                      <a:solidFill>
-                        <a:srgbClr val="CFE9FE"/>
-                      </a:solidFill>
-                      <a:prstDash val="solid"/>
-                      <a:round/>
-                      <a:headEnd type="none" w="med" len="med"/>
-                      <a:tailEnd type="none" w="med" len="med"/>
-                    </a:lnR>
-                    <a:lnT w="9525" cap="flat" cmpd="sng" algn="ctr">
-                      <a:solidFill>
-                        <a:srgbClr val="CFE9FE"/>
-                      </a:solidFill>
-                      <a:prstDash val="solid"/>
-                      <a:round/>
-                      <a:headEnd type="none" w="med" len="med"/>
-                      <a:tailEnd type="none" w="med" len="med"/>
-                    </a:lnT>
-                    <a:lnB w="9525" cap="flat" cmpd="sng" algn="ctr">
-                      <a:solidFill>
-                        <a:srgbClr val="CFE9FE"/>
-                      </a:solidFill>
-                      <a:prstDash val="solid"/>
-                      <a:round/>
-                      <a:headEnd type="none" w="med" len="med"/>
-                      <a:tailEnd type="none" w="med" len="med"/>
-                    </a:lnB>
-                    <a:solidFill>
-                      <a:schemeClr val="bg2"/>
-                    </a:solidFill>
-                  </a:tcPr>
-                </a:tc>
-              </a:tr>
-              <a:tr h="0">
-                <a:tc>
-                  <a:txBody>
-                    <a:bodyPr/>
-                    <a:lstStyle/>
-                    <a:p>
-                      <a:pPr indent="0" marL="0">
-                        <a:buNone/>
-                      </a:pPr>
-                      <a:r>
-                        <a:rPr lang="en-US" sz="1400" dirty="0">
-                          <a:solidFill>
-                            <a:schemeClr val="tx1"/>
-                          </a:solidFill>
-                        </a:rPr>
-                        <a:t>Case attributes</a:t>
-                      </a:r>
-                      <a:endParaRPr lang="en-US" sz="1400" dirty="0"/>
-                    </a:p>
-                  </a:txBody>
-                  <a:tcPr marL="109728" marR="109728" marT="54864" marB="54864" anchor="ctr">
-                    <a:lnL w="9525" cap="flat" cmpd="sng" algn="ctr">
-                      <a:solidFill>
-                        <a:srgbClr val="CFE9FE"/>
-                      </a:solidFill>
-                      <a:prstDash val="solid"/>
-                      <a:round/>
-                      <a:headEnd type="none" w="med" len="med"/>
-                      <a:tailEnd type="none" w="med" len="med"/>
-                    </a:lnL>
-                    <a:lnR w="9525" cap="flat" cmpd="sng" algn="ctr">
-                      <a:solidFill>
-                        <a:srgbClr val="CFE9FE"/>
-                      </a:solidFill>
-                      <a:prstDash val="solid"/>
-                      <a:round/>
-                      <a:headEnd type="none" w="med" len="med"/>
-                      <a:tailEnd type="none" w="med" len="med"/>
-                    </a:lnR>
-                    <a:lnT w="9525" cap="flat" cmpd="sng" algn="ctr">
-                      <a:solidFill>
-                        <a:srgbClr val="CFE9FE"/>
-                      </a:solidFill>
-                      <a:prstDash val="solid"/>
-                      <a:round/>
-                      <a:headEnd type="none" w="med" len="med"/>
-                      <a:tailEnd type="none" w="med" len="med"/>
-                    </a:lnT>
-                    <a:lnB w="9525" cap="flat" cmpd="sng" algn="ctr">
-                      <a:solidFill>
-                        <a:srgbClr val="CFE9FE"/>
-                      </a:solidFill>
-                      <a:prstDash val="solid"/>
-                      <a:round/>
-                      <a:headEnd type="none" w="med" len="med"/>
-                      <a:tailEnd type="none" w="med" len="med"/>
-                    </a:lnB>
-                    <a:solidFill>
-                      <a:schemeClr val="bg1"/>
-                    </a:solidFill>
-                  </a:tcPr>
-                </a:tc>
-                <a:tc>
-                  <a:txBody>
-                    <a:bodyPr/>
-                    <a:lstStyle/>
-                    <a:p>
-                      <a:pPr indent="0" marL="0">
-                        <a:buNone/>
-                      </a:pPr>
-                      <a:r>
-                        <a:rPr lang="en-US" sz="1400" dirty="0">
-                          <a:solidFill>
-                            <a:schemeClr val="tx1"/>
-                          </a:solidFill>
-                        </a:rPr>
-                        <a:t>Opportunity.Amount, LeadSource, IsWon; Account.Industry, BillingCountry → region</a:t>
-                      </a:r>
-                      <a:endParaRPr lang="en-US" sz="1400" dirty="0"/>
-                    </a:p>
-                  </a:txBody>
-                  <a:tcPr marL="109728" marR="109728" marT="54864" marB="54864" anchor="ctr">
-                    <a:lnL w="9525" cap="flat" cmpd="sng" algn="ctr">
-                      <a:solidFill>
-                        <a:srgbClr val="CFE9FE"/>
-                      </a:solidFill>
-                      <a:prstDash val="solid"/>
-                      <a:round/>
-                      <a:headEnd type="none" w="med" len="med"/>
-                      <a:tailEnd type="none" w="med" len="med"/>
-                    </a:lnL>
-                    <a:lnR w="9525" cap="flat" cmpd="sng" algn="ctr">
-                      <a:solidFill>
-                        <a:srgbClr val="CFE9FE"/>
-                      </a:solidFill>
-                      <a:prstDash val="solid"/>
-                      <a:round/>
-                      <a:headEnd type="none" w="med" len="med"/>
-                      <a:tailEnd type="none" w="med" len="med"/>
-                    </a:lnR>
-                    <a:lnT w="9525" cap="flat" cmpd="sng" algn="ctr">
-                      <a:solidFill>
-                        <a:srgbClr val="CFE9FE"/>
-                      </a:solidFill>
-                      <a:prstDash val="solid"/>
-                      <a:round/>
-                      <a:headEnd type="none" w="med" len="med"/>
-                      <a:tailEnd type="none" w="med" len="med"/>
-                    </a:lnT>
-                    <a:lnB w="9525" cap="flat" cmpd="sng" algn="ctr">
-                      <a:solidFill>
-                        <a:srgbClr val="CFE9FE"/>
-                      </a:solidFill>
-                      <a:prstDash val="solid"/>
-                      <a:round/>
-                      <a:headEnd type="none" w="med" len="med"/>
-                      <a:tailEnd type="none" w="med" len="med"/>
-                    </a:lnB>
-                    <a:solidFill>
-                      <a:schemeClr val="bg1"/>
-                    </a:solidFill>
-                  </a:tcPr>
-                </a:tc>
-              </a:tr>
-            </a:tbl>
-          </a:graphicData>
-        </a:graphic>
-      </p:graphicFrame>
-      <p:sp>
-        <p:nvSpPr>
-          <p:cNvPr id="4" name="Output card"/>
-          <p:cNvSpPr/>
-          <p:nvPr/>
-        </p:nvSpPr>
-        <p:spPr>
-          <a:xfrm>
-            <a:off x="7863840" y="1371600"/>
-            <a:ext cx="3749040" cy="3063240"/>
-          </a:xfrm>
-          <a:prstGeom prst="roundRect">
-            <a:avLst>
-              <a:gd name="adj" fmla="val 3582"/>
-            </a:avLst>
-          </a:prstGeom>
-          <a:solidFill>
-            <a:schemeClr val="bg2"/>
-          </a:solidFill>
-          <a:ln/>
-        </p:spPr>
-      </p:sp>
-      <p:sp>
-        <p:nvSpPr>
-          <p:cNvPr id="5" name="Output heading"/>
-          <p:cNvSpPr txBox="1"/>
-          <p:nvPr/>
-        </p:nvSpPr>
-        <p:spPr>
-          <a:xfrm>
-            <a:off x="8092440" y="1554480"/>
-            <a:ext cx="3291840" cy="365760"/>
-          </a:xfrm>
-          <a:prstGeom prst="rect">
-            <a:avLst/>
-          </a:prstGeom>
-          <a:noFill/>
-          <a:ln/>
-        </p:spPr>
-        <p:txBody>
-          <a:bodyPr wrap="square" lIns="0" tIns="0" rIns="0" bIns="0" rtlCol="0" anchor="t"/>
-          <a:lstStyle/>
-          <a:p>
-            <a:pPr indent="0" marL="0">
-              <a:buNone/>
-            </a:pPr>
-            <a:r>
-              <a:rPr lang="en-US" sz="1600" b="1" dirty="0">
-                <a:solidFill>
-                  <a:schemeClr val="tx2"/>
-                </a:solidFill>
-              </a:rPr>
-              <a:t>Output: one row per event</a:t>
-            </a:r>
-            <a:endParaRPr lang="en-US" sz="1600" dirty="0"/>
-          </a:p>
-        </p:txBody>
-      </p:sp>
-      <p:sp>
-        <p:nvSpPr>
-          <p:cNvPr id="6" name="Output columns"/>
-          <p:cNvSpPr txBox="1"/>
-          <p:nvPr/>
-        </p:nvSpPr>
-        <p:spPr>
-          <a:xfrm>
-            <a:off x="8092440" y="1965960"/>
-            <a:ext cx="3291840" cy="914400"/>
-          </a:xfrm>
-          <a:prstGeom prst="rect">
-            <a:avLst/>
-          </a:prstGeom>
-          <a:noFill/>
-          <a:ln/>
-        </p:spPr>
-        <p:txBody>
-          <a:bodyPr wrap="square" lIns="0" tIns="0" rIns="0" bIns="0" rtlCol="0" anchor="t"/>
-          <a:lstStyle/>
-          <a:p>
-            <a:pPr indent="0" marL="0">
-              <a:buNone/>
-            </a:pPr>
-            <a:r>
-              <a:rPr lang="en-US" sz="1200" dirty="0">
-                <a:solidFill>
-                  <a:schemeClr val="accent6"/>
-                </a:solidFill>
-              </a:rPr>
-              <a:t>case_id, activity, start_time, end_time, resource, source_object, region, industry, lead_source, amount, outcome</a:t>
-            </a:r>
-            <a:endParaRPr lang="en-US" sz="1200" dirty="0"/>
-          </a:p>
-        </p:txBody>
-      </p:sp>
-      <p:sp>
-        <p:nvSpPr>
-          <p:cNvPr id="7" name="Output sample"/>
-          <p:cNvSpPr txBox="1"/>
-          <p:nvPr/>
-        </p:nvSpPr>
-        <p:spPr>
-          <a:xfrm>
-            <a:off x="8092440" y="2788920"/>
-            <a:ext cx="3291840" cy="777240"/>
-          </a:xfrm>
-          <a:prstGeom prst="rect">
-            <a:avLst/>
-          </a:prstGeom>
-          <a:noFill/>
-          <a:ln/>
-        </p:spPr>
-        <p:txBody>
-          <a:bodyPr wrap="square" lIns="0" tIns="0" rIns="0" bIns="0" rtlCol="0" anchor="t"/>
-          <a:lstStyle/>
-          <a:p>
-            <a:pPr indent="0" marL="0">
-              <a:buNone/>
-            </a:pPr>
-            <a:r>
-              <a:rPr lang="en-US" sz="1200" dirty="0">
-                <a:solidFill>
-                  <a:schemeClr val="tx2"/>
-                </a:solidFill>
-                <a:latin typeface="Courier New" pitchFamily="34" charset="0"/>
-                <a:ea typeface="Courier New" pitchFamily="34" charset="-122"/>
-                <a:cs typeface="Courier New" pitchFamily="34" charset="-120"/>
-              </a:rPr>
-              <a:t>006WV…YAB  Qualify</a:t>
-            </a:r>
-            <a:endParaRPr lang="en-US" sz="1200" dirty="0"/>
-          </a:p>
-          <a:p>
-            <a:pPr indent="0" marL="0">
-              <a:buNone/>
-            </a:pPr>
-            <a:r>
-              <a:rPr lang="en-US" sz="1200" dirty="0">
-                <a:solidFill>
-                  <a:schemeClr val="tx2"/>
-                </a:solidFill>
-                <a:latin typeface="Courier New" pitchFamily="34" charset="0"/>
-                <a:ea typeface="Courier New" pitchFamily="34" charset="-122"/>
-                <a:cs typeface="Courier New" pitchFamily="34" charset="-120"/>
-              </a:rPr>
-              <a:t>006WV…YAB  Discovery Call</a:t>
-            </a:r>
-            <a:endParaRPr lang="en-US" sz="1200" dirty="0"/>
-          </a:p>
-          <a:p>
-            <a:pPr indent="0" marL="0">
-              <a:buNone/>
-            </a:pPr>
-            <a:r>
-              <a:rPr lang="en-US" sz="1200" dirty="0">
-                <a:solidFill>
-                  <a:schemeClr val="tx2"/>
-                </a:solidFill>
-                <a:latin typeface="Courier New" pitchFamily="34" charset="0"/>
-                <a:ea typeface="Courier New" pitchFamily="34" charset="-122"/>
-                <a:cs typeface="Courier New" pitchFamily="34" charset="-120"/>
-              </a:rPr>
-              <a:t>006WV…YAB  Closed Lost</a:t>
-            </a:r>
-            <a:endParaRPr lang="en-US" sz="1200" dirty="0"/>
-          </a:p>
-        </p:txBody>
-      </p:sp>
-      <p:sp>
-        <p:nvSpPr>
-          <p:cNvPr id="8" name="Output formats"/>
-          <p:cNvSpPr txBox="1"/>
-          <p:nvPr/>
-        </p:nvSpPr>
-        <p:spPr>
-          <a:xfrm>
-            <a:off x="8092440" y="3657600"/>
-            <a:ext cx="3291840" cy="685800"/>
-          </a:xfrm>
-          <a:prstGeom prst="rect">
-            <a:avLst/>
-          </a:prstGeom>
-          <a:noFill/>
-          <a:ln/>
-        </p:spPr>
-        <p:txBody>
-          <a:bodyPr wrap="square" lIns="0" tIns="0" rIns="0" bIns="0" rtlCol="0" anchor="t"/>
-          <a:lstStyle/>
-          <a:p>
-            <a:pPr indent="0" marL="0">
-              <a:buNone/>
-            </a:pPr>
-            <a:r>
-              <a:rPr lang="en-US" sz="1400" dirty="0">
-                <a:solidFill>
-                  <a:schemeClr val="tx1"/>
-                </a:solidFill>
-              </a:rPr>
-              <a:t>Written as CSV for Apromore's import and as IEEE XES with start/complete lifecycle events.</a:t>
-            </a:r>
-            <a:endParaRPr lang="en-US" sz="1400" dirty="0"/>
-          </a:p>
-        </p:txBody>
-      </p:sp>
-      <p:sp>
-        <p:nvSpPr>
-          <p:cNvPr id="25" name="Slide Number Placeholder 0"/>
-          <p:cNvSpPr>
-            <a:spLocks noGrp="1"/>
-          </p:cNvSpPr>
-          <p:nvPr>
-            <p:ph type="sldNum" sz="quarter" idx="4294967295"/>
-          </p:nvPr>
-        </p:nvSpPr>
-        <p:spPr>
-          <a:xfrm>
-            <a:off x="11155680" y="6400800"/>
-            <a:ext cx="457200" cy="274320"/>
-          </a:xfrm>
-          <a:prstGeom prst="rect">
-            <a:avLst/>
-          </a:prstGeom>
-          <a:extLst>
-            <a:ext uri="{C572A759-6A51-4108-AA02-DFA0A04FC94B}">
-              <ma14:wrappingTextBoxFlag xmlns:ma14="http://schemas.microsoft.com/office/mac/drawingml/2011/main" val="0"/>
-            </a:ext>
-          </a:extLst>
-        </p:spPr>
-        <p:txBody>
-          <a:bodyPr/>
-          <a:lstStyle>
-            <a:lvl1pPr>
-              <a:defRPr sz="1000">
-                <a:solidFill>
-                  <a:schemeClr val="accent6"/>
-                </a:solidFill>
-              </a:defRPr>
-            </a:lvl1pPr>
-          </a:lstStyle>
-          <a:p>
-            <a:pPr algn="r"/>
-            <a:fld id="{F7021451-1387-4CA6-816F-3879F97B5CBC}" type="slidenum">
-              <a:rPr b="0" lang="en-US"/>
-              <a:t>10</a:t>
-            </a:fld>
-            <a:endParaRPr lang="en-US"/>
-          </a:p>
-        </p:txBody>
-      </p:sp>
-    </p:spTree>
-  </p:cSld>
-  <p:clrMapOvr>
-    <a:masterClrMapping/>
-  </p:clrMapOvr>
-</p:sld>
-</file>
-
-<file path=ppt/slides/slide11.xml><?xml version="1.0" encoding="utf-8"?>
-<p:sld xmlns:a="http://schemas.openxmlformats.org/drawingml/2006/main" xmlns:r="http://schemas.openxmlformats.org/officeDocument/2006/relationships" xmlns:p="http://schemas.openxmlformats.org/presentationml/2006/main">
-  <p:cSld name="Slide 11">
-    <p:spTree>
-      <p:nvGrpSpPr>
-        <p:cNvPr id="1" name=""/>
-        <p:cNvGrpSpPr/>
-        <p:nvPr/>
-      </p:nvGrpSpPr>
-      <p:grpSpPr>
-        <a:xfrm>
-          <a:off x="0" y="0"/>
-          <a:ext cx="0" cy="0"/>
-          <a:chOff x="0" y="0"/>
-          <a:chExt cx="0" cy="0"/>
-        </a:xfrm>
-      </p:grpSpPr>
-      <p:sp>
-        <p:nvSpPr>
-          <p:cNvPr id="2" name="Text 0"/>
-          <p:cNvSpPr/>
-          <p:nvPr>
-            <p:ph idx="100" type="title" hasCustomPrompt="1"/>
-          </p:nvPr>
-        </p:nvSpPr>
-        <p:spPr>
-          <a:xfrm>
-            <a:off x="548640" y="320040"/>
-            <a:ext cx="11064240" cy="822960"/>
-          </a:xfrm>
-          <a:prstGeom prst="rect">
-            <a:avLst/>
-          </a:prstGeom>
-          <a:noFill/>
-          <a:ln/>
-        </p:spPr>
-        <p:txBody>
-          <a:bodyPr wrap="square" lIns="0" tIns="0" rIns="0" bIns="0" rtlCol="0" anchor="ctr"/>
-          <a:lstStyle/>
-          <a:p>
-            <a:pPr algn="l" indent="0" marL="0">
-              <a:buNone/>
-            </a:pPr>
-            <a:r>
-              <a:rPr lang="en-US" sz="3000" b="1" dirty="0">
-                <a:solidFill>
-                  <a:schemeClr val="tx2"/>
-                </a:solidFill>
-              </a:rPr>
-              <a:t>Running it against a brand-new trial org</a:t>
-            </a:r>
-            <a:endParaRPr lang="en-US" sz="3000" dirty="0"/>
-          </a:p>
-        </p:txBody>
-      </p:sp>
-      <p:sp>
-        <p:nvSpPr>
-          <p:cNvPr id="3" name="Steps heading"/>
-          <p:cNvSpPr txBox="1"/>
-          <p:nvPr/>
-        </p:nvSpPr>
-        <p:spPr>
-          <a:xfrm>
-            <a:off x="548640" y="1325880"/>
-            <a:ext cx="5120640" cy="365760"/>
-          </a:xfrm>
-          <a:prstGeom prst="rect">
-            <a:avLst/>
-          </a:prstGeom>
-          <a:noFill/>
-          <a:ln/>
-        </p:spPr>
-        <p:txBody>
-          <a:bodyPr wrap="square" lIns="0" tIns="0" rIns="0" bIns="0" rtlCol="0" anchor="t"/>
-          <a:lstStyle/>
-          <a:p>
-            <a:pPr indent="0" marL="0">
-              <a:buNone/>
-            </a:pPr>
-            <a:r>
-              <a:rPr lang="en-US" sz="1600" b="1" dirty="0">
-                <a:solidFill>
-                  <a:schemeClr val="accent6"/>
-                </a:solidFill>
-              </a:rPr>
-              <a:t>Steps</a:t>
-            </a:r>
-            <a:endParaRPr lang="en-US" sz="1600" dirty="0"/>
-          </a:p>
-        </p:txBody>
-      </p:sp>
-      <p:sp>
-        <p:nvSpPr>
-          <p:cNvPr id="4" name="Run step 1 marker"/>
-          <p:cNvSpPr/>
-          <p:nvPr/>
-        </p:nvSpPr>
-        <p:spPr>
-          <a:xfrm>
-            <a:off x="548640" y="1828800"/>
-            <a:ext cx="457200" cy="457200"/>
-          </a:xfrm>
-          <a:prstGeom prst="ellipse">
-            <a:avLst/>
-          </a:prstGeom>
-          <a:solidFill>
-            <a:schemeClr val="accent1"/>
-          </a:solidFill>
-          <a:ln/>
-        </p:spPr>
-      </p:sp>
-      <p:sp>
-        <p:nvSpPr>
-          <p:cNvPr id="5" name="Run step 1 number"/>
-          <p:cNvSpPr txBox="1"/>
-          <p:nvPr/>
-        </p:nvSpPr>
-        <p:spPr>
-          <a:xfrm>
-            <a:off x="548640" y="1828800"/>
-            <a:ext cx="457200" cy="457200"/>
-          </a:xfrm>
-          <a:prstGeom prst="rect">
-            <a:avLst/>
-          </a:prstGeom>
-          <a:noFill/>
-          <a:ln/>
-        </p:spPr>
-        <p:txBody>
-          <a:bodyPr wrap="square" lIns="0" tIns="0" rIns="0" bIns="0" rtlCol="0" anchor="ctr"/>
-          <a:lstStyle/>
-          <a:p>
-            <a:pPr algn="ctr" indent="0" marL="0">
-              <a:buNone/>
-            </a:pPr>
-            <a:r>
-              <a:rPr lang="en-US" sz="1600" b="1" dirty="0">
-                <a:solidFill>
-                  <a:schemeClr val="bg1"/>
-                </a:solidFill>
-              </a:rPr>
-              <a:t>1</a:t>
-            </a:r>
-            <a:endParaRPr lang="en-US" sz="1600" dirty="0"/>
-          </a:p>
-        </p:txBody>
-      </p:sp>
-      <p:sp>
-        <p:nvSpPr>
-          <p:cNvPr id="6" name="Run step 1 title"/>
-          <p:cNvSpPr txBox="1"/>
-          <p:nvPr/>
-        </p:nvSpPr>
-        <p:spPr>
-          <a:xfrm>
-            <a:off x="1188720" y="1783080"/>
-            <a:ext cx="4480560" cy="320040"/>
-          </a:xfrm>
-          <a:prstGeom prst="rect">
-            <a:avLst/>
-          </a:prstGeom>
-          <a:noFill/>
-          <a:ln/>
-        </p:spPr>
-        <p:txBody>
-          <a:bodyPr wrap="square" lIns="0" tIns="0" rIns="0" bIns="0" rtlCol="0" anchor="t"/>
-          <a:lstStyle/>
-          <a:p>
-            <a:pPr indent="0" marL="0">
-              <a:buNone/>
-            </a:pPr>
-            <a:r>
-              <a:rPr lang="en-US" sz="1600" b="1" dirty="0">
-                <a:solidFill>
-                  <a:schemeClr val="tx2"/>
-                </a:solidFill>
-              </a:rPr>
-              <a:t>Authenticate</a:t>
-            </a:r>
-            <a:endParaRPr lang="en-US" sz="1600" dirty="0"/>
-          </a:p>
-        </p:txBody>
-      </p:sp>
-      <p:sp>
-        <p:nvSpPr>
-          <p:cNvPr id="7" name="Run step 1 body"/>
-          <p:cNvSpPr txBox="1"/>
-          <p:nvPr/>
-        </p:nvSpPr>
-        <p:spPr>
-          <a:xfrm>
-            <a:off x="1188720" y="2130552"/>
-            <a:ext cx="4480560" cy="594360"/>
-          </a:xfrm>
-          <a:prstGeom prst="rect">
-            <a:avLst/>
-          </a:prstGeom>
-          <a:noFill/>
-          <a:ln/>
-        </p:spPr>
-        <p:txBody>
-          <a:bodyPr wrap="square" lIns="0" tIns="0" rIns="0" bIns="0" rtlCol="0" anchor="t"/>
-          <a:lstStyle/>
-          <a:p>
-            <a:pPr indent="0" marL="0">
-              <a:buNone/>
-            </a:pPr>
-            <a:r>
-              <a:rPr lang="en-US" sz="1400" dirty="0">
-                <a:solidFill>
-                  <a:schemeClr val="tx1"/>
-                </a:solidFill>
-              </a:rPr>
-              <a:t>sf org login web: the CLI session signs every API call; no stored passwords.</a:t>
-            </a:r>
-            <a:endParaRPr lang="en-US" sz="1400" dirty="0"/>
-          </a:p>
-        </p:txBody>
-      </p:sp>
-      <p:sp>
-        <p:nvSpPr>
-          <p:cNvPr id="8" name="Run step 2 marker"/>
-          <p:cNvSpPr/>
-          <p:nvPr/>
-        </p:nvSpPr>
-        <p:spPr>
-          <a:xfrm>
-            <a:off x="548640" y="2880360"/>
-            <a:ext cx="457200" cy="457200"/>
-          </a:xfrm>
-          <a:prstGeom prst="ellipse">
-            <a:avLst/>
-          </a:prstGeom>
-          <a:solidFill>
-            <a:schemeClr val="accent1"/>
-          </a:solidFill>
-          <a:ln/>
-        </p:spPr>
-      </p:sp>
-      <p:sp>
-        <p:nvSpPr>
-          <p:cNvPr id="9" name="Run step 2 number"/>
-          <p:cNvSpPr txBox="1"/>
-          <p:nvPr/>
-        </p:nvSpPr>
-        <p:spPr>
-          <a:xfrm>
-            <a:off x="548640" y="2880360"/>
-            <a:ext cx="457200" cy="457200"/>
-          </a:xfrm>
-          <a:prstGeom prst="rect">
-            <a:avLst/>
-          </a:prstGeom>
-          <a:noFill/>
-          <a:ln/>
-        </p:spPr>
-        <p:txBody>
-          <a:bodyPr wrap="square" lIns="0" tIns="0" rIns="0" bIns="0" rtlCol="0" anchor="ctr"/>
-          <a:lstStyle/>
-          <a:p>
-            <a:pPr algn="ctr" indent="0" marL="0">
-              <a:buNone/>
-            </a:pPr>
-            <a:r>
-              <a:rPr lang="en-US" sz="1600" b="1" dirty="0">
-                <a:solidFill>
-                  <a:schemeClr val="bg1"/>
-                </a:solidFill>
-              </a:rPr>
-              <a:t>2</a:t>
-            </a:r>
-            <a:endParaRPr lang="en-US" sz="1600" dirty="0"/>
-          </a:p>
-        </p:txBody>
-      </p:sp>
-      <p:sp>
-        <p:nvSpPr>
-          <p:cNvPr id="10" name="Run step 2 title"/>
-          <p:cNvSpPr txBox="1"/>
-          <p:nvPr/>
-        </p:nvSpPr>
-        <p:spPr>
-          <a:xfrm>
-            <a:off x="1188720" y="2834640"/>
-            <a:ext cx="4480560" cy="320040"/>
-          </a:xfrm>
-          <a:prstGeom prst="rect">
-            <a:avLst/>
-          </a:prstGeom>
-          <a:noFill/>
-          <a:ln/>
-        </p:spPr>
-        <p:txBody>
-          <a:bodyPr wrap="square" lIns="0" tIns="0" rIns="0" bIns="0" rtlCol="0" anchor="t"/>
-          <a:lstStyle/>
-          <a:p>
-            <a:pPr indent="0" marL="0">
-              <a:buNone/>
-            </a:pPr>
-            <a:r>
-              <a:rPr lang="en-US" sz="1600" b="1" dirty="0">
-                <a:solidFill>
-                  <a:schemeClr val="tx2"/>
-                </a:solidFill>
-              </a:rPr>
-              <a:t>Seed</a:t>
-            </a:r>
-            <a:endParaRPr lang="en-US" sz="1600" dirty="0"/>
-          </a:p>
-        </p:txBody>
-      </p:sp>
-      <p:sp>
-        <p:nvSpPr>
-          <p:cNvPr id="11" name="Run step 2 body"/>
-          <p:cNvSpPr txBox="1"/>
-          <p:nvPr/>
-        </p:nvSpPr>
-        <p:spPr>
-          <a:xfrm>
-            <a:off x="1188720" y="3182112"/>
-            <a:ext cx="4480560" cy="594360"/>
-          </a:xfrm>
-          <a:prstGeom prst="rect">
-            <a:avLst/>
-          </a:prstGeom>
-          <a:noFill/>
-          <a:ln/>
-        </p:spPr>
-        <p:txBody>
-          <a:bodyPr wrap="square" lIns="0" tIns="0" rIns="0" bIns="0" rtlCol="0" anchor="t"/>
-          <a:lstStyle/>
-          <a:p>
-            <a:pPr indent="0" marL="0">
-              <a:buNone/>
-            </a:pPr>
-            <a:r>
-              <a:rPr lang="en-US" sz="1400" dirty="0">
-                <a:solidFill>
-                  <a:schemeClr val="tx1"/>
-                </a:solidFill>
-              </a:rPr>
-              <a:t>seed.py loads 40 [Demo] deals and walks them through stages via the Composite API.</a:t>
-            </a:r>
-            <a:endParaRPr lang="en-US" sz="1400" dirty="0"/>
-          </a:p>
-        </p:txBody>
-      </p:sp>
-      <p:sp>
-        <p:nvSpPr>
-          <p:cNvPr id="12" name="Run step 3 marker"/>
-          <p:cNvSpPr/>
-          <p:nvPr/>
-        </p:nvSpPr>
-        <p:spPr>
-          <a:xfrm>
-            <a:off x="548640" y="3931920"/>
-            <a:ext cx="457200" cy="457200"/>
-          </a:xfrm>
-          <a:prstGeom prst="ellipse">
-            <a:avLst/>
-          </a:prstGeom>
-          <a:solidFill>
-            <a:schemeClr val="accent1"/>
-          </a:solidFill>
-          <a:ln/>
-        </p:spPr>
-      </p:sp>
-      <p:sp>
-        <p:nvSpPr>
-          <p:cNvPr id="13" name="Run step 3 number"/>
-          <p:cNvSpPr txBox="1"/>
-          <p:nvPr/>
-        </p:nvSpPr>
-        <p:spPr>
-          <a:xfrm>
-            <a:off x="548640" y="3931920"/>
-            <a:ext cx="457200" cy="457200"/>
-          </a:xfrm>
-          <a:prstGeom prst="rect">
-            <a:avLst/>
-          </a:prstGeom>
-          <a:noFill/>
-          <a:ln/>
-        </p:spPr>
-        <p:txBody>
-          <a:bodyPr wrap="square" lIns="0" tIns="0" rIns="0" bIns="0" rtlCol="0" anchor="ctr"/>
-          <a:lstStyle/>
-          <a:p>
-            <a:pPr algn="ctr" indent="0" marL="0">
-              <a:buNone/>
-            </a:pPr>
-            <a:r>
-              <a:rPr lang="en-US" sz="1600" b="1" dirty="0">
-                <a:solidFill>
-                  <a:schemeClr val="bg1"/>
-                </a:solidFill>
-              </a:rPr>
-              <a:t>3</a:t>
-            </a:r>
-            <a:endParaRPr lang="en-US" sz="1600" dirty="0"/>
-          </a:p>
-        </p:txBody>
-      </p:sp>
-      <p:sp>
-        <p:nvSpPr>
-          <p:cNvPr id="14" name="Run step 3 title"/>
-          <p:cNvSpPr txBox="1"/>
-          <p:nvPr/>
-        </p:nvSpPr>
-        <p:spPr>
-          <a:xfrm>
-            <a:off x="1188720" y="3886200"/>
-            <a:ext cx="4480560" cy="320040"/>
-          </a:xfrm>
-          <a:prstGeom prst="rect">
-            <a:avLst/>
-          </a:prstGeom>
-          <a:noFill/>
-          <a:ln/>
-        </p:spPr>
-        <p:txBody>
-          <a:bodyPr wrap="square" lIns="0" tIns="0" rIns="0" bIns="0" rtlCol="0" anchor="t"/>
-          <a:lstStyle/>
-          <a:p>
-            <a:pPr indent="0" marL="0">
-              <a:buNone/>
-            </a:pPr>
-            <a:r>
-              <a:rPr lang="en-US" sz="1600" b="1" dirty="0">
-                <a:solidFill>
-                  <a:schemeClr val="tx2"/>
-                </a:solidFill>
-              </a:rPr>
-              <a:t>Extract and mine</a:t>
-            </a:r>
-            <a:endParaRPr lang="en-US" sz="1600" dirty="0"/>
-          </a:p>
-        </p:txBody>
-      </p:sp>
-      <p:sp>
-        <p:nvSpPr>
-          <p:cNvPr id="15" name="Run step 3 body"/>
-          <p:cNvSpPr txBox="1"/>
-          <p:nvPr/>
-        </p:nvSpPr>
-        <p:spPr>
-          <a:xfrm>
-            <a:off x="1188720" y="4233672"/>
-            <a:ext cx="4480560" cy="594360"/>
-          </a:xfrm>
-          <a:prstGeom prst="rect">
-            <a:avLst/>
-          </a:prstGeom>
-          <a:noFill/>
-          <a:ln/>
-        </p:spPr>
-        <p:txBody>
-          <a:bodyPr wrap="square" lIns="0" tIns="0" rIns="0" bIns="0" rtlCol="0" anchor="t"/>
-          <a:lstStyle/>
-          <a:p>
-            <a:pPr indent="0" marL="0">
-              <a:buNone/>
-            </a:pPr>
-            <a:r>
-              <a:rPr lang="en-US" sz="1400" dirty="0">
-                <a:solidFill>
-                  <a:schemeClr val="tx1"/>
-                </a:solidFill>
-              </a:rPr>
-              <a:t>extract.py → transform.py → mine.py write the event log and insights.</a:t>
-            </a:r>
-            <a:endParaRPr lang="en-US" sz="1400" dirty="0"/>
-          </a:p>
-        </p:txBody>
-      </p:sp>
-      <p:sp>
-        <p:nvSpPr>
-          <p:cNvPr id="16" name="Run step 4 marker"/>
-          <p:cNvSpPr/>
-          <p:nvPr/>
-        </p:nvSpPr>
-        <p:spPr>
-          <a:xfrm>
-            <a:off x="548640" y="4983480"/>
-            <a:ext cx="457200" cy="457200"/>
-          </a:xfrm>
-          <a:prstGeom prst="ellipse">
-            <a:avLst/>
-          </a:prstGeom>
-          <a:solidFill>
-            <a:schemeClr val="accent1"/>
-          </a:solidFill>
-          <a:ln/>
-        </p:spPr>
-      </p:sp>
-      <p:sp>
-        <p:nvSpPr>
-          <p:cNvPr id="17" name="Run step 4 number"/>
-          <p:cNvSpPr txBox="1"/>
-          <p:nvPr/>
-        </p:nvSpPr>
-        <p:spPr>
-          <a:xfrm>
-            <a:off x="548640" y="4983480"/>
-            <a:ext cx="457200" cy="457200"/>
-          </a:xfrm>
-          <a:prstGeom prst="rect">
-            <a:avLst/>
-          </a:prstGeom>
-          <a:noFill/>
-          <a:ln/>
-        </p:spPr>
-        <p:txBody>
-          <a:bodyPr wrap="square" lIns="0" tIns="0" rIns="0" bIns="0" rtlCol="0" anchor="ctr"/>
-          <a:lstStyle/>
-          <a:p>
-            <a:pPr algn="ctr" indent="0" marL="0">
-              <a:buNone/>
-            </a:pPr>
-            <a:r>
-              <a:rPr lang="en-US" sz="1600" b="1" dirty="0">
-                <a:solidFill>
-                  <a:schemeClr val="bg1"/>
-                </a:solidFill>
-              </a:rPr>
-              <a:t>4</a:t>
-            </a:r>
-            <a:endParaRPr lang="en-US" sz="1600" dirty="0"/>
-          </a:p>
-        </p:txBody>
-      </p:sp>
-      <p:sp>
-        <p:nvSpPr>
-          <p:cNvPr id="18" name="Run step 4 title"/>
-          <p:cNvSpPr txBox="1"/>
-          <p:nvPr/>
-        </p:nvSpPr>
-        <p:spPr>
-          <a:xfrm>
-            <a:off x="1188720" y="4937760"/>
-            <a:ext cx="4480560" cy="320040"/>
-          </a:xfrm>
-          <a:prstGeom prst="rect">
-            <a:avLst/>
-          </a:prstGeom>
-          <a:noFill/>
-          <a:ln/>
-        </p:spPr>
-        <p:txBody>
-          <a:bodyPr wrap="square" lIns="0" tIns="0" rIns="0" bIns="0" rtlCol="0" anchor="t"/>
-          <a:lstStyle/>
-          <a:p>
-            <a:pPr indent="0" marL="0">
-              <a:buNone/>
-            </a:pPr>
-            <a:r>
-              <a:rPr lang="en-US" sz="1600" b="1" dirty="0">
-                <a:solidFill>
-                  <a:schemeClr val="tx2"/>
-                </a:solidFill>
-              </a:rPr>
-              <a:t>Publish</a:t>
-            </a:r>
-            <a:endParaRPr lang="en-US" sz="1600" dirty="0"/>
-          </a:p>
-        </p:txBody>
-      </p:sp>
-      <p:sp>
-        <p:nvSpPr>
-          <p:cNvPr id="19" name="Run step 4 body"/>
-          <p:cNvSpPr txBox="1"/>
-          <p:nvPr/>
-        </p:nvSpPr>
-        <p:spPr>
-          <a:xfrm>
-            <a:off x="1188720" y="5285232"/>
-            <a:ext cx="4480560" cy="594360"/>
-          </a:xfrm>
-          <a:prstGeom prst="rect">
-            <a:avLst/>
-          </a:prstGeom>
-          <a:noFill/>
-          <a:ln/>
-        </p:spPr>
-        <p:txBody>
-          <a:bodyPr wrap="square" lIns="0" tIns="0" rIns="0" bIns="0" rtlCol="0" anchor="t"/>
-          <a:lstStyle/>
-          <a:p>
-            <a:pPr indent="0" marL="0">
-              <a:buNone/>
-            </a:pPr>
-            <a:r>
-              <a:rPr lang="en-US" sz="1400" dirty="0">
-                <a:solidFill>
-                  <a:schemeClr val="tx1"/>
-                </a:solidFill>
-              </a:rPr>
-              <a:t>build_site.py renders the dashboard and value case; deployed to Vercel.</a:t>
-            </a:r>
-            <a:endParaRPr lang="en-US" sz="1400" dirty="0"/>
-          </a:p>
-        </p:txBody>
-      </p:sp>
-      <p:sp>
-        <p:nvSpPr>
-          <p:cNvPr id="20" name="Gotchas heading"/>
-          <p:cNvSpPr txBox="1"/>
-          <p:nvPr/>
-        </p:nvSpPr>
-        <p:spPr>
-          <a:xfrm>
-            <a:off x="6309360" y="1325880"/>
-            <a:ext cx="5303520" cy="365760"/>
-          </a:xfrm>
-          <a:prstGeom prst="rect">
-            <a:avLst/>
-          </a:prstGeom>
-          <a:noFill/>
-          <a:ln/>
-        </p:spPr>
-        <p:txBody>
-          <a:bodyPr wrap="square" lIns="0" tIns="0" rIns="0" bIns="0" rtlCol="0" anchor="t"/>
-          <a:lstStyle/>
-          <a:p>
-            <a:pPr indent="0" marL="0">
-              <a:buNone/>
-            </a:pPr>
-            <a:r>
-              <a:rPr lang="en-US" sz="1600" b="1" dirty="0">
-                <a:solidFill>
-                  <a:schemeClr val="accent6"/>
-                </a:solidFill>
-              </a:rPr>
-              <a:t>Problems solved along the way</a:t>
-            </a:r>
-            <a:endParaRPr lang="en-US" sz="1600" dirty="0"/>
-          </a:p>
-        </p:txBody>
-      </p:sp>
-      <p:sp>
-        <p:nvSpPr>
-          <p:cNvPr id="21" name="Gotcha 1"/>
-          <p:cNvSpPr/>
-          <p:nvPr/>
-        </p:nvSpPr>
-        <p:spPr>
-          <a:xfrm>
-            <a:off x="6309360" y="1783080"/>
-            <a:ext cx="5303520" cy="914400"/>
-          </a:xfrm>
-          <a:prstGeom prst="roundRect">
-            <a:avLst>
-              <a:gd name="adj" fmla="val 12000"/>
-            </a:avLst>
-          </a:prstGeom>
-          <a:solidFill>
-            <a:schemeClr val="bg2"/>
-          </a:solidFill>
-          <a:ln/>
-        </p:spPr>
-      </p:sp>
-      <p:sp>
-        <p:nvSpPr>
-          <p:cNvPr id="22" name="Gotcha 1 title"/>
-          <p:cNvSpPr txBox="1"/>
-          <p:nvPr/>
-        </p:nvSpPr>
-        <p:spPr>
-          <a:xfrm>
-            <a:off x="6537960" y="1874520"/>
-            <a:ext cx="4892040" cy="320040"/>
-          </a:xfrm>
-          <a:prstGeom prst="rect">
-            <a:avLst/>
-          </a:prstGeom>
-          <a:noFill/>
-          <a:ln/>
-        </p:spPr>
-        <p:txBody>
-          <a:bodyPr wrap="square" lIns="0" tIns="0" rIns="0" bIns="0" rtlCol="0" anchor="t"/>
-          <a:lstStyle/>
-          <a:p>
-            <a:pPr indent="0" marL="0">
-              <a:buNone/>
-            </a:pPr>
-            <a:r>
-              <a:rPr lang="en-US" sz="1400" b="1" dirty="0">
-                <a:solidFill>
-                  <a:schemeClr val="tx2"/>
-                </a:solidFill>
-              </a:rPr>
-              <a:t>New orgs block uninstalled connected apps</a:t>
-            </a:r>
-            <a:endParaRPr lang="en-US" sz="1400" dirty="0"/>
-          </a:p>
-        </p:txBody>
-      </p:sp>
-      <p:sp>
-        <p:nvSpPr>
-          <p:cNvPr id="23" name="Gotcha 1 fix"/>
-          <p:cNvSpPr txBox="1"/>
-          <p:nvPr/>
-        </p:nvSpPr>
-        <p:spPr>
-          <a:xfrm>
-            <a:off x="6537960" y="2240280"/>
-            <a:ext cx="4892040" cy="365760"/>
-          </a:xfrm>
-          <a:prstGeom prst="rect">
-            <a:avLst/>
-          </a:prstGeom>
-          <a:noFill/>
-          <a:ln/>
-        </p:spPr>
-        <p:txBody>
-          <a:bodyPr wrap="square" lIns="0" tIns="0" rIns="0" bIns="0" rtlCol="0" anchor="t"/>
-          <a:lstStyle/>
-          <a:p>
-            <a:pPr indent="0" marL="0">
-              <a:buNone/>
-            </a:pPr>
-            <a:r>
-              <a:rPr lang="en-US" sz="1400" dirty="0">
-                <a:solidFill>
-                  <a:schemeClr val="tx1"/>
-                </a:solidFill>
-              </a:rPr>
-              <a:t>Installed Salesforce CLI under Connected Apps OAuth Usage.</a:t>
-            </a:r>
-            <a:endParaRPr lang="en-US" sz="1400" dirty="0"/>
-          </a:p>
-        </p:txBody>
-      </p:sp>
-      <p:sp>
-        <p:nvSpPr>
-          <p:cNvPr id="24" name="Gotcha 2"/>
-          <p:cNvSpPr/>
-          <p:nvPr/>
-        </p:nvSpPr>
-        <p:spPr>
-          <a:xfrm>
-            <a:off x="6309360" y="2834640"/>
-            <a:ext cx="5303520" cy="914400"/>
-          </a:xfrm>
-          <a:prstGeom prst="roundRect">
-            <a:avLst>
-              <a:gd name="adj" fmla="val 12000"/>
-            </a:avLst>
-          </a:prstGeom>
-          <a:solidFill>
-            <a:schemeClr val="bg2"/>
-          </a:solidFill>
-          <a:ln/>
-        </p:spPr>
-      </p:sp>
-      <p:sp>
-        <p:nvSpPr>
-          <p:cNvPr id="25" name="Gotcha 2 title"/>
-          <p:cNvSpPr txBox="1"/>
-          <p:nvPr/>
-        </p:nvSpPr>
-        <p:spPr>
-          <a:xfrm>
-            <a:off x="6537960" y="2926080"/>
-            <a:ext cx="4892040" cy="320040"/>
-          </a:xfrm>
-          <a:prstGeom prst="rect">
-            <a:avLst/>
-          </a:prstGeom>
-          <a:noFill/>
-          <a:ln/>
-        </p:spPr>
-        <p:txBody>
-          <a:bodyPr wrap="square" lIns="0" tIns="0" rIns="0" bIns="0" rtlCol="0" anchor="t"/>
-          <a:lstStyle/>
-          <a:p>
-            <a:pPr indent="0" marL="0">
-              <a:buNone/>
-            </a:pPr>
-            <a:r>
-              <a:rPr lang="en-US" sz="1400" b="1" dirty="0">
-                <a:solidFill>
-                  <a:schemeClr val="tx2"/>
-                </a:solidFill>
-              </a:rPr>
-              <a:t>Starter orgs use a shorter sales process</a:t>
-            </a:r>
-            <a:endParaRPr lang="en-US" sz="1400" dirty="0"/>
-          </a:p>
-        </p:txBody>
-      </p:sp>
-      <p:sp>
-        <p:nvSpPr>
-          <p:cNvPr id="26" name="Gotcha 2 fix"/>
-          <p:cNvSpPr txBox="1"/>
-          <p:nvPr/>
-        </p:nvSpPr>
-        <p:spPr>
-          <a:xfrm>
-            <a:off x="6537960" y="3291840"/>
-            <a:ext cx="4892040" cy="365760"/>
-          </a:xfrm>
-          <a:prstGeom prst="rect">
-            <a:avLst/>
-          </a:prstGeom>
-          <a:noFill/>
-          <a:ln/>
-        </p:spPr>
-        <p:txBody>
-          <a:bodyPr wrap="square" lIns="0" tIns="0" rIns="0" bIns="0" rtlCol="0" anchor="t"/>
-          <a:lstStyle/>
-          <a:p>
-            <a:pPr indent="0" marL="0">
-              <a:buNone/>
-            </a:pPr>
-            <a:r>
-              <a:rPr lang="en-US" sz="1400" dirty="0">
-                <a:solidFill>
-                  <a:schemeClr val="tx1"/>
-                </a:solidFill>
-              </a:rPr>
-              <a:t>Stages auto-map to Qualify → Propose → Negotiate.</a:t>
-            </a:r>
-            <a:endParaRPr lang="en-US" sz="1400" dirty="0"/>
-          </a:p>
-        </p:txBody>
-      </p:sp>
-      <p:sp>
-        <p:nvSpPr>
-          <p:cNvPr id="27" name="Gotcha 3"/>
-          <p:cNvSpPr/>
-          <p:nvPr/>
-        </p:nvSpPr>
-        <p:spPr>
-          <a:xfrm>
-            <a:off x="6309360" y="3886200"/>
-            <a:ext cx="5303520" cy="914400"/>
-          </a:xfrm>
-          <a:prstGeom prst="roundRect">
-            <a:avLst>
-              <a:gd name="adj" fmla="val 12000"/>
-            </a:avLst>
-          </a:prstGeom>
-          <a:solidFill>
-            <a:schemeClr val="bg2"/>
-          </a:solidFill>
-          <a:ln/>
-        </p:spPr>
-      </p:sp>
-      <p:sp>
-        <p:nvSpPr>
-          <p:cNvPr id="28" name="Gotcha 3 title"/>
-          <p:cNvSpPr txBox="1"/>
-          <p:nvPr/>
-        </p:nvSpPr>
-        <p:spPr>
-          <a:xfrm>
-            <a:off x="6537960" y="3977640"/>
-            <a:ext cx="4892040" cy="320040"/>
-          </a:xfrm>
-          <a:prstGeom prst="rect">
-            <a:avLst/>
-          </a:prstGeom>
-          <a:noFill/>
-          <a:ln/>
-        </p:spPr>
-        <p:txBody>
-          <a:bodyPr wrap="square" lIns="0" tIns="0" rIns="0" bIns="0" rtlCol="0" anchor="t"/>
-          <a:lstStyle/>
-          <a:p>
-            <a:pPr indent="0" marL="0">
-              <a:buNone/>
-            </a:pPr>
-            <a:r>
-              <a:rPr lang="en-US" sz="1400" b="1" dirty="0">
-                <a:solidFill>
-                  <a:schemeClr val="tx2"/>
-                </a:solidFill>
-              </a:rPr>
-              <a:t>The CLI redacts access tokens</a:t>
-            </a:r>
-            <a:endParaRPr lang="en-US" sz="1400" dirty="0"/>
-          </a:p>
-        </p:txBody>
-      </p:sp>
-      <p:sp>
-        <p:nvSpPr>
-          <p:cNvPr id="29" name="Gotcha 3 fix"/>
-          <p:cNvSpPr txBox="1"/>
-          <p:nvPr/>
-        </p:nvSpPr>
-        <p:spPr>
-          <a:xfrm>
-            <a:off x="6537960" y="4343400"/>
-            <a:ext cx="4892040" cy="365760"/>
-          </a:xfrm>
-          <a:prstGeom prst="rect">
-            <a:avLst/>
-          </a:prstGeom>
-          <a:noFill/>
-          <a:ln/>
-        </p:spPr>
-        <p:txBody>
-          <a:bodyPr wrap="square" lIns="0" tIns="0" rIns="0" bIns="0" rtlCol="0" anchor="t"/>
-          <a:lstStyle/>
-          <a:p>
-            <a:pPr indent="0" marL="0">
-              <a:buNone/>
-            </a:pPr>
-            <a:r>
-              <a:rPr lang="en-US" sz="1400" dirty="0">
-                <a:solidFill>
-                  <a:schemeClr val="tx1"/>
-                </a:solidFill>
-              </a:rPr>
-              <a:t>Calls go through sf api request rest instead.</a:t>
-            </a:r>
-            <a:endParaRPr lang="en-US" sz="1400" dirty="0"/>
-          </a:p>
-        </p:txBody>
-      </p:sp>
-      <p:sp>
-        <p:nvSpPr>
-          <p:cNvPr id="30" name="Gotcha 4"/>
-          <p:cNvSpPr/>
-          <p:nvPr/>
-        </p:nvSpPr>
-        <p:spPr>
-          <a:xfrm>
-            <a:off x="6309360" y="4937760"/>
-            <a:ext cx="5303520" cy="914400"/>
-          </a:xfrm>
-          <a:prstGeom prst="roundRect">
-            <a:avLst>
-              <a:gd name="adj" fmla="val 12000"/>
-            </a:avLst>
-          </a:prstGeom>
-          <a:solidFill>
-            <a:schemeClr val="bg2"/>
-          </a:solidFill>
-          <a:ln/>
-        </p:spPr>
-      </p:sp>
-      <p:sp>
-        <p:nvSpPr>
-          <p:cNvPr id="31" name="Gotcha 4 title"/>
-          <p:cNvSpPr txBox="1"/>
-          <p:nvPr/>
-        </p:nvSpPr>
-        <p:spPr>
-          <a:xfrm>
-            <a:off x="6537960" y="5029200"/>
-            <a:ext cx="4892040" cy="320040"/>
-          </a:xfrm>
-          <a:prstGeom prst="rect">
-            <a:avLst/>
-          </a:prstGeom>
-          <a:noFill/>
-          <a:ln/>
-        </p:spPr>
-        <p:txBody>
-          <a:bodyPr wrap="square" lIns="0" tIns="0" rIns="0" bIns="0" rtlCol="0" anchor="t"/>
-          <a:lstStyle/>
-          <a:p>
-            <a:pPr indent="0" marL="0">
-              <a:buNone/>
-            </a:pPr>
-            <a:r>
-              <a:rPr lang="en-US" sz="1400" b="1" dirty="0">
-                <a:solidFill>
-                  <a:schemeClr val="tx2"/>
-                </a:solidFill>
-              </a:rPr>
-              <a:t>History can't be backdated</a:t>
-            </a:r>
-            <a:endParaRPr lang="en-US" sz="1400" dirty="0"/>
-          </a:p>
-        </p:txBody>
-      </p:sp>
-      <p:sp>
-        <p:nvSpPr>
-          <p:cNvPr id="32" name="Gotcha 4 fix"/>
-          <p:cNvSpPr txBox="1"/>
-          <p:nvPr/>
-        </p:nvSpPr>
-        <p:spPr>
-          <a:xfrm>
-            <a:off x="6537960" y="5394960"/>
-            <a:ext cx="4892040" cy="365760"/>
-          </a:xfrm>
-          <a:prstGeom prst="rect">
-            <a:avLst/>
-          </a:prstGeom>
-          <a:noFill/>
-          <a:ln/>
-        </p:spPr>
-        <p:txBody>
-          <a:bodyPr wrap="square" lIns="0" tIns="0" rIns="0" bIns="0" rtlCol="0" anchor="t"/>
-          <a:lstStyle/>
-          <a:p>
-            <a:pPr indent="0" marL="0">
-              <a:buNone/>
-            </a:pPr>
-            <a:r>
-              <a:rPr lang="en-US" sz="1400" dirty="0">
-                <a:solidFill>
-                  <a:schemeClr val="tx1"/>
-                </a:solidFill>
-              </a:rPr>
-              <a:t>The 10-month dataset is simulated in the same object shape.</a:t>
-            </a:r>
-            <a:endParaRPr lang="en-US" sz="1400" dirty="0"/>
-          </a:p>
-        </p:txBody>
-      </p:sp>
-      <p:sp>
-        <p:nvSpPr>
-          <p:cNvPr id="25" name="Slide Number Placeholder 0"/>
-          <p:cNvSpPr>
-            <a:spLocks noGrp="1"/>
-          </p:cNvSpPr>
-          <p:nvPr>
-            <p:ph type="sldNum" sz="quarter" idx="4294967295"/>
-          </p:nvPr>
-        </p:nvSpPr>
-        <p:spPr>
-          <a:xfrm>
-            <a:off x="11155680" y="6400800"/>
-            <a:ext cx="457200" cy="274320"/>
-          </a:xfrm>
-          <a:prstGeom prst="rect">
-            <a:avLst/>
-          </a:prstGeom>
-          <a:extLst>
-            <a:ext uri="{C572A759-6A51-4108-AA02-DFA0A04FC94B}">
-              <ma14:wrappingTextBoxFlag xmlns:ma14="http://schemas.microsoft.com/office/mac/drawingml/2011/main" val="0"/>
-            </a:ext>
-          </a:extLst>
-        </p:spPr>
-        <p:txBody>
-          <a:bodyPr/>
-          <a:lstStyle>
-            <a:lvl1pPr>
-              <a:defRPr sz="1000">
-                <a:solidFill>
-                  <a:schemeClr val="accent6"/>
-                </a:solidFill>
-              </a:defRPr>
-            </a:lvl1pPr>
-          </a:lstStyle>
-          <a:p>
-            <a:pPr algn="r"/>
-            <a:fld id="{F7021451-1387-4CA6-816F-3879F97B5CBC}" type="slidenum">
-              <a:rPr b="0" lang="en-US"/>
-              <a:t>11</a:t>
-            </a:fld>
-            <a:endParaRPr lang="en-US"/>
-          </a:p>
-        </p:txBody>
-      </p:sp>
-    </p:spTree>
-  </p:cSld>
-  <p:clrMapOvr>
-    <a:masterClrMapping/>
-  </p:clrMapOvr>
-</p:sld>
-</file>
-
-<file path=ppt/slides/slide12.xml><?xml version="1.0" encoding="utf-8"?>
-<p:sld xmlns:a="http://schemas.openxmlformats.org/drawingml/2006/main" xmlns:r="http://schemas.openxmlformats.org/officeDocument/2006/relationships" xmlns:p="http://schemas.openxmlformats.org/presentationml/2006/main">
-  <p:cSld name="Slide 12">
-    <p:spTree>
-      <p:nvGrpSpPr>
-        <p:cNvPr id="1" name=""/>
-        <p:cNvGrpSpPr/>
-        <p:nvPr/>
-      </p:nvGrpSpPr>
-      <p:grpSpPr>
-        <a:xfrm>
-          <a:off x="0" y="0"/>
-          <a:ext cx="0" cy="0"/>
-          <a:chOff x="0" y="0"/>
-          <a:chExt cx="0" cy="0"/>
-        </a:xfrm>
-      </p:grpSpPr>
-      <p:sp>
-        <p:nvSpPr>
-          <p:cNvPr id="2" name="Text 0"/>
-          <p:cNvSpPr/>
-          <p:nvPr>
-            <p:ph idx="100" type="title" hasCustomPrompt="1"/>
-          </p:nvPr>
-        </p:nvSpPr>
-        <p:spPr>
-          <a:xfrm>
-            <a:off x="548640" y="320040"/>
-            <a:ext cx="11064240" cy="822960"/>
-          </a:xfrm>
-          <a:prstGeom prst="rect">
-            <a:avLst/>
-          </a:prstGeom>
-          <a:noFill/>
-          <a:ln/>
-        </p:spPr>
-        <p:txBody>
-          <a:bodyPr wrap="square" lIns="0" tIns="0" rIns="0" bIns="0" rtlCol="0" anchor="ctr"/>
-          <a:lstStyle/>
-          <a:p>
-            <a:pPr algn="l" indent="0" marL="0">
-              <a:buNone/>
-            </a:pPr>
-            <a:r>
-              <a:rPr lang="en-US" sz="3000" b="1" dirty="0">
-                <a:solidFill>
-                  <a:schemeClr val="tx2"/>
-                </a:solidFill>
-              </a:rPr>
-              <a:t>Evidence: the seeded deals live in Salesforce</a:t>
-            </a:r>
-            <a:endParaRPr lang="en-US" sz="3000" dirty="0"/>
-          </a:p>
-        </p:txBody>
-      </p:sp>
-      <p:sp>
-        <p:nvSpPr>
-          <p:cNvPr id="3" name="Accounts list frame"/>
-          <p:cNvSpPr/>
-          <p:nvPr/>
-        </p:nvSpPr>
-        <p:spPr>
-          <a:xfrm>
-            <a:off x="512064" y="1335024"/>
-            <a:ext cx="5786737" cy="3410712"/>
-          </a:xfrm>
-          <a:prstGeom prst="rect">
-            <a:avLst/>
-          </a:prstGeom>
-          <a:solidFill>
-            <a:schemeClr val="bg1"/>
-          </a:solidFill>
-          <a:ln w="12700">
-            <a:solidFill>
-              <a:schemeClr val="accent3"/>
-            </a:solidFill>
-            <a:prstDash val="solid"/>
-          </a:ln>
-        </p:spPr>
-      </p:sp>
-      <p:pic>
-        <p:nvPicPr>
-          <p:cNvPr id="4" name="Accounts list" descr="40 [Demo] accounts created through the Composite API, each with an industry and country.">    </p:cNvPr>
-          <p:cNvPicPr>
-            <a:picLocks noChangeAspect="1"/>
-          </p:cNvPicPr>
-          <p:nvPr/>
-        </p:nvPicPr>
-        <p:blipFill>
-          <a:blip r:embed="rId1"/>
-          <a:stretch>
-            <a:fillRect/>
-          </a:stretch>
-        </p:blipFill>
-        <p:spPr>
-          <a:xfrm>
-            <a:off x="548640" y="1371600"/>
-            <a:ext cx="5713585" cy="3337560"/>
-          </a:xfrm>
-          <a:prstGeom prst="rect">
-            <a:avLst/>
-          </a:prstGeom>
-        </p:spPr>
-      </p:pic>
-      <p:sp>
-        <p:nvSpPr>
-          <p:cNvPr id="5" name="Accounts list caption"/>
-          <p:cNvSpPr txBox="1"/>
-          <p:nvPr/>
-        </p:nvSpPr>
-        <p:spPr>
-          <a:xfrm>
-            <a:off x="548640" y="4892040"/>
-            <a:ext cx="5713585" cy="685800"/>
-          </a:xfrm>
-          <a:prstGeom prst="rect">
-            <a:avLst/>
-          </a:prstGeom>
-          <a:noFill/>
-          <a:ln/>
-        </p:spPr>
-        <p:txBody>
-          <a:bodyPr wrap="square" lIns="0" tIns="0" rIns="0" bIns="0" rtlCol="0" anchor="t"/>
-          <a:lstStyle/>
-          <a:p>
-            <a:pPr indent="0" marL="0">
-              <a:buNone/>
-            </a:pPr>
-            <a:r>
-              <a:rPr lang="en-US" sz="1400" dirty="0">
-                <a:solidFill>
-                  <a:schemeClr val="tx2"/>
-                </a:solidFill>
-              </a:rPr>
-              <a:t>40 [Demo] accounts created through the Composite API, each with an industry and country.</a:t>
-            </a:r>
-            <a:endParaRPr lang="en-US" sz="1400" dirty="0"/>
-          </a:p>
-        </p:txBody>
-      </p:sp>
-      <p:sp>
-        <p:nvSpPr>
-          <p:cNvPr id="6" name="Opportunities list frame"/>
-          <p:cNvSpPr/>
-          <p:nvPr/>
-        </p:nvSpPr>
-        <p:spPr>
-          <a:xfrm>
-            <a:off x="6499969" y="1335024"/>
-            <a:ext cx="5036066" cy="3410712"/>
-          </a:xfrm>
-          <a:prstGeom prst="rect">
-            <a:avLst/>
-          </a:prstGeom>
-          <a:solidFill>
-            <a:schemeClr val="bg1"/>
-          </a:solidFill>
-          <a:ln w="12700">
-            <a:solidFill>
-              <a:schemeClr val="accent3"/>
-            </a:solidFill>
-            <a:prstDash val="solid"/>
-          </a:ln>
-        </p:spPr>
-      </p:sp>
-      <p:pic>
-        <p:nvPicPr>
-          <p:cNvPr id="7" name="Opportunities list" descr="40 opportunities walked through the org's own sales stages.">    </p:cNvPr>
-          <p:cNvPicPr>
-            <a:picLocks noChangeAspect="1"/>
-          </p:cNvPicPr>
-          <p:nvPr/>
-        </p:nvPicPr>
-        <p:blipFill>
-          <a:blip r:embed="rId2"/>
-          <a:stretch>
-            <a:fillRect/>
-          </a:stretch>
-        </p:blipFill>
-        <p:spPr>
-          <a:xfrm>
-            <a:off x="6536545" y="1371600"/>
-            <a:ext cx="4962914" cy="3337560"/>
-          </a:xfrm>
-          <a:prstGeom prst="rect">
-            <a:avLst/>
-          </a:prstGeom>
-        </p:spPr>
-      </p:pic>
-      <p:sp>
-        <p:nvSpPr>
-          <p:cNvPr id="8" name="Opportunities list caption"/>
-          <p:cNvSpPr txBox="1"/>
-          <p:nvPr/>
-        </p:nvSpPr>
-        <p:spPr>
-          <a:xfrm>
-            <a:off x="6536545" y="4892040"/>
-            <a:ext cx="4962914" cy="685800"/>
-          </a:xfrm>
-          <a:prstGeom prst="rect">
-            <a:avLst/>
-          </a:prstGeom>
-          <a:noFill/>
-          <a:ln/>
-        </p:spPr>
-        <p:txBody>
-          <a:bodyPr wrap="square" lIns="0" tIns="0" rIns="0" bIns="0" rtlCol="0" anchor="t"/>
-          <a:lstStyle/>
-          <a:p>
-            <a:pPr indent="0" marL="0">
-              <a:buNone/>
-            </a:pPr>
-            <a:r>
-              <a:rPr lang="en-US" sz="1400" dirty="0">
-                <a:solidFill>
-                  <a:schemeClr val="tx2"/>
-                </a:solidFill>
-              </a:rPr>
-              <a:t>40 opportunities walked through the org's own sales stages.</a:t>
-            </a:r>
-            <a:endParaRPr lang="en-US" sz="1400" dirty="0"/>
-          </a:p>
-        </p:txBody>
-      </p:sp>
-      <p:sp>
-        <p:nvSpPr>
-          <p:cNvPr id="25" name="Slide Number Placeholder 0"/>
-          <p:cNvSpPr>
-            <a:spLocks noGrp="1"/>
-          </p:cNvSpPr>
-          <p:nvPr>
-            <p:ph type="sldNum" sz="quarter" idx="4294967295"/>
-          </p:nvPr>
-        </p:nvSpPr>
-        <p:spPr>
-          <a:xfrm>
-            <a:off x="11155680" y="6400800"/>
-            <a:ext cx="457200" cy="274320"/>
-          </a:xfrm>
-          <a:prstGeom prst="rect">
-            <a:avLst/>
-          </a:prstGeom>
-          <a:extLst>
-            <a:ext uri="{C572A759-6A51-4108-AA02-DFA0A04FC94B}">
-              <ma14:wrappingTextBoxFlag xmlns:ma14="http://schemas.microsoft.com/office/mac/drawingml/2011/main" val="0"/>
-            </a:ext>
-          </a:extLst>
-        </p:spPr>
-        <p:txBody>
-          <a:bodyPr/>
-          <a:lstStyle>
-            <a:lvl1pPr>
-              <a:defRPr sz="1000">
-                <a:solidFill>
-                  <a:schemeClr val="accent6"/>
-                </a:solidFill>
-              </a:defRPr>
-            </a:lvl1pPr>
-          </a:lstStyle>
-          <a:p>
-            <a:pPr algn="r"/>
-            <a:fld id="{F7021451-1387-4CA6-816F-3879F97B5CBC}" type="slidenum">
-              <a:rPr b="0" lang="en-US"/>
-              <a:t>12</a:t>
-            </a:fld>
-            <a:endParaRPr lang="en-US"/>
-          </a:p>
-        </p:txBody>
-      </p:sp>
-    </p:spTree>
-  </p:cSld>
-  <p:clrMapOvr>
-    <a:masterClrMapping/>
-  </p:clrMapOvr>
-</p:sld>
-</file>
-
-<file path=ppt/slides/slide13.xml><?xml version="1.0" encoding="utf-8"?>
-<p:sld xmlns:a="http://schemas.openxmlformats.org/drawingml/2006/main" xmlns:r="http://schemas.openxmlformats.org/officeDocument/2006/relationships" xmlns:p="http://schemas.openxmlformats.org/presentationml/2006/main">
-  <p:cSld name="Slide 13">
-    <p:spTree>
-      <p:nvGrpSpPr>
-        <p:cNvPr id="1" name=""/>
-        <p:cNvGrpSpPr/>
-        <p:nvPr/>
-      </p:nvGrpSpPr>
-      <p:grpSpPr>
-        <a:xfrm>
-          <a:off x="0" y="0"/>
-          <a:ext cx="0" cy="0"/>
-          <a:chOff x="0" y="0"/>
-          <a:chExt cx="0" cy="0"/>
-        </a:xfrm>
-      </p:grpSpPr>
-      <p:sp>
-        <p:nvSpPr>
-          <p:cNvPr id="2" name="Text 0"/>
-          <p:cNvSpPr/>
-          <p:nvPr>
-            <p:ph idx="100" type="title" hasCustomPrompt="1"/>
-          </p:nvPr>
-        </p:nvSpPr>
-        <p:spPr>
-          <a:xfrm>
-            <a:off x="548640" y="320040"/>
-            <a:ext cx="11064240" cy="822960"/>
-          </a:xfrm>
-          <a:prstGeom prst="rect">
-            <a:avLst/>
-          </a:prstGeom>
-          <a:noFill/>
-          <a:ln/>
-        </p:spPr>
-        <p:txBody>
-          <a:bodyPr wrap="square" lIns="0" tIns="0" rIns="0" bIns="0" rtlCol="0" anchor="ctr"/>
-          <a:lstStyle/>
-          <a:p>
-            <a:pPr algn="l" indent="0" marL="0">
-              <a:buNone/>
-            </a:pPr>
-            <a:r>
-              <a:rPr lang="en-US" sz="3000" b="1" dirty="0">
-                <a:solidFill>
-                  <a:schemeClr val="tx2"/>
-                </a:solidFill>
-              </a:rPr>
-              <a:t>Evidence: what the extract reads</a:t>
-            </a:r>
-            <a:endParaRPr lang="en-US" sz="3000" dirty="0"/>
-          </a:p>
-        </p:txBody>
-      </p:sp>
-      <p:sp>
-        <p:nvSpPr>
-          <p:cNvPr id="3" name="Stage history frame"/>
-          <p:cNvSpPr/>
-          <p:nvPr/>
-        </p:nvSpPr>
-        <p:spPr>
-          <a:xfrm>
-            <a:off x="512064" y="1335024"/>
-            <a:ext cx="5898118" cy="3182112"/>
-          </a:xfrm>
-          <a:prstGeom prst="rect">
-            <a:avLst/>
-          </a:prstGeom>
-          <a:solidFill>
-            <a:schemeClr val="bg1"/>
-          </a:solidFill>
-          <a:ln w="12700">
-            <a:solidFill>
-              <a:schemeClr val="accent3"/>
-            </a:solidFill>
-            <a:prstDash val="solid"/>
-          </a:ln>
-        </p:spPr>
-      </p:sp>
-      <p:pic>
-        <p:nvPicPr>
-          <p:cNvPr id="4" name="Stage history" descr="OpportunityHistory for one deal: Propose → Negotiate twice before Closed Won. This is the re-quote loop the dashboard measures.">    </p:cNvPr>
-          <p:cNvPicPr>
-            <a:picLocks noChangeAspect="1"/>
-          </p:cNvPicPr>
-          <p:nvPr/>
-        </p:nvPicPr>
-        <p:blipFill>
-          <a:blip r:embed="rId1"/>
-          <a:stretch>
-            <a:fillRect/>
-          </a:stretch>
-        </p:blipFill>
-        <p:spPr>
-          <a:xfrm>
-            <a:off x="548640" y="1371600"/>
-            <a:ext cx="5824966" cy="3108960"/>
-          </a:xfrm>
-          <a:prstGeom prst="rect">
-            <a:avLst/>
-          </a:prstGeom>
-        </p:spPr>
-      </p:pic>
-      <p:sp>
-        <p:nvSpPr>
-          <p:cNvPr id="5" name="Stage history caption"/>
-          <p:cNvSpPr txBox="1"/>
-          <p:nvPr/>
-        </p:nvSpPr>
-        <p:spPr>
-          <a:xfrm>
-            <a:off x="548640" y="4663440"/>
-            <a:ext cx="5824966" cy="685800"/>
-          </a:xfrm>
-          <a:prstGeom prst="rect">
-            <a:avLst/>
-          </a:prstGeom>
-          <a:noFill/>
-          <a:ln/>
-        </p:spPr>
-        <p:txBody>
-          <a:bodyPr wrap="square" lIns="0" tIns="0" rIns="0" bIns="0" rtlCol="0" anchor="t"/>
-          <a:lstStyle/>
-          <a:p>
-            <a:pPr indent="0" marL="0">
-              <a:buNone/>
-            </a:pPr>
-            <a:r>
-              <a:rPr lang="en-US" sz="1400" dirty="0">
-                <a:solidFill>
-                  <a:schemeClr val="tx2"/>
-                </a:solidFill>
-              </a:rPr>
-              <a:t>OpportunityHistory for one deal: Propose → Negotiate twice before Closed Won. This is the re-quote loop the dashboard measures.</a:t>
-            </a:r>
-            <a:endParaRPr lang="en-US" sz="1400" dirty="0"/>
-          </a:p>
-        </p:txBody>
-      </p:sp>
-      <p:sp>
-        <p:nvSpPr>
-          <p:cNvPr id="6" name="Connected apps frame"/>
-          <p:cNvSpPr/>
-          <p:nvPr/>
-        </p:nvSpPr>
-        <p:spPr>
-          <a:xfrm>
-            <a:off x="6611350" y="1335024"/>
-            <a:ext cx="4722713" cy="3182112"/>
-          </a:xfrm>
-          <a:prstGeom prst="rect">
-            <a:avLst/>
-          </a:prstGeom>
-          <a:solidFill>
-            <a:schemeClr val="bg1"/>
-          </a:solidFill>
-          <a:ln w="12700">
-            <a:solidFill>
-              <a:schemeClr val="accent3"/>
-            </a:solidFill>
-            <a:prstDash val="solid"/>
-          </a:ln>
-        </p:spPr>
-      </p:sp>
-      <p:pic>
-        <p:nvPicPr>
-          <p:cNvPr id="7" name="Connected apps" descr="Setup: Salesforce CLI installed and allowed, which unblocked API access on the new org.">    </p:cNvPr>
-          <p:cNvPicPr>
-            <a:picLocks noChangeAspect="1"/>
-          </p:cNvPicPr>
-          <p:nvPr/>
-        </p:nvPicPr>
-        <p:blipFill>
-          <a:blip r:embed="rId2"/>
-          <a:stretch>
-            <a:fillRect/>
-          </a:stretch>
-        </p:blipFill>
-        <p:spPr>
-          <a:xfrm>
-            <a:off x="6647926" y="1371600"/>
-            <a:ext cx="4649561" cy="3108960"/>
-          </a:xfrm>
-          <a:prstGeom prst="rect">
-            <a:avLst/>
-          </a:prstGeom>
-        </p:spPr>
-      </p:pic>
-      <p:sp>
-        <p:nvSpPr>
-          <p:cNvPr id="8" name="Connected apps caption"/>
-          <p:cNvSpPr txBox="1"/>
-          <p:nvPr/>
-        </p:nvSpPr>
-        <p:spPr>
-          <a:xfrm>
-            <a:off x="6647926" y="4663440"/>
-            <a:ext cx="4649561" cy="685800"/>
-          </a:xfrm>
-          <a:prstGeom prst="rect">
-            <a:avLst/>
-          </a:prstGeom>
-          <a:noFill/>
-          <a:ln/>
-        </p:spPr>
-        <p:txBody>
-          <a:bodyPr wrap="square" lIns="0" tIns="0" rIns="0" bIns="0" rtlCol="0" anchor="t"/>
-          <a:lstStyle/>
-          <a:p>
-            <a:pPr indent="0" marL="0">
-              <a:buNone/>
-            </a:pPr>
-            <a:r>
-              <a:rPr lang="en-US" sz="1400" dirty="0">
-                <a:solidFill>
-                  <a:schemeClr val="tx2"/>
-                </a:solidFill>
-              </a:rPr>
-              <a:t>Setup: Salesforce CLI installed and allowed, which unblocked API access on the new org.</a:t>
-            </a:r>
-            <a:endParaRPr lang="en-US" sz="1400" dirty="0"/>
-          </a:p>
-        </p:txBody>
-      </p:sp>
-      <p:sp>
-        <p:nvSpPr>
-          <p:cNvPr id="25" name="Slide Number Placeholder 0"/>
-          <p:cNvSpPr>
-            <a:spLocks noGrp="1"/>
-          </p:cNvSpPr>
-          <p:nvPr>
-            <p:ph type="sldNum" sz="quarter" idx="4294967295"/>
-          </p:nvPr>
-        </p:nvSpPr>
-        <p:spPr>
-          <a:xfrm>
-            <a:off x="11155680" y="6400800"/>
-            <a:ext cx="457200" cy="274320"/>
-          </a:xfrm>
-          <a:prstGeom prst="rect">
-            <a:avLst/>
-          </a:prstGeom>
-          <a:extLst>
-            <a:ext uri="{C572A759-6A51-4108-AA02-DFA0A04FC94B}">
-              <ma14:wrappingTextBoxFlag xmlns:ma14="http://schemas.microsoft.com/office/mac/drawingml/2011/main" val="0"/>
-            </a:ext>
-          </a:extLst>
-        </p:spPr>
-        <p:txBody>
-          <a:bodyPr/>
-          <a:lstStyle>
-            <a:lvl1pPr>
-              <a:defRPr sz="1000">
-                <a:solidFill>
-                  <a:schemeClr val="accent6"/>
-                </a:solidFill>
-              </a:defRPr>
-            </a:lvl1pPr>
-          </a:lstStyle>
-          <a:p>
-            <a:pPr algn="r"/>
-            <a:fld id="{F7021451-1387-4CA6-816F-3879F97B5CBC}" type="slidenum">
-              <a:rPr b="0" lang="en-US"/>
-              <a:t>13</a:t>
-            </a:fld>
-            <a:endParaRPr lang="en-US"/>
-          </a:p>
-        </p:txBody>
-      </p:sp>
-    </p:spTree>
-  </p:cSld>
-  <p:clrMapOvr>
-    <a:masterClrMapping/>
-  </p:clrMapOvr>
-</p:sld>
-</file>
-
 <file path=ppt/slides/slide2.xml><?xml version="1.0" encoding="utf-8"?>
 <p:sld xmlns:a="http://schemas.openxmlformats.org/drawingml/2006/main" xmlns:r="http://schemas.openxmlformats.org/officeDocument/2006/relationships" xmlns:p="http://schemas.openxmlformats.org/presentationml/2006/main">
   <p:cSld name="Slide 2">
@@ -9395,7 +6112,7 @@
                   <a:schemeClr val="tx2"/>
                 </a:solidFill>
               </a:rPr>
-              <a:t>Everything is live and open to inspect</a:t>
+              <a:t>Tech setup: the key steps, as they ran</a:t>
             </a:r>
             <a:endParaRPr lang="en-US" sz="3000" dirty="0"/>
           </a:p>
@@ -9403,18 +6120,18 @@
       </p:sp>
       <p:sp>
         <p:nvSpPr>
-          <p:cNvPr id="3" name="Proof 1"/>
+          <p:cNvPr id="3" name="Key step 1 card"/>
           <p:cNvSpPr/>
           <p:nvPr/>
         </p:nvSpPr>
         <p:spPr>
           <a:xfrm>
-            <a:off x="548640" y="1417320"/>
-            <a:ext cx="6035040" cy="960120"/>
+            <a:off x="548640" y="1280160"/>
+            <a:ext cx="5440680" cy="2331720"/>
           </a:xfrm>
           <a:prstGeom prst="roundRect">
             <a:avLst>
-              <a:gd name="adj" fmla="val 11429"/>
+              <a:gd name="adj" fmla="val 4706"/>
             </a:avLst>
           </a:prstGeom>
           <a:solidFill>
@@ -9425,620 +6142,14 @@
       </p:sp>
       <p:sp>
         <p:nvSpPr>
-          <p:cNvPr id="4" name="Proof 1 marker"/>
+          <p:cNvPr id="4" name="Key step 1 frame"/>
           <p:cNvSpPr/>
           <p:nvPr/>
         </p:nvSpPr>
         <p:spPr>
           <a:xfrm>
-            <a:off x="749808" y="1691640"/>
-            <a:ext cx="411480" cy="411480"/>
-          </a:xfrm>
-          <a:prstGeom prst="ellipse">
-            <a:avLst/>
-          </a:prstGeom>
-          <a:solidFill>
-            <a:schemeClr val="accent1"/>
-          </a:solidFill>
-          <a:ln/>
-        </p:spPr>
-      </p:sp>
-      <p:sp>
-        <p:nvSpPr>
-          <p:cNvPr id="5" name="Proof 1 glyph"/>
-          <p:cNvSpPr txBox="1"/>
-          <p:nvPr/>
-        </p:nvSpPr>
-        <p:spPr>
-          <a:xfrm>
-            <a:off x="749808" y="1691640"/>
-            <a:ext cx="411480" cy="411480"/>
-          </a:xfrm>
-          <a:prstGeom prst="rect">
-            <a:avLst/>
-          </a:prstGeom>
-          <a:noFill/>
-          <a:ln/>
-        </p:spPr>
-        <p:txBody>
-          <a:bodyPr wrap="square" lIns="0" tIns="0" rIns="0" bIns="0" rtlCol="0" anchor="ctr"/>
-          <a:lstStyle/>
-          <a:p>
-            <a:pPr algn="ctr" indent="0" marL="0">
-              <a:buNone/>
-            </a:pPr>
-            <a:r>
-              <a:rPr lang="en-US" sz="1600" b="1" dirty="0">
-                <a:solidFill>
-                  <a:schemeClr val="bg1"/>
-                </a:solidFill>
-              </a:rPr>
-              <a:t>→</a:t>
-            </a:r>
-            <a:endParaRPr lang="en-US" sz="1600" dirty="0"/>
-          </a:p>
-        </p:txBody>
-      </p:sp>
-      <p:sp>
-        <p:nvSpPr>
-          <p:cNvPr id="6" name="Proof 1 label"/>
-          <p:cNvSpPr txBox="1"/>
-          <p:nvPr/>
-        </p:nvSpPr>
-        <p:spPr>
-          <a:xfrm>
-            <a:off x="1325880" y="1545336"/>
-            <a:ext cx="5120640" cy="347472"/>
-          </a:xfrm>
-          <a:prstGeom prst="rect">
-            <a:avLst/>
-          </a:prstGeom>
-          <a:noFill/>
-          <a:ln/>
-        </p:spPr>
-        <p:txBody>
-          <a:bodyPr wrap="square" lIns="0" tIns="0" rIns="0" bIns="0" rtlCol="0" anchor="t"/>
-          <a:lstStyle/>
-          <a:p>
-            <a:pPr indent="0" marL="0">
-              <a:buNone/>
-            </a:pPr>
-            <a:r>
-              <a:rPr lang="en-US" sz="1600" b="1" dirty="0">
-                <a:solidFill>
-                  <a:schemeClr val="tx2"/>
-                </a:solidFill>
-              </a:rPr>
-              <a:t>Process dashboard</a:t>
-            </a:r>
-            <a:endParaRPr lang="en-US" sz="1600" dirty="0"/>
-          </a:p>
-        </p:txBody>
-      </p:sp>
-      <p:sp>
-        <p:nvSpPr>
-          <p:cNvPr id="7" name="Proof 1 link"/>
-          <p:cNvSpPr txBox="1"/>
-          <p:nvPr/>
-        </p:nvSpPr>
-        <p:spPr>
-          <a:xfrm>
-            <a:off x="1325880" y="1911096"/>
-            <a:ext cx="5120640" cy="347472"/>
-          </a:xfrm>
-          <a:prstGeom prst="rect">
-            <a:avLst/>
-          </a:prstGeom>
-          <a:noFill/>
-          <a:ln/>
-        </p:spPr>
-        <p:txBody>
-          <a:bodyPr wrap="square" lIns="0" tIns="0" rIns="0" bIns="0" rtlCol="0" anchor="t"/>
-          <a:lstStyle/>
-          <a:p>
-            <a:pPr indent="0" marL="0">
-              <a:buNone/>
-            </a:pPr>
-            <a:r>
-              <a:rPr lang="en-US" sz="1400" u="sng" dirty="0">
-                <a:solidFill>
-                  <a:schemeClr val="accent6"/>
-                </a:solidFill>
-                <a:hlinkClick r:id="rId1" invalidUrl="" action="" tgtFrame="" tooltip="" history="1" highlightClick="0" endSnd="0">
-                  <a:extLst>
-                    <a:ext uri="{A12FA001-AC4F-418D-AE19-62706E023703}">
-                      <ahyp:hlinkClr xmlns:ahyp="http://schemas.microsoft.com/office/drawing/2018/hyperlinkcolor" val="tx"/>
-                    </a:ext>
-                  </a:extLst>
-                </a:hlinkClick>
-              </a:rPr>
-              <a:t>salesforce-process-intelligence.vercel.app</a:t>
-            </a:r>
-            <a:endParaRPr lang="en-US" sz="1400" dirty="0"/>
-          </a:p>
-        </p:txBody>
-      </p:sp>
-      <p:sp>
-        <p:nvSpPr>
-          <p:cNvPr id="8" name="Proof 2"/>
-          <p:cNvSpPr/>
-          <p:nvPr/>
-        </p:nvSpPr>
-        <p:spPr>
-          <a:xfrm>
-            <a:off x="548640" y="2532888"/>
-            <a:ext cx="6035040" cy="960120"/>
-          </a:xfrm>
-          <a:prstGeom prst="roundRect">
-            <a:avLst>
-              <a:gd name="adj" fmla="val 11429"/>
-            </a:avLst>
-          </a:prstGeom>
-          <a:solidFill>
-            <a:schemeClr val="bg2"/>
-          </a:solidFill>
-          <a:ln/>
-        </p:spPr>
-      </p:sp>
-      <p:sp>
-        <p:nvSpPr>
-          <p:cNvPr id="9" name="Proof 2 marker"/>
-          <p:cNvSpPr/>
-          <p:nvPr/>
-        </p:nvSpPr>
-        <p:spPr>
-          <a:xfrm>
-            <a:off x="749808" y="2807208"/>
-            <a:ext cx="411480" cy="411480"/>
-          </a:xfrm>
-          <a:prstGeom prst="ellipse">
-            <a:avLst/>
-          </a:prstGeom>
-          <a:solidFill>
-            <a:schemeClr val="accent1"/>
-          </a:solidFill>
-          <a:ln/>
-        </p:spPr>
-      </p:sp>
-      <p:sp>
-        <p:nvSpPr>
-          <p:cNvPr id="10" name="Proof 2 glyph"/>
-          <p:cNvSpPr txBox="1"/>
-          <p:nvPr/>
-        </p:nvSpPr>
-        <p:spPr>
-          <a:xfrm>
-            <a:off x="749808" y="2807208"/>
-            <a:ext cx="411480" cy="411480"/>
-          </a:xfrm>
-          <a:prstGeom prst="rect">
-            <a:avLst/>
-          </a:prstGeom>
-          <a:noFill/>
-          <a:ln/>
-        </p:spPr>
-        <p:txBody>
-          <a:bodyPr wrap="square" lIns="0" tIns="0" rIns="0" bIns="0" rtlCol="0" anchor="ctr"/>
-          <a:lstStyle/>
-          <a:p>
-            <a:pPr algn="ctr" indent="0" marL="0">
-              <a:buNone/>
-            </a:pPr>
-            <a:r>
-              <a:rPr lang="en-US" sz="1600" b="1" dirty="0">
-                <a:solidFill>
-                  <a:schemeClr val="bg1"/>
-                </a:solidFill>
-              </a:rPr>
-              <a:t>→</a:t>
-            </a:r>
-            <a:endParaRPr lang="en-US" sz="1600" dirty="0"/>
-          </a:p>
-        </p:txBody>
-      </p:sp>
-      <p:sp>
-        <p:nvSpPr>
-          <p:cNvPr id="11" name="Proof 2 label"/>
-          <p:cNvSpPr txBox="1"/>
-          <p:nvPr/>
-        </p:nvSpPr>
-        <p:spPr>
-          <a:xfrm>
-            <a:off x="1325880" y="2660904"/>
-            <a:ext cx="5120640" cy="347472"/>
-          </a:xfrm>
-          <a:prstGeom prst="rect">
-            <a:avLst/>
-          </a:prstGeom>
-          <a:noFill/>
-          <a:ln/>
-        </p:spPr>
-        <p:txBody>
-          <a:bodyPr wrap="square" lIns="0" tIns="0" rIns="0" bIns="0" rtlCol="0" anchor="t"/>
-          <a:lstStyle/>
-          <a:p>
-            <a:pPr indent="0" marL="0">
-              <a:buNone/>
-            </a:pPr>
-            <a:r>
-              <a:rPr lang="en-US" sz="1600" b="1" dirty="0">
-                <a:solidFill>
-                  <a:schemeClr val="tx2"/>
-                </a:solidFill>
-              </a:rPr>
-              <a:t>Value case one-pager</a:t>
-            </a:r>
-            <a:endParaRPr lang="en-US" sz="1600" dirty="0"/>
-          </a:p>
-        </p:txBody>
-      </p:sp>
-      <p:sp>
-        <p:nvSpPr>
-          <p:cNvPr id="12" name="Proof 2 link"/>
-          <p:cNvSpPr txBox="1"/>
-          <p:nvPr/>
-        </p:nvSpPr>
-        <p:spPr>
-          <a:xfrm>
-            <a:off x="1325880" y="3026664"/>
-            <a:ext cx="5120640" cy="347472"/>
-          </a:xfrm>
-          <a:prstGeom prst="rect">
-            <a:avLst/>
-          </a:prstGeom>
-          <a:noFill/>
-          <a:ln/>
-        </p:spPr>
-        <p:txBody>
-          <a:bodyPr wrap="square" lIns="0" tIns="0" rIns="0" bIns="0" rtlCol="0" anchor="t"/>
-          <a:lstStyle/>
-          <a:p>
-            <a:pPr indent="0" marL="0">
-              <a:buNone/>
-            </a:pPr>
-            <a:r>
-              <a:rPr lang="en-US" sz="1400" u="sng" dirty="0">
-                <a:solidFill>
-                  <a:schemeClr val="accent6"/>
-                </a:solidFill>
-                <a:hlinkClick r:id="rId2" invalidUrl="" action="" tgtFrame="" tooltip="" history="1" highlightClick="0" endSnd="0">
-                  <a:extLst>
-                    <a:ext uri="{A12FA001-AC4F-418D-AE19-62706E023703}">
-                      <ahyp:hlinkClr xmlns:ahyp="http://schemas.microsoft.com/office/drawing/2018/hyperlinkcolor" val="tx"/>
-                    </a:ext>
-                  </a:extLst>
-                </a:hlinkClick>
-              </a:rPr>
-              <a:t>salesforce-process-intelligence.vercel.app/value-case.html</a:t>
-            </a:r>
-            <a:endParaRPr lang="en-US" sz="1400" dirty="0"/>
-          </a:p>
-        </p:txBody>
-      </p:sp>
-      <p:sp>
-        <p:nvSpPr>
-          <p:cNvPr id="13" name="Proof 3"/>
-          <p:cNvSpPr/>
-          <p:nvPr/>
-        </p:nvSpPr>
-        <p:spPr>
-          <a:xfrm>
-            <a:off x="548640" y="3648456"/>
-            <a:ext cx="6035040" cy="960120"/>
-          </a:xfrm>
-          <a:prstGeom prst="roundRect">
-            <a:avLst>
-              <a:gd name="adj" fmla="val 11429"/>
-            </a:avLst>
-          </a:prstGeom>
-          <a:solidFill>
-            <a:schemeClr val="bg2"/>
-          </a:solidFill>
-          <a:ln/>
-        </p:spPr>
-      </p:sp>
-      <p:sp>
-        <p:nvSpPr>
-          <p:cNvPr id="14" name="Proof 3 marker"/>
-          <p:cNvSpPr/>
-          <p:nvPr/>
-        </p:nvSpPr>
-        <p:spPr>
-          <a:xfrm>
-            <a:off x="749808" y="3922776"/>
-            <a:ext cx="411480" cy="411480"/>
-          </a:xfrm>
-          <a:prstGeom prst="ellipse">
-            <a:avLst/>
-          </a:prstGeom>
-          <a:solidFill>
-            <a:schemeClr val="accent1"/>
-          </a:solidFill>
-          <a:ln/>
-        </p:spPr>
-      </p:sp>
-      <p:sp>
-        <p:nvSpPr>
-          <p:cNvPr id="15" name="Proof 3 glyph"/>
-          <p:cNvSpPr txBox="1"/>
-          <p:nvPr/>
-        </p:nvSpPr>
-        <p:spPr>
-          <a:xfrm>
-            <a:off x="749808" y="3922776"/>
-            <a:ext cx="411480" cy="411480"/>
-          </a:xfrm>
-          <a:prstGeom prst="rect">
-            <a:avLst/>
-          </a:prstGeom>
-          <a:noFill/>
-          <a:ln/>
-        </p:spPr>
-        <p:txBody>
-          <a:bodyPr wrap="square" lIns="0" tIns="0" rIns="0" bIns="0" rtlCol="0" anchor="ctr"/>
-          <a:lstStyle/>
-          <a:p>
-            <a:pPr algn="ctr" indent="0" marL="0">
-              <a:buNone/>
-            </a:pPr>
-            <a:r>
-              <a:rPr lang="en-US" sz="1600" b="1" dirty="0">
-                <a:solidFill>
-                  <a:schemeClr val="bg1"/>
-                </a:solidFill>
-              </a:rPr>
-              <a:t>→</a:t>
-            </a:r>
-            <a:endParaRPr lang="en-US" sz="1600" dirty="0"/>
-          </a:p>
-        </p:txBody>
-      </p:sp>
-      <p:sp>
-        <p:nvSpPr>
-          <p:cNvPr id="16" name="Proof 3 label"/>
-          <p:cNvSpPr txBox="1"/>
-          <p:nvPr/>
-        </p:nvSpPr>
-        <p:spPr>
-          <a:xfrm>
-            <a:off x="1325880" y="3776472"/>
-            <a:ext cx="5120640" cy="347472"/>
-          </a:xfrm>
-          <a:prstGeom prst="rect">
-            <a:avLst/>
-          </a:prstGeom>
-          <a:noFill/>
-          <a:ln/>
-        </p:spPr>
-        <p:txBody>
-          <a:bodyPr wrap="square" lIns="0" tIns="0" rIns="0" bIns="0" rtlCol="0" anchor="t"/>
-          <a:lstStyle/>
-          <a:p>
-            <a:pPr indent="0" marL="0">
-              <a:buNone/>
-            </a:pPr>
-            <a:r>
-              <a:rPr lang="en-US" sz="1600" b="1" dirty="0">
-                <a:solidFill>
-                  <a:schemeClr val="tx2"/>
-                </a:solidFill>
-              </a:rPr>
-              <a:t>Live Salesforce extract</a:t>
-            </a:r>
-            <a:endParaRPr lang="en-US" sz="1600" dirty="0"/>
-          </a:p>
-        </p:txBody>
-      </p:sp>
-      <p:sp>
-        <p:nvSpPr>
-          <p:cNvPr id="17" name="Proof 3 link"/>
-          <p:cNvSpPr txBox="1"/>
-          <p:nvPr/>
-        </p:nvSpPr>
-        <p:spPr>
-          <a:xfrm>
-            <a:off x="1325880" y="4142232"/>
-            <a:ext cx="5120640" cy="347472"/>
-          </a:xfrm>
-          <a:prstGeom prst="rect">
-            <a:avLst/>
-          </a:prstGeom>
-          <a:noFill/>
-          <a:ln/>
-        </p:spPr>
-        <p:txBody>
-          <a:bodyPr wrap="square" lIns="0" tIns="0" rIns="0" bIns="0" rtlCol="0" anchor="t"/>
-          <a:lstStyle/>
-          <a:p>
-            <a:pPr indent="0" marL="0">
-              <a:buNone/>
-            </a:pPr>
-            <a:r>
-              <a:rPr lang="en-US" sz="1400" u="sng" dirty="0">
-                <a:solidFill>
-                  <a:schemeClr val="accent6"/>
-                </a:solidFill>
-                <a:hlinkClick r:id="rId3" invalidUrl="" action="" tgtFrame="" tooltip="" history="1" highlightClick="0" endSnd="0">
-                  <a:extLst>
-                    <a:ext uri="{A12FA001-AC4F-418D-AE19-62706E023703}">
-                      <ahyp:hlinkClr xmlns:ahyp="http://schemas.microsoft.com/office/drawing/2018/hyperlinkcolor" val="tx"/>
-                    </a:ext>
-                  </a:extLst>
-                </a:hlinkClick>
-              </a:rPr>
-              <a:t>salesforce-process-intelligence.vercel.app/live.html</a:t>
-            </a:r>
-            <a:endParaRPr lang="en-US" sz="1400" dirty="0"/>
-          </a:p>
-        </p:txBody>
-      </p:sp>
-      <p:sp>
-        <p:nvSpPr>
-          <p:cNvPr id="18" name="Proof 4"/>
-          <p:cNvSpPr/>
-          <p:nvPr/>
-        </p:nvSpPr>
-        <p:spPr>
-          <a:xfrm>
-            <a:off x="548640" y="4764024"/>
-            <a:ext cx="6035040" cy="960120"/>
-          </a:xfrm>
-          <a:prstGeom prst="roundRect">
-            <a:avLst>
-              <a:gd name="adj" fmla="val 11429"/>
-            </a:avLst>
-          </a:prstGeom>
-          <a:solidFill>
-            <a:schemeClr val="bg2"/>
-          </a:solidFill>
-          <a:ln/>
-        </p:spPr>
-      </p:sp>
-      <p:sp>
-        <p:nvSpPr>
-          <p:cNvPr id="19" name="Proof 4 marker"/>
-          <p:cNvSpPr/>
-          <p:nvPr/>
-        </p:nvSpPr>
-        <p:spPr>
-          <a:xfrm>
-            <a:off x="749808" y="5038344"/>
-            <a:ext cx="411480" cy="411480"/>
-          </a:xfrm>
-          <a:prstGeom prst="ellipse">
-            <a:avLst/>
-          </a:prstGeom>
-          <a:solidFill>
-            <a:schemeClr val="accent1"/>
-          </a:solidFill>
-          <a:ln/>
-        </p:spPr>
-      </p:sp>
-      <p:sp>
-        <p:nvSpPr>
-          <p:cNvPr id="20" name="Proof 4 glyph"/>
-          <p:cNvSpPr txBox="1"/>
-          <p:nvPr/>
-        </p:nvSpPr>
-        <p:spPr>
-          <a:xfrm>
-            <a:off x="749808" y="5038344"/>
-            <a:ext cx="411480" cy="411480"/>
-          </a:xfrm>
-          <a:prstGeom prst="rect">
-            <a:avLst/>
-          </a:prstGeom>
-          <a:noFill/>
-          <a:ln/>
-        </p:spPr>
-        <p:txBody>
-          <a:bodyPr wrap="square" lIns="0" tIns="0" rIns="0" bIns="0" rtlCol="0" anchor="ctr"/>
-          <a:lstStyle/>
-          <a:p>
-            <a:pPr algn="ctr" indent="0" marL="0">
-              <a:buNone/>
-            </a:pPr>
-            <a:r>
-              <a:rPr lang="en-US" sz="1600" b="1" dirty="0">
-                <a:solidFill>
-                  <a:schemeClr val="bg1"/>
-                </a:solidFill>
-              </a:rPr>
-              <a:t>→</a:t>
-            </a:r>
-            <a:endParaRPr lang="en-US" sz="1600" dirty="0"/>
-          </a:p>
-        </p:txBody>
-      </p:sp>
-      <p:sp>
-        <p:nvSpPr>
-          <p:cNvPr id="21" name="Proof 4 label"/>
-          <p:cNvSpPr txBox="1"/>
-          <p:nvPr/>
-        </p:nvSpPr>
-        <p:spPr>
-          <a:xfrm>
-            <a:off x="1325880" y="4892040"/>
-            <a:ext cx="5120640" cy="347472"/>
-          </a:xfrm>
-          <a:prstGeom prst="rect">
-            <a:avLst/>
-          </a:prstGeom>
-          <a:noFill/>
-          <a:ln/>
-        </p:spPr>
-        <p:txBody>
-          <a:bodyPr wrap="square" lIns="0" tIns="0" rIns="0" bIns="0" rtlCol="0" anchor="t"/>
-          <a:lstStyle/>
-          <a:p>
-            <a:pPr indent="0" marL="0">
-              <a:buNone/>
-            </a:pPr>
-            <a:r>
-              <a:rPr lang="en-US" sz="1600" b="1" dirty="0">
-                <a:solidFill>
-                  <a:schemeClr val="tx2"/>
-                </a:solidFill>
-              </a:rPr>
-              <a:t>Source code and event logs</a:t>
-            </a:r>
-            <a:endParaRPr lang="en-US" sz="1600" dirty="0"/>
-          </a:p>
-        </p:txBody>
-      </p:sp>
-      <p:sp>
-        <p:nvSpPr>
-          <p:cNvPr id="22" name="Proof 4 link"/>
-          <p:cNvSpPr txBox="1"/>
-          <p:nvPr/>
-        </p:nvSpPr>
-        <p:spPr>
-          <a:xfrm>
-            <a:off x="1325880" y="5257800"/>
-            <a:ext cx="5120640" cy="347472"/>
-          </a:xfrm>
-          <a:prstGeom prst="rect">
-            <a:avLst/>
-          </a:prstGeom>
-          <a:noFill/>
-          <a:ln/>
-        </p:spPr>
-        <p:txBody>
-          <a:bodyPr wrap="square" lIns="0" tIns="0" rIns="0" bIns="0" rtlCol="0" anchor="t"/>
-          <a:lstStyle/>
-          <a:p>
-            <a:pPr indent="0" marL="0">
-              <a:buNone/>
-            </a:pPr>
-            <a:r>
-              <a:rPr lang="en-US" sz="1400" u="sng" dirty="0">
-                <a:solidFill>
-                  <a:schemeClr val="accent6"/>
-                </a:solidFill>
-                <a:hlinkClick r:id="rId4" invalidUrl="" action="" tgtFrame="" tooltip="" history="1" highlightClick="0" endSnd="0">
-                  <a:extLst>
-                    <a:ext uri="{A12FA001-AC4F-418D-AE19-62706E023703}">
-                      <ahyp:hlinkClr xmlns:ahyp="http://schemas.microsoft.com/office/drawing/2018/hyperlinkcolor" val="tx"/>
-                    </a:ext>
-                  </a:extLst>
-                </a:hlinkClick>
-              </a:rPr>
-              <a:t>github.com/ch-lukas/salesforce-process-intelligence</a:t>
-            </a:r>
-            <a:endParaRPr lang="en-US" sz="1400" dirty="0"/>
-          </a:p>
-        </p:txBody>
-      </p:sp>
-      <p:sp>
-        <p:nvSpPr>
-          <p:cNvPr id="23" name="Screenshot frame"/>
-          <p:cNvSpPr/>
-          <p:nvPr/>
-        </p:nvSpPr>
-        <p:spPr>
-          <a:xfrm>
-            <a:off x="6903720" y="1371600"/>
-            <a:ext cx="4802925" cy="4434840"/>
+            <a:off x="658368" y="1440316"/>
+            <a:ext cx="2980944" cy="2011407"/>
           </a:xfrm>
           <a:prstGeom prst="rect">
             <a:avLst/>
@@ -10056,28 +6167,753 @@
       </p:sp>
       <p:pic>
         <p:nvPicPr>
-          <p:cNvPr id="24" name="Value case screenshot" descr="Value case one-pager on the hosted site">    </p:cNvPr>
+          <p:cNvPr id="5" name="Key step 1 image" descr="Salesforce CLI allowed under Connected Apps OAuth Usage; the CLI session signs every API call.">    </p:cNvPr>
           <p:cNvPicPr>
             <a:picLocks noChangeAspect="1"/>
           </p:cNvPicPr>
           <p:nvPr/>
         </p:nvPicPr>
         <p:blipFill>
-          <a:blip r:embed="rId5"/>
+          <a:blip r:embed="rId1"/>
           <a:stretch>
             <a:fillRect/>
           </a:stretch>
         </p:blipFill>
         <p:spPr>
           <a:xfrm>
-            <a:off x="6949440" y="1417320"/>
-            <a:ext cx="4711485" cy="4343400"/>
+            <a:off x="685800" y="1467748"/>
+            <a:ext cx="2926080" cy="1956543"/>
           </a:xfrm>
           <a:prstGeom prst="rect">
             <a:avLst/>
           </a:prstGeom>
         </p:spPr>
       </p:pic>
+      <p:sp>
+        <p:nvSpPr>
+          <p:cNvPr id="6" name="Key step 1 marker"/>
+          <p:cNvSpPr/>
+          <p:nvPr/>
+        </p:nvSpPr>
+        <p:spPr>
+          <a:xfrm>
+            <a:off x="3794760" y="1508760"/>
+            <a:ext cx="411480" cy="411480"/>
+          </a:xfrm>
+          <a:prstGeom prst="ellipse">
+            <a:avLst/>
+          </a:prstGeom>
+          <a:solidFill>
+            <a:schemeClr val="accent1"/>
+          </a:solidFill>
+          <a:ln/>
+        </p:spPr>
+      </p:sp>
+      <p:sp>
+        <p:nvSpPr>
+          <p:cNvPr id="7" name="Key step 1 number"/>
+          <p:cNvSpPr txBox="1"/>
+          <p:nvPr/>
+        </p:nvSpPr>
+        <p:spPr>
+          <a:xfrm>
+            <a:off x="3794760" y="1508760"/>
+            <a:ext cx="411480" cy="411480"/>
+          </a:xfrm>
+          <a:prstGeom prst="rect">
+            <a:avLst/>
+          </a:prstGeom>
+          <a:noFill/>
+          <a:ln/>
+        </p:spPr>
+        <p:txBody>
+          <a:bodyPr wrap="square" lIns="0" tIns="0" rIns="0" bIns="0" rtlCol="0" anchor="ctr"/>
+          <a:lstStyle/>
+          <a:p>
+            <a:pPr algn="ctr" indent="0" marL="0">
+              <a:buNone/>
+            </a:pPr>
+            <a:r>
+              <a:rPr lang="en-US" sz="1600" b="1" dirty="0">
+                <a:solidFill>
+                  <a:schemeClr val="bg1"/>
+                </a:solidFill>
+              </a:rPr>
+              <a:t>1</a:t>
+            </a:r>
+            <a:endParaRPr lang="en-US" sz="1600" dirty="0"/>
+          </a:p>
+        </p:txBody>
+      </p:sp>
+      <p:sp>
+        <p:nvSpPr>
+          <p:cNvPr id="8" name="Key step 1 title"/>
+          <p:cNvSpPr txBox="1"/>
+          <p:nvPr/>
+        </p:nvSpPr>
+        <p:spPr>
+          <a:xfrm>
+            <a:off x="3794760" y="2011680"/>
+            <a:ext cx="2057400" cy="365760"/>
+          </a:xfrm>
+          <a:prstGeom prst="rect">
+            <a:avLst/>
+          </a:prstGeom>
+          <a:noFill/>
+          <a:ln/>
+        </p:spPr>
+        <p:txBody>
+          <a:bodyPr wrap="square" lIns="0" tIns="0" rIns="0" bIns="0" rtlCol="0" anchor="t"/>
+          <a:lstStyle/>
+          <a:p>
+            <a:pPr indent="0" marL="0">
+              <a:buNone/>
+            </a:pPr>
+            <a:r>
+              <a:rPr lang="en-US" sz="1600" b="1" dirty="0">
+                <a:solidFill>
+                  <a:schemeClr val="tx2"/>
+                </a:solidFill>
+              </a:rPr>
+              <a:t>Connect</a:t>
+            </a:r>
+            <a:endParaRPr lang="en-US" sz="1600" dirty="0"/>
+          </a:p>
+        </p:txBody>
+      </p:sp>
+      <p:sp>
+        <p:nvSpPr>
+          <p:cNvPr id="9" name="Key step 1 body"/>
+          <p:cNvSpPr txBox="1"/>
+          <p:nvPr/>
+        </p:nvSpPr>
+        <p:spPr>
+          <a:xfrm>
+            <a:off x="3794760" y="2377440"/>
+            <a:ext cx="2057400" cy="1143000"/>
+          </a:xfrm>
+          <a:prstGeom prst="rect">
+            <a:avLst/>
+          </a:prstGeom>
+          <a:noFill/>
+          <a:ln/>
+        </p:spPr>
+        <p:txBody>
+          <a:bodyPr wrap="square" lIns="0" tIns="0" rIns="0" bIns="0" rtlCol="0" anchor="t"/>
+          <a:lstStyle/>
+          <a:p>
+            <a:pPr indent="0" marL="0">
+              <a:buNone/>
+            </a:pPr>
+            <a:r>
+              <a:rPr lang="en-US" sz="1400" dirty="0">
+                <a:solidFill>
+                  <a:schemeClr val="tx1"/>
+                </a:solidFill>
+              </a:rPr>
+              <a:t>Salesforce CLI allowed under Connected Apps OAuth Usage; the CLI session signs every API call.</a:t>
+            </a:r>
+            <a:endParaRPr lang="en-US" sz="1400" dirty="0"/>
+          </a:p>
+        </p:txBody>
+      </p:sp>
+      <p:sp>
+        <p:nvSpPr>
+          <p:cNvPr id="10" name="Key step 2 card"/>
+          <p:cNvSpPr/>
+          <p:nvPr/>
+        </p:nvSpPr>
+        <p:spPr>
+          <a:xfrm>
+            <a:off x="6172200" y="1280160"/>
+            <a:ext cx="5440680" cy="2331720"/>
+          </a:xfrm>
+          <a:prstGeom prst="roundRect">
+            <a:avLst>
+              <a:gd name="adj" fmla="val 4706"/>
+            </a:avLst>
+          </a:prstGeom>
+          <a:solidFill>
+            <a:schemeClr val="bg2"/>
+          </a:solidFill>
+          <a:ln/>
+        </p:spPr>
+      </p:sp>
+      <p:sp>
+        <p:nvSpPr>
+          <p:cNvPr id="11" name="Key step 2 frame"/>
+          <p:cNvSpPr/>
+          <p:nvPr/>
+        </p:nvSpPr>
+        <p:spPr>
+          <a:xfrm>
+            <a:off x="6281928" y="1434694"/>
+            <a:ext cx="2980944" cy="2022653"/>
+          </a:xfrm>
+          <a:prstGeom prst="rect">
+            <a:avLst/>
+          </a:prstGeom>
+          <a:solidFill>
+            <a:schemeClr val="bg1"/>
+          </a:solidFill>
+          <a:ln w="12700">
+            <a:solidFill>
+              <a:schemeClr val="accent3"/>
+            </a:solidFill>
+            <a:prstDash val="solid"/>
+          </a:ln>
+        </p:spPr>
+      </p:sp>
+      <p:pic>
+        <p:nvPicPr>
+          <p:cNvPr id="12" name="Key step 2 image" descr="seed.py loads 40 [Demo] deals and walks them through the org's own stages.">    </p:cNvPr>
+          <p:cNvPicPr>
+            <a:picLocks noChangeAspect="1"/>
+          </p:cNvPicPr>
+          <p:nvPr/>
+        </p:nvPicPr>
+        <p:blipFill>
+          <a:blip r:embed="rId2"/>
+          <a:stretch>
+            <a:fillRect/>
+          </a:stretch>
+        </p:blipFill>
+        <p:spPr>
+          <a:xfrm>
+            <a:off x="6309360" y="1462126"/>
+            <a:ext cx="2926080" cy="1967789"/>
+          </a:xfrm>
+          <a:prstGeom prst="rect">
+            <a:avLst/>
+          </a:prstGeom>
+        </p:spPr>
+      </p:pic>
+      <p:sp>
+        <p:nvSpPr>
+          <p:cNvPr id="13" name="Key step 2 marker"/>
+          <p:cNvSpPr/>
+          <p:nvPr/>
+        </p:nvSpPr>
+        <p:spPr>
+          <a:xfrm>
+            <a:off x="9418320" y="1508760"/>
+            <a:ext cx="411480" cy="411480"/>
+          </a:xfrm>
+          <a:prstGeom prst="ellipse">
+            <a:avLst/>
+          </a:prstGeom>
+          <a:solidFill>
+            <a:schemeClr val="accent1"/>
+          </a:solidFill>
+          <a:ln/>
+        </p:spPr>
+      </p:sp>
+      <p:sp>
+        <p:nvSpPr>
+          <p:cNvPr id="14" name="Key step 2 number"/>
+          <p:cNvSpPr txBox="1"/>
+          <p:nvPr/>
+        </p:nvSpPr>
+        <p:spPr>
+          <a:xfrm>
+            <a:off x="9418320" y="1508760"/>
+            <a:ext cx="411480" cy="411480"/>
+          </a:xfrm>
+          <a:prstGeom prst="rect">
+            <a:avLst/>
+          </a:prstGeom>
+          <a:noFill/>
+          <a:ln/>
+        </p:spPr>
+        <p:txBody>
+          <a:bodyPr wrap="square" lIns="0" tIns="0" rIns="0" bIns="0" rtlCol="0" anchor="ctr"/>
+          <a:lstStyle/>
+          <a:p>
+            <a:pPr algn="ctr" indent="0" marL="0">
+              <a:buNone/>
+            </a:pPr>
+            <a:r>
+              <a:rPr lang="en-US" sz="1600" b="1" dirty="0">
+                <a:solidFill>
+                  <a:schemeClr val="bg1"/>
+                </a:solidFill>
+              </a:rPr>
+              <a:t>2</a:t>
+            </a:r>
+            <a:endParaRPr lang="en-US" sz="1600" dirty="0"/>
+          </a:p>
+        </p:txBody>
+      </p:sp>
+      <p:sp>
+        <p:nvSpPr>
+          <p:cNvPr id="15" name="Key step 2 title"/>
+          <p:cNvSpPr txBox="1"/>
+          <p:nvPr/>
+        </p:nvSpPr>
+        <p:spPr>
+          <a:xfrm>
+            <a:off x="9418320" y="2011680"/>
+            <a:ext cx="2057400" cy="365760"/>
+          </a:xfrm>
+          <a:prstGeom prst="rect">
+            <a:avLst/>
+          </a:prstGeom>
+          <a:noFill/>
+          <a:ln/>
+        </p:spPr>
+        <p:txBody>
+          <a:bodyPr wrap="square" lIns="0" tIns="0" rIns="0" bIns="0" rtlCol="0" anchor="t"/>
+          <a:lstStyle/>
+          <a:p>
+            <a:pPr indent="0" marL="0">
+              <a:buNone/>
+            </a:pPr>
+            <a:r>
+              <a:rPr lang="en-US" sz="1600" b="1" dirty="0">
+                <a:solidFill>
+                  <a:schemeClr val="tx2"/>
+                </a:solidFill>
+              </a:rPr>
+              <a:t>Seed</a:t>
+            </a:r>
+            <a:endParaRPr lang="en-US" sz="1600" dirty="0"/>
+          </a:p>
+        </p:txBody>
+      </p:sp>
+      <p:sp>
+        <p:nvSpPr>
+          <p:cNvPr id="16" name="Key step 2 body"/>
+          <p:cNvSpPr txBox="1"/>
+          <p:nvPr/>
+        </p:nvSpPr>
+        <p:spPr>
+          <a:xfrm>
+            <a:off x="9418320" y="2377440"/>
+            <a:ext cx="2057400" cy="1143000"/>
+          </a:xfrm>
+          <a:prstGeom prst="rect">
+            <a:avLst/>
+          </a:prstGeom>
+          <a:noFill/>
+          <a:ln/>
+        </p:spPr>
+        <p:txBody>
+          <a:bodyPr wrap="square" lIns="0" tIns="0" rIns="0" bIns="0" rtlCol="0" anchor="t"/>
+          <a:lstStyle/>
+          <a:p>
+            <a:pPr indent="0" marL="0">
+              <a:buNone/>
+            </a:pPr>
+            <a:r>
+              <a:rPr lang="en-US" sz="1400" dirty="0">
+                <a:solidFill>
+                  <a:schemeClr val="tx1"/>
+                </a:solidFill>
+              </a:rPr>
+              <a:t>seed.py loads 40 [Demo] deals and walks them through the org's own stages.</a:t>
+            </a:r>
+            <a:endParaRPr lang="en-US" sz="1400" dirty="0"/>
+          </a:p>
+        </p:txBody>
+      </p:sp>
+      <p:sp>
+        <p:nvSpPr>
+          <p:cNvPr id="17" name="Key step 3 card"/>
+          <p:cNvSpPr/>
+          <p:nvPr/>
+        </p:nvSpPr>
+        <p:spPr>
+          <a:xfrm>
+            <a:off x="548640" y="3794760"/>
+            <a:ext cx="5440680" cy="2331720"/>
+          </a:xfrm>
+          <a:prstGeom prst="roundRect">
+            <a:avLst>
+              <a:gd name="adj" fmla="val 4706"/>
+            </a:avLst>
+          </a:prstGeom>
+          <a:solidFill>
+            <a:schemeClr val="bg2"/>
+          </a:solidFill>
+          <a:ln/>
+        </p:spPr>
+      </p:sp>
+      <p:sp>
+        <p:nvSpPr>
+          <p:cNvPr id="18" name="Key step 3 frame"/>
+          <p:cNvSpPr/>
+          <p:nvPr/>
+        </p:nvSpPr>
+        <p:spPr>
+          <a:xfrm>
+            <a:off x="658368" y="4152319"/>
+            <a:ext cx="2980944" cy="1616601"/>
+          </a:xfrm>
+          <a:prstGeom prst="rect">
+            <a:avLst/>
+          </a:prstGeom>
+          <a:solidFill>
+            <a:schemeClr val="bg1"/>
+          </a:solidFill>
+          <a:ln w="12700">
+            <a:solidFill>
+              <a:schemeClr val="accent3"/>
+            </a:solidFill>
+            <a:prstDash val="solid"/>
+          </a:ln>
+        </p:spPr>
+      </p:sp>
+      <p:pic>
+        <p:nvPicPr>
+          <p:cNvPr id="19" name="Key step 3 image" descr="OpportunityHistory and Task become events, one case per Opportunity. Shown: a re-quote loop.">    </p:cNvPr>
+          <p:cNvPicPr>
+            <a:picLocks noChangeAspect="1"/>
+          </p:cNvPicPr>
+          <p:nvPr/>
+        </p:nvPicPr>
+        <p:blipFill>
+          <a:blip r:embed="rId3"/>
+          <a:stretch>
+            <a:fillRect/>
+          </a:stretch>
+        </p:blipFill>
+        <p:spPr>
+          <a:xfrm>
+            <a:off x="685800" y="4179751"/>
+            <a:ext cx="2926080" cy="1561737"/>
+          </a:xfrm>
+          <a:prstGeom prst="rect">
+            <a:avLst/>
+          </a:prstGeom>
+        </p:spPr>
+      </p:pic>
+      <p:sp>
+        <p:nvSpPr>
+          <p:cNvPr id="20" name="Key step 3 marker"/>
+          <p:cNvSpPr/>
+          <p:nvPr/>
+        </p:nvSpPr>
+        <p:spPr>
+          <a:xfrm>
+            <a:off x="3794760" y="4023360"/>
+            <a:ext cx="411480" cy="411480"/>
+          </a:xfrm>
+          <a:prstGeom prst="ellipse">
+            <a:avLst/>
+          </a:prstGeom>
+          <a:solidFill>
+            <a:schemeClr val="accent1"/>
+          </a:solidFill>
+          <a:ln/>
+        </p:spPr>
+      </p:sp>
+      <p:sp>
+        <p:nvSpPr>
+          <p:cNvPr id="21" name="Key step 3 number"/>
+          <p:cNvSpPr txBox="1"/>
+          <p:nvPr/>
+        </p:nvSpPr>
+        <p:spPr>
+          <a:xfrm>
+            <a:off x="3794760" y="4023360"/>
+            <a:ext cx="411480" cy="411480"/>
+          </a:xfrm>
+          <a:prstGeom prst="rect">
+            <a:avLst/>
+          </a:prstGeom>
+          <a:noFill/>
+          <a:ln/>
+        </p:spPr>
+        <p:txBody>
+          <a:bodyPr wrap="square" lIns="0" tIns="0" rIns="0" bIns="0" rtlCol="0" anchor="ctr"/>
+          <a:lstStyle/>
+          <a:p>
+            <a:pPr algn="ctr" indent="0" marL="0">
+              <a:buNone/>
+            </a:pPr>
+            <a:r>
+              <a:rPr lang="en-US" sz="1600" b="1" dirty="0">
+                <a:solidFill>
+                  <a:schemeClr val="bg1"/>
+                </a:solidFill>
+              </a:rPr>
+              <a:t>3</a:t>
+            </a:r>
+            <a:endParaRPr lang="en-US" sz="1600" dirty="0"/>
+          </a:p>
+        </p:txBody>
+      </p:sp>
+      <p:sp>
+        <p:nvSpPr>
+          <p:cNvPr id="22" name="Key step 3 title"/>
+          <p:cNvSpPr txBox="1"/>
+          <p:nvPr/>
+        </p:nvSpPr>
+        <p:spPr>
+          <a:xfrm>
+            <a:off x="3794760" y="4526280"/>
+            <a:ext cx="2057400" cy="365760"/>
+          </a:xfrm>
+          <a:prstGeom prst="rect">
+            <a:avLst/>
+          </a:prstGeom>
+          <a:noFill/>
+          <a:ln/>
+        </p:spPr>
+        <p:txBody>
+          <a:bodyPr wrap="square" lIns="0" tIns="0" rIns="0" bIns="0" rtlCol="0" anchor="t"/>
+          <a:lstStyle/>
+          <a:p>
+            <a:pPr indent="0" marL="0">
+              <a:buNone/>
+            </a:pPr>
+            <a:r>
+              <a:rPr lang="en-US" sz="1600" b="1" dirty="0">
+                <a:solidFill>
+                  <a:schemeClr val="tx2"/>
+                </a:solidFill>
+              </a:rPr>
+              <a:t>Extract</a:t>
+            </a:r>
+            <a:endParaRPr lang="en-US" sz="1600" dirty="0"/>
+          </a:p>
+        </p:txBody>
+      </p:sp>
+      <p:sp>
+        <p:nvSpPr>
+          <p:cNvPr id="23" name="Key step 3 body"/>
+          <p:cNvSpPr txBox="1"/>
+          <p:nvPr/>
+        </p:nvSpPr>
+        <p:spPr>
+          <a:xfrm>
+            <a:off x="3794760" y="4892040"/>
+            <a:ext cx="2057400" cy="1143000"/>
+          </a:xfrm>
+          <a:prstGeom prst="rect">
+            <a:avLst/>
+          </a:prstGeom>
+          <a:noFill/>
+          <a:ln/>
+        </p:spPr>
+        <p:txBody>
+          <a:bodyPr wrap="square" lIns="0" tIns="0" rIns="0" bIns="0" rtlCol="0" anchor="t"/>
+          <a:lstStyle/>
+          <a:p>
+            <a:pPr indent="0" marL="0">
+              <a:buNone/>
+            </a:pPr>
+            <a:r>
+              <a:rPr lang="en-US" sz="1400" dirty="0">
+                <a:solidFill>
+                  <a:schemeClr val="tx1"/>
+                </a:solidFill>
+              </a:rPr>
+              <a:t>OpportunityHistory and Task become events, one case per Opportunity. Shown: a re-quote loop.</a:t>
+            </a:r>
+            <a:endParaRPr lang="en-US" sz="1400" dirty="0"/>
+          </a:p>
+        </p:txBody>
+      </p:sp>
+      <p:sp>
+        <p:nvSpPr>
+          <p:cNvPr id="24" name="Key step 4 card"/>
+          <p:cNvSpPr/>
+          <p:nvPr/>
+        </p:nvSpPr>
+        <p:spPr>
+          <a:xfrm>
+            <a:off x="6172200" y="3794760"/>
+            <a:ext cx="5440680" cy="2331720"/>
+          </a:xfrm>
+          <a:prstGeom prst="roundRect">
+            <a:avLst>
+              <a:gd name="adj" fmla="val 4706"/>
+            </a:avLst>
+          </a:prstGeom>
+          <a:solidFill>
+            <a:schemeClr val="bg2"/>
+          </a:solidFill>
+          <a:ln/>
+        </p:spPr>
+      </p:sp>
+      <p:sp>
+        <p:nvSpPr>
+          <p:cNvPr id="25" name="Key step 4 frame"/>
+          <p:cNvSpPr/>
+          <p:nvPr/>
+        </p:nvSpPr>
+        <p:spPr>
+          <a:xfrm>
+            <a:off x="6281928" y="3949420"/>
+            <a:ext cx="2980944" cy="2022401"/>
+          </a:xfrm>
+          <a:prstGeom prst="rect">
+            <a:avLst/>
+          </a:prstGeom>
+          <a:solidFill>
+            <a:schemeClr val="bg1"/>
+          </a:solidFill>
+          <a:ln w="12700">
+            <a:solidFill>
+              <a:schemeClr val="accent3"/>
+            </a:solidFill>
+            <a:prstDash val="solid"/>
+          </a:ln>
+        </p:spPr>
+      </p:sp>
+      <p:pic>
+        <p:nvPicPr>
+          <p:cNvPr id="26" name="Key step 4 image" descr="The event log (CSV / XES) feeds the hosted dashboard and value case.">    </p:cNvPr>
+          <p:cNvPicPr>
+            <a:picLocks noChangeAspect="1"/>
+          </p:cNvPicPr>
+          <p:nvPr/>
+        </p:nvPicPr>
+        <p:blipFill>
+          <a:blip r:embed="rId4"/>
+          <a:stretch>
+            <a:fillRect/>
+          </a:stretch>
+        </p:blipFill>
+        <p:spPr>
+          <a:xfrm>
+            <a:off x="6309360" y="3976852"/>
+            <a:ext cx="2926080" cy="1967537"/>
+          </a:xfrm>
+          <a:prstGeom prst="rect">
+            <a:avLst/>
+          </a:prstGeom>
+        </p:spPr>
+      </p:pic>
+      <p:sp>
+        <p:nvSpPr>
+          <p:cNvPr id="27" name="Key step 4 marker"/>
+          <p:cNvSpPr/>
+          <p:nvPr/>
+        </p:nvSpPr>
+        <p:spPr>
+          <a:xfrm>
+            <a:off x="9418320" y="4023360"/>
+            <a:ext cx="411480" cy="411480"/>
+          </a:xfrm>
+          <a:prstGeom prst="ellipse">
+            <a:avLst/>
+          </a:prstGeom>
+          <a:solidFill>
+            <a:schemeClr val="accent1"/>
+          </a:solidFill>
+          <a:ln/>
+        </p:spPr>
+      </p:sp>
+      <p:sp>
+        <p:nvSpPr>
+          <p:cNvPr id="28" name="Key step 4 number"/>
+          <p:cNvSpPr txBox="1"/>
+          <p:nvPr/>
+        </p:nvSpPr>
+        <p:spPr>
+          <a:xfrm>
+            <a:off x="9418320" y="4023360"/>
+            <a:ext cx="411480" cy="411480"/>
+          </a:xfrm>
+          <a:prstGeom prst="rect">
+            <a:avLst/>
+          </a:prstGeom>
+          <a:noFill/>
+          <a:ln/>
+        </p:spPr>
+        <p:txBody>
+          <a:bodyPr wrap="square" lIns="0" tIns="0" rIns="0" bIns="0" rtlCol="0" anchor="ctr"/>
+          <a:lstStyle/>
+          <a:p>
+            <a:pPr algn="ctr" indent="0" marL="0">
+              <a:buNone/>
+            </a:pPr>
+            <a:r>
+              <a:rPr lang="en-US" sz="1600" b="1" dirty="0">
+                <a:solidFill>
+                  <a:schemeClr val="bg1"/>
+                </a:solidFill>
+              </a:rPr>
+              <a:t>4</a:t>
+            </a:r>
+            <a:endParaRPr lang="en-US" sz="1600" dirty="0"/>
+          </a:p>
+        </p:txBody>
+      </p:sp>
+      <p:sp>
+        <p:nvSpPr>
+          <p:cNvPr id="29" name="Key step 4 title"/>
+          <p:cNvSpPr txBox="1"/>
+          <p:nvPr/>
+        </p:nvSpPr>
+        <p:spPr>
+          <a:xfrm>
+            <a:off x="9418320" y="4526280"/>
+            <a:ext cx="2057400" cy="365760"/>
+          </a:xfrm>
+          <a:prstGeom prst="rect">
+            <a:avLst/>
+          </a:prstGeom>
+          <a:noFill/>
+          <a:ln/>
+        </p:spPr>
+        <p:txBody>
+          <a:bodyPr wrap="square" lIns="0" tIns="0" rIns="0" bIns="0" rtlCol="0" anchor="t"/>
+          <a:lstStyle/>
+          <a:p>
+            <a:pPr indent="0" marL="0">
+              <a:buNone/>
+            </a:pPr>
+            <a:r>
+              <a:rPr lang="en-US" sz="1600" b="1" dirty="0">
+                <a:solidFill>
+                  <a:schemeClr val="tx2"/>
+                </a:solidFill>
+              </a:rPr>
+              <a:t>Mine and publish</a:t>
+            </a:r>
+            <a:endParaRPr lang="en-US" sz="1600" dirty="0"/>
+          </a:p>
+        </p:txBody>
+      </p:sp>
+      <p:sp>
+        <p:nvSpPr>
+          <p:cNvPr id="30" name="Key step 4 body"/>
+          <p:cNvSpPr txBox="1"/>
+          <p:nvPr/>
+        </p:nvSpPr>
+        <p:spPr>
+          <a:xfrm>
+            <a:off x="9418320" y="4892040"/>
+            <a:ext cx="2057400" cy="1143000"/>
+          </a:xfrm>
+          <a:prstGeom prst="rect">
+            <a:avLst/>
+          </a:prstGeom>
+          <a:noFill/>
+          <a:ln/>
+        </p:spPr>
+        <p:txBody>
+          <a:bodyPr wrap="square" lIns="0" tIns="0" rIns="0" bIns="0" rtlCol="0" anchor="t"/>
+          <a:lstStyle/>
+          <a:p>
+            <a:pPr indent="0" marL="0">
+              <a:buNone/>
+            </a:pPr>
+            <a:r>
+              <a:rPr lang="en-US" sz="1400" dirty="0">
+                <a:solidFill>
+                  <a:schemeClr val="tx1"/>
+                </a:solidFill>
+              </a:rPr>
+              <a:t>The event log (CSV / XES) feeds the hosted dashboard and value case.</a:t>
+            </a:r>
+            <a:endParaRPr lang="en-US" sz="1400" dirty="0"/>
+          </a:p>
+        </p:txBody>
+      </p:sp>
       <p:sp>
         <p:nvSpPr>
           <p:cNvPr id="25" name="Slide Number Placeholder 0"/>
@@ -10150,29 +6986,7 @@
       </p:grpSpPr>
       <p:sp>
         <p:nvSpPr>
-          <p:cNvPr id="2" name="Decor circle large"/>
-          <p:cNvSpPr/>
-          <p:nvPr/>
-        </p:nvSpPr>
-        <p:spPr>
-          <a:xfrm>
-            <a:off x="9326880" y="4023360"/>
-            <a:ext cx="4937760" cy="4937760"/>
-          </a:xfrm>
-          <a:prstGeom prst="ellipse">
-            <a:avLst/>
-          </a:prstGeom>
-          <a:solidFill>
-            <a:schemeClr val="accent1">
-              <a:alpha val="25000"/>
-            </a:schemeClr>
-          </a:solidFill>
-          <a:ln/>
-        </p:spPr>
-      </p:sp>
-      <p:sp>
-        <p:nvSpPr>
-          <p:cNvPr id="3" name="Text 0"/>
+          <p:cNvPr id="2" name="Text 0"/>
           <p:cNvSpPr/>
           <p:nvPr>
             <p:ph idx="100" type="title" hasCustomPrompt="1"/>
@@ -10180,8 +6994,8 @@
         </p:nvSpPr>
         <p:spPr>
           <a:xfrm>
-            <a:off x="731520" y="548640"/>
-            <a:ext cx="10698480" cy="914400"/>
+            <a:off x="548640" y="320040"/>
+            <a:ext cx="11064240" cy="822960"/>
           </a:xfrm>
           <a:prstGeom prst="rect">
             <a:avLst/>
@@ -10197,49 +7011,105 @@
               <a:buNone/>
             </a:pPr>
             <a:r>
-              <a:rPr lang="en-US" sz="3600" b="1" dirty="0">
-                <a:solidFill>
-                  <a:schemeClr val="bg1"/>
-                </a:solidFill>
-              </a:rPr>
-              <a:t>Turning the finding into a decision</a:t>
-            </a:r>
-            <a:endParaRPr lang="en-US" sz="3600" dirty="0"/>
-          </a:p>
-        </p:txBody>
-      </p:sp>
-      <p:sp>
-        <p:nvSpPr>
-          <p:cNvPr id="4" name="Next 1 card"/>
+              <a:rPr lang="en-US" sz="3000" b="1" dirty="0">
+                <a:solidFill>
+                  <a:schemeClr val="tx2"/>
+                </a:solidFill>
+              </a:rPr>
+              <a:t>Everything is live and open to inspect</a:t>
+            </a:r>
+            <a:endParaRPr lang="en-US" sz="3000" dirty="0"/>
+          </a:p>
+        </p:txBody>
+      </p:sp>
+      <p:sp>
+        <p:nvSpPr>
+          <p:cNvPr id="3" name="Proof 1"/>
           <p:cNvSpPr/>
           <p:nvPr/>
         </p:nvSpPr>
         <p:spPr>
           <a:xfrm>
-            <a:off x="731520" y="1828800"/>
-            <a:ext cx="3337560" cy="2286000"/>
+            <a:off x="548640" y="1417320"/>
+            <a:ext cx="6035040" cy="960120"/>
           </a:xfrm>
           <a:prstGeom prst="roundRect">
             <a:avLst>
-              <a:gd name="adj" fmla="val 4800"/>
+              <a:gd name="adj" fmla="val 11429"/>
             </a:avLst>
           </a:prstGeom>
           <a:solidFill>
-            <a:schemeClr val="accent6"/>
+            <a:schemeClr val="bg2"/>
           </a:solidFill>
           <a:ln/>
         </p:spPr>
       </p:sp>
       <p:sp>
         <p:nvSpPr>
-          <p:cNvPr id="5" name="Next 1 heading"/>
+          <p:cNvPr id="4" name="Proof 1 marker"/>
+          <p:cNvSpPr/>
+          <p:nvPr/>
+        </p:nvSpPr>
+        <p:spPr>
+          <a:xfrm>
+            <a:off x="749808" y="1691640"/>
+            <a:ext cx="411480" cy="411480"/>
+          </a:xfrm>
+          <a:prstGeom prst="ellipse">
+            <a:avLst/>
+          </a:prstGeom>
+          <a:solidFill>
+            <a:schemeClr val="accent1"/>
+          </a:solidFill>
+          <a:ln/>
+        </p:spPr>
+      </p:sp>
+      <p:sp>
+        <p:nvSpPr>
+          <p:cNvPr id="5" name="Proof 1 glyph"/>
           <p:cNvSpPr txBox="1"/>
           <p:nvPr/>
         </p:nvSpPr>
         <p:spPr>
           <a:xfrm>
-            <a:off x="1005840" y="2103120"/>
-            <a:ext cx="2788920" cy="457200"/>
+            <a:off x="749808" y="1691640"/>
+            <a:ext cx="411480" cy="411480"/>
+          </a:xfrm>
+          <a:prstGeom prst="rect">
+            <a:avLst/>
+          </a:prstGeom>
+          <a:noFill/>
+          <a:ln/>
+        </p:spPr>
+        <p:txBody>
+          <a:bodyPr wrap="square" lIns="0" tIns="0" rIns="0" bIns="0" rtlCol="0" anchor="ctr"/>
+          <a:lstStyle/>
+          <a:p>
+            <a:pPr algn="ctr" indent="0" marL="0">
+              <a:buNone/>
+            </a:pPr>
+            <a:r>
+              <a:rPr lang="en-US" sz="1600" b="1" dirty="0">
+                <a:solidFill>
+                  <a:schemeClr val="bg1"/>
+                </a:solidFill>
+              </a:rPr>
+              <a:t>→</a:t>
+            </a:r>
+            <a:endParaRPr lang="en-US" sz="1600" dirty="0"/>
+          </a:p>
+        </p:txBody>
+      </p:sp>
+      <p:sp>
+        <p:nvSpPr>
+          <p:cNvPr id="6" name="Proof 1 label"/>
+          <p:cNvSpPr txBox="1"/>
+          <p:nvPr/>
+        </p:nvSpPr>
+        <p:spPr>
+          <a:xfrm>
+            <a:off x="1325880" y="1545336"/>
+            <a:ext cx="5120640" cy="347472"/>
           </a:xfrm>
           <a:prstGeom prst="rect">
             <a:avLst/>
@@ -10255,27 +7125,27 @@
               <a:buNone/>
             </a:pPr>
             <a:r>
-              <a:rPr lang="en-US" sz="2200" b="1" dirty="0">
-                <a:solidFill>
-                  <a:schemeClr val="accent3"/>
-                </a:solidFill>
-              </a:rPr>
-              <a:t>Validate</a:t>
-            </a:r>
-            <a:endParaRPr lang="en-US" sz="2200" dirty="0"/>
-          </a:p>
-        </p:txBody>
-      </p:sp>
-      <p:sp>
-        <p:nvSpPr>
-          <p:cNvPr id="6" name="Next 1 body"/>
+              <a:rPr lang="en-US" sz="1600" b="1" dirty="0">
+                <a:solidFill>
+                  <a:schemeClr val="tx2"/>
+                </a:solidFill>
+              </a:rPr>
+              <a:t>Process dashboard</a:t>
+            </a:r>
+            <a:endParaRPr lang="en-US" sz="1600" dirty="0"/>
+          </a:p>
+        </p:txBody>
+      </p:sp>
+      <p:sp>
+        <p:nvSpPr>
+          <p:cNvPr id="7" name="Proof 1 link"/>
           <p:cNvSpPr txBox="1"/>
           <p:nvPr/>
         </p:nvSpPr>
         <p:spPr>
           <a:xfrm>
-            <a:off x="1005840" y="2697480"/>
-            <a:ext cx="2788920" cy="1280160"/>
+            <a:off x="1325880" y="1911096"/>
+            <a:ext cx="5120640" cy="347472"/>
           </a:xfrm>
           <a:prstGeom prst="rect">
             <a:avLst/>
@@ -10291,49 +7161,112 @@
               <a:buNone/>
             </a:pPr>
             <a:r>
-              <a:rPr lang="en-US" sz="1600" dirty="0">
-                <a:solidFill>
-                  <a:schemeClr val="bg1"/>
-                </a:solidFill>
-              </a:rPr>
-              <a:t>Run the same extract on the production org and confirm approval waits and re-quote rates with RevOps.</a:t>
-            </a:r>
-            <a:endParaRPr lang="en-US" sz="1600" dirty="0"/>
-          </a:p>
-        </p:txBody>
-      </p:sp>
-      <p:sp>
-        <p:nvSpPr>
-          <p:cNvPr id="7" name="Next 2 card"/>
+              <a:rPr lang="en-US" sz="1400" u="sng" dirty="0">
+                <a:solidFill>
+                  <a:schemeClr val="accent6"/>
+                </a:solidFill>
+                <a:hlinkClick r:id="rId1" invalidUrl="" action="" tgtFrame="" tooltip="" history="1" highlightClick="0" endSnd="0">
+                  <a:extLst>
+                    <a:ext uri="{A12FA001-AC4F-418D-AE19-62706E023703}">
+                      <ahyp:hlinkClr xmlns:ahyp="http://schemas.microsoft.com/office/drawing/2018/hyperlinkcolor" val="tx"/>
+                    </a:ext>
+                  </a:extLst>
+                </a:hlinkClick>
+              </a:rPr>
+              <a:t>salesforce-process-intelligence.vercel.app</a:t>
+            </a:r>
+            <a:endParaRPr lang="en-US" sz="1400" dirty="0"/>
+          </a:p>
+        </p:txBody>
+      </p:sp>
+      <p:sp>
+        <p:nvSpPr>
+          <p:cNvPr id="8" name="Proof 2"/>
           <p:cNvSpPr/>
           <p:nvPr/>
         </p:nvSpPr>
         <p:spPr>
           <a:xfrm>
-            <a:off x="4343400" y="1828800"/>
-            <a:ext cx="3337560" cy="2286000"/>
+            <a:off x="548640" y="2532888"/>
+            <a:ext cx="6035040" cy="960120"/>
           </a:xfrm>
           <a:prstGeom prst="roundRect">
             <a:avLst>
-              <a:gd name="adj" fmla="val 4800"/>
+              <a:gd name="adj" fmla="val 11429"/>
             </a:avLst>
           </a:prstGeom>
           <a:solidFill>
-            <a:schemeClr val="accent6"/>
+            <a:schemeClr val="bg2"/>
           </a:solidFill>
           <a:ln/>
         </p:spPr>
       </p:sp>
       <p:sp>
         <p:nvSpPr>
-          <p:cNvPr id="8" name="Next 2 heading"/>
+          <p:cNvPr id="9" name="Proof 2 marker"/>
+          <p:cNvSpPr/>
+          <p:nvPr/>
+        </p:nvSpPr>
+        <p:spPr>
+          <a:xfrm>
+            <a:off x="749808" y="2807208"/>
+            <a:ext cx="411480" cy="411480"/>
+          </a:xfrm>
+          <a:prstGeom prst="ellipse">
+            <a:avLst/>
+          </a:prstGeom>
+          <a:solidFill>
+            <a:schemeClr val="accent1"/>
+          </a:solidFill>
+          <a:ln/>
+        </p:spPr>
+      </p:sp>
+      <p:sp>
+        <p:nvSpPr>
+          <p:cNvPr id="10" name="Proof 2 glyph"/>
           <p:cNvSpPr txBox="1"/>
           <p:nvPr/>
         </p:nvSpPr>
         <p:spPr>
           <a:xfrm>
-            <a:off x="4617720" y="2103120"/>
-            <a:ext cx="2788920" cy="457200"/>
+            <a:off x="749808" y="2807208"/>
+            <a:ext cx="411480" cy="411480"/>
+          </a:xfrm>
+          <a:prstGeom prst="rect">
+            <a:avLst/>
+          </a:prstGeom>
+          <a:noFill/>
+          <a:ln/>
+        </p:spPr>
+        <p:txBody>
+          <a:bodyPr wrap="square" lIns="0" tIns="0" rIns="0" bIns="0" rtlCol="0" anchor="ctr"/>
+          <a:lstStyle/>
+          <a:p>
+            <a:pPr algn="ctr" indent="0" marL="0">
+              <a:buNone/>
+            </a:pPr>
+            <a:r>
+              <a:rPr lang="en-US" sz="1600" b="1" dirty="0">
+                <a:solidFill>
+                  <a:schemeClr val="bg1"/>
+                </a:solidFill>
+              </a:rPr>
+              <a:t>→</a:t>
+            </a:r>
+            <a:endParaRPr lang="en-US" sz="1600" dirty="0"/>
+          </a:p>
+        </p:txBody>
+      </p:sp>
+      <p:sp>
+        <p:nvSpPr>
+          <p:cNvPr id="11" name="Proof 2 label"/>
+          <p:cNvSpPr txBox="1"/>
+          <p:nvPr/>
+        </p:nvSpPr>
+        <p:spPr>
+          <a:xfrm>
+            <a:off x="1325880" y="2660904"/>
+            <a:ext cx="5120640" cy="347472"/>
           </a:xfrm>
           <a:prstGeom prst="rect">
             <a:avLst/>
@@ -10349,27 +7282,27 @@
               <a:buNone/>
             </a:pPr>
             <a:r>
-              <a:rPr lang="en-US" sz="2200" b="1" dirty="0">
-                <a:solidFill>
-                  <a:schemeClr val="accent3"/>
-                </a:solidFill>
-              </a:rPr>
-              <a:t>Act</a:t>
-            </a:r>
-            <a:endParaRPr lang="en-US" sz="2200" dirty="0"/>
-          </a:p>
-        </p:txBody>
-      </p:sp>
-      <p:sp>
-        <p:nvSpPr>
-          <p:cNvPr id="9" name="Next 2 body"/>
+              <a:rPr lang="en-US" sz="1600" b="1" dirty="0">
+                <a:solidFill>
+                  <a:schemeClr val="tx2"/>
+                </a:solidFill>
+              </a:rPr>
+              <a:t>Value case one-pager</a:t>
+            </a:r>
+            <a:endParaRPr lang="en-US" sz="1600" dirty="0"/>
+          </a:p>
+        </p:txBody>
+      </p:sp>
+      <p:sp>
+        <p:nvSpPr>
+          <p:cNvPr id="12" name="Proof 2 link"/>
           <p:cNvSpPr txBox="1"/>
           <p:nvPr/>
         </p:nvSpPr>
         <p:spPr>
           <a:xfrm>
-            <a:off x="4617720" y="2697480"/>
-            <a:ext cx="2788920" cy="1280160"/>
+            <a:off x="1325880" y="3026664"/>
+            <a:ext cx="5120640" cy="347472"/>
           </a:xfrm>
           <a:prstGeom prst="rect">
             <a:avLst/>
@@ -10385,49 +7318,112 @@
               <a:buNone/>
             </a:pPr>
             <a:r>
-              <a:rPr lang="en-US" sz="1600" dirty="0">
-                <a:solidFill>
-                  <a:schemeClr val="bg1"/>
-                </a:solidFill>
-              </a:rPr>
-              <a:t>Pilot a delegated approval threshold for EMEA discounts up to 30% and make Qualification a required gate.</a:t>
-            </a:r>
-            <a:endParaRPr lang="en-US" sz="1600" dirty="0"/>
-          </a:p>
-        </p:txBody>
-      </p:sp>
-      <p:sp>
-        <p:nvSpPr>
-          <p:cNvPr id="10" name="Next 3 card"/>
+              <a:rPr lang="en-US" sz="1400" u="sng" dirty="0">
+                <a:solidFill>
+                  <a:schemeClr val="accent6"/>
+                </a:solidFill>
+                <a:hlinkClick r:id="rId2" invalidUrl="" action="" tgtFrame="" tooltip="" history="1" highlightClick="0" endSnd="0">
+                  <a:extLst>
+                    <a:ext uri="{A12FA001-AC4F-418D-AE19-62706E023703}">
+                      <ahyp:hlinkClr xmlns:ahyp="http://schemas.microsoft.com/office/drawing/2018/hyperlinkcolor" val="tx"/>
+                    </a:ext>
+                  </a:extLst>
+                </a:hlinkClick>
+              </a:rPr>
+              <a:t>salesforce-process-intelligence.vercel.app/value-case.html</a:t>
+            </a:r>
+            <a:endParaRPr lang="en-US" sz="1400" dirty="0"/>
+          </a:p>
+        </p:txBody>
+      </p:sp>
+      <p:sp>
+        <p:nvSpPr>
+          <p:cNvPr id="13" name="Proof 3"/>
           <p:cNvSpPr/>
           <p:nvPr/>
         </p:nvSpPr>
         <p:spPr>
           <a:xfrm>
-            <a:off x="7955280" y="1828800"/>
-            <a:ext cx="3337560" cy="2286000"/>
+            <a:off x="548640" y="3648456"/>
+            <a:ext cx="6035040" cy="960120"/>
           </a:xfrm>
           <a:prstGeom prst="roundRect">
             <a:avLst>
-              <a:gd name="adj" fmla="val 4800"/>
+              <a:gd name="adj" fmla="val 11429"/>
             </a:avLst>
           </a:prstGeom>
           <a:solidFill>
-            <a:schemeClr val="accent6"/>
+            <a:schemeClr val="bg2"/>
           </a:solidFill>
           <a:ln/>
         </p:spPr>
       </p:sp>
       <p:sp>
         <p:nvSpPr>
-          <p:cNvPr id="11" name="Next 3 heading"/>
+          <p:cNvPr id="14" name="Proof 3 marker"/>
+          <p:cNvSpPr/>
+          <p:nvPr/>
+        </p:nvSpPr>
+        <p:spPr>
+          <a:xfrm>
+            <a:off x="749808" y="3922776"/>
+            <a:ext cx="411480" cy="411480"/>
+          </a:xfrm>
+          <a:prstGeom prst="ellipse">
+            <a:avLst/>
+          </a:prstGeom>
+          <a:solidFill>
+            <a:schemeClr val="accent1"/>
+          </a:solidFill>
+          <a:ln/>
+        </p:spPr>
+      </p:sp>
+      <p:sp>
+        <p:nvSpPr>
+          <p:cNvPr id="15" name="Proof 3 glyph"/>
           <p:cNvSpPr txBox="1"/>
           <p:nvPr/>
         </p:nvSpPr>
         <p:spPr>
           <a:xfrm>
-            <a:off x="8229600" y="2103120"/>
-            <a:ext cx="2788920" cy="457200"/>
+            <a:off x="749808" y="3922776"/>
+            <a:ext cx="411480" cy="411480"/>
+          </a:xfrm>
+          <a:prstGeom prst="rect">
+            <a:avLst/>
+          </a:prstGeom>
+          <a:noFill/>
+          <a:ln/>
+        </p:spPr>
+        <p:txBody>
+          <a:bodyPr wrap="square" lIns="0" tIns="0" rIns="0" bIns="0" rtlCol="0" anchor="ctr"/>
+          <a:lstStyle/>
+          <a:p>
+            <a:pPr algn="ctr" indent="0" marL="0">
+              <a:buNone/>
+            </a:pPr>
+            <a:r>
+              <a:rPr lang="en-US" sz="1600" b="1" dirty="0">
+                <a:solidFill>
+                  <a:schemeClr val="bg1"/>
+                </a:solidFill>
+              </a:rPr>
+              <a:t>→</a:t>
+            </a:r>
+            <a:endParaRPr lang="en-US" sz="1600" dirty="0"/>
+          </a:p>
+        </p:txBody>
+      </p:sp>
+      <p:sp>
+        <p:nvSpPr>
+          <p:cNvPr id="16" name="Proof 3 label"/>
+          <p:cNvSpPr txBox="1"/>
+          <p:nvPr/>
+        </p:nvSpPr>
+        <p:spPr>
+          <a:xfrm>
+            <a:off x="1325880" y="3776472"/>
+            <a:ext cx="5120640" cy="347472"/>
           </a:xfrm>
           <a:prstGeom prst="rect">
             <a:avLst/>
@@ -10443,27 +7439,27 @@
               <a:buNone/>
             </a:pPr>
             <a:r>
-              <a:rPr lang="en-US" sz="2200" b="1" dirty="0">
-                <a:solidFill>
-                  <a:schemeClr val="accent3"/>
-                </a:solidFill>
-              </a:rPr>
-              <a:t>Monitor</a:t>
-            </a:r>
-            <a:endParaRPr lang="en-US" sz="2200" dirty="0"/>
-          </a:p>
-        </p:txBody>
-      </p:sp>
-      <p:sp>
-        <p:nvSpPr>
-          <p:cNvPr id="12" name="Next 3 body"/>
+              <a:rPr lang="en-US" sz="1600" b="1" dirty="0">
+                <a:solidFill>
+                  <a:schemeClr val="tx2"/>
+                </a:solidFill>
+              </a:rPr>
+              <a:t>Live Salesforce extract</a:t>
+            </a:r>
+            <a:endParaRPr lang="en-US" sz="1600" dirty="0"/>
+          </a:p>
+        </p:txBody>
+      </p:sp>
+      <p:sp>
+        <p:nvSpPr>
+          <p:cNvPr id="17" name="Proof 3 link"/>
           <p:cNvSpPr txBox="1"/>
           <p:nvPr/>
         </p:nvSpPr>
         <p:spPr>
           <a:xfrm>
-            <a:off x="8229600" y="2697480"/>
-            <a:ext cx="2788920" cy="1280160"/>
+            <a:off x="1325880" y="4142232"/>
+            <a:ext cx="5120640" cy="347472"/>
           </a:xfrm>
           <a:prstGeom prst="rect">
             <a:avLst/>
@@ -10479,12 +7475,97 @@
               <a:buNone/>
             </a:pPr>
             <a:r>
-              <a:rPr lang="en-US" sz="1600" dirty="0">
+              <a:rPr lang="en-US" sz="1400" u="sng" dirty="0">
+                <a:solidFill>
+                  <a:schemeClr val="accent6"/>
+                </a:solidFill>
+                <a:hlinkClick r:id="rId3" invalidUrl="" action="" tgtFrame="" tooltip="" history="1" highlightClick="0" endSnd="0">
+                  <a:extLst>
+                    <a:ext uri="{A12FA001-AC4F-418D-AE19-62706E023703}">
+                      <ahyp:hlinkClr xmlns:ahyp="http://schemas.microsoft.com/office/drawing/2018/hyperlinkcolor" val="tx"/>
+                    </a:ext>
+                  </a:extLst>
+                </a:hlinkClick>
+              </a:rPr>
+              <a:t>salesforce-process-intelligence.vercel.app/live.html</a:t>
+            </a:r>
+            <a:endParaRPr lang="en-US" sz="1400" dirty="0"/>
+          </a:p>
+        </p:txBody>
+      </p:sp>
+      <p:sp>
+        <p:nvSpPr>
+          <p:cNvPr id="18" name="Proof 4"/>
+          <p:cNvSpPr/>
+          <p:nvPr/>
+        </p:nvSpPr>
+        <p:spPr>
+          <a:xfrm>
+            <a:off x="548640" y="4764024"/>
+            <a:ext cx="6035040" cy="960120"/>
+          </a:xfrm>
+          <a:prstGeom prst="roundRect">
+            <a:avLst>
+              <a:gd name="adj" fmla="val 11429"/>
+            </a:avLst>
+          </a:prstGeom>
+          <a:solidFill>
+            <a:schemeClr val="bg2"/>
+          </a:solidFill>
+          <a:ln/>
+        </p:spPr>
+      </p:sp>
+      <p:sp>
+        <p:nvSpPr>
+          <p:cNvPr id="19" name="Proof 4 marker"/>
+          <p:cNvSpPr/>
+          <p:nvPr/>
+        </p:nvSpPr>
+        <p:spPr>
+          <a:xfrm>
+            <a:off x="749808" y="5038344"/>
+            <a:ext cx="411480" cy="411480"/>
+          </a:xfrm>
+          <a:prstGeom prst="ellipse">
+            <a:avLst/>
+          </a:prstGeom>
+          <a:solidFill>
+            <a:schemeClr val="accent1"/>
+          </a:solidFill>
+          <a:ln/>
+        </p:spPr>
+      </p:sp>
+      <p:sp>
+        <p:nvSpPr>
+          <p:cNvPr id="20" name="Proof 4 glyph"/>
+          <p:cNvSpPr txBox="1"/>
+          <p:nvPr/>
+        </p:nvSpPr>
+        <p:spPr>
+          <a:xfrm>
+            <a:off x="749808" y="5038344"/>
+            <a:ext cx="411480" cy="411480"/>
+          </a:xfrm>
+          <a:prstGeom prst="rect">
+            <a:avLst/>
+          </a:prstGeom>
+          <a:noFill/>
+          <a:ln/>
+        </p:spPr>
+        <p:txBody>
+          <a:bodyPr wrap="square" lIns="0" tIns="0" rIns="0" bIns="0" rtlCol="0" anchor="ctr"/>
+          <a:lstStyle/>
+          <a:p>
+            <a:pPr algn="ctr" indent="0" marL="0">
+              <a:buNone/>
+            </a:pPr>
+            <a:r>
+              <a:rPr lang="en-US" sz="1600" b="1" dirty="0">
                 <a:solidFill>
                   <a:schemeClr val="bg1"/>
                 </a:solidFill>
               </a:rPr>
-              <a:t>Schedule the extract into Apromore, track the KPIs against target and report value realised quarterly.</a:t>
+              <a:t>→</a:t>
             </a:r>
             <a:endParaRPr lang="en-US" sz="1600" dirty="0"/>
           </a:p>
@@ -10492,14 +7573,14 @@
       </p:sp>
       <p:sp>
         <p:nvSpPr>
-          <p:cNvPr id="13" name="Closing contact"/>
+          <p:cNvPr id="21" name="Proof 4 label"/>
           <p:cNvSpPr txBox="1"/>
           <p:nvPr/>
         </p:nvSpPr>
         <p:spPr>
           <a:xfrm>
-            <a:off x="731520" y="5943600"/>
-            <a:ext cx="7315200" cy="365760"/>
+            <a:off x="1325880" y="4892040"/>
+            <a:ext cx="5120640" cy="347472"/>
           </a:xfrm>
           <a:prstGeom prst="rect">
             <a:avLst/>
@@ -10515,14 +7596,151 @@
               <a:buNone/>
             </a:pPr>
             <a:r>
-              <a:rPr lang="en-US" sz="1400" dirty="0">
-                <a:solidFill>
-                  <a:schemeClr val="accent3"/>
-                </a:solidFill>
-              </a:rPr>
-              <a:t>salesforce-process-intelligence.vercel.app  ·  Luke Audie</a:t>
+              <a:rPr lang="en-US" sz="1600" b="1" dirty="0">
+                <a:solidFill>
+                  <a:schemeClr val="tx2"/>
+                </a:solidFill>
+              </a:rPr>
+              <a:t>Source code and event logs</a:t>
+            </a:r>
+            <a:endParaRPr lang="en-US" sz="1600" dirty="0"/>
+          </a:p>
+        </p:txBody>
+      </p:sp>
+      <p:sp>
+        <p:nvSpPr>
+          <p:cNvPr id="22" name="Proof 4 link"/>
+          <p:cNvSpPr txBox="1"/>
+          <p:nvPr/>
+        </p:nvSpPr>
+        <p:spPr>
+          <a:xfrm>
+            <a:off x="1325880" y="5257800"/>
+            <a:ext cx="5120640" cy="347472"/>
+          </a:xfrm>
+          <a:prstGeom prst="rect">
+            <a:avLst/>
+          </a:prstGeom>
+          <a:noFill/>
+          <a:ln/>
+        </p:spPr>
+        <p:txBody>
+          <a:bodyPr wrap="square" lIns="0" tIns="0" rIns="0" bIns="0" rtlCol="0" anchor="t"/>
+          <a:lstStyle/>
+          <a:p>
+            <a:pPr indent="0" marL="0">
+              <a:buNone/>
+            </a:pPr>
+            <a:r>
+              <a:rPr lang="en-US" sz="1400" u="sng" dirty="0">
+                <a:solidFill>
+                  <a:schemeClr val="accent6"/>
+                </a:solidFill>
+                <a:hlinkClick r:id="rId4" invalidUrl="" action="" tgtFrame="" tooltip="" history="1" highlightClick="0" endSnd="0">
+                  <a:extLst>
+                    <a:ext uri="{A12FA001-AC4F-418D-AE19-62706E023703}">
+                      <ahyp:hlinkClr xmlns:ahyp="http://schemas.microsoft.com/office/drawing/2018/hyperlinkcolor" val="tx"/>
+                    </a:ext>
+                  </a:extLst>
+                </a:hlinkClick>
+              </a:rPr>
+              <a:t>github.com/ch-lukas/salesforce-process-intelligence</a:t>
             </a:r>
             <a:endParaRPr lang="en-US" sz="1400" dirty="0"/>
+          </a:p>
+        </p:txBody>
+      </p:sp>
+      <p:sp>
+        <p:nvSpPr>
+          <p:cNvPr id="23" name="Screenshot frame"/>
+          <p:cNvSpPr/>
+          <p:nvPr/>
+        </p:nvSpPr>
+        <p:spPr>
+          <a:xfrm>
+            <a:off x="6903720" y="1371600"/>
+            <a:ext cx="4802925" cy="4434840"/>
+          </a:xfrm>
+          <a:prstGeom prst="rect">
+            <a:avLst/>
+          </a:prstGeom>
+          <a:solidFill>
+            <a:schemeClr val="bg1"/>
+          </a:solidFill>
+          <a:ln w="12700">
+            <a:solidFill>
+              <a:schemeClr val="accent3"/>
+            </a:solidFill>
+            <a:prstDash val="solid"/>
+          </a:ln>
+        </p:spPr>
+      </p:sp>
+      <p:pic>
+        <p:nvPicPr>
+          <p:cNvPr id="24" name="Value case screenshot" descr="Value case one-pager on the hosted site">    </p:cNvPr>
+          <p:cNvPicPr>
+            <a:picLocks noChangeAspect="1"/>
+          </p:cNvPicPr>
+          <p:nvPr/>
+        </p:nvPicPr>
+        <p:blipFill>
+          <a:blip r:embed="rId5"/>
+          <a:stretch>
+            <a:fillRect/>
+          </a:stretch>
+        </p:blipFill>
+        <p:spPr>
+          <a:xfrm>
+            <a:off x="6949440" y="1417320"/>
+            <a:ext cx="4711485" cy="4343400"/>
+          </a:xfrm>
+          <a:prstGeom prst="rect">
+            <a:avLst/>
+          </a:prstGeom>
+        </p:spPr>
+      </p:pic>
+      <p:sp>
+        <p:nvSpPr>
+          <p:cNvPr id="25" name="Slide Number Placeholder 0"/>
+          <p:cNvSpPr>
+            <a:spLocks noGrp="1"/>
+          </p:cNvSpPr>
+          <p:nvPr>
+            <p:ph type="sldNum" sz="quarter" idx="4294967295"/>
+          </p:nvPr>
+        </p:nvSpPr>
+        <p:spPr>
+          <a:xfrm>
+            <a:off x="11155680" y="6400800"/>
+            <a:ext cx="457200" cy="274320"/>
+          </a:xfrm>
+          <a:prstGeom prst="rect">
+            <a:avLst/>
+          </a:prstGeom>
+          <a:extLst>
+            <a:ext uri="{C572A759-6A51-4108-AA02-DFA0A04FC94B}">
+              <ma14:wrappingTextBoxFlag xmlns:ma14="http://schemas.microsoft.com/office/mac/drawingml/2011/main" val="0"/>
+            </a:ext>
+          </a:extLst>
+        </p:spPr>
+        <p:txBody>
+          <a:bodyPr/>
+          <a:lstStyle>
+            <a:lvl1pPr>
+              <a:defRPr sz="1000">
+                <a:solidFill>
+                  <a:schemeClr val="accent6"/>
+                </a:solidFill>
+              </a:defRPr>
+            </a:lvl1pPr>
+          </a:lstStyle>
+          <a:p>
+            <a:pPr algn="r"/>
+            <a:fld id="{F7021451-1387-4CA6-816F-3879F97B5CBC}" type="slidenum">
+              <a:rPr b="0" lang="en-US"/>
+              <a:t>7</a:t>
+            </a:fld>
+            <a:endParaRPr lang="en-US"/>
           </a:p>
         </p:txBody>
       </p:sp>
@@ -10559,15 +7777,15 @@
         </p:nvSpPr>
         <p:spPr>
           <a:xfrm>
-            <a:off x="8595360" y="3108960"/>
-            <a:ext cx="6035040" cy="6035040"/>
+            <a:off x="9326880" y="4023360"/>
+            <a:ext cx="4937760" cy="4937760"/>
           </a:xfrm>
           <a:prstGeom prst="ellipse">
             <a:avLst/>
           </a:prstGeom>
           <a:solidFill>
             <a:schemeClr val="accent1">
-              <a:alpha val="30000"/>
+              <a:alpha val="25000"/>
             </a:schemeClr>
           </a:solidFill>
           <a:ln/>
@@ -10575,27 +7793,7 @@
       </p:sp>
       <p:sp>
         <p:nvSpPr>
-          <p:cNvPr id="3" name="Decor circle small"/>
-          <p:cNvSpPr/>
-          <p:nvPr/>
-        </p:nvSpPr>
-        <p:spPr>
-          <a:xfrm>
-            <a:off x="9692640" y="2377440"/>
-            <a:ext cx="685800" cy="685800"/>
-          </a:xfrm>
-          <a:prstGeom prst="ellipse">
-            <a:avLst/>
-          </a:prstGeom>
-          <a:solidFill>
-            <a:schemeClr val="accent3"/>
-          </a:solidFill>
-          <a:ln/>
-        </p:spPr>
-      </p:sp>
-      <p:sp>
-        <p:nvSpPr>
-          <p:cNvPr id="4" name="Text 0"/>
+          <p:cNvPr id="3" name="Text 0"/>
           <p:cNvSpPr/>
           <p:nvPr>
             <p:ph idx="100" type="title" hasCustomPrompt="1"/>
@@ -10603,635 +7801,326 @@
         </p:nvSpPr>
         <p:spPr>
           <a:xfrm>
-            <a:off x="731520" y="2377440"/>
-            <a:ext cx="7863840" cy="1097280"/>
-          </a:xfrm>
-          <a:prstGeom prst="rect">
-            <a:avLst/>
-          </a:prstGeom>
-          <a:noFill/>
-          <a:ln/>
-        </p:spPr>
-        <p:txBody>
-          <a:bodyPr wrap="square" lIns="0" tIns="0" rIns="0" bIns="0" rtlCol="0" anchor="b"/>
+            <a:off x="731520" y="548640"/>
+            <a:ext cx="10698480" cy="914400"/>
+          </a:xfrm>
+          <a:prstGeom prst="rect">
+            <a:avLst/>
+          </a:prstGeom>
+          <a:noFill/>
+          <a:ln/>
+        </p:spPr>
+        <p:txBody>
+          <a:bodyPr wrap="square" lIns="0" tIns="0" rIns="0" bIns="0" rtlCol="0" anchor="ctr"/>
           <a:lstStyle/>
           <a:p>
             <a:pPr algn="l" indent="0" marL="0">
               <a:buNone/>
             </a:pPr>
             <a:r>
-              <a:rPr lang="en-US" sz="4400" b="1" dirty="0">
+              <a:rPr lang="en-US" sz="3600" b="1" dirty="0">
                 <a:solidFill>
                   <a:schemeClr val="bg1"/>
                 </a:solidFill>
               </a:rPr>
-              <a:t>Tech setup</a:t>
-            </a:r>
-            <a:endParaRPr lang="en-US" sz="4400" dirty="0"/>
-          </a:p>
-        </p:txBody>
-      </p:sp>
-      <p:sp>
-        <p:nvSpPr>
-          <p:cNvPr id="5" name="Text 0"/>
+              <a:t>Turning the finding into a decision</a:t>
+            </a:r>
+            <a:endParaRPr lang="en-US" sz="3600" dirty="0"/>
+          </a:p>
+        </p:txBody>
+      </p:sp>
+      <p:sp>
+        <p:nvSpPr>
+          <p:cNvPr id="4" name="Next 1 card"/>
           <p:cNvSpPr/>
-          <p:nvPr>
-            <p:ph idx="101" type="body" hasCustomPrompt="1"/>
-          </p:nvPr>
-        </p:nvSpPr>
-        <p:spPr>
-          <a:xfrm>
-            <a:off x="731520" y="3657600"/>
-            <a:ext cx="7315200" cy="914400"/>
-          </a:xfrm>
-          <a:prstGeom prst="rect">
-            <a:avLst/>
-          </a:prstGeom>
-          <a:noFill/>
-          <a:ln/>
-        </p:spPr>
-        <p:txBody>
-          <a:bodyPr wrap="square" lIns="0" tIns="0" rIns="0" bIns="0" rtlCol="0" anchor="t"/>
-          <a:lstStyle/>
-          <a:p>
-            <a:pPr algn="l" indent="0" marL="0">
-              <a:buNone/>
-            </a:pPr>
-            <a:r>
-              <a:rPr lang="en-US" sz="2000" dirty="0">
-                <a:solidFill>
-                  <a:schemeClr val="accent3"/>
-                </a:solidFill>
-              </a:rPr>
-              <a:t>How the data gets from a Salesforce org into an Apromore-ready event log</a:t>
-            </a:r>
-            <a:endParaRPr lang="en-US" sz="2000" dirty="0"/>
-          </a:p>
-        </p:txBody>
-      </p:sp>
-    </p:spTree>
-  </p:cSld>
-  <p:clrMapOvr>
-    <a:masterClrMapping/>
-  </p:clrMapOvr>
-</p:sld>
-</file>
-
-<file path=ppt/slides/slide9.xml><?xml version="1.0" encoding="utf-8"?>
-<p:sld xmlns:a="http://schemas.openxmlformats.org/drawingml/2006/main" xmlns:r="http://schemas.openxmlformats.org/officeDocument/2006/relationships" xmlns:p="http://schemas.openxmlformats.org/presentationml/2006/main">
-  <p:cSld name="Slide 9">
-    <p:spTree>
-      <p:nvGrpSpPr>
-        <p:cNvPr id="1" name=""/>
-        <p:cNvGrpSpPr/>
-        <p:nvPr/>
-      </p:nvGrpSpPr>
-      <p:grpSpPr>
-        <a:xfrm>
-          <a:off x="0" y="0"/>
-          <a:ext cx="0" cy="0"/>
-          <a:chOff x="0" y="0"/>
-          <a:chExt cx="0" cy="0"/>
-        </a:xfrm>
-      </p:grpSpPr>
-      <p:sp>
-        <p:nvSpPr>
-          <p:cNvPr id="2" name="Text 0"/>
-          <p:cNvSpPr/>
-          <p:nvPr>
-            <p:ph idx="100" type="title" hasCustomPrompt="1"/>
-          </p:nvPr>
-        </p:nvSpPr>
-        <p:spPr>
-          <a:xfrm>
-            <a:off x="548640" y="320040"/>
-            <a:ext cx="11064240" cy="822960"/>
-          </a:xfrm>
-          <a:prstGeom prst="rect">
-            <a:avLst/>
-          </a:prstGeom>
-          <a:noFill/>
-          <a:ln/>
-        </p:spPr>
-        <p:txBody>
-          <a:bodyPr wrap="square" lIns="0" tIns="0" rIns="0" bIns="0" rtlCol="0" anchor="ctr"/>
-          <a:lstStyle/>
-          <a:p>
-            <a:pPr algn="l" indent="0" marL="0">
-              <a:buNone/>
-            </a:pPr>
-            <a:r>
-              <a:rPr lang="en-US" sz="3000" b="1" dirty="0">
-                <a:solidFill>
-                  <a:schemeClr val="tx2"/>
-                </a:solidFill>
-              </a:rPr>
-              <a:t>From Salesforce to Process Intelligence in four steps</a:t>
-            </a:r>
-            <a:endParaRPr lang="en-US" sz="3000" dirty="0"/>
-          </a:p>
-        </p:txBody>
-      </p:sp>
-      <p:sp>
-        <p:nvSpPr>
-          <p:cNvPr id="3" name="Step 1 card"/>
-          <p:cNvSpPr/>
-          <p:nvPr/>
-        </p:nvSpPr>
-        <p:spPr>
-          <a:xfrm>
-            <a:off x="548640" y="1371600"/>
-            <a:ext cx="2514600" cy="3291840"/>
+          <p:nvPr/>
+        </p:nvSpPr>
+        <p:spPr>
+          <a:xfrm>
+            <a:off x="731520" y="1828800"/>
+            <a:ext cx="3337560" cy="2286000"/>
           </a:xfrm>
           <a:prstGeom prst="roundRect">
             <a:avLst>
-              <a:gd name="adj" fmla="val 4364"/>
+              <a:gd name="adj" fmla="val 4800"/>
             </a:avLst>
           </a:prstGeom>
           <a:solidFill>
-            <a:schemeClr val="bg2"/>
+            <a:schemeClr val="accent6"/>
           </a:solidFill>
           <a:ln/>
         </p:spPr>
       </p:sp>
       <p:sp>
         <p:nvSpPr>
-          <p:cNvPr id="4" name="Step 1 marker"/>
+          <p:cNvPr id="5" name="Next 1 heading"/>
+          <p:cNvSpPr txBox="1"/>
+          <p:nvPr/>
+        </p:nvSpPr>
+        <p:spPr>
+          <a:xfrm>
+            <a:off x="1005840" y="2103120"/>
+            <a:ext cx="2788920" cy="457200"/>
+          </a:xfrm>
+          <a:prstGeom prst="rect">
+            <a:avLst/>
+          </a:prstGeom>
+          <a:noFill/>
+          <a:ln/>
+        </p:spPr>
+        <p:txBody>
+          <a:bodyPr wrap="square" lIns="0" tIns="0" rIns="0" bIns="0" rtlCol="0" anchor="t"/>
+          <a:lstStyle/>
+          <a:p>
+            <a:pPr indent="0" marL="0">
+              <a:buNone/>
+            </a:pPr>
+            <a:r>
+              <a:rPr lang="en-US" sz="2200" b="1" dirty="0">
+                <a:solidFill>
+                  <a:schemeClr val="accent3"/>
+                </a:solidFill>
+              </a:rPr>
+              <a:t>Validate</a:t>
+            </a:r>
+            <a:endParaRPr lang="en-US" sz="2200" dirty="0"/>
+          </a:p>
+        </p:txBody>
+      </p:sp>
+      <p:sp>
+        <p:nvSpPr>
+          <p:cNvPr id="6" name="Next 1 body"/>
+          <p:cNvSpPr txBox="1"/>
+          <p:nvPr/>
+        </p:nvSpPr>
+        <p:spPr>
+          <a:xfrm>
+            <a:off x="1005840" y="2697480"/>
+            <a:ext cx="2788920" cy="1280160"/>
+          </a:xfrm>
+          <a:prstGeom prst="rect">
+            <a:avLst/>
+          </a:prstGeom>
+          <a:noFill/>
+          <a:ln/>
+        </p:spPr>
+        <p:txBody>
+          <a:bodyPr wrap="square" lIns="0" tIns="0" rIns="0" bIns="0" rtlCol="0" anchor="t"/>
+          <a:lstStyle/>
+          <a:p>
+            <a:pPr indent="0" marL="0">
+              <a:buNone/>
+            </a:pPr>
+            <a:r>
+              <a:rPr lang="en-US" sz="1600" dirty="0">
+                <a:solidFill>
+                  <a:schemeClr val="bg1"/>
+                </a:solidFill>
+              </a:rPr>
+              <a:t>Run the same extract on the production org and confirm approval waits and re-quote rates with RevOps.</a:t>
+            </a:r>
+            <a:endParaRPr lang="en-US" sz="1600" dirty="0"/>
+          </a:p>
+        </p:txBody>
+      </p:sp>
+      <p:sp>
+        <p:nvSpPr>
+          <p:cNvPr id="7" name="Next 2 card"/>
           <p:cNvSpPr/>
           <p:nvPr/>
         </p:nvSpPr>
         <p:spPr>
           <a:xfrm>
-            <a:off x="777240" y="1600200"/>
-            <a:ext cx="502920" cy="502920"/>
-          </a:xfrm>
-          <a:prstGeom prst="ellipse">
-            <a:avLst/>
-          </a:prstGeom>
-          <a:solidFill>
-            <a:schemeClr val="accent1"/>
-          </a:solidFill>
-          <a:ln/>
-        </p:spPr>
-      </p:sp>
-      <p:sp>
-        <p:nvSpPr>
-          <p:cNvPr id="5" name="Step 1 number"/>
-          <p:cNvSpPr txBox="1"/>
-          <p:nvPr/>
-        </p:nvSpPr>
-        <p:spPr>
-          <a:xfrm>
-            <a:off x="777240" y="1600200"/>
-            <a:ext cx="502920" cy="502920"/>
-          </a:xfrm>
-          <a:prstGeom prst="rect">
-            <a:avLst/>
-          </a:prstGeom>
-          <a:noFill/>
-          <a:ln/>
-        </p:spPr>
-        <p:txBody>
-          <a:bodyPr wrap="square" lIns="0" tIns="0" rIns="0" bIns="0" rtlCol="0" anchor="ctr"/>
-          <a:lstStyle/>
-          <a:p>
-            <a:pPr algn="ctr" indent="0" marL="0">
-              <a:buNone/>
-            </a:pPr>
-            <a:r>
-              <a:rPr lang="en-US" sz="1800" b="1" dirty="0">
-                <a:solidFill>
-                  <a:schemeClr val="bg1"/>
-                </a:solidFill>
-              </a:rPr>
-              <a:t>1</a:t>
-            </a:r>
-            <a:endParaRPr lang="en-US" sz="1800" dirty="0"/>
-          </a:p>
-        </p:txBody>
-      </p:sp>
-      <p:sp>
-        <p:nvSpPr>
-          <p:cNvPr id="6" name="Step 1 label"/>
-          <p:cNvSpPr txBox="1"/>
-          <p:nvPr/>
-        </p:nvSpPr>
-        <p:spPr>
-          <a:xfrm>
-            <a:off x="777240" y="2286000"/>
-            <a:ext cx="2103120" cy="274320"/>
-          </a:xfrm>
-          <a:prstGeom prst="rect">
-            <a:avLst/>
-          </a:prstGeom>
-          <a:noFill/>
-          <a:ln/>
-        </p:spPr>
-        <p:txBody>
-          <a:bodyPr wrap="square" lIns="0" tIns="0" rIns="0" bIns="0" rtlCol="0" anchor="t"/>
-          <a:lstStyle/>
-          <a:p>
-            <a:pPr indent="0" marL="0">
-              <a:buNone/>
-            </a:pPr>
-            <a:r>
-              <a:rPr lang="en-US" sz="1200" b="1" dirty="0">
-                <a:solidFill>
-                  <a:schemeClr val="accent6"/>
-                </a:solidFill>
-              </a:rPr>
-              <a:t>Extract</a:t>
-            </a:r>
-            <a:endParaRPr lang="en-US" sz="1200" dirty="0"/>
-          </a:p>
-        </p:txBody>
-      </p:sp>
-      <p:sp>
-        <p:nvSpPr>
-          <p:cNvPr id="7" name="Step 1 title"/>
-          <p:cNvSpPr txBox="1"/>
-          <p:nvPr/>
-        </p:nvSpPr>
-        <p:spPr>
-          <a:xfrm>
-            <a:off x="777240" y="2578608"/>
-            <a:ext cx="2103120" cy="411480"/>
-          </a:xfrm>
-          <a:prstGeom prst="rect">
-            <a:avLst/>
-          </a:prstGeom>
-          <a:noFill/>
-          <a:ln/>
-        </p:spPr>
-        <p:txBody>
-          <a:bodyPr wrap="square" lIns="0" tIns="0" rIns="0" bIns="0" rtlCol="0" anchor="t"/>
-          <a:lstStyle/>
-          <a:p>
-            <a:pPr indent="0" marL="0">
-              <a:buNone/>
-            </a:pPr>
-            <a:r>
-              <a:rPr lang="en-US" sz="1800" b="1" dirty="0">
-                <a:solidFill>
-                  <a:schemeClr val="tx2"/>
-                </a:solidFill>
-              </a:rPr>
-              <a:t>SOQL over REST</a:t>
-            </a:r>
-            <a:endParaRPr lang="en-US" sz="1800" dirty="0"/>
-          </a:p>
-        </p:txBody>
-      </p:sp>
-      <p:sp>
-        <p:nvSpPr>
-          <p:cNvPr id="8" name="Step 1 body"/>
-          <p:cNvSpPr txBox="1"/>
-          <p:nvPr/>
-        </p:nvSpPr>
-        <p:spPr>
-          <a:xfrm>
-            <a:off x="777240" y="3063240"/>
-            <a:ext cx="2103120" cy="1508760"/>
-          </a:xfrm>
-          <a:prstGeom prst="rect">
-            <a:avLst/>
-          </a:prstGeom>
-          <a:noFill/>
-          <a:ln/>
-        </p:spPr>
-        <p:txBody>
-          <a:bodyPr wrap="square" lIns="0" tIns="0" rIns="0" bIns="0" rtlCol="0" anchor="t"/>
-          <a:lstStyle/>
-          <a:p>
-            <a:pPr indent="0" marL="0">
-              <a:buNone/>
-            </a:pPr>
-            <a:r>
-              <a:rPr lang="en-US" sz="1400" dirty="0">
-                <a:solidFill>
-                  <a:schemeClr val="tx1"/>
-                </a:solidFill>
-              </a:rPr>
-              <a:t>Lead, Opportunity, OpportunityHistory and Task, signed by the Salesforce CLI session. No stored credentials.</a:t>
-            </a:r>
-            <a:endParaRPr lang="en-US" sz="1400" dirty="0"/>
-          </a:p>
-        </p:txBody>
-      </p:sp>
-      <p:sp>
-        <p:nvSpPr>
-          <p:cNvPr id="9" name="Step 1 arrow"/>
-          <p:cNvSpPr/>
-          <p:nvPr/>
-        </p:nvSpPr>
-        <p:spPr>
-          <a:xfrm>
-            <a:off x="3127248" y="2852928"/>
-            <a:ext cx="219456" cy="329184"/>
-          </a:xfrm>
-          <a:prstGeom prst="rightArrow">
-            <a:avLst/>
-          </a:prstGeom>
-          <a:solidFill>
-            <a:schemeClr val="accent2"/>
-          </a:solidFill>
-          <a:ln/>
-        </p:spPr>
-      </p:sp>
-      <p:sp>
-        <p:nvSpPr>
-          <p:cNvPr id="10" name="Step 2 card"/>
-          <p:cNvSpPr/>
-          <p:nvPr/>
-        </p:nvSpPr>
-        <p:spPr>
-          <a:xfrm>
-            <a:off x="3401568" y="1371600"/>
-            <a:ext cx="2514600" cy="3291840"/>
+            <a:off x="4343400" y="1828800"/>
+            <a:ext cx="3337560" cy="2286000"/>
           </a:xfrm>
           <a:prstGeom prst="roundRect">
             <a:avLst>
-              <a:gd name="adj" fmla="val 4364"/>
+              <a:gd name="adj" fmla="val 4800"/>
             </a:avLst>
           </a:prstGeom>
           <a:solidFill>
-            <a:schemeClr val="bg2"/>
+            <a:schemeClr val="accent6"/>
           </a:solidFill>
           <a:ln/>
         </p:spPr>
       </p:sp>
       <p:sp>
         <p:nvSpPr>
-          <p:cNvPr id="11" name="Step 2 marker"/>
+          <p:cNvPr id="8" name="Next 2 heading"/>
+          <p:cNvSpPr txBox="1"/>
+          <p:nvPr/>
+        </p:nvSpPr>
+        <p:spPr>
+          <a:xfrm>
+            <a:off x="4617720" y="2103120"/>
+            <a:ext cx="2788920" cy="457200"/>
+          </a:xfrm>
+          <a:prstGeom prst="rect">
+            <a:avLst/>
+          </a:prstGeom>
+          <a:noFill/>
+          <a:ln/>
+        </p:spPr>
+        <p:txBody>
+          <a:bodyPr wrap="square" lIns="0" tIns="0" rIns="0" bIns="0" rtlCol="0" anchor="t"/>
+          <a:lstStyle/>
+          <a:p>
+            <a:pPr indent="0" marL="0">
+              <a:buNone/>
+            </a:pPr>
+            <a:r>
+              <a:rPr lang="en-US" sz="2200" b="1" dirty="0">
+                <a:solidFill>
+                  <a:schemeClr val="accent3"/>
+                </a:solidFill>
+              </a:rPr>
+              <a:t>Act</a:t>
+            </a:r>
+            <a:endParaRPr lang="en-US" sz="2200" dirty="0"/>
+          </a:p>
+        </p:txBody>
+      </p:sp>
+      <p:sp>
+        <p:nvSpPr>
+          <p:cNvPr id="9" name="Next 2 body"/>
+          <p:cNvSpPr txBox="1"/>
+          <p:nvPr/>
+        </p:nvSpPr>
+        <p:spPr>
+          <a:xfrm>
+            <a:off x="4617720" y="2697480"/>
+            <a:ext cx="2788920" cy="1280160"/>
+          </a:xfrm>
+          <a:prstGeom prst="rect">
+            <a:avLst/>
+          </a:prstGeom>
+          <a:noFill/>
+          <a:ln/>
+        </p:spPr>
+        <p:txBody>
+          <a:bodyPr wrap="square" lIns="0" tIns="0" rIns="0" bIns="0" rtlCol="0" anchor="t"/>
+          <a:lstStyle/>
+          <a:p>
+            <a:pPr indent="0" marL="0">
+              <a:buNone/>
+            </a:pPr>
+            <a:r>
+              <a:rPr lang="en-US" sz="1600" dirty="0">
+                <a:solidFill>
+                  <a:schemeClr val="bg1"/>
+                </a:solidFill>
+              </a:rPr>
+              <a:t>Pilot a delegated approval threshold for EMEA discounts up to 30% and make Qualification a required gate.</a:t>
+            </a:r>
+            <a:endParaRPr lang="en-US" sz="1600" dirty="0"/>
+          </a:p>
+        </p:txBody>
+      </p:sp>
+      <p:sp>
+        <p:nvSpPr>
+          <p:cNvPr id="10" name="Next 3 card"/>
           <p:cNvSpPr/>
           <p:nvPr/>
         </p:nvSpPr>
         <p:spPr>
           <a:xfrm>
-            <a:off x="3630168" y="1600200"/>
-            <a:ext cx="502920" cy="502920"/>
-          </a:xfrm>
-          <a:prstGeom prst="ellipse">
-            <a:avLst/>
-          </a:prstGeom>
-          <a:solidFill>
-            <a:schemeClr val="accent1"/>
-          </a:solidFill>
-          <a:ln/>
-        </p:spPr>
-      </p:sp>
-      <p:sp>
-        <p:nvSpPr>
-          <p:cNvPr id="12" name="Step 2 number"/>
-          <p:cNvSpPr txBox="1"/>
-          <p:nvPr/>
-        </p:nvSpPr>
-        <p:spPr>
-          <a:xfrm>
-            <a:off x="3630168" y="1600200"/>
-            <a:ext cx="502920" cy="502920"/>
-          </a:xfrm>
-          <a:prstGeom prst="rect">
-            <a:avLst/>
-          </a:prstGeom>
-          <a:noFill/>
-          <a:ln/>
-        </p:spPr>
-        <p:txBody>
-          <a:bodyPr wrap="square" lIns="0" tIns="0" rIns="0" bIns="0" rtlCol="0" anchor="ctr"/>
-          <a:lstStyle/>
-          <a:p>
-            <a:pPr algn="ctr" indent="0" marL="0">
-              <a:buNone/>
-            </a:pPr>
-            <a:r>
-              <a:rPr lang="en-US" sz="1800" b="1" dirty="0">
-                <a:solidFill>
-                  <a:schemeClr val="bg1"/>
-                </a:solidFill>
-              </a:rPr>
-              <a:t>2</a:t>
-            </a:r>
-            <a:endParaRPr lang="en-US" sz="1800" dirty="0"/>
-          </a:p>
-        </p:txBody>
-      </p:sp>
-      <p:sp>
-        <p:nvSpPr>
-          <p:cNvPr id="13" name="Step 2 label"/>
-          <p:cNvSpPr txBox="1"/>
-          <p:nvPr/>
-        </p:nvSpPr>
-        <p:spPr>
-          <a:xfrm>
-            <a:off x="3630168" y="2286000"/>
-            <a:ext cx="2103120" cy="274320"/>
-          </a:xfrm>
-          <a:prstGeom prst="rect">
-            <a:avLst/>
-          </a:prstGeom>
-          <a:noFill/>
-          <a:ln/>
-        </p:spPr>
-        <p:txBody>
-          <a:bodyPr wrap="square" lIns="0" tIns="0" rIns="0" bIns="0" rtlCol="0" anchor="t"/>
-          <a:lstStyle/>
-          <a:p>
-            <a:pPr indent="0" marL="0">
-              <a:buNone/>
-            </a:pPr>
-            <a:r>
-              <a:rPr lang="en-US" sz="1200" b="1" dirty="0">
-                <a:solidFill>
-                  <a:schemeClr val="accent6"/>
-                </a:solidFill>
-              </a:rPr>
-              <a:t>Correlate</a:t>
-            </a:r>
-            <a:endParaRPr lang="en-US" sz="1200" dirty="0"/>
-          </a:p>
-        </p:txBody>
-      </p:sp>
-      <p:sp>
-        <p:nvSpPr>
-          <p:cNvPr id="14" name="Step 2 title"/>
-          <p:cNvSpPr txBox="1"/>
-          <p:nvPr/>
-        </p:nvSpPr>
-        <p:spPr>
-          <a:xfrm>
-            <a:off x="3630168" y="2578608"/>
-            <a:ext cx="2103120" cy="411480"/>
-          </a:xfrm>
-          <a:prstGeom prst="rect">
-            <a:avLst/>
-          </a:prstGeom>
-          <a:noFill/>
-          <a:ln/>
-        </p:spPr>
-        <p:txBody>
-          <a:bodyPr wrap="square" lIns="0" tIns="0" rIns="0" bIns="0" rtlCol="0" anchor="t"/>
-          <a:lstStyle/>
-          <a:p>
-            <a:pPr indent="0" marL="0">
-              <a:buNone/>
-            </a:pPr>
-            <a:r>
-              <a:rPr lang="en-US" sz="1800" b="1" dirty="0">
-                <a:solidFill>
-                  <a:schemeClr val="tx2"/>
-                </a:solidFill>
-              </a:rPr>
-              <a:t>One case per deal</a:t>
-            </a:r>
-            <a:endParaRPr lang="en-US" sz="1800" dirty="0"/>
-          </a:p>
-        </p:txBody>
-      </p:sp>
-      <p:sp>
-        <p:nvSpPr>
-          <p:cNvPr id="15" name="Step 2 body"/>
-          <p:cNvSpPr txBox="1"/>
-          <p:nvPr/>
-        </p:nvSpPr>
-        <p:spPr>
-          <a:xfrm>
-            <a:off x="3630168" y="3063240"/>
-            <a:ext cx="2103120" cy="1508760"/>
-          </a:xfrm>
-          <a:prstGeom prst="rect">
-            <a:avLst/>
-          </a:prstGeom>
-          <a:noFill/>
-          <a:ln/>
-        </p:spPr>
-        <p:txBody>
-          <a:bodyPr wrap="square" lIns="0" tIns="0" rIns="0" bIns="0" rtlCol="0" anchor="t"/>
-          <a:lstStyle/>
-          <a:p>
-            <a:pPr indent="0" marL="0">
-              <a:buNone/>
-            </a:pPr>
-            <a:r>
-              <a:rPr lang="en-US" sz="1400" dirty="0">
-                <a:solidFill>
-                  <a:schemeClr val="tx1"/>
-                </a:solidFill>
-              </a:rPr>
-              <a:t>Case ID = Opportunity Id. Tasks join on WhatId, Leads on ConvertedOpportunityId.</a:t>
-            </a:r>
-            <a:endParaRPr lang="en-US" sz="1400" dirty="0"/>
-          </a:p>
-        </p:txBody>
-      </p:sp>
-      <p:sp>
-        <p:nvSpPr>
-          <p:cNvPr id="16" name="Step 2 arrow"/>
-          <p:cNvSpPr/>
-          <p:nvPr/>
-        </p:nvSpPr>
-        <p:spPr>
-          <a:xfrm>
-            <a:off x="5980176" y="2852928"/>
-            <a:ext cx="219456" cy="329184"/>
-          </a:xfrm>
-          <a:prstGeom prst="rightArrow">
-            <a:avLst/>
-          </a:prstGeom>
-          <a:solidFill>
-            <a:schemeClr val="accent2"/>
-          </a:solidFill>
-          <a:ln/>
-        </p:spPr>
-      </p:sp>
-      <p:sp>
-        <p:nvSpPr>
-          <p:cNvPr id="17" name="Step 3 card"/>
-          <p:cNvSpPr/>
-          <p:nvPr/>
-        </p:nvSpPr>
-        <p:spPr>
-          <a:xfrm>
-            <a:off x="6254496" y="1371600"/>
-            <a:ext cx="2514600" cy="3291840"/>
+            <a:off x="7955280" y="1828800"/>
+            <a:ext cx="3337560" cy="2286000"/>
           </a:xfrm>
           <a:prstGeom prst="roundRect">
             <a:avLst>
-              <a:gd name="adj" fmla="val 4364"/>
+              <a:gd name="adj" fmla="val 4800"/>
             </a:avLst>
           </a:prstGeom>
           <a:solidFill>
-            <a:schemeClr val="bg2"/>
+            <a:schemeClr val="accent6"/>
           </a:solidFill>
           <a:ln/>
         </p:spPr>
       </p:sp>
       <p:sp>
         <p:nvSpPr>
-          <p:cNvPr id="18" name="Step 3 marker"/>
-          <p:cNvSpPr/>
-          <p:nvPr/>
-        </p:nvSpPr>
-        <p:spPr>
-          <a:xfrm>
-            <a:off x="6483096" y="1600200"/>
-            <a:ext cx="502920" cy="502920"/>
-          </a:xfrm>
-          <a:prstGeom prst="ellipse">
-            <a:avLst/>
-          </a:prstGeom>
-          <a:solidFill>
-            <a:schemeClr val="accent1"/>
-          </a:solidFill>
-          <a:ln/>
-        </p:spPr>
-      </p:sp>
-      <p:sp>
-        <p:nvSpPr>
-          <p:cNvPr id="19" name="Step 3 number"/>
+          <p:cNvPr id="11" name="Next 3 heading"/>
           <p:cNvSpPr txBox="1"/>
           <p:nvPr/>
         </p:nvSpPr>
         <p:spPr>
           <a:xfrm>
-            <a:off x="6483096" y="1600200"/>
-            <a:ext cx="502920" cy="502920"/>
-          </a:xfrm>
-          <a:prstGeom prst="rect">
-            <a:avLst/>
-          </a:prstGeom>
-          <a:noFill/>
-          <a:ln/>
-        </p:spPr>
-        <p:txBody>
-          <a:bodyPr wrap="square" lIns="0" tIns="0" rIns="0" bIns="0" rtlCol="0" anchor="ctr"/>
-          <a:lstStyle/>
-          <a:p>
-            <a:pPr algn="ctr" indent="0" marL="0">
-              <a:buNone/>
-            </a:pPr>
-            <a:r>
-              <a:rPr lang="en-US" sz="1800" b="1" dirty="0">
+            <a:off x="8229600" y="2103120"/>
+            <a:ext cx="2788920" cy="457200"/>
+          </a:xfrm>
+          <a:prstGeom prst="rect">
+            <a:avLst/>
+          </a:prstGeom>
+          <a:noFill/>
+          <a:ln/>
+        </p:spPr>
+        <p:txBody>
+          <a:bodyPr wrap="square" lIns="0" tIns="0" rIns="0" bIns="0" rtlCol="0" anchor="t"/>
+          <a:lstStyle/>
+          <a:p>
+            <a:pPr indent="0" marL="0">
+              <a:buNone/>
+            </a:pPr>
+            <a:r>
+              <a:rPr lang="en-US" sz="2200" b="1" dirty="0">
+                <a:solidFill>
+                  <a:schemeClr val="accent3"/>
+                </a:solidFill>
+              </a:rPr>
+              <a:t>Monitor</a:t>
+            </a:r>
+            <a:endParaRPr lang="en-US" sz="2200" dirty="0"/>
+          </a:p>
+        </p:txBody>
+      </p:sp>
+      <p:sp>
+        <p:nvSpPr>
+          <p:cNvPr id="12" name="Next 3 body"/>
+          <p:cNvSpPr txBox="1"/>
+          <p:nvPr/>
+        </p:nvSpPr>
+        <p:spPr>
+          <a:xfrm>
+            <a:off x="8229600" y="2697480"/>
+            <a:ext cx="2788920" cy="1280160"/>
+          </a:xfrm>
+          <a:prstGeom prst="rect">
+            <a:avLst/>
+          </a:prstGeom>
+          <a:noFill/>
+          <a:ln/>
+        </p:spPr>
+        <p:txBody>
+          <a:bodyPr wrap="square" lIns="0" tIns="0" rIns="0" bIns="0" rtlCol="0" anchor="t"/>
+          <a:lstStyle/>
+          <a:p>
+            <a:pPr indent="0" marL="0">
+              <a:buNone/>
+            </a:pPr>
+            <a:r>
+              <a:rPr lang="en-US" sz="1600" dirty="0">
                 <a:solidFill>
                   <a:schemeClr val="bg1"/>
                 </a:solidFill>
               </a:rPr>
-              <a:t>3</a:t>
-            </a:r>
-            <a:endParaRPr lang="en-US" sz="1800" dirty="0"/>
-          </a:p>
-        </p:txBody>
-      </p:sp>
-      <p:sp>
-        <p:nvSpPr>
-          <p:cNvPr id="20" name="Step 3 label"/>
+              <a:t>Schedule the extract into Apromore, track the KPIs against target and report value realised quarterly.</a:t>
+            </a:r>
+            <a:endParaRPr lang="en-US" sz="1600" dirty="0"/>
+          </a:p>
+        </p:txBody>
+      </p:sp>
+      <p:sp>
+        <p:nvSpPr>
+          <p:cNvPr id="13" name="Closing contact"/>
           <p:cNvSpPr txBox="1"/>
           <p:nvPr/>
         </p:nvSpPr>
         <p:spPr>
           <a:xfrm>
-            <a:off x="6483096" y="2286000"/>
-            <a:ext cx="2103120" cy="274320"/>
+            <a:off x="731520" y="5943600"/>
+            <a:ext cx="7315200" cy="365760"/>
           </a:xfrm>
           <a:prstGeom prst="rect">
             <a:avLst/>
@@ -11247,406 +8136,14 @@
               <a:buNone/>
             </a:pPr>
             <a:r>
-              <a:rPr lang="en-US" sz="1200" b="1" dirty="0">
-                <a:solidFill>
-                  <a:schemeClr val="accent6"/>
-                </a:solidFill>
-              </a:rPr>
-              <a:t>Load</a:t>
-            </a:r>
-            <a:endParaRPr lang="en-US" sz="1200" dirty="0"/>
-          </a:p>
-        </p:txBody>
-      </p:sp>
-      <p:sp>
-        <p:nvSpPr>
-          <p:cNvPr id="21" name="Step 3 title"/>
-          <p:cNvSpPr txBox="1"/>
-          <p:nvPr/>
-        </p:nvSpPr>
-        <p:spPr>
-          <a:xfrm>
-            <a:off x="6483096" y="2578608"/>
-            <a:ext cx="2103120" cy="411480"/>
-          </a:xfrm>
-          <a:prstGeom prst="rect">
-            <a:avLst/>
-          </a:prstGeom>
-          <a:noFill/>
-          <a:ln/>
-        </p:spPr>
-        <p:txBody>
-          <a:bodyPr wrap="square" lIns="0" tIns="0" rIns="0" bIns="0" rtlCol="0" anchor="t"/>
-          <a:lstStyle/>
-          <a:p>
-            <a:pPr indent="0" marL="0">
-              <a:buNone/>
-            </a:pPr>
-            <a:r>
-              <a:rPr lang="en-US" sz="1800" b="1" dirty="0">
-                <a:solidFill>
-                  <a:schemeClr val="tx2"/>
-                </a:solidFill>
-              </a:rPr>
-              <a:t>Event log</a:t>
-            </a:r>
-            <a:endParaRPr lang="en-US" sz="1800" dirty="0"/>
-          </a:p>
-        </p:txBody>
-      </p:sp>
-      <p:sp>
-        <p:nvSpPr>
-          <p:cNvPr id="22" name="Step 3 body"/>
-          <p:cNvSpPr txBox="1"/>
-          <p:nvPr/>
-        </p:nvSpPr>
-        <p:spPr>
-          <a:xfrm>
-            <a:off x="6483096" y="3063240"/>
-            <a:ext cx="2103120" cy="1508760"/>
-          </a:xfrm>
-          <a:prstGeom prst="rect">
-            <a:avLst/>
-          </a:prstGeom>
-          <a:noFill/>
-          <a:ln/>
-        </p:spPr>
-        <p:txBody>
-          <a:bodyPr wrap="square" lIns="0" tIns="0" rIns="0" bIns="0" rtlCol="0" anchor="t"/>
-          <a:lstStyle/>
-          <a:p>
-            <a:pPr indent="0" marL="0">
-              <a:buNone/>
-            </a:pPr>
-            <a:r>
               <a:rPr lang="en-US" sz="1400" dirty="0">
                 <a:solidFill>
-                  <a:schemeClr val="tx1"/>
-                </a:solidFill>
-              </a:rPr>
-              <a:t>CSV and IEEE XES with activity, timestamps, resource and case attributes, ready for Apromore.</a:t>
+                  <a:schemeClr val="accent3"/>
+                </a:solidFill>
+              </a:rPr>
+              <a:t>salesforce-process-intelligence.vercel.app  ·  Luke Audie</a:t>
             </a:r>
             <a:endParaRPr lang="en-US" sz="1400" dirty="0"/>
-          </a:p>
-        </p:txBody>
-      </p:sp>
-      <p:sp>
-        <p:nvSpPr>
-          <p:cNvPr id="23" name="Step 3 arrow"/>
-          <p:cNvSpPr/>
-          <p:nvPr/>
-        </p:nvSpPr>
-        <p:spPr>
-          <a:xfrm>
-            <a:off x="8833104" y="2852928"/>
-            <a:ext cx="219456" cy="329184"/>
-          </a:xfrm>
-          <a:prstGeom prst="rightArrow">
-            <a:avLst/>
-          </a:prstGeom>
-          <a:solidFill>
-            <a:schemeClr val="accent2"/>
-          </a:solidFill>
-          <a:ln/>
-        </p:spPr>
-      </p:sp>
-      <p:sp>
-        <p:nvSpPr>
-          <p:cNvPr id="24" name="Step 4 card"/>
-          <p:cNvSpPr/>
-          <p:nvPr/>
-        </p:nvSpPr>
-        <p:spPr>
-          <a:xfrm>
-            <a:off x="9107424" y="1371600"/>
-            <a:ext cx="2514600" cy="3291840"/>
-          </a:xfrm>
-          <a:prstGeom prst="roundRect">
-            <a:avLst>
-              <a:gd name="adj" fmla="val 4364"/>
-            </a:avLst>
-          </a:prstGeom>
-          <a:solidFill>
-            <a:schemeClr val="bg2"/>
-          </a:solidFill>
-          <a:ln/>
-        </p:spPr>
-      </p:sp>
-      <p:sp>
-        <p:nvSpPr>
-          <p:cNvPr id="25" name="Step 4 marker"/>
-          <p:cNvSpPr/>
-          <p:nvPr/>
-        </p:nvSpPr>
-        <p:spPr>
-          <a:xfrm>
-            <a:off x="9336024" y="1600200"/>
-            <a:ext cx="502920" cy="502920"/>
-          </a:xfrm>
-          <a:prstGeom prst="ellipse">
-            <a:avLst/>
-          </a:prstGeom>
-          <a:solidFill>
-            <a:schemeClr val="accent1"/>
-          </a:solidFill>
-          <a:ln/>
-        </p:spPr>
-      </p:sp>
-      <p:sp>
-        <p:nvSpPr>
-          <p:cNvPr id="26" name="Step 4 number"/>
-          <p:cNvSpPr txBox="1"/>
-          <p:nvPr/>
-        </p:nvSpPr>
-        <p:spPr>
-          <a:xfrm>
-            <a:off x="9336024" y="1600200"/>
-            <a:ext cx="502920" cy="502920"/>
-          </a:xfrm>
-          <a:prstGeom prst="rect">
-            <a:avLst/>
-          </a:prstGeom>
-          <a:noFill/>
-          <a:ln/>
-        </p:spPr>
-        <p:txBody>
-          <a:bodyPr wrap="square" lIns="0" tIns="0" rIns="0" bIns="0" rtlCol="0" anchor="ctr"/>
-          <a:lstStyle/>
-          <a:p>
-            <a:pPr algn="ctr" indent="0" marL="0">
-              <a:buNone/>
-            </a:pPr>
-            <a:r>
-              <a:rPr lang="en-US" sz="1800" b="1" dirty="0">
-                <a:solidFill>
-                  <a:schemeClr val="bg1"/>
-                </a:solidFill>
-              </a:rPr>
-              <a:t>4</a:t>
-            </a:r>
-            <a:endParaRPr lang="en-US" sz="1800" dirty="0"/>
-          </a:p>
-        </p:txBody>
-      </p:sp>
-      <p:sp>
-        <p:nvSpPr>
-          <p:cNvPr id="27" name="Step 4 label"/>
-          <p:cNvSpPr txBox="1"/>
-          <p:nvPr/>
-        </p:nvSpPr>
-        <p:spPr>
-          <a:xfrm>
-            <a:off x="9336024" y="2286000"/>
-            <a:ext cx="2103120" cy="274320"/>
-          </a:xfrm>
-          <a:prstGeom prst="rect">
-            <a:avLst/>
-          </a:prstGeom>
-          <a:noFill/>
-          <a:ln/>
-        </p:spPr>
-        <p:txBody>
-          <a:bodyPr wrap="square" lIns="0" tIns="0" rIns="0" bIns="0" rtlCol="0" anchor="t"/>
-          <a:lstStyle/>
-          <a:p>
-            <a:pPr indent="0" marL="0">
-              <a:buNone/>
-            </a:pPr>
-            <a:r>
-              <a:rPr lang="en-US" sz="1200" b="1" dirty="0">
-                <a:solidFill>
-                  <a:schemeClr val="accent6"/>
-                </a:solidFill>
-              </a:rPr>
-              <a:t>Mine and size</a:t>
-            </a:r>
-            <a:endParaRPr lang="en-US" sz="1200" dirty="0"/>
-          </a:p>
-        </p:txBody>
-      </p:sp>
-      <p:sp>
-        <p:nvSpPr>
-          <p:cNvPr id="28" name="Step 4 title"/>
-          <p:cNvSpPr txBox="1"/>
-          <p:nvPr/>
-        </p:nvSpPr>
-        <p:spPr>
-          <a:xfrm>
-            <a:off x="9336024" y="2578608"/>
-            <a:ext cx="2103120" cy="411480"/>
-          </a:xfrm>
-          <a:prstGeom prst="rect">
-            <a:avLst/>
-          </a:prstGeom>
-          <a:noFill/>
-          <a:ln/>
-        </p:spPr>
-        <p:txBody>
-          <a:bodyPr wrap="square" lIns="0" tIns="0" rIns="0" bIns="0" rtlCol="0" anchor="t"/>
-          <a:lstStyle/>
-          <a:p>
-            <a:pPr indent="0" marL="0">
-              <a:buNone/>
-            </a:pPr>
-            <a:r>
-              <a:rPr lang="en-US" sz="1800" b="1" dirty="0">
-                <a:solidFill>
-                  <a:schemeClr val="tx2"/>
-                </a:solidFill>
-              </a:rPr>
-              <a:t>Map and value</a:t>
-            </a:r>
-            <a:endParaRPr lang="en-US" sz="1800" dirty="0"/>
-          </a:p>
-        </p:txBody>
-      </p:sp>
-      <p:sp>
-        <p:nvSpPr>
-          <p:cNvPr id="29" name="Step 4 body"/>
-          <p:cNvSpPr txBox="1"/>
-          <p:nvPr/>
-        </p:nvSpPr>
-        <p:spPr>
-          <a:xfrm>
-            <a:off x="9336024" y="3063240"/>
-            <a:ext cx="2103120" cy="1508760"/>
-          </a:xfrm>
-          <a:prstGeom prst="rect">
-            <a:avLst/>
-          </a:prstGeom>
-          <a:noFill/>
-          <a:ln/>
-        </p:spPr>
-        <p:txBody>
-          <a:bodyPr wrap="square" lIns="0" tIns="0" rIns="0" bIns="0" rtlCol="0" anchor="t"/>
-          <a:lstStyle/>
-          <a:p>
-            <a:pPr indent="0" marL="0">
-              <a:buNone/>
-            </a:pPr>
-            <a:r>
-              <a:rPr lang="en-US" sz="1400" dirty="0">
-                <a:solidFill>
-                  <a:schemeClr val="tx1"/>
-                </a:solidFill>
-              </a:rPr>
-              <a:t>Directly-follows graph, variant analysis, cohort win rates and a driver-based value model.</a:t>
-            </a:r>
-            <a:endParaRPr lang="en-US" sz="1400" dirty="0"/>
-          </a:p>
-        </p:txBody>
-      </p:sp>
-      <p:sp>
-        <p:nvSpPr>
-          <p:cNvPr id="30" name="Live run band"/>
-          <p:cNvSpPr/>
-          <p:nvPr/>
-        </p:nvSpPr>
-        <p:spPr>
-          <a:xfrm>
-            <a:off x="548640" y="4983480"/>
-            <a:ext cx="11064240" cy="1051560"/>
-          </a:xfrm>
-          <a:prstGeom prst="roundRect">
-            <a:avLst>
-              <a:gd name="adj" fmla="val 10435"/>
-            </a:avLst>
-          </a:prstGeom>
-          <a:solidFill>
-            <a:schemeClr val="tx2"/>
-          </a:solidFill>
-          <a:ln/>
-        </p:spPr>
-      </p:sp>
-      <p:sp>
-        <p:nvSpPr>
-          <p:cNvPr id="31" name="Live run text"/>
-          <p:cNvSpPr txBox="1"/>
-          <p:nvPr/>
-        </p:nvSpPr>
-        <p:spPr>
-          <a:xfrm>
-            <a:off x="822960" y="4983480"/>
-            <a:ext cx="10515600" cy="1051560"/>
-          </a:xfrm>
-          <a:prstGeom prst="rect">
-            <a:avLst/>
-          </a:prstGeom>
-          <a:noFill/>
-          <a:ln/>
-        </p:spPr>
-        <p:txBody>
-          <a:bodyPr wrap="square" lIns="0" tIns="0" rIns="0" bIns="0" rtlCol="0" anchor="ctr"/>
-          <a:lstStyle/>
-          <a:p>
-            <a:pPr indent="0" marL="0">
-              <a:buNone/>
-            </a:pPr>
-            <a:r>
-              <a:rPr lang="en-US" sz="1600" b="1" dirty="0">
-                <a:solidFill>
-                  <a:schemeClr val="accent3"/>
-                </a:solidFill>
-              </a:rPr>
-              <a:t>Live run on a Salesforce trial org:  </a:t>
-            </a:r>
-            <a:pPr indent="0" marL="0">
-              <a:buNone/>
-            </a:pPr>
-            <a:r>
-              <a:rPr lang="en-US" sz="1600" dirty="0">
-                <a:solidFill>
-                  <a:schemeClr val="bg1"/>
-                </a:solidFill>
-              </a:rPr>
-              <a:t>40 opportunities  ·  351 events  ·  2 objects joined  ·  CSV + XES for Apromore</a:t>
-            </a:r>
-            <a:endParaRPr lang="en-US" sz="1600" dirty="0"/>
-          </a:p>
-        </p:txBody>
-      </p:sp>
-      <p:sp>
-        <p:nvSpPr>
-          <p:cNvPr id="25" name="Slide Number Placeholder 0"/>
-          <p:cNvSpPr>
-            <a:spLocks noGrp="1"/>
-          </p:cNvSpPr>
-          <p:nvPr>
-            <p:ph type="sldNum" sz="quarter" idx="4294967295"/>
-          </p:nvPr>
-        </p:nvSpPr>
-        <p:spPr>
-          <a:xfrm>
-            <a:off x="11155680" y="6400800"/>
-            <a:ext cx="457200" cy="274320"/>
-          </a:xfrm>
-          <a:prstGeom prst="rect">
-            <a:avLst/>
-          </a:prstGeom>
-          <a:extLst>
-            <a:ext uri="{C572A759-6A51-4108-AA02-DFA0A04FC94B}">
-              <ma14:wrappingTextBoxFlag xmlns:ma14="http://schemas.microsoft.com/office/mac/drawingml/2011/main" val="0"/>
-            </a:ext>
-          </a:extLst>
-        </p:spPr>
-        <p:txBody>
-          <a:bodyPr/>
-          <a:lstStyle>
-            <a:lvl1pPr>
-              <a:defRPr sz="1000">
-                <a:solidFill>
-                  <a:schemeClr val="accent6"/>
-                </a:solidFill>
-              </a:defRPr>
-            </a:lvl1pPr>
-          </a:lstStyle>
-          <a:p>
-            <a:pPr algn="r"/>
-            <a:fld id="{F7021451-1387-4CA6-816F-3879F97B5CBC}" type="slidenum">
-              <a:rPr b="0" lang="en-US"/>
-              <a:t>9</a:t>
-            </a:fld>
-            <a:endParaRPr lang="en-US"/>
           </a:p>
         </p:txBody>
       </p:sp>

--- a/deck/salesforce-process-intelligence.pptx
+++ b/deck/salesforce-process-intelligence.pptx
@@ -114,30 +114,30 @@
   <p:extLst>
     <p:ext uri="{521415D9-36F7-43E2-AB2F-B90AF26B5E84}">
       <p14:sectionLst xmlns:p14="http://schemas.microsoft.com/office/powerpoint/2010/main">
-        <p14:section name="Opening" id="{6d4e9b07-343f-868e-eeea-517fcf0838c2}">
+        <p14:section name="Opening" id="{cea02240-3fcf-10ae-6263-30fbd8c30f57}">
           <p14:sldIdLst>
             <p14:sldId id="256"/>
             <p14:sldId id="257"/>
           </p14:sldIdLst>
         </p14:section>
-        <p14:section name="Evidence" id="{1dd6c548-78cb-5c1c-5b65-d0d9a3c71872}">
+        <p14:section name="Evidence" id="{4006877a-e396-3548-454c-fcd91d84a0df}">
           <p14:sldIdLst>
             <p14:sldId id="258"/>
             <p14:sldId id="259"/>
           </p14:sldIdLst>
         </p14:section>
-        <p14:section name="Value" id="{c8cb17a7-d113-2aac-648b-11b8cd1aa483}">
+        <p14:section name="Value" id="{2a5f094b-0090-a4f9-b8cc-53fb2d756d58}">
           <p14:sldIdLst>
             <p14:sldId id="260"/>
           </p14:sldIdLst>
         </p14:section>
-        <p14:section name="Tech setup" id="{88a7235b-cfa3-08a1-0eb0-c01130c35b4e}">
+        <p14:section name="Tech setup" id="{82d0bfbe-626b-3fa9-d2b6-98154d9de801}">
           <p14:sldIdLst>
             <p14:sldId id="261"/>
             <p14:sldId id="262"/>
           </p14:sldIdLst>
         </p14:section>
-        <p14:section name="Close" id="{08e747ec-fce7-5748-f1b8-2b3585baebcf}">
+        <p14:section name="Close" id="{b9043b03-107a-2b7d-1f74-464bac0320d0}">
           <p14:sldIdLst>
             <p14:sldId id="263"/>
           </p14:sldIdLst>
@@ -1831,7 +1831,7 @@
           <a:p>
             <a:r>
               <a:rPr lang="en-US" dirty="0"/>
-              <a:t>Every step is real: the CLI fix in Setup, the seeded deals, the raw stage history the extract reads, and the published output. Opportunity is the case; leads join via ConvertedOpportunityId and tasks via WhatId. Trial orgs can't backdate history, so the 10-month dataset is simulated in the same object shape.</a:t>
+              <a:t>Left: the trial org standing in for a client's CRM, seeded by seed.py so there's real OpportunityHistory to read. Right: the exact SOQL the extractor runs. Opportunity is the case; leads join via ConvertedOpportunityId and tasks via WhatId. Trial orgs can't backdate history, so the 10-month dataset is simulated in the same object shape.</a:t>
             </a:r>
             <a:endParaRPr lang="en-US" dirty="0"/>
           </a:p>
@@ -6112,7 +6112,7 @@
                   <a:schemeClr val="tx2"/>
                 </a:solidFill>
               </a:rPr>
-              <a:t>Tech setup: the key steps, as they ran</a:t>
+              <a:t>Tech setup: from a Salesforce org to an event log</a:t>
             </a:r>
             <a:endParaRPr lang="en-US" sz="3000" dirty="0"/>
           </a:p>
@@ -6120,36 +6120,14 @@
       </p:sp>
       <p:sp>
         <p:nvSpPr>
-          <p:cNvPr id="3" name="Key step 1 card"/>
+          <p:cNvPr id="3" name="Org screenshot frame"/>
           <p:cNvSpPr/>
           <p:nvPr/>
         </p:nvSpPr>
         <p:spPr>
           <a:xfrm>
-            <a:off x="548640" y="1280160"/>
-            <a:ext cx="5440680" cy="2331720"/>
-          </a:xfrm>
-          <a:prstGeom prst="roundRect">
-            <a:avLst>
-              <a:gd name="adj" fmla="val 4706"/>
-            </a:avLst>
-          </a:prstGeom>
-          <a:solidFill>
-            <a:schemeClr val="bg2"/>
-          </a:solidFill>
-          <a:ln/>
-        </p:spPr>
-      </p:sp>
-      <p:sp>
-        <p:nvSpPr>
-          <p:cNvPr id="4" name="Key step 1 frame"/>
-          <p:cNvSpPr/>
-          <p:nvPr/>
-        </p:nvSpPr>
-        <p:spPr>
-          <a:xfrm>
-            <a:off x="658368" y="1440316"/>
-            <a:ext cx="2980944" cy="2011407"/>
+            <a:off x="512064" y="1243584"/>
+            <a:ext cx="5148072" cy="3910582"/>
           </a:xfrm>
           <a:prstGeom prst="rect">
             <a:avLst/>
@@ -6167,7 +6145,7 @@
       </p:sp>
       <p:pic>
         <p:nvPicPr>
-          <p:cNvPr id="5" name="Key step 1 image" descr="Salesforce CLI allowed under Connected Apps OAuth Usage; the CLI session signs every API call.">    </p:cNvPr>
+          <p:cNvPr id="4" name="Org screenshot" descr="Salesforce trial org with seeded demo records">    </p:cNvPr>
           <p:cNvPicPr>
             <a:picLocks noChangeAspect="1"/>
           </p:cNvPicPr>
@@ -6181,8 +6159,8 @@
         </p:blipFill>
         <p:spPr>
           <a:xfrm>
-            <a:off x="685800" y="1467748"/>
-            <a:ext cx="2926080" cy="1956543"/>
+            <a:off x="548640" y="1280160"/>
+            <a:ext cx="5074920" cy="3837430"/>
           </a:xfrm>
           <a:prstGeom prst="rect">
             <a:avLst/>
@@ -6191,269 +6169,179 @@
       </p:pic>
       <p:sp>
         <p:nvSpPr>
-          <p:cNvPr id="6" name="Key step 1 marker"/>
+          <p:cNvPr id="5" name="Org caption"/>
+          <p:cNvSpPr txBox="1"/>
+          <p:nvPr/>
+        </p:nvSpPr>
+        <p:spPr>
+          <a:xfrm>
+            <a:off x="548640" y="5669280"/>
+            <a:ext cx="5074920" cy="685800"/>
+          </a:xfrm>
+          <a:prstGeom prst="rect">
+            <a:avLst/>
+          </a:prstGeom>
+          <a:noFill/>
+          <a:ln/>
+        </p:spPr>
+        <p:txBody>
+          <a:bodyPr wrap="square" lIns="0" tIns="0" rIns="0" bIns="0" rtlCol="0" anchor="t"/>
+          <a:lstStyle/>
+          <a:p>
+            <a:pPr indent="0" marL="0">
+              <a:buNone/>
+            </a:pPr>
+            <a:r>
+              <a:rPr lang="en-US" sz="1400" b="1" dirty="0">
+                <a:solidFill>
+                  <a:schemeClr val="tx2"/>
+                </a:solidFill>
+              </a:rPr>
+              <a:t>Salesforce trial org: </a:t>
+            </a:r>
+            <a:pPr indent="0" marL="0">
+              <a:buNone/>
+            </a:pPr>
+            <a:r>
+              <a:rPr lang="en-US" sz="1400" dirty="0">
+                <a:solidFill>
+                  <a:schemeClr val="tx2"/>
+                </a:solidFill>
+              </a:rPr>
+              <a:t>seed.py loaded 40 [Demo] deals through real stage changes to simulate a client's CRM.</a:t>
+            </a:r>
+            <a:endParaRPr lang="en-US" sz="1400" dirty="0"/>
+          </a:p>
+        </p:txBody>
+      </p:sp>
+      <p:sp>
+        <p:nvSpPr>
+          <p:cNvPr id="6" name="Code panel"/>
           <p:cNvSpPr/>
           <p:nvPr/>
         </p:nvSpPr>
         <p:spPr>
           <a:xfrm>
-            <a:off x="3794760" y="1508760"/>
-            <a:ext cx="411480" cy="411480"/>
-          </a:xfrm>
-          <a:prstGeom prst="ellipse">
-            <a:avLst/>
-          </a:prstGeom>
-          <a:solidFill>
-            <a:schemeClr val="accent1"/>
-          </a:solidFill>
-          <a:ln/>
-        </p:spPr>
-      </p:sp>
-      <p:sp>
-        <p:nvSpPr>
-          <p:cNvPr id="7" name="Key step 1 number"/>
-          <p:cNvSpPr txBox="1"/>
-          <p:nvPr/>
-        </p:nvSpPr>
-        <p:spPr>
-          <a:xfrm>
-            <a:off x="3794760" y="1508760"/>
-            <a:ext cx="411480" cy="411480"/>
-          </a:xfrm>
-          <a:prstGeom prst="rect">
-            <a:avLst/>
-          </a:prstGeom>
-          <a:noFill/>
-          <a:ln/>
-        </p:spPr>
-        <p:txBody>
-          <a:bodyPr wrap="square" lIns="0" tIns="0" rIns="0" bIns="0" rtlCol="0" anchor="ctr"/>
-          <a:lstStyle/>
-          <a:p>
-            <a:pPr algn="ctr" indent="0" marL="0">
-              <a:buNone/>
-            </a:pPr>
-            <a:r>
-              <a:rPr lang="en-US" sz="1600" b="1" dirty="0">
-                <a:solidFill>
-                  <a:schemeClr val="bg1"/>
-                </a:solidFill>
-              </a:rPr>
-              <a:t>1</a:t>
-            </a:r>
-            <a:endParaRPr lang="en-US" sz="1600" dirty="0"/>
-          </a:p>
-        </p:txBody>
-      </p:sp>
-      <p:sp>
-        <p:nvSpPr>
-          <p:cNvPr id="8" name="Key step 1 title"/>
-          <p:cNvSpPr txBox="1"/>
-          <p:nvPr/>
-        </p:nvSpPr>
-        <p:spPr>
-          <a:xfrm>
-            <a:off x="3794760" y="2011680"/>
-            <a:ext cx="2057400" cy="365760"/>
-          </a:xfrm>
-          <a:prstGeom prst="rect">
-            <a:avLst/>
-          </a:prstGeom>
-          <a:noFill/>
-          <a:ln/>
-        </p:spPr>
-        <p:txBody>
-          <a:bodyPr wrap="square" lIns="0" tIns="0" rIns="0" bIns="0" rtlCol="0" anchor="t"/>
-          <a:lstStyle/>
-          <a:p>
-            <a:pPr indent="0" marL="0">
-              <a:buNone/>
-            </a:pPr>
-            <a:r>
-              <a:rPr lang="en-US" sz="1600" b="1" dirty="0">
-                <a:solidFill>
-                  <a:schemeClr val="tx2"/>
-                </a:solidFill>
-              </a:rPr>
-              <a:t>Connect</a:t>
-            </a:r>
-            <a:endParaRPr lang="en-US" sz="1600" dirty="0"/>
-          </a:p>
-        </p:txBody>
-      </p:sp>
-      <p:sp>
-        <p:nvSpPr>
-          <p:cNvPr id="9" name="Key step 1 body"/>
-          <p:cNvSpPr txBox="1"/>
-          <p:nvPr/>
-        </p:nvSpPr>
-        <p:spPr>
-          <a:xfrm>
-            <a:off x="3794760" y="2377440"/>
-            <a:ext cx="2057400" cy="1143000"/>
-          </a:xfrm>
-          <a:prstGeom prst="rect">
-            <a:avLst/>
-          </a:prstGeom>
-          <a:noFill/>
-          <a:ln/>
-        </p:spPr>
-        <p:txBody>
-          <a:bodyPr wrap="square" lIns="0" tIns="0" rIns="0" bIns="0" rtlCol="0" anchor="t"/>
-          <a:lstStyle/>
-          <a:p>
-            <a:pPr indent="0" marL="0">
-              <a:buNone/>
-            </a:pPr>
-            <a:r>
-              <a:rPr lang="en-US" sz="1400" dirty="0">
-                <a:solidFill>
-                  <a:schemeClr val="tx1"/>
-                </a:solidFill>
-              </a:rPr>
-              <a:t>Salesforce CLI allowed under Connected Apps OAuth Usage; the CLI session signs every API call.</a:t>
-            </a:r>
-            <a:endParaRPr lang="en-US" sz="1400" dirty="0"/>
-          </a:p>
-        </p:txBody>
-      </p:sp>
-      <p:sp>
-        <p:nvSpPr>
-          <p:cNvPr id="10" name="Key step 2 card"/>
-          <p:cNvSpPr/>
-          <p:nvPr/>
-        </p:nvSpPr>
-        <p:spPr>
-          <a:xfrm>
-            <a:off x="6172200" y="1280160"/>
-            <a:ext cx="5440680" cy="2331720"/>
+            <a:off x="5897880" y="1280160"/>
+            <a:ext cx="5715000" cy="4297680"/>
           </a:xfrm>
           <a:prstGeom prst="roundRect">
             <a:avLst>
-              <a:gd name="adj" fmla="val 4706"/>
+              <a:gd name="adj" fmla="val 2553"/>
             </a:avLst>
           </a:prstGeom>
           <a:solidFill>
-            <a:schemeClr val="bg2"/>
+            <a:schemeClr val="tx2"/>
           </a:solidFill>
           <a:ln/>
         </p:spPr>
       </p:sp>
       <p:sp>
         <p:nvSpPr>
-          <p:cNvPr id="11" name="Key step 2 frame"/>
+          <p:cNvPr id="7" name="Code panel dot 1"/>
           <p:cNvSpPr/>
           <p:nvPr/>
         </p:nvSpPr>
         <p:spPr>
           <a:xfrm>
-            <a:off x="6281928" y="1434694"/>
-            <a:ext cx="2980944" cy="2022653"/>
-          </a:xfrm>
-          <a:prstGeom prst="rect">
+            <a:off x="6080760" y="1417320"/>
+            <a:ext cx="109728" cy="109728"/>
+          </a:xfrm>
+          <a:prstGeom prst="ellipse">
             <a:avLst/>
           </a:prstGeom>
           <a:solidFill>
-            <a:schemeClr val="bg1"/>
+            <a:srgbClr val="FE9339"/>
           </a:solidFill>
-          <a:ln w="12700">
-            <a:solidFill>
-              <a:schemeClr val="accent3"/>
-            </a:solidFill>
-            <a:prstDash val="solid"/>
-          </a:ln>
-        </p:spPr>
-      </p:sp>
-      <p:pic>
-        <p:nvPicPr>
-          <p:cNvPr id="12" name="Key step 2 image" descr="seed.py loads 40 [Demo] deals and walks them through the org's own stages.">    </p:cNvPr>
-          <p:cNvPicPr>
-            <a:picLocks noChangeAspect="1"/>
-          </p:cNvPicPr>
-          <p:nvPr/>
-        </p:nvPicPr>
-        <p:blipFill>
-          <a:blip r:embed="rId2"/>
-          <a:stretch>
-            <a:fillRect/>
-          </a:stretch>
-        </p:blipFill>
-        <p:spPr>
-          <a:xfrm>
-            <a:off x="6309360" y="1462126"/>
-            <a:ext cx="2926080" cy="1967789"/>
-          </a:xfrm>
-          <a:prstGeom prst="rect">
-            <a:avLst/>
-          </a:prstGeom>
-        </p:spPr>
-      </p:pic>
-      <p:sp>
-        <p:nvSpPr>
-          <p:cNvPr id="13" name="Key step 2 marker"/>
+          <a:ln/>
+        </p:spPr>
+      </p:sp>
+      <p:sp>
+        <p:nvSpPr>
+          <p:cNvPr id="8" name="Code panel dot 2"/>
           <p:cNvSpPr/>
           <p:nvPr/>
         </p:nvSpPr>
         <p:spPr>
           <a:xfrm>
-            <a:off x="9418320" y="1508760"/>
-            <a:ext cx="411480" cy="411480"/>
+            <a:off x="6263640" y="1417320"/>
+            <a:ext cx="109728" cy="109728"/>
           </a:xfrm>
           <a:prstGeom prst="ellipse">
             <a:avLst/>
           </a:prstGeom>
           <a:solidFill>
-            <a:schemeClr val="accent1"/>
+            <a:srgbClr val="F6C344"/>
           </a:solidFill>
           <a:ln/>
         </p:spPr>
       </p:sp>
       <p:sp>
         <p:nvSpPr>
-          <p:cNvPr id="14" name="Key step 2 number"/>
+          <p:cNvPr id="9" name="Code panel dot 3"/>
+          <p:cNvSpPr/>
+          <p:nvPr/>
+        </p:nvSpPr>
+        <p:spPr>
+          <a:xfrm>
+            <a:off x="6446520" y="1417320"/>
+            <a:ext cx="109728" cy="109728"/>
+          </a:xfrm>
+          <a:prstGeom prst="ellipse">
+            <a:avLst/>
+          </a:prstGeom>
+          <a:solidFill>
+            <a:srgbClr val="2E844A"/>
+          </a:solidFill>
+          <a:ln/>
+        </p:spPr>
+      </p:sp>
+      <p:sp>
+        <p:nvSpPr>
+          <p:cNvPr id="10" name="Code panel filename"/>
           <p:cNvSpPr txBox="1"/>
           <p:nvPr/>
         </p:nvSpPr>
         <p:spPr>
           <a:xfrm>
-            <a:off x="9418320" y="1508760"/>
-            <a:ext cx="411480" cy="411480"/>
-          </a:xfrm>
-          <a:prstGeom prst="rect">
-            <a:avLst/>
-          </a:prstGeom>
-          <a:noFill/>
-          <a:ln/>
-        </p:spPr>
-        <p:txBody>
-          <a:bodyPr wrap="square" lIns="0" tIns="0" rIns="0" bIns="0" rtlCol="0" anchor="ctr"/>
-          <a:lstStyle/>
-          <a:p>
-            <a:pPr algn="ctr" indent="0" marL="0">
-              <a:buNone/>
-            </a:pPr>
-            <a:r>
-              <a:rPr lang="en-US" sz="1600" b="1" dirty="0">
-                <a:solidFill>
-                  <a:schemeClr val="bg1"/>
-                </a:solidFill>
-              </a:rPr>
-              <a:t>2</a:t>
-            </a:r>
-            <a:endParaRPr lang="en-US" sz="1600" dirty="0"/>
-          </a:p>
-        </p:txBody>
-      </p:sp>
-      <p:sp>
-        <p:nvSpPr>
-          <p:cNvPr id="15" name="Key step 2 title"/>
+            <a:off x="6675120" y="1353312"/>
+            <a:ext cx="2743200" cy="237744"/>
+          </a:xfrm>
+          <a:prstGeom prst="rect">
+            <a:avLst/>
+          </a:prstGeom>
+          <a:noFill/>
+          <a:ln/>
+        </p:spPr>
+        <p:txBody>
+          <a:bodyPr wrap="square" lIns="0" tIns="0" rIns="0" bIns="0" rtlCol="0" anchor="t"/>
+          <a:lstStyle/>
+          <a:p>
+            <a:pPr indent="0" marL="0">
+              <a:buNone/>
+            </a:pPr>
+            <a:r>
+              <a:rPr lang="en-US" sz="1100" dirty="0">
+                <a:solidFill>
+                  <a:schemeClr val="accent3"/>
+                </a:solidFill>
+              </a:rPr>
+              <a:t>pipeline/extract.py</a:t>
+            </a:r>
+            <a:endParaRPr lang="en-US" sz="1100" dirty="0"/>
+          </a:p>
+        </p:txBody>
+      </p:sp>
+      <p:sp>
+        <p:nvSpPr>
+          <p:cNvPr id="11" name="SOQL code"/>
           <p:cNvSpPr txBox="1"/>
           <p:nvPr/>
         </p:nvSpPr>
         <p:spPr>
           <a:xfrm>
-            <a:off x="9418320" y="2011680"/>
-            <a:ext cx="2057400" cy="365760"/>
+            <a:off x="6080760" y="1664208"/>
+            <a:ext cx="5440680" cy="3840480"/>
           </a:xfrm>
           <a:prstGeom prst="rect">
             <a:avLst/>
@@ -6466,449 +6354,1086 @@
           <a:lstStyle/>
           <a:p>
             <a:pPr indent="0" marL="0">
-              <a:buNone/>
-            </a:pPr>
-            <a:r>
-              <a:rPr lang="en-US" sz="1600" b="1" dirty="0">
+              <a:lnSpc>
+                <a:spcPct val="100000"/>
+              </a:lnSpc>
+              <a:buNone/>
+            </a:pPr>
+            <a:r>
+              <a:rPr lang="en-US" sz="1000" dirty="0">
+                <a:solidFill>
+                  <a:srgbClr val="CFE9FE"/>
+                </a:solidFill>
+                <a:latin typeface="Courier New" pitchFamily="34" charset="0"/>
+                <a:ea typeface="Courier New" pitchFamily="34" charset="-122"/>
+                <a:cs typeface="Courier New" pitchFamily="34" charset="-120"/>
+              </a:rPr>
+              <a:t>QUERIES = {</a:t>
+            </a:r>
+            <a:endParaRPr lang="en-US" sz="1000" dirty="0"/>
+          </a:p>
+          <a:p>
+            <a:pPr indent="0" marL="0">
+              <a:lnSpc>
+                <a:spcPct val="100000"/>
+              </a:lnSpc>
+              <a:buNone/>
+            </a:pPr>
+            <a:r>
+              <a:rPr lang="en-US" sz="1000" dirty="0">
+                <a:solidFill>
+                  <a:srgbClr val="CFE9FE"/>
+                </a:solidFill>
+                <a:latin typeface="Courier New" pitchFamily="34" charset="0"/>
+                <a:ea typeface="Courier New" pitchFamily="34" charset="-122"/>
+                <a:cs typeface="Courier New" pitchFamily="34" charset="-120"/>
+              </a:rPr>
+              <a:t>    </a:t>
+            </a:r>
+            <a:pPr indent="0" marL="0">
+              <a:lnSpc>
+                <a:spcPct val="100000"/>
+              </a:lnSpc>
+              <a:buNone/>
+            </a:pPr>
+            <a:r>
+              <a:rPr lang="en-US" sz="1000" dirty="0">
+                <a:solidFill>
+                  <a:srgbClr val="FE9339"/>
+                </a:solidFill>
+                <a:latin typeface="Courier New" pitchFamily="34" charset="0"/>
+                <a:ea typeface="Courier New" pitchFamily="34" charset="-122"/>
+                <a:cs typeface="Courier New" pitchFamily="34" charset="-120"/>
+              </a:rPr>
+              <a:t>"opportunities"</a:t>
+            </a:r>
+            <a:pPr indent="0" marL="0">
+              <a:lnSpc>
+                <a:spcPct val="100000"/>
+              </a:lnSpc>
+              <a:buNone/>
+            </a:pPr>
+            <a:r>
+              <a:rPr lang="en-US" sz="1000" dirty="0">
+                <a:solidFill>
+                  <a:srgbClr val="CFE9FE"/>
+                </a:solidFill>
+                <a:latin typeface="Courier New" pitchFamily="34" charset="0"/>
+                <a:ea typeface="Courier New" pitchFamily="34" charset="-122"/>
+                <a:cs typeface="Courier New" pitchFamily="34" charset="-120"/>
+              </a:rPr>
+              <a:t>: """</a:t>
+            </a:r>
+            <a:endParaRPr lang="en-US" sz="1000" dirty="0"/>
+          </a:p>
+          <a:p>
+            <a:pPr indent="0" marL="0">
+              <a:lnSpc>
+                <a:spcPct val="100000"/>
+              </a:lnSpc>
+              <a:buNone/>
+            </a:pPr>
+            <a:r>
+              <a:rPr lang="en-US" sz="1000" dirty="0">
+                <a:solidFill>
+                  <a:srgbClr val="CFE9FE"/>
+                </a:solidFill>
+                <a:latin typeface="Courier New" pitchFamily="34" charset="0"/>
+                <a:ea typeface="Courier New" pitchFamily="34" charset="-122"/>
+                <a:cs typeface="Courier New" pitchFamily="34" charset="-120"/>
+              </a:rPr>
+              <a:t>    </a:t>
+            </a:r>
+            <a:pPr indent="0" marL="0">
+              <a:lnSpc>
+                <a:spcPct val="100000"/>
+              </a:lnSpc>
+              <a:buNone/>
+            </a:pPr>
+            <a:r>
+              <a:rPr lang="en-US" sz="1000" b="1" dirty="0">
+                <a:solidFill>
+                  <a:srgbClr val="0B9DE0"/>
+                </a:solidFill>
+                <a:latin typeface="Courier New" pitchFamily="34" charset="0"/>
+                <a:ea typeface="Courier New" pitchFamily="34" charset="-122"/>
+                <a:cs typeface="Courier New" pitchFamily="34" charset="-120"/>
+              </a:rPr>
+              <a:t>SELECT</a:t>
+            </a:r>
+            <a:pPr indent="0" marL="0">
+              <a:lnSpc>
+                <a:spcPct val="100000"/>
+              </a:lnSpc>
+              <a:buNone/>
+            </a:pPr>
+            <a:r>
+              <a:rPr lang="en-US" sz="1000" dirty="0">
+                <a:solidFill>
+                  <a:srgbClr val="CFE9FE"/>
+                </a:solidFill>
+                <a:latin typeface="Courier New" pitchFamily="34" charset="0"/>
+                <a:ea typeface="Courier New" pitchFamily="34" charset="-122"/>
+                <a:cs typeface="Courier New" pitchFamily="34" charset="-120"/>
+              </a:rPr>
+              <a:t> Id, Name, Amount, StageName, IsWon, IsClosed,</a:t>
+            </a:r>
+            <a:endParaRPr lang="en-US" sz="1000" dirty="0"/>
+          </a:p>
+          <a:p>
+            <a:pPr indent="0" marL="0">
+              <a:lnSpc>
+                <a:spcPct val="100000"/>
+              </a:lnSpc>
+              <a:buNone/>
+            </a:pPr>
+            <a:r>
+              <a:rPr lang="en-US" sz="1000" dirty="0">
+                <a:solidFill>
+                  <a:srgbClr val="CFE9FE"/>
+                </a:solidFill>
+                <a:latin typeface="Courier New" pitchFamily="34" charset="0"/>
+                <a:ea typeface="Courier New" pitchFamily="34" charset="-122"/>
+                <a:cs typeface="Courier New" pitchFamily="34" charset="-120"/>
+              </a:rPr>
+              <a:t>           LeadSource, CreatedDate, CloseDate, OwnerId, Owner.Name,</a:t>
+            </a:r>
+            <a:endParaRPr lang="en-US" sz="1000" dirty="0"/>
+          </a:p>
+          <a:p>
+            <a:pPr indent="0" marL="0">
+              <a:lnSpc>
+                <a:spcPct val="100000"/>
+              </a:lnSpc>
+              <a:buNone/>
+            </a:pPr>
+            <a:r>
+              <a:rPr lang="en-US" sz="1000" dirty="0">
+                <a:solidFill>
+                  <a:srgbClr val="CFE9FE"/>
+                </a:solidFill>
+                <a:latin typeface="Courier New" pitchFamily="34" charset="0"/>
+                <a:ea typeface="Courier New" pitchFamily="34" charset="-122"/>
+                <a:cs typeface="Courier New" pitchFamily="34" charset="-120"/>
+              </a:rPr>
+              <a:t>           Account.Industry, Account.BillingCountry</a:t>
+            </a:r>
+            <a:endParaRPr lang="en-US" sz="1000" dirty="0"/>
+          </a:p>
+          <a:p>
+            <a:pPr indent="0" marL="0">
+              <a:lnSpc>
+                <a:spcPct val="100000"/>
+              </a:lnSpc>
+              <a:buNone/>
+            </a:pPr>
+            <a:r>
+              <a:rPr lang="en-US" sz="1000" dirty="0">
+                <a:solidFill>
+                  <a:srgbClr val="CFE9FE"/>
+                </a:solidFill>
+                <a:latin typeface="Courier New" pitchFamily="34" charset="0"/>
+                <a:ea typeface="Courier New" pitchFamily="34" charset="-122"/>
+                <a:cs typeface="Courier New" pitchFamily="34" charset="-120"/>
+              </a:rPr>
+              <a:t>    </a:t>
+            </a:r>
+            <a:pPr indent="0" marL="0">
+              <a:lnSpc>
+                <a:spcPct val="100000"/>
+              </a:lnSpc>
+              <a:buNone/>
+            </a:pPr>
+            <a:r>
+              <a:rPr lang="en-US" sz="1000" b="1" dirty="0">
+                <a:solidFill>
+                  <a:srgbClr val="0B9DE0"/>
+                </a:solidFill>
+                <a:latin typeface="Courier New" pitchFamily="34" charset="0"/>
+                <a:ea typeface="Courier New" pitchFamily="34" charset="-122"/>
+                <a:cs typeface="Courier New" pitchFamily="34" charset="-120"/>
+              </a:rPr>
+              <a:t>FROM</a:t>
+            </a:r>
+            <a:pPr indent="0" marL="0">
+              <a:lnSpc>
+                <a:spcPct val="100000"/>
+              </a:lnSpc>
+              <a:buNone/>
+            </a:pPr>
+            <a:r>
+              <a:rPr lang="en-US" sz="1000" dirty="0">
+                <a:solidFill>
+                  <a:srgbClr val="CFE9FE"/>
+                </a:solidFill>
+                <a:latin typeface="Courier New" pitchFamily="34" charset="0"/>
+                <a:ea typeface="Courier New" pitchFamily="34" charset="-122"/>
+                <a:cs typeface="Courier New" pitchFamily="34" charset="-120"/>
+              </a:rPr>
+              <a:t> Opportunity""",</a:t>
+            </a:r>
+            <a:endParaRPr lang="en-US" sz="1000" dirty="0"/>
+          </a:p>
+          <a:p>
+            <a:pPr indent="0" marL="0">
+              <a:lnSpc>
+                <a:spcPct val="100000"/>
+              </a:lnSpc>
+              <a:buNone/>
+            </a:pPr>
+            <a:r>
+              <a:rPr lang="en-US" sz="1000" dirty="0">
+                <a:solidFill>
+                  <a:srgbClr val="CFE9FE"/>
+                </a:solidFill>
+                <a:latin typeface="Courier New" pitchFamily="34" charset="0"/>
+                <a:ea typeface="Courier New" pitchFamily="34" charset="-122"/>
+                <a:cs typeface="Courier New" pitchFamily="34" charset="-120"/>
+              </a:rPr>
+              <a:t>    </a:t>
+            </a:r>
+            <a:pPr indent="0" marL="0">
+              <a:lnSpc>
+                <a:spcPct val="100000"/>
+              </a:lnSpc>
+              <a:buNone/>
+            </a:pPr>
+            <a:r>
+              <a:rPr lang="en-US" sz="1000" dirty="0">
+                <a:solidFill>
+                  <a:srgbClr val="FE9339"/>
+                </a:solidFill>
+                <a:latin typeface="Courier New" pitchFamily="34" charset="0"/>
+                <a:ea typeface="Courier New" pitchFamily="34" charset="-122"/>
+                <a:cs typeface="Courier New" pitchFamily="34" charset="-120"/>
+              </a:rPr>
+              <a:t>"stage_history"</a:t>
+            </a:r>
+            <a:pPr indent="0" marL="0">
+              <a:lnSpc>
+                <a:spcPct val="100000"/>
+              </a:lnSpc>
+              <a:buNone/>
+            </a:pPr>
+            <a:r>
+              <a:rPr lang="en-US" sz="1000" dirty="0">
+                <a:solidFill>
+                  <a:srgbClr val="CFE9FE"/>
+                </a:solidFill>
+                <a:latin typeface="Courier New" pitchFamily="34" charset="0"/>
+                <a:ea typeface="Courier New" pitchFamily="34" charset="-122"/>
+                <a:cs typeface="Courier New" pitchFamily="34" charset="-120"/>
+              </a:rPr>
+              <a:t>: """</a:t>
+            </a:r>
+            <a:endParaRPr lang="en-US" sz="1000" dirty="0"/>
+          </a:p>
+          <a:p>
+            <a:pPr indent="0" marL="0">
+              <a:lnSpc>
+                <a:spcPct val="100000"/>
+              </a:lnSpc>
+              <a:buNone/>
+            </a:pPr>
+            <a:r>
+              <a:rPr lang="en-US" sz="1000" dirty="0">
+                <a:solidFill>
+                  <a:srgbClr val="CFE9FE"/>
+                </a:solidFill>
+                <a:latin typeface="Courier New" pitchFamily="34" charset="0"/>
+                <a:ea typeface="Courier New" pitchFamily="34" charset="-122"/>
+                <a:cs typeface="Courier New" pitchFamily="34" charset="-120"/>
+              </a:rPr>
+              <a:t>    </a:t>
+            </a:r>
+            <a:pPr indent="0" marL="0">
+              <a:lnSpc>
+                <a:spcPct val="100000"/>
+              </a:lnSpc>
+              <a:buNone/>
+            </a:pPr>
+            <a:r>
+              <a:rPr lang="en-US" sz="1000" b="1" dirty="0">
+                <a:solidFill>
+                  <a:srgbClr val="0B9DE0"/>
+                </a:solidFill>
+                <a:latin typeface="Courier New" pitchFamily="34" charset="0"/>
+                <a:ea typeface="Courier New" pitchFamily="34" charset="-122"/>
+                <a:cs typeface="Courier New" pitchFamily="34" charset="-120"/>
+              </a:rPr>
+              <a:t>SELECT</a:t>
+            </a:r>
+            <a:pPr indent="0" marL="0">
+              <a:lnSpc>
+                <a:spcPct val="100000"/>
+              </a:lnSpc>
+              <a:buNone/>
+            </a:pPr>
+            <a:r>
+              <a:rPr lang="en-US" sz="1000" dirty="0">
+                <a:solidFill>
+                  <a:srgbClr val="CFE9FE"/>
+                </a:solidFill>
+                <a:latin typeface="Courier New" pitchFamily="34" charset="0"/>
+                <a:ea typeface="Courier New" pitchFamily="34" charset="-122"/>
+                <a:cs typeface="Courier New" pitchFamily="34" charset="-120"/>
+              </a:rPr>
+              <a:t> OpportunityId, StageName, CreatedDate,</a:t>
+            </a:r>
+            <a:endParaRPr lang="en-US" sz="1000" dirty="0"/>
+          </a:p>
+          <a:p>
+            <a:pPr indent="0" marL="0">
+              <a:lnSpc>
+                <a:spcPct val="100000"/>
+              </a:lnSpc>
+              <a:buNone/>
+            </a:pPr>
+            <a:r>
+              <a:rPr lang="en-US" sz="1000" dirty="0">
+                <a:solidFill>
+                  <a:srgbClr val="CFE9FE"/>
+                </a:solidFill>
+                <a:latin typeface="Courier New" pitchFamily="34" charset="0"/>
+                <a:ea typeface="Courier New" pitchFamily="34" charset="-122"/>
+                <a:cs typeface="Courier New" pitchFamily="34" charset="-120"/>
+              </a:rPr>
+              <a:t>           CreatedById, CreatedBy.Name</a:t>
+            </a:r>
+            <a:endParaRPr lang="en-US" sz="1000" dirty="0"/>
+          </a:p>
+          <a:p>
+            <a:pPr indent="0" marL="0">
+              <a:lnSpc>
+                <a:spcPct val="100000"/>
+              </a:lnSpc>
+              <a:buNone/>
+            </a:pPr>
+            <a:r>
+              <a:rPr lang="en-US" sz="1000" dirty="0">
+                <a:solidFill>
+                  <a:srgbClr val="CFE9FE"/>
+                </a:solidFill>
+                <a:latin typeface="Courier New" pitchFamily="34" charset="0"/>
+                <a:ea typeface="Courier New" pitchFamily="34" charset="-122"/>
+                <a:cs typeface="Courier New" pitchFamily="34" charset="-120"/>
+              </a:rPr>
+              <a:t>    </a:t>
+            </a:r>
+            <a:pPr indent="0" marL="0">
+              <a:lnSpc>
+                <a:spcPct val="100000"/>
+              </a:lnSpc>
+              <a:buNone/>
+            </a:pPr>
+            <a:r>
+              <a:rPr lang="en-US" sz="1000" b="1" dirty="0">
+                <a:solidFill>
+                  <a:srgbClr val="0B9DE0"/>
+                </a:solidFill>
+                <a:latin typeface="Courier New" pitchFamily="34" charset="0"/>
+                <a:ea typeface="Courier New" pitchFamily="34" charset="-122"/>
+                <a:cs typeface="Courier New" pitchFamily="34" charset="-120"/>
+              </a:rPr>
+              <a:t>FROM</a:t>
+            </a:r>
+            <a:pPr indent="0" marL="0">
+              <a:lnSpc>
+                <a:spcPct val="100000"/>
+              </a:lnSpc>
+              <a:buNone/>
+            </a:pPr>
+            <a:r>
+              <a:rPr lang="en-US" sz="1000" dirty="0">
+                <a:solidFill>
+                  <a:srgbClr val="CFE9FE"/>
+                </a:solidFill>
+                <a:latin typeface="Courier New" pitchFamily="34" charset="0"/>
+                <a:ea typeface="Courier New" pitchFamily="34" charset="-122"/>
+                <a:cs typeface="Courier New" pitchFamily="34" charset="-120"/>
+              </a:rPr>
+              <a:t> OpportunityHistory</a:t>
+            </a:r>
+            <a:endParaRPr lang="en-US" sz="1000" dirty="0"/>
+          </a:p>
+          <a:p>
+            <a:pPr indent="0" marL="0">
+              <a:lnSpc>
+                <a:spcPct val="100000"/>
+              </a:lnSpc>
+              <a:buNone/>
+            </a:pPr>
+            <a:r>
+              <a:rPr lang="en-US" sz="1000" dirty="0">
+                <a:solidFill>
+                  <a:srgbClr val="CFE9FE"/>
+                </a:solidFill>
+                <a:latin typeface="Courier New" pitchFamily="34" charset="0"/>
+                <a:ea typeface="Courier New" pitchFamily="34" charset="-122"/>
+                <a:cs typeface="Courier New" pitchFamily="34" charset="-120"/>
+              </a:rPr>
+              <a:t>    </a:t>
+            </a:r>
+            <a:pPr indent="0" marL="0">
+              <a:lnSpc>
+                <a:spcPct val="100000"/>
+              </a:lnSpc>
+              <a:buNone/>
+            </a:pPr>
+            <a:r>
+              <a:rPr lang="en-US" sz="1000" b="1" dirty="0">
+                <a:solidFill>
+                  <a:srgbClr val="0B9DE0"/>
+                </a:solidFill>
+                <a:latin typeface="Courier New" pitchFamily="34" charset="0"/>
+                <a:ea typeface="Courier New" pitchFamily="34" charset="-122"/>
+                <a:cs typeface="Courier New" pitchFamily="34" charset="-120"/>
+              </a:rPr>
+              <a:t>ORDER BY</a:t>
+            </a:r>
+            <a:pPr indent="0" marL="0">
+              <a:lnSpc>
+                <a:spcPct val="100000"/>
+              </a:lnSpc>
+              <a:buNone/>
+            </a:pPr>
+            <a:r>
+              <a:rPr lang="en-US" sz="1000" dirty="0">
+                <a:solidFill>
+                  <a:srgbClr val="CFE9FE"/>
+                </a:solidFill>
+                <a:latin typeface="Courier New" pitchFamily="34" charset="0"/>
+                <a:ea typeface="Courier New" pitchFamily="34" charset="-122"/>
+                <a:cs typeface="Courier New" pitchFamily="34" charset="-120"/>
+              </a:rPr>
+              <a:t> OpportunityId, CreatedDate""",</a:t>
+            </a:r>
+            <a:endParaRPr lang="en-US" sz="1000" dirty="0"/>
+          </a:p>
+          <a:p>
+            <a:pPr indent="0" marL="0">
+              <a:lnSpc>
+                <a:spcPct val="100000"/>
+              </a:lnSpc>
+              <a:buNone/>
+            </a:pPr>
+            <a:r>
+              <a:rPr lang="en-US" sz="1000" dirty="0">
+                <a:solidFill>
+                  <a:srgbClr val="CFE9FE"/>
+                </a:solidFill>
+                <a:latin typeface="Courier New" pitchFamily="34" charset="0"/>
+                <a:ea typeface="Courier New" pitchFamily="34" charset="-122"/>
+                <a:cs typeface="Courier New" pitchFamily="34" charset="-120"/>
+              </a:rPr>
+              <a:t>    </a:t>
+            </a:r>
+            <a:pPr indent="0" marL="0">
+              <a:lnSpc>
+                <a:spcPct val="100000"/>
+              </a:lnSpc>
+              <a:buNone/>
+            </a:pPr>
+            <a:r>
+              <a:rPr lang="en-US" sz="1000" dirty="0">
+                <a:solidFill>
+                  <a:srgbClr val="FE9339"/>
+                </a:solidFill>
+                <a:latin typeface="Courier New" pitchFamily="34" charset="0"/>
+                <a:ea typeface="Courier New" pitchFamily="34" charset="-122"/>
+                <a:cs typeface="Courier New" pitchFamily="34" charset="-120"/>
+              </a:rPr>
+              <a:t>"tasks"</a:t>
+            </a:r>
+            <a:pPr indent="0" marL="0">
+              <a:lnSpc>
+                <a:spcPct val="100000"/>
+              </a:lnSpc>
+              <a:buNone/>
+            </a:pPr>
+            <a:r>
+              <a:rPr lang="en-US" sz="1000" dirty="0">
+                <a:solidFill>
+                  <a:srgbClr val="CFE9FE"/>
+                </a:solidFill>
+                <a:latin typeface="Courier New" pitchFamily="34" charset="0"/>
+                <a:ea typeface="Courier New" pitchFamily="34" charset="-122"/>
+                <a:cs typeface="Courier New" pitchFamily="34" charset="-120"/>
+              </a:rPr>
+              <a:t>: """</a:t>
+            </a:r>
+            <a:endParaRPr lang="en-US" sz="1000" dirty="0"/>
+          </a:p>
+          <a:p>
+            <a:pPr indent="0" marL="0">
+              <a:lnSpc>
+                <a:spcPct val="100000"/>
+              </a:lnSpc>
+              <a:buNone/>
+            </a:pPr>
+            <a:r>
+              <a:rPr lang="en-US" sz="1000" dirty="0">
+                <a:solidFill>
+                  <a:srgbClr val="CFE9FE"/>
+                </a:solidFill>
+                <a:latin typeface="Courier New" pitchFamily="34" charset="0"/>
+                <a:ea typeface="Courier New" pitchFamily="34" charset="-122"/>
+                <a:cs typeface="Courier New" pitchFamily="34" charset="-120"/>
+              </a:rPr>
+              <a:t>    </a:t>
+            </a:r>
+            <a:pPr indent="0" marL="0">
+              <a:lnSpc>
+                <a:spcPct val="100000"/>
+              </a:lnSpc>
+              <a:buNone/>
+            </a:pPr>
+            <a:r>
+              <a:rPr lang="en-US" sz="1000" b="1" dirty="0">
+                <a:solidFill>
+                  <a:srgbClr val="0B9DE0"/>
+                </a:solidFill>
+                <a:latin typeface="Courier New" pitchFamily="34" charset="0"/>
+                <a:ea typeface="Courier New" pitchFamily="34" charset="-122"/>
+                <a:cs typeface="Courier New" pitchFamily="34" charset="-120"/>
+              </a:rPr>
+              <a:t>SELECT</a:t>
+            </a:r>
+            <a:pPr indent="0" marL="0">
+              <a:lnSpc>
+                <a:spcPct val="100000"/>
+              </a:lnSpc>
+              <a:buNone/>
+            </a:pPr>
+            <a:r>
+              <a:rPr lang="en-US" sz="1000" dirty="0">
+                <a:solidFill>
+                  <a:srgbClr val="CFE9FE"/>
+                </a:solidFill>
+                <a:latin typeface="Courier New" pitchFamily="34" charset="0"/>
+                <a:ea typeface="Courier New" pitchFamily="34" charset="-122"/>
+                <a:cs typeface="Courier New" pitchFamily="34" charset="-120"/>
+              </a:rPr>
+              <a:t> WhatId, Subject, CreatedDate, CompletedDateTime,</a:t>
+            </a:r>
+            <a:endParaRPr lang="en-US" sz="1000" dirty="0"/>
+          </a:p>
+          <a:p>
+            <a:pPr indent="0" marL="0">
+              <a:lnSpc>
+                <a:spcPct val="100000"/>
+              </a:lnSpc>
+              <a:buNone/>
+            </a:pPr>
+            <a:r>
+              <a:rPr lang="en-US" sz="1000" dirty="0">
+                <a:solidFill>
+                  <a:srgbClr val="CFE9FE"/>
+                </a:solidFill>
+                <a:latin typeface="Courier New" pitchFamily="34" charset="0"/>
+                <a:ea typeface="Courier New" pitchFamily="34" charset="-122"/>
+                <a:cs typeface="Courier New" pitchFamily="34" charset="-120"/>
+              </a:rPr>
+              <a:t>           OwnerId, Owner.Name, Status</a:t>
+            </a:r>
+            <a:endParaRPr lang="en-US" sz="1000" dirty="0"/>
+          </a:p>
+          <a:p>
+            <a:pPr indent="0" marL="0">
+              <a:lnSpc>
+                <a:spcPct val="100000"/>
+              </a:lnSpc>
+              <a:buNone/>
+            </a:pPr>
+            <a:r>
+              <a:rPr lang="en-US" sz="1000" dirty="0">
+                <a:solidFill>
+                  <a:srgbClr val="CFE9FE"/>
+                </a:solidFill>
+                <a:latin typeface="Courier New" pitchFamily="34" charset="0"/>
+                <a:ea typeface="Courier New" pitchFamily="34" charset="-122"/>
+                <a:cs typeface="Courier New" pitchFamily="34" charset="-120"/>
+              </a:rPr>
+              <a:t>    </a:t>
+            </a:r>
+            <a:pPr indent="0" marL="0">
+              <a:lnSpc>
+                <a:spcPct val="100000"/>
+              </a:lnSpc>
+              <a:buNone/>
+            </a:pPr>
+            <a:r>
+              <a:rPr lang="en-US" sz="1000" b="1" dirty="0">
+                <a:solidFill>
+                  <a:srgbClr val="0B9DE0"/>
+                </a:solidFill>
+                <a:latin typeface="Courier New" pitchFamily="34" charset="0"/>
+                <a:ea typeface="Courier New" pitchFamily="34" charset="-122"/>
+                <a:cs typeface="Courier New" pitchFamily="34" charset="-120"/>
+              </a:rPr>
+              <a:t>FROM</a:t>
+            </a:r>
+            <a:pPr indent="0" marL="0">
+              <a:lnSpc>
+                <a:spcPct val="100000"/>
+              </a:lnSpc>
+              <a:buNone/>
+            </a:pPr>
+            <a:r>
+              <a:rPr lang="en-US" sz="1000" dirty="0">
+                <a:solidFill>
+                  <a:srgbClr val="CFE9FE"/>
+                </a:solidFill>
+                <a:latin typeface="Courier New" pitchFamily="34" charset="0"/>
+                <a:ea typeface="Courier New" pitchFamily="34" charset="-122"/>
+                <a:cs typeface="Courier New" pitchFamily="34" charset="-120"/>
+              </a:rPr>
+              <a:t> Task</a:t>
+            </a:r>
+            <a:endParaRPr lang="en-US" sz="1000" dirty="0"/>
+          </a:p>
+          <a:p>
+            <a:pPr indent="0" marL="0">
+              <a:lnSpc>
+                <a:spcPct val="100000"/>
+              </a:lnSpc>
+              <a:buNone/>
+            </a:pPr>
+            <a:r>
+              <a:rPr lang="en-US" sz="1000" dirty="0">
+                <a:solidFill>
+                  <a:srgbClr val="CFE9FE"/>
+                </a:solidFill>
+                <a:latin typeface="Courier New" pitchFamily="34" charset="0"/>
+                <a:ea typeface="Courier New" pitchFamily="34" charset="-122"/>
+                <a:cs typeface="Courier New" pitchFamily="34" charset="-120"/>
+              </a:rPr>
+              <a:t>    </a:t>
+            </a:r>
+            <a:pPr indent="0" marL="0">
+              <a:lnSpc>
+                <a:spcPct val="100000"/>
+              </a:lnSpc>
+              <a:buNone/>
+            </a:pPr>
+            <a:r>
+              <a:rPr lang="en-US" sz="1000" b="1" dirty="0">
+                <a:solidFill>
+                  <a:srgbClr val="0B9DE0"/>
+                </a:solidFill>
+                <a:latin typeface="Courier New" pitchFamily="34" charset="0"/>
+                <a:ea typeface="Courier New" pitchFamily="34" charset="-122"/>
+                <a:cs typeface="Courier New" pitchFamily="34" charset="-120"/>
+              </a:rPr>
+              <a:t>WHERE</a:t>
+            </a:r>
+            <a:pPr indent="0" marL="0">
+              <a:lnSpc>
+                <a:spcPct val="100000"/>
+              </a:lnSpc>
+              <a:buNone/>
+            </a:pPr>
+            <a:r>
+              <a:rPr lang="en-US" sz="1000" dirty="0">
+                <a:solidFill>
+                  <a:srgbClr val="CFE9FE"/>
+                </a:solidFill>
+                <a:latin typeface="Courier New" pitchFamily="34" charset="0"/>
+                <a:ea typeface="Courier New" pitchFamily="34" charset="-122"/>
+                <a:cs typeface="Courier New" pitchFamily="34" charset="-120"/>
+              </a:rPr>
+              <a:t> What.Type = </a:t>
+            </a:r>
+            <a:pPr indent="0" marL="0">
+              <a:lnSpc>
+                <a:spcPct val="100000"/>
+              </a:lnSpc>
+              <a:buNone/>
+            </a:pPr>
+            <a:r>
+              <a:rPr lang="en-US" sz="1000" dirty="0">
+                <a:solidFill>
+                  <a:srgbClr val="FE9339"/>
+                </a:solidFill>
+                <a:latin typeface="Courier New" pitchFamily="34" charset="0"/>
+                <a:ea typeface="Courier New" pitchFamily="34" charset="-122"/>
+                <a:cs typeface="Courier New" pitchFamily="34" charset="-120"/>
+              </a:rPr>
+              <a:t>'Opportunity'</a:t>
+            </a:r>
+            <a:pPr indent="0" marL="0">
+              <a:lnSpc>
+                <a:spcPct val="100000"/>
+              </a:lnSpc>
+              <a:buNone/>
+            </a:pPr>
+            <a:r>
+              <a:rPr lang="en-US" sz="1000" dirty="0">
+                <a:solidFill>
+                  <a:srgbClr val="FE9339"/>
+                </a:solidFill>
+                <a:latin typeface="Courier New" pitchFamily="34" charset="0"/>
+                <a:ea typeface="Courier New" pitchFamily="34" charset="-122"/>
+                <a:cs typeface="Courier New" pitchFamily="34" charset="-120"/>
+              </a:rPr>
+              <a:t>""",</a:t>
+            </a:r>
+            <a:endParaRPr lang="en-US" sz="1000" dirty="0"/>
+          </a:p>
+          <a:p>
+            <a:pPr indent="0" marL="0">
+              <a:lnSpc>
+                <a:spcPct val="100000"/>
+              </a:lnSpc>
+              <a:buNone/>
+            </a:pPr>
+            <a:r>
+              <a:rPr lang="en-US" sz="1000" dirty="0">
+                <a:solidFill>
+                  <a:srgbClr val="CFE9FE"/>
+                </a:solidFill>
+                <a:latin typeface="Courier New" pitchFamily="34" charset="0"/>
+                <a:ea typeface="Courier New" pitchFamily="34" charset="-122"/>
+                <a:cs typeface="Courier New" pitchFamily="34" charset="-120"/>
+              </a:rPr>
+              <a:t>    </a:t>
+            </a:r>
+            <a:pPr indent="0" marL="0">
+              <a:lnSpc>
+                <a:spcPct val="100000"/>
+              </a:lnSpc>
+              <a:buNone/>
+            </a:pPr>
+            <a:r>
+              <a:rPr lang="en-US" sz="1000" dirty="0">
+                <a:solidFill>
+                  <a:srgbClr val="FE9339"/>
+                </a:solidFill>
+                <a:latin typeface="Courier New" pitchFamily="34" charset="0"/>
+                <a:ea typeface="Courier New" pitchFamily="34" charset="-122"/>
+                <a:cs typeface="Courier New" pitchFamily="34" charset="-120"/>
+              </a:rPr>
+              <a:t>"leads"</a:t>
+            </a:r>
+            <a:pPr indent="0" marL="0">
+              <a:lnSpc>
+                <a:spcPct val="100000"/>
+              </a:lnSpc>
+              <a:buNone/>
+            </a:pPr>
+            <a:r>
+              <a:rPr lang="en-US" sz="1000" dirty="0">
+                <a:solidFill>
+                  <a:srgbClr val="CFE9FE"/>
+                </a:solidFill>
+                <a:latin typeface="Courier New" pitchFamily="34" charset="0"/>
+                <a:ea typeface="Courier New" pitchFamily="34" charset="-122"/>
+                <a:cs typeface="Courier New" pitchFamily="34" charset="-120"/>
+              </a:rPr>
+              <a:t>: """</a:t>
+            </a:r>
+            <a:endParaRPr lang="en-US" sz="1000" dirty="0"/>
+          </a:p>
+          <a:p>
+            <a:pPr indent="0" marL="0">
+              <a:lnSpc>
+                <a:spcPct val="100000"/>
+              </a:lnSpc>
+              <a:buNone/>
+            </a:pPr>
+            <a:r>
+              <a:rPr lang="en-US" sz="1000" dirty="0">
+                <a:solidFill>
+                  <a:srgbClr val="CFE9FE"/>
+                </a:solidFill>
+                <a:latin typeface="Courier New" pitchFamily="34" charset="0"/>
+                <a:ea typeface="Courier New" pitchFamily="34" charset="-122"/>
+                <a:cs typeface="Courier New" pitchFamily="34" charset="-120"/>
+              </a:rPr>
+              <a:t>    </a:t>
+            </a:r>
+            <a:pPr indent="0" marL="0">
+              <a:lnSpc>
+                <a:spcPct val="100000"/>
+              </a:lnSpc>
+              <a:buNone/>
+            </a:pPr>
+            <a:r>
+              <a:rPr lang="en-US" sz="1000" b="1" dirty="0">
+                <a:solidFill>
+                  <a:srgbClr val="0B9DE0"/>
+                </a:solidFill>
+                <a:latin typeface="Courier New" pitchFamily="34" charset="0"/>
+                <a:ea typeface="Courier New" pitchFamily="34" charset="-122"/>
+                <a:cs typeface="Courier New" pitchFamily="34" charset="-120"/>
+              </a:rPr>
+              <a:t>SELECT</a:t>
+            </a:r>
+            <a:pPr indent="0" marL="0">
+              <a:lnSpc>
+                <a:spcPct val="100000"/>
+              </a:lnSpc>
+              <a:buNone/>
+            </a:pPr>
+            <a:r>
+              <a:rPr lang="en-US" sz="1000" dirty="0">
+                <a:solidFill>
+                  <a:srgbClr val="CFE9FE"/>
+                </a:solidFill>
+                <a:latin typeface="Courier New" pitchFamily="34" charset="0"/>
+                <a:ea typeface="Courier New" pitchFamily="34" charset="-122"/>
+                <a:cs typeface="Courier New" pitchFamily="34" charset="-120"/>
+              </a:rPr>
+              <a:t> Id, CreatedDate, ConvertedDate, ConvertedOpportunityId,</a:t>
+            </a:r>
+            <a:endParaRPr lang="en-US" sz="1000" dirty="0"/>
+          </a:p>
+          <a:p>
+            <a:pPr indent="0" marL="0">
+              <a:lnSpc>
+                <a:spcPct val="100000"/>
+              </a:lnSpc>
+              <a:buNone/>
+            </a:pPr>
+            <a:r>
+              <a:rPr lang="en-US" sz="1000" dirty="0">
+                <a:solidFill>
+                  <a:srgbClr val="CFE9FE"/>
+                </a:solidFill>
+                <a:latin typeface="Courier New" pitchFamily="34" charset="0"/>
+                <a:ea typeface="Courier New" pitchFamily="34" charset="-122"/>
+                <a:cs typeface="Courier New" pitchFamily="34" charset="-120"/>
+              </a:rPr>
+              <a:t>           OwnerId, Owner.Name</a:t>
+            </a:r>
+            <a:endParaRPr lang="en-US" sz="1000" dirty="0"/>
+          </a:p>
+          <a:p>
+            <a:pPr indent="0" marL="0">
+              <a:lnSpc>
+                <a:spcPct val="100000"/>
+              </a:lnSpc>
+              <a:buNone/>
+            </a:pPr>
+            <a:r>
+              <a:rPr lang="en-US" sz="1000" dirty="0">
+                <a:solidFill>
+                  <a:srgbClr val="CFE9FE"/>
+                </a:solidFill>
+                <a:latin typeface="Courier New" pitchFamily="34" charset="0"/>
+                <a:ea typeface="Courier New" pitchFamily="34" charset="-122"/>
+                <a:cs typeface="Courier New" pitchFamily="34" charset="-120"/>
+              </a:rPr>
+              <a:t>    </a:t>
+            </a:r>
+            <a:pPr indent="0" marL="0">
+              <a:lnSpc>
+                <a:spcPct val="100000"/>
+              </a:lnSpc>
+              <a:buNone/>
+            </a:pPr>
+            <a:r>
+              <a:rPr lang="en-US" sz="1000" b="1" dirty="0">
+                <a:solidFill>
+                  <a:srgbClr val="0B9DE0"/>
+                </a:solidFill>
+                <a:latin typeface="Courier New" pitchFamily="34" charset="0"/>
+                <a:ea typeface="Courier New" pitchFamily="34" charset="-122"/>
+                <a:cs typeface="Courier New" pitchFamily="34" charset="-120"/>
+              </a:rPr>
+              <a:t>FROM</a:t>
+            </a:r>
+            <a:pPr indent="0" marL="0">
+              <a:lnSpc>
+                <a:spcPct val="100000"/>
+              </a:lnSpc>
+              <a:buNone/>
+            </a:pPr>
+            <a:r>
+              <a:rPr lang="en-US" sz="1000" dirty="0">
+                <a:solidFill>
+                  <a:srgbClr val="CFE9FE"/>
+                </a:solidFill>
+                <a:latin typeface="Courier New" pitchFamily="34" charset="0"/>
+                <a:ea typeface="Courier New" pitchFamily="34" charset="-122"/>
+                <a:cs typeface="Courier New" pitchFamily="34" charset="-120"/>
+              </a:rPr>
+              <a:t> Lead</a:t>
+            </a:r>
+            <a:endParaRPr lang="en-US" sz="1000" dirty="0"/>
+          </a:p>
+          <a:p>
+            <a:pPr indent="0" marL="0">
+              <a:lnSpc>
+                <a:spcPct val="100000"/>
+              </a:lnSpc>
+              <a:buNone/>
+            </a:pPr>
+            <a:r>
+              <a:rPr lang="en-US" sz="1000" dirty="0">
+                <a:solidFill>
+                  <a:srgbClr val="CFE9FE"/>
+                </a:solidFill>
+                <a:latin typeface="Courier New" pitchFamily="34" charset="0"/>
+                <a:ea typeface="Courier New" pitchFamily="34" charset="-122"/>
+                <a:cs typeface="Courier New" pitchFamily="34" charset="-120"/>
+              </a:rPr>
+              <a:t>    </a:t>
+            </a:r>
+            <a:pPr indent="0" marL="0">
+              <a:lnSpc>
+                <a:spcPct val="100000"/>
+              </a:lnSpc>
+              <a:buNone/>
+            </a:pPr>
+            <a:r>
+              <a:rPr lang="en-US" sz="1000" b="1" dirty="0">
+                <a:solidFill>
+                  <a:srgbClr val="0B9DE0"/>
+                </a:solidFill>
+                <a:latin typeface="Courier New" pitchFamily="34" charset="0"/>
+                <a:ea typeface="Courier New" pitchFamily="34" charset="-122"/>
+                <a:cs typeface="Courier New" pitchFamily="34" charset="-120"/>
+              </a:rPr>
+              <a:t>WHERE</a:t>
+            </a:r>
+            <a:pPr indent="0" marL="0">
+              <a:lnSpc>
+                <a:spcPct val="100000"/>
+              </a:lnSpc>
+              <a:buNone/>
+            </a:pPr>
+            <a:r>
+              <a:rPr lang="en-US" sz="1000" dirty="0">
+                <a:solidFill>
+                  <a:srgbClr val="CFE9FE"/>
+                </a:solidFill>
+                <a:latin typeface="Courier New" pitchFamily="34" charset="0"/>
+                <a:ea typeface="Courier New" pitchFamily="34" charset="-122"/>
+                <a:cs typeface="Courier New" pitchFamily="34" charset="-120"/>
+              </a:rPr>
+              <a:t> IsConverted = true</a:t>
+            </a:r>
+            <a:endParaRPr lang="en-US" sz="1000" dirty="0"/>
+          </a:p>
+          <a:p>
+            <a:pPr indent="0" marL="0">
+              <a:lnSpc>
+                <a:spcPct val="100000"/>
+              </a:lnSpc>
+              <a:buNone/>
+            </a:pPr>
+            <a:r>
+              <a:rPr lang="en-US" sz="1000" dirty="0">
+                <a:solidFill>
+                  <a:srgbClr val="CFE9FE"/>
+                </a:solidFill>
+                <a:latin typeface="Courier New" pitchFamily="34" charset="0"/>
+                <a:ea typeface="Courier New" pitchFamily="34" charset="-122"/>
+                <a:cs typeface="Courier New" pitchFamily="34" charset="-120"/>
+              </a:rPr>
+              <a:t>      </a:t>
+            </a:r>
+            <a:pPr indent="0" marL="0">
+              <a:lnSpc>
+                <a:spcPct val="100000"/>
+              </a:lnSpc>
+              <a:buNone/>
+            </a:pPr>
+            <a:r>
+              <a:rPr lang="en-US" sz="1000" b="1" dirty="0">
+                <a:solidFill>
+                  <a:srgbClr val="0B9DE0"/>
+                </a:solidFill>
+                <a:latin typeface="Courier New" pitchFamily="34" charset="0"/>
+                <a:ea typeface="Courier New" pitchFamily="34" charset="-122"/>
+                <a:cs typeface="Courier New" pitchFamily="34" charset="-120"/>
+              </a:rPr>
+              <a:t>AND</a:t>
+            </a:r>
+            <a:pPr indent="0" marL="0">
+              <a:lnSpc>
+                <a:spcPct val="100000"/>
+              </a:lnSpc>
+              <a:buNone/>
+            </a:pPr>
+            <a:r>
+              <a:rPr lang="en-US" sz="1000" dirty="0">
+                <a:solidFill>
+                  <a:srgbClr val="CFE9FE"/>
+                </a:solidFill>
+                <a:latin typeface="Courier New" pitchFamily="34" charset="0"/>
+                <a:ea typeface="Courier New" pitchFamily="34" charset="-122"/>
+                <a:cs typeface="Courier New" pitchFamily="34" charset="-120"/>
+              </a:rPr>
+              <a:t> ConvertedOpportunityId != null""",</a:t>
+            </a:r>
+            <a:endParaRPr lang="en-US" sz="1000" dirty="0"/>
+          </a:p>
+          <a:p>
+            <a:pPr indent="0" marL="0">
+              <a:lnSpc>
+                <a:spcPct val="100000"/>
+              </a:lnSpc>
+              <a:buNone/>
+            </a:pPr>
+            <a:r>
+              <a:rPr lang="en-US" sz="1000" dirty="0">
+                <a:solidFill>
+                  <a:srgbClr val="CFE9FE"/>
+                </a:solidFill>
+                <a:latin typeface="Courier New" pitchFamily="34" charset="0"/>
+                <a:ea typeface="Courier New" pitchFamily="34" charset="-122"/>
+                <a:cs typeface="Courier New" pitchFamily="34" charset="-120"/>
+              </a:rPr>
+              <a:t>}</a:t>
+            </a:r>
+            <a:endParaRPr lang="en-US" sz="1000" dirty="0"/>
+          </a:p>
+        </p:txBody>
+      </p:sp>
+      <p:sp>
+        <p:nvSpPr>
+          <p:cNvPr id="12" name="Code caption"/>
+          <p:cNvSpPr txBox="1"/>
+          <p:nvPr/>
+        </p:nvSpPr>
+        <p:spPr>
+          <a:xfrm>
+            <a:off x="5897880" y="5669280"/>
+            <a:ext cx="5715000" cy="685800"/>
+          </a:xfrm>
+          <a:prstGeom prst="rect">
+            <a:avLst/>
+          </a:prstGeom>
+          <a:noFill/>
+          <a:ln/>
+        </p:spPr>
+        <p:txBody>
+          <a:bodyPr wrap="square" lIns="0" tIns="0" rIns="0" bIns="0" rtlCol="0" anchor="t"/>
+          <a:lstStyle/>
+          <a:p>
+            <a:pPr indent="0" marL="0">
+              <a:buNone/>
+            </a:pPr>
+            <a:r>
+              <a:rPr lang="en-US" sz="1400" b="1" dirty="0">
                 <a:solidFill>
                   <a:schemeClr val="tx2"/>
                 </a:solidFill>
               </a:rPr>
-              <a:t>Seed</a:t>
-            </a:r>
-            <a:endParaRPr lang="en-US" sz="1600" dirty="0"/>
-          </a:p>
-        </p:txBody>
-      </p:sp>
-      <p:sp>
-        <p:nvSpPr>
-          <p:cNvPr id="16" name="Key step 2 body"/>
-          <p:cNvSpPr txBox="1"/>
-          <p:nvPr/>
-        </p:nvSpPr>
-        <p:spPr>
-          <a:xfrm>
-            <a:off x="9418320" y="2377440"/>
-            <a:ext cx="2057400" cy="1143000"/>
-          </a:xfrm>
-          <a:prstGeom prst="rect">
-            <a:avLst/>
-          </a:prstGeom>
-          <a:noFill/>
-          <a:ln/>
-        </p:spPr>
-        <p:txBody>
-          <a:bodyPr wrap="square" lIns="0" tIns="0" rIns="0" bIns="0" rtlCol="0" anchor="t"/>
-          <a:lstStyle/>
-          <a:p>
+              <a:t>extract.py: </a:t>
+            </a:r>
             <a:pPr indent="0" marL="0">
               <a:buNone/>
             </a:pPr>
             <a:r>
               <a:rPr lang="en-US" sz="1400" dirty="0">
                 <a:solidFill>
-                  <a:schemeClr val="tx1"/>
-                </a:solidFill>
-              </a:rPr>
-              <a:t>seed.py loads 40 [Demo] deals and walks them through the org's own stages.</a:t>
-            </a:r>
-            <a:endParaRPr lang="en-US" sz="1400" dirty="0"/>
-          </a:p>
-        </p:txBody>
-      </p:sp>
-      <p:sp>
-        <p:nvSpPr>
-          <p:cNvPr id="17" name="Key step 3 card"/>
-          <p:cNvSpPr/>
-          <p:nvPr/>
-        </p:nvSpPr>
-        <p:spPr>
-          <a:xfrm>
-            <a:off x="548640" y="3794760"/>
-            <a:ext cx="5440680" cy="2331720"/>
-          </a:xfrm>
-          <a:prstGeom prst="roundRect">
-            <a:avLst>
-              <a:gd name="adj" fmla="val 4706"/>
-            </a:avLst>
-          </a:prstGeom>
-          <a:solidFill>
-            <a:schemeClr val="bg2"/>
-          </a:solidFill>
-          <a:ln/>
-        </p:spPr>
-      </p:sp>
-      <p:sp>
-        <p:nvSpPr>
-          <p:cNvPr id="18" name="Key step 3 frame"/>
-          <p:cNvSpPr/>
-          <p:nvPr/>
-        </p:nvSpPr>
-        <p:spPr>
-          <a:xfrm>
-            <a:off x="658368" y="4152319"/>
-            <a:ext cx="2980944" cy="1616601"/>
-          </a:xfrm>
-          <a:prstGeom prst="rect">
-            <a:avLst/>
-          </a:prstGeom>
-          <a:solidFill>
-            <a:schemeClr val="bg1"/>
-          </a:solidFill>
-          <a:ln w="12700">
-            <a:solidFill>
-              <a:schemeClr val="accent3"/>
-            </a:solidFill>
-            <a:prstDash val="solid"/>
-          </a:ln>
-        </p:spPr>
-      </p:sp>
-      <p:pic>
-        <p:nvPicPr>
-          <p:cNvPr id="19" name="Key step 3 image" descr="OpportunityHistory and Task become events, one case per Opportunity. Shown: a re-quote loop.">    </p:cNvPr>
-          <p:cNvPicPr>
-            <a:picLocks noChangeAspect="1"/>
-          </p:cNvPicPr>
-          <p:nvPr/>
-        </p:nvPicPr>
-        <p:blipFill>
-          <a:blip r:embed="rId3"/>
-          <a:stretch>
-            <a:fillRect/>
-          </a:stretch>
-        </p:blipFill>
-        <p:spPr>
-          <a:xfrm>
-            <a:off x="685800" y="4179751"/>
-            <a:ext cx="2926080" cy="1561737"/>
-          </a:xfrm>
-          <a:prstGeom prst="rect">
-            <a:avLst/>
-          </a:prstGeom>
-        </p:spPr>
-      </p:pic>
-      <p:sp>
-        <p:nvSpPr>
-          <p:cNvPr id="20" name="Key step 3 marker"/>
-          <p:cNvSpPr/>
-          <p:nvPr/>
-        </p:nvSpPr>
-        <p:spPr>
-          <a:xfrm>
-            <a:off x="3794760" y="4023360"/>
-            <a:ext cx="411480" cy="411480"/>
-          </a:xfrm>
-          <a:prstGeom prst="ellipse">
-            <a:avLst/>
-          </a:prstGeom>
-          <a:solidFill>
-            <a:schemeClr val="accent1"/>
-          </a:solidFill>
-          <a:ln/>
-        </p:spPr>
-      </p:sp>
-      <p:sp>
-        <p:nvSpPr>
-          <p:cNvPr id="21" name="Key step 3 number"/>
-          <p:cNvSpPr txBox="1"/>
-          <p:nvPr/>
-        </p:nvSpPr>
-        <p:spPr>
-          <a:xfrm>
-            <a:off x="3794760" y="4023360"/>
-            <a:ext cx="411480" cy="411480"/>
-          </a:xfrm>
-          <a:prstGeom prst="rect">
-            <a:avLst/>
-          </a:prstGeom>
-          <a:noFill/>
-          <a:ln/>
-        </p:spPr>
-        <p:txBody>
-          <a:bodyPr wrap="square" lIns="0" tIns="0" rIns="0" bIns="0" rtlCol="0" anchor="ctr"/>
-          <a:lstStyle/>
-          <a:p>
-            <a:pPr algn="ctr" indent="0" marL="0">
-              <a:buNone/>
-            </a:pPr>
-            <a:r>
-              <a:rPr lang="en-US" sz="1600" b="1" dirty="0">
-                <a:solidFill>
-                  <a:schemeClr val="bg1"/>
-                </a:solidFill>
-              </a:rPr>
-              <a:t>3</a:t>
-            </a:r>
-            <a:endParaRPr lang="en-US" sz="1600" dirty="0"/>
-          </a:p>
-        </p:txBody>
-      </p:sp>
-      <p:sp>
-        <p:nvSpPr>
-          <p:cNvPr id="22" name="Key step 3 title"/>
-          <p:cNvSpPr txBox="1"/>
-          <p:nvPr/>
-        </p:nvSpPr>
-        <p:spPr>
-          <a:xfrm>
-            <a:off x="3794760" y="4526280"/>
-            <a:ext cx="2057400" cy="365760"/>
-          </a:xfrm>
-          <a:prstGeom prst="rect">
-            <a:avLst/>
-          </a:prstGeom>
-          <a:noFill/>
-          <a:ln/>
-        </p:spPr>
-        <p:txBody>
-          <a:bodyPr wrap="square" lIns="0" tIns="0" rIns="0" bIns="0" rtlCol="0" anchor="t"/>
-          <a:lstStyle/>
-          <a:p>
-            <a:pPr indent="0" marL="0">
-              <a:buNone/>
-            </a:pPr>
-            <a:r>
-              <a:rPr lang="en-US" sz="1600" b="1" dirty="0">
-                <a:solidFill>
                   <a:schemeClr val="tx2"/>
                 </a:solidFill>
               </a:rPr>
-              <a:t>Extract</a:t>
-            </a:r>
-            <a:endParaRPr lang="en-US" sz="1600" dirty="0"/>
-          </a:p>
-        </p:txBody>
-      </p:sp>
-      <p:sp>
-        <p:nvSpPr>
-          <p:cNvPr id="23" name="Key step 3 body"/>
-          <p:cNvSpPr txBox="1"/>
-          <p:nvPr/>
-        </p:nvSpPr>
-        <p:spPr>
-          <a:xfrm>
-            <a:off x="3794760" y="4892040"/>
-            <a:ext cx="2057400" cy="1143000"/>
-          </a:xfrm>
-          <a:prstGeom prst="rect">
-            <a:avLst/>
-          </a:prstGeom>
-          <a:noFill/>
-          <a:ln/>
-        </p:spPr>
-        <p:txBody>
-          <a:bodyPr wrap="square" lIns="0" tIns="0" rIns="0" bIns="0" rtlCol="0" anchor="t"/>
-          <a:lstStyle/>
-          <a:p>
-            <a:pPr indent="0" marL="0">
-              <a:buNone/>
-            </a:pPr>
-            <a:r>
-              <a:rPr lang="en-US" sz="1400" dirty="0">
-                <a:solidFill>
-                  <a:schemeClr val="tx1"/>
-                </a:solidFill>
-              </a:rPr>
-              <a:t>OpportunityHistory and Task become events, one case per Opportunity. Shown: a re-quote loop.</a:t>
-            </a:r>
-            <a:endParaRPr lang="en-US" sz="1400" dirty="0"/>
-          </a:p>
-        </p:txBody>
-      </p:sp>
-      <p:sp>
-        <p:nvSpPr>
-          <p:cNvPr id="24" name="Key step 4 card"/>
-          <p:cNvSpPr/>
-          <p:nvPr/>
-        </p:nvSpPr>
-        <p:spPr>
-          <a:xfrm>
-            <a:off x="6172200" y="3794760"/>
-            <a:ext cx="5440680" cy="2331720"/>
-          </a:xfrm>
-          <a:prstGeom prst="roundRect">
-            <a:avLst>
-              <a:gd name="adj" fmla="val 4706"/>
-            </a:avLst>
-          </a:prstGeom>
-          <a:solidFill>
-            <a:schemeClr val="bg2"/>
-          </a:solidFill>
-          <a:ln/>
-        </p:spPr>
-      </p:sp>
-      <p:sp>
-        <p:nvSpPr>
-          <p:cNvPr id="25" name="Key step 4 frame"/>
-          <p:cNvSpPr/>
-          <p:nvPr/>
-        </p:nvSpPr>
-        <p:spPr>
-          <a:xfrm>
-            <a:off x="6281928" y="3949420"/>
-            <a:ext cx="2980944" cy="2022401"/>
-          </a:xfrm>
-          <a:prstGeom prst="rect">
-            <a:avLst/>
-          </a:prstGeom>
-          <a:solidFill>
-            <a:schemeClr val="bg1"/>
-          </a:solidFill>
-          <a:ln w="12700">
-            <a:solidFill>
-              <a:schemeClr val="accent3"/>
-            </a:solidFill>
-            <a:prstDash val="solid"/>
-          </a:ln>
-        </p:spPr>
-      </p:sp>
-      <p:pic>
-        <p:nvPicPr>
-          <p:cNvPr id="26" name="Key step 4 image" descr="The event log (CSV / XES) feeds the hosted dashboard and value case.">    </p:cNvPr>
-          <p:cNvPicPr>
-            <a:picLocks noChangeAspect="1"/>
-          </p:cNvPicPr>
-          <p:nvPr/>
-        </p:nvPicPr>
-        <p:blipFill>
-          <a:blip r:embed="rId4"/>
-          <a:stretch>
-            <a:fillRect/>
-          </a:stretch>
-        </p:blipFill>
-        <p:spPr>
-          <a:xfrm>
-            <a:off x="6309360" y="3976852"/>
-            <a:ext cx="2926080" cy="1967537"/>
-          </a:xfrm>
-          <a:prstGeom prst="rect">
-            <a:avLst/>
-          </a:prstGeom>
-        </p:spPr>
-      </p:pic>
-      <p:sp>
-        <p:nvSpPr>
-          <p:cNvPr id="27" name="Key step 4 marker"/>
-          <p:cNvSpPr/>
-          <p:nvPr/>
-        </p:nvSpPr>
-        <p:spPr>
-          <a:xfrm>
-            <a:off x="9418320" y="4023360"/>
-            <a:ext cx="411480" cy="411480"/>
-          </a:xfrm>
-          <a:prstGeom prst="ellipse">
-            <a:avLst/>
-          </a:prstGeom>
-          <a:solidFill>
-            <a:schemeClr val="accent1"/>
-          </a:solidFill>
-          <a:ln/>
-        </p:spPr>
-      </p:sp>
-      <p:sp>
-        <p:nvSpPr>
-          <p:cNvPr id="28" name="Key step 4 number"/>
-          <p:cNvSpPr txBox="1"/>
-          <p:nvPr/>
-        </p:nvSpPr>
-        <p:spPr>
-          <a:xfrm>
-            <a:off x="9418320" y="4023360"/>
-            <a:ext cx="411480" cy="411480"/>
-          </a:xfrm>
-          <a:prstGeom prst="rect">
-            <a:avLst/>
-          </a:prstGeom>
-          <a:noFill/>
-          <a:ln/>
-        </p:spPr>
-        <p:txBody>
-          <a:bodyPr wrap="square" lIns="0" tIns="0" rIns="0" bIns="0" rtlCol="0" anchor="ctr"/>
-          <a:lstStyle/>
-          <a:p>
-            <a:pPr algn="ctr" indent="0" marL="0">
-              <a:buNone/>
-            </a:pPr>
-            <a:r>
-              <a:rPr lang="en-US" sz="1600" b="1" dirty="0">
-                <a:solidFill>
-                  <a:schemeClr val="bg1"/>
-                </a:solidFill>
-              </a:rPr>
-              <a:t>4</a:t>
-            </a:r>
-            <a:endParaRPr lang="en-US" sz="1600" dirty="0"/>
-          </a:p>
-        </p:txBody>
-      </p:sp>
-      <p:sp>
-        <p:nvSpPr>
-          <p:cNvPr id="29" name="Key step 4 title"/>
-          <p:cNvSpPr txBox="1"/>
-          <p:nvPr/>
-        </p:nvSpPr>
-        <p:spPr>
-          <a:xfrm>
-            <a:off x="9418320" y="4526280"/>
-            <a:ext cx="2057400" cy="365760"/>
-          </a:xfrm>
-          <a:prstGeom prst="rect">
-            <a:avLst/>
-          </a:prstGeom>
-          <a:noFill/>
-          <a:ln/>
-        </p:spPr>
-        <p:txBody>
-          <a:bodyPr wrap="square" lIns="0" tIns="0" rIns="0" bIns="0" rtlCol="0" anchor="t"/>
-          <a:lstStyle/>
-          <a:p>
-            <a:pPr indent="0" marL="0">
-              <a:buNone/>
-            </a:pPr>
-            <a:r>
-              <a:rPr lang="en-US" sz="1600" b="1" dirty="0">
-                <a:solidFill>
-                  <a:schemeClr val="tx2"/>
-                </a:solidFill>
-              </a:rPr>
-              <a:t>Mine and publish</a:t>
-            </a:r>
-            <a:endParaRPr lang="en-US" sz="1600" dirty="0"/>
-          </a:p>
-        </p:txBody>
-      </p:sp>
-      <p:sp>
-        <p:nvSpPr>
-          <p:cNvPr id="30" name="Key step 4 body"/>
-          <p:cNvSpPr txBox="1"/>
-          <p:nvPr/>
-        </p:nvSpPr>
-        <p:spPr>
-          <a:xfrm>
-            <a:off x="9418320" y="4892040"/>
-            <a:ext cx="2057400" cy="1143000"/>
-          </a:xfrm>
-          <a:prstGeom prst="rect">
-            <a:avLst/>
-          </a:prstGeom>
-          <a:noFill/>
-          <a:ln/>
-        </p:spPr>
-        <p:txBody>
-          <a:bodyPr wrap="square" lIns="0" tIns="0" rIns="0" bIns="0" rtlCol="0" anchor="t"/>
-          <a:lstStyle/>
-          <a:p>
-            <a:pPr indent="0" marL="0">
-              <a:buNone/>
-            </a:pPr>
-            <a:r>
-              <a:rPr lang="en-US" sz="1400" dirty="0">
-                <a:solidFill>
-                  <a:schemeClr val="tx1"/>
-                </a:solidFill>
-              </a:rPr>
-              <a:t>The event log (CSV / XES) feeds the hosted dashboard and value case.</a:t>
+              <a:t>four SOQL queries over the REST API, signed by the Salesforce CLI session. Opportunity Id becomes the case ID.</a:t>
             </a:r>
             <a:endParaRPr lang="en-US" sz="1400" dirty="0"/>
           </a:p>

--- a/deck/salesforce-process-intelligence.pptx
+++ b/deck/salesforce-process-intelligence.pptx
@@ -11,11 +11,9 @@
     <p:sldId id="259" r:id="rId5"/>
     <p:sldId id="260" r:id="rId6"/>
     <p:sldId id="261" r:id="rId7"/>
-    <p:sldId id="262" r:id="rId8"/>
-    <p:sldId id="263" r:id="rId9"/>
   </p:sldIdLst>
   <p:notesMasterIdLst>
-    <p:notesMasterId r:id="rId10"/>
+    <p:notesMasterId r:id="rId8"/>
   </p:notesMasterIdLst>
   <p:sldSz cx="12192000" cy="6858000"/>
   <p:notesSz cx="6858000" cy="12192000"/>
@@ -114,32 +112,26 @@
   <p:extLst>
     <p:ext uri="{521415D9-36F7-43E2-AB2F-B90AF26B5E84}">
       <p14:sectionLst xmlns:p14="http://schemas.microsoft.com/office/powerpoint/2010/main">
-        <p14:section name="Opening" id="{cea02240-3fcf-10ae-6263-30fbd8c30f57}">
+        <p14:section name="Opening" id="{b87f9b5a-8c23-0298-4637-f3eef46d7f19}">
           <p14:sldIdLst>
             <p14:sldId id="256"/>
             <p14:sldId id="257"/>
           </p14:sldIdLst>
         </p14:section>
-        <p14:section name="Evidence" id="{4006877a-e396-3548-454c-fcd91d84a0df}">
+        <p14:section name="Evidence" id="{dcb4ef80-7e70-5379-1753-03bc14d16646}">
           <p14:sldIdLst>
             <p14:sldId id="258"/>
             <p14:sldId id="259"/>
           </p14:sldIdLst>
         </p14:section>
-        <p14:section name="Value" id="{2a5f094b-0090-a4f9-b8cc-53fb2d756d58}">
+        <p14:section name="Value" id="{7b0a5b99-2548-4d99-cde0-9339839278f9}">
           <p14:sldIdLst>
             <p14:sldId id="260"/>
           </p14:sldIdLst>
         </p14:section>
-        <p14:section name="Tech setup" id="{82d0bfbe-626b-3fa9-d2b6-98154d9de801}">
+        <p14:section name="Close" id="{020c7d8d-8fb0-4948-27e5-c03d0b5c69a7}">
           <p14:sldIdLst>
             <p14:sldId id="261"/>
-            <p14:sldId id="262"/>
-          </p14:sldIdLst>
-        </p14:section>
-        <p14:section name="Close" id="{b9043b03-107a-2b7d-1f74-464bac0320d0}">
-          <p14:sldIdLst>
-            <p14:sldId id="263"/>
           </p14:sldIdLst>
         </p14:section>
       </p14:sectionLst>
@@ -1831,7 +1823,7 @@
           <a:p>
             <a:r>
               <a:rPr lang="en-US" dirty="0"/>
-              <a:t>Left: the trial org standing in for a client's CRM, seeded by seed.py so there's real OpportunityHistory to read. Right: the exact SOQL the extractor runs. Opportunity is the case; leads join via ConvertedOpportunityId and tasks via WhatId. Trial orgs can't backdate history, so the 10-month dataset is simulated in the same object shape.</a:t>
+              <a:t>Close on the decision: validate on production data, pilot one policy change, then monitor value realised in Apromore.</a:t>
             </a:r>
             <a:endParaRPr lang="en-US" dirty="0"/>
           </a:p>
@@ -1855,182 +1847,6 @@
             <a:fld id="{F7021451-1387-4CA6-816F-3879F97B5CBC}" type="slidenum">
               <a:rPr lang="en-US"/>
               <a:t>6</a:t>
-            </a:fld>
-            <a:endParaRPr lang="en-US"/>
-          </a:p>
-        </p:txBody>
-      </p:sp>
-    </p:spTree>
-    <p:extLst>
-      <p:ext uri="{BB962C8B-B14F-4D97-AF65-F5344CB8AC3E}">
-        <p14:creationId xmlns:p14="http://schemas.microsoft.com/office/powerpoint/2010/main" val="1024086991"/>
-      </p:ext>
-    </p:extLst>
-  </p:cSld>
-  <p:clrMapOvr>
-    <a:masterClrMapping/>
-  </p:clrMapOvr>
-</p:notes>
-</file>
-
-<file path=ppt/notesSlides/notesSlide7.xml><?xml version="1.0" encoding="utf-8"?>
-<p:notes xmlns:a="http://schemas.openxmlformats.org/drawingml/2006/main" xmlns:r="http://schemas.openxmlformats.org/officeDocument/2006/relationships" xmlns:p="http://schemas.openxmlformats.org/presentationml/2006/main">
-  <p:cSld>
-    <p:spTree>
-      <p:nvGrpSpPr>
-        <p:cNvPr id="1" name=""/>
-        <p:cNvGrpSpPr/>
-        <p:nvPr/>
-      </p:nvGrpSpPr>
-      <p:grpSpPr>
-        <a:xfrm>
-          <a:off x="0" y="0"/>
-          <a:ext cx="0" cy="0"/>
-          <a:chOff x="0" y="0"/>
-          <a:chExt cx="0" cy="0"/>
-        </a:xfrm>
-      </p:grpSpPr>
-      <p:sp>
-        <p:nvSpPr>
-          <p:cNvPr id="2" name="Slide Image Placeholder 1"/>
-          <p:cNvSpPr>
-            <a:spLocks noGrp="1" noRot="1" noChangeAspect="1"/>
-          </p:cNvSpPr>
-          <p:nvPr>
-            <p:ph type="sldImg"/>
-          </p:nvPr>
-        </p:nvSpPr>
-        <p:spPr/>
-      </p:sp>
-      <p:sp>
-        <p:nvSpPr>
-          <p:cNvPr id="3" name="Notes Placeholder 2"/>
-          <p:cNvSpPr>
-            <a:spLocks noGrp="1"/>
-          </p:cNvSpPr>
-          <p:nvPr>
-            <p:ph type="body" idx="1"/>
-          </p:nvPr>
-        </p:nvSpPr>
-        <p:spPr/>
-        <p:txBody>
-          <a:bodyPr/>
-          <a:lstStyle/>
-          <a:p>
-            <a:r>
-              <a:rPr lang="en-US" dirty="0"/>
-              <a:t>All of this is hosted. The repo has the pipeline, the seeding script and the README with the setup gotchas I hit on a new trial org.</a:t>
-            </a:r>
-            <a:endParaRPr lang="en-US" dirty="0"/>
-          </a:p>
-        </p:txBody>
-      </p:sp>
-      <p:sp>
-        <p:nvSpPr>
-          <p:cNvPr id="4" name="Slide Number Placeholder 3"/>
-          <p:cNvSpPr>
-            <a:spLocks noGrp="1"/>
-          </p:cNvSpPr>
-          <p:nvPr>
-            <p:ph type="sldNum" sz="quarter" idx="10"/>
-          </p:nvPr>
-        </p:nvSpPr>
-        <p:spPr/>
-        <p:txBody>
-          <a:bodyPr/>
-          <a:lstStyle/>
-          <a:p>
-            <a:fld id="{F7021451-1387-4CA6-816F-3879F97B5CBC}" type="slidenum">
-              <a:rPr lang="en-US"/>
-              <a:t>7</a:t>
-            </a:fld>
-            <a:endParaRPr lang="en-US"/>
-          </a:p>
-        </p:txBody>
-      </p:sp>
-    </p:spTree>
-    <p:extLst>
-      <p:ext uri="{BB962C8B-B14F-4D97-AF65-F5344CB8AC3E}">
-        <p14:creationId xmlns:p14="http://schemas.microsoft.com/office/powerpoint/2010/main" val="1024086991"/>
-      </p:ext>
-    </p:extLst>
-  </p:cSld>
-  <p:clrMapOvr>
-    <a:masterClrMapping/>
-  </p:clrMapOvr>
-</p:notes>
-</file>
-
-<file path=ppt/notesSlides/notesSlide8.xml><?xml version="1.0" encoding="utf-8"?>
-<p:notes xmlns:a="http://schemas.openxmlformats.org/drawingml/2006/main" xmlns:r="http://schemas.openxmlformats.org/officeDocument/2006/relationships" xmlns:p="http://schemas.openxmlformats.org/presentationml/2006/main">
-  <p:cSld>
-    <p:spTree>
-      <p:nvGrpSpPr>
-        <p:cNvPr id="1" name=""/>
-        <p:cNvGrpSpPr/>
-        <p:nvPr/>
-      </p:nvGrpSpPr>
-      <p:grpSpPr>
-        <a:xfrm>
-          <a:off x="0" y="0"/>
-          <a:ext cx="0" cy="0"/>
-          <a:chOff x="0" y="0"/>
-          <a:chExt cx="0" cy="0"/>
-        </a:xfrm>
-      </p:grpSpPr>
-      <p:sp>
-        <p:nvSpPr>
-          <p:cNvPr id="2" name="Slide Image Placeholder 1"/>
-          <p:cNvSpPr>
-            <a:spLocks noGrp="1" noRot="1" noChangeAspect="1"/>
-          </p:cNvSpPr>
-          <p:nvPr>
-            <p:ph type="sldImg"/>
-          </p:nvPr>
-        </p:nvSpPr>
-        <p:spPr/>
-      </p:sp>
-      <p:sp>
-        <p:nvSpPr>
-          <p:cNvPr id="3" name="Notes Placeholder 2"/>
-          <p:cNvSpPr>
-            <a:spLocks noGrp="1"/>
-          </p:cNvSpPr>
-          <p:nvPr>
-            <p:ph type="body" idx="1"/>
-          </p:nvPr>
-        </p:nvSpPr>
-        <p:spPr/>
-        <p:txBody>
-          <a:bodyPr/>
-          <a:lstStyle/>
-          <a:p>
-            <a:r>
-              <a:rPr lang="en-US" dirty="0"/>
-              <a:t>Close on the decision: validate on production data, pilot one policy change, then monitor value realised in Apromore.</a:t>
-            </a:r>
-            <a:endParaRPr lang="en-US" dirty="0"/>
-          </a:p>
-        </p:txBody>
-      </p:sp>
-      <p:sp>
-        <p:nvSpPr>
-          <p:cNvPr id="4" name="Slide Number Placeholder 3"/>
-          <p:cNvSpPr>
-            <a:spLocks noGrp="1"/>
-          </p:cNvSpPr>
-          <p:nvPr>
-            <p:ph type="sldNum" sz="quarter" idx="10"/>
-          </p:nvPr>
-        </p:nvSpPr>
-        <p:spPr/>
-        <p:txBody>
-          <a:bodyPr/>
-          <a:lstStyle/>
-          <a:p>
-            <a:fld id="{F7021451-1387-4CA6-816F-3879F97B5CBC}" type="slidenum">
-              <a:rPr lang="en-US"/>
-              <a:t>8</a:t>
             </a:fld>
             <a:endParaRPr lang="en-US"/>
           </a:p>
@@ -6066,2220 +5882,6 @@
 <file path=ppt/slides/slide6.xml><?xml version="1.0" encoding="utf-8"?>
 <p:sld xmlns:a="http://schemas.openxmlformats.org/drawingml/2006/main" xmlns:r="http://schemas.openxmlformats.org/officeDocument/2006/relationships" xmlns:p="http://schemas.openxmlformats.org/presentationml/2006/main">
   <p:cSld name="Slide 6">
-    <p:spTree>
-      <p:nvGrpSpPr>
-        <p:cNvPr id="1" name=""/>
-        <p:cNvGrpSpPr/>
-        <p:nvPr/>
-      </p:nvGrpSpPr>
-      <p:grpSpPr>
-        <a:xfrm>
-          <a:off x="0" y="0"/>
-          <a:ext cx="0" cy="0"/>
-          <a:chOff x="0" y="0"/>
-          <a:chExt cx="0" cy="0"/>
-        </a:xfrm>
-      </p:grpSpPr>
-      <p:sp>
-        <p:nvSpPr>
-          <p:cNvPr id="2" name="Text 0"/>
-          <p:cNvSpPr/>
-          <p:nvPr>
-            <p:ph idx="100" type="title" hasCustomPrompt="1"/>
-          </p:nvPr>
-        </p:nvSpPr>
-        <p:spPr>
-          <a:xfrm>
-            <a:off x="548640" y="320040"/>
-            <a:ext cx="11064240" cy="822960"/>
-          </a:xfrm>
-          <a:prstGeom prst="rect">
-            <a:avLst/>
-          </a:prstGeom>
-          <a:noFill/>
-          <a:ln/>
-        </p:spPr>
-        <p:txBody>
-          <a:bodyPr wrap="square" lIns="0" tIns="0" rIns="0" bIns="0" rtlCol="0" anchor="ctr"/>
-          <a:lstStyle/>
-          <a:p>
-            <a:pPr algn="l" indent="0" marL="0">
-              <a:buNone/>
-            </a:pPr>
-            <a:r>
-              <a:rPr lang="en-US" sz="3000" b="1" dirty="0">
-                <a:solidFill>
-                  <a:schemeClr val="tx2"/>
-                </a:solidFill>
-              </a:rPr>
-              <a:t>Tech setup: from a Salesforce org to an event log</a:t>
-            </a:r>
-            <a:endParaRPr lang="en-US" sz="3000" dirty="0"/>
-          </a:p>
-        </p:txBody>
-      </p:sp>
-      <p:sp>
-        <p:nvSpPr>
-          <p:cNvPr id="3" name="Org screenshot frame"/>
-          <p:cNvSpPr/>
-          <p:nvPr/>
-        </p:nvSpPr>
-        <p:spPr>
-          <a:xfrm>
-            <a:off x="512064" y="1243584"/>
-            <a:ext cx="5148072" cy="3910582"/>
-          </a:xfrm>
-          <a:prstGeom prst="rect">
-            <a:avLst/>
-          </a:prstGeom>
-          <a:solidFill>
-            <a:schemeClr val="bg1"/>
-          </a:solidFill>
-          <a:ln w="12700">
-            <a:solidFill>
-              <a:schemeClr val="accent3"/>
-            </a:solidFill>
-            <a:prstDash val="solid"/>
-          </a:ln>
-        </p:spPr>
-      </p:sp>
-      <p:pic>
-        <p:nvPicPr>
-          <p:cNvPr id="4" name="Org screenshot" descr="Salesforce trial org with seeded demo records">    </p:cNvPr>
-          <p:cNvPicPr>
-            <a:picLocks noChangeAspect="1"/>
-          </p:cNvPicPr>
-          <p:nvPr/>
-        </p:nvPicPr>
-        <p:blipFill>
-          <a:blip r:embed="rId1"/>
-          <a:stretch>
-            <a:fillRect/>
-          </a:stretch>
-        </p:blipFill>
-        <p:spPr>
-          <a:xfrm>
-            <a:off x="548640" y="1280160"/>
-            <a:ext cx="5074920" cy="3837430"/>
-          </a:xfrm>
-          <a:prstGeom prst="rect">
-            <a:avLst/>
-          </a:prstGeom>
-        </p:spPr>
-      </p:pic>
-      <p:sp>
-        <p:nvSpPr>
-          <p:cNvPr id="5" name="Org caption"/>
-          <p:cNvSpPr txBox="1"/>
-          <p:nvPr/>
-        </p:nvSpPr>
-        <p:spPr>
-          <a:xfrm>
-            <a:off x="548640" y="5669280"/>
-            <a:ext cx="5074920" cy="685800"/>
-          </a:xfrm>
-          <a:prstGeom prst="rect">
-            <a:avLst/>
-          </a:prstGeom>
-          <a:noFill/>
-          <a:ln/>
-        </p:spPr>
-        <p:txBody>
-          <a:bodyPr wrap="square" lIns="0" tIns="0" rIns="0" bIns="0" rtlCol="0" anchor="t"/>
-          <a:lstStyle/>
-          <a:p>
-            <a:pPr indent="0" marL="0">
-              <a:buNone/>
-            </a:pPr>
-            <a:r>
-              <a:rPr lang="en-US" sz="1400" b="1" dirty="0">
-                <a:solidFill>
-                  <a:schemeClr val="tx2"/>
-                </a:solidFill>
-              </a:rPr>
-              <a:t>Salesforce trial org: </a:t>
-            </a:r>
-            <a:pPr indent="0" marL="0">
-              <a:buNone/>
-            </a:pPr>
-            <a:r>
-              <a:rPr lang="en-US" sz="1400" dirty="0">
-                <a:solidFill>
-                  <a:schemeClr val="tx2"/>
-                </a:solidFill>
-              </a:rPr>
-              <a:t>seed.py loaded 40 [Demo] deals through real stage changes to simulate a client's CRM.</a:t>
-            </a:r>
-            <a:endParaRPr lang="en-US" sz="1400" dirty="0"/>
-          </a:p>
-        </p:txBody>
-      </p:sp>
-      <p:sp>
-        <p:nvSpPr>
-          <p:cNvPr id="6" name="Code panel"/>
-          <p:cNvSpPr/>
-          <p:nvPr/>
-        </p:nvSpPr>
-        <p:spPr>
-          <a:xfrm>
-            <a:off x="5897880" y="1280160"/>
-            <a:ext cx="5715000" cy="4297680"/>
-          </a:xfrm>
-          <a:prstGeom prst="roundRect">
-            <a:avLst>
-              <a:gd name="adj" fmla="val 2553"/>
-            </a:avLst>
-          </a:prstGeom>
-          <a:solidFill>
-            <a:schemeClr val="tx2"/>
-          </a:solidFill>
-          <a:ln/>
-        </p:spPr>
-      </p:sp>
-      <p:sp>
-        <p:nvSpPr>
-          <p:cNvPr id="7" name="Code panel dot 1"/>
-          <p:cNvSpPr/>
-          <p:nvPr/>
-        </p:nvSpPr>
-        <p:spPr>
-          <a:xfrm>
-            <a:off x="6080760" y="1417320"/>
-            <a:ext cx="109728" cy="109728"/>
-          </a:xfrm>
-          <a:prstGeom prst="ellipse">
-            <a:avLst/>
-          </a:prstGeom>
-          <a:solidFill>
-            <a:srgbClr val="FE9339"/>
-          </a:solidFill>
-          <a:ln/>
-        </p:spPr>
-      </p:sp>
-      <p:sp>
-        <p:nvSpPr>
-          <p:cNvPr id="8" name="Code panel dot 2"/>
-          <p:cNvSpPr/>
-          <p:nvPr/>
-        </p:nvSpPr>
-        <p:spPr>
-          <a:xfrm>
-            <a:off x="6263640" y="1417320"/>
-            <a:ext cx="109728" cy="109728"/>
-          </a:xfrm>
-          <a:prstGeom prst="ellipse">
-            <a:avLst/>
-          </a:prstGeom>
-          <a:solidFill>
-            <a:srgbClr val="F6C344"/>
-          </a:solidFill>
-          <a:ln/>
-        </p:spPr>
-      </p:sp>
-      <p:sp>
-        <p:nvSpPr>
-          <p:cNvPr id="9" name="Code panel dot 3"/>
-          <p:cNvSpPr/>
-          <p:nvPr/>
-        </p:nvSpPr>
-        <p:spPr>
-          <a:xfrm>
-            <a:off x="6446520" y="1417320"/>
-            <a:ext cx="109728" cy="109728"/>
-          </a:xfrm>
-          <a:prstGeom prst="ellipse">
-            <a:avLst/>
-          </a:prstGeom>
-          <a:solidFill>
-            <a:srgbClr val="2E844A"/>
-          </a:solidFill>
-          <a:ln/>
-        </p:spPr>
-      </p:sp>
-      <p:sp>
-        <p:nvSpPr>
-          <p:cNvPr id="10" name="Code panel filename"/>
-          <p:cNvSpPr txBox="1"/>
-          <p:nvPr/>
-        </p:nvSpPr>
-        <p:spPr>
-          <a:xfrm>
-            <a:off x="6675120" y="1353312"/>
-            <a:ext cx="2743200" cy="237744"/>
-          </a:xfrm>
-          <a:prstGeom prst="rect">
-            <a:avLst/>
-          </a:prstGeom>
-          <a:noFill/>
-          <a:ln/>
-        </p:spPr>
-        <p:txBody>
-          <a:bodyPr wrap="square" lIns="0" tIns="0" rIns="0" bIns="0" rtlCol="0" anchor="t"/>
-          <a:lstStyle/>
-          <a:p>
-            <a:pPr indent="0" marL="0">
-              <a:buNone/>
-            </a:pPr>
-            <a:r>
-              <a:rPr lang="en-US" sz="1100" dirty="0">
-                <a:solidFill>
-                  <a:schemeClr val="accent3"/>
-                </a:solidFill>
-              </a:rPr>
-              <a:t>pipeline/extract.py</a:t>
-            </a:r>
-            <a:endParaRPr lang="en-US" sz="1100" dirty="0"/>
-          </a:p>
-        </p:txBody>
-      </p:sp>
-      <p:sp>
-        <p:nvSpPr>
-          <p:cNvPr id="11" name="SOQL code"/>
-          <p:cNvSpPr txBox="1"/>
-          <p:nvPr/>
-        </p:nvSpPr>
-        <p:spPr>
-          <a:xfrm>
-            <a:off x="6080760" y="1664208"/>
-            <a:ext cx="5440680" cy="3840480"/>
-          </a:xfrm>
-          <a:prstGeom prst="rect">
-            <a:avLst/>
-          </a:prstGeom>
-          <a:noFill/>
-          <a:ln/>
-        </p:spPr>
-        <p:txBody>
-          <a:bodyPr wrap="square" lIns="0" tIns="0" rIns="0" bIns="0" rtlCol="0" anchor="t"/>
-          <a:lstStyle/>
-          <a:p>
-            <a:pPr indent="0" marL="0">
-              <a:lnSpc>
-                <a:spcPct val="100000"/>
-              </a:lnSpc>
-              <a:buNone/>
-            </a:pPr>
-            <a:r>
-              <a:rPr lang="en-US" sz="1000" dirty="0">
-                <a:solidFill>
-                  <a:srgbClr val="CFE9FE"/>
-                </a:solidFill>
-                <a:latin typeface="Courier New" pitchFamily="34" charset="0"/>
-                <a:ea typeface="Courier New" pitchFamily="34" charset="-122"/>
-                <a:cs typeface="Courier New" pitchFamily="34" charset="-120"/>
-              </a:rPr>
-              <a:t>QUERIES = {</a:t>
-            </a:r>
-            <a:endParaRPr lang="en-US" sz="1000" dirty="0"/>
-          </a:p>
-          <a:p>
-            <a:pPr indent="0" marL="0">
-              <a:lnSpc>
-                <a:spcPct val="100000"/>
-              </a:lnSpc>
-              <a:buNone/>
-            </a:pPr>
-            <a:r>
-              <a:rPr lang="en-US" sz="1000" dirty="0">
-                <a:solidFill>
-                  <a:srgbClr val="CFE9FE"/>
-                </a:solidFill>
-                <a:latin typeface="Courier New" pitchFamily="34" charset="0"/>
-                <a:ea typeface="Courier New" pitchFamily="34" charset="-122"/>
-                <a:cs typeface="Courier New" pitchFamily="34" charset="-120"/>
-              </a:rPr>
-              <a:t>    </a:t>
-            </a:r>
-            <a:pPr indent="0" marL="0">
-              <a:lnSpc>
-                <a:spcPct val="100000"/>
-              </a:lnSpc>
-              <a:buNone/>
-            </a:pPr>
-            <a:r>
-              <a:rPr lang="en-US" sz="1000" dirty="0">
-                <a:solidFill>
-                  <a:srgbClr val="FE9339"/>
-                </a:solidFill>
-                <a:latin typeface="Courier New" pitchFamily="34" charset="0"/>
-                <a:ea typeface="Courier New" pitchFamily="34" charset="-122"/>
-                <a:cs typeface="Courier New" pitchFamily="34" charset="-120"/>
-              </a:rPr>
-              <a:t>"opportunities"</a:t>
-            </a:r>
-            <a:pPr indent="0" marL="0">
-              <a:lnSpc>
-                <a:spcPct val="100000"/>
-              </a:lnSpc>
-              <a:buNone/>
-            </a:pPr>
-            <a:r>
-              <a:rPr lang="en-US" sz="1000" dirty="0">
-                <a:solidFill>
-                  <a:srgbClr val="CFE9FE"/>
-                </a:solidFill>
-                <a:latin typeface="Courier New" pitchFamily="34" charset="0"/>
-                <a:ea typeface="Courier New" pitchFamily="34" charset="-122"/>
-                <a:cs typeface="Courier New" pitchFamily="34" charset="-120"/>
-              </a:rPr>
-              <a:t>: """</a:t>
-            </a:r>
-            <a:endParaRPr lang="en-US" sz="1000" dirty="0"/>
-          </a:p>
-          <a:p>
-            <a:pPr indent="0" marL="0">
-              <a:lnSpc>
-                <a:spcPct val="100000"/>
-              </a:lnSpc>
-              <a:buNone/>
-            </a:pPr>
-            <a:r>
-              <a:rPr lang="en-US" sz="1000" dirty="0">
-                <a:solidFill>
-                  <a:srgbClr val="CFE9FE"/>
-                </a:solidFill>
-                <a:latin typeface="Courier New" pitchFamily="34" charset="0"/>
-                <a:ea typeface="Courier New" pitchFamily="34" charset="-122"/>
-                <a:cs typeface="Courier New" pitchFamily="34" charset="-120"/>
-              </a:rPr>
-              <a:t>    </a:t>
-            </a:r>
-            <a:pPr indent="0" marL="0">
-              <a:lnSpc>
-                <a:spcPct val="100000"/>
-              </a:lnSpc>
-              <a:buNone/>
-            </a:pPr>
-            <a:r>
-              <a:rPr lang="en-US" sz="1000" b="1" dirty="0">
-                <a:solidFill>
-                  <a:srgbClr val="0B9DE0"/>
-                </a:solidFill>
-                <a:latin typeface="Courier New" pitchFamily="34" charset="0"/>
-                <a:ea typeface="Courier New" pitchFamily="34" charset="-122"/>
-                <a:cs typeface="Courier New" pitchFamily="34" charset="-120"/>
-              </a:rPr>
-              <a:t>SELECT</a:t>
-            </a:r>
-            <a:pPr indent="0" marL="0">
-              <a:lnSpc>
-                <a:spcPct val="100000"/>
-              </a:lnSpc>
-              <a:buNone/>
-            </a:pPr>
-            <a:r>
-              <a:rPr lang="en-US" sz="1000" dirty="0">
-                <a:solidFill>
-                  <a:srgbClr val="CFE9FE"/>
-                </a:solidFill>
-                <a:latin typeface="Courier New" pitchFamily="34" charset="0"/>
-                <a:ea typeface="Courier New" pitchFamily="34" charset="-122"/>
-                <a:cs typeface="Courier New" pitchFamily="34" charset="-120"/>
-              </a:rPr>
-              <a:t> Id, Name, Amount, StageName, IsWon, IsClosed,</a:t>
-            </a:r>
-            <a:endParaRPr lang="en-US" sz="1000" dirty="0"/>
-          </a:p>
-          <a:p>
-            <a:pPr indent="0" marL="0">
-              <a:lnSpc>
-                <a:spcPct val="100000"/>
-              </a:lnSpc>
-              <a:buNone/>
-            </a:pPr>
-            <a:r>
-              <a:rPr lang="en-US" sz="1000" dirty="0">
-                <a:solidFill>
-                  <a:srgbClr val="CFE9FE"/>
-                </a:solidFill>
-                <a:latin typeface="Courier New" pitchFamily="34" charset="0"/>
-                <a:ea typeface="Courier New" pitchFamily="34" charset="-122"/>
-                <a:cs typeface="Courier New" pitchFamily="34" charset="-120"/>
-              </a:rPr>
-              <a:t>           LeadSource, CreatedDate, CloseDate, OwnerId, Owner.Name,</a:t>
-            </a:r>
-            <a:endParaRPr lang="en-US" sz="1000" dirty="0"/>
-          </a:p>
-          <a:p>
-            <a:pPr indent="0" marL="0">
-              <a:lnSpc>
-                <a:spcPct val="100000"/>
-              </a:lnSpc>
-              <a:buNone/>
-            </a:pPr>
-            <a:r>
-              <a:rPr lang="en-US" sz="1000" dirty="0">
-                <a:solidFill>
-                  <a:srgbClr val="CFE9FE"/>
-                </a:solidFill>
-                <a:latin typeface="Courier New" pitchFamily="34" charset="0"/>
-                <a:ea typeface="Courier New" pitchFamily="34" charset="-122"/>
-                <a:cs typeface="Courier New" pitchFamily="34" charset="-120"/>
-              </a:rPr>
-              <a:t>           Account.Industry, Account.BillingCountry</a:t>
-            </a:r>
-            <a:endParaRPr lang="en-US" sz="1000" dirty="0"/>
-          </a:p>
-          <a:p>
-            <a:pPr indent="0" marL="0">
-              <a:lnSpc>
-                <a:spcPct val="100000"/>
-              </a:lnSpc>
-              <a:buNone/>
-            </a:pPr>
-            <a:r>
-              <a:rPr lang="en-US" sz="1000" dirty="0">
-                <a:solidFill>
-                  <a:srgbClr val="CFE9FE"/>
-                </a:solidFill>
-                <a:latin typeface="Courier New" pitchFamily="34" charset="0"/>
-                <a:ea typeface="Courier New" pitchFamily="34" charset="-122"/>
-                <a:cs typeface="Courier New" pitchFamily="34" charset="-120"/>
-              </a:rPr>
-              <a:t>    </a:t>
-            </a:r>
-            <a:pPr indent="0" marL="0">
-              <a:lnSpc>
-                <a:spcPct val="100000"/>
-              </a:lnSpc>
-              <a:buNone/>
-            </a:pPr>
-            <a:r>
-              <a:rPr lang="en-US" sz="1000" b="1" dirty="0">
-                <a:solidFill>
-                  <a:srgbClr val="0B9DE0"/>
-                </a:solidFill>
-                <a:latin typeface="Courier New" pitchFamily="34" charset="0"/>
-                <a:ea typeface="Courier New" pitchFamily="34" charset="-122"/>
-                <a:cs typeface="Courier New" pitchFamily="34" charset="-120"/>
-              </a:rPr>
-              <a:t>FROM</a:t>
-            </a:r>
-            <a:pPr indent="0" marL="0">
-              <a:lnSpc>
-                <a:spcPct val="100000"/>
-              </a:lnSpc>
-              <a:buNone/>
-            </a:pPr>
-            <a:r>
-              <a:rPr lang="en-US" sz="1000" dirty="0">
-                <a:solidFill>
-                  <a:srgbClr val="CFE9FE"/>
-                </a:solidFill>
-                <a:latin typeface="Courier New" pitchFamily="34" charset="0"/>
-                <a:ea typeface="Courier New" pitchFamily="34" charset="-122"/>
-                <a:cs typeface="Courier New" pitchFamily="34" charset="-120"/>
-              </a:rPr>
-              <a:t> Opportunity""",</a:t>
-            </a:r>
-            <a:endParaRPr lang="en-US" sz="1000" dirty="0"/>
-          </a:p>
-          <a:p>
-            <a:pPr indent="0" marL="0">
-              <a:lnSpc>
-                <a:spcPct val="100000"/>
-              </a:lnSpc>
-              <a:buNone/>
-            </a:pPr>
-            <a:r>
-              <a:rPr lang="en-US" sz="1000" dirty="0">
-                <a:solidFill>
-                  <a:srgbClr val="CFE9FE"/>
-                </a:solidFill>
-                <a:latin typeface="Courier New" pitchFamily="34" charset="0"/>
-                <a:ea typeface="Courier New" pitchFamily="34" charset="-122"/>
-                <a:cs typeface="Courier New" pitchFamily="34" charset="-120"/>
-              </a:rPr>
-              <a:t>    </a:t>
-            </a:r>
-            <a:pPr indent="0" marL="0">
-              <a:lnSpc>
-                <a:spcPct val="100000"/>
-              </a:lnSpc>
-              <a:buNone/>
-            </a:pPr>
-            <a:r>
-              <a:rPr lang="en-US" sz="1000" dirty="0">
-                <a:solidFill>
-                  <a:srgbClr val="FE9339"/>
-                </a:solidFill>
-                <a:latin typeface="Courier New" pitchFamily="34" charset="0"/>
-                <a:ea typeface="Courier New" pitchFamily="34" charset="-122"/>
-                <a:cs typeface="Courier New" pitchFamily="34" charset="-120"/>
-              </a:rPr>
-              <a:t>"stage_history"</a:t>
-            </a:r>
-            <a:pPr indent="0" marL="0">
-              <a:lnSpc>
-                <a:spcPct val="100000"/>
-              </a:lnSpc>
-              <a:buNone/>
-            </a:pPr>
-            <a:r>
-              <a:rPr lang="en-US" sz="1000" dirty="0">
-                <a:solidFill>
-                  <a:srgbClr val="CFE9FE"/>
-                </a:solidFill>
-                <a:latin typeface="Courier New" pitchFamily="34" charset="0"/>
-                <a:ea typeface="Courier New" pitchFamily="34" charset="-122"/>
-                <a:cs typeface="Courier New" pitchFamily="34" charset="-120"/>
-              </a:rPr>
-              <a:t>: """</a:t>
-            </a:r>
-            <a:endParaRPr lang="en-US" sz="1000" dirty="0"/>
-          </a:p>
-          <a:p>
-            <a:pPr indent="0" marL="0">
-              <a:lnSpc>
-                <a:spcPct val="100000"/>
-              </a:lnSpc>
-              <a:buNone/>
-            </a:pPr>
-            <a:r>
-              <a:rPr lang="en-US" sz="1000" dirty="0">
-                <a:solidFill>
-                  <a:srgbClr val="CFE9FE"/>
-                </a:solidFill>
-                <a:latin typeface="Courier New" pitchFamily="34" charset="0"/>
-                <a:ea typeface="Courier New" pitchFamily="34" charset="-122"/>
-                <a:cs typeface="Courier New" pitchFamily="34" charset="-120"/>
-              </a:rPr>
-              <a:t>    </a:t>
-            </a:r>
-            <a:pPr indent="0" marL="0">
-              <a:lnSpc>
-                <a:spcPct val="100000"/>
-              </a:lnSpc>
-              <a:buNone/>
-            </a:pPr>
-            <a:r>
-              <a:rPr lang="en-US" sz="1000" b="1" dirty="0">
-                <a:solidFill>
-                  <a:srgbClr val="0B9DE0"/>
-                </a:solidFill>
-                <a:latin typeface="Courier New" pitchFamily="34" charset="0"/>
-                <a:ea typeface="Courier New" pitchFamily="34" charset="-122"/>
-                <a:cs typeface="Courier New" pitchFamily="34" charset="-120"/>
-              </a:rPr>
-              <a:t>SELECT</a:t>
-            </a:r>
-            <a:pPr indent="0" marL="0">
-              <a:lnSpc>
-                <a:spcPct val="100000"/>
-              </a:lnSpc>
-              <a:buNone/>
-            </a:pPr>
-            <a:r>
-              <a:rPr lang="en-US" sz="1000" dirty="0">
-                <a:solidFill>
-                  <a:srgbClr val="CFE9FE"/>
-                </a:solidFill>
-                <a:latin typeface="Courier New" pitchFamily="34" charset="0"/>
-                <a:ea typeface="Courier New" pitchFamily="34" charset="-122"/>
-                <a:cs typeface="Courier New" pitchFamily="34" charset="-120"/>
-              </a:rPr>
-              <a:t> OpportunityId, StageName, CreatedDate,</a:t>
-            </a:r>
-            <a:endParaRPr lang="en-US" sz="1000" dirty="0"/>
-          </a:p>
-          <a:p>
-            <a:pPr indent="0" marL="0">
-              <a:lnSpc>
-                <a:spcPct val="100000"/>
-              </a:lnSpc>
-              <a:buNone/>
-            </a:pPr>
-            <a:r>
-              <a:rPr lang="en-US" sz="1000" dirty="0">
-                <a:solidFill>
-                  <a:srgbClr val="CFE9FE"/>
-                </a:solidFill>
-                <a:latin typeface="Courier New" pitchFamily="34" charset="0"/>
-                <a:ea typeface="Courier New" pitchFamily="34" charset="-122"/>
-                <a:cs typeface="Courier New" pitchFamily="34" charset="-120"/>
-              </a:rPr>
-              <a:t>           CreatedById, CreatedBy.Name</a:t>
-            </a:r>
-            <a:endParaRPr lang="en-US" sz="1000" dirty="0"/>
-          </a:p>
-          <a:p>
-            <a:pPr indent="0" marL="0">
-              <a:lnSpc>
-                <a:spcPct val="100000"/>
-              </a:lnSpc>
-              <a:buNone/>
-            </a:pPr>
-            <a:r>
-              <a:rPr lang="en-US" sz="1000" dirty="0">
-                <a:solidFill>
-                  <a:srgbClr val="CFE9FE"/>
-                </a:solidFill>
-                <a:latin typeface="Courier New" pitchFamily="34" charset="0"/>
-                <a:ea typeface="Courier New" pitchFamily="34" charset="-122"/>
-                <a:cs typeface="Courier New" pitchFamily="34" charset="-120"/>
-              </a:rPr>
-              <a:t>    </a:t>
-            </a:r>
-            <a:pPr indent="0" marL="0">
-              <a:lnSpc>
-                <a:spcPct val="100000"/>
-              </a:lnSpc>
-              <a:buNone/>
-            </a:pPr>
-            <a:r>
-              <a:rPr lang="en-US" sz="1000" b="1" dirty="0">
-                <a:solidFill>
-                  <a:srgbClr val="0B9DE0"/>
-                </a:solidFill>
-                <a:latin typeface="Courier New" pitchFamily="34" charset="0"/>
-                <a:ea typeface="Courier New" pitchFamily="34" charset="-122"/>
-                <a:cs typeface="Courier New" pitchFamily="34" charset="-120"/>
-              </a:rPr>
-              <a:t>FROM</a:t>
-            </a:r>
-            <a:pPr indent="0" marL="0">
-              <a:lnSpc>
-                <a:spcPct val="100000"/>
-              </a:lnSpc>
-              <a:buNone/>
-            </a:pPr>
-            <a:r>
-              <a:rPr lang="en-US" sz="1000" dirty="0">
-                <a:solidFill>
-                  <a:srgbClr val="CFE9FE"/>
-                </a:solidFill>
-                <a:latin typeface="Courier New" pitchFamily="34" charset="0"/>
-                <a:ea typeface="Courier New" pitchFamily="34" charset="-122"/>
-                <a:cs typeface="Courier New" pitchFamily="34" charset="-120"/>
-              </a:rPr>
-              <a:t> OpportunityHistory</a:t>
-            </a:r>
-            <a:endParaRPr lang="en-US" sz="1000" dirty="0"/>
-          </a:p>
-          <a:p>
-            <a:pPr indent="0" marL="0">
-              <a:lnSpc>
-                <a:spcPct val="100000"/>
-              </a:lnSpc>
-              <a:buNone/>
-            </a:pPr>
-            <a:r>
-              <a:rPr lang="en-US" sz="1000" dirty="0">
-                <a:solidFill>
-                  <a:srgbClr val="CFE9FE"/>
-                </a:solidFill>
-                <a:latin typeface="Courier New" pitchFamily="34" charset="0"/>
-                <a:ea typeface="Courier New" pitchFamily="34" charset="-122"/>
-                <a:cs typeface="Courier New" pitchFamily="34" charset="-120"/>
-              </a:rPr>
-              <a:t>    </a:t>
-            </a:r>
-            <a:pPr indent="0" marL="0">
-              <a:lnSpc>
-                <a:spcPct val="100000"/>
-              </a:lnSpc>
-              <a:buNone/>
-            </a:pPr>
-            <a:r>
-              <a:rPr lang="en-US" sz="1000" b="1" dirty="0">
-                <a:solidFill>
-                  <a:srgbClr val="0B9DE0"/>
-                </a:solidFill>
-                <a:latin typeface="Courier New" pitchFamily="34" charset="0"/>
-                <a:ea typeface="Courier New" pitchFamily="34" charset="-122"/>
-                <a:cs typeface="Courier New" pitchFamily="34" charset="-120"/>
-              </a:rPr>
-              <a:t>ORDER BY</a:t>
-            </a:r>
-            <a:pPr indent="0" marL="0">
-              <a:lnSpc>
-                <a:spcPct val="100000"/>
-              </a:lnSpc>
-              <a:buNone/>
-            </a:pPr>
-            <a:r>
-              <a:rPr lang="en-US" sz="1000" dirty="0">
-                <a:solidFill>
-                  <a:srgbClr val="CFE9FE"/>
-                </a:solidFill>
-                <a:latin typeface="Courier New" pitchFamily="34" charset="0"/>
-                <a:ea typeface="Courier New" pitchFamily="34" charset="-122"/>
-                <a:cs typeface="Courier New" pitchFamily="34" charset="-120"/>
-              </a:rPr>
-              <a:t> OpportunityId, CreatedDate""",</a:t>
-            </a:r>
-            <a:endParaRPr lang="en-US" sz="1000" dirty="0"/>
-          </a:p>
-          <a:p>
-            <a:pPr indent="0" marL="0">
-              <a:lnSpc>
-                <a:spcPct val="100000"/>
-              </a:lnSpc>
-              <a:buNone/>
-            </a:pPr>
-            <a:r>
-              <a:rPr lang="en-US" sz="1000" dirty="0">
-                <a:solidFill>
-                  <a:srgbClr val="CFE9FE"/>
-                </a:solidFill>
-                <a:latin typeface="Courier New" pitchFamily="34" charset="0"/>
-                <a:ea typeface="Courier New" pitchFamily="34" charset="-122"/>
-                <a:cs typeface="Courier New" pitchFamily="34" charset="-120"/>
-              </a:rPr>
-              <a:t>    </a:t>
-            </a:r>
-            <a:pPr indent="0" marL="0">
-              <a:lnSpc>
-                <a:spcPct val="100000"/>
-              </a:lnSpc>
-              <a:buNone/>
-            </a:pPr>
-            <a:r>
-              <a:rPr lang="en-US" sz="1000" dirty="0">
-                <a:solidFill>
-                  <a:srgbClr val="FE9339"/>
-                </a:solidFill>
-                <a:latin typeface="Courier New" pitchFamily="34" charset="0"/>
-                <a:ea typeface="Courier New" pitchFamily="34" charset="-122"/>
-                <a:cs typeface="Courier New" pitchFamily="34" charset="-120"/>
-              </a:rPr>
-              <a:t>"tasks"</a:t>
-            </a:r>
-            <a:pPr indent="0" marL="0">
-              <a:lnSpc>
-                <a:spcPct val="100000"/>
-              </a:lnSpc>
-              <a:buNone/>
-            </a:pPr>
-            <a:r>
-              <a:rPr lang="en-US" sz="1000" dirty="0">
-                <a:solidFill>
-                  <a:srgbClr val="CFE9FE"/>
-                </a:solidFill>
-                <a:latin typeface="Courier New" pitchFamily="34" charset="0"/>
-                <a:ea typeface="Courier New" pitchFamily="34" charset="-122"/>
-                <a:cs typeface="Courier New" pitchFamily="34" charset="-120"/>
-              </a:rPr>
-              <a:t>: """</a:t>
-            </a:r>
-            <a:endParaRPr lang="en-US" sz="1000" dirty="0"/>
-          </a:p>
-          <a:p>
-            <a:pPr indent="0" marL="0">
-              <a:lnSpc>
-                <a:spcPct val="100000"/>
-              </a:lnSpc>
-              <a:buNone/>
-            </a:pPr>
-            <a:r>
-              <a:rPr lang="en-US" sz="1000" dirty="0">
-                <a:solidFill>
-                  <a:srgbClr val="CFE9FE"/>
-                </a:solidFill>
-                <a:latin typeface="Courier New" pitchFamily="34" charset="0"/>
-                <a:ea typeface="Courier New" pitchFamily="34" charset="-122"/>
-                <a:cs typeface="Courier New" pitchFamily="34" charset="-120"/>
-              </a:rPr>
-              <a:t>    </a:t>
-            </a:r>
-            <a:pPr indent="0" marL="0">
-              <a:lnSpc>
-                <a:spcPct val="100000"/>
-              </a:lnSpc>
-              <a:buNone/>
-            </a:pPr>
-            <a:r>
-              <a:rPr lang="en-US" sz="1000" b="1" dirty="0">
-                <a:solidFill>
-                  <a:srgbClr val="0B9DE0"/>
-                </a:solidFill>
-                <a:latin typeface="Courier New" pitchFamily="34" charset="0"/>
-                <a:ea typeface="Courier New" pitchFamily="34" charset="-122"/>
-                <a:cs typeface="Courier New" pitchFamily="34" charset="-120"/>
-              </a:rPr>
-              <a:t>SELECT</a:t>
-            </a:r>
-            <a:pPr indent="0" marL="0">
-              <a:lnSpc>
-                <a:spcPct val="100000"/>
-              </a:lnSpc>
-              <a:buNone/>
-            </a:pPr>
-            <a:r>
-              <a:rPr lang="en-US" sz="1000" dirty="0">
-                <a:solidFill>
-                  <a:srgbClr val="CFE9FE"/>
-                </a:solidFill>
-                <a:latin typeface="Courier New" pitchFamily="34" charset="0"/>
-                <a:ea typeface="Courier New" pitchFamily="34" charset="-122"/>
-                <a:cs typeface="Courier New" pitchFamily="34" charset="-120"/>
-              </a:rPr>
-              <a:t> WhatId, Subject, CreatedDate, CompletedDateTime,</a:t>
-            </a:r>
-            <a:endParaRPr lang="en-US" sz="1000" dirty="0"/>
-          </a:p>
-          <a:p>
-            <a:pPr indent="0" marL="0">
-              <a:lnSpc>
-                <a:spcPct val="100000"/>
-              </a:lnSpc>
-              <a:buNone/>
-            </a:pPr>
-            <a:r>
-              <a:rPr lang="en-US" sz="1000" dirty="0">
-                <a:solidFill>
-                  <a:srgbClr val="CFE9FE"/>
-                </a:solidFill>
-                <a:latin typeface="Courier New" pitchFamily="34" charset="0"/>
-                <a:ea typeface="Courier New" pitchFamily="34" charset="-122"/>
-                <a:cs typeface="Courier New" pitchFamily="34" charset="-120"/>
-              </a:rPr>
-              <a:t>           OwnerId, Owner.Name, Status</a:t>
-            </a:r>
-            <a:endParaRPr lang="en-US" sz="1000" dirty="0"/>
-          </a:p>
-          <a:p>
-            <a:pPr indent="0" marL="0">
-              <a:lnSpc>
-                <a:spcPct val="100000"/>
-              </a:lnSpc>
-              <a:buNone/>
-            </a:pPr>
-            <a:r>
-              <a:rPr lang="en-US" sz="1000" dirty="0">
-                <a:solidFill>
-                  <a:srgbClr val="CFE9FE"/>
-                </a:solidFill>
-                <a:latin typeface="Courier New" pitchFamily="34" charset="0"/>
-                <a:ea typeface="Courier New" pitchFamily="34" charset="-122"/>
-                <a:cs typeface="Courier New" pitchFamily="34" charset="-120"/>
-              </a:rPr>
-              <a:t>    </a:t>
-            </a:r>
-            <a:pPr indent="0" marL="0">
-              <a:lnSpc>
-                <a:spcPct val="100000"/>
-              </a:lnSpc>
-              <a:buNone/>
-            </a:pPr>
-            <a:r>
-              <a:rPr lang="en-US" sz="1000" b="1" dirty="0">
-                <a:solidFill>
-                  <a:srgbClr val="0B9DE0"/>
-                </a:solidFill>
-                <a:latin typeface="Courier New" pitchFamily="34" charset="0"/>
-                <a:ea typeface="Courier New" pitchFamily="34" charset="-122"/>
-                <a:cs typeface="Courier New" pitchFamily="34" charset="-120"/>
-              </a:rPr>
-              <a:t>FROM</a:t>
-            </a:r>
-            <a:pPr indent="0" marL="0">
-              <a:lnSpc>
-                <a:spcPct val="100000"/>
-              </a:lnSpc>
-              <a:buNone/>
-            </a:pPr>
-            <a:r>
-              <a:rPr lang="en-US" sz="1000" dirty="0">
-                <a:solidFill>
-                  <a:srgbClr val="CFE9FE"/>
-                </a:solidFill>
-                <a:latin typeface="Courier New" pitchFamily="34" charset="0"/>
-                <a:ea typeface="Courier New" pitchFamily="34" charset="-122"/>
-                <a:cs typeface="Courier New" pitchFamily="34" charset="-120"/>
-              </a:rPr>
-              <a:t> Task</a:t>
-            </a:r>
-            <a:endParaRPr lang="en-US" sz="1000" dirty="0"/>
-          </a:p>
-          <a:p>
-            <a:pPr indent="0" marL="0">
-              <a:lnSpc>
-                <a:spcPct val="100000"/>
-              </a:lnSpc>
-              <a:buNone/>
-            </a:pPr>
-            <a:r>
-              <a:rPr lang="en-US" sz="1000" dirty="0">
-                <a:solidFill>
-                  <a:srgbClr val="CFE9FE"/>
-                </a:solidFill>
-                <a:latin typeface="Courier New" pitchFamily="34" charset="0"/>
-                <a:ea typeface="Courier New" pitchFamily="34" charset="-122"/>
-                <a:cs typeface="Courier New" pitchFamily="34" charset="-120"/>
-              </a:rPr>
-              <a:t>    </a:t>
-            </a:r>
-            <a:pPr indent="0" marL="0">
-              <a:lnSpc>
-                <a:spcPct val="100000"/>
-              </a:lnSpc>
-              <a:buNone/>
-            </a:pPr>
-            <a:r>
-              <a:rPr lang="en-US" sz="1000" b="1" dirty="0">
-                <a:solidFill>
-                  <a:srgbClr val="0B9DE0"/>
-                </a:solidFill>
-                <a:latin typeface="Courier New" pitchFamily="34" charset="0"/>
-                <a:ea typeface="Courier New" pitchFamily="34" charset="-122"/>
-                <a:cs typeface="Courier New" pitchFamily="34" charset="-120"/>
-              </a:rPr>
-              <a:t>WHERE</a:t>
-            </a:r>
-            <a:pPr indent="0" marL="0">
-              <a:lnSpc>
-                <a:spcPct val="100000"/>
-              </a:lnSpc>
-              <a:buNone/>
-            </a:pPr>
-            <a:r>
-              <a:rPr lang="en-US" sz="1000" dirty="0">
-                <a:solidFill>
-                  <a:srgbClr val="CFE9FE"/>
-                </a:solidFill>
-                <a:latin typeface="Courier New" pitchFamily="34" charset="0"/>
-                <a:ea typeface="Courier New" pitchFamily="34" charset="-122"/>
-                <a:cs typeface="Courier New" pitchFamily="34" charset="-120"/>
-              </a:rPr>
-              <a:t> What.Type = </a:t>
-            </a:r>
-            <a:pPr indent="0" marL="0">
-              <a:lnSpc>
-                <a:spcPct val="100000"/>
-              </a:lnSpc>
-              <a:buNone/>
-            </a:pPr>
-            <a:r>
-              <a:rPr lang="en-US" sz="1000" dirty="0">
-                <a:solidFill>
-                  <a:srgbClr val="FE9339"/>
-                </a:solidFill>
-                <a:latin typeface="Courier New" pitchFamily="34" charset="0"/>
-                <a:ea typeface="Courier New" pitchFamily="34" charset="-122"/>
-                <a:cs typeface="Courier New" pitchFamily="34" charset="-120"/>
-              </a:rPr>
-              <a:t>'Opportunity'</a:t>
-            </a:r>
-            <a:pPr indent="0" marL="0">
-              <a:lnSpc>
-                <a:spcPct val="100000"/>
-              </a:lnSpc>
-              <a:buNone/>
-            </a:pPr>
-            <a:r>
-              <a:rPr lang="en-US" sz="1000" dirty="0">
-                <a:solidFill>
-                  <a:srgbClr val="FE9339"/>
-                </a:solidFill>
-                <a:latin typeface="Courier New" pitchFamily="34" charset="0"/>
-                <a:ea typeface="Courier New" pitchFamily="34" charset="-122"/>
-                <a:cs typeface="Courier New" pitchFamily="34" charset="-120"/>
-              </a:rPr>
-              <a:t>""",</a:t>
-            </a:r>
-            <a:endParaRPr lang="en-US" sz="1000" dirty="0"/>
-          </a:p>
-          <a:p>
-            <a:pPr indent="0" marL="0">
-              <a:lnSpc>
-                <a:spcPct val="100000"/>
-              </a:lnSpc>
-              <a:buNone/>
-            </a:pPr>
-            <a:r>
-              <a:rPr lang="en-US" sz="1000" dirty="0">
-                <a:solidFill>
-                  <a:srgbClr val="CFE9FE"/>
-                </a:solidFill>
-                <a:latin typeface="Courier New" pitchFamily="34" charset="0"/>
-                <a:ea typeface="Courier New" pitchFamily="34" charset="-122"/>
-                <a:cs typeface="Courier New" pitchFamily="34" charset="-120"/>
-              </a:rPr>
-              <a:t>    </a:t>
-            </a:r>
-            <a:pPr indent="0" marL="0">
-              <a:lnSpc>
-                <a:spcPct val="100000"/>
-              </a:lnSpc>
-              <a:buNone/>
-            </a:pPr>
-            <a:r>
-              <a:rPr lang="en-US" sz="1000" dirty="0">
-                <a:solidFill>
-                  <a:srgbClr val="FE9339"/>
-                </a:solidFill>
-                <a:latin typeface="Courier New" pitchFamily="34" charset="0"/>
-                <a:ea typeface="Courier New" pitchFamily="34" charset="-122"/>
-                <a:cs typeface="Courier New" pitchFamily="34" charset="-120"/>
-              </a:rPr>
-              <a:t>"leads"</a:t>
-            </a:r>
-            <a:pPr indent="0" marL="0">
-              <a:lnSpc>
-                <a:spcPct val="100000"/>
-              </a:lnSpc>
-              <a:buNone/>
-            </a:pPr>
-            <a:r>
-              <a:rPr lang="en-US" sz="1000" dirty="0">
-                <a:solidFill>
-                  <a:srgbClr val="CFE9FE"/>
-                </a:solidFill>
-                <a:latin typeface="Courier New" pitchFamily="34" charset="0"/>
-                <a:ea typeface="Courier New" pitchFamily="34" charset="-122"/>
-                <a:cs typeface="Courier New" pitchFamily="34" charset="-120"/>
-              </a:rPr>
-              <a:t>: """</a:t>
-            </a:r>
-            <a:endParaRPr lang="en-US" sz="1000" dirty="0"/>
-          </a:p>
-          <a:p>
-            <a:pPr indent="0" marL="0">
-              <a:lnSpc>
-                <a:spcPct val="100000"/>
-              </a:lnSpc>
-              <a:buNone/>
-            </a:pPr>
-            <a:r>
-              <a:rPr lang="en-US" sz="1000" dirty="0">
-                <a:solidFill>
-                  <a:srgbClr val="CFE9FE"/>
-                </a:solidFill>
-                <a:latin typeface="Courier New" pitchFamily="34" charset="0"/>
-                <a:ea typeface="Courier New" pitchFamily="34" charset="-122"/>
-                <a:cs typeface="Courier New" pitchFamily="34" charset="-120"/>
-              </a:rPr>
-              <a:t>    </a:t>
-            </a:r>
-            <a:pPr indent="0" marL="0">
-              <a:lnSpc>
-                <a:spcPct val="100000"/>
-              </a:lnSpc>
-              <a:buNone/>
-            </a:pPr>
-            <a:r>
-              <a:rPr lang="en-US" sz="1000" b="1" dirty="0">
-                <a:solidFill>
-                  <a:srgbClr val="0B9DE0"/>
-                </a:solidFill>
-                <a:latin typeface="Courier New" pitchFamily="34" charset="0"/>
-                <a:ea typeface="Courier New" pitchFamily="34" charset="-122"/>
-                <a:cs typeface="Courier New" pitchFamily="34" charset="-120"/>
-              </a:rPr>
-              <a:t>SELECT</a:t>
-            </a:r>
-            <a:pPr indent="0" marL="0">
-              <a:lnSpc>
-                <a:spcPct val="100000"/>
-              </a:lnSpc>
-              <a:buNone/>
-            </a:pPr>
-            <a:r>
-              <a:rPr lang="en-US" sz="1000" dirty="0">
-                <a:solidFill>
-                  <a:srgbClr val="CFE9FE"/>
-                </a:solidFill>
-                <a:latin typeface="Courier New" pitchFamily="34" charset="0"/>
-                <a:ea typeface="Courier New" pitchFamily="34" charset="-122"/>
-                <a:cs typeface="Courier New" pitchFamily="34" charset="-120"/>
-              </a:rPr>
-              <a:t> Id, CreatedDate, ConvertedDate, ConvertedOpportunityId,</a:t>
-            </a:r>
-            <a:endParaRPr lang="en-US" sz="1000" dirty="0"/>
-          </a:p>
-          <a:p>
-            <a:pPr indent="0" marL="0">
-              <a:lnSpc>
-                <a:spcPct val="100000"/>
-              </a:lnSpc>
-              <a:buNone/>
-            </a:pPr>
-            <a:r>
-              <a:rPr lang="en-US" sz="1000" dirty="0">
-                <a:solidFill>
-                  <a:srgbClr val="CFE9FE"/>
-                </a:solidFill>
-                <a:latin typeface="Courier New" pitchFamily="34" charset="0"/>
-                <a:ea typeface="Courier New" pitchFamily="34" charset="-122"/>
-                <a:cs typeface="Courier New" pitchFamily="34" charset="-120"/>
-              </a:rPr>
-              <a:t>           OwnerId, Owner.Name</a:t>
-            </a:r>
-            <a:endParaRPr lang="en-US" sz="1000" dirty="0"/>
-          </a:p>
-          <a:p>
-            <a:pPr indent="0" marL="0">
-              <a:lnSpc>
-                <a:spcPct val="100000"/>
-              </a:lnSpc>
-              <a:buNone/>
-            </a:pPr>
-            <a:r>
-              <a:rPr lang="en-US" sz="1000" dirty="0">
-                <a:solidFill>
-                  <a:srgbClr val="CFE9FE"/>
-                </a:solidFill>
-                <a:latin typeface="Courier New" pitchFamily="34" charset="0"/>
-                <a:ea typeface="Courier New" pitchFamily="34" charset="-122"/>
-                <a:cs typeface="Courier New" pitchFamily="34" charset="-120"/>
-              </a:rPr>
-              <a:t>    </a:t>
-            </a:r>
-            <a:pPr indent="0" marL="0">
-              <a:lnSpc>
-                <a:spcPct val="100000"/>
-              </a:lnSpc>
-              <a:buNone/>
-            </a:pPr>
-            <a:r>
-              <a:rPr lang="en-US" sz="1000" b="1" dirty="0">
-                <a:solidFill>
-                  <a:srgbClr val="0B9DE0"/>
-                </a:solidFill>
-                <a:latin typeface="Courier New" pitchFamily="34" charset="0"/>
-                <a:ea typeface="Courier New" pitchFamily="34" charset="-122"/>
-                <a:cs typeface="Courier New" pitchFamily="34" charset="-120"/>
-              </a:rPr>
-              <a:t>FROM</a:t>
-            </a:r>
-            <a:pPr indent="0" marL="0">
-              <a:lnSpc>
-                <a:spcPct val="100000"/>
-              </a:lnSpc>
-              <a:buNone/>
-            </a:pPr>
-            <a:r>
-              <a:rPr lang="en-US" sz="1000" dirty="0">
-                <a:solidFill>
-                  <a:srgbClr val="CFE9FE"/>
-                </a:solidFill>
-                <a:latin typeface="Courier New" pitchFamily="34" charset="0"/>
-                <a:ea typeface="Courier New" pitchFamily="34" charset="-122"/>
-                <a:cs typeface="Courier New" pitchFamily="34" charset="-120"/>
-              </a:rPr>
-              <a:t> Lead</a:t>
-            </a:r>
-            <a:endParaRPr lang="en-US" sz="1000" dirty="0"/>
-          </a:p>
-          <a:p>
-            <a:pPr indent="0" marL="0">
-              <a:lnSpc>
-                <a:spcPct val="100000"/>
-              </a:lnSpc>
-              <a:buNone/>
-            </a:pPr>
-            <a:r>
-              <a:rPr lang="en-US" sz="1000" dirty="0">
-                <a:solidFill>
-                  <a:srgbClr val="CFE9FE"/>
-                </a:solidFill>
-                <a:latin typeface="Courier New" pitchFamily="34" charset="0"/>
-                <a:ea typeface="Courier New" pitchFamily="34" charset="-122"/>
-                <a:cs typeface="Courier New" pitchFamily="34" charset="-120"/>
-              </a:rPr>
-              <a:t>    </a:t>
-            </a:r>
-            <a:pPr indent="0" marL="0">
-              <a:lnSpc>
-                <a:spcPct val="100000"/>
-              </a:lnSpc>
-              <a:buNone/>
-            </a:pPr>
-            <a:r>
-              <a:rPr lang="en-US" sz="1000" b="1" dirty="0">
-                <a:solidFill>
-                  <a:srgbClr val="0B9DE0"/>
-                </a:solidFill>
-                <a:latin typeface="Courier New" pitchFamily="34" charset="0"/>
-                <a:ea typeface="Courier New" pitchFamily="34" charset="-122"/>
-                <a:cs typeface="Courier New" pitchFamily="34" charset="-120"/>
-              </a:rPr>
-              <a:t>WHERE</a:t>
-            </a:r>
-            <a:pPr indent="0" marL="0">
-              <a:lnSpc>
-                <a:spcPct val="100000"/>
-              </a:lnSpc>
-              <a:buNone/>
-            </a:pPr>
-            <a:r>
-              <a:rPr lang="en-US" sz="1000" dirty="0">
-                <a:solidFill>
-                  <a:srgbClr val="CFE9FE"/>
-                </a:solidFill>
-                <a:latin typeface="Courier New" pitchFamily="34" charset="0"/>
-                <a:ea typeface="Courier New" pitchFamily="34" charset="-122"/>
-                <a:cs typeface="Courier New" pitchFamily="34" charset="-120"/>
-              </a:rPr>
-              <a:t> IsConverted = true</a:t>
-            </a:r>
-            <a:endParaRPr lang="en-US" sz="1000" dirty="0"/>
-          </a:p>
-          <a:p>
-            <a:pPr indent="0" marL="0">
-              <a:lnSpc>
-                <a:spcPct val="100000"/>
-              </a:lnSpc>
-              <a:buNone/>
-            </a:pPr>
-            <a:r>
-              <a:rPr lang="en-US" sz="1000" dirty="0">
-                <a:solidFill>
-                  <a:srgbClr val="CFE9FE"/>
-                </a:solidFill>
-                <a:latin typeface="Courier New" pitchFamily="34" charset="0"/>
-                <a:ea typeface="Courier New" pitchFamily="34" charset="-122"/>
-                <a:cs typeface="Courier New" pitchFamily="34" charset="-120"/>
-              </a:rPr>
-              <a:t>      </a:t>
-            </a:r>
-            <a:pPr indent="0" marL="0">
-              <a:lnSpc>
-                <a:spcPct val="100000"/>
-              </a:lnSpc>
-              <a:buNone/>
-            </a:pPr>
-            <a:r>
-              <a:rPr lang="en-US" sz="1000" b="1" dirty="0">
-                <a:solidFill>
-                  <a:srgbClr val="0B9DE0"/>
-                </a:solidFill>
-                <a:latin typeface="Courier New" pitchFamily="34" charset="0"/>
-                <a:ea typeface="Courier New" pitchFamily="34" charset="-122"/>
-                <a:cs typeface="Courier New" pitchFamily="34" charset="-120"/>
-              </a:rPr>
-              <a:t>AND</a:t>
-            </a:r>
-            <a:pPr indent="0" marL="0">
-              <a:lnSpc>
-                <a:spcPct val="100000"/>
-              </a:lnSpc>
-              <a:buNone/>
-            </a:pPr>
-            <a:r>
-              <a:rPr lang="en-US" sz="1000" dirty="0">
-                <a:solidFill>
-                  <a:srgbClr val="CFE9FE"/>
-                </a:solidFill>
-                <a:latin typeface="Courier New" pitchFamily="34" charset="0"/>
-                <a:ea typeface="Courier New" pitchFamily="34" charset="-122"/>
-                <a:cs typeface="Courier New" pitchFamily="34" charset="-120"/>
-              </a:rPr>
-              <a:t> ConvertedOpportunityId != null""",</a:t>
-            </a:r>
-            <a:endParaRPr lang="en-US" sz="1000" dirty="0"/>
-          </a:p>
-          <a:p>
-            <a:pPr indent="0" marL="0">
-              <a:lnSpc>
-                <a:spcPct val="100000"/>
-              </a:lnSpc>
-              <a:buNone/>
-            </a:pPr>
-            <a:r>
-              <a:rPr lang="en-US" sz="1000" dirty="0">
-                <a:solidFill>
-                  <a:srgbClr val="CFE9FE"/>
-                </a:solidFill>
-                <a:latin typeface="Courier New" pitchFamily="34" charset="0"/>
-                <a:ea typeface="Courier New" pitchFamily="34" charset="-122"/>
-                <a:cs typeface="Courier New" pitchFamily="34" charset="-120"/>
-              </a:rPr>
-              <a:t>}</a:t>
-            </a:r>
-            <a:endParaRPr lang="en-US" sz="1000" dirty="0"/>
-          </a:p>
-        </p:txBody>
-      </p:sp>
-      <p:sp>
-        <p:nvSpPr>
-          <p:cNvPr id="12" name="Code caption"/>
-          <p:cNvSpPr txBox="1"/>
-          <p:nvPr/>
-        </p:nvSpPr>
-        <p:spPr>
-          <a:xfrm>
-            <a:off x="5897880" y="5669280"/>
-            <a:ext cx="5715000" cy="685800"/>
-          </a:xfrm>
-          <a:prstGeom prst="rect">
-            <a:avLst/>
-          </a:prstGeom>
-          <a:noFill/>
-          <a:ln/>
-        </p:spPr>
-        <p:txBody>
-          <a:bodyPr wrap="square" lIns="0" tIns="0" rIns="0" bIns="0" rtlCol="0" anchor="t"/>
-          <a:lstStyle/>
-          <a:p>
-            <a:pPr indent="0" marL="0">
-              <a:buNone/>
-            </a:pPr>
-            <a:r>
-              <a:rPr lang="en-US" sz="1400" b="1" dirty="0">
-                <a:solidFill>
-                  <a:schemeClr val="tx2"/>
-                </a:solidFill>
-              </a:rPr>
-              <a:t>extract.py: </a:t>
-            </a:r>
-            <a:pPr indent="0" marL="0">
-              <a:buNone/>
-            </a:pPr>
-            <a:r>
-              <a:rPr lang="en-US" sz="1400" dirty="0">
-                <a:solidFill>
-                  <a:schemeClr val="tx2"/>
-                </a:solidFill>
-              </a:rPr>
-              <a:t>four SOQL queries over the REST API, signed by the Salesforce CLI session. Opportunity Id becomes the case ID.</a:t>
-            </a:r>
-            <a:endParaRPr lang="en-US" sz="1400" dirty="0"/>
-          </a:p>
-        </p:txBody>
-      </p:sp>
-      <p:sp>
-        <p:nvSpPr>
-          <p:cNvPr id="25" name="Slide Number Placeholder 0"/>
-          <p:cNvSpPr>
-            <a:spLocks noGrp="1"/>
-          </p:cNvSpPr>
-          <p:nvPr>
-            <p:ph type="sldNum" sz="quarter" idx="4294967295"/>
-          </p:nvPr>
-        </p:nvSpPr>
-        <p:spPr>
-          <a:xfrm>
-            <a:off x="11155680" y="6400800"/>
-            <a:ext cx="457200" cy="274320"/>
-          </a:xfrm>
-          <a:prstGeom prst="rect">
-            <a:avLst/>
-          </a:prstGeom>
-          <a:extLst>
-            <a:ext uri="{C572A759-6A51-4108-AA02-DFA0A04FC94B}">
-              <ma14:wrappingTextBoxFlag xmlns:ma14="http://schemas.microsoft.com/office/mac/drawingml/2011/main" val="0"/>
-            </a:ext>
-          </a:extLst>
-        </p:spPr>
-        <p:txBody>
-          <a:bodyPr/>
-          <a:lstStyle>
-            <a:lvl1pPr>
-              <a:defRPr sz="1000">
-                <a:solidFill>
-                  <a:schemeClr val="accent6"/>
-                </a:solidFill>
-              </a:defRPr>
-            </a:lvl1pPr>
-          </a:lstStyle>
-          <a:p>
-            <a:pPr algn="r"/>
-            <a:fld id="{F7021451-1387-4CA6-816F-3879F97B5CBC}" type="slidenum">
-              <a:rPr b="0" lang="en-US"/>
-              <a:t>6</a:t>
-            </a:fld>
-            <a:endParaRPr lang="en-US"/>
-          </a:p>
-        </p:txBody>
-      </p:sp>
-    </p:spTree>
-  </p:cSld>
-  <p:clrMapOvr>
-    <a:masterClrMapping/>
-  </p:clrMapOvr>
-</p:sld>
-</file>
-
-<file path=ppt/slides/slide7.xml><?xml version="1.0" encoding="utf-8"?>
-<p:sld xmlns:a="http://schemas.openxmlformats.org/drawingml/2006/main" xmlns:r="http://schemas.openxmlformats.org/officeDocument/2006/relationships" xmlns:p="http://schemas.openxmlformats.org/presentationml/2006/main">
-  <p:cSld name="Slide 7">
-    <p:spTree>
-      <p:nvGrpSpPr>
-        <p:cNvPr id="1" name=""/>
-        <p:cNvGrpSpPr/>
-        <p:nvPr/>
-      </p:nvGrpSpPr>
-      <p:grpSpPr>
-        <a:xfrm>
-          <a:off x="0" y="0"/>
-          <a:ext cx="0" cy="0"/>
-          <a:chOff x="0" y="0"/>
-          <a:chExt cx="0" cy="0"/>
-        </a:xfrm>
-      </p:grpSpPr>
-      <p:sp>
-        <p:nvSpPr>
-          <p:cNvPr id="2" name="Text 0"/>
-          <p:cNvSpPr/>
-          <p:nvPr>
-            <p:ph idx="100" type="title" hasCustomPrompt="1"/>
-          </p:nvPr>
-        </p:nvSpPr>
-        <p:spPr>
-          <a:xfrm>
-            <a:off x="548640" y="320040"/>
-            <a:ext cx="11064240" cy="822960"/>
-          </a:xfrm>
-          <a:prstGeom prst="rect">
-            <a:avLst/>
-          </a:prstGeom>
-          <a:noFill/>
-          <a:ln/>
-        </p:spPr>
-        <p:txBody>
-          <a:bodyPr wrap="square" lIns="0" tIns="0" rIns="0" bIns="0" rtlCol="0" anchor="ctr"/>
-          <a:lstStyle/>
-          <a:p>
-            <a:pPr algn="l" indent="0" marL="0">
-              <a:buNone/>
-            </a:pPr>
-            <a:r>
-              <a:rPr lang="en-US" sz="3000" b="1" dirty="0">
-                <a:solidFill>
-                  <a:schemeClr val="tx2"/>
-                </a:solidFill>
-              </a:rPr>
-              <a:t>Everything is live and open to inspect</a:t>
-            </a:r>
-            <a:endParaRPr lang="en-US" sz="3000" dirty="0"/>
-          </a:p>
-        </p:txBody>
-      </p:sp>
-      <p:sp>
-        <p:nvSpPr>
-          <p:cNvPr id="3" name="Proof 1"/>
-          <p:cNvSpPr/>
-          <p:nvPr/>
-        </p:nvSpPr>
-        <p:spPr>
-          <a:xfrm>
-            <a:off x="548640" y="1417320"/>
-            <a:ext cx="6035040" cy="960120"/>
-          </a:xfrm>
-          <a:prstGeom prst="roundRect">
-            <a:avLst>
-              <a:gd name="adj" fmla="val 11429"/>
-            </a:avLst>
-          </a:prstGeom>
-          <a:solidFill>
-            <a:schemeClr val="bg2"/>
-          </a:solidFill>
-          <a:ln/>
-        </p:spPr>
-      </p:sp>
-      <p:sp>
-        <p:nvSpPr>
-          <p:cNvPr id="4" name="Proof 1 marker"/>
-          <p:cNvSpPr/>
-          <p:nvPr/>
-        </p:nvSpPr>
-        <p:spPr>
-          <a:xfrm>
-            <a:off x="749808" y="1691640"/>
-            <a:ext cx="411480" cy="411480"/>
-          </a:xfrm>
-          <a:prstGeom prst="ellipse">
-            <a:avLst/>
-          </a:prstGeom>
-          <a:solidFill>
-            <a:schemeClr val="accent1"/>
-          </a:solidFill>
-          <a:ln/>
-        </p:spPr>
-      </p:sp>
-      <p:sp>
-        <p:nvSpPr>
-          <p:cNvPr id="5" name="Proof 1 glyph"/>
-          <p:cNvSpPr txBox="1"/>
-          <p:nvPr/>
-        </p:nvSpPr>
-        <p:spPr>
-          <a:xfrm>
-            <a:off x="749808" y="1691640"/>
-            <a:ext cx="411480" cy="411480"/>
-          </a:xfrm>
-          <a:prstGeom prst="rect">
-            <a:avLst/>
-          </a:prstGeom>
-          <a:noFill/>
-          <a:ln/>
-        </p:spPr>
-        <p:txBody>
-          <a:bodyPr wrap="square" lIns="0" tIns="0" rIns="0" bIns="0" rtlCol="0" anchor="ctr"/>
-          <a:lstStyle/>
-          <a:p>
-            <a:pPr algn="ctr" indent="0" marL="0">
-              <a:buNone/>
-            </a:pPr>
-            <a:r>
-              <a:rPr lang="en-US" sz="1600" b="1" dirty="0">
-                <a:solidFill>
-                  <a:schemeClr val="bg1"/>
-                </a:solidFill>
-              </a:rPr>
-              <a:t>→</a:t>
-            </a:r>
-            <a:endParaRPr lang="en-US" sz="1600" dirty="0"/>
-          </a:p>
-        </p:txBody>
-      </p:sp>
-      <p:sp>
-        <p:nvSpPr>
-          <p:cNvPr id="6" name="Proof 1 label"/>
-          <p:cNvSpPr txBox="1"/>
-          <p:nvPr/>
-        </p:nvSpPr>
-        <p:spPr>
-          <a:xfrm>
-            <a:off x="1325880" y="1545336"/>
-            <a:ext cx="5120640" cy="347472"/>
-          </a:xfrm>
-          <a:prstGeom prst="rect">
-            <a:avLst/>
-          </a:prstGeom>
-          <a:noFill/>
-          <a:ln/>
-        </p:spPr>
-        <p:txBody>
-          <a:bodyPr wrap="square" lIns="0" tIns="0" rIns="0" bIns="0" rtlCol="0" anchor="t"/>
-          <a:lstStyle/>
-          <a:p>
-            <a:pPr indent="0" marL="0">
-              <a:buNone/>
-            </a:pPr>
-            <a:r>
-              <a:rPr lang="en-US" sz="1600" b="1" dirty="0">
-                <a:solidFill>
-                  <a:schemeClr val="tx2"/>
-                </a:solidFill>
-              </a:rPr>
-              <a:t>Process dashboard</a:t>
-            </a:r>
-            <a:endParaRPr lang="en-US" sz="1600" dirty="0"/>
-          </a:p>
-        </p:txBody>
-      </p:sp>
-      <p:sp>
-        <p:nvSpPr>
-          <p:cNvPr id="7" name="Proof 1 link"/>
-          <p:cNvSpPr txBox="1"/>
-          <p:nvPr/>
-        </p:nvSpPr>
-        <p:spPr>
-          <a:xfrm>
-            <a:off x="1325880" y="1911096"/>
-            <a:ext cx="5120640" cy="347472"/>
-          </a:xfrm>
-          <a:prstGeom prst="rect">
-            <a:avLst/>
-          </a:prstGeom>
-          <a:noFill/>
-          <a:ln/>
-        </p:spPr>
-        <p:txBody>
-          <a:bodyPr wrap="square" lIns="0" tIns="0" rIns="0" bIns="0" rtlCol="0" anchor="t"/>
-          <a:lstStyle/>
-          <a:p>
-            <a:pPr indent="0" marL="0">
-              <a:buNone/>
-            </a:pPr>
-            <a:r>
-              <a:rPr lang="en-US" sz="1400" u="sng" dirty="0">
-                <a:solidFill>
-                  <a:schemeClr val="accent6"/>
-                </a:solidFill>
-                <a:hlinkClick r:id="rId1" invalidUrl="" action="" tgtFrame="" tooltip="" history="1" highlightClick="0" endSnd="0">
-                  <a:extLst>
-                    <a:ext uri="{A12FA001-AC4F-418D-AE19-62706E023703}">
-                      <ahyp:hlinkClr xmlns:ahyp="http://schemas.microsoft.com/office/drawing/2018/hyperlinkcolor" val="tx"/>
-                    </a:ext>
-                  </a:extLst>
-                </a:hlinkClick>
-              </a:rPr>
-              <a:t>salesforce-process-intelligence.vercel.app</a:t>
-            </a:r>
-            <a:endParaRPr lang="en-US" sz="1400" dirty="0"/>
-          </a:p>
-        </p:txBody>
-      </p:sp>
-      <p:sp>
-        <p:nvSpPr>
-          <p:cNvPr id="8" name="Proof 2"/>
-          <p:cNvSpPr/>
-          <p:nvPr/>
-        </p:nvSpPr>
-        <p:spPr>
-          <a:xfrm>
-            <a:off x="548640" y="2532888"/>
-            <a:ext cx="6035040" cy="960120"/>
-          </a:xfrm>
-          <a:prstGeom prst="roundRect">
-            <a:avLst>
-              <a:gd name="adj" fmla="val 11429"/>
-            </a:avLst>
-          </a:prstGeom>
-          <a:solidFill>
-            <a:schemeClr val="bg2"/>
-          </a:solidFill>
-          <a:ln/>
-        </p:spPr>
-      </p:sp>
-      <p:sp>
-        <p:nvSpPr>
-          <p:cNvPr id="9" name="Proof 2 marker"/>
-          <p:cNvSpPr/>
-          <p:nvPr/>
-        </p:nvSpPr>
-        <p:spPr>
-          <a:xfrm>
-            <a:off x="749808" y="2807208"/>
-            <a:ext cx="411480" cy="411480"/>
-          </a:xfrm>
-          <a:prstGeom prst="ellipse">
-            <a:avLst/>
-          </a:prstGeom>
-          <a:solidFill>
-            <a:schemeClr val="accent1"/>
-          </a:solidFill>
-          <a:ln/>
-        </p:spPr>
-      </p:sp>
-      <p:sp>
-        <p:nvSpPr>
-          <p:cNvPr id="10" name="Proof 2 glyph"/>
-          <p:cNvSpPr txBox="1"/>
-          <p:nvPr/>
-        </p:nvSpPr>
-        <p:spPr>
-          <a:xfrm>
-            <a:off x="749808" y="2807208"/>
-            <a:ext cx="411480" cy="411480"/>
-          </a:xfrm>
-          <a:prstGeom prst="rect">
-            <a:avLst/>
-          </a:prstGeom>
-          <a:noFill/>
-          <a:ln/>
-        </p:spPr>
-        <p:txBody>
-          <a:bodyPr wrap="square" lIns="0" tIns="0" rIns="0" bIns="0" rtlCol="0" anchor="ctr"/>
-          <a:lstStyle/>
-          <a:p>
-            <a:pPr algn="ctr" indent="0" marL="0">
-              <a:buNone/>
-            </a:pPr>
-            <a:r>
-              <a:rPr lang="en-US" sz="1600" b="1" dirty="0">
-                <a:solidFill>
-                  <a:schemeClr val="bg1"/>
-                </a:solidFill>
-              </a:rPr>
-              <a:t>→</a:t>
-            </a:r>
-            <a:endParaRPr lang="en-US" sz="1600" dirty="0"/>
-          </a:p>
-        </p:txBody>
-      </p:sp>
-      <p:sp>
-        <p:nvSpPr>
-          <p:cNvPr id="11" name="Proof 2 label"/>
-          <p:cNvSpPr txBox="1"/>
-          <p:nvPr/>
-        </p:nvSpPr>
-        <p:spPr>
-          <a:xfrm>
-            <a:off x="1325880" y="2660904"/>
-            <a:ext cx="5120640" cy="347472"/>
-          </a:xfrm>
-          <a:prstGeom prst="rect">
-            <a:avLst/>
-          </a:prstGeom>
-          <a:noFill/>
-          <a:ln/>
-        </p:spPr>
-        <p:txBody>
-          <a:bodyPr wrap="square" lIns="0" tIns="0" rIns="0" bIns="0" rtlCol="0" anchor="t"/>
-          <a:lstStyle/>
-          <a:p>
-            <a:pPr indent="0" marL="0">
-              <a:buNone/>
-            </a:pPr>
-            <a:r>
-              <a:rPr lang="en-US" sz="1600" b="1" dirty="0">
-                <a:solidFill>
-                  <a:schemeClr val="tx2"/>
-                </a:solidFill>
-              </a:rPr>
-              <a:t>Value case one-pager</a:t>
-            </a:r>
-            <a:endParaRPr lang="en-US" sz="1600" dirty="0"/>
-          </a:p>
-        </p:txBody>
-      </p:sp>
-      <p:sp>
-        <p:nvSpPr>
-          <p:cNvPr id="12" name="Proof 2 link"/>
-          <p:cNvSpPr txBox="1"/>
-          <p:nvPr/>
-        </p:nvSpPr>
-        <p:spPr>
-          <a:xfrm>
-            <a:off x="1325880" y="3026664"/>
-            <a:ext cx="5120640" cy="347472"/>
-          </a:xfrm>
-          <a:prstGeom prst="rect">
-            <a:avLst/>
-          </a:prstGeom>
-          <a:noFill/>
-          <a:ln/>
-        </p:spPr>
-        <p:txBody>
-          <a:bodyPr wrap="square" lIns="0" tIns="0" rIns="0" bIns="0" rtlCol="0" anchor="t"/>
-          <a:lstStyle/>
-          <a:p>
-            <a:pPr indent="0" marL="0">
-              <a:buNone/>
-            </a:pPr>
-            <a:r>
-              <a:rPr lang="en-US" sz="1400" u="sng" dirty="0">
-                <a:solidFill>
-                  <a:schemeClr val="accent6"/>
-                </a:solidFill>
-                <a:hlinkClick r:id="rId2" invalidUrl="" action="" tgtFrame="" tooltip="" history="1" highlightClick="0" endSnd="0">
-                  <a:extLst>
-                    <a:ext uri="{A12FA001-AC4F-418D-AE19-62706E023703}">
-                      <ahyp:hlinkClr xmlns:ahyp="http://schemas.microsoft.com/office/drawing/2018/hyperlinkcolor" val="tx"/>
-                    </a:ext>
-                  </a:extLst>
-                </a:hlinkClick>
-              </a:rPr>
-              <a:t>salesforce-process-intelligence.vercel.app/value-case.html</a:t>
-            </a:r>
-            <a:endParaRPr lang="en-US" sz="1400" dirty="0"/>
-          </a:p>
-        </p:txBody>
-      </p:sp>
-      <p:sp>
-        <p:nvSpPr>
-          <p:cNvPr id="13" name="Proof 3"/>
-          <p:cNvSpPr/>
-          <p:nvPr/>
-        </p:nvSpPr>
-        <p:spPr>
-          <a:xfrm>
-            <a:off x="548640" y="3648456"/>
-            <a:ext cx="6035040" cy="960120"/>
-          </a:xfrm>
-          <a:prstGeom prst="roundRect">
-            <a:avLst>
-              <a:gd name="adj" fmla="val 11429"/>
-            </a:avLst>
-          </a:prstGeom>
-          <a:solidFill>
-            <a:schemeClr val="bg2"/>
-          </a:solidFill>
-          <a:ln/>
-        </p:spPr>
-      </p:sp>
-      <p:sp>
-        <p:nvSpPr>
-          <p:cNvPr id="14" name="Proof 3 marker"/>
-          <p:cNvSpPr/>
-          <p:nvPr/>
-        </p:nvSpPr>
-        <p:spPr>
-          <a:xfrm>
-            <a:off x="749808" y="3922776"/>
-            <a:ext cx="411480" cy="411480"/>
-          </a:xfrm>
-          <a:prstGeom prst="ellipse">
-            <a:avLst/>
-          </a:prstGeom>
-          <a:solidFill>
-            <a:schemeClr val="accent1"/>
-          </a:solidFill>
-          <a:ln/>
-        </p:spPr>
-      </p:sp>
-      <p:sp>
-        <p:nvSpPr>
-          <p:cNvPr id="15" name="Proof 3 glyph"/>
-          <p:cNvSpPr txBox="1"/>
-          <p:nvPr/>
-        </p:nvSpPr>
-        <p:spPr>
-          <a:xfrm>
-            <a:off x="749808" y="3922776"/>
-            <a:ext cx="411480" cy="411480"/>
-          </a:xfrm>
-          <a:prstGeom prst="rect">
-            <a:avLst/>
-          </a:prstGeom>
-          <a:noFill/>
-          <a:ln/>
-        </p:spPr>
-        <p:txBody>
-          <a:bodyPr wrap="square" lIns="0" tIns="0" rIns="0" bIns="0" rtlCol="0" anchor="ctr"/>
-          <a:lstStyle/>
-          <a:p>
-            <a:pPr algn="ctr" indent="0" marL="0">
-              <a:buNone/>
-            </a:pPr>
-            <a:r>
-              <a:rPr lang="en-US" sz="1600" b="1" dirty="0">
-                <a:solidFill>
-                  <a:schemeClr val="bg1"/>
-                </a:solidFill>
-              </a:rPr>
-              <a:t>→</a:t>
-            </a:r>
-            <a:endParaRPr lang="en-US" sz="1600" dirty="0"/>
-          </a:p>
-        </p:txBody>
-      </p:sp>
-      <p:sp>
-        <p:nvSpPr>
-          <p:cNvPr id="16" name="Proof 3 label"/>
-          <p:cNvSpPr txBox="1"/>
-          <p:nvPr/>
-        </p:nvSpPr>
-        <p:spPr>
-          <a:xfrm>
-            <a:off x="1325880" y="3776472"/>
-            <a:ext cx="5120640" cy="347472"/>
-          </a:xfrm>
-          <a:prstGeom prst="rect">
-            <a:avLst/>
-          </a:prstGeom>
-          <a:noFill/>
-          <a:ln/>
-        </p:spPr>
-        <p:txBody>
-          <a:bodyPr wrap="square" lIns="0" tIns="0" rIns="0" bIns="0" rtlCol="0" anchor="t"/>
-          <a:lstStyle/>
-          <a:p>
-            <a:pPr indent="0" marL="0">
-              <a:buNone/>
-            </a:pPr>
-            <a:r>
-              <a:rPr lang="en-US" sz="1600" b="1" dirty="0">
-                <a:solidFill>
-                  <a:schemeClr val="tx2"/>
-                </a:solidFill>
-              </a:rPr>
-              <a:t>Live Salesforce extract</a:t>
-            </a:r>
-            <a:endParaRPr lang="en-US" sz="1600" dirty="0"/>
-          </a:p>
-        </p:txBody>
-      </p:sp>
-      <p:sp>
-        <p:nvSpPr>
-          <p:cNvPr id="17" name="Proof 3 link"/>
-          <p:cNvSpPr txBox="1"/>
-          <p:nvPr/>
-        </p:nvSpPr>
-        <p:spPr>
-          <a:xfrm>
-            <a:off x="1325880" y="4142232"/>
-            <a:ext cx="5120640" cy="347472"/>
-          </a:xfrm>
-          <a:prstGeom prst="rect">
-            <a:avLst/>
-          </a:prstGeom>
-          <a:noFill/>
-          <a:ln/>
-        </p:spPr>
-        <p:txBody>
-          <a:bodyPr wrap="square" lIns="0" tIns="0" rIns="0" bIns="0" rtlCol="0" anchor="t"/>
-          <a:lstStyle/>
-          <a:p>
-            <a:pPr indent="0" marL="0">
-              <a:buNone/>
-            </a:pPr>
-            <a:r>
-              <a:rPr lang="en-US" sz="1400" u="sng" dirty="0">
-                <a:solidFill>
-                  <a:schemeClr val="accent6"/>
-                </a:solidFill>
-                <a:hlinkClick r:id="rId3" invalidUrl="" action="" tgtFrame="" tooltip="" history="1" highlightClick="0" endSnd="0">
-                  <a:extLst>
-                    <a:ext uri="{A12FA001-AC4F-418D-AE19-62706E023703}">
-                      <ahyp:hlinkClr xmlns:ahyp="http://schemas.microsoft.com/office/drawing/2018/hyperlinkcolor" val="tx"/>
-                    </a:ext>
-                  </a:extLst>
-                </a:hlinkClick>
-              </a:rPr>
-              <a:t>salesforce-process-intelligence.vercel.app/live.html</a:t>
-            </a:r>
-            <a:endParaRPr lang="en-US" sz="1400" dirty="0"/>
-          </a:p>
-        </p:txBody>
-      </p:sp>
-      <p:sp>
-        <p:nvSpPr>
-          <p:cNvPr id="18" name="Proof 4"/>
-          <p:cNvSpPr/>
-          <p:nvPr/>
-        </p:nvSpPr>
-        <p:spPr>
-          <a:xfrm>
-            <a:off x="548640" y="4764024"/>
-            <a:ext cx="6035040" cy="960120"/>
-          </a:xfrm>
-          <a:prstGeom prst="roundRect">
-            <a:avLst>
-              <a:gd name="adj" fmla="val 11429"/>
-            </a:avLst>
-          </a:prstGeom>
-          <a:solidFill>
-            <a:schemeClr val="bg2"/>
-          </a:solidFill>
-          <a:ln/>
-        </p:spPr>
-      </p:sp>
-      <p:sp>
-        <p:nvSpPr>
-          <p:cNvPr id="19" name="Proof 4 marker"/>
-          <p:cNvSpPr/>
-          <p:nvPr/>
-        </p:nvSpPr>
-        <p:spPr>
-          <a:xfrm>
-            <a:off x="749808" y="5038344"/>
-            <a:ext cx="411480" cy="411480"/>
-          </a:xfrm>
-          <a:prstGeom prst="ellipse">
-            <a:avLst/>
-          </a:prstGeom>
-          <a:solidFill>
-            <a:schemeClr val="accent1"/>
-          </a:solidFill>
-          <a:ln/>
-        </p:spPr>
-      </p:sp>
-      <p:sp>
-        <p:nvSpPr>
-          <p:cNvPr id="20" name="Proof 4 glyph"/>
-          <p:cNvSpPr txBox="1"/>
-          <p:nvPr/>
-        </p:nvSpPr>
-        <p:spPr>
-          <a:xfrm>
-            <a:off x="749808" y="5038344"/>
-            <a:ext cx="411480" cy="411480"/>
-          </a:xfrm>
-          <a:prstGeom prst="rect">
-            <a:avLst/>
-          </a:prstGeom>
-          <a:noFill/>
-          <a:ln/>
-        </p:spPr>
-        <p:txBody>
-          <a:bodyPr wrap="square" lIns="0" tIns="0" rIns="0" bIns="0" rtlCol="0" anchor="ctr"/>
-          <a:lstStyle/>
-          <a:p>
-            <a:pPr algn="ctr" indent="0" marL="0">
-              <a:buNone/>
-            </a:pPr>
-            <a:r>
-              <a:rPr lang="en-US" sz="1600" b="1" dirty="0">
-                <a:solidFill>
-                  <a:schemeClr val="bg1"/>
-                </a:solidFill>
-              </a:rPr>
-              <a:t>→</a:t>
-            </a:r>
-            <a:endParaRPr lang="en-US" sz="1600" dirty="0"/>
-          </a:p>
-        </p:txBody>
-      </p:sp>
-      <p:sp>
-        <p:nvSpPr>
-          <p:cNvPr id="21" name="Proof 4 label"/>
-          <p:cNvSpPr txBox="1"/>
-          <p:nvPr/>
-        </p:nvSpPr>
-        <p:spPr>
-          <a:xfrm>
-            <a:off x="1325880" y="4892040"/>
-            <a:ext cx="5120640" cy="347472"/>
-          </a:xfrm>
-          <a:prstGeom prst="rect">
-            <a:avLst/>
-          </a:prstGeom>
-          <a:noFill/>
-          <a:ln/>
-        </p:spPr>
-        <p:txBody>
-          <a:bodyPr wrap="square" lIns="0" tIns="0" rIns="0" bIns="0" rtlCol="0" anchor="t"/>
-          <a:lstStyle/>
-          <a:p>
-            <a:pPr indent="0" marL="0">
-              <a:buNone/>
-            </a:pPr>
-            <a:r>
-              <a:rPr lang="en-US" sz="1600" b="1" dirty="0">
-                <a:solidFill>
-                  <a:schemeClr val="tx2"/>
-                </a:solidFill>
-              </a:rPr>
-              <a:t>Source code and event logs</a:t>
-            </a:r>
-            <a:endParaRPr lang="en-US" sz="1600" dirty="0"/>
-          </a:p>
-        </p:txBody>
-      </p:sp>
-      <p:sp>
-        <p:nvSpPr>
-          <p:cNvPr id="22" name="Proof 4 link"/>
-          <p:cNvSpPr txBox="1"/>
-          <p:nvPr/>
-        </p:nvSpPr>
-        <p:spPr>
-          <a:xfrm>
-            <a:off x="1325880" y="5257800"/>
-            <a:ext cx="5120640" cy="347472"/>
-          </a:xfrm>
-          <a:prstGeom prst="rect">
-            <a:avLst/>
-          </a:prstGeom>
-          <a:noFill/>
-          <a:ln/>
-        </p:spPr>
-        <p:txBody>
-          <a:bodyPr wrap="square" lIns="0" tIns="0" rIns="0" bIns="0" rtlCol="0" anchor="t"/>
-          <a:lstStyle/>
-          <a:p>
-            <a:pPr indent="0" marL="0">
-              <a:buNone/>
-            </a:pPr>
-            <a:r>
-              <a:rPr lang="en-US" sz="1400" u="sng" dirty="0">
-                <a:solidFill>
-                  <a:schemeClr val="accent6"/>
-                </a:solidFill>
-                <a:hlinkClick r:id="rId4" invalidUrl="" action="" tgtFrame="" tooltip="" history="1" highlightClick="0" endSnd="0">
-                  <a:extLst>
-                    <a:ext uri="{A12FA001-AC4F-418D-AE19-62706E023703}">
-                      <ahyp:hlinkClr xmlns:ahyp="http://schemas.microsoft.com/office/drawing/2018/hyperlinkcolor" val="tx"/>
-                    </a:ext>
-                  </a:extLst>
-                </a:hlinkClick>
-              </a:rPr>
-              <a:t>github.com/ch-lukas/salesforce-process-intelligence</a:t>
-            </a:r>
-            <a:endParaRPr lang="en-US" sz="1400" dirty="0"/>
-          </a:p>
-        </p:txBody>
-      </p:sp>
-      <p:sp>
-        <p:nvSpPr>
-          <p:cNvPr id="23" name="Screenshot frame"/>
-          <p:cNvSpPr/>
-          <p:nvPr/>
-        </p:nvSpPr>
-        <p:spPr>
-          <a:xfrm>
-            <a:off x="6903720" y="1371600"/>
-            <a:ext cx="4802925" cy="4434840"/>
-          </a:xfrm>
-          <a:prstGeom prst="rect">
-            <a:avLst/>
-          </a:prstGeom>
-          <a:solidFill>
-            <a:schemeClr val="bg1"/>
-          </a:solidFill>
-          <a:ln w="12700">
-            <a:solidFill>
-              <a:schemeClr val="accent3"/>
-            </a:solidFill>
-            <a:prstDash val="solid"/>
-          </a:ln>
-        </p:spPr>
-      </p:sp>
-      <p:pic>
-        <p:nvPicPr>
-          <p:cNvPr id="24" name="Value case screenshot" descr="Value case one-pager on the hosted site">    </p:cNvPr>
-          <p:cNvPicPr>
-            <a:picLocks noChangeAspect="1"/>
-          </p:cNvPicPr>
-          <p:nvPr/>
-        </p:nvPicPr>
-        <p:blipFill>
-          <a:blip r:embed="rId5"/>
-          <a:stretch>
-            <a:fillRect/>
-          </a:stretch>
-        </p:blipFill>
-        <p:spPr>
-          <a:xfrm>
-            <a:off x="6949440" y="1417320"/>
-            <a:ext cx="4711485" cy="4343400"/>
-          </a:xfrm>
-          <a:prstGeom prst="rect">
-            <a:avLst/>
-          </a:prstGeom>
-        </p:spPr>
-      </p:pic>
-      <p:sp>
-        <p:nvSpPr>
-          <p:cNvPr id="25" name="Slide Number Placeholder 0"/>
-          <p:cNvSpPr>
-            <a:spLocks noGrp="1"/>
-          </p:cNvSpPr>
-          <p:nvPr>
-            <p:ph type="sldNum" sz="quarter" idx="4294967295"/>
-          </p:nvPr>
-        </p:nvSpPr>
-        <p:spPr>
-          <a:xfrm>
-            <a:off x="11155680" y="6400800"/>
-            <a:ext cx="457200" cy="274320"/>
-          </a:xfrm>
-          <a:prstGeom prst="rect">
-            <a:avLst/>
-          </a:prstGeom>
-          <a:extLst>
-            <a:ext uri="{C572A759-6A51-4108-AA02-DFA0A04FC94B}">
-              <ma14:wrappingTextBoxFlag xmlns:ma14="http://schemas.microsoft.com/office/mac/drawingml/2011/main" val="0"/>
-            </a:ext>
-          </a:extLst>
-        </p:spPr>
-        <p:txBody>
-          <a:bodyPr/>
-          <a:lstStyle>
-            <a:lvl1pPr>
-              <a:defRPr sz="1000">
-                <a:solidFill>
-                  <a:schemeClr val="accent6"/>
-                </a:solidFill>
-              </a:defRPr>
-            </a:lvl1pPr>
-          </a:lstStyle>
-          <a:p>
-            <a:pPr algn="r"/>
-            <a:fld id="{F7021451-1387-4CA6-816F-3879F97B5CBC}" type="slidenum">
-              <a:rPr b="0" lang="en-US"/>
-              <a:t>7</a:t>
-            </a:fld>
-            <a:endParaRPr lang="en-US"/>
-          </a:p>
-        </p:txBody>
-      </p:sp>
-    </p:spTree>
-  </p:cSld>
-  <p:clrMapOvr>
-    <a:masterClrMapping/>
-  </p:clrMapOvr>
-</p:sld>
-</file>
-
-<file path=ppt/slides/slide8.xml><?xml version="1.0" encoding="utf-8"?>
-<p:sld xmlns:a="http://schemas.openxmlformats.org/drawingml/2006/main" xmlns:r="http://schemas.openxmlformats.org/officeDocument/2006/relationships" xmlns:p="http://schemas.openxmlformats.org/presentationml/2006/main">
-  <p:cSld name="Slide 8">
     <p:spTree>
       <p:nvGrpSpPr>
         <p:cNvPr id="1" name=""/>

--- a/deck/salesforce-process-intelligence.pptx
+++ b/deck/salesforce-process-intelligence.pptx
@@ -11,9 +11,11 @@
     <p:sldId id="259" r:id="rId5"/>
     <p:sldId id="260" r:id="rId6"/>
     <p:sldId id="261" r:id="rId7"/>
+    <p:sldId id="262" r:id="rId8"/>
+    <p:sldId id="263" r:id="rId9"/>
   </p:sldIdLst>
   <p:notesMasterIdLst>
-    <p:notesMasterId r:id="rId8"/>
+    <p:notesMasterId r:id="rId10"/>
   </p:notesMasterIdLst>
   <p:sldSz cx="12192000" cy="6858000"/>
   <p:notesSz cx="6858000" cy="12192000"/>
@@ -112,26 +114,28 @@
   <p:extLst>
     <p:ext uri="{521415D9-36F7-43E2-AB2F-B90AF26B5E84}">
       <p14:sectionLst xmlns:p14="http://schemas.microsoft.com/office/powerpoint/2010/main">
-        <p14:section name="Opening" id="{b87f9b5a-8c23-0298-4637-f3eef46d7f19}">
+        <p14:section name="Opening" id="{d5783a8d-0375-479f-66a9-711c76928298}">
           <p14:sldIdLst>
             <p14:sldId id="256"/>
             <p14:sldId id="257"/>
+            <p14:sldId id="258"/>
           </p14:sldIdLst>
         </p14:section>
-        <p14:section name="Evidence" id="{dcb4ef80-7e70-5379-1753-03bc14d16646}">
+        <p14:section name="Evidence" id="{745848bb-1833-4927-b61a-18bd3a33a0ee}">
           <p14:sldIdLst>
-            <p14:sldId id="258"/>
             <p14:sldId id="259"/>
-          </p14:sldIdLst>
-        </p14:section>
-        <p14:section name="Value" id="{7b0a5b99-2548-4d99-cde0-9339839278f9}">
-          <p14:sldIdLst>
             <p14:sldId id="260"/>
           </p14:sldIdLst>
         </p14:section>
-        <p14:section name="Close" id="{020c7d8d-8fb0-4948-27e5-c03d0b5c69a7}">
+        <p14:section name="Value" id="{917a4510-0ac2-e60e-6387-7cd41e3296ba}">
           <p14:sldIdLst>
             <p14:sldId id="261"/>
+            <p14:sldId id="262"/>
+          </p14:sldIdLst>
+        </p14:section>
+        <p14:section name="Close" id="{94860cf0-d90a-442e-6da5-05e8683e92f1}">
+          <p14:sldIdLst>
+            <p14:sldId id="263"/>
           </p14:sldIdLst>
         </p14:section>
       </p14:sectionLst>
@@ -1559,7 +1563,7 @@
           <a:p>
             <a:r>
               <a:rPr lang="en-US" dirty="0"/>
-              <a:t>This is the directly-follows map from the hosted dashboard. Fourteen percent conformance is the hook: the CRM shows the stage, process mining shows the path.</a:t>
+              <a:t>Framed value isn't committed value. Today's work stops at Frame on purpose: the numbers are evidence-backed but the improvement assumption belongs to the opportunity owner. Commit means signing off KPI definitions and values together; Realize means tracking the KPI against the baseline on a fixed cadence.</a:t>
             </a:r>
             <a:endParaRPr lang="en-US" dirty="0"/>
           </a:p>
@@ -1647,7 +1651,7 @@
           <a:p>
             <a:r>
               <a:rPr lang="en-US" dirty="0"/>
-              <a:t>Orange marks the problem cohort in each chart. Win-rate gaps compare like with like, for example only deals that reached Negotiation for re-quotes.</a:t>
+              <a:t>This is the directly-follows map from the hosted dashboard. Fourteen percent conformance is the hook: the CRM shows the stage, process mining shows the path.</a:t>
             </a:r>
             <a:endParaRPr lang="en-US" dirty="0"/>
           </a:p>
@@ -1735,7 +1739,7 @@
           <a:p>
             <a:r>
               <a:rPr lang="en-US" dirty="0"/>
-              <a:t>This follows my value framing format: challenge, root cause, solution, then a multiplicative value chain. The customer owns the improvement assumption; we own the evidence. Root cause is labelled 'to capture' because it needs reason codes the CRM doesn't hold yet.</a:t>
+              <a:t>Orange marks the problem cohort in each chart. Win-rate gaps compare like with like, for example only deals that reached Negotiation for re-quotes.</a:t>
             </a:r>
             <a:endParaRPr lang="en-US" dirty="0"/>
           </a:p>
@@ -1823,7 +1827,7 @@
           <a:p>
             <a:r>
               <a:rPr lang="en-US" dirty="0"/>
-              <a:t>Close on the decision: validate on production data, pilot one policy change, then monitor value realised in Apromore.</a:t>
+              <a:t>Portfolio view first, then one deep-dive. Framed values come straight from the data; Committed stays TBD until the owner signs off the KPI definition and the improvement assumption. Numbers on the grid match the table rows.</a:t>
             </a:r>
             <a:endParaRPr lang="en-US" dirty="0"/>
           </a:p>
@@ -1847,6 +1851,182 @@
             <a:fld id="{F7021451-1387-4CA6-816F-3879F97B5CBC}" type="slidenum">
               <a:rPr lang="en-US"/>
               <a:t>6</a:t>
+            </a:fld>
+            <a:endParaRPr lang="en-US"/>
+          </a:p>
+        </p:txBody>
+      </p:sp>
+    </p:spTree>
+    <p:extLst>
+      <p:ext uri="{BB962C8B-B14F-4D97-AF65-F5344CB8AC3E}">
+        <p14:creationId xmlns:p14="http://schemas.microsoft.com/office/powerpoint/2010/main" val="1024086991"/>
+      </p:ext>
+    </p:extLst>
+  </p:cSld>
+  <p:clrMapOvr>
+    <a:masterClrMapping/>
+  </p:clrMapOvr>
+</p:notes>
+</file>
+
+<file path=ppt/notesSlides/notesSlide7.xml><?xml version="1.0" encoding="utf-8"?>
+<p:notes xmlns:a="http://schemas.openxmlformats.org/drawingml/2006/main" xmlns:r="http://schemas.openxmlformats.org/officeDocument/2006/relationships" xmlns:p="http://schemas.openxmlformats.org/presentationml/2006/main">
+  <p:cSld>
+    <p:spTree>
+      <p:nvGrpSpPr>
+        <p:cNvPr id="1" name=""/>
+        <p:cNvGrpSpPr/>
+        <p:nvPr/>
+      </p:nvGrpSpPr>
+      <p:grpSpPr>
+        <a:xfrm>
+          <a:off x="0" y="0"/>
+          <a:ext cx="0" cy="0"/>
+          <a:chOff x="0" y="0"/>
+          <a:chExt cx="0" cy="0"/>
+        </a:xfrm>
+      </p:grpSpPr>
+      <p:sp>
+        <p:nvSpPr>
+          <p:cNvPr id="2" name="Slide Image Placeholder 1"/>
+          <p:cNvSpPr>
+            <a:spLocks noGrp="1" noRot="1" noChangeAspect="1"/>
+          </p:cNvSpPr>
+          <p:nvPr>
+            <p:ph type="sldImg"/>
+          </p:nvPr>
+        </p:nvSpPr>
+        <p:spPr/>
+      </p:sp>
+      <p:sp>
+        <p:nvSpPr>
+          <p:cNvPr id="3" name="Notes Placeholder 2"/>
+          <p:cNvSpPr>
+            <a:spLocks noGrp="1"/>
+          </p:cNvSpPr>
+          <p:nvPr>
+            <p:ph type="body" idx="1"/>
+          </p:nvPr>
+        </p:nvSpPr>
+        <p:spPr/>
+        <p:txBody>
+          <a:bodyPr/>
+          <a:lstStyle/>
+          <a:p>
+            <a:r>
+              <a:rPr lang="en-US" dirty="0"/>
+              <a:t>This follows my value framing format: challenge, root cause, solution, then a multiplicative value chain. The customer owns the improvement assumption; we own the evidence. Root cause is labelled 'to capture' because it needs reason codes the CRM doesn't hold yet.</a:t>
+            </a:r>
+            <a:endParaRPr lang="en-US" dirty="0"/>
+          </a:p>
+        </p:txBody>
+      </p:sp>
+      <p:sp>
+        <p:nvSpPr>
+          <p:cNvPr id="4" name="Slide Number Placeholder 3"/>
+          <p:cNvSpPr>
+            <a:spLocks noGrp="1"/>
+          </p:cNvSpPr>
+          <p:nvPr>
+            <p:ph type="sldNum" sz="quarter" idx="10"/>
+          </p:nvPr>
+        </p:nvSpPr>
+        <p:spPr/>
+        <p:txBody>
+          <a:bodyPr/>
+          <a:lstStyle/>
+          <a:p>
+            <a:fld id="{F7021451-1387-4CA6-816F-3879F97B5CBC}" type="slidenum">
+              <a:rPr lang="en-US"/>
+              <a:t>7</a:t>
+            </a:fld>
+            <a:endParaRPr lang="en-US"/>
+          </a:p>
+        </p:txBody>
+      </p:sp>
+    </p:spTree>
+    <p:extLst>
+      <p:ext uri="{BB962C8B-B14F-4D97-AF65-F5344CB8AC3E}">
+        <p14:creationId xmlns:p14="http://schemas.microsoft.com/office/powerpoint/2010/main" val="1024086991"/>
+      </p:ext>
+    </p:extLst>
+  </p:cSld>
+  <p:clrMapOvr>
+    <a:masterClrMapping/>
+  </p:clrMapOvr>
+</p:notes>
+</file>
+
+<file path=ppt/notesSlides/notesSlide8.xml><?xml version="1.0" encoding="utf-8"?>
+<p:notes xmlns:a="http://schemas.openxmlformats.org/drawingml/2006/main" xmlns:r="http://schemas.openxmlformats.org/officeDocument/2006/relationships" xmlns:p="http://schemas.openxmlformats.org/presentationml/2006/main">
+  <p:cSld>
+    <p:spTree>
+      <p:nvGrpSpPr>
+        <p:cNvPr id="1" name=""/>
+        <p:cNvGrpSpPr/>
+        <p:nvPr/>
+      </p:nvGrpSpPr>
+      <p:grpSpPr>
+        <a:xfrm>
+          <a:off x="0" y="0"/>
+          <a:ext cx="0" cy="0"/>
+          <a:chOff x="0" y="0"/>
+          <a:chExt cx="0" cy="0"/>
+        </a:xfrm>
+      </p:grpSpPr>
+      <p:sp>
+        <p:nvSpPr>
+          <p:cNvPr id="2" name="Slide Image Placeholder 1"/>
+          <p:cNvSpPr>
+            <a:spLocks noGrp="1" noRot="1" noChangeAspect="1"/>
+          </p:cNvSpPr>
+          <p:nvPr>
+            <p:ph type="sldImg"/>
+          </p:nvPr>
+        </p:nvSpPr>
+        <p:spPr/>
+      </p:sp>
+      <p:sp>
+        <p:nvSpPr>
+          <p:cNvPr id="3" name="Notes Placeholder 2"/>
+          <p:cNvSpPr>
+            <a:spLocks noGrp="1"/>
+          </p:cNvSpPr>
+          <p:nvPr>
+            <p:ph type="body" idx="1"/>
+          </p:nvPr>
+        </p:nvSpPr>
+        <p:spPr/>
+        <p:txBody>
+          <a:bodyPr/>
+          <a:lstStyle/>
+          <a:p>
+            <a:r>
+              <a:rPr lang="en-US" dirty="0"/>
+              <a:t>Close on the decision: validate on production data, pilot one policy change, then monitor value realised in Apromore.</a:t>
+            </a:r>
+            <a:endParaRPr lang="en-US" dirty="0"/>
+          </a:p>
+        </p:txBody>
+      </p:sp>
+      <p:sp>
+        <p:nvSpPr>
+          <p:cNvPr id="4" name="Slide Number Placeholder 3"/>
+          <p:cNvSpPr>
+            <a:spLocks noGrp="1"/>
+          </p:cNvSpPr>
+          <p:nvPr>
+            <p:ph type="sldNum" sz="quarter" idx="10"/>
+          </p:nvPr>
+        </p:nvSpPr>
+        <p:spPr/>
+        <p:txBody>
+          <a:bodyPr/>
+          <a:lstStyle/>
+          <a:p>
+            <a:fld id="{F7021451-1387-4CA6-816F-3879F97B5CBC}" type="slidenum">
+              <a:rPr lang="en-US"/>
+              <a:t>8</a:t>
             </a:fld>
             <a:endParaRPr lang="en-US"/>
           </a:p>
@@ -3929,7 +4109,7 @@
                   <a:schemeClr val="tx2"/>
                 </a:solidFill>
               </a:rPr>
-              <a:t>Discover: the process as it actually runs</a:t>
+              <a:t>Approach: from finding value to realising it</a:t>
             </a:r>
             <a:endParaRPr lang="en-US" sz="3000" dirty="0"/>
           </a:p>
@@ -3937,14 +4117,56 @@
       </p:sp>
       <p:sp>
         <p:nvSpPr>
-          <p:cNvPr id="3" name="Discover stat 1"/>
+          <p:cNvPr id="3" name="Stage 1 card"/>
+          <p:cNvSpPr/>
+          <p:nvPr/>
+        </p:nvSpPr>
+        <p:spPr>
+          <a:xfrm>
+            <a:off x="548640" y="1691640"/>
+            <a:ext cx="2606040" cy="3246120"/>
+          </a:xfrm>
+          <a:prstGeom prst="roundRect">
+            <a:avLst>
+              <a:gd name="adj" fmla="val 4211"/>
+            </a:avLst>
+          </a:prstGeom>
+          <a:solidFill>
+            <a:schemeClr val="tx2"/>
+          </a:solidFill>
+          <a:ln/>
+        </p:spPr>
+      </p:sp>
+      <p:sp>
+        <p:nvSpPr>
+          <p:cNvPr id="4" name="Stage 1 marker"/>
+          <p:cNvSpPr/>
+          <p:nvPr/>
+        </p:nvSpPr>
+        <p:spPr>
+          <a:xfrm>
+            <a:off x="777240" y="1920240"/>
+            <a:ext cx="457200" cy="457200"/>
+          </a:xfrm>
+          <a:prstGeom prst="ellipse">
+            <a:avLst/>
+          </a:prstGeom>
+          <a:solidFill>
+            <a:schemeClr val="accent1"/>
+          </a:solidFill>
+          <a:ln/>
+        </p:spPr>
+      </p:sp>
+      <p:sp>
+        <p:nvSpPr>
+          <p:cNvPr id="5" name="Stage 1 number"/>
           <p:cNvSpPr txBox="1"/>
           <p:nvPr/>
         </p:nvSpPr>
         <p:spPr>
           <a:xfrm>
-            <a:off x="548640" y="1508760"/>
-            <a:ext cx="2651760" cy="822960"/>
+            <a:off x="777240" y="1920240"/>
+            <a:ext cx="457200" cy="457200"/>
           </a:xfrm>
           <a:prstGeom prst="rect">
             <a:avLst/>
@@ -3956,31 +4178,212 @@
           <a:bodyPr wrap="square" lIns="0" tIns="0" rIns="0" bIns="0" rtlCol="0" anchor="ctr"/>
           <a:lstStyle/>
           <a:p>
+            <a:pPr algn="ctr" indent="0" marL="0">
+              <a:buNone/>
+            </a:pPr>
+            <a:r>
+              <a:rPr lang="en-US" sz="1600" b="1" dirty="0">
+                <a:solidFill>
+                  <a:schemeClr val="bg1"/>
+                </a:solidFill>
+              </a:rPr>
+              <a:t>1</a:t>
+            </a:r>
+            <a:endParaRPr lang="en-US" sz="1600" dirty="0"/>
+          </a:p>
+        </p:txBody>
+      </p:sp>
+      <p:sp>
+        <p:nvSpPr>
+          <p:cNvPr id="6" name="Stage 1 title"/>
+          <p:cNvSpPr txBox="1"/>
+          <p:nvPr/>
+        </p:nvSpPr>
+        <p:spPr>
+          <a:xfrm>
+            <a:off x="777240" y="2560320"/>
+            <a:ext cx="2148840" cy="457200"/>
+          </a:xfrm>
+          <a:prstGeom prst="rect">
+            <a:avLst/>
+          </a:prstGeom>
+          <a:noFill/>
+          <a:ln/>
+        </p:spPr>
+        <p:txBody>
+          <a:bodyPr wrap="square" lIns="0" tIns="0" rIns="0" bIns="0" rtlCol="0" anchor="t"/>
+          <a:lstStyle/>
+          <a:p>
             <a:pPr indent="0" marL="0">
               <a:buNone/>
             </a:pPr>
             <a:r>
-              <a:rPr lang="en-US" sz="4400" b="1" dirty="0">
-                <a:solidFill>
-                  <a:schemeClr val="accent1"/>
-                </a:solidFill>
-              </a:rPr>
-              <a:t>14%</a:t>
-            </a:r>
-            <a:endParaRPr lang="en-US" sz="4400" dirty="0"/>
-          </a:p>
-        </p:txBody>
-      </p:sp>
-      <p:sp>
-        <p:nvSpPr>
-          <p:cNvPr id="4" name="Discover label 1"/>
+              <a:rPr lang="en-US" sz="2200" b="1" dirty="0">
+                <a:solidFill>
+                  <a:schemeClr val="bg1"/>
+                </a:solidFill>
+              </a:rPr>
+              <a:t>Identify</a:t>
+            </a:r>
+            <a:endParaRPr lang="en-US" sz="2200" dirty="0"/>
+          </a:p>
+        </p:txBody>
+      </p:sp>
+      <p:sp>
+        <p:nvSpPr>
+          <p:cNvPr id="7" name="Stage 1 body"/>
           <p:cNvSpPr txBox="1"/>
           <p:nvPr/>
         </p:nvSpPr>
         <p:spPr>
           <a:xfrm>
-            <a:off x="3291840" y="1508760"/>
-            <a:ext cx="3566160" cy="822960"/>
+            <a:off x="777240" y="3063240"/>
+            <a:ext cx="2148840" cy="1097280"/>
+          </a:xfrm>
+          <a:prstGeom prst="rect">
+            <a:avLst/>
+          </a:prstGeom>
+          <a:noFill/>
+          <a:ln/>
+        </p:spPr>
+        <p:txBody>
+          <a:bodyPr wrap="square" lIns="0" tIns="0" rIns="0" bIns="0" rtlCol="0" anchor="t"/>
+          <a:lstStyle/>
+          <a:p>
+            <a:pPr indent="0" marL="0">
+              <a:buNone/>
+            </a:pPr>
+            <a:r>
+              <a:rPr lang="en-US" sz="1400" dirty="0">
+                <a:solidFill>
+                  <a:schemeClr val="bg1"/>
+                </a:solidFill>
+              </a:rPr>
+              <a:t>Mine the CRM event log: process map, variants and bottlenecks.</a:t>
+            </a:r>
+            <a:endParaRPr lang="en-US" sz="1400" dirty="0"/>
+          </a:p>
+        </p:txBody>
+      </p:sp>
+      <p:sp>
+        <p:nvSpPr>
+          <p:cNvPr id="8" name="Stage 1 output"/>
+          <p:cNvSpPr txBox="1"/>
+          <p:nvPr/>
+        </p:nvSpPr>
+        <p:spPr>
+          <a:xfrm>
+            <a:off x="777240" y="4251960"/>
+            <a:ext cx="2148840" cy="548640"/>
+          </a:xfrm>
+          <a:prstGeom prst="rect">
+            <a:avLst/>
+          </a:prstGeom>
+          <a:noFill/>
+          <a:ln/>
+        </p:spPr>
+        <p:txBody>
+          <a:bodyPr wrap="square" lIns="0" tIns="0" rIns="0" bIns="0" rtlCol="0" anchor="t"/>
+          <a:lstStyle/>
+          <a:p>
+            <a:pPr indent="0" marL="0">
+              <a:buNone/>
+            </a:pPr>
+            <a:r>
+              <a:rPr lang="en-US" sz="1300" b="1" dirty="0">
+                <a:solidFill>
+                  <a:schemeClr val="accent3"/>
+                </a:solidFill>
+              </a:rPr>
+              <a:t>Output: </a:t>
+            </a:r>
+            <a:pPr indent="0" marL="0">
+              <a:buNone/>
+            </a:pPr>
+            <a:r>
+              <a:rPr lang="en-US" sz="1300" dirty="0">
+                <a:solidFill>
+                  <a:schemeClr val="accent3"/>
+                </a:solidFill>
+              </a:rPr>
+              <a:t>3 opportunities found</a:t>
+            </a:r>
+            <a:endParaRPr lang="en-US" sz="1300" dirty="0"/>
+          </a:p>
+        </p:txBody>
+      </p:sp>
+      <p:sp>
+        <p:nvSpPr>
+          <p:cNvPr id="9" name="Stage 1 arrow"/>
+          <p:cNvSpPr/>
+          <p:nvPr/>
+        </p:nvSpPr>
+        <p:spPr>
+          <a:xfrm>
+            <a:off x="3182112" y="3154680"/>
+            <a:ext cx="173736" cy="310896"/>
+          </a:xfrm>
+          <a:prstGeom prst="rightArrow">
+            <a:avLst/>
+          </a:prstGeom>
+          <a:solidFill>
+            <a:schemeClr val="accent2"/>
+          </a:solidFill>
+          <a:ln/>
+        </p:spPr>
+      </p:sp>
+      <p:sp>
+        <p:nvSpPr>
+          <p:cNvPr id="10" name="Stage 2 card"/>
+          <p:cNvSpPr/>
+          <p:nvPr/>
+        </p:nvSpPr>
+        <p:spPr>
+          <a:xfrm>
+            <a:off x="3383280" y="1691640"/>
+            <a:ext cx="2606040" cy="3246120"/>
+          </a:xfrm>
+          <a:prstGeom prst="roundRect">
+            <a:avLst>
+              <a:gd name="adj" fmla="val 4211"/>
+            </a:avLst>
+          </a:prstGeom>
+          <a:solidFill>
+            <a:schemeClr val="tx2"/>
+          </a:solidFill>
+          <a:ln/>
+        </p:spPr>
+      </p:sp>
+      <p:sp>
+        <p:nvSpPr>
+          <p:cNvPr id="11" name="Stage 2 marker"/>
+          <p:cNvSpPr/>
+          <p:nvPr/>
+        </p:nvSpPr>
+        <p:spPr>
+          <a:xfrm>
+            <a:off x="3611880" y="1920240"/>
+            <a:ext cx="457200" cy="457200"/>
+          </a:xfrm>
+          <a:prstGeom prst="ellipse">
+            <a:avLst/>
+          </a:prstGeom>
+          <a:solidFill>
+            <a:schemeClr val="accent1"/>
+          </a:solidFill>
+          <a:ln/>
+        </p:spPr>
+      </p:sp>
+      <p:sp>
+        <p:nvSpPr>
+          <p:cNvPr id="12" name="Stage 2 number"/>
+          <p:cNvSpPr txBox="1"/>
+          <p:nvPr/>
+        </p:nvSpPr>
+        <p:spPr>
+          <a:xfrm>
+            <a:off x="3611880" y="1920240"/>
+            <a:ext cx="457200" cy="457200"/>
           </a:xfrm>
           <a:prstGeom prst="rect">
             <a:avLst/>
@@ -3992,31 +4395,429 @@
           <a:bodyPr wrap="square" lIns="0" tIns="0" rIns="0" bIns="0" rtlCol="0" anchor="ctr"/>
           <a:lstStyle/>
           <a:p>
+            <a:pPr algn="ctr" indent="0" marL="0">
+              <a:buNone/>
+            </a:pPr>
+            <a:r>
+              <a:rPr lang="en-US" sz="1600" b="1" dirty="0">
+                <a:solidFill>
+                  <a:schemeClr val="bg1"/>
+                </a:solidFill>
+              </a:rPr>
+              <a:t>2</a:t>
+            </a:r>
+            <a:endParaRPr lang="en-US" sz="1600" dirty="0"/>
+          </a:p>
+        </p:txBody>
+      </p:sp>
+      <p:sp>
+        <p:nvSpPr>
+          <p:cNvPr id="13" name="Stage 2 title"/>
+          <p:cNvSpPr txBox="1"/>
+          <p:nvPr/>
+        </p:nvSpPr>
+        <p:spPr>
+          <a:xfrm>
+            <a:off x="3611880" y="2560320"/>
+            <a:ext cx="2148840" cy="457200"/>
+          </a:xfrm>
+          <a:prstGeom prst="rect">
+            <a:avLst/>
+          </a:prstGeom>
+          <a:noFill/>
+          <a:ln/>
+        </p:spPr>
+        <p:txBody>
+          <a:bodyPr wrap="square" lIns="0" tIns="0" rIns="0" bIns="0" rtlCol="0" anchor="t"/>
+          <a:lstStyle/>
+          <a:p>
             <a:pPr indent="0" marL="0">
               <a:buNone/>
             </a:pPr>
             <a:r>
-              <a:rPr lang="en-US" sz="1800" dirty="0">
+              <a:rPr lang="en-US" sz="2200" b="1" dirty="0">
+                <a:solidFill>
+                  <a:schemeClr val="bg1"/>
+                </a:solidFill>
+              </a:rPr>
+              <a:t>Frame</a:t>
+            </a:r>
+            <a:endParaRPr lang="en-US" sz="2200" dirty="0"/>
+          </a:p>
+        </p:txBody>
+      </p:sp>
+      <p:sp>
+        <p:nvSpPr>
+          <p:cNvPr id="14" name="Stage 2 body"/>
+          <p:cNvSpPr txBox="1"/>
+          <p:nvPr/>
+        </p:nvSpPr>
+        <p:spPr>
+          <a:xfrm>
+            <a:off x="3611880" y="3063240"/>
+            <a:ext cx="2148840" cy="1097280"/>
+          </a:xfrm>
+          <a:prstGeom prst="rect">
+            <a:avLst/>
+          </a:prstGeom>
+          <a:noFill/>
+          <a:ln/>
+        </p:spPr>
+        <p:txBody>
+          <a:bodyPr wrap="square" lIns="0" tIns="0" rIns="0" bIns="0" rtlCol="0" anchor="t"/>
+          <a:lstStyle/>
+          <a:p>
+            <a:pPr indent="0" marL="0">
+              <a:buNone/>
+            </a:pPr>
+            <a:r>
+              <a:rPr lang="en-US" sz="1400" dirty="0">
+                <a:solidFill>
+                  <a:schemeClr val="bg1"/>
+                </a:solidFill>
+              </a:rPr>
+              <a:t>Size each opportunity from its KPI baseline and customer-owned assumptions.</a:t>
+            </a:r>
+            <a:endParaRPr lang="en-US" sz="1400" dirty="0"/>
+          </a:p>
+        </p:txBody>
+      </p:sp>
+      <p:sp>
+        <p:nvSpPr>
+          <p:cNvPr id="15" name="Stage 2 output"/>
+          <p:cNvSpPr txBox="1"/>
+          <p:nvPr/>
+        </p:nvSpPr>
+        <p:spPr>
+          <a:xfrm>
+            <a:off x="3611880" y="4251960"/>
+            <a:ext cx="2148840" cy="548640"/>
+          </a:xfrm>
+          <a:prstGeom prst="rect">
+            <a:avLst/>
+          </a:prstGeom>
+          <a:noFill/>
+          <a:ln/>
+        </p:spPr>
+        <p:txBody>
+          <a:bodyPr wrap="square" lIns="0" tIns="0" rIns="0" bIns="0" rtlCol="0" anchor="t"/>
+          <a:lstStyle/>
+          <a:p>
+            <a:pPr indent="0" marL="0">
+              <a:buNone/>
+            </a:pPr>
+            <a:r>
+              <a:rPr lang="en-US" sz="1300" b="1" dirty="0">
+                <a:solidFill>
+                  <a:schemeClr val="accent3"/>
+                </a:solidFill>
+              </a:rPr>
+              <a:t>Output: </a:t>
+            </a:r>
+            <a:pPr indent="0" marL="0">
+              <a:buNone/>
+            </a:pPr>
+            <a:r>
+              <a:rPr lang="en-US" sz="1300" dirty="0">
+                <a:solidFill>
+                  <a:schemeClr val="accent3"/>
+                </a:solidFill>
+              </a:rPr>
+              <a:t>$2.8M framed</a:t>
+            </a:r>
+            <a:endParaRPr lang="en-US" sz="1300" dirty="0"/>
+          </a:p>
+        </p:txBody>
+      </p:sp>
+      <p:sp>
+        <p:nvSpPr>
+          <p:cNvPr id="16" name="Stage 2 arrow"/>
+          <p:cNvSpPr/>
+          <p:nvPr/>
+        </p:nvSpPr>
+        <p:spPr>
+          <a:xfrm>
+            <a:off x="6016752" y="3154680"/>
+            <a:ext cx="173736" cy="310896"/>
+          </a:xfrm>
+          <a:prstGeom prst="rightArrow">
+            <a:avLst/>
+          </a:prstGeom>
+          <a:solidFill>
+            <a:schemeClr val="accent2"/>
+          </a:solidFill>
+          <a:ln/>
+        </p:spPr>
+      </p:sp>
+      <p:sp>
+        <p:nvSpPr>
+          <p:cNvPr id="17" name="Stage 3 card"/>
+          <p:cNvSpPr/>
+          <p:nvPr/>
+        </p:nvSpPr>
+        <p:spPr>
+          <a:xfrm>
+            <a:off x="6217920" y="1691640"/>
+            <a:ext cx="2606040" cy="3246120"/>
+          </a:xfrm>
+          <a:prstGeom prst="roundRect">
+            <a:avLst>
+              <a:gd name="adj" fmla="val 4211"/>
+            </a:avLst>
+          </a:prstGeom>
+          <a:solidFill>
+            <a:schemeClr val="bg2"/>
+          </a:solidFill>
+          <a:ln/>
+        </p:spPr>
+      </p:sp>
+      <p:sp>
+        <p:nvSpPr>
+          <p:cNvPr id="18" name="Stage 3 marker"/>
+          <p:cNvSpPr/>
+          <p:nvPr/>
+        </p:nvSpPr>
+        <p:spPr>
+          <a:xfrm>
+            <a:off x="6446520" y="1920240"/>
+            <a:ext cx="457200" cy="457200"/>
+          </a:xfrm>
+          <a:prstGeom prst="ellipse">
+            <a:avLst/>
+          </a:prstGeom>
+          <a:solidFill>
+            <a:schemeClr val="accent3"/>
+          </a:solidFill>
+          <a:ln/>
+        </p:spPr>
+      </p:sp>
+      <p:sp>
+        <p:nvSpPr>
+          <p:cNvPr id="19" name="Stage 3 number"/>
+          <p:cNvSpPr txBox="1"/>
+          <p:nvPr/>
+        </p:nvSpPr>
+        <p:spPr>
+          <a:xfrm>
+            <a:off x="6446520" y="1920240"/>
+            <a:ext cx="457200" cy="457200"/>
+          </a:xfrm>
+          <a:prstGeom prst="rect">
+            <a:avLst/>
+          </a:prstGeom>
+          <a:noFill/>
+          <a:ln/>
+        </p:spPr>
+        <p:txBody>
+          <a:bodyPr wrap="square" lIns="0" tIns="0" rIns="0" bIns="0" rtlCol="0" anchor="ctr"/>
+          <a:lstStyle/>
+          <a:p>
+            <a:pPr algn="ctr" indent="0" marL="0">
+              <a:buNone/>
+            </a:pPr>
+            <a:r>
+              <a:rPr lang="en-US" sz="1600" b="1" dirty="0">
                 <a:solidFill>
                   <a:schemeClr val="tx2"/>
                 </a:solidFill>
               </a:rPr>
-              <a:t>of deals follow the designed happy path</a:t>
-            </a:r>
-            <a:endParaRPr lang="en-US" sz="1800" dirty="0"/>
-          </a:p>
-        </p:txBody>
-      </p:sp>
-      <p:sp>
-        <p:nvSpPr>
-          <p:cNvPr id="5" name="Discover stat 2"/>
+              <a:t>3</a:t>
+            </a:r>
+            <a:endParaRPr lang="en-US" sz="1600" dirty="0"/>
+          </a:p>
+        </p:txBody>
+      </p:sp>
+      <p:sp>
+        <p:nvSpPr>
+          <p:cNvPr id="20" name="Stage 3 title"/>
           <p:cNvSpPr txBox="1"/>
           <p:nvPr/>
         </p:nvSpPr>
         <p:spPr>
           <a:xfrm>
-            <a:off x="548640" y="2926080"/>
-            <a:ext cx="2651760" cy="822960"/>
+            <a:off x="6446520" y="2560320"/>
+            <a:ext cx="2148840" cy="457200"/>
+          </a:xfrm>
+          <a:prstGeom prst="rect">
+            <a:avLst/>
+          </a:prstGeom>
+          <a:noFill/>
+          <a:ln/>
+        </p:spPr>
+        <p:txBody>
+          <a:bodyPr wrap="square" lIns="0" tIns="0" rIns="0" bIns="0" rtlCol="0" anchor="t"/>
+          <a:lstStyle/>
+          <a:p>
+            <a:pPr indent="0" marL="0">
+              <a:buNone/>
+            </a:pPr>
+            <a:r>
+              <a:rPr lang="en-US" sz="2200" b="1" dirty="0">
+                <a:solidFill>
+                  <a:schemeClr val="tx2"/>
+                </a:solidFill>
+              </a:rPr>
+              <a:t>Commit</a:t>
+            </a:r>
+            <a:endParaRPr lang="en-US" sz="2200" dirty="0"/>
+          </a:p>
+        </p:txBody>
+      </p:sp>
+      <p:sp>
+        <p:nvSpPr>
+          <p:cNvPr id="21" name="Stage 3 body"/>
+          <p:cNvSpPr txBox="1"/>
+          <p:nvPr/>
+        </p:nvSpPr>
+        <p:spPr>
+          <a:xfrm>
+            <a:off x="6446520" y="3063240"/>
+            <a:ext cx="2148840" cy="1097280"/>
+          </a:xfrm>
+          <a:prstGeom prst="rect">
+            <a:avLst/>
+          </a:prstGeom>
+          <a:noFill/>
+          <a:ln/>
+        </p:spPr>
+        <p:txBody>
+          <a:bodyPr wrap="square" lIns="0" tIns="0" rIns="0" bIns="0" rtlCol="0" anchor="t"/>
+          <a:lstStyle/>
+          <a:p>
+            <a:pPr indent="0" marL="0">
+              <a:buNone/>
+            </a:pPr>
+            <a:r>
+              <a:rPr lang="en-US" sz="1400" dirty="0">
+                <a:solidFill>
+                  <a:schemeClr val="tx2"/>
+                </a:solidFill>
+              </a:rPr>
+              <a:t>Validate KPI definitions and values with each opportunity owner.</a:t>
+            </a:r>
+            <a:endParaRPr lang="en-US" sz="1400" dirty="0"/>
+          </a:p>
+        </p:txBody>
+      </p:sp>
+      <p:sp>
+        <p:nvSpPr>
+          <p:cNvPr id="22" name="Stage 3 output"/>
+          <p:cNvSpPr txBox="1"/>
+          <p:nvPr/>
+        </p:nvSpPr>
+        <p:spPr>
+          <a:xfrm>
+            <a:off x="6446520" y="4251960"/>
+            <a:ext cx="2148840" cy="548640"/>
+          </a:xfrm>
+          <a:prstGeom prst="rect">
+            <a:avLst/>
+          </a:prstGeom>
+          <a:noFill/>
+          <a:ln/>
+        </p:spPr>
+        <p:txBody>
+          <a:bodyPr wrap="square" lIns="0" tIns="0" rIns="0" bIns="0" rtlCol="0" anchor="t"/>
+          <a:lstStyle/>
+          <a:p>
+            <a:pPr indent="0" marL="0">
+              <a:buNone/>
+            </a:pPr>
+            <a:r>
+              <a:rPr lang="en-US" sz="1300" b="1" dirty="0">
+                <a:solidFill>
+                  <a:schemeClr val="accent6"/>
+                </a:solidFill>
+              </a:rPr>
+              <a:t>Output: </a:t>
+            </a:r>
+            <a:pPr indent="0" marL="0">
+              <a:buNone/>
+            </a:pPr>
+            <a:r>
+              <a:rPr lang="en-US" sz="1300" dirty="0">
+                <a:solidFill>
+                  <a:schemeClr val="accent6"/>
+                </a:solidFill>
+              </a:rPr>
+              <a:t>Signed-off committed value</a:t>
+            </a:r>
+            <a:endParaRPr lang="en-US" sz="1300" dirty="0"/>
+          </a:p>
+        </p:txBody>
+      </p:sp>
+      <p:sp>
+        <p:nvSpPr>
+          <p:cNvPr id="23" name="Stage 3 arrow"/>
+          <p:cNvSpPr/>
+          <p:nvPr/>
+        </p:nvSpPr>
+        <p:spPr>
+          <a:xfrm>
+            <a:off x="8851392" y="3154680"/>
+            <a:ext cx="173736" cy="310896"/>
+          </a:xfrm>
+          <a:prstGeom prst="rightArrow">
+            <a:avLst/>
+          </a:prstGeom>
+          <a:solidFill>
+            <a:schemeClr val="accent2"/>
+          </a:solidFill>
+          <a:ln/>
+        </p:spPr>
+      </p:sp>
+      <p:sp>
+        <p:nvSpPr>
+          <p:cNvPr id="24" name="Stage 4 card"/>
+          <p:cNvSpPr/>
+          <p:nvPr/>
+        </p:nvSpPr>
+        <p:spPr>
+          <a:xfrm>
+            <a:off x="9052560" y="1691640"/>
+            <a:ext cx="2606040" cy="3246120"/>
+          </a:xfrm>
+          <a:prstGeom prst="roundRect">
+            <a:avLst>
+              <a:gd name="adj" fmla="val 4211"/>
+            </a:avLst>
+          </a:prstGeom>
+          <a:solidFill>
+            <a:schemeClr val="bg2"/>
+          </a:solidFill>
+          <a:ln/>
+        </p:spPr>
+      </p:sp>
+      <p:sp>
+        <p:nvSpPr>
+          <p:cNvPr id="25" name="Stage 4 marker"/>
+          <p:cNvSpPr/>
+          <p:nvPr/>
+        </p:nvSpPr>
+        <p:spPr>
+          <a:xfrm>
+            <a:off x="9281160" y="1920240"/>
+            <a:ext cx="457200" cy="457200"/>
+          </a:xfrm>
+          <a:prstGeom prst="ellipse">
+            <a:avLst/>
+          </a:prstGeom>
+          <a:solidFill>
+            <a:schemeClr val="accent3"/>
+          </a:solidFill>
+          <a:ln/>
+        </p:spPr>
+      </p:sp>
+      <p:sp>
+        <p:nvSpPr>
+          <p:cNvPr id="26" name="Stage 4 number"/>
+          <p:cNvSpPr txBox="1"/>
+          <p:nvPr/>
+        </p:nvSpPr>
+        <p:spPr>
+          <a:xfrm>
+            <a:off x="9281160" y="1920240"/>
+            <a:ext cx="457200" cy="457200"/>
           </a:xfrm>
           <a:prstGeom prst="rect">
             <a:avLst/>
@@ -4028,31 +4829,172 @@
           <a:bodyPr wrap="square" lIns="0" tIns="0" rIns="0" bIns="0" rtlCol="0" anchor="ctr"/>
           <a:lstStyle/>
           <a:p>
+            <a:pPr algn="ctr" indent="0" marL="0">
+              <a:buNone/>
+            </a:pPr>
+            <a:r>
+              <a:rPr lang="en-US" sz="1600" b="1" dirty="0">
+                <a:solidFill>
+                  <a:schemeClr val="tx2"/>
+                </a:solidFill>
+              </a:rPr>
+              <a:t>4</a:t>
+            </a:r>
+            <a:endParaRPr lang="en-US" sz="1600" dirty="0"/>
+          </a:p>
+        </p:txBody>
+      </p:sp>
+      <p:sp>
+        <p:nvSpPr>
+          <p:cNvPr id="27" name="Stage 4 title"/>
+          <p:cNvSpPr txBox="1"/>
+          <p:nvPr/>
+        </p:nvSpPr>
+        <p:spPr>
+          <a:xfrm>
+            <a:off x="9281160" y="2560320"/>
+            <a:ext cx="2148840" cy="457200"/>
+          </a:xfrm>
+          <a:prstGeom prst="rect">
+            <a:avLst/>
+          </a:prstGeom>
+          <a:noFill/>
+          <a:ln/>
+        </p:spPr>
+        <p:txBody>
+          <a:bodyPr wrap="square" lIns="0" tIns="0" rIns="0" bIns="0" rtlCol="0" anchor="t"/>
+          <a:lstStyle/>
+          <a:p>
             <a:pPr indent="0" marL="0">
               <a:buNone/>
             </a:pPr>
             <a:r>
-              <a:rPr lang="en-US" sz="4400" b="1" dirty="0">
-                <a:solidFill>
-                  <a:schemeClr val="accent1"/>
-                </a:solidFill>
-              </a:rPr>
-              <a:t>67</a:t>
-            </a:r>
-            <a:endParaRPr lang="en-US" sz="4400" dirty="0"/>
-          </a:p>
-        </p:txBody>
-      </p:sp>
-      <p:sp>
-        <p:nvSpPr>
-          <p:cNvPr id="6" name="Discover label 2"/>
+              <a:rPr lang="en-US" sz="2200" b="1" dirty="0">
+                <a:solidFill>
+                  <a:schemeClr val="tx2"/>
+                </a:solidFill>
+              </a:rPr>
+              <a:t>Realize</a:t>
+            </a:r>
+            <a:endParaRPr lang="en-US" sz="2200" dirty="0"/>
+          </a:p>
+        </p:txBody>
+      </p:sp>
+      <p:sp>
+        <p:nvSpPr>
+          <p:cNvPr id="28" name="Stage 4 body"/>
           <p:cNvSpPr txBox="1"/>
           <p:nvPr/>
         </p:nvSpPr>
         <p:spPr>
           <a:xfrm>
-            <a:off x="3291840" y="2926080"/>
-            <a:ext cx="3566160" cy="822960"/>
+            <a:off x="9281160" y="3063240"/>
+            <a:ext cx="2148840" cy="1097280"/>
+          </a:xfrm>
+          <a:prstGeom prst="rect">
+            <a:avLst/>
+          </a:prstGeom>
+          <a:noFill/>
+          <a:ln/>
+        </p:spPr>
+        <p:txBody>
+          <a:bodyPr wrap="square" lIns="0" tIns="0" rIns="0" bIns="0" rtlCol="0" anchor="t"/>
+          <a:lstStyle/>
+          <a:p>
+            <a:pPr indent="0" marL="0">
+              <a:buNone/>
+            </a:pPr>
+            <a:r>
+              <a:rPr lang="en-US" sz="1400" dirty="0">
+                <a:solidFill>
+                  <a:schemeClr val="tx2"/>
+                </a:solidFill>
+              </a:rPr>
+              <a:t>Act on the root cause, then track the KPI against its baseline.</a:t>
+            </a:r>
+            <a:endParaRPr lang="en-US" sz="1400" dirty="0"/>
+          </a:p>
+        </p:txBody>
+      </p:sp>
+      <p:sp>
+        <p:nvSpPr>
+          <p:cNvPr id="29" name="Stage 4 output"/>
+          <p:cNvSpPr txBox="1"/>
+          <p:nvPr/>
+        </p:nvSpPr>
+        <p:spPr>
+          <a:xfrm>
+            <a:off x="9281160" y="4251960"/>
+            <a:ext cx="2148840" cy="548640"/>
+          </a:xfrm>
+          <a:prstGeom prst="rect">
+            <a:avLst/>
+          </a:prstGeom>
+          <a:noFill/>
+          <a:ln/>
+        </p:spPr>
+        <p:txBody>
+          <a:bodyPr wrap="square" lIns="0" tIns="0" rIns="0" bIns="0" rtlCol="0" anchor="t"/>
+          <a:lstStyle/>
+          <a:p>
+            <a:pPr indent="0" marL="0">
+              <a:buNone/>
+            </a:pPr>
+            <a:r>
+              <a:rPr lang="en-US" sz="1300" b="1" dirty="0">
+                <a:solidFill>
+                  <a:schemeClr val="accent6"/>
+                </a:solidFill>
+              </a:rPr>
+              <a:t>Output: </a:t>
+            </a:r>
+            <a:pPr indent="0" marL="0">
+              <a:buNone/>
+            </a:pPr>
+            <a:r>
+              <a:rPr lang="en-US" sz="1300" dirty="0">
+                <a:solidFill>
+                  <a:schemeClr val="accent6"/>
+                </a:solidFill>
+              </a:rPr>
+              <a:t>Value realised, reported quarterly</a:t>
+            </a:r>
+            <a:endParaRPr lang="en-US" sz="1300" dirty="0"/>
+          </a:p>
+        </p:txBody>
+      </p:sp>
+      <p:sp>
+        <p:nvSpPr>
+          <p:cNvPr id="30" name="Today pill"/>
+          <p:cNvSpPr/>
+          <p:nvPr/>
+        </p:nvSpPr>
+        <p:spPr>
+          <a:xfrm>
+            <a:off x="4160520" y="1261872"/>
+            <a:ext cx="1051560" cy="329184"/>
+          </a:xfrm>
+          <a:prstGeom prst="roundRect">
+            <a:avLst>
+              <a:gd name="adj" fmla="val 50000"/>
+            </a:avLst>
+          </a:prstGeom>
+          <a:solidFill>
+            <a:schemeClr val="accent4"/>
+          </a:solidFill>
+          <a:ln/>
+        </p:spPr>
+      </p:sp>
+      <p:sp>
+        <p:nvSpPr>
+          <p:cNvPr id="31" name="Today label"/>
+          <p:cNvSpPr txBox="1"/>
+          <p:nvPr/>
+        </p:nvSpPr>
+        <p:spPr>
+          <a:xfrm>
+            <a:off x="4160520" y="1261872"/>
+            <a:ext cx="1051560" cy="329184"/>
           </a:xfrm>
           <a:prstGeom prst="rect">
             <a:avLst/>
@@ -4064,178 +5006,57 @@
           <a:bodyPr wrap="square" lIns="0" tIns="0" rIns="0" bIns="0" rtlCol="0" anchor="ctr"/>
           <a:lstStyle/>
           <a:p>
+            <a:pPr algn="ctr" indent="0" marL="0">
+              <a:buNone/>
+            </a:pPr>
+            <a:r>
+              <a:rPr lang="en-US" sz="1300" b="1" dirty="0">
+                <a:solidFill>
+                  <a:schemeClr val="bg1"/>
+                </a:solidFill>
+              </a:rPr>
+              <a:t>Today</a:t>
+            </a:r>
+            <a:endParaRPr lang="en-US" sz="1300" dirty="0"/>
+          </a:p>
+        </p:txBody>
+      </p:sp>
+      <p:sp>
+        <p:nvSpPr>
+          <p:cNvPr id="32" name="Approach note"/>
+          <p:cNvSpPr txBox="1"/>
+          <p:nvPr/>
+        </p:nvSpPr>
+        <p:spPr>
+          <a:xfrm>
+            <a:off x="548640" y="5257800"/>
+            <a:ext cx="11064240" cy="457200"/>
+          </a:xfrm>
+          <a:prstGeom prst="rect">
+            <a:avLst/>
+          </a:prstGeom>
+          <a:noFill/>
+          <a:ln/>
+        </p:spPr>
+        <p:txBody>
+          <a:bodyPr wrap="square" lIns="0" tIns="0" rIns="0" bIns="0" rtlCol="0" anchor="t"/>
+          <a:lstStyle/>
+          <a:p>
             <a:pPr indent="0" marL="0">
               <a:buNone/>
             </a:pPr>
             <a:r>
-              <a:rPr lang="en-US" sz="1800" dirty="0">
-                <a:solidFill>
-                  <a:schemeClr val="tx2"/>
-                </a:solidFill>
-              </a:rPr>
-              <a:t>distinct paths across 800 deals</a:t>
-            </a:r>
-            <a:endParaRPr lang="en-US" sz="1800" dirty="0"/>
-          </a:p>
-        </p:txBody>
-      </p:sp>
-      <p:sp>
-        <p:nvSpPr>
-          <p:cNvPr id="7" name="Discover stat 3"/>
-          <p:cNvSpPr txBox="1"/>
-          <p:nvPr/>
-        </p:nvSpPr>
-        <p:spPr>
-          <a:xfrm>
-            <a:off x="548640" y="4343400"/>
-            <a:ext cx="2651760" cy="822960"/>
-          </a:xfrm>
-          <a:prstGeom prst="rect">
-            <a:avLst/>
-          </a:prstGeom>
-          <a:noFill/>
-          <a:ln/>
-        </p:spPr>
-        <p:txBody>
-          <a:bodyPr wrap="square" lIns="0" tIns="0" rIns="0" bIns="0" rtlCol="0" anchor="ctr"/>
-          <a:lstStyle/>
-          <a:p>
-            <a:pPr indent="0" marL="0">
-              <a:buNone/>
-            </a:pPr>
-            <a:r>
-              <a:rPr lang="en-US" sz="4400" b="1" dirty="0">
-                <a:solidFill>
-                  <a:schemeClr val="accent1"/>
-                </a:solidFill>
-              </a:rPr>
-              <a:t>7.0 days</a:t>
-            </a:r>
-            <a:endParaRPr lang="en-US" sz="4400" dirty="0"/>
-          </a:p>
-        </p:txBody>
-      </p:sp>
-      <p:sp>
-        <p:nvSpPr>
-          <p:cNvPr id="8" name="Discover label 3"/>
-          <p:cNvSpPr txBox="1"/>
-          <p:nvPr/>
-        </p:nvSpPr>
-        <p:spPr>
-          <a:xfrm>
-            <a:off x="3291840" y="4343400"/>
-            <a:ext cx="3566160" cy="822960"/>
-          </a:xfrm>
-          <a:prstGeom prst="rect">
-            <a:avLst/>
-          </a:prstGeom>
-          <a:noFill/>
-          <a:ln/>
-        </p:spPr>
-        <p:txBody>
-          <a:bodyPr wrap="square" lIns="0" tIns="0" rIns="0" bIns="0" rtlCol="0" anchor="ctr"/>
-          <a:lstStyle/>
-          <a:p>
-            <a:pPr indent="0" marL="0">
-              <a:buNone/>
-            </a:pPr>
-            <a:r>
-              <a:rPr lang="en-US" sz="1800" dirty="0">
-                <a:solidFill>
-                  <a:schemeClr val="tx2"/>
-                </a:solidFill>
-              </a:rPr>
-              <a:t>median EMEA approval wait, the slowest hand-off</a:t>
-            </a:r>
-            <a:endParaRPr lang="en-US" sz="1800" dirty="0"/>
-          </a:p>
-        </p:txBody>
-      </p:sp>
-      <p:sp>
-        <p:nvSpPr>
-          <p:cNvPr id="9" name="Discover note"/>
-          <p:cNvSpPr txBox="1"/>
-          <p:nvPr/>
-        </p:nvSpPr>
-        <p:spPr>
-          <a:xfrm>
-            <a:off x="548640" y="5715000"/>
-            <a:ext cx="6309360" cy="457200"/>
-          </a:xfrm>
-          <a:prstGeom prst="rect">
-            <a:avLst/>
-          </a:prstGeom>
-          <a:noFill/>
-          <a:ln/>
-        </p:spPr>
-        <p:txBody>
-          <a:bodyPr wrap="square" lIns="0" tIns="0" rIns="0" bIns="0" rtlCol="0" anchor="t"/>
-          <a:lstStyle/>
-          <a:p>
-            <a:pPr indent="0" marL="0">
-              <a:buNone/>
-            </a:pPr>
-            <a:r>
-              <a:rPr lang="en-US" sz="1400" i="1" dirty="0">
+              <a:rPr lang="en-US" sz="1600" i="1" dirty="0">
                 <a:solidFill>
                   <a:schemeClr val="accent6"/>
                 </a:solidFill>
               </a:rPr>
-              <a:t>Approval steps and re-quote loops show up as detours from the designed path.</a:t>
-            </a:r>
-            <a:endParaRPr lang="en-US" sz="1400" dirty="0"/>
-          </a:p>
-        </p:txBody>
-      </p:sp>
-      <p:sp>
-        <p:nvSpPr>
-          <p:cNvPr id="10" name="Map frame"/>
-          <p:cNvSpPr/>
-          <p:nvPr/>
-        </p:nvSpPr>
-        <p:spPr>
-          <a:xfrm>
-            <a:off x="7419442" y="1280160"/>
-            <a:ext cx="4239158" cy="4892040"/>
-          </a:xfrm>
-          <a:prstGeom prst="rect">
-            <a:avLst/>
-          </a:prstGeom>
-          <a:solidFill>
-            <a:schemeClr val="bg1"/>
-          </a:solidFill>
-          <a:ln w="12700">
-            <a:solidFill>
-              <a:schemeClr val="accent3"/>
-            </a:solidFill>
-            <a:prstDash val="solid"/>
-          </a:ln>
-        </p:spPr>
-      </p:sp>
-      <p:pic>
-        <p:nvPicPr>
-          <p:cNvPr id="11" name="Process map" descr="Process map from the hosted dashboard">    </p:cNvPr>
-          <p:cNvPicPr>
-            <a:picLocks noChangeAspect="1"/>
-          </p:cNvPicPr>
-          <p:nvPr/>
-        </p:nvPicPr>
-        <p:blipFill>
-          <a:blip r:embed="rId1"/>
-          <a:stretch>
-            <a:fillRect/>
-          </a:stretch>
-        </p:blipFill>
-        <p:spPr>
-          <a:xfrm>
-            <a:off x="7465162" y="1325880"/>
-            <a:ext cx="4147718" cy="4800600"/>
-          </a:xfrm>
-          <a:prstGeom prst="rect">
-            <a:avLst/>
-          </a:prstGeom>
-        </p:spPr>
-      </p:pic>
+              <a:t>This demo covers Identify and Frame on Salesforce data. Commit and Realize run with the customer's process owners.</a:t>
+            </a:r>
+            <a:endParaRPr lang="en-US" sz="1600" dirty="0"/>
+          </a:p>
+        </p:txBody>
+      </p:sp>
       <p:sp>
         <p:nvSpPr>
           <p:cNvPr id="25" name="Slide Number Placeholder 0"/>
@@ -4338,234 +5159,313 @@
                   <a:schemeClr val="tx2"/>
                 </a:solidFill>
               </a:rPr>
-              <a:t>Diagnose: three deviations explain most of the lost value</a:t>
+              <a:t>Discover: the process as it actually runs</a:t>
             </a:r>
             <a:endParaRPr lang="en-US" sz="3000" dirty="0"/>
           </a:p>
         </p:txBody>
       </p:sp>
-      <p:graphicFrame>
-        <p:nvGraphicFramePr>
-          <p:cNvPr id="3" name="Chart 1" descr=""/>
-          <p:cNvGraphicFramePr/>
-          <p:nvPr/>
-        </p:nvGraphicFramePr>
-        <p:xfrm>
-          <a:off x="548640" y="1325880"/>
-          <a:ext cx="3529584" cy="3383280"/>
-        </p:xfrm>
-        <a:graphic xmlns:a="http://schemas.openxmlformats.org/drawingml/2006/main">
-          <a:graphicData uri="http://schemas.openxmlformats.org/drawingml/2006/chart">
-            <c:chart xmlns:c="http://schemas.openxmlformats.org/drawingml/2006/chart" r:id="rId1"/>
-          </a:graphicData>
-        </a:graphic>
-      </p:graphicFrame>
-      <p:sp>
-        <p:nvSpPr>
-          <p:cNvPr id="4" name="Takeaway 1"/>
+      <p:sp>
+        <p:nvSpPr>
+          <p:cNvPr id="3" name="Discover stat 1"/>
+          <p:cNvSpPr txBox="1"/>
+          <p:nvPr/>
+        </p:nvSpPr>
+        <p:spPr>
+          <a:xfrm>
+            <a:off x="548640" y="1508760"/>
+            <a:ext cx="2651760" cy="822960"/>
+          </a:xfrm>
+          <a:prstGeom prst="rect">
+            <a:avLst/>
+          </a:prstGeom>
+          <a:noFill/>
+          <a:ln/>
+        </p:spPr>
+        <p:txBody>
+          <a:bodyPr wrap="square" lIns="0" tIns="0" rIns="0" bIns="0" rtlCol="0" anchor="ctr"/>
+          <a:lstStyle/>
+          <a:p>
+            <a:pPr indent="0" marL="0">
+              <a:buNone/>
+            </a:pPr>
+            <a:r>
+              <a:rPr lang="en-US" sz="4400" b="1" dirty="0">
+                <a:solidFill>
+                  <a:schemeClr val="accent1"/>
+                </a:solidFill>
+              </a:rPr>
+              <a:t>14%</a:t>
+            </a:r>
+            <a:endParaRPr lang="en-US" sz="4400" dirty="0"/>
+          </a:p>
+        </p:txBody>
+      </p:sp>
+      <p:sp>
+        <p:nvSpPr>
+          <p:cNvPr id="4" name="Discover label 1"/>
+          <p:cNvSpPr txBox="1"/>
+          <p:nvPr/>
+        </p:nvSpPr>
+        <p:spPr>
+          <a:xfrm>
+            <a:off x="3291840" y="1508760"/>
+            <a:ext cx="3566160" cy="822960"/>
+          </a:xfrm>
+          <a:prstGeom prst="rect">
+            <a:avLst/>
+          </a:prstGeom>
+          <a:noFill/>
+          <a:ln/>
+        </p:spPr>
+        <p:txBody>
+          <a:bodyPr wrap="square" lIns="0" tIns="0" rIns="0" bIns="0" rtlCol="0" anchor="ctr"/>
+          <a:lstStyle/>
+          <a:p>
+            <a:pPr indent="0" marL="0">
+              <a:buNone/>
+            </a:pPr>
+            <a:r>
+              <a:rPr lang="en-US" sz="1800" dirty="0">
+                <a:solidFill>
+                  <a:schemeClr val="tx2"/>
+                </a:solidFill>
+              </a:rPr>
+              <a:t>of deals follow the designed happy path</a:t>
+            </a:r>
+            <a:endParaRPr lang="en-US" sz="1800" dirty="0"/>
+          </a:p>
+        </p:txBody>
+      </p:sp>
+      <p:sp>
+        <p:nvSpPr>
+          <p:cNvPr id="5" name="Discover stat 2"/>
+          <p:cNvSpPr txBox="1"/>
+          <p:nvPr/>
+        </p:nvSpPr>
+        <p:spPr>
+          <a:xfrm>
+            <a:off x="548640" y="2926080"/>
+            <a:ext cx="2651760" cy="822960"/>
+          </a:xfrm>
+          <a:prstGeom prst="rect">
+            <a:avLst/>
+          </a:prstGeom>
+          <a:noFill/>
+          <a:ln/>
+        </p:spPr>
+        <p:txBody>
+          <a:bodyPr wrap="square" lIns="0" tIns="0" rIns="0" bIns="0" rtlCol="0" anchor="ctr"/>
+          <a:lstStyle/>
+          <a:p>
+            <a:pPr indent="0" marL="0">
+              <a:buNone/>
+            </a:pPr>
+            <a:r>
+              <a:rPr lang="en-US" sz="4400" b="1" dirty="0">
+                <a:solidFill>
+                  <a:schemeClr val="accent1"/>
+                </a:solidFill>
+              </a:rPr>
+              <a:t>67</a:t>
+            </a:r>
+            <a:endParaRPr lang="en-US" sz="4400" dirty="0"/>
+          </a:p>
+        </p:txBody>
+      </p:sp>
+      <p:sp>
+        <p:nvSpPr>
+          <p:cNvPr id="6" name="Discover label 2"/>
+          <p:cNvSpPr txBox="1"/>
+          <p:nvPr/>
+        </p:nvSpPr>
+        <p:spPr>
+          <a:xfrm>
+            <a:off x="3291840" y="2926080"/>
+            <a:ext cx="3566160" cy="822960"/>
+          </a:xfrm>
+          <a:prstGeom prst="rect">
+            <a:avLst/>
+          </a:prstGeom>
+          <a:noFill/>
+          <a:ln/>
+        </p:spPr>
+        <p:txBody>
+          <a:bodyPr wrap="square" lIns="0" tIns="0" rIns="0" bIns="0" rtlCol="0" anchor="ctr"/>
+          <a:lstStyle/>
+          <a:p>
+            <a:pPr indent="0" marL="0">
+              <a:buNone/>
+            </a:pPr>
+            <a:r>
+              <a:rPr lang="en-US" sz="1800" dirty="0">
+                <a:solidFill>
+                  <a:schemeClr val="tx2"/>
+                </a:solidFill>
+              </a:rPr>
+              <a:t>distinct paths across 800 deals</a:t>
+            </a:r>
+            <a:endParaRPr lang="en-US" sz="1800" dirty="0"/>
+          </a:p>
+        </p:txBody>
+      </p:sp>
+      <p:sp>
+        <p:nvSpPr>
+          <p:cNvPr id="7" name="Discover stat 3"/>
+          <p:cNvSpPr txBox="1"/>
+          <p:nvPr/>
+        </p:nvSpPr>
+        <p:spPr>
+          <a:xfrm>
+            <a:off x="548640" y="4343400"/>
+            <a:ext cx="2651760" cy="822960"/>
+          </a:xfrm>
+          <a:prstGeom prst="rect">
+            <a:avLst/>
+          </a:prstGeom>
+          <a:noFill/>
+          <a:ln/>
+        </p:spPr>
+        <p:txBody>
+          <a:bodyPr wrap="square" lIns="0" tIns="0" rIns="0" bIns="0" rtlCol="0" anchor="ctr"/>
+          <a:lstStyle/>
+          <a:p>
+            <a:pPr indent="0" marL="0">
+              <a:buNone/>
+            </a:pPr>
+            <a:r>
+              <a:rPr lang="en-US" sz="4400" b="1" dirty="0">
+                <a:solidFill>
+                  <a:schemeClr val="accent1"/>
+                </a:solidFill>
+              </a:rPr>
+              <a:t>7.0 days</a:t>
+            </a:r>
+            <a:endParaRPr lang="en-US" sz="4400" dirty="0"/>
+          </a:p>
+        </p:txBody>
+      </p:sp>
+      <p:sp>
+        <p:nvSpPr>
+          <p:cNvPr id="8" name="Discover label 3"/>
+          <p:cNvSpPr txBox="1"/>
+          <p:nvPr/>
+        </p:nvSpPr>
+        <p:spPr>
+          <a:xfrm>
+            <a:off x="3291840" y="4343400"/>
+            <a:ext cx="3566160" cy="822960"/>
+          </a:xfrm>
+          <a:prstGeom prst="rect">
+            <a:avLst/>
+          </a:prstGeom>
+          <a:noFill/>
+          <a:ln/>
+        </p:spPr>
+        <p:txBody>
+          <a:bodyPr wrap="square" lIns="0" tIns="0" rIns="0" bIns="0" rtlCol="0" anchor="ctr"/>
+          <a:lstStyle/>
+          <a:p>
+            <a:pPr indent="0" marL="0">
+              <a:buNone/>
+            </a:pPr>
+            <a:r>
+              <a:rPr lang="en-US" sz="1800" dirty="0">
+                <a:solidFill>
+                  <a:schemeClr val="tx2"/>
+                </a:solidFill>
+              </a:rPr>
+              <a:t>median EMEA approval wait, the slowest hand-off</a:t>
+            </a:r>
+            <a:endParaRPr lang="en-US" sz="1800" dirty="0"/>
+          </a:p>
+        </p:txBody>
+      </p:sp>
+      <p:sp>
+        <p:nvSpPr>
+          <p:cNvPr id="9" name="Discover note"/>
+          <p:cNvSpPr txBox="1"/>
+          <p:nvPr/>
+        </p:nvSpPr>
+        <p:spPr>
+          <a:xfrm>
+            <a:off x="548640" y="5715000"/>
+            <a:ext cx="6309360" cy="457200"/>
+          </a:xfrm>
+          <a:prstGeom prst="rect">
+            <a:avLst/>
+          </a:prstGeom>
+          <a:noFill/>
+          <a:ln/>
+        </p:spPr>
+        <p:txBody>
+          <a:bodyPr wrap="square" lIns="0" tIns="0" rIns="0" bIns="0" rtlCol="0" anchor="t"/>
+          <a:lstStyle/>
+          <a:p>
+            <a:pPr indent="0" marL="0">
+              <a:buNone/>
+            </a:pPr>
+            <a:r>
+              <a:rPr lang="en-US" sz="1400" i="1" dirty="0">
+                <a:solidFill>
+                  <a:schemeClr val="accent6"/>
+                </a:solidFill>
+              </a:rPr>
+              <a:t>Approval steps and re-quote loops show up as detours from the designed path.</a:t>
+            </a:r>
+            <a:endParaRPr lang="en-US" sz="1400" dirty="0"/>
+          </a:p>
+        </p:txBody>
+      </p:sp>
+      <p:sp>
+        <p:nvSpPr>
+          <p:cNvPr id="10" name="Map frame"/>
           <p:cNvSpPr/>
           <p:nvPr/>
         </p:nvSpPr>
         <p:spPr>
           <a:xfrm>
-            <a:off x="548640" y="4846320"/>
-            <a:ext cx="3529584" cy="1234440"/>
-          </a:xfrm>
-          <a:prstGeom prst="roundRect">
-            <a:avLst>
-              <a:gd name="adj" fmla="val 8889"/>
-            </a:avLst>
+            <a:off x="7419442" y="1280160"/>
+            <a:ext cx="4239158" cy="4892040"/>
+          </a:xfrm>
+          <a:prstGeom prst="rect">
+            <a:avLst/>
           </a:prstGeom>
           <a:solidFill>
-            <a:schemeClr val="bg2"/>
+            <a:schemeClr val="bg1"/>
           </a:solidFill>
-          <a:ln/>
-        </p:spPr>
-      </p:sp>
-      <p:sp>
-        <p:nvSpPr>
-          <p:cNvPr id="5" name="Takeaway 1 text"/>
-          <p:cNvSpPr txBox="1"/>
-          <p:nvPr/>
-        </p:nvSpPr>
-        <p:spPr>
-          <a:xfrm>
-            <a:off x="731520" y="4956048"/>
-            <a:ext cx="3163824" cy="1005840"/>
-          </a:xfrm>
-          <a:prstGeom prst="rect">
-            <a:avLst/>
-          </a:prstGeom>
-          <a:noFill/>
-          <a:ln/>
-        </p:spPr>
-        <p:txBody>
-          <a:bodyPr wrap="square" lIns="0" tIns="0" rIns="0" bIns="0" rtlCol="0" anchor="ctr"/>
-          <a:lstStyle/>
-          <a:p>
-            <a:pPr indent="0" marL="0">
-              <a:buNone/>
-            </a:pPr>
-            <a:r>
-              <a:rPr lang="en-US" sz="1400" dirty="0">
-                <a:solidFill>
-                  <a:schemeClr val="tx2"/>
-                </a:solidFill>
-              </a:rPr>
-              <a:t>EMEA's single approver adds about 6 days per discounted deal.</a:t>
-            </a:r>
-            <a:endParaRPr lang="en-US" sz="1400" dirty="0"/>
-          </a:p>
-        </p:txBody>
-      </p:sp>
-      <p:graphicFrame>
-        <p:nvGraphicFramePr>
-          <p:cNvPr id="6" name="Chart 2" descr=""/>
-          <p:cNvGraphicFramePr/>
-          <p:nvPr/>
-        </p:nvGraphicFramePr>
-        <p:xfrm>
-          <a:off x="4315968" y="1325880"/>
-          <a:ext cx="3529584" cy="3383280"/>
-        </p:xfrm>
-        <a:graphic xmlns:a="http://schemas.openxmlformats.org/drawingml/2006/main">
-          <a:graphicData uri="http://schemas.openxmlformats.org/drawingml/2006/chart">
-            <c:chart xmlns:c="http://schemas.openxmlformats.org/drawingml/2006/chart" r:id="rId2"/>
-          </a:graphicData>
-        </a:graphic>
-      </p:graphicFrame>
-      <p:sp>
-        <p:nvSpPr>
-          <p:cNvPr id="7" name="Takeaway 2"/>
-          <p:cNvSpPr/>
-          <p:nvPr/>
-        </p:nvSpPr>
-        <p:spPr>
-          <a:xfrm>
-            <a:off x="4315968" y="4846320"/>
-            <a:ext cx="3529584" cy="1234440"/>
-          </a:xfrm>
-          <a:prstGeom prst="roundRect">
-            <a:avLst>
-              <a:gd name="adj" fmla="val 8889"/>
-            </a:avLst>
-          </a:prstGeom>
-          <a:solidFill>
-            <a:schemeClr val="bg2"/>
-          </a:solidFill>
-          <a:ln/>
-        </p:spPr>
-      </p:sp>
-      <p:sp>
-        <p:nvSpPr>
-          <p:cNvPr id="8" name="Takeaway 2 text"/>
-          <p:cNvSpPr txBox="1"/>
-          <p:nvPr/>
-        </p:nvSpPr>
-        <p:spPr>
-          <a:xfrm>
-            <a:off x="4498848" y="4956048"/>
-            <a:ext cx="3163824" cy="1005840"/>
-          </a:xfrm>
-          <a:prstGeom prst="rect">
-            <a:avLst/>
-          </a:prstGeom>
-          <a:noFill/>
-          <a:ln/>
-        </p:spPr>
-        <p:txBody>
-          <a:bodyPr wrap="square" lIns="0" tIns="0" rIns="0" bIns="0" rtlCol="0" anchor="ctr"/>
-          <a:lstStyle/>
-          <a:p>
-            <a:pPr indent="0" marL="0">
-              <a:buNone/>
-            </a:pPr>
-            <a:r>
-              <a:rPr lang="en-US" sz="1400" dirty="0">
-                <a:solidFill>
-                  <a:schemeClr val="tx2"/>
-                </a:solidFill>
-              </a:rPr>
-              <a:t>19% of negotiated deals are re-quoted, and they win 18 points less often.</a:t>
-            </a:r>
-            <a:endParaRPr lang="en-US" sz="1400" dirty="0"/>
-          </a:p>
-        </p:txBody>
-      </p:sp>
-      <p:graphicFrame>
-        <p:nvGraphicFramePr>
-          <p:cNvPr id="9" name="Chart 3" descr=""/>
-          <p:cNvGraphicFramePr/>
-          <p:nvPr/>
-        </p:nvGraphicFramePr>
-        <p:xfrm>
-          <a:off x="8083296" y="1325880"/>
-          <a:ext cx="3529584" cy="3383280"/>
-        </p:xfrm>
-        <a:graphic xmlns:a="http://schemas.openxmlformats.org/drawingml/2006/main">
-          <a:graphicData uri="http://schemas.openxmlformats.org/drawingml/2006/chart">
-            <c:chart xmlns:c="http://schemas.openxmlformats.org/drawingml/2006/chart" r:id="rId3"/>
-          </a:graphicData>
-        </a:graphic>
-      </p:graphicFrame>
-      <p:sp>
-        <p:nvSpPr>
-          <p:cNvPr id="10" name="Takeaway 3"/>
-          <p:cNvSpPr/>
-          <p:nvPr/>
-        </p:nvSpPr>
-        <p:spPr>
-          <a:xfrm>
-            <a:off x="8083296" y="4846320"/>
-            <a:ext cx="3529584" cy="1234440"/>
-          </a:xfrm>
-          <a:prstGeom prst="roundRect">
-            <a:avLst>
-              <a:gd name="adj" fmla="val 8889"/>
-            </a:avLst>
-          </a:prstGeom>
-          <a:solidFill>
-            <a:schemeClr val="bg2"/>
-          </a:solidFill>
-          <a:ln/>
-        </p:spPr>
-      </p:sp>
-      <p:sp>
-        <p:nvSpPr>
-          <p:cNvPr id="11" name="Takeaway 3 text"/>
-          <p:cNvSpPr txBox="1"/>
-          <p:nvPr/>
-        </p:nvSpPr>
-        <p:spPr>
-          <a:xfrm>
-            <a:off x="8266176" y="4956048"/>
-            <a:ext cx="3163824" cy="1005840"/>
-          </a:xfrm>
-          <a:prstGeom prst="rect">
-            <a:avLst/>
-          </a:prstGeom>
-          <a:noFill/>
-          <a:ln/>
-        </p:spPr>
-        <p:txBody>
-          <a:bodyPr wrap="square" lIns="0" tIns="0" rIns="0" bIns="0" rtlCol="0" anchor="ctr"/>
-          <a:lstStyle/>
-          <a:p>
-            <a:pPr indent="0" marL="0">
-              <a:buNone/>
-            </a:pPr>
-            <a:r>
-              <a:rPr lang="en-US" sz="1400" dirty="0">
-                <a:solidFill>
-                  <a:schemeClr val="tx2"/>
-                </a:solidFill>
-              </a:rPr>
-              <a:t>12% of deals skip Qualification and win less than half as often.</a:t>
-            </a:r>
-            <a:endParaRPr lang="en-US" sz="1400" dirty="0"/>
-          </a:p>
-        </p:txBody>
-      </p:sp>
+          <a:ln w="12700">
+            <a:solidFill>
+              <a:schemeClr val="accent3"/>
+            </a:solidFill>
+            <a:prstDash val="solid"/>
+          </a:ln>
+        </p:spPr>
+      </p:sp>
+      <p:pic>
+        <p:nvPicPr>
+          <p:cNvPr id="11" name="Process map" descr="Process map from the hosted dashboard">    </p:cNvPr>
+          <p:cNvPicPr>
+            <a:picLocks noChangeAspect="1"/>
+          </p:cNvPicPr>
+          <p:nvPr/>
+        </p:nvPicPr>
+        <p:blipFill>
+          <a:blip r:embed="rId1"/>
+          <a:stretch>
+            <a:fillRect/>
+          </a:stretch>
+        </p:blipFill>
+        <p:spPr>
+          <a:xfrm>
+            <a:off x="7465162" y="1325880"/>
+            <a:ext cx="4147718" cy="4800600"/>
+          </a:xfrm>
+          <a:prstGeom prst="rect">
+            <a:avLst/>
+          </a:prstGeom>
+        </p:spPr>
+      </p:pic>
       <p:sp>
         <p:nvSpPr>
           <p:cNvPr id="25" name="Slide Number Placeholder 0"/>
@@ -4668,1066 +5568,38 @@
                   <a:schemeClr val="tx2"/>
                 </a:solidFill>
               </a:rPr>
-              <a:t>Value case: reduce re-quotes in quote-to-close</a:t>
+              <a:t>Diagnose: three deviations explain most of the lost value</a:t>
             </a:r>
             <a:endParaRPr lang="en-US" sz="3000" dirty="0"/>
           </a:p>
         </p:txBody>
       </p:sp>
-      <p:sp>
-        <p:nvSpPr>
-          <p:cNvPr id="3" name="Filter bar"/>
+      <p:graphicFrame>
+        <p:nvGraphicFramePr>
+          <p:cNvPr id="3" name="Chart 1" descr=""/>
+          <p:cNvGraphicFramePr/>
+          <p:nvPr/>
+        </p:nvGraphicFramePr>
+        <p:xfrm>
+          <a:off x="548640" y="1325880"/>
+          <a:ext cx="3529584" cy="3383280"/>
+        </p:xfrm>
+        <a:graphic xmlns:a="http://schemas.openxmlformats.org/drawingml/2006/main">
+          <a:graphicData uri="http://schemas.openxmlformats.org/drawingml/2006/chart">
+            <c:chart xmlns:c="http://schemas.openxmlformats.org/drawingml/2006/chart" r:id="rId1"/>
+          </a:graphicData>
+        </a:graphic>
+      </p:graphicFrame>
+      <p:sp>
+        <p:nvSpPr>
+          <p:cNvPr id="4" name="Takeaway 1"/>
           <p:cNvSpPr/>
           <p:nvPr/>
         </p:nvSpPr>
         <p:spPr>
           <a:xfrm>
-            <a:off x="548640" y="1234440"/>
-            <a:ext cx="11064240" cy="411480"/>
-          </a:xfrm>
-          <a:prstGeom prst="roundRect">
-            <a:avLst>
-              <a:gd name="adj" fmla="val 26667"/>
-            </a:avLst>
-          </a:prstGeom>
-          <a:solidFill>
-            <a:schemeClr val="bg2"/>
-          </a:solidFill>
-          <a:ln/>
-        </p:spPr>
-      </p:sp>
-      <p:sp>
-        <p:nvSpPr>
-          <p:cNvPr id="4" name="Filter text"/>
-          <p:cNvSpPr txBox="1"/>
-          <p:nvPr/>
-        </p:nvSpPr>
-        <p:spPr>
-          <a:xfrm>
-            <a:off x="777240" y="1234440"/>
-            <a:ext cx="10607040" cy="411480"/>
-          </a:xfrm>
-          <a:prstGeom prst="rect">
-            <a:avLst/>
-          </a:prstGeom>
-          <a:noFill/>
-          <a:ln/>
-        </p:spPr>
-        <p:txBody>
-          <a:bodyPr wrap="square" lIns="0" tIns="0" rIns="0" bIns="0" rtlCol="0" anchor="ctr"/>
-          <a:lstStyle/>
-          <a:p>
-            <a:pPr indent="0" marL="0">
-              <a:buNone/>
-            </a:pPr>
-            <a:r>
-              <a:rPr lang="en-US" sz="1200" dirty="0">
-                <a:solidFill>
-                  <a:schemeClr val="tx2"/>
-                </a:solidFill>
-              </a:rPr>
-              <a:t>Time frame: 2025-10 to 2026-09   ·   New business   ·   Deals that reached Negotiation   ·   Owner: VP Revenue Operations</a:t>
-            </a:r>
-            <a:endParaRPr lang="en-US" sz="1200" dirty="0"/>
-          </a:p>
-        </p:txBody>
-      </p:sp>
-      <p:sp>
-        <p:nvSpPr>
-          <p:cNvPr id="5" name="Value column 1 heading"/>
-          <p:cNvSpPr txBox="1"/>
-          <p:nvPr/>
-        </p:nvSpPr>
-        <p:spPr>
-          <a:xfrm>
-            <a:off x="548640" y="1828800"/>
-            <a:ext cx="3529584" cy="365760"/>
-          </a:xfrm>
-          <a:prstGeom prst="rect">
-            <a:avLst/>
-          </a:prstGeom>
-          <a:noFill/>
-          <a:ln/>
-        </p:spPr>
-        <p:txBody>
-          <a:bodyPr wrap="square" lIns="0" tIns="0" rIns="0" bIns="0" rtlCol="0" anchor="t"/>
-          <a:lstStyle/>
-          <a:p>
-            <a:pPr indent="0" marL="0">
-              <a:buNone/>
-            </a:pPr>
-            <a:r>
-              <a:rPr lang="en-US" sz="1600" b="1" dirty="0">
-                <a:solidFill>
-                  <a:schemeClr val="accent6"/>
-                </a:solidFill>
-              </a:rPr>
-              <a:t>Challenge</a:t>
-            </a:r>
-            <a:endParaRPr lang="en-US" sz="1600" dirty="0"/>
-          </a:p>
-        </p:txBody>
-      </p:sp>
-      <p:sp>
-        <p:nvSpPr>
-          <p:cNvPr id="6" name="Value column 1 body"/>
-          <p:cNvSpPr txBox="1"/>
-          <p:nvPr/>
-        </p:nvSpPr>
-        <p:spPr>
-          <a:xfrm>
-            <a:off x="548640" y="2240280"/>
-            <a:ext cx="3529584" cy="1828800"/>
-          </a:xfrm>
-          <a:prstGeom prst="rect">
-            <a:avLst/>
-          </a:prstGeom>
-          <a:noFill/>
-          <a:ln/>
-        </p:spPr>
-        <p:txBody>
-          <a:bodyPr wrap="square" lIns="0" tIns="0" rIns="0" bIns="0" rtlCol="0" anchor="t"/>
-          <a:lstStyle/>
-          <a:p>
-            <a:pPr marL="342900" indent="-342900">
-              <a:spcAft>
-                <a:spcPts val="600"/>
-              </a:spcAft>
-              <a:buSzPct val="100000"/>
-              <a:buChar char="•"/>
-            </a:pPr>
-            <a:r>
-              <a:rPr lang="en-US" sz="1400" dirty="0">
-                <a:solidFill>
-                  <a:schemeClr val="tx1"/>
-                </a:solidFill>
-              </a:rPr>
-              <a:t>750 negotiated deals a year; 19% loop back for a re-quote</a:t>
-            </a:r>
-            <a:endParaRPr lang="en-US" sz="1400" dirty="0"/>
-          </a:p>
-          <a:p>
-            <a:pPr marL="342900" indent="-342900">
-              <a:spcAft>
-                <a:spcPts val="600"/>
-              </a:spcAft>
-              <a:buSzPct val="100000"/>
-              <a:buChar char="•"/>
-            </a:pPr>
-            <a:r>
-              <a:rPr lang="en-US" sz="1400" dirty="0">
-                <a:solidFill>
-                  <a:schemeClr val="tx1"/>
-                </a:solidFill>
-              </a:rPr>
-              <a:t>Re-quoted deals win 31% vs 49%</a:t>
-            </a:r>
-            <a:endParaRPr lang="en-US" sz="1400" dirty="0"/>
-          </a:p>
-          <a:p>
-            <a:pPr marL="342900" indent="-342900">
-              <a:spcAft>
-                <a:spcPts val="600"/>
-              </a:spcAft>
-              <a:buSzPct val="100000"/>
-              <a:buChar char="•"/>
-            </a:pPr>
-            <a:r>
-              <a:rPr lang="en-US" sz="1400" dirty="0">
-                <a:solidFill>
-                  <a:schemeClr val="tx1"/>
-                </a:solidFill>
-              </a:rPr>
-              <a:t>EMEA approvals take 7.0 days vs 1.2</a:t>
-            </a:r>
-            <a:endParaRPr lang="en-US" sz="1400" dirty="0"/>
-          </a:p>
-        </p:txBody>
-      </p:sp>
-      <p:sp>
-        <p:nvSpPr>
-          <p:cNvPr id="7" name="Value column 2 heading"/>
-          <p:cNvSpPr txBox="1"/>
-          <p:nvPr/>
-        </p:nvSpPr>
-        <p:spPr>
-          <a:xfrm>
-            <a:off x="4315968" y="1828800"/>
-            <a:ext cx="3529584" cy="365760"/>
-          </a:xfrm>
-          <a:prstGeom prst="rect">
-            <a:avLst/>
-          </a:prstGeom>
-          <a:noFill/>
-          <a:ln/>
-        </p:spPr>
-        <p:txBody>
-          <a:bodyPr wrap="square" lIns="0" tIns="0" rIns="0" bIns="0" rtlCol="0" anchor="t"/>
-          <a:lstStyle/>
-          <a:p>
-            <a:pPr indent="0" marL="0">
-              <a:buNone/>
-            </a:pPr>
-            <a:r>
-              <a:rPr lang="en-US" sz="1600" b="1" dirty="0">
-                <a:solidFill>
-                  <a:schemeClr val="accent6"/>
-                </a:solidFill>
-              </a:rPr>
-              <a:t>Root cause (to capture)</a:t>
-            </a:r>
-            <a:endParaRPr lang="en-US" sz="1600" dirty="0"/>
-          </a:p>
-        </p:txBody>
-      </p:sp>
-      <p:sp>
-        <p:nvSpPr>
-          <p:cNvPr id="8" name="Value column 2 body"/>
-          <p:cNvSpPr txBox="1"/>
-          <p:nvPr/>
-        </p:nvSpPr>
-        <p:spPr>
-          <a:xfrm>
-            <a:off x="4315968" y="2240280"/>
-            <a:ext cx="3529584" cy="1828800"/>
-          </a:xfrm>
-          <a:prstGeom prst="rect">
-            <a:avLst/>
-          </a:prstGeom>
-          <a:noFill/>
-          <a:ln/>
-        </p:spPr>
-        <p:txBody>
-          <a:bodyPr wrap="square" lIns="0" tIns="0" rIns="0" bIns="0" rtlCol="0" anchor="t"/>
-          <a:lstStyle/>
-          <a:p>
-            <a:pPr marL="342900" indent="-342900">
-              <a:spcAft>
-                <a:spcPts val="600"/>
-              </a:spcAft>
-              <a:buSzPct val="100000"/>
-              <a:buChar char="•"/>
-            </a:pPr>
-            <a:r>
-              <a:rPr lang="en-US" sz="1400" dirty="0">
-                <a:solidFill>
-                  <a:schemeClr val="tx1"/>
-                </a:solidFill>
-              </a:rPr>
-              <a:t>Reason codes: quote expired, discount, scope, pricing error</a:t>
-            </a:r>
-            <a:endParaRPr lang="en-US" sz="1400" dirty="0"/>
-          </a:p>
-          <a:p>
-            <a:pPr marL="342900" indent="-342900">
-              <a:spcAft>
-                <a:spcPts val="600"/>
-              </a:spcAft>
-              <a:buSzPct val="100000"/>
-              <a:buChar char="•"/>
-            </a:pPr>
-            <a:r>
-              <a:rPr lang="en-US" sz="1400" dirty="0">
-                <a:solidFill>
-                  <a:schemeClr val="tx1"/>
-                </a:solidFill>
-              </a:rPr>
-              <a:t>Hotspots by approver queue, region and rep</a:t>
-            </a:r>
-            <a:endParaRPr lang="en-US" sz="1400" dirty="0"/>
-          </a:p>
-          <a:p>
-            <a:pPr marL="342900" indent="-342900">
-              <a:spcAft>
-                <a:spcPts val="600"/>
-              </a:spcAft>
-              <a:buSzPct val="100000"/>
-              <a:buChar char="•"/>
-            </a:pPr>
-            <a:r>
-              <a:rPr lang="en-US" sz="1400" dirty="0">
-                <a:solidFill>
-                  <a:schemeClr val="tx1"/>
-                </a:solidFill>
-              </a:rPr>
-              <a:t>Confirm: slow approval → expired quote → re-quote</a:t>
-            </a:r>
-            <a:endParaRPr lang="en-US" sz="1400" dirty="0"/>
-          </a:p>
-        </p:txBody>
-      </p:sp>
-      <p:sp>
-        <p:nvSpPr>
-          <p:cNvPr id="9" name="Value column 3 heading"/>
-          <p:cNvSpPr txBox="1"/>
-          <p:nvPr/>
-        </p:nvSpPr>
-        <p:spPr>
-          <a:xfrm>
-            <a:off x="8083296" y="1828800"/>
-            <a:ext cx="3529584" cy="365760"/>
-          </a:xfrm>
-          <a:prstGeom prst="rect">
-            <a:avLst/>
-          </a:prstGeom>
-          <a:noFill/>
-          <a:ln/>
-        </p:spPr>
-        <p:txBody>
-          <a:bodyPr wrap="square" lIns="0" tIns="0" rIns="0" bIns="0" rtlCol="0" anchor="t"/>
-          <a:lstStyle/>
-          <a:p>
-            <a:pPr indent="0" marL="0">
-              <a:buNone/>
-            </a:pPr>
-            <a:r>
-              <a:rPr lang="en-US" sz="1600" b="1" dirty="0">
-                <a:solidFill>
-                  <a:schemeClr val="accent6"/>
-                </a:solidFill>
-              </a:rPr>
-              <a:t>Solution with Apromore</a:t>
-            </a:r>
-            <a:endParaRPr lang="en-US" sz="1600" dirty="0"/>
-          </a:p>
-        </p:txBody>
-      </p:sp>
-      <p:sp>
-        <p:nvSpPr>
-          <p:cNvPr id="10" name="Value column 3 body"/>
-          <p:cNvSpPr txBox="1"/>
-          <p:nvPr/>
-        </p:nvSpPr>
-        <p:spPr>
-          <a:xfrm>
-            <a:off x="8083296" y="2240280"/>
-            <a:ext cx="3529584" cy="1828800"/>
-          </a:xfrm>
-          <a:prstGeom prst="rect">
-            <a:avLst/>
-          </a:prstGeom>
-          <a:noFill/>
-          <a:ln/>
-        </p:spPr>
-        <p:txBody>
-          <a:bodyPr wrap="square" lIns="0" tIns="0" rIns="0" bIns="0" rtlCol="0" anchor="t"/>
-          <a:lstStyle/>
-          <a:p>
-            <a:pPr marL="342900" indent="-342900">
-              <a:spcAft>
-                <a:spcPts val="600"/>
-              </a:spcAft>
-              <a:buSzPct val="100000"/>
-              <a:buChar char="•"/>
-            </a:pPr>
-            <a:r>
-              <a:rPr lang="en-US" sz="1400" dirty="0">
-                <a:solidFill>
-                  <a:schemeClr val="tx1"/>
-                </a:solidFill>
-              </a:rPr>
-              <a:t>Performance views show where quotes wait and loop</a:t>
-            </a:r>
-            <a:endParaRPr lang="en-US" sz="1400" dirty="0"/>
-          </a:p>
-          <a:p>
-            <a:pPr marL="342900" indent="-342900">
-              <a:spcAft>
-                <a:spcPts val="600"/>
-              </a:spcAft>
-              <a:buSzPct val="100000"/>
-              <a:buChar char="•"/>
-            </a:pPr>
-            <a:r>
-              <a:rPr lang="en-US" sz="1400" dirty="0">
-                <a:solidFill>
-                  <a:schemeClr val="tx1"/>
-                </a:solidFill>
-              </a:rPr>
-              <a:t>Conformance checking flags skipped steps</a:t>
-            </a:r>
-            <a:endParaRPr lang="en-US" sz="1400" dirty="0"/>
-          </a:p>
-          <a:p>
-            <a:pPr marL="342900" indent="-342900">
-              <a:spcAft>
-                <a:spcPts val="600"/>
-              </a:spcAft>
-              <a:buSzPct val="100000"/>
-              <a:buChar char="•"/>
-            </a:pPr>
-            <a:r>
-              <a:rPr lang="en-US" sz="1400" dirty="0">
-                <a:solidFill>
-                  <a:schemeClr val="tx1"/>
-                </a:solidFill>
-              </a:rPr>
-              <a:t>Simulate a delegated EMEA approval threshold first</a:t>
-            </a:r>
-            <a:endParaRPr lang="en-US" sz="1400" dirty="0"/>
-          </a:p>
-        </p:txBody>
-      </p:sp>
-      <p:sp>
-        <p:nvSpPr>
-          <p:cNvPr id="11" name="Chain 1 label"/>
-          <p:cNvSpPr txBox="1"/>
-          <p:nvPr/>
-        </p:nvSpPr>
-        <p:spPr>
-          <a:xfrm>
-            <a:off x="548640" y="4251960"/>
-            <a:ext cx="1508760" cy="411480"/>
-          </a:xfrm>
-          <a:prstGeom prst="rect">
-            <a:avLst/>
-          </a:prstGeom>
-          <a:noFill/>
-          <a:ln/>
-        </p:spPr>
-        <p:txBody>
-          <a:bodyPr wrap="square" lIns="0" tIns="0" rIns="0" bIns="0" rtlCol="0" anchor="b"/>
-          <a:lstStyle/>
-          <a:p>
-            <a:pPr algn="ctr" indent="0" marL="0">
-              <a:buNone/>
-            </a:pPr>
-            <a:r>
-              <a:rPr lang="en-US" sz="1200" b="1" dirty="0">
-                <a:solidFill>
-                  <a:schemeClr val="tx2"/>
-                </a:solidFill>
-              </a:rPr>
-              <a:t>Negotiated deals / yr</a:t>
-            </a:r>
-            <a:endParaRPr lang="en-US" sz="1200" dirty="0"/>
-          </a:p>
-        </p:txBody>
-      </p:sp>
-      <p:sp>
-        <p:nvSpPr>
-          <p:cNvPr id="12" name="Chain 1 box"/>
-          <p:cNvSpPr/>
-          <p:nvPr/>
-        </p:nvSpPr>
-        <p:spPr>
-          <a:xfrm>
-            <a:off x="548640" y="4709160"/>
-            <a:ext cx="1508760" cy="777240"/>
-          </a:xfrm>
-          <a:prstGeom prst="roundRect">
-            <a:avLst>
-              <a:gd name="adj" fmla="val 14118"/>
-            </a:avLst>
-          </a:prstGeom>
-          <a:solidFill>
-            <a:schemeClr val="bg2"/>
-          </a:solidFill>
-          <a:ln/>
-        </p:spPr>
-      </p:sp>
-      <p:sp>
-        <p:nvSpPr>
-          <p:cNvPr id="13" name="Chain 1 value"/>
-          <p:cNvSpPr txBox="1"/>
-          <p:nvPr/>
-        </p:nvSpPr>
-        <p:spPr>
-          <a:xfrm>
-            <a:off x="548640" y="4709160"/>
-            <a:ext cx="1508760" cy="777240"/>
-          </a:xfrm>
-          <a:prstGeom prst="rect">
-            <a:avLst/>
-          </a:prstGeom>
-          <a:noFill/>
-          <a:ln/>
-        </p:spPr>
-        <p:txBody>
-          <a:bodyPr wrap="square" lIns="0" tIns="0" rIns="0" bIns="0" rtlCol="0" anchor="ctr"/>
-          <a:lstStyle/>
-          <a:p>
-            <a:pPr algn="ctr" indent="0" marL="0">
-              <a:buNone/>
-            </a:pPr>
-            <a:r>
-              <a:rPr lang="en-US" sz="2200" b="1" dirty="0">
-                <a:solidFill>
-                  <a:schemeClr val="tx2"/>
-                </a:solidFill>
-              </a:rPr>
-              <a:t>750</a:t>
-            </a:r>
-            <a:endParaRPr lang="en-US" sz="2200" dirty="0"/>
-          </a:p>
-        </p:txBody>
-      </p:sp>
-      <p:sp>
-        <p:nvSpPr>
-          <p:cNvPr id="14" name="Chain 1 operator"/>
-          <p:cNvSpPr txBox="1"/>
-          <p:nvPr/>
-        </p:nvSpPr>
-        <p:spPr>
-          <a:xfrm>
-            <a:off x="2057400" y="4709160"/>
-            <a:ext cx="274320" cy="777240"/>
-          </a:xfrm>
-          <a:prstGeom prst="rect">
-            <a:avLst/>
-          </a:prstGeom>
-          <a:noFill/>
-          <a:ln/>
-        </p:spPr>
-        <p:txBody>
-          <a:bodyPr wrap="square" lIns="0" tIns="0" rIns="0" bIns="0" rtlCol="0" anchor="ctr"/>
-          <a:lstStyle/>
-          <a:p>
-            <a:pPr algn="ctr" indent="0" marL="0">
-              <a:buNone/>
-            </a:pPr>
-            <a:r>
-              <a:rPr lang="en-US" sz="2000" dirty="0">
-                <a:solidFill>
-                  <a:schemeClr val="accent6"/>
-                </a:solidFill>
-              </a:rPr>
-              <a:t>×</a:t>
-            </a:r>
-            <a:endParaRPr lang="en-US" sz="2000" dirty="0"/>
-          </a:p>
-        </p:txBody>
-      </p:sp>
-      <p:sp>
-        <p:nvSpPr>
-          <p:cNvPr id="15" name="Chain 2 label"/>
-          <p:cNvSpPr txBox="1"/>
-          <p:nvPr/>
-        </p:nvSpPr>
-        <p:spPr>
-          <a:xfrm>
-            <a:off x="2331720" y="4251960"/>
-            <a:ext cx="1508760" cy="411480"/>
-          </a:xfrm>
-          <a:prstGeom prst="rect">
-            <a:avLst/>
-          </a:prstGeom>
-          <a:noFill/>
-          <a:ln/>
-        </p:spPr>
-        <p:txBody>
-          <a:bodyPr wrap="square" lIns="0" tIns="0" rIns="0" bIns="0" rtlCol="0" anchor="b"/>
-          <a:lstStyle/>
-          <a:p>
-            <a:pPr algn="ctr" indent="0" marL="0">
-              <a:buNone/>
-            </a:pPr>
-            <a:r>
-              <a:rPr lang="en-US" sz="1200" b="1" dirty="0">
-                <a:solidFill>
-                  <a:schemeClr val="tx2"/>
-                </a:solidFill>
-              </a:rPr>
-              <a:t>Re-quotes per deal</a:t>
-            </a:r>
-            <a:endParaRPr lang="en-US" sz="1200" dirty="0"/>
-          </a:p>
-        </p:txBody>
-      </p:sp>
-      <p:sp>
-        <p:nvSpPr>
-          <p:cNvPr id="16" name="Chain 2 box"/>
-          <p:cNvSpPr/>
-          <p:nvPr/>
-        </p:nvSpPr>
-        <p:spPr>
-          <a:xfrm>
-            <a:off x="2331720" y="4709160"/>
-            <a:ext cx="1508760" cy="777240"/>
-          </a:xfrm>
-          <a:prstGeom prst="roundRect">
-            <a:avLst>
-              <a:gd name="adj" fmla="val 14118"/>
-            </a:avLst>
-          </a:prstGeom>
-          <a:solidFill>
-            <a:schemeClr val="bg2"/>
-          </a:solidFill>
-          <a:ln/>
-        </p:spPr>
-      </p:sp>
-      <p:sp>
-        <p:nvSpPr>
-          <p:cNvPr id="17" name="Chain 2 value"/>
-          <p:cNvSpPr txBox="1"/>
-          <p:nvPr/>
-        </p:nvSpPr>
-        <p:spPr>
-          <a:xfrm>
-            <a:off x="2331720" y="4709160"/>
-            <a:ext cx="1508760" cy="777240"/>
-          </a:xfrm>
-          <a:prstGeom prst="rect">
-            <a:avLst/>
-          </a:prstGeom>
-          <a:noFill/>
-          <a:ln/>
-        </p:spPr>
-        <p:txBody>
-          <a:bodyPr wrap="square" lIns="0" tIns="0" rIns="0" bIns="0" rtlCol="0" anchor="ctr"/>
-          <a:lstStyle/>
-          <a:p>
-            <a:pPr algn="ctr" indent="0" marL="0">
-              <a:buNone/>
-            </a:pPr>
-            <a:r>
-              <a:rPr lang="en-US" sz="2200" b="1" dirty="0">
-                <a:solidFill>
-                  <a:schemeClr val="tx2"/>
-                </a:solidFill>
-              </a:rPr>
-              <a:t>0.19</a:t>
-            </a:r>
-            <a:endParaRPr lang="en-US" sz="2200" dirty="0"/>
-          </a:p>
-        </p:txBody>
-      </p:sp>
-      <p:sp>
-        <p:nvSpPr>
-          <p:cNvPr id="18" name="Chain 2 operator"/>
-          <p:cNvSpPr txBox="1"/>
-          <p:nvPr/>
-        </p:nvSpPr>
-        <p:spPr>
-          <a:xfrm>
-            <a:off x="3840480" y="4709160"/>
-            <a:ext cx="274320" cy="777240"/>
-          </a:xfrm>
-          <a:prstGeom prst="rect">
-            <a:avLst/>
-          </a:prstGeom>
-          <a:noFill/>
-          <a:ln/>
-        </p:spPr>
-        <p:txBody>
-          <a:bodyPr wrap="square" lIns="0" tIns="0" rIns="0" bIns="0" rtlCol="0" anchor="ctr"/>
-          <a:lstStyle/>
-          <a:p>
-            <a:pPr algn="ctr" indent="0" marL="0">
-              <a:buNone/>
-            </a:pPr>
-            <a:r>
-              <a:rPr lang="en-US" sz="2000" dirty="0">
-                <a:solidFill>
-                  <a:schemeClr val="accent6"/>
-                </a:solidFill>
-              </a:rPr>
-              <a:t>×</a:t>
-            </a:r>
-            <a:endParaRPr lang="en-US" sz="2000" dirty="0"/>
-          </a:p>
-        </p:txBody>
-      </p:sp>
-      <p:sp>
-        <p:nvSpPr>
-          <p:cNvPr id="19" name="Chain 3 label"/>
-          <p:cNvSpPr txBox="1"/>
-          <p:nvPr/>
-        </p:nvSpPr>
-        <p:spPr>
-          <a:xfrm>
-            <a:off x="4114800" y="4251960"/>
-            <a:ext cx="1508760" cy="411480"/>
-          </a:xfrm>
-          <a:prstGeom prst="rect">
-            <a:avLst/>
-          </a:prstGeom>
-          <a:noFill/>
-          <a:ln/>
-        </p:spPr>
-        <p:txBody>
-          <a:bodyPr wrap="square" lIns="0" tIns="0" rIns="0" bIns="0" rtlCol="0" anchor="b"/>
-          <a:lstStyle/>
-          <a:p>
-            <a:pPr algn="ctr" indent="0" marL="0">
-              <a:buNone/>
-            </a:pPr>
-            <a:r>
-              <a:rPr lang="en-US" sz="1200" b="1" dirty="0">
-                <a:solidFill>
-                  <a:schemeClr val="tx2"/>
-                </a:solidFill>
-              </a:rPr>
-              <a:t>Win-rate gap</a:t>
-            </a:r>
-            <a:endParaRPr lang="en-US" sz="1200" dirty="0"/>
-          </a:p>
-        </p:txBody>
-      </p:sp>
-      <p:sp>
-        <p:nvSpPr>
-          <p:cNvPr id="20" name="Chain 3 box"/>
-          <p:cNvSpPr/>
-          <p:nvPr/>
-        </p:nvSpPr>
-        <p:spPr>
-          <a:xfrm>
-            <a:off x="4114800" y="4709160"/>
-            <a:ext cx="1508760" cy="777240"/>
-          </a:xfrm>
-          <a:prstGeom prst="roundRect">
-            <a:avLst>
-              <a:gd name="adj" fmla="val 14118"/>
-            </a:avLst>
-          </a:prstGeom>
-          <a:solidFill>
-            <a:schemeClr val="bg2"/>
-          </a:solidFill>
-          <a:ln/>
-        </p:spPr>
-      </p:sp>
-      <p:sp>
-        <p:nvSpPr>
-          <p:cNvPr id="21" name="Chain 3 value"/>
-          <p:cNvSpPr txBox="1"/>
-          <p:nvPr/>
-        </p:nvSpPr>
-        <p:spPr>
-          <a:xfrm>
-            <a:off x="4114800" y="4709160"/>
-            <a:ext cx="1508760" cy="777240"/>
-          </a:xfrm>
-          <a:prstGeom prst="rect">
-            <a:avLst/>
-          </a:prstGeom>
-          <a:noFill/>
-          <a:ln/>
-        </p:spPr>
-        <p:txBody>
-          <a:bodyPr wrap="square" lIns="0" tIns="0" rIns="0" bIns="0" rtlCol="0" anchor="ctr"/>
-          <a:lstStyle/>
-          <a:p>
-            <a:pPr algn="ctr" indent="0" marL="0">
-              <a:buNone/>
-            </a:pPr>
-            <a:r>
-              <a:rPr lang="en-US" sz="2200" b="1" dirty="0">
-                <a:solidFill>
-                  <a:schemeClr val="tx2"/>
-                </a:solidFill>
-              </a:rPr>
-              <a:t>17.5 pts</a:t>
-            </a:r>
-            <a:endParaRPr lang="en-US" sz="2200" dirty="0"/>
-          </a:p>
-        </p:txBody>
-      </p:sp>
-      <p:sp>
-        <p:nvSpPr>
-          <p:cNvPr id="22" name="Chain 3 operator"/>
-          <p:cNvSpPr txBox="1"/>
-          <p:nvPr/>
-        </p:nvSpPr>
-        <p:spPr>
-          <a:xfrm>
-            <a:off x="5623560" y="4709160"/>
-            <a:ext cx="274320" cy="777240"/>
-          </a:xfrm>
-          <a:prstGeom prst="rect">
-            <a:avLst/>
-          </a:prstGeom>
-          <a:noFill/>
-          <a:ln/>
-        </p:spPr>
-        <p:txBody>
-          <a:bodyPr wrap="square" lIns="0" tIns="0" rIns="0" bIns="0" rtlCol="0" anchor="ctr"/>
-          <a:lstStyle/>
-          <a:p>
-            <a:pPr algn="ctr" indent="0" marL="0">
-              <a:buNone/>
-            </a:pPr>
-            <a:r>
-              <a:rPr lang="en-US" sz="2000" dirty="0">
-                <a:solidFill>
-                  <a:schemeClr val="accent6"/>
-                </a:solidFill>
-              </a:rPr>
-              <a:t>×</a:t>
-            </a:r>
-            <a:endParaRPr lang="en-US" sz="2000" dirty="0"/>
-          </a:p>
-        </p:txBody>
-      </p:sp>
-      <p:sp>
-        <p:nvSpPr>
-          <p:cNvPr id="23" name="Chain 4 label"/>
-          <p:cNvSpPr txBox="1"/>
-          <p:nvPr/>
-        </p:nvSpPr>
-        <p:spPr>
-          <a:xfrm>
-            <a:off x="5897880" y="4251960"/>
-            <a:ext cx="1508760" cy="411480"/>
-          </a:xfrm>
-          <a:prstGeom prst="rect">
-            <a:avLst/>
-          </a:prstGeom>
-          <a:noFill/>
-          <a:ln/>
-        </p:spPr>
-        <p:txBody>
-          <a:bodyPr wrap="square" lIns="0" tIns="0" rIns="0" bIns="0" rtlCol="0" anchor="b"/>
-          <a:lstStyle/>
-          <a:p>
-            <a:pPr algn="ctr" indent="0" marL="0">
-              <a:buNone/>
-            </a:pPr>
-            <a:r>
-              <a:rPr lang="en-US" sz="1200" b="1" dirty="0">
-                <a:solidFill>
-                  <a:schemeClr val="tx2"/>
-                </a:solidFill>
-              </a:rPr>
-              <a:t>Average won deal</a:t>
-            </a:r>
-            <a:endParaRPr lang="en-US" sz="1200" dirty="0"/>
-          </a:p>
-        </p:txBody>
-      </p:sp>
-      <p:sp>
-        <p:nvSpPr>
-          <p:cNvPr id="24" name="Chain 4 box"/>
-          <p:cNvSpPr/>
-          <p:nvPr/>
-        </p:nvSpPr>
-        <p:spPr>
-          <a:xfrm>
-            <a:off x="5897880" y="4709160"/>
-            <a:ext cx="1508760" cy="777240"/>
-          </a:xfrm>
-          <a:prstGeom prst="roundRect">
-            <a:avLst>
-              <a:gd name="adj" fmla="val 14118"/>
-            </a:avLst>
-          </a:prstGeom>
-          <a:solidFill>
-            <a:schemeClr val="bg2"/>
-          </a:solidFill>
-          <a:ln/>
-        </p:spPr>
-      </p:sp>
-      <p:sp>
-        <p:nvSpPr>
-          <p:cNvPr id="25" name="Chain 4 value"/>
-          <p:cNvSpPr txBox="1"/>
-          <p:nvPr/>
-        </p:nvSpPr>
-        <p:spPr>
-          <a:xfrm>
-            <a:off x="5897880" y="4709160"/>
-            <a:ext cx="1508760" cy="777240"/>
-          </a:xfrm>
-          <a:prstGeom prst="rect">
-            <a:avLst/>
-          </a:prstGeom>
-          <a:noFill/>
-          <a:ln/>
-        </p:spPr>
-        <p:txBody>
-          <a:bodyPr wrap="square" lIns="0" tIns="0" rIns="0" bIns="0" rtlCol="0" anchor="ctr"/>
-          <a:lstStyle/>
-          <a:p>
-            <a:pPr algn="ctr" indent="0" marL="0">
-              <a:buNone/>
-            </a:pPr>
-            <a:r>
-              <a:rPr lang="en-US" sz="2200" b="1" dirty="0">
-                <a:solidFill>
-                  <a:schemeClr val="tx2"/>
-                </a:solidFill>
-              </a:rPr>
-              <a:t>$53k</a:t>
-            </a:r>
-            <a:endParaRPr lang="en-US" sz="2200" dirty="0"/>
-          </a:p>
-        </p:txBody>
-      </p:sp>
-      <p:sp>
-        <p:nvSpPr>
-          <p:cNvPr id="26" name="Chain 4 operator"/>
-          <p:cNvSpPr txBox="1"/>
-          <p:nvPr/>
-        </p:nvSpPr>
-        <p:spPr>
-          <a:xfrm>
-            <a:off x="7406640" y="4709160"/>
-            <a:ext cx="274320" cy="777240"/>
-          </a:xfrm>
-          <a:prstGeom prst="rect">
-            <a:avLst/>
-          </a:prstGeom>
-          <a:noFill/>
-          <a:ln/>
-        </p:spPr>
-        <p:txBody>
-          <a:bodyPr wrap="square" lIns="0" tIns="0" rIns="0" bIns="0" rtlCol="0" anchor="ctr"/>
-          <a:lstStyle/>
-          <a:p>
-            <a:pPr algn="ctr" indent="0" marL="0">
-              <a:buNone/>
-            </a:pPr>
-            <a:r>
-              <a:rPr lang="en-US" sz="2000" dirty="0">
-                <a:solidFill>
-                  <a:schemeClr val="accent6"/>
-                </a:solidFill>
-              </a:rPr>
-              <a:t>×</a:t>
-            </a:r>
-            <a:endParaRPr lang="en-US" sz="2000" dirty="0"/>
-          </a:p>
-        </p:txBody>
-      </p:sp>
-      <p:sp>
-        <p:nvSpPr>
-          <p:cNvPr id="27" name="Chain 5 label"/>
-          <p:cNvSpPr txBox="1"/>
-          <p:nvPr/>
-        </p:nvSpPr>
-        <p:spPr>
-          <a:xfrm>
-            <a:off x="7680960" y="4251960"/>
-            <a:ext cx="1508760" cy="411480"/>
-          </a:xfrm>
-          <a:prstGeom prst="rect">
-            <a:avLst/>
-          </a:prstGeom>
-          <a:noFill/>
-          <a:ln/>
-        </p:spPr>
-        <p:txBody>
-          <a:bodyPr wrap="square" lIns="0" tIns="0" rIns="0" bIns="0" rtlCol="0" anchor="b"/>
-          <a:lstStyle/>
-          <a:p>
-            <a:pPr algn="ctr" indent="0" marL="0">
-              <a:buNone/>
-            </a:pPr>
-            <a:r>
-              <a:rPr lang="en-US" sz="1200" b="1" dirty="0">
-                <a:solidFill>
-                  <a:schemeClr val="tx2"/>
-                </a:solidFill>
-              </a:rPr>
-              <a:t>Improvement</a:t>
-            </a:r>
-            <a:endParaRPr lang="en-US" sz="1200" dirty="0"/>
-          </a:p>
-        </p:txBody>
-      </p:sp>
-      <p:sp>
-        <p:nvSpPr>
-          <p:cNvPr id="28" name="Chain 5 box"/>
-          <p:cNvSpPr/>
-          <p:nvPr/>
-        </p:nvSpPr>
-        <p:spPr>
-          <a:xfrm>
-            <a:off x="7680960" y="4709160"/>
-            <a:ext cx="1508760" cy="777240"/>
-          </a:xfrm>
-          <a:prstGeom prst="roundRect">
-            <a:avLst>
-              <a:gd name="adj" fmla="val 14118"/>
-            </a:avLst>
-          </a:prstGeom>
-          <a:solidFill>
-            <a:schemeClr val="bg2"/>
-          </a:solidFill>
-          <a:ln/>
-        </p:spPr>
-      </p:sp>
-      <p:sp>
-        <p:nvSpPr>
-          <p:cNvPr id="29" name="Chain 5 value"/>
-          <p:cNvSpPr txBox="1"/>
-          <p:nvPr/>
-        </p:nvSpPr>
-        <p:spPr>
-          <a:xfrm>
-            <a:off x="7680960" y="4709160"/>
-            <a:ext cx="1508760" cy="777240"/>
-          </a:xfrm>
-          <a:prstGeom prst="rect">
-            <a:avLst/>
-          </a:prstGeom>
-          <a:noFill/>
-          <a:ln/>
-        </p:spPr>
-        <p:txBody>
-          <a:bodyPr wrap="square" lIns="0" tIns="0" rIns="0" bIns="0" rtlCol="0" anchor="ctr"/>
-          <a:lstStyle/>
-          <a:p>
-            <a:pPr algn="ctr" indent="0" marL="0">
-              <a:buNone/>
-            </a:pPr>
-            <a:r>
-              <a:rPr lang="en-US" sz="2200" b="1" dirty="0">
-                <a:solidFill>
-                  <a:schemeClr val="tx2"/>
-                </a:solidFill>
-              </a:rPr>
-              <a:t>50%</a:t>
-            </a:r>
-            <a:endParaRPr lang="en-US" sz="2200" dirty="0"/>
-          </a:p>
-        </p:txBody>
-      </p:sp>
-      <p:sp>
-        <p:nvSpPr>
-          <p:cNvPr id="30" name="Chain 5 operator"/>
-          <p:cNvSpPr txBox="1"/>
-          <p:nvPr/>
-        </p:nvSpPr>
-        <p:spPr>
-          <a:xfrm>
-            <a:off x="9189720" y="4709160"/>
-            <a:ext cx="274320" cy="777240"/>
-          </a:xfrm>
-          <a:prstGeom prst="rect">
-            <a:avLst/>
-          </a:prstGeom>
-          <a:noFill/>
-          <a:ln/>
-        </p:spPr>
-        <p:txBody>
-          <a:bodyPr wrap="square" lIns="0" tIns="0" rIns="0" bIns="0" rtlCol="0" anchor="ctr"/>
-          <a:lstStyle/>
-          <a:p>
-            <a:pPr algn="ctr" indent="0" marL="0">
-              <a:buNone/>
-            </a:pPr>
-            <a:r>
-              <a:rPr lang="en-US" sz="2000" dirty="0">
-                <a:solidFill>
-                  <a:schemeClr val="accent6"/>
-                </a:solidFill>
-              </a:rPr>
-              <a:t>=</a:t>
-            </a:r>
-            <a:endParaRPr lang="en-US" sz="2000" dirty="0"/>
-          </a:p>
-        </p:txBody>
-      </p:sp>
-      <p:sp>
-        <p:nvSpPr>
-          <p:cNvPr id="31" name="Framed value pill"/>
-          <p:cNvSpPr/>
-          <p:nvPr/>
-        </p:nvSpPr>
-        <p:spPr>
-          <a:xfrm>
-            <a:off x="9509760" y="4251960"/>
-            <a:ext cx="2103120" cy="1234440"/>
+            <a:off x="548640" y="4846320"/>
+            <a:ext cx="3529584" cy="1234440"/>
           </a:xfrm>
           <a:prstGeom prst="roundRect">
             <a:avLst>
@@ -5735,21 +5607,21 @@
             </a:avLst>
           </a:prstGeom>
           <a:solidFill>
-            <a:schemeClr val="tx2"/>
+            <a:schemeClr val="bg2"/>
           </a:solidFill>
           <a:ln/>
         </p:spPr>
       </p:sp>
       <p:sp>
         <p:nvSpPr>
-          <p:cNvPr id="32" name="Framed value"/>
+          <p:cNvPr id="5" name="Takeaway 1 text"/>
           <p:cNvSpPr txBox="1"/>
           <p:nvPr/>
         </p:nvSpPr>
         <p:spPr>
           <a:xfrm>
-            <a:off x="9509760" y="4251960"/>
-            <a:ext cx="2103120" cy="1234440"/>
+            <a:off x="731520" y="4956048"/>
+            <a:ext cx="3163824" cy="1005840"/>
           </a:xfrm>
           <a:prstGeom prst="rect">
             <a:avLst/>
@@ -5761,68 +5633,166 @@
           <a:bodyPr wrap="square" lIns="0" tIns="0" rIns="0" bIns="0" rtlCol="0" anchor="ctr"/>
           <a:lstStyle/>
           <a:p>
-            <a:pPr algn="ctr" indent="0" marL="0">
-              <a:buNone/>
-            </a:pPr>
-            <a:r>
-              <a:rPr lang="en-US" sz="3000" b="1" dirty="0">
-                <a:solidFill>
-                  <a:schemeClr val="bg1"/>
-                </a:solidFill>
-              </a:rPr>
-              <a:t>≈ $669k</a:t>
+            <a:pPr indent="0" marL="0">
+              <a:buNone/>
+            </a:pPr>
+            <a:r>
+              <a:rPr lang="en-US" sz="1400" dirty="0">
+                <a:solidFill>
+                  <a:schemeClr val="tx2"/>
+                </a:solidFill>
+              </a:rPr>
+              <a:t>EMEA's single approver adds about 6 days per discounted deal.</a:t>
             </a:r>
             <a:endParaRPr lang="en-US" sz="1400" dirty="0"/>
           </a:p>
-          <a:p>
-            <a:pPr algn="ctr" indent="0" marL="0">
-              <a:buNone/>
-            </a:pPr>
-            <a:r>
-              <a:rPr lang="en-US" sz="1200" dirty="0">
-                <a:solidFill>
-                  <a:schemeClr val="accent3"/>
-                </a:solidFill>
-              </a:rPr>
-              <a:t>revenue upside p.a.</a:t>
+        </p:txBody>
+      </p:sp>
+      <p:graphicFrame>
+        <p:nvGraphicFramePr>
+          <p:cNvPr id="6" name="Chart 2" descr=""/>
+          <p:cNvGraphicFramePr/>
+          <p:nvPr/>
+        </p:nvGraphicFramePr>
+        <p:xfrm>
+          <a:off x="4315968" y="1325880"/>
+          <a:ext cx="3529584" cy="3383280"/>
+        </p:xfrm>
+        <a:graphic xmlns:a="http://schemas.openxmlformats.org/drawingml/2006/main">
+          <a:graphicData uri="http://schemas.openxmlformats.org/drawingml/2006/chart">
+            <c:chart xmlns:c="http://schemas.openxmlformats.org/drawingml/2006/chart" r:id="rId2"/>
+          </a:graphicData>
+        </a:graphic>
+      </p:graphicFrame>
+      <p:sp>
+        <p:nvSpPr>
+          <p:cNvPr id="7" name="Takeaway 2"/>
+          <p:cNvSpPr/>
+          <p:nvPr/>
+        </p:nvSpPr>
+        <p:spPr>
+          <a:xfrm>
+            <a:off x="4315968" y="4846320"/>
+            <a:ext cx="3529584" cy="1234440"/>
+          </a:xfrm>
+          <a:prstGeom prst="roundRect">
+            <a:avLst>
+              <a:gd name="adj" fmla="val 8889"/>
+            </a:avLst>
+          </a:prstGeom>
+          <a:solidFill>
+            <a:schemeClr val="bg2"/>
+          </a:solidFill>
+          <a:ln/>
+        </p:spPr>
+      </p:sp>
+      <p:sp>
+        <p:nvSpPr>
+          <p:cNvPr id="8" name="Takeaway 2 text"/>
+          <p:cNvSpPr txBox="1"/>
+          <p:nvPr/>
+        </p:nvSpPr>
+        <p:spPr>
+          <a:xfrm>
+            <a:off x="4498848" y="4956048"/>
+            <a:ext cx="3163824" cy="1005840"/>
+          </a:xfrm>
+          <a:prstGeom prst="rect">
+            <a:avLst/>
+          </a:prstGeom>
+          <a:noFill/>
+          <a:ln/>
+        </p:spPr>
+        <p:txBody>
+          <a:bodyPr wrap="square" lIns="0" tIns="0" rIns="0" bIns="0" rtlCol="0" anchor="ctr"/>
+          <a:lstStyle/>
+          <a:p>
+            <a:pPr indent="0" marL="0">
+              <a:buNone/>
+            </a:pPr>
+            <a:r>
+              <a:rPr lang="en-US" sz="1400" dirty="0">
+                <a:solidFill>
+                  <a:schemeClr val="tx2"/>
+                </a:solidFill>
+              </a:rPr>
+              <a:t>19% of negotiated deals are re-quoted, and they win 18 points less often.</a:t>
             </a:r>
             <a:endParaRPr lang="en-US" sz="1400" dirty="0"/>
           </a:p>
         </p:txBody>
       </p:sp>
-      <p:sp>
-        <p:nvSpPr>
-          <p:cNvPr id="33" name="Assumptions"/>
+      <p:graphicFrame>
+        <p:nvGraphicFramePr>
+          <p:cNvPr id="9" name="Chart 3" descr=""/>
+          <p:cNvGraphicFramePr/>
+          <p:nvPr/>
+        </p:nvGraphicFramePr>
+        <p:xfrm>
+          <a:off x="8083296" y="1325880"/>
+          <a:ext cx="3529584" cy="3383280"/>
+        </p:xfrm>
+        <a:graphic xmlns:a="http://schemas.openxmlformats.org/drawingml/2006/main">
+          <a:graphicData uri="http://schemas.openxmlformats.org/drawingml/2006/chart">
+            <c:chart xmlns:c="http://schemas.openxmlformats.org/drawingml/2006/chart" r:id="rId3"/>
+          </a:graphicData>
+        </a:graphic>
+      </p:graphicFrame>
+      <p:sp>
+        <p:nvSpPr>
+          <p:cNvPr id="10" name="Takeaway 3"/>
+          <p:cNvSpPr/>
+          <p:nvPr/>
+        </p:nvSpPr>
+        <p:spPr>
+          <a:xfrm>
+            <a:off x="8083296" y="4846320"/>
+            <a:ext cx="3529584" cy="1234440"/>
+          </a:xfrm>
+          <a:prstGeom prst="roundRect">
+            <a:avLst>
+              <a:gd name="adj" fmla="val 8889"/>
+            </a:avLst>
+          </a:prstGeom>
+          <a:solidFill>
+            <a:schemeClr val="bg2"/>
+          </a:solidFill>
+          <a:ln/>
+        </p:spPr>
+      </p:sp>
+      <p:sp>
+        <p:nvSpPr>
+          <p:cNvPr id="11" name="Takeaway 3 text"/>
           <p:cNvSpPr txBox="1"/>
           <p:nvPr/>
         </p:nvSpPr>
         <p:spPr>
           <a:xfrm>
-            <a:off x="548640" y="5669280"/>
-            <a:ext cx="11064240" cy="457200"/>
-          </a:xfrm>
-          <a:prstGeom prst="rect">
-            <a:avLst/>
-          </a:prstGeom>
-          <a:noFill/>
-          <a:ln/>
-        </p:spPr>
-        <p:txBody>
-          <a:bodyPr wrap="square" lIns="0" tIns="0" rIns="0" bIns="0" rtlCol="0" anchor="t"/>
+            <a:off x="8266176" y="4956048"/>
+            <a:ext cx="3163824" cy="1005840"/>
+          </a:xfrm>
+          <a:prstGeom prst="rect">
+            <a:avLst/>
+          </a:prstGeom>
+          <a:noFill/>
+          <a:ln/>
+        </p:spPr>
+        <p:txBody>
+          <a:bodyPr wrap="square" lIns="0" tIns="0" rIns="0" bIns="0" rtlCol="0" anchor="ctr"/>
           <a:lstStyle/>
           <a:p>
             <a:pPr indent="0" marL="0">
               <a:buNone/>
             </a:pPr>
             <a:r>
-              <a:rPr lang="en-US" sz="1100" i="1" dirty="0">
-                <a:solidFill>
-                  <a:schemeClr val="accent6"/>
-                </a:solidFill>
-              </a:rPr>
-              <a:t>Assumptions: annualised from 10 months of history; win-rate gap compares only deals that reached Negotiation; cycle-time gains not counted; half of the gap closed.</a:t>
-            </a:r>
-            <a:endParaRPr lang="en-US" sz="1100" dirty="0"/>
+              <a:rPr lang="en-US" sz="1400" dirty="0">
+                <a:solidFill>
+                  <a:schemeClr val="tx2"/>
+                </a:solidFill>
+              </a:rPr>
+              <a:t>12% of deals skip Qualification and win less than half as often.</a:t>
+            </a:r>
+            <a:endParaRPr lang="en-US" sz="1400" dirty="0"/>
           </a:p>
         </p:txBody>
       </p:sp>
@@ -5882,6 +5852,4038 @@
 <file path=ppt/slides/slide6.xml><?xml version="1.0" encoding="utf-8"?>
 <p:sld xmlns:a="http://schemas.openxmlformats.org/drawingml/2006/main" xmlns:r="http://schemas.openxmlformats.org/officeDocument/2006/relationships" xmlns:p="http://schemas.openxmlformats.org/presentationml/2006/main">
   <p:cSld name="Slide 6">
+    <p:spTree>
+      <p:nvGrpSpPr>
+        <p:cNvPr id="1" name=""/>
+        <p:cNvGrpSpPr/>
+        <p:nvPr/>
+      </p:nvGrpSpPr>
+      <p:grpSpPr>
+        <a:xfrm>
+          <a:off x="0" y="0"/>
+          <a:ext cx="0" cy="0"/>
+          <a:chOff x="0" y="0"/>
+          <a:chExt cx="0" cy="0"/>
+        </a:xfrm>
+      </p:grpSpPr>
+      <p:sp>
+        <p:nvSpPr>
+          <p:cNvPr id="2" name="Text 0"/>
+          <p:cNvSpPr/>
+          <p:nvPr>
+            <p:ph idx="100" type="title" hasCustomPrompt="1"/>
+          </p:nvPr>
+        </p:nvSpPr>
+        <p:spPr>
+          <a:xfrm>
+            <a:off x="548640" y="320040"/>
+            <a:ext cx="11064240" cy="822960"/>
+          </a:xfrm>
+          <a:prstGeom prst="rect">
+            <a:avLst/>
+          </a:prstGeom>
+          <a:noFill/>
+          <a:ln/>
+        </p:spPr>
+        <p:txBody>
+          <a:bodyPr wrap="square" lIns="0" tIns="0" rIns="0" bIns="0" rtlCol="0" anchor="ctr"/>
+          <a:lstStyle/>
+          <a:p>
+            <a:pPr algn="l" indent="0" marL="0">
+              <a:buNone/>
+            </a:pPr>
+            <a:r>
+              <a:rPr lang="en-US" sz="3000" b="1" dirty="0">
+                <a:solidFill>
+                  <a:schemeClr val="tx2"/>
+                </a:solidFill>
+              </a:rPr>
+              <a:t>Business case overview: three opportunities, one deep-dive</a:t>
+            </a:r>
+            <a:endParaRPr lang="en-US" sz="3000" dirty="0"/>
+          </a:p>
+        </p:txBody>
+      </p:sp>
+      <p:graphicFrame>
+        <p:nvGraphicFramePr>
+          <p:cNvPr id="7" name="Business case table"/>
+          <p:cNvGraphicFramePr>
+            <a:graphicFrameLocks noGrp="1"/>
+          </p:cNvGraphicFramePr>
+          <p:nvPr>
+            <p:extLst>
+              <p:ext uri="{D42A27DB-BD31-4B8C-83A1-F6EECF244321}">
+                <p14:modId xmlns:p14="http://schemas.microsoft.com/office/powerpoint/2010/main" val="1579011935"/>
+              </p:ext>
+            </p:extLst>
+          </p:nvPr>
+        </p:nvGraphicFramePr>
+        <p:xfrm>
+          <a:off x="548640" y="1325880"/>
+          <a:ext cx="11064240" cy="914400"/>
+        </p:xfrm>
+        <a:graphic>
+          <a:graphicData uri="http://schemas.openxmlformats.org/drawingml/2006/table">
+            <a:tbl>
+              <a:tblPr/>
+              <a:tblGrid>
+                <a:gridCol w="1874520"/>
+                <a:gridCol w="2697480"/>
+                <a:gridCol w="1737360"/>
+                <a:gridCol w="1188720"/>
+                <a:gridCol w="1097280"/>
+                <a:gridCol w="1325880"/>
+                <a:gridCol w="1143000"/>
+              </a:tblGrid>
+              <a:tr h="438912">
+                <a:tc>
+                  <a:txBody>
+                    <a:bodyPr/>
+                    <a:lstStyle/>
+                    <a:p>
+                      <a:pPr indent="0" marL="0">
+                        <a:buNone/>
+                      </a:pPr>
+                      <a:r>
+                        <a:rPr lang="en-US" sz="1400" b="1" dirty="0">
+                          <a:solidFill>
+                            <a:schemeClr val="bg1"/>
+                          </a:solidFill>
+                        </a:rPr>
+                        <a:t>Objective</a:t>
+                      </a:r>
+                      <a:endParaRPr lang="en-US" sz="1400" dirty="0"/>
+                    </a:p>
+                  </a:txBody>
+                  <a:tcPr marL="109728" marR="109728" marT="45720" marB="45720" anchor="ctr">
+                    <a:lnL w="9525" cap="flat" cmpd="sng" algn="ctr">
+                      <a:solidFill>
+                        <a:srgbClr val="CFE9FE"/>
+                      </a:solidFill>
+                      <a:prstDash val="solid"/>
+                      <a:round/>
+                      <a:headEnd type="none" w="med" len="med"/>
+                      <a:tailEnd type="none" w="med" len="med"/>
+                    </a:lnL>
+                    <a:lnR w="9525" cap="flat" cmpd="sng" algn="ctr">
+                      <a:solidFill>
+                        <a:srgbClr val="CFE9FE"/>
+                      </a:solidFill>
+                      <a:prstDash val="solid"/>
+                      <a:round/>
+                      <a:headEnd type="none" w="med" len="med"/>
+                      <a:tailEnd type="none" w="med" len="med"/>
+                    </a:lnR>
+                    <a:lnT w="9525" cap="flat" cmpd="sng" algn="ctr">
+                      <a:solidFill>
+                        <a:srgbClr val="CFE9FE"/>
+                      </a:solidFill>
+                      <a:prstDash val="solid"/>
+                      <a:round/>
+                      <a:headEnd type="none" w="med" len="med"/>
+                      <a:tailEnd type="none" w="med" len="med"/>
+                    </a:lnT>
+                    <a:lnB w="9525" cap="flat" cmpd="sng" algn="ctr">
+                      <a:solidFill>
+                        <a:srgbClr val="CFE9FE"/>
+                      </a:solidFill>
+                      <a:prstDash val="solid"/>
+                      <a:round/>
+                      <a:headEnd type="none" w="med" len="med"/>
+                      <a:tailEnd type="none" w="med" len="med"/>
+                    </a:lnB>
+                    <a:solidFill>
+                      <a:schemeClr val="tx2"/>
+                    </a:solidFill>
+                  </a:tcPr>
+                </a:tc>
+                <a:tc>
+                  <a:txBody>
+                    <a:bodyPr/>
+                    <a:lstStyle/>
+                    <a:p>
+                      <a:pPr indent="0" marL="0">
+                        <a:buNone/>
+                      </a:pPr>
+                      <a:r>
+                        <a:rPr lang="en-US" sz="1400" b="1" dirty="0">
+                          <a:solidFill>
+                            <a:schemeClr val="bg1"/>
+                          </a:solidFill>
+                        </a:rPr>
+                        <a:t>Opportunity</a:t>
+                      </a:r>
+                      <a:endParaRPr lang="en-US" sz="1400" dirty="0"/>
+                    </a:p>
+                  </a:txBody>
+                  <a:tcPr marL="109728" marR="109728" marT="45720" marB="45720" anchor="ctr">
+                    <a:lnL w="9525" cap="flat" cmpd="sng" algn="ctr">
+                      <a:solidFill>
+                        <a:srgbClr val="CFE9FE"/>
+                      </a:solidFill>
+                      <a:prstDash val="solid"/>
+                      <a:round/>
+                      <a:headEnd type="none" w="med" len="med"/>
+                      <a:tailEnd type="none" w="med" len="med"/>
+                    </a:lnL>
+                    <a:lnR w="9525" cap="flat" cmpd="sng" algn="ctr">
+                      <a:solidFill>
+                        <a:srgbClr val="CFE9FE"/>
+                      </a:solidFill>
+                      <a:prstDash val="solid"/>
+                      <a:round/>
+                      <a:headEnd type="none" w="med" len="med"/>
+                      <a:tailEnd type="none" w="med" len="med"/>
+                    </a:lnR>
+                    <a:lnT w="9525" cap="flat" cmpd="sng" algn="ctr">
+                      <a:solidFill>
+                        <a:srgbClr val="CFE9FE"/>
+                      </a:solidFill>
+                      <a:prstDash val="solid"/>
+                      <a:round/>
+                      <a:headEnd type="none" w="med" len="med"/>
+                      <a:tailEnd type="none" w="med" len="med"/>
+                    </a:lnT>
+                    <a:lnB w="9525" cap="flat" cmpd="sng" algn="ctr">
+                      <a:solidFill>
+                        <a:srgbClr val="CFE9FE"/>
+                      </a:solidFill>
+                      <a:prstDash val="solid"/>
+                      <a:round/>
+                      <a:headEnd type="none" w="med" len="med"/>
+                      <a:tailEnd type="none" w="med" len="med"/>
+                    </a:lnB>
+                    <a:solidFill>
+                      <a:schemeClr val="tx2"/>
+                    </a:solidFill>
+                  </a:tcPr>
+                </a:tc>
+                <a:tc>
+                  <a:txBody>
+                    <a:bodyPr/>
+                    <a:lstStyle/>
+                    <a:p>
+                      <a:pPr indent="0" marL="0">
+                        <a:buNone/>
+                      </a:pPr>
+                      <a:r>
+                        <a:rPr lang="en-US" sz="1400" b="1" dirty="0">
+                          <a:solidFill>
+                            <a:schemeClr val="bg1"/>
+                          </a:solidFill>
+                        </a:rPr>
+                        <a:t>Owner</a:t>
+                      </a:r>
+                      <a:endParaRPr lang="en-US" sz="1400" dirty="0"/>
+                    </a:p>
+                  </a:txBody>
+                  <a:tcPr marL="109728" marR="109728" marT="45720" marB="45720" anchor="ctr">
+                    <a:lnL w="9525" cap="flat" cmpd="sng" algn="ctr">
+                      <a:solidFill>
+                        <a:srgbClr val="CFE9FE"/>
+                      </a:solidFill>
+                      <a:prstDash val="solid"/>
+                      <a:round/>
+                      <a:headEnd type="none" w="med" len="med"/>
+                      <a:tailEnd type="none" w="med" len="med"/>
+                    </a:lnL>
+                    <a:lnR w="9525" cap="flat" cmpd="sng" algn="ctr">
+                      <a:solidFill>
+                        <a:srgbClr val="CFE9FE"/>
+                      </a:solidFill>
+                      <a:prstDash val="solid"/>
+                      <a:round/>
+                      <a:headEnd type="none" w="med" len="med"/>
+                      <a:tailEnd type="none" w="med" len="med"/>
+                    </a:lnR>
+                    <a:lnT w="9525" cap="flat" cmpd="sng" algn="ctr">
+                      <a:solidFill>
+                        <a:srgbClr val="CFE9FE"/>
+                      </a:solidFill>
+                      <a:prstDash val="solid"/>
+                      <a:round/>
+                      <a:headEnd type="none" w="med" len="med"/>
+                      <a:tailEnd type="none" w="med" len="med"/>
+                    </a:lnT>
+                    <a:lnB w="9525" cap="flat" cmpd="sng" algn="ctr">
+                      <a:solidFill>
+                        <a:srgbClr val="CFE9FE"/>
+                      </a:solidFill>
+                      <a:prstDash val="solid"/>
+                      <a:round/>
+                      <a:headEnd type="none" w="med" len="med"/>
+                      <a:tailEnd type="none" w="med" len="med"/>
+                    </a:lnB>
+                    <a:solidFill>
+                      <a:schemeClr val="tx2"/>
+                    </a:solidFill>
+                  </a:tcPr>
+                </a:tc>
+                <a:tc>
+                  <a:txBody>
+                    <a:bodyPr/>
+                    <a:lstStyle/>
+                    <a:p>
+                      <a:pPr indent="0" marL="0">
+                        <a:buNone/>
+                      </a:pPr>
+                      <a:r>
+                        <a:rPr lang="en-US" sz="1400" b="1" dirty="0">
+                          <a:solidFill>
+                            <a:schemeClr val="bg1"/>
+                          </a:solidFill>
+                        </a:rPr>
+                        <a:t>Time to value</a:t>
+                      </a:r>
+                      <a:endParaRPr lang="en-US" sz="1400" dirty="0"/>
+                    </a:p>
+                  </a:txBody>
+                  <a:tcPr marL="109728" marR="109728" marT="45720" marB="45720" anchor="ctr">
+                    <a:lnL w="9525" cap="flat" cmpd="sng" algn="ctr">
+                      <a:solidFill>
+                        <a:srgbClr val="CFE9FE"/>
+                      </a:solidFill>
+                      <a:prstDash val="solid"/>
+                      <a:round/>
+                      <a:headEnd type="none" w="med" len="med"/>
+                      <a:tailEnd type="none" w="med" len="med"/>
+                    </a:lnL>
+                    <a:lnR w="9525" cap="flat" cmpd="sng" algn="ctr">
+                      <a:solidFill>
+                        <a:srgbClr val="CFE9FE"/>
+                      </a:solidFill>
+                      <a:prstDash val="solid"/>
+                      <a:round/>
+                      <a:headEnd type="none" w="med" len="med"/>
+                      <a:tailEnd type="none" w="med" len="med"/>
+                    </a:lnR>
+                    <a:lnT w="9525" cap="flat" cmpd="sng" algn="ctr">
+                      <a:solidFill>
+                        <a:srgbClr val="CFE9FE"/>
+                      </a:solidFill>
+                      <a:prstDash val="solid"/>
+                      <a:round/>
+                      <a:headEnd type="none" w="med" len="med"/>
+                      <a:tailEnd type="none" w="med" len="med"/>
+                    </a:lnT>
+                    <a:lnB w="9525" cap="flat" cmpd="sng" algn="ctr">
+                      <a:solidFill>
+                        <a:srgbClr val="CFE9FE"/>
+                      </a:solidFill>
+                      <a:prstDash val="solid"/>
+                      <a:round/>
+                      <a:headEnd type="none" w="med" len="med"/>
+                      <a:tailEnd type="none" w="med" len="med"/>
+                    </a:lnB>
+                    <a:solidFill>
+                      <a:schemeClr val="tx2"/>
+                    </a:solidFill>
+                  </a:tcPr>
+                </a:tc>
+                <a:tc>
+                  <a:txBody>
+                    <a:bodyPr/>
+                    <a:lstStyle/>
+                    <a:p>
+                      <a:pPr indent="0" marL="0">
+                        <a:buNone/>
+                      </a:pPr>
+                      <a:r>
+                        <a:rPr lang="en-US" sz="1400" b="1" dirty="0">
+                          <a:solidFill>
+                            <a:schemeClr val="bg1"/>
+                          </a:solidFill>
+                        </a:rPr>
+                        <a:t>Framed</a:t>
+                      </a:r>
+                      <a:endParaRPr lang="en-US" sz="1400" dirty="0"/>
+                    </a:p>
+                  </a:txBody>
+                  <a:tcPr marL="109728" marR="109728" marT="45720" marB="45720" anchor="ctr">
+                    <a:lnL w="9525" cap="flat" cmpd="sng" algn="ctr">
+                      <a:solidFill>
+                        <a:srgbClr val="CFE9FE"/>
+                      </a:solidFill>
+                      <a:prstDash val="solid"/>
+                      <a:round/>
+                      <a:headEnd type="none" w="med" len="med"/>
+                      <a:tailEnd type="none" w="med" len="med"/>
+                    </a:lnL>
+                    <a:lnR w="9525" cap="flat" cmpd="sng" algn="ctr">
+                      <a:solidFill>
+                        <a:srgbClr val="CFE9FE"/>
+                      </a:solidFill>
+                      <a:prstDash val="solid"/>
+                      <a:round/>
+                      <a:headEnd type="none" w="med" len="med"/>
+                      <a:tailEnd type="none" w="med" len="med"/>
+                    </a:lnR>
+                    <a:lnT w="9525" cap="flat" cmpd="sng" algn="ctr">
+                      <a:solidFill>
+                        <a:srgbClr val="CFE9FE"/>
+                      </a:solidFill>
+                      <a:prstDash val="solid"/>
+                      <a:round/>
+                      <a:headEnd type="none" w="med" len="med"/>
+                      <a:tailEnd type="none" w="med" len="med"/>
+                    </a:lnT>
+                    <a:lnB w="9525" cap="flat" cmpd="sng" algn="ctr">
+                      <a:solidFill>
+                        <a:srgbClr val="CFE9FE"/>
+                      </a:solidFill>
+                      <a:prstDash val="solid"/>
+                      <a:round/>
+                      <a:headEnd type="none" w="med" len="med"/>
+                      <a:tailEnd type="none" w="med" len="med"/>
+                    </a:lnB>
+                    <a:solidFill>
+                      <a:schemeClr val="tx2"/>
+                    </a:solidFill>
+                  </a:tcPr>
+                </a:tc>
+                <a:tc>
+                  <a:txBody>
+                    <a:bodyPr/>
+                    <a:lstStyle/>
+                    <a:p>
+                      <a:pPr indent="0" marL="0">
+                        <a:buNone/>
+                      </a:pPr>
+                      <a:r>
+                        <a:rPr lang="en-US" sz="1400" b="1" dirty="0">
+                          <a:solidFill>
+                            <a:schemeClr val="bg1"/>
+                          </a:solidFill>
+                        </a:rPr>
+                        <a:t>Committed</a:t>
+                      </a:r>
+                      <a:endParaRPr lang="en-US" sz="1400" dirty="0"/>
+                    </a:p>
+                  </a:txBody>
+                  <a:tcPr marL="109728" marR="109728" marT="45720" marB="45720" anchor="ctr">
+                    <a:lnL w="9525" cap="flat" cmpd="sng" algn="ctr">
+                      <a:solidFill>
+                        <a:srgbClr val="CFE9FE"/>
+                      </a:solidFill>
+                      <a:prstDash val="solid"/>
+                      <a:round/>
+                      <a:headEnd type="none" w="med" len="med"/>
+                      <a:tailEnd type="none" w="med" len="med"/>
+                    </a:lnL>
+                    <a:lnR w="9525" cap="flat" cmpd="sng" algn="ctr">
+                      <a:solidFill>
+                        <a:srgbClr val="CFE9FE"/>
+                      </a:solidFill>
+                      <a:prstDash val="solid"/>
+                      <a:round/>
+                      <a:headEnd type="none" w="med" len="med"/>
+                      <a:tailEnd type="none" w="med" len="med"/>
+                    </a:lnR>
+                    <a:lnT w="9525" cap="flat" cmpd="sng" algn="ctr">
+                      <a:solidFill>
+                        <a:srgbClr val="CFE9FE"/>
+                      </a:solidFill>
+                      <a:prstDash val="solid"/>
+                      <a:round/>
+                      <a:headEnd type="none" w="med" len="med"/>
+                      <a:tailEnd type="none" w="med" len="med"/>
+                    </a:lnT>
+                    <a:lnB w="9525" cap="flat" cmpd="sng" algn="ctr">
+                      <a:solidFill>
+                        <a:srgbClr val="CFE9FE"/>
+                      </a:solidFill>
+                      <a:prstDash val="solid"/>
+                      <a:round/>
+                      <a:headEnd type="none" w="med" len="med"/>
+                      <a:tailEnd type="none" w="med" len="med"/>
+                    </a:lnB>
+                    <a:solidFill>
+                      <a:schemeClr val="tx2"/>
+                    </a:solidFill>
+                  </a:tcPr>
+                </a:tc>
+                <a:tc>
+                  <a:txBody>
+                    <a:bodyPr/>
+                    <a:lstStyle/>
+                    <a:p>
+                      <a:pPr indent="0" marL="0">
+                        <a:buNone/>
+                      </a:pPr>
+                      <a:r>
+                        <a:rPr lang="en-US" sz="1400" b="1" dirty="0">
+                          <a:solidFill>
+                            <a:schemeClr val="bg1"/>
+                          </a:solidFill>
+                        </a:rPr>
+                        <a:t>Realized</a:t>
+                      </a:r>
+                      <a:endParaRPr lang="en-US" sz="1400" dirty="0"/>
+                    </a:p>
+                  </a:txBody>
+                  <a:tcPr marL="109728" marR="109728" marT="45720" marB="45720" anchor="ctr">
+                    <a:lnL w="9525" cap="flat" cmpd="sng" algn="ctr">
+                      <a:solidFill>
+                        <a:srgbClr val="CFE9FE"/>
+                      </a:solidFill>
+                      <a:prstDash val="solid"/>
+                      <a:round/>
+                      <a:headEnd type="none" w="med" len="med"/>
+                      <a:tailEnd type="none" w="med" len="med"/>
+                    </a:lnL>
+                    <a:lnR w="9525" cap="flat" cmpd="sng" algn="ctr">
+                      <a:solidFill>
+                        <a:srgbClr val="CFE9FE"/>
+                      </a:solidFill>
+                      <a:prstDash val="solid"/>
+                      <a:round/>
+                      <a:headEnd type="none" w="med" len="med"/>
+                      <a:tailEnd type="none" w="med" len="med"/>
+                    </a:lnR>
+                    <a:lnT w="9525" cap="flat" cmpd="sng" algn="ctr">
+                      <a:solidFill>
+                        <a:srgbClr val="CFE9FE"/>
+                      </a:solidFill>
+                      <a:prstDash val="solid"/>
+                      <a:round/>
+                      <a:headEnd type="none" w="med" len="med"/>
+                      <a:tailEnd type="none" w="med" len="med"/>
+                    </a:lnT>
+                    <a:lnB w="9525" cap="flat" cmpd="sng" algn="ctr">
+                      <a:solidFill>
+                        <a:srgbClr val="CFE9FE"/>
+                      </a:solidFill>
+                      <a:prstDash val="solid"/>
+                      <a:round/>
+                      <a:headEnd type="none" w="med" len="med"/>
+                      <a:tailEnd type="none" w="med" len="med"/>
+                    </a:lnB>
+                    <a:solidFill>
+                      <a:schemeClr val="tx2"/>
+                    </a:solidFill>
+                  </a:tcPr>
+                </a:tc>
+              </a:tr>
+              <a:tr h="438912">
+                <a:tc>
+                  <a:txBody>
+                    <a:bodyPr/>
+                    <a:lstStyle/>
+                    <a:p>
+                      <a:pPr indent="0" marL="0">
+                        <a:buNone/>
+                      </a:pPr>
+                      <a:r>
+                        <a:rPr lang="en-US" sz="1400" dirty="0">
+                          <a:solidFill>
+                            <a:schemeClr val="tx1"/>
+                          </a:solidFill>
+                        </a:rPr>
+                        <a:t>Accelerate revenue</a:t>
+                      </a:r>
+                      <a:endParaRPr lang="en-US" sz="1400" dirty="0"/>
+                    </a:p>
+                  </a:txBody>
+                  <a:tcPr marL="109728" marR="109728" marT="45720" marB="45720" anchor="ctr">
+                    <a:lnL w="9525" cap="flat" cmpd="sng" algn="ctr">
+                      <a:solidFill>
+                        <a:srgbClr val="CFE9FE"/>
+                      </a:solidFill>
+                      <a:prstDash val="solid"/>
+                      <a:round/>
+                      <a:headEnd type="none" w="med" len="med"/>
+                      <a:tailEnd type="none" w="med" len="med"/>
+                    </a:lnL>
+                    <a:lnR w="9525" cap="flat" cmpd="sng" algn="ctr">
+                      <a:solidFill>
+                        <a:srgbClr val="CFE9FE"/>
+                      </a:solidFill>
+                      <a:prstDash val="solid"/>
+                      <a:round/>
+                      <a:headEnd type="none" w="med" len="med"/>
+                      <a:tailEnd type="none" w="med" len="med"/>
+                    </a:lnR>
+                    <a:lnT w="9525" cap="flat" cmpd="sng" algn="ctr">
+                      <a:solidFill>
+                        <a:srgbClr val="CFE9FE"/>
+                      </a:solidFill>
+                      <a:prstDash val="solid"/>
+                      <a:round/>
+                      <a:headEnd type="none" w="med" len="med"/>
+                      <a:tailEnd type="none" w="med" len="med"/>
+                    </a:lnT>
+                    <a:lnB w="9525" cap="flat" cmpd="sng" algn="ctr">
+                      <a:solidFill>
+                        <a:srgbClr val="CFE9FE"/>
+                      </a:solidFill>
+                      <a:prstDash val="solid"/>
+                      <a:round/>
+                      <a:headEnd type="none" w="med" len="med"/>
+                      <a:tailEnd type="none" w="med" len="med"/>
+                    </a:lnB>
+                    <a:solidFill>
+                      <a:schemeClr val="bg1"/>
+                    </a:solidFill>
+                  </a:tcPr>
+                </a:tc>
+                <a:tc>
+                  <a:txBody>
+                    <a:bodyPr/>
+                    <a:lstStyle/>
+                    <a:p>
+                      <a:pPr indent="0" marL="0">
+                        <a:buNone/>
+                      </a:pPr>
+                      <a:r>
+                        <a:rPr lang="en-US" sz="1400" dirty="0">
+                          <a:solidFill>
+                            <a:schemeClr val="tx1"/>
+                          </a:solidFill>
+                        </a:rPr>
+                        <a:t>1  EMEA discount approvals</a:t>
+                      </a:r>
+                      <a:endParaRPr lang="en-US" sz="1400" dirty="0"/>
+                    </a:p>
+                  </a:txBody>
+                  <a:tcPr marL="109728" marR="109728" marT="45720" marB="45720" anchor="ctr">
+                    <a:lnL w="9525" cap="flat" cmpd="sng" algn="ctr">
+                      <a:solidFill>
+                        <a:srgbClr val="CFE9FE"/>
+                      </a:solidFill>
+                      <a:prstDash val="solid"/>
+                      <a:round/>
+                      <a:headEnd type="none" w="med" len="med"/>
+                      <a:tailEnd type="none" w="med" len="med"/>
+                    </a:lnL>
+                    <a:lnR w="9525" cap="flat" cmpd="sng" algn="ctr">
+                      <a:solidFill>
+                        <a:srgbClr val="CFE9FE"/>
+                      </a:solidFill>
+                      <a:prstDash val="solid"/>
+                      <a:round/>
+                      <a:headEnd type="none" w="med" len="med"/>
+                      <a:tailEnd type="none" w="med" len="med"/>
+                    </a:lnR>
+                    <a:lnT w="9525" cap="flat" cmpd="sng" algn="ctr">
+                      <a:solidFill>
+                        <a:srgbClr val="CFE9FE"/>
+                      </a:solidFill>
+                      <a:prstDash val="solid"/>
+                      <a:round/>
+                      <a:headEnd type="none" w="med" len="med"/>
+                      <a:tailEnd type="none" w="med" len="med"/>
+                    </a:lnT>
+                    <a:lnB w="9525" cap="flat" cmpd="sng" algn="ctr">
+                      <a:solidFill>
+                        <a:srgbClr val="CFE9FE"/>
+                      </a:solidFill>
+                      <a:prstDash val="solid"/>
+                      <a:round/>
+                      <a:headEnd type="none" w="med" len="med"/>
+                      <a:tailEnd type="none" w="med" len="med"/>
+                    </a:lnB>
+                    <a:solidFill>
+                      <a:schemeClr val="bg1"/>
+                    </a:solidFill>
+                  </a:tcPr>
+                </a:tc>
+                <a:tc>
+                  <a:txBody>
+                    <a:bodyPr/>
+                    <a:lstStyle/>
+                    <a:p>
+                      <a:pPr indent="0" marL="0">
+                        <a:buNone/>
+                      </a:pPr>
+                      <a:r>
+                        <a:rPr lang="en-US" sz="1400" dirty="0">
+                          <a:solidFill>
+                            <a:schemeClr val="tx1"/>
+                          </a:solidFill>
+                        </a:rPr>
+                        <a:t>Deal desk lead</a:t>
+                      </a:r>
+                      <a:endParaRPr lang="en-US" sz="1400" dirty="0"/>
+                    </a:p>
+                  </a:txBody>
+                  <a:tcPr marL="109728" marR="109728" marT="45720" marB="45720" anchor="ctr">
+                    <a:lnL w="9525" cap="flat" cmpd="sng" algn="ctr">
+                      <a:solidFill>
+                        <a:srgbClr val="CFE9FE"/>
+                      </a:solidFill>
+                      <a:prstDash val="solid"/>
+                      <a:round/>
+                      <a:headEnd type="none" w="med" len="med"/>
+                      <a:tailEnd type="none" w="med" len="med"/>
+                    </a:lnL>
+                    <a:lnR w="9525" cap="flat" cmpd="sng" algn="ctr">
+                      <a:solidFill>
+                        <a:srgbClr val="CFE9FE"/>
+                      </a:solidFill>
+                      <a:prstDash val="solid"/>
+                      <a:round/>
+                      <a:headEnd type="none" w="med" len="med"/>
+                      <a:tailEnd type="none" w="med" len="med"/>
+                    </a:lnR>
+                    <a:lnT w="9525" cap="flat" cmpd="sng" algn="ctr">
+                      <a:solidFill>
+                        <a:srgbClr val="CFE9FE"/>
+                      </a:solidFill>
+                      <a:prstDash val="solid"/>
+                      <a:round/>
+                      <a:headEnd type="none" w="med" len="med"/>
+                      <a:tailEnd type="none" w="med" len="med"/>
+                    </a:lnT>
+                    <a:lnB w="9525" cap="flat" cmpd="sng" algn="ctr">
+                      <a:solidFill>
+                        <a:srgbClr val="CFE9FE"/>
+                      </a:solidFill>
+                      <a:prstDash val="solid"/>
+                      <a:round/>
+                      <a:headEnd type="none" w="med" len="med"/>
+                      <a:tailEnd type="none" w="med" len="med"/>
+                    </a:lnB>
+                    <a:solidFill>
+                      <a:schemeClr val="bg1"/>
+                    </a:solidFill>
+                  </a:tcPr>
+                </a:tc>
+                <a:tc>
+                  <a:txBody>
+                    <a:bodyPr/>
+                    <a:lstStyle/>
+                    <a:p>
+                      <a:pPr indent="0" marL="0">
+                        <a:buNone/>
+                      </a:pPr>
+                      <a:r>
+                        <a:rPr lang="en-US" sz="1400" dirty="0">
+                          <a:solidFill>
+                            <a:schemeClr val="tx1"/>
+                          </a:solidFill>
+                        </a:rPr>
+                        <a:t>Short</a:t>
+                      </a:r>
+                      <a:endParaRPr lang="en-US" sz="1400" dirty="0"/>
+                    </a:p>
+                  </a:txBody>
+                  <a:tcPr marL="109728" marR="109728" marT="45720" marB="45720" anchor="ctr">
+                    <a:lnL w="9525" cap="flat" cmpd="sng" algn="ctr">
+                      <a:solidFill>
+                        <a:srgbClr val="CFE9FE"/>
+                      </a:solidFill>
+                      <a:prstDash val="solid"/>
+                      <a:round/>
+                      <a:headEnd type="none" w="med" len="med"/>
+                      <a:tailEnd type="none" w="med" len="med"/>
+                    </a:lnL>
+                    <a:lnR w="9525" cap="flat" cmpd="sng" algn="ctr">
+                      <a:solidFill>
+                        <a:srgbClr val="CFE9FE"/>
+                      </a:solidFill>
+                      <a:prstDash val="solid"/>
+                      <a:round/>
+                      <a:headEnd type="none" w="med" len="med"/>
+                      <a:tailEnd type="none" w="med" len="med"/>
+                    </a:lnR>
+                    <a:lnT w="9525" cap="flat" cmpd="sng" algn="ctr">
+                      <a:solidFill>
+                        <a:srgbClr val="CFE9FE"/>
+                      </a:solidFill>
+                      <a:prstDash val="solid"/>
+                      <a:round/>
+                      <a:headEnd type="none" w="med" len="med"/>
+                      <a:tailEnd type="none" w="med" len="med"/>
+                    </a:lnT>
+                    <a:lnB w="9525" cap="flat" cmpd="sng" algn="ctr">
+                      <a:solidFill>
+                        <a:srgbClr val="CFE9FE"/>
+                      </a:solidFill>
+                      <a:prstDash val="solid"/>
+                      <a:round/>
+                      <a:headEnd type="none" w="med" len="med"/>
+                      <a:tailEnd type="none" w="med" len="med"/>
+                    </a:lnB>
+                    <a:solidFill>
+                      <a:schemeClr val="bg1"/>
+                    </a:solidFill>
+                  </a:tcPr>
+                </a:tc>
+                <a:tc>
+                  <a:txBody>
+                    <a:bodyPr/>
+                    <a:lstStyle/>
+                    <a:p>
+                      <a:pPr algn="r" indent="0" marL="0">
+                        <a:buNone/>
+                      </a:pPr>
+                      <a:r>
+                        <a:rPr lang="en-US" sz="1400" dirty="0">
+                          <a:solidFill>
+                            <a:schemeClr val="tx1"/>
+                          </a:solidFill>
+                        </a:rPr>
+                        <a:t>$213k</a:t>
+                      </a:r>
+                      <a:endParaRPr lang="en-US" sz="1400" dirty="0"/>
+                    </a:p>
+                  </a:txBody>
+                  <a:tcPr marL="109728" marR="109728" marT="45720" marB="45720" anchor="ctr">
+                    <a:lnL w="9525" cap="flat" cmpd="sng" algn="ctr">
+                      <a:solidFill>
+                        <a:srgbClr val="CFE9FE"/>
+                      </a:solidFill>
+                      <a:prstDash val="solid"/>
+                      <a:round/>
+                      <a:headEnd type="none" w="med" len="med"/>
+                      <a:tailEnd type="none" w="med" len="med"/>
+                    </a:lnL>
+                    <a:lnR w="9525" cap="flat" cmpd="sng" algn="ctr">
+                      <a:solidFill>
+                        <a:srgbClr val="CFE9FE"/>
+                      </a:solidFill>
+                      <a:prstDash val="solid"/>
+                      <a:round/>
+                      <a:headEnd type="none" w="med" len="med"/>
+                      <a:tailEnd type="none" w="med" len="med"/>
+                    </a:lnR>
+                    <a:lnT w="9525" cap="flat" cmpd="sng" algn="ctr">
+                      <a:solidFill>
+                        <a:srgbClr val="CFE9FE"/>
+                      </a:solidFill>
+                      <a:prstDash val="solid"/>
+                      <a:round/>
+                      <a:headEnd type="none" w="med" len="med"/>
+                      <a:tailEnd type="none" w="med" len="med"/>
+                    </a:lnT>
+                    <a:lnB w="9525" cap="flat" cmpd="sng" algn="ctr">
+                      <a:solidFill>
+                        <a:srgbClr val="CFE9FE"/>
+                      </a:solidFill>
+                      <a:prstDash val="solid"/>
+                      <a:round/>
+                      <a:headEnd type="none" w="med" len="med"/>
+                      <a:tailEnd type="none" w="med" len="med"/>
+                    </a:lnB>
+                    <a:solidFill>
+                      <a:schemeClr val="bg1"/>
+                    </a:solidFill>
+                  </a:tcPr>
+                </a:tc>
+                <a:tc>
+                  <a:txBody>
+                    <a:bodyPr/>
+                    <a:lstStyle/>
+                    <a:p>
+                      <a:pPr algn="r" indent="0" marL="0">
+                        <a:buNone/>
+                      </a:pPr>
+                      <a:r>
+                        <a:rPr lang="en-US" sz="1400" dirty="0">
+                          <a:solidFill>
+                            <a:schemeClr val="accent6"/>
+                          </a:solidFill>
+                        </a:rPr>
+                        <a:t>TBD</a:t>
+                      </a:r>
+                      <a:endParaRPr lang="en-US" sz="1400" dirty="0"/>
+                    </a:p>
+                  </a:txBody>
+                  <a:tcPr marL="109728" marR="109728" marT="45720" marB="45720" anchor="ctr">
+                    <a:lnL w="9525" cap="flat" cmpd="sng" algn="ctr">
+                      <a:solidFill>
+                        <a:srgbClr val="CFE9FE"/>
+                      </a:solidFill>
+                      <a:prstDash val="solid"/>
+                      <a:round/>
+                      <a:headEnd type="none" w="med" len="med"/>
+                      <a:tailEnd type="none" w="med" len="med"/>
+                    </a:lnL>
+                    <a:lnR w="9525" cap="flat" cmpd="sng" algn="ctr">
+                      <a:solidFill>
+                        <a:srgbClr val="CFE9FE"/>
+                      </a:solidFill>
+                      <a:prstDash val="solid"/>
+                      <a:round/>
+                      <a:headEnd type="none" w="med" len="med"/>
+                      <a:tailEnd type="none" w="med" len="med"/>
+                    </a:lnR>
+                    <a:lnT w="9525" cap="flat" cmpd="sng" algn="ctr">
+                      <a:solidFill>
+                        <a:srgbClr val="CFE9FE"/>
+                      </a:solidFill>
+                      <a:prstDash val="solid"/>
+                      <a:round/>
+                      <a:headEnd type="none" w="med" len="med"/>
+                      <a:tailEnd type="none" w="med" len="med"/>
+                    </a:lnT>
+                    <a:lnB w="9525" cap="flat" cmpd="sng" algn="ctr">
+                      <a:solidFill>
+                        <a:srgbClr val="CFE9FE"/>
+                      </a:solidFill>
+                      <a:prstDash val="solid"/>
+                      <a:round/>
+                      <a:headEnd type="none" w="med" len="med"/>
+                      <a:tailEnd type="none" w="med" len="med"/>
+                    </a:lnB>
+                    <a:solidFill>
+                      <a:schemeClr val="bg1"/>
+                    </a:solidFill>
+                  </a:tcPr>
+                </a:tc>
+                <a:tc>
+                  <a:txBody>
+                    <a:bodyPr/>
+                    <a:lstStyle/>
+                    <a:p>
+                      <a:pPr algn="r" indent="0" marL="0">
+                        <a:buNone/>
+                      </a:pPr>
+                      <a:r>
+                        <a:rPr lang="en-US" sz="1400" dirty="0">
+                          <a:solidFill>
+                            <a:schemeClr val="accent6"/>
+                          </a:solidFill>
+                        </a:rPr>
+                        <a:t>—</a:t>
+                      </a:r>
+                      <a:endParaRPr lang="en-US" sz="1400" dirty="0"/>
+                    </a:p>
+                  </a:txBody>
+                  <a:tcPr marL="109728" marR="109728" marT="45720" marB="45720" anchor="ctr">
+                    <a:lnL w="9525" cap="flat" cmpd="sng" algn="ctr">
+                      <a:solidFill>
+                        <a:srgbClr val="CFE9FE"/>
+                      </a:solidFill>
+                      <a:prstDash val="solid"/>
+                      <a:round/>
+                      <a:headEnd type="none" w="med" len="med"/>
+                      <a:tailEnd type="none" w="med" len="med"/>
+                    </a:lnL>
+                    <a:lnR w="9525" cap="flat" cmpd="sng" algn="ctr">
+                      <a:solidFill>
+                        <a:srgbClr val="CFE9FE"/>
+                      </a:solidFill>
+                      <a:prstDash val="solid"/>
+                      <a:round/>
+                      <a:headEnd type="none" w="med" len="med"/>
+                      <a:tailEnd type="none" w="med" len="med"/>
+                    </a:lnR>
+                    <a:lnT w="9525" cap="flat" cmpd="sng" algn="ctr">
+                      <a:solidFill>
+                        <a:srgbClr val="CFE9FE"/>
+                      </a:solidFill>
+                      <a:prstDash val="solid"/>
+                      <a:round/>
+                      <a:headEnd type="none" w="med" len="med"/>
+                      <a:tailEnd type="none" w="med" len="med"/>
+                    </a:lnT>
+                    <a:lnB w="9525" cap="flat" cmpd="sng" algn="ctr">
+                      <a:solidFill>
+                        <a:srgbClr val="CFE9FE"/>
+                      </a:solidFill>
+                      <a:prstDash val="solid"/>
+                      <a:round/>
+                      <a:headEnd type="none" w="med" len="med"/>
+                      <a:tailEnd type="none" w="med" len="med"/>
+                    </a:lnB>
+                    <a:solidFill>
+                      <a:schemeClr val="bg1"/>
+                    </a:solidFill>
+                  </a:tcPr>
+                </a:tc>
+              </a:tr>
+              <a:tr h="438912">
+                <a:tc>
+                  <a:txBody>
+                    <a:bodyPr/>
+                    <a:lstStyle/>
+                    <a:p>
+                      <a:pPr indent="0" marL="0">
+                        <a:buNone/>
+                      </a:pPr>
+                      <a:r>
+                        <a:rPr lang="en-US" sz="1400" b="1" dirty="0">
+                          <a:solidFill>
+                            <a:schemeClr val="tx1"/>
+                          </a:solidFill>
+                        </a:rPr>
+                        <a:t>Improve win rate</a:t>
+                      </a:r>
+                      <a:endParaRPr lang="en-US" sz="1400" dirty="0"/>
+                    </a:p>
+                  </a:txBody>
+                  <a:tcPr marL="109728" marR="109728" marT="45720" marB="45720" anchor="ctr">
+                    <a:lnL w="9525" cap="flat" cmpd="sng" algn="ctr">
+                      <a:solidFill>
+                        <a:srgbClr val="CFE9FE"/>
+                      </a:solidFill>
+                      <a:prstDash val="solid"/>
+                      <a:round/>
+                      <a:headEnd type="none" w="med" len="med"/>
+                      <a:tailEnd type="none" w="med" len="med"/>
+                    </a:lnL>
+                    <a:lnR w="9525" cap="flat" cmpd="sng" algn="ctr">
+                      <a:solidFill>
+                        <a:srgbClr val="CFE9FE"/>
+                      </a:solidFill>
+                      <a:prstDash val="solid"/>
+                      <a:round/>
+                      <a:headEnd type="none" w="med" len="med"/>
+                      <a:tailEnd type="none" w="med" len="med"/>
+                    </a:lnR>
+                    <a:lnT w="9525" cap="flat" cmpd="sng" algn="ctr">
+                      <a:solidFill>
+                        <a:srgbClr val="CFE9FE"/>
+                      </a:solidFill>
+                      <a:prstDash val="solid"/>
+                      <a:round/>
+                      <a:headEnd type="none" w="med" len="med"/>
+                      <a:tailEnd type="none" w="med" len="med"/>
+                    </a:lnT>
+                    <a:lnB w="9525" cap="flat" cmpd="sng" algn="ctr">
+                      <a:solidFill>
+                        <a:srgbClr val="CFE9FE"/>
+                      </a:solidFill>
+                      <a:prstDash val="solid"/>
+                      <a:round/>
+                      <a:headEnd type="none" w="med" len="med"/>
+                      <a:tailEnd type="none" w="med" len="med"/>
+                    </a:lnB>
+                    <a:solidFill>
+                      <a:schemeClr val="accent3"/>
+                    </a:solidFill>
+                  </a:tcPr>
+                </a:tc>
+                <a:tc>
+                  <a:txBody>
+                    <a:bodyPr/>
+                    <a:lstStyle/>
+                    <a:p>
+                      <a:pPr indent="0" marL="0">
+                        <a:buNone/>
+                      </a:pPr>
+                      <a:r>
+                        <a:rPr lang="en-US" sz="1400" b="1" dirty="0">
+                          <a:solidFill>
+                            <a:schemeClr val="tx1"/>
+                          </a:solidFill>
+                        </a:rPr>
+                        <a:t>2  Re-quotes (deep-dive)</a:t>
+                      </a:r>
+                      <a:endParaRPr lang="en-US" sz="1400" dirty="0"/>
+                    </a:p>
+                  </a:txBody>
+                  <a:tcPr marL="109728" marR="109728" marT="45720" marB="45720" anchor="ctr">
+                    <a:lnL w="9525" cap="flat" cmpd="sng" algn="ctr">
+                      <a:solidFill>
+                        <a:srgbClr val="CFE9FE"/>
+                      </a:solidFill>
+                      <a:prstDash val="solid"/>
+                      <a:round/>
+                      <a:headEnd type="none" w="med" len="med"/>
+                      <a:tailEnd type="none" w="med" len="med"/>
+                    </a:lnL>
+                    <a:lnR w="9525" cap="flat" cmpd="sng" algn="ctr">
+                      <a:solidFill>
+                        <a:srgbClr val="CFE9FE"/>
+                      </a:solidFill>
+                      <a:prstDash val="solid"/>
+                      <a:round/>
+                      <a:headEnd type="none" w="med" len="med"/>
+                      <a:tailEnd type="none" w="med" len="med"/>
+                    </a:lnR>
+                    <a:lnT w="9525" cap="flat" cmpd="sng" algn="ctr">
+                      <a:solidFill>
+                        <a:srgbClr val="CFE9FE"/>
+                      </a:solidFill>
+                      <a:prstDash val="solid"/>
+                      <a:round/>
+                      <a:headEnd type="none" w="med" len="med"/>
+                      <a:tailEnd type="none" w="med" len="med"/>
+                    </a:lnT>
+                    <a:lnB w="9525" cap="flat" cmpd="sng" algn="ctr">
+                      <a:solidFill>
+                        <a:srgbClr val="CFE9FE"/>
+                      </a:solidFill>
+                      <a:prstDash val="solid"/>
+                      <a:round/>
+                      <a:headEnd type="none" w="med" len="med"/>
+                      <a:tailEnd type="none" w="med" len="med"/>
+                    </a:lnB>
+                    <a:solidFill>
+                      <a:schemeClr val="accent3"/>
+                    </a:solidFill>
+                  </a:tcPr>
+                </a:tc>
+                <a:tc>
+                  <a:txBody>
+                    <a:bodyPr/>
+                    <a:lstStyle/>
+                    <a:p>
+                      <a:pPr indent="0" marL="0">
+                        <a:buNone/>
+                      </a:pPr>
+                      <a:r>
+                        <a:rPr lang="en-US" sz="1400" b="1" dirty="0">
+                          <a:solidFill>
+                            <a:schemeClr val="tx1"/>
+                          </a:solidFill>
+                        </a:rPr>
+                        <a:t>VP Revenue Ops</a:t>
+                      </a:r>
+                      <a:endParaRPr lang="en-US" sz="1400" dirty="0"/>
+                    </a:p>
+                  </a:txBody>
+                  <a:tcPr marL="109728" marR="109728" marT="45720" marB="45720" anchor="ctr">
+                    <a:lnL w="9525" cap="flat" cmpd="sng" algn="ctr">
+                      <a:solidFill>
+                        <a:srgbClr val="CFE9FE"/>
+                      </a:solidFill>
+                      <a:prstDash val="solid"/>
+                      <a:round/>
+                      <a:headEnd type="none" w="med" len="med"/>
+                      <a:tailEnd type="none" w="med" len="med"/>
+                    </a:lnL>
+                    <a:lnR w="9525" cap="flat" cmpd="sng" algn="ctr">
+                      <a:solidFill>
+                        <a:srgbClr val="CFE9FE"/>
+                      </a:solidFill>
+                      <a:prstDash val="solid"/>
+                      <a:round/>
+                      <a:headEnd type="none" w="med" len="med"/>
+                      <a:tailEnd type="none" w="med" len="med"/>
+                    </a:lnR>
+                    <a:lnT w="9525" cap="flat" cmpd="sng" algn="ctr">
+                      <a:solidFill>
+                        <a:srgbClr val="CFE9FE"/>
+                      </a:solidFill>
+                      <a:prstDash val="solid"/>
+                      <a:round/>
+                      <a:headEnd type="none" w="med" len="med"/>
+                      <a:tailEnd type="none" w="med" len="med"/>
+                    </a:lnT>
+                    <a:lnB w="9525" cap="flat" cmpd="sng" algn="ctr">
+                      <a:solidFill>
+                        <a:srgbClr val="CFE9FE"/>
+                      </a:solidFill>
+                      <a:prstDash val="solid"/>
+                      <a:round/>
+                      <a:headEnd type="none" w="med" len="med"/>
+                      <a:tailEnd type="none" w="med" len="med"/>
+                    </a:lnB>
+                    <a:solidFill>
+                      <a:schemeClr val="accent3"/>
+                    </a:solidFill>
+                  </a:tcPr>
+                </a:tc>
+                <a:tc>
+                  <a:txBody>
+                    <a:bodyPr/>
+                    <a:lstStyle/>
+                    <a:p>
+                      <a:pPr indent="0" marL="0">
+                        <a:buNone/>
+                      </a:pPr>
+                      <a:r>
+                        <a:rPr lang="en-US" sz="1400" b="1" dirty="0">
+                          <a:solidFill>
+                            <a:schemeClr val="tx1"/>
+                          </a:solidFill>
+                        </a:rPr>
+                        <a:t>Medium</a:t>
+                      </a:r>
+                      <a:endParaRPr lang="en-US" sz="1400" dirty="0"/>
+                    </a:p>
+                  </a:txBody>
+                  <a:tcPr marL="109728" marR="109728" marT="45720" marB="45720" anchor="ctr">
+                    <a:lnL w="9525" cap="flat" cmpd="sng" algn="ctr">
+                      <a:solidFill>
+                        <a:srgbClr val="CFE9FE"/>
+                      </a:solidFill>
+                      <a:prstDash val="solid"/>
+                      <a:round/>
+                      <a:headEnd type="none" w="med" len="med"/>
+                      <a:tailEnd type="none" w="med" len="med"/>
+                    </a:lnL>
+                    <a:lnR w="9525" cap="flat" cmpd="sng" algn="ctr">
+                      <a:solidFill>
+                        <a:srgbClr val="CFE9FE"/>
+                      </a:solidFill>
+                      <a:prstDash val="solid"/>
+                      <a:round/>
+                      <a:headEnd type="none" w="med" len="med"/>
+                      <a:tailEnd type="none" w="med" len="med"/>
+                    </a:lnR>
+                    <a:lnT w="9525" cap="flat" cmpd="sng" algn="ctr">
+                      <a:solidFill>
+                        <a:srgbClr val="CFE9FE"/>
+                      </a:solidFill>
+                      <a:prstDash val="solid"/>
+                      <a:round/>
+                      <a:headEnd type="none" w="med" len="med"/>
+                      <a:tailEnd type="none" w="med" len="med"/>
+                    </a:lnT>
+                    <a:lnB w="9525" cap="flat" cmpd="sng" algn="ctr">
+                      <a:solidFill>
+                        <a:srgbClr val="CFE9FE"/>
+                      </a:solidFill>
+                      <a:prstDash val="solid"/>
+                      <a:round/>
+                      <a:headEnd type="none" w="med" len="med"/>
+                      <a:tailEnd type="none" w="med" len="med"/>
+                    </a:lnB>
+                    <a:solidFill>
+                      <a:schemeClr val="accent3"/>
+                    </a:solidFill>
+                  </a:tcPr>
+                </a:tc>
+                <a:tc>
+                  <a:txBody>
+                    <a:bodyPr/>
+                    <a:lstStyle/>
+                    <a:p>
+                      <a:pPr algn="r" indent="0" marL="0">
+                        <a:buNone/>
+                      </a:pPr>
+                      <a:r>
+                        <a:rPr lang="en-US" sz="1400" b="1" dirty="0">
+                          <a:solidFill>
+                            <a:schemeClr val="tx1"/>
+                          </a:solidFill>
+                        </a:rPr>
+                        <a:t>$1.3M</a:t>
+                      </a:r>
+                      <a:endParaRPr lang="en-US" sz="1400" dirty="0"/>
+                    </a:p>
+                  </a:txBody>
+                  <a:tcPr marL="109728" marR="109728" marT="45720" marB="45720" anchor="ctr">
+                    <a:lnL w="9525" cap="flat" cmpd="sng" algn="ctr">
+                      <a:solidFill>
+                        <a:srgbClr val="CFE9FE"/>
+                      </a:solidFill>
+                      <a:prstDash val="solid"/>
+                      <a:round/>
+                      <a:headEnd type="none" w="med" len="med"/>
+                      <a:tailEnd type="none" w="med" len="med"/>
+                    </a:lnL>
+                    <a:lnR w="9525" cap="flat" cmpd="sng" algn="ctr">
+                      <a:solidFill>
+                        <a:srgbClr val="CFE9FE"/>
+                      </a:solidFill>
+                      <a:prstDash val="solid"/>
+                      <a:round/>
+                      <a:headEnd type="none" w="med" len="med"/>
+                      <a:tailEnd type="none" w="med" len="med"/>
+                    </a:lnR>
+                    <a:lnT w="9525" cap="flat" cmpd="sng" algn="ctr">
+                      <a:solidFill>
+                        <a:srgbClr val="CFE9FE"/>
+                      </a:solidFill>
+                      <a:prstDash val="solid"/>
+                      <a:round/>
+                      <a:headEnd type="none" w="med" len="med"/>
+                      <a:tailEnd type="none" w="med" len="med"/>
+                    </a:lnT>
+                    <a:lnB w="9525" cap="flat" cmpd="sng" algn="ctr">
+                      <a:solidFill>
+                        <a:srgbClr val="CFE9FE"/>
+                      </a:solidFill>
+                      <a:prstDash val="solid"/>
+                      <a:round/>
+                      <a:headEnd type="none" w="med" len="med"/>
+                      <a:tailEnd type="none" w="med" len="med"/>
+                    </a:lnB>
+                    <a:solidFill>
+                      <a:schemeClr val="accent3"/>
+                    </a:solidFill>
+                  </a:tcPr>
+                </a:tc>
+                <a:tc>
+                  <a:txBody>
+                    <a:bodyPr/>
+                    <a:lstStyle/>
+                    <a:p>
+                      <a:pPr algn="r" indent="0" marL="0">
+                        <a:buNone/>
+                      </a:pPr>
+                      <a:r>
+                        <a:rPr lang="en-US" sz="1400" b="1" dirty="0">
+                          <a:solidFill>
+                            <a:schemeClr val="accent6"/>
+                          </a:solidFill>
+                        </a:rPr>
+                        <a:t>TBD</a:t>
+                      </a:r>
+                      <a:endParaRPr lang="en-US" sz="1400" dirty="0"/>
+                    </a:p>
+                  </a:txBody>
+                  <a:tcPr marL="109728" marR="109728" marT="45720" marB="45720" anchor="ctr">
+                    <a:lnL w="9525" cap="flat" cmpd="sng" algn="ctr">
+                      <a:solidFill>
+                        <a:srgbClr val="CFE9FE"/>
+                      </a:solidFill>
+                      <a:prstDash val="solid"/>
+                      <a:round/>
+                      <a:headEnd type="none" w="med" len="med"/>
+                      <a:tailEnd type="none" w="med" len="med"/>
+                    </a:lnL>
+                    <a:lnR w="9525" cap="flat" cmpd="sng" algn="ctr">
+                      <a:solidFill>
+                        <a:srgbClr val="CFE9FE"/>
+                      </a:solidFill>
+                      <a:prstDash val="solid"/>
+                      <a:round/>
+                      <a:headEnd type="none" w="med" len="med"/>
+                      <a:tailEnd type="none" w="med" len="med"/>
+                    </a:lnR>
+                    <a:lnT w="9525" cap="flat" cmpd="sng" algn="ctr">
+                      <a:solidFill>
+                        <a:srgbClr val="CFE9FE"/>
+                      </a:solidFill>
+                      <a:prstDash val="solid"/>
+                      <a:round/>
+                      <a:headEnd type="none" w="med" len="med"/>
+                      <a:tailEnd type="none" w="med" len="med"/>
+                    </a:lnT>
+                    <a:lnB w="9525" cap="flat" cmpd="sng" algn="ctr">
+                      <a:solidFill>
+                        <a:srgbClr val="CFE9FE"/>
+                      </a:solidFill>
+                      <a:prstDash val="solid"/>
+                      <a:round/>
+                      <a:headEnd type="none" w="med" len="med"/>
+                      <a:tailEnd type="none" w="med" len="med"/>
+                    </a:lnB>
+                    <a:solidFill>
+                      <a:schemeClr val="accent3"/>
+                    </a:solidFill>
+                  </a:tcPr>
+                </a:tc>
+                <a:tc>
+                  <a:txBody>
+                    <a:bodyPr/>
+                    <a:lstStyle/>
+                    <a:p>
+                      <a:pPr algn="r" indent="0" marL="0">
+                        <a:buNone/>
+                      </a:pPr>
+                      <a:r>
+                        <a:rPr lang="en-US" sz="1400" b="1" dirty="0">
+                          <a:solidFill>
+                            <a:schemeClr val="accent6"/>
+                          </a:solidFill>
+                        </a:rPr>
+                        <a:t>—</a:t>
+                      </a:r>
+                      <a:endParaRPr lang="en-US" sz="1400" dirty="0"/>
+                    </a:p>
+                  </a:txBody>
+                  <a:tcPr marL="109728" marR="109728" marT="45720" marB="45720" anchor="ctr">
+                    <a:lnL w="9525" cap="flat" cmpd="sng" algn="ctr">
+                      <a:solidFill>
+                        <a:srgbClr val="CFE9FE"/>
+                      </a:solidFill>
+                      <a:prstDash val="solid"/>
+                      <a:round/>
+                      <a:headEnd type="none" w="med" len="med"/>
+                      <a:tailEnd type="none" w="med" len="med"/>
+                    </a:lnL>
+                    <a:lnR w="9525" cap="flat" cmpd="sng" algn="ctr">
+                      <a:solidFill>
+                        <a:srgbClr val="CFE9FE"/>
+                      </a:solidFill>
+                      <a:prstDash val="solid"/>
+                      <a:round/>
+                      <a:headEnd type="none" w="med" len="med"/>
+                      <a:tailEnd type="none" w="med" len="med"/>
+                    </a:lnR>
+                    <a:lnT w="9525" cap="flat" cmpd="sng" algn="ctr">
+                      <a:solidFill>
+                        <a:srgbClr val="CFE9FE"/>
+                      </a:solidFill>
+                      <a:prstDash val="solid"/>
+                      <a:round/>
+                      <a:headEnd type="none" w="med" len="med"/>
+                      <a:tailEnd type="none" w="med" len="med"/>
+                    </a:lnT>
+                    <a:lnB w="9525" cap="flat" cmpd="sng" algn="ctr">
+                      <a:solidFill>
+                        <a:srgbClr val="CFE9FE"/>
+                      </a:solidFill>
+                      <a:prstDash val="solid"/>
+                      <a:round/>
+                      <a:headEnd type="none" w="med" len="med"/>
+                      <a:tailEnd type="none" w="med" len="med"/>
+                    </a:lnB>
+                    <a:solidFill>
+                      <a:schemeClr val="accent3"/>
+                    </a:solidFill>
+                  </a:tcPr>
+                </a:tc>
+              </a:tr>
+              <a:tr h="438912">
+                <a:tc>
+                  <a:txBody>
+                    <a:bodyPr/>
+                    <a:lstStyle/>
+                    <a:p>
+                      <a:pPr indent="0" marL="0">
+                        <a:buNone/>
+                      </a:pPr>
+                      <a:r>
+                        <a:rPr lang="en-US" sz="1400" dirty="0">
+                          <a:solidFill>
+                            <a:schemeClr val="tx1"/>
+                          </a:solidFill>
+                        </a:rPr>
+                        <a:t>Sales productivity</a:t>
+                      </a:r>
+                      <a:endParaRPr lang="en-US" sz="1400" dirty="0"/>
+                    </a:p>
+                  </a:txBody>
+                  <a:tcPr marL="109728" marR="109728" marT="45720" marB="45720" anchor="ctr">
+                    <a:lnL w="9525" cap="flat" cmpd="sng" algn="ctr">
+                      <a:solidFill>
+                        <a:srgbClr val="CFE9FE"/>
+                      </a:solidFill>
+                      <a:prstDash val="solid"/>
+                      <a:round/>
+                      <a:headEnd type="none" w="med" len="med"/>
+                      <a:tailEnd type="none" w="med" len="med"/>
+                    </a:lnL>
+                    <a:lnR w="9525" cap="flat" cmpd="sng" algn="ctr">
+                      <a:solidFill>
+                        <a:srgbClr val="CFE9FE"/>
+                      </a:solidFill>
+                      <a:prstDash val="solid"/>
+                      <a:round/>
+                      <a:headEnd type="none" w="med" len="med"/>
+                      <a:tailEnd type="none" w="med" len="med"/>
+                    </a:lnR>
+                    <a:lnT w="9525" cap="flat" cmpd="sng" algn="ctr">
+                      <a:solidFill>
+                        <a:srgbClr val="CFE9FE"/>
+                      </a:solidFill>
+                      <a:prstDash val="solid"/>
+                      <a:round/>
+                      <a:headEnd type="none" w="med" len="med"/>
+                      <a:tailEnd type="none" w="med" len="med"/>
+                    </a:lnT>
+                    <a:lnB w="9525" cap="flat" cmpd="sng" algn="ctr">
+                      <a:solidFill>
+                        <a:srgbClr val="CFE9FE"/>
+                      </a:solidFill>
+                      <a:prstDash val="solid"/>
+                      <a:round/>
+                      <a:headEnd type="none" w="med" len="med"/>
+                      <a:tailEnd type="none" w="med" len="med"/>
+                    </a:lnB>
+                    <a:solidFill>
+                      <a:schemeClr val="bg1"/>
+                    </a:solidFill>
+                  </a:tcPr>
+                </a:tc>
+                <a:tc>
+                  <a:txBody>
+                    <a:bodyPr/>
+                    <a:lstStyle/>
+                    <a:p>
+                      <a:pPr indent="0" marL="0">
+                        <a:buNone/>
+                      </a:pPr>
+                      <a:r>
+                        <a:rPr lang="en-US" sz="1400" dirty="0">
+                          <a:solidFill>
+                            <a:schemeClr val="tx1"/>
+                          </a:solidFill>
+                        </a:rPr>
+                        <a:t>3  Skipped qualification</a:t>
+                      </a:r>
+                      <a:endParaRPr lang="en-US" sz="1400" dirty="0"/>
+                    </a:p>
+                  </a:txBody>
+                  <a:tcPr marL="109728" marR="109728" marT="45720" marB="45720" anchor="ctr">
+                    <a:lnL w="9525" cap="flat" cmpd="sng" algn="ctr">
+                      <a:solidFill>
+                        <a:srgbClr val="CFE9FE"/>
+                      </a:solidFill>
+                      <a:prstDash val="solid"/>
+                      <a:round/>
+                      <a:headEnd type="none" w="med" len="med"/>
+                      <a:tailEnd type="none" w="med" len="med"/>
+                    </a:lnL>
+                    <a:lnR w="9525" cap="flat" cmpd="sng" algn="ctr">
+                      <a:solidFill>
+                        <a:srgbClr val="CFE9FE"/>
+                      </a:solidFill>
+                      <a:prstDash val="solid"/>
+                      <a:round/>
+                      <a:headEnd type="none" w="med" len="med"/>
+                      <a:tailEnd type="none" w="med" len="med"/>
+                    </a:lnR>
+                    <a:lnT w="9525" cap="flat" cmpd="sng" algn="ctr">
+                      <a:solidFill>
+                        <a:srgbClr val="CFE9FE"/>
+                      </a:solidFill>
+                      <a:prstDash val="solid"/>
+                      <a:round/>
+                      <a:headEnd type="none" w="med" len="med"/>
+                      <a:tailEnd type="none" w="med" len="med"/>
+                    </a:lnT>
+                    <a:lnB w="9525" cap="flat" cmpd="sng" algn="ctr">
+                      <a:solidFill>
+                        <a:srgbClr val="CFE9FE"/>
+                      </a:solidFill>
+                      <a:prstDash val="solid"/>
+                      <a:round/>
+                      <a:headEnd type="none" w="med" len="med"/>
+                      <a:tailEnd type="none" w="med" len="med"/>
+                    </a:lnB>
+                    <a:solidFill>
+                      <a:schemeClr val="bg1"/>
+                    </a:solidFill>
+                  </a:tcPr>
+                </a:tc>
+                <a:tc>
+                  <a:txBody>
+                    <a:bodyPr/>
+                    <a:lstStyle/>
+                    <a:p>
+                      <a:pPr indent="0" marL="0">
+                        <a:buNone/>
+                      </a:pPr>
+                      <a:r>
+                        <a:rPr lang="en-US" sz="1400" dirty="0">
+                          <a:solidFill>
+                            <a:schemeClr val="tx1"/>
+                          </a:solidFill>
+                        </a:rPr>
+                        <a:t>Sales operations</a:t>
+                      </a:r>
+                      <a:endParaRPr lang="en-US" sz="1400" dirty="0"/>
+                    </a:p>
+                  </a:txBody>
+                  <a:tcPr marL="109728" marR="109728" marT="45720" marB="45720" anchor="ctr">
+                    <a:lnL w="9525" cap="flat" cmpd="sng" algn="ctr">
+                      <a:solidFill>
+                        <a:srgbClr val="CFE9FE"/>
+                      </a:solidFill>
+                      <a:prstDash val="solid"/>
+                      <a:round/>
+                      <a:headEnd type="none" w="med" len="med"/>
+                      <a:tailEnd type="none" w="med" len="med"/>
+                    </a:lnL>
+                    <a:lnR w="9525" cap="flat" cmpd="sng" algn="ctr">
+                      <a:solidFill>
+                        <a:srgbClr val="CFE9FE"/>
+                      </a:solidFill>
+                      <a:prstDash val="solid"/>
+                      <a:round/>
+                      <a:headEnd type="none" w="med" len="med"/>
+                      <a:tailEnd type="none" w="med" len="med"/>
+                    </a:lnR>
+                    <a:lnT w="9525" cap="flat" cmpd="sng" algn="ctr">
+                      <a:solidFill>
+                        <a:srgbClr val="CFE9FE"/>
+                      </a:solidFill>
+                      <a:prstDash val="solid"/>
+                      <a:round/>
+                      <a:headEnd type="none" w="med" len="med"/>
+                      <a:tailEnd type="none" w="med" len="med"/>
+                    </a:lnT>
+                    <a:lnB w="9525" cap="flat" cmpd="sng" algn="ctr">
+                      <a:solidFill>
+                        <a:srgbClr val="CFE9FE"/>
+                      </a:solidFill>
+                      <a:prstDash val="solid"/>
+                      <a:round/>
+                      <a:headEnd type="none" w="med" len="med"/>
+                      <a:tailEnd type="none" w="med" len="med"/>
+                    </a:lnB>
+                    <a:solidFill>
+                      <a:schemeClr val="bg1"/>
+                    </a:solidFill>
+                  </a:tcPr>
+                </a:tc>
+                <a:tc>
+                  <a:txBody>
+                    <a:bodyPr/>
+                    <a:lstStyle/>
+                    <a:p>
+                      <a:pPr indent="0" marL="0">
+                        <a:buNone/>
+                      </a:pPr>
+                      <a:r>
+                        <a:rPr lang="en-US" sz="1400" dirty="0">
+                          <a:solidFill>
+                            <a:schemeClr val="tx1"/>
+                          </a:solidFill>
+                        </a:rPr>
+                        <a:t>Short</a:t>
+                      </a:r>
+                      <a:endParaRPr lang="en-US" sz="1400" dirty="0"/>
+                    </a:p>
+                  </a:txBody>
+                  <a:tcPr marL="109728" marR="109728" marT="45720" marB="45720" anchor="ctr">
+                    <a:lnL w="9525" cap="flat" cmpd="sng" algn="ctr">
+                      <a:solidFill>
+                        <a:srgbClr val="CFE9FE"/>
+                      </a:solidFill>
+                      <a:prstDash val="solid"/>
+                      <a:round/>
+                      <a:headEnd type="none" w="med" len="med"/>
+                      <a:tailEnd type="none" w="med" len="med"/>
+                    </a:lnL>
+                    <a:lnR w="9525" cap="flat" cmpd="sng" algn="ctr">
+                      <a:solidFill>
+                        <a:srgbClr val="CFE9FE"/>
+                      </a:solidFill>
+                      <a:prstDash val="solid"/>
+                      <a:round/>
+                      <a:headEnd type="none" w="med" len="med"/>
+                      <a:tailEnd type="none" w="med" len="med"/>
+                    </a:lnR>
+                    <a:lnT w="9525" cap="flat" cmpd="sng" algn="ctr">
+                      <a:solidFill>
+                        <a:srgbClr val="CFE9FE"/>
+                      </a:solidFill>
+                      <a:prstDash val="solid"/>
+                      <a:round/>
+                      <a:headEnd type="none" w="med" len="med"/>
+                      <a:tailEnd type="none" w="med" len="med"/>
+                    </a:lnT>
+                    <a:lnB w="9525" cap="flat" cmpd="sng" algn="ctr">
+                      <a:solidFill>
+                        <a:srgbClr val="CFE9FE"/>
+                      </a:solidFill>
+                      <a:prstDash val="solid"/>
+                      <a:round/>
+                      <a:headEnd type="none" w="med" len="med"/>
+                      <a:tailEnd type="none" w="med" len="med"/>
+                    </a:lnB>
+                    <a:solidFill>
+                      <a:schemeClr val="bg1"/>
+                    </a:solidFill>
+                  </a:tcPr>
+                </a:tc>
+                <a:tc>
+                  <a:txBody>
+                    <a:bodyPr/>
+                    <a:lstStyle/>
+                    <a:p>
+                      <a:pPr algn="r" indent="0" marL="0">
+                        <a:buNone/>
+                      </a:pPr>
+                      <a:r>
+                        <a:rPr lang="en-US" sz="1400" dirty="0">
+                          <a:solidFill>
+                            <a:schemeClr val="tx1"/>
+                          </a:solidFill>
+                        </a:rPr>
+                        <a:t>$1.3M</a:t>
+                      </a:r>
+                      <a:endParaRPr lang="en-US" sz="1400" dirty="0"/>
+                    </a:p>
+                  </a:txBody>
+                  <a:tcPr marL="109728" marR="109728" marT="45720" marB="45720" anchor="ctr">
+                    <a:lnL w="9525" cap="flat" cmpd="sng" algn="ctr">
+                      <a:solidFill>
+                        <a:srgbClr val="CFE9FE"/>
+                      </a:solidFill>
+                      <a:prstDash val="solid"/>
+                      <a:round/>
+                      <a:headEnd type="none" w="med" len="med"/>
+                      <a:tailEnd type="none" w="med" len="med"/>
+                    </a:lnL>
+                    <a:lnR w="9525" cap="flat" cmpd="sng" algn="ctr">
+                      <a:solidFill>
+                        <a:srgbClr val="CFE9FE"/>
+                      </a:solidFill>
+                      <a:prstDash val="solid"/>
+                      <a:round/>
+                      <a:headEnd type="none" w="med" len="med"/>
+                      <a:tailEnd type="none" w="med" len="med"/>
+                    </a:lnR>
+                    <a:lnT w="9525" cap="flat" cmpd="sng" algn="ctr">
+                      <a:solidFill>
+                        <a:srgbClr val="CFE9FE"/>
+                      </a:solidFill>
+                      <a:prstDash val="solid"/>
+                      <a:round/>
+                      <a:headEnd type="none" w="med" len="med"/>
+                      <a:tailEnd type="none" w="med" len="med"/>
+                    </a:lnT>
+                    <a:lnB w="9525" cap="flat" cmpd="sng" algn="ctr">
+                      <a:solidFill>
+                        <a:srgbClr val="CFE9FE"/>
+                      </a:solidFill>
+                      <a:prstDash val="solid"/>
+                      <a:round/>
+                      <a:headEnd type="none" w="med" len="med"/>
+                      <a:tailEnd type="none" w="med" len="med"/>
+                    </a:lnB>
+                    <a:solidFill>
+                      <a:schemeClr val="bg1"/>
+                    </a:solidFill>
+                  </a:tcPr>
+                </a:tc>
+                <a:tc>
+                  <a:txBody>
+                    <a:bodyPr/>
+                    <a:lstStyle/>
+                    <a:p>
+                      <a:pPr algn="r" indent="0" marL="0">
+                        <a:buNone/>
+                      </a:pPr>
+                      <a:r>
+                        <a:rPr lang="en-US" sz="1400" dirty="0">
+                          <a:solidFill>
+                            <a:schemeClr val="accent6"/>
+                          </a:solidFill>
+                        </a:rPr>
+                        <a:t>TBD</a:t>
+                      </a:r>
+                      <a:endParaRPr lang="en-US" sz="1400" dirty="0"/>
+                    </a:p>
+                  </a:txBody>
+                  <a:tcPr marL="109728" marR="109728" marT="45720" marB="45720" anchor="ctr">
+                    <a:lnL w="9525" cap="flat" cmpd="sng" algn="ctr">
+                      <a:solidFill>
+                        <a:srgbClr val="CFE9FE"/>
+                      </a:solidFill>
+                      <a:prstDash val="solid"/>
+                      <a:round/>
+                      <a:headEnd type="none" w="med" len="med"/>
+                      <a:tailEnd type="none" w="med" len="med"/>
+                    </a:lnL>
+                    <a:lnR w="9525" cap="flat" cmpd="sng" algn="ctr">
+                      <a:solidFill>
+                        <a:srgbClr val="CFE9FE"/>
+                      </a:solidFill>
+                      <a:prstDash val="solid"/>
+                      <a:round/>
+                      <a:headEnd type="none" w="med" len="med"/>
+                      <a:tailEnd type="none" w="med" len="med"/>
+                    </a:lnR>
+                    <a:lnT w="9525" cap="flat" cmpd="sng" algn="ctr">
+                      <a:solidFill>
+                        <a:srgbClr val="CFE9FE"/>
+                      </a:solidFill>
+                      <a:prstDash val="solid"/>
+                      <a:round/>
+                      <a:headEnd type="none" w="med" len="med"/>
+                      <a:tailEnd type="none" w="med" len="med"/>
+                    </a:lnT>
+                    <a:lnB w="9525" cap="flat" cmpd="sng" algn="ctr">
+                      <a:solidFill>
+                        <a:srgbClr val="CFE9FE"/>
+                      </a:solidFill>
+                      <a:prstDash val="solid"/>
+                      <a:round/>
+                      <a:headEnd type="none" w="med" len="med"/>
+                      <a:tailEnd type="none" w="med" len="med"/>
+                    </a:lnB>
+                    <a:solidFill>
+                      <a:schemeClr val="bg1"/>
+                    </a:solidFill>
+                  </a:tcPr>
+                </a:tc>
+                <a:tc>
+                  <a:txBody>
+                    <a:bodyPr/>
+                    <a:lstStyle/>
+                    <a:p>
+                      <a:pPr algn="r" indent="0" marL="0">
+                        <a:buNone/>
+                      </a:pPr>
+                      <a:r>
+                        <a:rPr lang="en-US" sz="1400" dirty="0">
+                          <a:solidFill>
+                            <a:schemeClr val="accent6"/>
+                          </a:solidFill>
+                        </a:rPr>
+                        <a:t>—</a:t>
+                      </a:r>
+                      <a:endParaRPr lang="en-US" sz="1400" dirty="0"/>
+                    </a:p>
+                  </a:txBody>
+                  <a:tcPr marL="109728" marR="109728" marT="45720" marB="45720" anchor="ctr">
+                    <a:lnL w="9525" cap="flat" cmpd="sng" algn="ctr">
+                      <a:solidFill>
+                        <a:srgbClr val="CFE9FE"/>
+                      </a:solidFill>
+                      <a:prstDash val="solid"/>
+                      <a:round/>
+                      <a:headEnd type="none" w="med" len="med"/>
+                      <a:tailEnd type="none" w="med" len="med"/>
+                    </a:lnL>
+                    <a:lnR w="9525" cap="flat" cmpd="sng" algn="ctr">
+                      <a:solidFill>
+                        <a:srgbClr val="CFE9FE"/>
+                      </a:solidFill>
+                      <a:prstDash val="solid"/>
+                      <a:round/>
+                      <a:headEnd type="none" w="med" len="med"/>
+                      <a:tailEnd type="none" w="med" len="med"/>
+                    </a:lnR>
+                    <a:lnT w="9525" cap="flat" cmpd="sng" algn="ctr">
+                      <a:solidFill>
+                        <a:srgbClr val="CFE9FE"/>
+                      </a:solidFill>
+                      <a:prstDash val="solid"/>
+                      <a:round/>
+                      <a:headEnd type="none" w="med" len="med"/>
+                      <a:tailEnd type="none" w="med" len="med"/>
+                    </a:lnT>
+                    <a:lnB w="9525" cap="flat" cmpd="sng" algn="ctr">
+                      <a:solidFill>
+                        <a:srgbClr val="CFE9FE"/>
+                      </a:solidFill>
+                      <a:prstDash val="solid"/>
+                      <a:round/>
+                      <a:headEnd type="none" w="med" len="med"/>
+                      <a:tailEnd type="none" w="med" len="med"/>
+                    </a:lnB>
+                    <a:solidFill>
+                      <a:schemeClr val="bg1"/>
+                    </a:solidFill>
+                  </a:tcPr>
+                </a:tc>
+              </a:tr>
+              <a:tr h="438912">
+                <a:tc>
+                  <a:txBody>
+                    <a:bodyPr/>
+                    <a:lstStyle/>
+                    <a:p>
+                      <a:pPr indent="0" marL="0">
+                        <a:buNone/>
+                      </a:pPr>
+                      <a:r>
+                        <a:rPr lang="en-US" sz="1400" b="1" dirty="0">
+                          <a:solidFill>
+                            <a:schemeClr val="tx1"/>
+                          </a:solidFill>
+                        </a:rPr>
+                        <a:t>Total</a:t>
+                      </a:r>
+                      <a:endParaRPr lang="en-US" sz="1400" dirty="0"/>
+                    </a:p>
+                  </a:txBody>
+                  <a:tcPr marL="109728" marR="109728" marT="45720" marB="45720" anchor="ctr">
+                    <a:lnL w="9525" cap="flat" cmpd="sng" algn="ctr">
+                      <a:solidFill>
+                        <a:srgbClr val="CFE9FE"/>
+                      </a:solidFill>
+                      <a:prstDash val="solid"/>
+                      <a:round/>
+                      <a:headEnd type="none" w="med" len="med"/>
+                      <a:tailEnd type="none" w="med" len="med"/>
+                    </a:lnL>
+                    <a:lnR w="9525" cap="flat" cmpd="sng" algn="ctr">
+                      <a:solidFill>
+                        <a:srgbClr val="CFE9FE"/>
+                      </a:solidFill>
+                      <a:prstDash val="solid"/>
+                      <a:round/>
+                      <a:headEnd type="none" w="med" len="med"/>
+                      <a:tailEnd type="none" w="med" len="med"/>
+                    </a:lnR>
+                    <a:lnT w="9525" cap="flat" cmpd="sng" algn="ctr">
+                      <a:solidFill>
+                        <a:srgbClr val="CFE9FE"/>
+                      </a:solidFill>
+                      <a:prstDash val="solid"/>
+                      <a:round/>
+                      <a:headEnd type="none" w="med" len="med"/>
+                      <a:tailEnd type="none" w="med" len="med"/>
+                    </a:lnT>
+                    <a:lnB w="9525" cap="flat" cmpd="sng" algn="ctr">
+                      <a:solidFill>
+                        <a:srgbClr val="CFE9FE"/>
+                      </a:solidFill>
+                      <a:prstDash val="solid"/>
+                      <a:round/>
+                      <a:headEnd type="none" w="med" len="med"/>
+                      <a:tailEnd type="none" w="med" len="med"/>
+                    </a:lnB>
+                    <a:solidFill>
+                      <a:schemeClr val="bg1"/>
+                    </a:solidFill>
+                  </a:tcPr>
+                </a:tc>
+                <a:tc>
+                  <a:txBody>
+                    <a:bodyPr/>
+                    <a:lstStyle/>
+                    <a:p>
+                      <a:pPr indent="0" marL="0">
+                        <a:buNone/>
+                      </a:pPr>
+                      <a:endParaRPr lang="en-US" sz="1400" dirty="0"/>
+                    </a:p>
+                  </a:txBody>
+                  <a:tcPr marL="109728" marR="109728" marT="45720" marB="45720" anchor="ctr">
+                    <a:lnL w="9525" cap="flat" cmpd="sng" algn="ctr">
+                      <a:solidFill>
+                        <a:srgbClr val="CFE9FE"/>
+                      </a:solidFill>
+                      <a:prstDash val="solid"/>
+                      <a:round/>
+                      <a:headEnd type="none" w="med" len="med"/>
+                      <a:tailEnd type="none" w="med" len="med"/>
+                    </a:lnL>
+                    <a:lnR w="9525" cap="flat" cmpd="sng" algn="ctr">
+                      <a:solidFill>
+                        <a:srgbClr val="CFE9FE"/>
+                      </a:solidFill>
+                      <a:prstDash val="solid"/>
+                      <a:round/>
+                      <a:headEnd type="none" w="med" len="med"/>
+                      <a:tailEnd type="none" w="med" len="med"/>
+                    </a:lnR>
+                    <a:lnT w="9525" cap="flat" cmpd="sng" algn="ctr">
+                      <a:solidFill>
+                        <a:srgbClr val="CFE9FE"/>
+                      </a:solidFill>
+                      <a:prstDash val="solid"/>
+                      <a:round/>
+                      <a:headEnd type="none" w="med" len="med"/>
+                      <a:tailEnd type="none" w="med" len="med"/>
+                    </a:lnT>
+                    <a:lnB w="9525" cap="flat" cmpd="sng" algn="ctr">
+                      <a:solidFill>
+                        <a:srgbClr val="CFE9FE"/>
+                      </a:solidFill>
+                      <a:prstDash val="solid"/>
+                      <a:round/>
+                      <a:headEnd type="none" w="med" len="med"/>
+                      <a:tailEnd type="none" w="med" len="med"/>
+                    </a:lnB>
+                    <a:solidFill>
+                      <a:schemeClr val="bg1"/>
+                    </a:solidFill>
+                  </a:tcPr>
+                </a:tc>
+                <a:tc>
+                  <a:txBody>
+                    <a:bodyPr/>
+                    <a:lstStyle/>
+                    <a:p>
+                      <a:pPr indent="0" marL="0">
+                        <a:buNone/>
+                      </a:pPr>
+                      <a:endParaRPr lang="en-US" sz="1400" dirty="0"/>
+                    </a:p>
+                  </a:txBody>
+                  <a:tcPr marL="109728" marR="109728" marT="45720" marB="45720" anchor="ctr">
+                    <a:lnL w="9525" cap="flat" cmpd="sng" algn="ctr">
+                      <a:solidFill>
+                        <a:srgbClr val="CFE9FE"/>
+                      </a:solidFill>
+                      <a:prstDash val="solid"/>
+                      <a:round/>
+                      <a:headEnd type="none" w="med" len="med"/>
+                      <a:tailEnd type="none" w="med" len="med"/>
+                    </a:lnL>
+                    <a:lnR w="9525" cap="flat" cmpd="sng" algn="ctr">
+                      <a:solidFill>
+                        <a:srgbClr val="CFE9FE"/>
+                      </a:solidFill>
+                      <a:prstDash val="solid"/>
+                      <a:round/>
+                      <a:headEnd type="none" w="med" len="med"/>
+                      <a:tailEnd type="none" w="med" len="med"/>
+                    </a:lnR>
+                    <a:lnT w="9525" cap="flat" cmpd="sng" algn="ctr">
+                      <a:solidFill>
+                        <a:srgbClr val="CFE9FE"/>
+                      </a:solidFill>
+                      <a:prstDash val="solid"/>
+                      <a:round/>
+                      <a:headEnd type="none" w="med" len="med"/>
+                      <a:tailEnd type="none" w="med" len="med"/>
+                    </a:lnT>
+                    <a:lnB w="9525" cap="flat" cmpd="sng" algn="ctr">
+                      <a:solidFill>
+                        <a:srgbClr val="CFE9FE"/>
+                      </a:solidFill>
+                      <a:prstDash val="solid"/>
+                      <a:round/>
+                      <a:headEnd type="none" w="med" len="med"/>
+                      <a:tailEnd type="none" w="med" len="med"/>
+                    </a:lnB>
+                    <a:solidFill>
+                      <a:schemeClr val="bg1"/>
+                    </a:solidFill>
+                  </a:tcPr>
+                </a:tc>
+                <a:tc>
+                  <a:txBody>
+                    <a:bodyPr/>
+                    <a:lstStyle/>
+                    <a:p>
+                      <a:pPr indent="0" marL="0">
+                        <a:buNone/>
+                      </a:pPr>
+                      <a:endParaRPr lang="en-US" sz="1400" dirty="0"/>
+                    </a:p>
+                  </a:txBody>
+                  <a:tcPr marL="109728" marR="109728" marT="45720" marB="45720" anchor="ctr">
+                    <a:lnL w="9525" cap="flat" cmpd="sng" algn="ctr">
+                      <a:solidFill>
+                        <a:srgbClr val="CFE9FE"/>
+                      </a:solidFill>
+                      <a:prstDash val="solid"/>
+                      <a:round/>
+                      <a:headEnd type="none" w="med" len="med"/>
+                      <a:tailEnd type="none" w="med" len="med"/>
+                    </a:lnL>
+                    <a:lnR w="9525" cap="flat" cmpd="sng" algn="ctr">
+                      <a:solidFill>
+                        <a:srgbClr val="CFE9FE"/>
+                      </a:solidFill>
+                      <a:prstDash val="solid"/>
+                      <a:round/>
+                      <a:headEnd type="none" w="med" len="med"/>
+                      <a:tailEnd type="none" w="med" len="med"/>
+                    </a:lnR>
+                    <a:lnT w="9525" cap="flat" cmpd="sng" algn="ctr">
+                      <a:solidFill>
+                        <a:srgbClr val="CFE9FE"/>
+                      </a:solidFill>
+                      <a:prstDash val="solid"/>
+                      <a:round/>
+                      <a:headEnd type="none" w="med" len="med"/>
+                      <a:tailEnd type="none" w="med" len="med"/>
+                    </a:lnT>
+                    <a:lnB w="9525" cap="flat" cmpd="sng" algn="ctr">
+                      <a:solidFill>
+                        <a:srgbClr val="CFE9FE"/>
+                      </a:solidFill>
+                      <a:prstDash val="solid"/>
+                      <a:round/>
+                      <a:headEnd type="none" w="med" len="med"/>
+                      <a:tailEnd type="none" w="med" len="med"/>
+                    </a:lnB>
+                    <a:solidFill>
+                      <a:schemeClr val="bg1"/>
+                    </a:solidFill>
+                  </a:tcPr>
+                </a:tc>
+                <a:tc>
+                  <a:txBody>
+                    <a:bodyPr/>
+                    <a:lstStyle/>
+                    <a:p>
+                      <a:pPr algn="r" indent="0" marL="0">
+                        <a:buNone/>
+                      </a:pPr>
+                      <a:r>
+                        <a:rPr lang="en-US" sz="1400" b="1" dirty="0">
+                          <a:solidFill>
+                            <a:schemeClr val="tx1"/>
+                          </a:solidFill>
+                        </a:rPr>
+                        <a:t>$2.8M</a:t>
+                      </a:r>
+                      <a:endParaRPr lang="en-US" sz="1400" dirty="0"/>
+                    </a:p>
+                  </a:txBody>
+                  <a:tcPr marL="109728" marR="109728" marT="45720" marB="45720" anchor="ctr">
+                    <a:lnL w="9525" cap="flat" cmpd="sng" algn="ctr">
+                      <a:solidFill>
+                        <a:srgbClr val="CFE9FE"/>
+                      </a:solidFill>
+                      <a:prstDash val="solid"/>
+                      <a:round/>
+                      <a:headEnd type="none" w="med" len="med"/>
+                      <a:tailEnd type="none" w="med" len="med"/>
+                    </a:lnL>
+                    <a:lnR w="9525" cap="flat" cmpd="sng" algn="ctr">
+                      <a:solidFill>
+                        <a:srgbClr val="CFE9FE"/>
+                      </a:solidFill>
+                      <a:prstDash val="solid"/>
+                      <a:round/>
+                      <a:headEnd type="none" w="med" len="med"/>
+                      <a:tailEnd type="none" w="med" len="med"/>
+                    </a:lnR>
+                    <a:lnT w="9525" cap="flat" cmpd="sng" algn="ctr">
+                      <a:solidFill>
+                        <a:srgbClr val="CFE9FE"/>
+                      </a:solidFill>
+                      <a:prstDash val="solid"/>
+                      <a:round/>
+                      <a:headEnd type="none" w="med" len="med"/>
+                      <a:tailEnd type="none" w="med" len="med"/>
+                    </a:lnT>
+                    <a:lnB w="9525" cap="flat" cmpd="sng" algn="ctr">
+                      <a:solidFill>
+                        <a:srgbClr val="CFE9FE"/>
+                      </a:solidFill>
+                      <a:prstDash val="solid"/>
+                      <a:round/>
+                      <a:headEnd type="none" w="med" len="med"/>
+                      <a:tailEnd type="none" w="med" len="med"/>
+                    </a:lnB>
+                    <a:solidFill>
+                      <a:schemeClr val="bg1"/>
+                    </a:solidFill>
+                  </a:tcPr>
+                </a:tc>
+                <a:tc>
+                  <a:txBody>
+                    <a:bodyPr/>
+                    <a:lstStyle/>
+                    <a:p>
+                      <a:pPr algn="r" indent="0" marL="0">
+                        <a:buNone/>
+                      </a:pPr>
+                      <a:r>
+                        <a:rPr lang="en-US" sz="1400" dirty="0">
+                          <a:solidFill>
+                            <a:schemeClr val="accent6"/>
+                          </a:solidFill>
+                        </a:rPr>
+                        <a:t>TBD</a:t>
+                      </a:r>
+                      <a:endParaRPr lang="en-US" sz="1400" dirty="0"/>
+                    </a:p>
+                  </a:txBody>
+                  <a:tcPr marL="109728" marR="109728" marT="45720" marB="45720" anchor="ctr">
+                    <a:lnL w="9525" cap="flat" cmpd="sng" algn="ctr">
+                      <a:solidFill>
+                        <a:srgbClr val="CFE9FE"/>
+                      </a:solidFill>
+                      <a:prstDash val="solid"/>
+                      <a:round/>
+                      <a:headEnd type="none" w="med" len="med"/>
+                      <a:tailEnd type="none" w="med" len="med"/>
+                    </a:lnL>
+                    <a:lnR w="9525" cap="flat" cmpd="sng" algn="ctr">
+                      <a:solidFill>
+                        <a:srgbClr val="CFE9FE"/>
+                      </a:solidFill>
+                      <a:prstDash val="solid"/>
+                      <a:round/>
+                      <a:headEnd type="none" w="med" len="med"/>
+                      <a:tailEnd type="none" w="med" len="med"/>
+                    </a:lnR>
+                    <a:lnT w="9525" cap="flat" cmpd="sng" algn="ctr">
+                      <a:solidFill>
+                        <a:srgbClr val="CFE9FE"/>
+                      </a:solidFill>
+                      <a:prstDash val="solid"/>
+                      <a:round/>
+                      <a:headEnd type="none" w="med" len="med"/>
+                      <a:tailEnd type="none" w="med" len="med"/>
+                    </a:lnT>
+                    <a:lnB w="9525" cap="flat" cmpd="sng" algn="ctr">
+                      <a:solidFill>
+                        <a:srgbClr val="CFE9FE"/>
+                      </a:solidFill>
+                      <a:prstDash val="solid"/>
+                      <a:round/>
+                      <a:headEnd type="none" w="med" len="med"/>
+                      <a:tailEnd type="none" w="med" len="med"/>
+                    </a:lnB>
+                    <a:solidFill>
+                      <a:schemeClr val="bg1"/>
+                    </a:solidFill>
+                  </a:tcPr>
+                </a:tc>
+                <a:tc>
+                  <a:txBody>
+                    <a:bodyPr/>
+                    <a:lstStyle/>
+                    <a:p>
+                      <a:pPr algn="r" indent="0" marL="0">
+                        <a:buNone/>
+                      </a:pPr>
+                      <a:r>
+                        <a:rPr lang="en-US" sz="1400" dirty="0">
+                          <a:solidFill>
+                            <a:schemeClr val="accent6"/>
+                          </a:solidFill>
+                        </a:rPr>
+                        <a:t>—</a:t>
+                      </a:r>
+                      <a:endParaRPr lang="en-US" sz="1400" dirty="0"/>
+                    </a:p>
+                  </a:txBody>
+                  <a:tcPr marL="109728" marR="109728" marT="45720" marB="45720" anchor="ctr">
+                    <a:lnL w="9525" cap="flat" cmpd="sng" algn="ctr">
+                      <a:solidFill>
+                        <a:srgbClr val="CFE9FE"/>
+                      </a:solidFill>
+                      <a:prstDash val="solid"/>
+                      <a:round/>
+                      <a:headEnd type="none" w="med" len="med"/>
+                      <a:tailEnd type="none" w="med" len="med"/>
+                    </a:lnL>
+                    <a:lnR w="9525" cap="flat" cmpd="sng" algn="ctr">
+                      <a:solidFill>
+                        <a:srgbClr val="CFE9FE"/>
+                      </a:solidFill>
+                      <a:prstDash val="solid"/>
+                      <a:round/>
+                      <a:headEnd type="none" w="med" len="med"/>
+                      <a:tailEnd type="none" w="med" len="med"/>
+                    </a:lnR>
+                    <a:lnT w="9525" cap="flat" cmpd="sng" algn="ctr">
+                      <a:solidFill>
+                        <a:srgbClr val="CFE9FE"/>
+                      </a:solidFill>
+                      <a:prstDash val="solid"/>
+                      <a:round/>
+                      <a:headEnd type="none" w="med" len="med"/>
+                      <a:tailEnd type="none" w="med" len="med"/>
+                    </a:lnT>
+                    <a:lnB w="9525" cap="flat" cmpd="sng" algn="ctr">
+                      <a:solidFill>
+                        <a:srgbClr val="CFE9FE"/>
+                      </a:solidFill>
+                      <a:prstDash val="solid"/>
+                      <a:round/>
+                      <a:headEnd type="none" w="med" len="med"/>
+                      <a:tailEnd type="none" w="med" len="med"/>
+                    </a:lnB>
+                    <a:solidFill>
+                      <a:schemeClr val="bg1"/>
+                    </a:solidFill>
+                  </a:tcPr>
+                </a:tc>
+              </a:tr>
+            </a:tbl>
+          </a:graphicData>
+        </a:graphic>
+      </p:graphicFrame>
+      <p:sp>
+        <p:nvSpPr>
+          <p:cNvPr id="4" name="Table note"/>
+          <p:cNvSpPr txBox="1"/>
+          <p:nvPr/>
+        </p:nvSpPr>
+        <p:spPr>
+          <a:xfrm>
+            <a:off x="548640" y="3730752"/>
+            <a:ext cx="11064240" cy="320040"/>
+          </a:xfrm>
+          <a:prstGeom prst="rect">
+            <a:avLst/>
+          </a:prstGeom>
+          <a:noFill/>
+          <a:ln/>
+        </p:spPr>
+        <p:txBody>
+          <a:bodyPr wrap="square" lIns="0" tIns="0" rIns="0" bIns="0" rtlCol="0" anchor="t"/>
+          <a:lstStyle/>
+          <a:p>
+            <a:pPr indent="0" marL="0">
+              <a:buNone/>
+            </a:pPr>
+            <a:r>
+              <a:rPr lang="en-US" sz="1200" i="1" dirty="0">
+                <a:solidFill>
+                  <a:schemeClr val="accent6"/>
+                </a:solidFill>
+              </a:rPr>
+              <a:t>Framed = full gap sized from Salesforce data. Committed is agreed with each owner after validation; realized is tracked against the baseline.</a:t>
+            </a:r>
+            <a:endParaRPr lang="en-US" sz="1200" dirty="0"/>
+          </a:p>
+        </p:txBody>
+      </p:sp>
+      <p:sp>
+        <p:nvSpPr>
+          <p:cNvPr id="5" name="Priority grid"/>
+          <p:cNvSpPr/>
+          <p:nvPr/>
+        </p:nvSpPr>
+        <p:spPr>
+          <a:xfrm>
+            <a:off x="548640" y="4160520"/>
+            <a:ext cx="4937760" cy="1874520"/>
+          </a:xfrm>
+          <a:prstGeom prst="roundRect">
+            <a:avLst>
+              <a:gd name="adj" fmla="val 5854"/>
+            </a:avLst>
+          </a:prstGeom>
+          <a:solidFill>
+            <a:schemeClr val="bg2"/>
+          </a:solidFill>
+          <a:ln/>
+        </p:spPr>
+      </p:sp>
+      <p:sp>
+        <p:nvSpPr>
+          <p:cNvPr id="6" name="Grid vertical"/>
+          <p:cNvSpPr/>
+          <p:nvPr/>
+        </p:nvSpPr>
+        <p:spPr>
+          <a:xfrm>
+            <a:off x="3017520" y="4297680"/>
+            <a:ext cx="0" cy="1600200"/>
+          </a:xfrm>
+          <a:prstGeom prst="line">
+            <a:avLst/>
+          </a:prstGeom>
+          <a:noFill/>
+          <a:ln w="12700">
+            <a:solidFill>
+              <a:schemeClr val="accent3"/>
+            </a:solidFill>
+            <a:prstDash val="solid"/>
+          </a:ln>
+        </p:spPr>
+      </p:sp>
+      <p:sp>
+        <p:nvSpPr>
+          <p:cNvPr id="7" name="Grid horizontal"/>
+          <p:cNvSpPr/>
+          <p:nvPr/>
+        </p:nvSpPr>
+        <p:spPr>
+          <a:xfrm>
+            <a:off x="685800" y="5097780"/>
+            <a:ext cx="4663440" cy="0"/>
+          </a:xfrm>
+          <a:prstGeom prst="line">
+            <a:avLst/>
+          </a:prstGeom>
+          <a:noFill/>
+          <a:ln w="12700">
+            <a:solidFill>
+              <a:schemeClr val="accent3"/>
+            </a:solidFill>
+            <a:prstDash val="solid"/>
+          </a:ln>
+        </p:spPr>
+      </p:sp>
+      <p:sp>
+        <p:nvSpPr>
+          <p:cNvPr id="8" name="Grid quick wins"/>
+          <p:cNvSpPr txBox="1"/>
+          <p:nvPr/>
+        </p:nvSpPr>
+        <p:spPr>
+          <a:xfrm>
+            <a:off x="685800" y="4251960"/>
+            <a:ext cx="1828800" cy="274320"/>
+          </a:xfrm>
+          <a:prstGeom prst="rect">
+            <a:avLst/>
+          </a:prstGeom>
+          <a:noFill/>
+          <a:ln/>
+        </p:spPr>
+        <p:txBody>
+          <a:bodyPr wrap="square" lIns="0" tIns="0" rIns="0" bIns="0" rtlCol="0" anchor="t"/>
+          <a:lstStyle/>
+          <a:p>
+            <a:pPr indent="0" marL="0">
+              <a:buNone/>
+            </a:pPr>
+            <a:r>
+              <a:rPr lang="en-US" sz="1100" b="1" dirty="0">
+                <a:solidFill>
+                  <a:schemeClr val="accent6"/>
+                </a:solidFill>
+              </a:rPr>
+              <a:t>Quick wins</a:t>
+            </a:r>
+            <a:endParaRPr lang="en-US" sz="1100" dirty="0"/>
+          </a:p>
+        </p:txBody>
+      </p:sp>
+      <p:sp>
+        <p:nvSpPr>
+          <p:cNvPr id="9" name="Grid strategic"/>
+          <p:cNvSpPr txBox="1"/>
+          <p:nvPr/>
+        </p:nvSpPr>
+        <p:spPr>
+          <a:xfrm>
+            <a:off x="3154680" y="4251960"/>
+            <a:ext cx="1828800" cy="274320"/>
+          </a:xfrm>
+          <a:prstGeom prst="rect">
+            <a:avLst/>
+          </a:prstGeom>
+          <a:noFill/>
+          <a:ln/>
+        </p:spPr>
+        <p:txBody>
+          <a:bodyPr wrap="square" lIns="0" tIns="0" rIns="0" bIns="0" rtlCol="0" anchor="t"/>
+          <a:lstStyle/>
+          <a:p>
+            <a:pPr indent="0" marL="0">
+              <a:buNone/>
+            </a:pPr>
+            <a:r>
+              <a:rPr lang="en-US" sz="1100" b="1" dirty="0">
+                <a:solidFill>
+                  <a:schemeClr val="accent6"/>
+                </a:solidFill>
+              </a:rPr>
+              <a:t>Strategic</a:t>
+            </a:r>
+            <a:endParaRPr lang="en-US" sz="1100" dirty="0"/>
+          </a:p>
+        </p:txBody>
+      </p:sp>
+      <p:sp>
+        <p:nvSpPr>
+          <p:cNvPr id="10" name="Grid x axis"/>
+          <p:cNvSpPr txBox="1"/>
+          <p:nvPr/>
+        </p:nvSpPr>
+        <p:spPr>
+          <a:xfrm>
+            <a:off x="548640" y="6053328"/>
+            <a:ext cx="4937760" cy="274320"/>
+          </a:xfrm>
+          <a:prstGeom prst="rect">
+            <a:avLst/>
+          </a:prstGeom>
+          <a:noFill/>
+          <a:ln/>
+        </p:spPr>
+        <p:txBody>
+          <a:bodyPr wrap="square" lIns="0" tIns="0" rIns="0" bIns="0" rtlCol="0" anchor="t"/>
+          <a:lstStyle/>
+          <a:p>
+            <a:pPr algn="ctr" indent="0" marL="0">
+              <a:buNone/>
+            </a:pPr>
+            <a:r>
+              <a:rPr lang="en-US" sz="1100" dirty="0">
+                <a:solidFill>
+                  <a:schemeClr val="accent6"/>
+                </a:solidFill>
+              </a:rPr>
+              <a:t>Faster  ←  time to value  →  slower</a:t>
+            </a:r>
+            <a:endParaRPr lang="en-US" sz="1100" dirty="0"/>
+          </a:p>
+        </p:txBody>
+      </p:sp>
+      <p:sp>
+        <p:nvSpPr>
+          <p:cNvPr id="11" name="Grid y axis"/>
+          <p:cNvSpPr txBox="1"/>
+          <p:nvPr/>
+        </p:nvSpPr>
+        <p:spPr>
+          <a:xfrm>
+            <a:off x="5577840" y="4251960"/>
+            <a:ext cx="1371600" cy="274320"/>
+          </a:xfrm>
+          <a:prstGeom prst="rect">
+            <a:avLst/>
+          </a:prstGeom>
+          <a:noFill/>
+          <a:ln/>
+        </p:spPr>
+        <p:txBody>
+          <a:bodyPr wrap="square" lIns="0" tIns="0" rIns="0" bIns="0" rtlCol="0" anchor="t"/>
+          <a:lstStyle/>
+          <a:p>
+            <a:pPr indent="0" marL="0">
+              <a:buNone/>
+            </a:pPr>
+            <a:r>
+              <a:rPr lang="en-US" sz="1100" dirty="0">
+                <a:solidFill>
+                  <a:schemeClr val="accent6"/>
+                </a:solidFill>
+              </a:rPr>
+              <a:t>Higher value ↑</a:t>
+            </a:r>
+            <a:endParaRPr lang="en-US" sz="1100" dirty="0"/>
+          </a:p>
+        </p:txBody>
+      </p:sp>
+      <p:sp>
+        <p:nvSpPr>
+          <p:cNvPr id="12" name="Grid dot 1"/>
+          <p:cNvSpPr/>
+          <p:nvPr/>
+        </p:nvSpPr>
+        <p:spPr>
+          <a:xfrm>
+            <a:off x="1591056" y="5566410"/>
+            <a:ext cx="384048" cy="384048"/>
+          </a:xfrm>
+          <a:prstGeom prst="ellipse">
+            <a:avLst/>
+          </a:prstGeom>
+          <a:solidFill>
+            <a:schemeClr val="accent1"/>
+          </a:solidFill>
+          <a:ln/>
+        </p:spPr>
+      </p:sp>
+      <p:sp>
+        <p:nvSpPr>
+          <p:cNvPr id="13" name="Grid dot 1 label"/>
+          <p:cNvSpPr txBox="1"/>
+          <p:nvPr/>
+        </p:nvSpPr>
+        <p:spPr>
+          <a:xfrm>
+            <a:off x="1591056" y="5566410"/>
+            <a:ext cx="384048" cy="384048"/>
+          </a:xfrm>
+          <a:prstGeom prst="rect">
+            <a:avLst/>
+          </a:prstGeom>
+          <a:noFill/>
+          <a:ln/>
+        </p:spPr>
+        <p:txBody>
+          <a:bodyPr wrap="square" lIns="0" tIns="0" rIns="0" bIns="0" rtlCol="0" anchor="ctr"/>
+          <a:lstStyle/>
+          <a:p>
+            <a:pPr algn="ctr" indent="0" marL="0">
+              <a:buNone/>
+            </a:pPr>
+            <a:r>
+              <a:rPr lang="en-US" sz="1400" b="1" dirty="0">
+                <a:solidFill>
+                  <a:schemeClr val="bg1"/>
+                </a:solidFill>
+              </a:rPr>
+              <a:t>1</a:t>
+            </a:r>
+            <a:endParaRPr lang="en-US" sz="1400" dirty="0"/>
+          </a:p>
+        </p:txBody>
+      </p:sp>
+      <p:sp>
+        <p:nvSpPr>
+          <p:cNvPr id="14" name="Grid dot 2"/>
+          <p:cNvSpPr/>
+          <p:nvPr/>
+        </p:nvSpPr>
+        <p:spPr>
+          <a:xfrm>
+            <a:off x="3875227" y="4572914"/>
+            <a:ext cx="457200" cy="457200"/>
+          </a:xfrm>
+          <a:prstGeom prst="ellipse">
+            <a:avLst/>
+          </a:prstGeom>
+          <a:solidFill>
+            <a:schemeClr val="accent4"/>
+          </a:solidFill>
+          <a:ln/>
+        </p:spPr>
+      </p:sp>
+      <p:sp>
+        <p:nvSpPr>
+          <p:cNvPr id="15" name="Grid dot 2 label"/>
+          <p:cNvSpPr txBox="1"/>
+          <p:nvPr/>
+        </p:nvSpPr>
+        <p:spPr>
+          <a:xfrm>
+            <a:off x="3875227" y="4572914"/>
+            <a:ext cx="457200" cy="457200"/>
+          </a:xfrm>
+          <a:prstGeom prst="rect">
+            <a:avLst/>
+          </a:prstGeom>
+          <a:noFill/>
+          <a:ln/>
+        </p:spPr>
+        <p:txBody>
+          <a:bodyPr wrap="square" lIns="0" tIns="0" rIns="0" bIns="0" rtlCol="0" anchor="ctr"/>
+          <a:lstStyle/>
+          <a:p>
+            <a:pPr algn="ctr" indent="0" marL="0">
+              <a:buNone/>
+            </a:pPr>
+            <a:r>
+              <a:rPr lang="en-US" sz="1400" b="1" dirty="0">
+                <a:solidFill>
+                  <a:schemeClr val="bg1"/>
+                </a:solidFill>
+              </a:rPr>
+              <a:t>2</a:t>
+            </a:r>
+            <a:endParaRPr lang="en-US" sz="1400" dirty="0"/>
+          </a:p>
+        </p:txBody>
+      </p:sp>
+      <p:sp>
+        <p:nvSpPr>
+          <p:cNvPr id="16" name="Grid dot 3"/>
+          <p:cNvSpPr/>
+          <p:nvPr/>
+        </p:nvSpPr>
+        <p:spPr>
+          <a:xfrm>
+            <a:off x="1837944" y="4629150"/>
+            <a:ext cx="384048" cy="384048"/>
+          </a:xfrm>
+          <a:prstGeom prst="ellipse">
+            <a:avLst/>
+          </a:prstGeom>
+          <a:solidFill>
+            <a:schemeClr val="accent1"/>
+          </a:solidFill>
+          <a:ln/>
+        </p:spPr>
+      </p:sp>
+      <p:sp>
+        <p:nvSpPr>
+          <p:cNvPr id="17" name="Grid dot 3 label"/>
+          <p:cNvSpPr txBox="1"/>
+          <p:nvPr/>
+        </p:nvSpPr>
+        <p:spPr>
+          <a:xfrm>
+            <a:off x="1837944" y="4629150"/>
+            <a:ext cx="384048" cy="384048"/>
+          </a:xfrm>
+          <a:prstGeom prst="rect">
+            <a:avLst/>
+          </a:prstGeom>
+          <a:noFill/>
+          <a:ln/>
+        </p:spPr>
+        <p:txBody>
+          <a:bodyPr wrap="square" lIns="0" tIns="0" rIns="0" bIns="0" rtlCol="0" anchor="ctr"/>
+          <a:lstStyle/>
+          <a:p>
+            <a:pPr algn="ctr" indent="0" marL="0">
+              <a:buNone/>
+            </a:pPr>
+            <a:r>
+              <a:rPr lang="en-US" sz="1400" b="1" dirty="0">
+                <a:solidFill>
+                  <a:schemeClr val="bg1"/>
+                </a:solidFill>
+              </a:rPr>
+              <a:t>3</a:t>
+            </a:r>
+            <a:endParaRPr lang="en-US" sz="1400" dirty="0"/>
+          </a:p>
+        </p:txBody>
+      </p:sp>
+      <p:sp>
+        <p:nvSpPr>
+          <p:cNvPr id="18" name="Priority rationale"/>
+          <p:cNvSpPr txBox="1"/>
+          <p:nvPr/>
+        </p:nvSpPr>
+        <p:spPr>
+          <a:xfrm>
+            <a:off x="6949440" y="4160520"/>
+            <a:ext cx="4663440" cy="1874520"/>
+          </a:xfrm>
+          <a:prstGeom prst="rect">
+            <a:avLst/>
+          </a:prstGeom>
+          <a:noFill/>
+          <a:ln/>
+        </p:spPr>
+        <p:txBody>
+          <a:bodyPr wrap="square" lIns="0" tIns="0" rIns="0" bIns="0" rtlCol="0" anchor="t"/>
+          <a:lstStyle/>
+          <a:p>
+            <a:pPr indent="0" marL="0">
+              <a:buNone/>
+            </a:pPr>
+            <a:r>
+              <a:rPr lang="en-US" sz="1400" b="1" dirty="0">
+                <a:solidFill>
+                  <a:schemeClr val="tx2"/>
+                </a:solidFill>
+              </a:rPr>
+              <a:t>Why re-quotes first</a:t>
+            </a:r>
+            <a:endParaRPr lang="en-US" sz="1400" dirty="0"/>
+          </a:p>
+          <a:p>
+            <a:pPr indent="0" marL="0">
+              <a:buNone/>
+            </a:pPr>
+            <a:r>
+              <a:rPr lang="en-US" sz="1400" dirty="0">
+                <a:solidFill>
+                  <a:schemeClr val="tx1"/>
+                </a:solidFill>
+              </a:rPr>
+              <a:t>Largest framed value, visible directly in OpportunityHistory, and a clear owner in RevOps.</a:t>
+            </a:r>
+            <a:endParaRPr lang="en-US" sz="1400" dirty="0"/>
+          </a:p>
+          <a:p>
+            <a:pPr indent="0" marL="0">
+              <a:buNone/>
+            </a:pPr>
+            <a:r>
+              <a:rPr lang="en-US" sz="600" dirty="0">
+                <a:solidFill>
+                  <a:schemeClr val="tx1"/>
+                </a:solidFill>
+              </a:rPr>
+              <a:t> </a:t>
+            </a:r>
+            <a:endParaRPr lang="en-US" sz="1400" dirty="0"/>
+          </a:p>
+          <a:p>
+            <a:pPr indent="0" marL="0">
+              <a:buNone/>
+            </a:pPr>
+            <a:r>
+              <a:rPr lang="en-US" sz="1400" b="1" dirty="0">
+                <a:solidFill>
+                  <a:schemeClr val="tx2"/>
+                </a:solidFill>
+              </a:rPr>
+              <a:t>Quick wins run alongside</a:t>
+            </a:r>
+            <a:endParaRPr lang="en-US" sz="1400" dirty="0"/>
+          </a:p>
+          <a:p>
+            <a:pPr indent="0" marL="0">
+              <a:buNone/>
+            </a:pPr>
+            <a:r>
+              <a:rPr lang="en-US" sz="1400" dirty="0">
+                <a:solidFill>
+                  <a:schemeClr val="tx1"/>
+                </a:solidFill>
+              </a:rPr>
+              <a:t>Delegated EMEA approvals (1) and a required Qualification gate (3) are policy changes, not projects.</a:t>
+            </a:r>
+            <a:endParaRPr lang="en-US" sz="1400" dirty="0"/>
+          </a:p>
+        </p:txBody>
+      </p:sp>
+      <p:sp>
+        <p:nvSpPr>
+          <p:cNvPr id="25" name="Slide Number Placeholder 0"/>
+          <p:cNvSpPr>
+            <a:spLocks noGrp="1"/>
+          </p:cNvSpPr>
+          <p:nvPr>
+            <p:ph type="sldNum" sz="quarter" idx="4294967295"/>
+          </p:nvPr>
+        </p:nvSpPr>
+        <p:spPr>
+          <a:xfrm>
+            <a:off x="11155680" y="6400800"/>
+            <a:ext cx="457200" cy="274320"/>
+          </a:xfrm>
+          <a:prstGeom prst="rect">
+            <a:avLst/>
+          </a:prstGeom>
+          <a:extLst>
+            <a:ext uri="{C572A759-6A51-4108-AA02-DFA0A04FC94B}">
+              <ma14:wrappingTextBoxFlag xmlns:ma14="http://schemas.microsoft.com/office/mac/drawingml/2011/main" val="0"/>
+            </a:ext>
+          </a:extLst>
+        </p:spPr>
+        <p:txBody>
+          <a:bodyPr/>
+          <a:lstStyle>
+            <a:lvl1pPr>
+              <a:defRPr sz="1000">
+                <a:solidFill>
+                  <a:schemeClr val="accent6"/>
+                </a:solidFill>
+              </a:defRPr>
+            </a:lvl1pPr>
+          </a:lstStyle>
+          <a:p>
+            <a:pPr algn="r"/>
+            <a:fld id="{F7021451-1387-4CA6-816F-3879F97B5CBC}" type="slidenum">
+              <a:rPr b="0" lang="en-US"/>
+              <a:t>6</a:t>
+            </a:fld>
+            <a:endParaRPr lang="en-US"/>
+          </a:p>
+        </p:txBody>
+      </p:sp>
+    </p:spTree>
+  </p:cSld>
+  <p:clrMapOvr>
+    <a:masterClrMapping/>
+  </p:clrMapOvr>
+</p:sld>
+</file>
+
+<file path=ppt/slides/slide7.xml><?xml version="1.0" encoding="utf-8"?>
+<p:sld xmlns:a="http://schemas.openxmlformats.org/drawingml/2006/main" xmlns:r="http://schemas.openxmlformats.org/officeDocument/2006/relationships" xmlns:p="http://schemas.openxmlformats.org/presentationml/2006/main">
+  <p:cSld name="Slide 7">
+    <p:spTree>
+      <p:nvGrpSpPr>
+        <p:cNvPr id="1" name=""/>
+        <p:cNvGrpSpPr/>
+        <p:nvPr/>
+      </p:nvGrpSpPr>
+      <p:grpSpPr>
+        <a:xfrm>
+          <a:off x="0" y="0"/>
+          <a:ext cx="0" cy="0"/>
+          <a:chOff x="0" y="0"/>
+          <a:chExt cx="0" cy="0"/>
+        </a:xfrm>
+      </p:grpSpPr>
+      <p:sp>
+        <p:nvSpPr>
+          <p:cNvPr id="2" name="Text 0"/>
+          <p:cNvSpPr/>
+          <p:nvPr>
+            <p:ph idx="100" type="title" hasCustomPrompt="1"/>
+          </p:nvPr>
+        </p:nvSpPr>
+        <p:spPr>
+          <a:xfrm>
+            <a:off x="548640" y="320040"/>
+            <a:ext cx="11064240" cy="822960"/>
+          </a:xfrm>
+          <a:prstGeom prst="rect">
+            <a:avLst/>
+          </a:prstGeom>
+          <a:noFill/>
+          <a:ln/>
+        </p:spPr>
+        <p:txBody>
+          <a:bodyPr wrap="square" lIns="0" tIns="0" rIns="0" bIns="0" rtlCol="0" anchor="ctr"/>
+          <a:lstStyle/>
+          <a:p>
+            <a:pPr algn="l" indent="0" marL="0">
+              <a:buNone/>
+            </a:pPr>
+            <a:r>
+              <a:rPr lang="en-US" sz="3000" b="1" dirty="0">
+                <a:solidFill>
+                  <a:schemeClr val="tx2"/>
+                </a:solidFill>
+              </a:rPr>
+              <a:t>Value case: reduce re-quotes in quote-to-close</a:t>
+            </a:r>
+            <a:endParaRPr lang="en-US" sz="3000" dirty="0"/>
+          </a:p>
+        </p:txBody>
+      </p:sp>
+      <p:sp>
+        <p:nvSpPr>
+          <p:cNvPr id="3" name="Filter bar"/>
+          <p:cNvSpPr/>
+          <p:nvPr/>
+        </p:nvSpPr>
+        <p:spPr>
+          <a:xfrm>
+            <a:off x="548640" y="1234440"/>
+            <a:ext cx="11064240" cy="411480"/>
+          </a:xfrm>
+          <a:prstGeom prst="roundRect">
+            <a:avLst>
+              <a:gd name="adj" fmla="val 26667"/>
+            </a:avLst>
+          </a:prstGeom>
+          <a:solidFill>
+            <a:schemeClr val="bg2"/>
+          </a:solidFill>
+          <a:ln/>
+        </p:spPr>
+      </p:sp>
+      <p:sp>
+        <p:nvSpPr>
+          <p:cNvPr id="4" name="Filter text"/>
+          <p:cNvSpPr txBox="1"/>
+          <p:nvPr/>
+        </p:nvSpPr>
+        <p:spPr>
+          <a:xfrm>
+            <a:off x="777240" y="1234440"/>
+            <a:ext cx="10607040" cy="411480"/>
+          </a:xfrm>
+          <a:prstGeom prst="rect">
+            <a:avLst/>
+          </a:prstGeom>
+          <a:noFill/>
+          <a:ln/>
+        </p:spPr>
+        <p:txBody>
+          <a:bodyPr wrap="square" lIns="0" tIns="0" rIns="0" bIns="0" rtlCol="0" anchor="ctr"/>
+          <a:lstStyle/>
+          <a:p>
+            <a:pPr indent="0" marL="0">
+              <a:buNone/>
+            </a:pPr>
+            <a:r>
+              <a:rPr lang="en-US" sz="1200" dirty="0">
+                <a:solidFill>
+                  <a:schemeClr val="tx2"/>
+                </a:solidFill>
+              </a:rPr>
+              <a:t>Time frame: 2025-10 to 2026-09   ·   New business   ·   Deals that reached Negotiation   ·   Owner: VP Revenue Operations</a:t>
+            </a:r>
+            <a:endParaRPr lang="en-US" sz="1200" dirty="0"/>
+          </a:p>
+        </p:txBody>
+      </p:sp>
+      <p:sp>
+        <p:nvSpPr>
+          <p:cNvPr id="5" name="Value column 1 heading"/>
+          <p:cNvSpPr txBox="1"/>
+          <p:nvPr/>
+        </p:nvSpPr>
+        <p:spPr>
+          <a:xfrm>
+            <a:off x="548640" y="1828800"/>
+            <a:ext cx="3529584" cy="365760"/>
+          </a:xfrm>
+          <a:prstGeom prst="rect">
+            <a:avLst/>
+          </a:prstGeom>
+          <a:noFill/>
+          <a:ln/>
+        </p:spPr>
+        <p:txBody>
+          <a:bodyPr wrap="square" lIns="0" tIns="0" rIns="0" bIns="0" rtlCol="0" anchor="t"/>
+          <a:lstStyle/>
+          <a:p>
+            <a:pPr indent="0" marL="0">
+              <a:buNone/>
+            </a:pPr>
+            <a:r>
+              <a:rPr lang="en-US" sz="1600" b="1" dirty="0">
+                <a:solidFill>
+                  <a:schemeClr val="accent6"/>
+                </a:solidFill>
+              </a:rPr>
+              <a:t>Challenge</a:t>
+            </a:r>
+            <a:endParaRPr lang="en-US" sz="1600" dirty="0"/>
+          </a:p>
+        </p:txBody>
+      </p:sp>
+      <p:sp>
+        <p:nvSpPr>
+          <p:cNvPr id="6" name="Value column 1 body"/>
+          <p:cNvSpPr txBox="1"/>
+          <p:nvPr/>
+        </p:nvSpPr>
+        <p:spPr>
+          <a:xfrm>
+            <a:off x="548640" y="2240280"/>
+            <a:ext cx="3529584" cy="1828800"/>
+          </a:xfrm>
+          <a:prstGeom prst="rect">
+            <a:avLst/>
+          </a:prstGeom>
+          <a:noFill/>
+          <a:ln/>
+        </p:spPr>
+        <p:txBody>
+          <a:bodyPr wrap="square" lIns="0" tIns="0" rIns="0" bIns="0" rtlCol="0" anchor="t"/>
+          <a:lstStyle/>
+          <a:p>
+            <a:pPr marL="342900" indent="-342900">
+              <a:spcAft>
+                <a:spcPts val="600"/>
+              </a:spcAft>
+              <a:buSzPct val="100000"/>
+              <a:buChar char="•"/>
+            </a:pPr>
+            <a:r>
+              <a:rPr lang="en-US" sz="1400" dirty="0">
+                <a:solidFill>
+                  <a:schemeClr val="tx1"/>
+                </a:solidFill>
+              </a:rPr>
+              <a:t>750 negotiated deals a year; 19% loop back for a re-quote</a:t>
+            </a:r>
+            <a:endParaRPr lang="en-US" sz="1400" dirty="0"/>
+          </a:p>
+          <a:p>
+            <a:pPr marL="342900" indent="-342900">
+              <a:spcAft>
+                <a:spcPts val="600"/>
+              </a:spcAft>
+              <a:buSzPct val="100000"/>
+              <a:buChar char="•"/>
+            </a:pPr>
+            <a:r>
+              <a:rPr lang="en-US" sz="1400" dirty="0">
+                <a:solidFill>
+                  <a:schemeClr val="tx1"/>
+                </a:solidFill>
+              </a:rPr>
+              <a:t>Re-quoted deals win 31% vs 49%</a:t>
+            </a:r>
+            <a:endParaRPr lang="en-US" sz="1400" dirty="0"/>
+          </a:p>
+          <a:p>
+            <a:pPr marL="342900" indent="-342900">
+              <a:spcAft>
+                <a:spcPts val="600"/>
+              </a:spcAft>
+              <a:buSzPct val="100000"/>
+              <a:buChar char="•"/>
+            </a:pPr>
+            <a:r>
+              <a:rPr lang="en-US" sz="1400" dirty="0">
+                <a:solidFill>
+                  <a:schemeClr val="tx1"/>
+                </a:solidFill>
+              </a:rPr>
+              <a:t>EMEA approvals take 7.0 days vs 1.2</a:t>
+            </a:r>
+            <a:endParaRPr lang="en-US" sz="1400" dirty="0"/>
+          </a:p>
+        </p:txBody>
+      </p:sp>
+      <p:sp>
+        <p:nvSpPr>
+          <p:cNvPr id="7" name="Value column 2 heading"/>
+          <p:cNvSpPr txBox="1"/>
+          <p:nvPr/>
+        </p:nvSpPr>
+        <p:spPr>
+          <a:xfrm>
+            <a:off x="4315968" y="1828800"/>
+            <a:ext cx="3529584" cy="365760"/>
+          </a:xfrm>
+          <a:prstGeom prst="rect">
+            <a:avLst/>
+          </a:prstGeom>
+          <a:noFill/>
+          <a:ln/>
+        </p:spPr>
+        <p:txBody>
+          <a:bodyPr wrap="square" lIns="0" tIns="0" rIns="0" bIns="0" rtlCol="0" anchor="t"/>
+          <a:lstStyle/>
+          <a:p>
+            <a:pPr indent="0" marL="0">
+              <a:buNone/>
+            </a:pPr>
+            <a:r>
+              <a:rPr lang="en-US" sz="1600" b="1" dirty="0">
+                <a:solidFill>
+                  <a:schemeClr val="accent6"/>
+                </a:solidFill>
+              </a:rPr>
+              <a:t>Root cause (to capture)</a:t>
+            </a:r>
+            <a:endParaRPr lang="en-US" sz="1600" dirty="0"/>
+          </a:p>
+        </p:txBody>
+      </p:sp>
+      <p:sp>
+        <p:nvSpPr>
+          <p:cNvPr id="8" name="Value column 2 body"/>
+          <p:cNvSpPr txBox="1"/>
+          <p:nvPr/>
+        </p:nvSpPr>
+        <p:spPr>
+          <a:xfrm>
+            <a:off x="4315968" y="2240280"/>
+            <a:ext cx="3529584" cy="1828800"/>
+          </a:xfrm>
+          <a:prstGeom prst="rect">
+            <a:avLst/>
+          </a:prstGeom>
+          <a:noFill/>
+          <a:ln/>
+        </p:spPr>
+        <p:txBody>
+          <a:bodyPr wrap="square" lIns="0" tIns="0" rIns="0" bIns="0" rtlCol="0" anchor="t"/>
+          <a:lstStyle/>
+          <a:p>
+            <a:pPr marL="342900" indent="-342900">
+              <a:spcAft>
+                <a:spcPts val="600"/>
+              </a:spcAft>
+              <a:buSzPct val="100000"/>
+              <a:buChar char="•"/>
+            </a:pPr>
+            <a:r>
+              <a:rPr lang="en-US" sz="1400" dirty="0">
+                <a:solidFill>
+                  <a:schemeClr val="tx1"/>
+                </a:solidFill>
+              </a:rPr>
+              <a:t>Reason codes: quote expired, discount, scope, pricing error</a:t>
+            </a:r>
+            <a:endParaRPr lang="en-US" sz="1400" dirty="0"/>
+          </a:p>
+          <a:p>
+            <a:pPr marL="342900" indent="-342900">
+              <a:spcAft>
+                <a:spcPts val="600"/>
+              </a:spcAft>
+              <a:buSzPct val="100000"/>
+              <a:buChar char="•"/>
+            </a:pPr>
+            <a:r>
+              <a:rPr lang="en-US" sz="1400" dirty="0">
+                <a:solidFill>
+                  <a:schemeClr val="tx1"/>
+                </a:solidFill>
+              </a:rPr>
+              <a:t>Hotspots by approver queue, region and rep</a:t>
+            </a:r>
+            <a:endParaRPr lang="en-US" sz="1400" dirty="0"/>
+          </a:p>
+          <a:p>
+            <a:pPr marL="342900" indent="-342900">
+              <a:spcAft>
+                <a:spcPts val="600"/>
+              </a:spcAft>
+              <a:buSzPct val="100000"/>
+              <a:buChar char="•"/>
+            </a:pPr>
+            <a:r>
+              <a:rPr lang="en-US" sz="1400" dirty="0">
+                <a:solidFill>
+                  <a:schemeClr val="tx1"/>
+                </a:solidFill>
+              </a:rPr>
+              <a:t>Confirm: slow approval → expired quote → re-quote</a:t>
+            </a:r>
+            <a:endParaRPr lang="en-US" sz="1400" dirty="0"/>
+          </a:p>
+        </p:txBody>
+      </p:sp>
+      <p:sp>
+        <p:nvSpPr>
+          <p:cNvPr id="9" name="Value column 3 heading"/>
+          <p:cNvSpPr txBox="1"/>
+          <p:nvPr/>
+        </p:nvSpPr>
+        <p:spPr>
+          <a:xfrm>
+            <a:off x="8083296" y="1828800"/>
+            <a:ext cx="3529584" cy="365760"/>
+          </a:xfrm>
+          <a:prstGeom prst="rect">
+            <a:avLst/>
+          </a:prstGeom>
+          <a:noFill/>
+          <a:ln/>
+        </p:spPr>
+        <p:txBody>
+          <a:bodyPr wrap="square" lIns="0" tIns="0" rIns="0" bIns="0" rtlCol="0" anchor="t"/>
+          <a:lstStyle/>
+          <a:p>
+            <a:pPr indent="0" marL="0">
+              <a:buNone/>
+            </a:pPr>
+            <a:r>
+              <a:rPr lang="en-US" sz="1600" b="1" dirty="0">
+                <a:solidFill>
+                  <a:schemeClr val="accent6"/>
+                </a:solidFill>
+              </a:rPr>
+              <a:t>Solution with Apromore</a:t>
+            </a:r>
+            <a:endParaRPr lang="en-US" sz="1600" dirty="0"/>
+          </a:p>
+        </p:txBody>
+      </p:sp>
+      <p:sp>
+        <p:nvSpPr>
+          <p:cNvPr id="10" name="Value column 3 body"/>
+          <p:cNvSpPr txBox="1"/>
+          <p:nvPr/>
+        </p:nvSpPr>
+        <p:spPr>
+          <a:xfrm>
+            <a:off x="8083296" y="2240280"/>
+            <a:ext cx="3529584" cy="1828800"/>
+          </a:xfrm>
+          <a:prstGeom prst="rect">
+            <a:avLst/>
+          </a:prstGeom>
+          <a:noFill/>
+          <a:ln/>
+        </p:spPr>
+        <p:txBody>
+          <a:bodyPr wrap="square" lIns="0" tIns="0" rIns="0" bIns="0" rtlCol="0" anchor="t"/>
+          <a:lstStyle/>
+          <a:p>
+            <a:pPr marL="342900" indent="-342900">
+              <a:spcAft>
+                <a:spcPts val="600"/>
+              </a:spcAft>
+              <a:buSzPct val="100000"/>
+              <a:buChar char="•"/>
+            </a:pPr>
+            <a:r>
+              <a:rPr lang="en-US" sz="1400" dirty="0">
+                <a:solidFill>
+                  <a:schemeClr val="tx1"/>
+                </a:solidFill>
+              </a:rPr>
+              <a:t>Performance views show where quotes wait and loop</a:t>
+            </a:r>
+            <a:endParaRPr lang="en-US" sz="1400" dirty="0"/>
+          </a:p>
+          <a:p>
+            <a:pPr marL="342900" indent="-342900">
+              <a:spcAft>
+                <a:spcPts val="600"/>
+              </a:spcAft>
+              <a:buSzPct val="100000"/>
+              <a:buChar char="•"/>
+            </a:pPr>
+            <a:r>
+              <a:rPr lang="en-US" sz="1400" dirty="0">
+                <a:solidFill>
+                  <a:schemeClr val="tx1"/>
+                </a:solidFill>
+              </a:rPr>
+              <a:t>Conformance checking flags skipped steps</a:t>
+            </a:r>
+            <a:endParaRPr lang="en-US" sz="1400" dirty="0"/>
+          </a:p>
+          <a:p>
+            <a:pPr marL="342900" indent="-342900">
+              <a:spcAft>
+                <a:spcPts val="600"/>
+              </a:spcAft>
+              <a:buSzPct val="100000"/>
+              <a:buChar char="•"/>
+            </a:pPr>
+            <a:r>
+              <a:rPr lang="en-US" sz="1400" dirty="0">
+                <a:solidFill>
+                  <a:schemeClr val="tx1"/>
+                </a:solidFill>
+              </a:rPr>
+              <a:t>Simulate a delegated EMEA approval threshold first</a:t>
+            </a:r>
+            <a:endParaRPr lang="en-US" sz="1400" dirty="0"/>
+          </a:p>
+        </p:txBody>
+      </p:sp>
+      <p:sp>
+        <p:nvSpPr>
+          <p:cNvPr id="11" name="Chain 1 label"/>
+          <p:cNvSpPr txBox="1"/>
+          <p:nvPr/>
+        </p:nvSpPr>
+        <p:spPr>
+          <a:xfrm>
+            <a:off x="548640" y="4251960"/>
+            <a:ext cx="1508760" cy="411480"/>
+          </a:xfrm>
+          <a:prstGeom prst="rect">
+            <a:avLst/>
+          </a:prstGeom>
+          <a:noFill/>
+          <a:ln/>
+        </p:spPr>
+        <p:txBody>
+          <a:bodyPr wrap="square" lIns="0" tIns="0" rIns="0" bIns="0" rtlCol="0" anchor="b"/>
+          <a:lstStyle/>
+          <a:p>
+            <a:pPr algn="ctr" indent="0" marL="0">
+              <a:buNone/>
+            </a:pPr>
+            <a:r>
+              <a:rPr lang="en-US" sz="1200" b="1" dirty="0">
+                <a:solidFill>
+                  <a:schemeClr val="tx2"/>
+                </a:solidFill>
+              </a:rPr>
+              <a:t>Negotiated deals / yr</a:t>
+            </a:r>
+            <a:endParaRPr lang="en-US" sz="1200" dirty="0"/>
+          </a:p>
+        </p:txBody>
+      </p:sp>
+      <p:sp>
+        <p:nvSpPr>
+          <p:cNvPr id="12" name="Chain 1 box"/>
+          <p:cNvSpPr/>
+          <p:nvPr/>
+        </p:nvSpPr>
+        <p:spPr>
+          <a:xfrm>
+            <a:off x="548640" y="4709160"/>
+            <a:ext cx="1508760" cy="777240"/>
+          </a:xfrm>
+          <a:prstGeom prst="roundRect">
+            <a:avLst>
+              <a:gd name="adj" fmla="val 14118"/>
+            </a:avLst>
+          </a:prstGeom>
+          <a:solidFill>
+            <a:schemeClr val="bg2"/>
+          </a:solidFill>
+          <a:ln/>
+        </p:spPr>
+      </p:sp>
+      <p:sp>
+        <p:nvSpPr>
+          <p:cNvPr id="13" name="Chain 1 value"/>
+          <p:cNvSpPr txBox="1"/>
+          <p:nvPr/>
+        </p:nvSpPr>
+        <p:spPr>
+          <a:xfrm>
+            <a:off x="548640" y="4709160"/>
+            <a:ext cx="1508760" cy="777240"/>
+          </a:xfrm>
+          <a:prstGeom prst="rect">
+            <a:avLst/>
+          </a:prstGeom>
+          <a:noFill/>
+          <a:ln/>
+        </p:spPr>
+        <p:txBody>
+          <a:bodyPr wrap="square" lIns="0" tIns="0" rIns="0" bIns="0" rtlCol="0" anchor="ctr"/>
+          <a:lstStyle/>
+          <a:p>
+            <a:pPr algn="ctr" indent="0" marL="0">
+              <a:buNone/>
+            </a:pPr>
+            <a:r>
+              <a:rPr lang="en-US" sz="2200" b="1" dirty="0">
+                <a:solidFill>
+                  <a:schemeClr val="tx2"/>
+                </a:solidFill>
+              </a:rPr>
+              <a:t>750</a:t>
+            </a:r>
+            <a:endParaRPr lang="en-US" sz="2200" dirty="0"/>
+          </a:p>
+        </p:txBody>
+      </p:sp>
+      <p:sp>
+        <p:nvSpPr>
+          <p:cNvPr id="14" name="Chain 1 operator"/>
+          <p:cNvSpPr txBox="1"/>
+          <p:nvPr/>
+        </p:nvSpPr>
+        <p:spPr>
+          <a:xfrm>
+            <a:off x="2057400" y="4709160"/>
+            <a:ext cx="274320" cy="777240"/>
+          </a:xfrm>
+          <a:prstGeom prst="rect">
+            <a:avLst/>
+          </a:prstGeom>
+          <a:noFill/>
+          <a:ln/>
+        </p:spPr>
+        <p:txBody>
+          <a:bodyPr wrap="square" lIns="0" tIns="0" rIns="0" bIns="0" rtlCol="0" anchor="ctr"/>
+          <a:lstStyle/>
+          <a:p>
+            <a:pPr algn="ctr" indent="0" marL="0">
+              <a:buNone/>
+            </a:pPr>
+            <a:r>
+              <a:rPr lang="en-US" sz="2000" dirty="0">
+                <a:solidFill>
+                  <a:schemeClr val="accent6"/>
+                </a:solidFill>
+              </a:rPr>
+              <a:t>×</a:t>
+            </a:r>
+            <a:endParaRPr lang="en-US" sz="2000" dirty="0"/>
+          </a:p>
+        </p:txBody>
+      </p:sp>
+      <p:sp>
+        <p:nvSpPr>
+          <p:cNvPr id="15" name="Chain 2 label"/>
+          <p:cNvSpPr txBox="1"/>
+          <p:nvPr/>
+        </p:nvSpPr>
+        <p:spPr>
+          <a:xfrm>
+            <a:off x="2331720" y="4251960"/>
+            <a:ext cx="1508760" cy="411480"/>
+          </a:xfrm>
+          <a:prstGeom prst="rect">
+            <a:avLst/>
+          </a:prstGeom>
+          <a:noFill/>
+          <a:ln/>
+        </p:spPr>
+        <p:txBody>
+          <a:bodyPr wrap="square" lIns="0" tIns="0" rIns="0" bIns="0" rtlCol="0" anchor="b"/>
+          <a:lstStyle/>
+          <a:p>
+            <a:pPr algn="ctr" indent="0" marL="0">
+              <a:buNone/>
+            </a:pPr>
+            <a:r>
+              <a:rPr lang="en-US" sz="1200" b="1" dirty="0">
+                <a:solidFill>
+                  <a:schemeClr val="tx2"/>
+                </a:solidFill>
+              </a:rPr>
+              <a:t>Re-quotes per deal</a:t>
+            </a:r>
+            <a:endParaRPr lang="en-US" sz="1200" dirty="0"/>
+          </a:p>
+        </p:txBody>
+      </p:sp>
+      <p:sp>
+        <p:nvSpPr>
+          <p:cNvPr id="16" name="Chain 2 box"/>
+          <p:cNvSpPr/>
+          <p:nvPr/>
+        </p:nvSpPr>
+        <p:spPr>
+          <a:xfrm>
+            <a:off x="2331720" y="4709160"/>
+            <a:ext cx="1508760" cy="777240"/>
+          </a:xfrm>
+          <a:prstGeom prst="roundRect">
+            <a:avLst>
+              <a:gd name="adj" fmla="val 14118"/>
+            </a:avLst>
+          </a:prstGeom>
+          <a:solidFill>
+            <a:schemeClr val="bg2"/>
+          </a:solidFill>
+          <a:ln/>
+        </p:spPr>
+      </p:sp>
+      <p:sp>
+        <p:nvSpPr>
+          <p:cNvPr id="17" name="Chain 2 value"/>
+          <p:cNvSpPr txBox="1"/>
+          <p:nvPr/>
+        </p:nvSpPr>
+        <p:spPr>
+          <a:xfrm>
+            <a:off x="2331720" y="4709160"/>
+            <a:ext cx="1508760" cy="777240"/>
+          </a:xfrm>
+          <a:prstGeom prst="rect">
+            <a:avLst/>
+          </a:prstGeom>
+          <a:noFill/>
+          <a:ln/>
+        </p:spPr>
+        <p:txBody>
+          <a:bodyPr wrap="square" lIns="0" tIns="0" rIns="0" bIns="0" rtlCol="0" anchor="ctr"/>
+          <a:lstStyle/>
+          <a:p>
+            <a:pPr algn="ctr" indent="0" marL="0">
+              <a:buNone/>
+            </a:pPr>
+            <a:r>
+              <a:rPr lang="en-US" sz="2200" b="1" dirty="0">
+                <a:solidFill>
+                  <a:schemeClr val="tx2"/>
+                </a:solidFill>
+              </a:rPr>
+              <a:t>0.19</a:t>
+            </a:r>
+            <a:endParaRPr lang="en-US" sz="2200" dirty="0"/>
+          </a:p>
+        </p:txBody>
+      </p:sp>
+      <p:sp>
+        <p:nvSpPr>
+          <p:cNvPr id="18" name="Chain 2 operator"/>
+          <p:cNvSpPr txBox="1"/>
+          <p:nvPr/>
+        </p:nvSpPr>
+        <p:spPr>
+          <a:xfrm>
+            <a:off x="3840480" y="4709160"/>
+            <a:ext cx="274320" cy="777240"/>
+          </a:xfrm>
+          <a:prstGeom prst="rect">
+            <a:avLst/>
+          </a:prstGeom>
+          <a:noFill/>
+          <a:ln/>
+        </p:spPr>
+        <p:txBody>
+          <a:bodyPr wrap="square" lIns="0" tIns="0" rIns="0" bIns="0" rtlCol="0" anchor="ctr"/>
+          <a:lstStyle/>
+          <a:p>
+            <a:pPr algn="ctr" indent="0" marL="0">
+              <a:buNone/>
+            </a:pPr>
+            <a:r>
+              <a:rPr lang="en-US" sz="2000" dirty="0">
+                <a:solidFill>
+                  <a:schemeClr val="accent6"/>
+                </a:solidFill>
+              </a:rPr>
+              <a:t>×</a:t>
+            </a:r>
+            <a:endParaRPr lang="en-US" sz="2000" dirty="0"/>
+          </a:p>
+        </p:txBody>
+      </p:sp>
+      <p:sp>
+        <p:nvSpPr>
+          <p:cNvPr id="19" name="Chain 3 label"/>
+          <p:cNvSpPr txBox="1"/>
+          <p:nvPr/>
+        </p:nvSpPr>
+        <p:spPr>
+          <a:xfrm>
+            <a:off x="4114800" y="4251960"/>
+            <a:ext cx="1508760" cy="411480"/>
+          </a:xfrm>
+          <a:prstGeom prst="rect">
+            <a:avLst/>
+          </a:prstGeom>
+          <a:noFill/>
+          <a:ln/>
+        </p:spPr>
+        <p:txBody>
+          <a:bodyPr wrap="square" lIns="0" tIns="0" rIns="0" bIns="0" rtlCol="0" anchor="b"/>
+          <a:lstStyle/>
+          <a:p>
+            <a:pPr algn="ctr" indent="0" marL="0">
+              <a:buNone/>
+            </a:pPr>
+            <a:r>
+              <a:rPr lang="en-US" sz="1200" b="1" dirty="0">
+                <a:solidFill>
+                  <a:schemeClr val="tx2"/>
+                </a:solidFill>
+              </a:rPr>
+              <a:t>Win-rate gap</a:t>
+            </a:r>
+            <a:endParaRPr lang="en-US" sz="1200" dirty="0"/>
+          </a:p>
+        </p:txBody>
+      </p:sp>
+      <p:sp>
+        <p:nvSpPr>
+          <p:cNvPr id="20" name="Chain 3 box"/>
+          <p:cNvSpPr/>
+          <p:nvPr/>
+        </p:nvSpPr>
+        <p:spPr>
+          <a:xfrm>
+            <a:off x="4114800" y="4709160"/>
+            <a:ext cx="1508760" cy="777240"/>
+          </a:xfrm>
+          <a:prstGeom prst="roundRect">
+            <a:avLst>
+              <a:gd name="adj" fmla="val 14118"/>
+            </a:avLst>
+          </a:prstGeom>
+          <a:solidFill>
+            <a:schemeClr val="bg2"/>
+          </a:solidFill>
+          <a:ln/>
+        </p:spPr>
+      </p:sp>
+      <p:sp>
+        <p:nvSpPr>
+          <p:cNvPr id="21" name="Chain 3 value"/>
+          <p:cNvSpPr txBox="1"/>
+          <p:nvPr/>
+        </p:nvSpPr>
+        <p:spPr>
+          <a:xfrm>
+            <a:off x="4114800" y="4709160"/>
+            <a:ext cx="1508760" cy="777240"/>
+          </a:xfrm>
+          <a:prstGeom prst="rect">
+            <a:avLst/>
+          </a:prstGeom>
+          <a:noFill/>
+          <a:ln/>
+        </p:spPr>
+        <p:txBody>
+          <a:bodyPr wrap="square" lIns="0" tIns="0" rIns="0" bIns="0" rtlCol="0" anchor="ctr"/>
+          <a:lstStyle/>
+          <a:p>
+            <a:pPr algn="ctr" indent="0" marL="0">
+              <a:buNone/>
+            </a:pPr>
+            <a:r>
+              <a:rPr lang="en-US" sz="2200" b="1" dirty="0">
+                <a:solidFill>
+                  <a:schemeClr val="tx2"/>
+                </a:solidFill>
+              </a:rPr>
+              <a:t>17.5 pts</a:t>
+            </a:r>
+            <a:endParaRPr lang="en-US" sz="2200" dirty="0"/>
+          </a:p>
+        </p:txBody>
+      </p:sp>
+      <p:sp>
+        <p:nvSpPr>
+          <p:cNvPr id="22" name="Chain 3 operator"/>
+          <p:cNvSpPr txBox="1"/>
+          <p:nvPr/>
+        </p:nvSpPr>
+        <p:spPr>
+          <a:xfrm>
+            <a:off x="5623560" y="4709160"/>
+            <a:ext cx="274320" cy="777240"/>
+          </a:xfrm>
+          <a:prstGeom prst="rect">
+            <a:avLst/>
+          </a:prstGeom>
+          <a:noFill/>
+          <a:ln/>
+        </p:spPr>
+        <p:txBody>
+          <a:bodyPr wrap="square" lIns="0" tIns="0" rIns="0" bIns="0" rtlCol="0" anchor="ctr"/>
+          <a:lstStyle/>
+          <a:p>
+            <a:pPr algn="ctr" indent="0" marL="0">
+              <a:buNone/>
+            </a:pPr>
+            <a:r>
+              <a:rPr lang="en-US" sz="2000" dirty="0">
+                <a:solidFill>
+                  <a:schemeClr val="accent6"/>
+                </a:solidFill>
+              </a:rPr>
+              <a:t>×</a:t>
+            </a:r>
+            <a:endParaRPr lang="en-US" sz="2000" dirty="0"/>
+          </a:p>
+        </p:txBody>
+      </p:sp>
+      <p:sp>
+        <p:nvSpPr>
+          <p:cNvPr id="23" name="Chain 4 label"/>
+          <p:cNvSpPr txBox="1"/>
+          <p:nvPr/>
+        </p:nvSpPr>
+        <p:spPr>
+          <a:xfrm>
+            <a:off x="5897880" y="4251960"/>
+            <a:ext cx="1508760" cy="411480"/>
+          </a:xfrm>
+          <a:prstGeom prst="rect">
+            <a:avLst/>
+          </a:prstGeom>
+          <a:noFill/>
+          <a:ln/>
+        </p:spPr>
+        <p:txBody>
+          <a:bodyPr wrap="square" lIns="0" tIns="0" rIns="0" bIns="0" rtlCol="0" anchor="b"/>
+          <a:lstStyle/>
+          <a:p>
+            <a:pPr algn="ctr" indent="0" marL="0">
+              <a:buNone/>
+            </a:pPr>
+            <a:r>
+              <a:rPr lang="en-US" sz="1200" b="1" dirty="0">
+                <a:solidFill>
+                  <a:schemeClr val="tx2"/>
+                </a:solidFill>
+              </a:rPr>
+              <a:t>Average won deal</a:t>
+            </a:r>
+            <a:endParaRPr lang="en-US" sz="1200" dirty="0"/>
+          </a:p>
+        </p:txBody>
+      </p:sp>
+      <p:sp>
+        <p:nvSpPr>
+          <p:cNvPr id="24" name="Chain 4 box"/>
+          <p:cNvSpPr/>
+          <p:nvPr/>
+        </p:nvSpPr>
+        <p:spPr>
+          <a:xfrm>
+            <a:off x="5897880" y="4709160"/>
+            <a:ext cx="1508760" cy="777240"/>
+          </a:xfrm>
+          <a:prstGeom prst="roundRect">
+            <a:avLst>
+              <a:gd name="adj" fmla="val 14118"/>
+            </a:avLst>
+          </a:prstGeom>
+          <a:solidFill>
+            <a:schemeClr val="bg2"/>
+          </a:solidFill>
+          <a:ln/>
+        </p:spPr>
+      </p:sp>
+      <p:sp>
+        <p:nvSpPr>
+          <p:cNvPr id="25" name="Chain 4 value"/>
+          <p:cNvSpPr txBox="1"/>
+          <p:nvPr/>
+        </p:nvSpPr>
+        <p:spPr>
+          <a:xfrm>
+            <a:off x="5897880" y="4709160"/>
+            <a:ext cx="1508760" cy="777240"/>
+          </a:xfrm>
+          <a:prstGeom prst="rect">
+            <a:avLst/>
+          </a:prstGeom>
+          <a:noFill/>
+          <a:ln/>
+        </p:spPr>
+        <p:txBody>
+          <a:bodyPr wrap="square" lIns="0" tIns="0" rIns="0" bIns="0" rtlCol="0" anchor="ctr"/>
+          <a:lstStyle/>
+          <a:p>
+            <a:pPr algn="ctr" indent="0" marL="0">
+              <a:buNone/>
+            </a:pPr>
+            <a:r>
+              <a:rPr lang="en-US" sz="2200" b="1" dirty="0">
+                <a:solidFill>
+                  <a:schemeClr val="tx2"/>
+                </a:solidFill>
+              </a:rPr>
+              <a:t>$53k</a:t>
+            </a:r>
+            <a:endParaRPr lang="en-US" sz="2200" dirty="0"/>
+          </a:p>
+        </p:txBody>
+      </p:sp>
+      <p:sp>
+        <p:nvSpPr>
+          <p:cNvPr id="26" name="Chain 4 operator"/>
+          <p:cNvSpPr txBox="1"/>
+          <p:nvPr/>
+        </p:nvSpPr>
+        <p:spPr>
+          <a:xfrm>
+            <a:off x="7406640" y="4709160"/>
+            <a:ext cx="274320" cy="777240"/>
+          </a:xfrm>
+          <a:prstGeom prst="rect">
+            <a:avLst/>
+          </a:prstGeom>
+          <a:noFill/>
+          <a:ln/>
+        </p:spPr>
+        <p:txBody>
+          <a:bodyPr wrap="square" lIns="0" tIns="0" rIns="0" bIns="0" rtlCol="0" anchor="ctr"/>
+          <a:lstStyle/>
+          <a:p>
+            <a:pPr algn="ctr" indent="0" marL="0">
+              <a:buNone/>
+            </a:pPr>
+            <a:r>
+              <a:rPr lang="en-US" sz="2000" dirty="0">
+                <a:solidFill>
+                  <a:schemeClr val="accent6"/>
+                </a:solidFill>
+              </a:rPr>
+              <a:t>×</a:t>
+            </a:r>
+            <a:endParaRPr lang="en-US" sz="2000" dirty="0"/>
+          </a:p>
+        </p:txBody>
+      </p:sp>
+      <p:sp>
+        <p:nvSpPr>
+          <p:cNvPr id="27" name="Chain 5 label"/>
+          <p:cNvSpPr txBox="1"/>
+          <p:nvPr/>
+        </p:nvSpPr>
+        <p:spPr>
+          <a:xfrm>
+            <a:off x="7680960" y="4251960"/>
+            <a:ext cx="1508760" cy="411480"/>
+          </a:xfrm>
+          <a:prstGeom prst="rect">
+            <a:avLst/>
+          </a:prstGeom>
+          <a:noFill/>
+          <a:ln/>
+        </p:spPr>
+        <p:txBody>
+          <a:bodyPr wrap="square" lIns="0" tIns="0" rIns="0" bIns="0" rtlCol="0" anchor="b"/>
+          <a:lstStyle/>
+          <a:p>
+            <a:pPr algn="ctr" indent="0" marL="0">
+              <a:buNone/>
+            </a:pPr>
+            <a:r>
+              <a:rPr lang="en-US" sz="1200" b="1" dirty="0">
+                <a:solidFill>
+                  <a:schemeClr val="tx2"/>
+                </a:solidFill>
+              </a:rPr>
+              <a:t>Improvement</a:t>
+            </a:r>
+            <a:endParaRPr lang="en-US" sz="1200" dirty="0"/>
+          </a:p>
+        </p:txBody>
+      </p:sp>
+      <p:sp>
+        <p:nvSpPr>
+          <p:cNvPr id="28" name="Chain 5 box"/>
+          <p:cNvSpPr/>
+          <p:nvPr/>
+        </p:nvSpPr>
+        <p:spPr>
+          <a:xfrm>
+            <a:off x="7680960" y="4709160"/>
+            <a:ext cx="1508760" cy="777240"/>
+          </a:xfrm>
+          <a:prstGeom prst="roundRect">
+            <a:avLst>
+              <a:gd name="adj" fmla="val 14118"/>
+            </a:avLst>
+          </a:prstGeom>
+          <a:solidFill>
+            <a:schemeClr val="bg2"/>
+          </a:solidFill>
+          <a:ln/>
+        </p:spPr>
+      </p:sp>
+      <p:sp>
+        <p:nvSpPr>
+          <p:cNvPr id="29" name="Chain 5 value"/>
+          <p:cNvSpPr txBox="1"/>
+          <p:nvPr/>
+        </p:nvSpPr>
+        <p:spPr>
+          <a:xfrm>
+            <a:off x="7680960" y="4709160"/>
+            <a:ext cx="1508760" cy="777240"/>
+          </a:xfrm>
+          <a:prstGeom prst="rect">
+            <a:avLst/>
+          </a:prstGeom>
+          <a:noFill/>
+          <a:ln/>
+        </p:spPr>
+        <p:txBody>
+          <a:bodyPr wrap="square" lIns="0" tIns="0" rIns="0" bIns="0" rtlCol="0" anchor="ctr"/>
+          <a:lstStyle/>
+          <a:p>
+            <a:pPr algn="ctr" indent="0" marL="0">
+              <a:buNone/>
+            </a:pPr>
+            <a:r>
+              <a:rPr lang="en-US" sz="2200" b="1" dirty="0">
+                <a:solidFill>
+                  <a:schemeClr val="tx2"/>
+                </a:solidFill>
+              </a:rPr>
+              <a:t>50%</a:t>
+            </a:r>
+            <a:endParaRPr lang="en-US" sz="2200" dirty="0"/>
+          </a:p>
+        </p:txBody>
+      </p:sp>
+      <p:sp>
+        <p:nvSpPr>
+          <p:cNvPr id="30" name="Chain 5 operator"/>
+          <p:cNvSpPr txBox="1"/>
+          <p:nvPr/>
+        </p:nvSpPr>
+        <p:spPr>
+          <a:xfrm>
+            <a:off x="9189720" y="4709160"/>
+            <a:ext cx="274320" cy="777240"/>
+          </a:xfrm>
+          <a:prstGeom prst="rect">
+            <a:avLst/>
+          </a:prstGeom>
+          <a:noFill/>
+          <a:ln/>
+        </p:spPr>
+        <p:txBody>
+          <a:bodyPr wrap="square" lIns="0" tIns="0" rIns="0" bIns="0" rtlCol="0" anchor="ctr"/>
+          <a:lstStyle/>
+          <a:p>
+            <a:pPr algn="ctr" indent="0" marL="0">
+              <a:buNone/>
+            </a:pPr>
+            <a:r>
+              <a:rPr lang="en-US" sz="2000" dirty="0">
+                <a:solidFill>
+                  <a:schemeClr val="accent6"/>
+                </a:solidFill>
+              </a:rPr>
+              <a:t>=</a:t>
+            </a:r>
+            <a:endParaRPr lang="en-US" sz="2000" dirty="0"/>
+          </a:p>
+        </p:txBody>
+      </p:sp>
+      <p:sp>
+        <p:nvSpPr>
+          <p:cNvPr id="31" name="Framed value pill"/>
+          <p:cNvSpPr/>
+          <p:nvPr/>
+        </p:nvSpPr>
+        <p:spPr>
+          <a:xfrm>
+            <a:off x="9509760" y="4251960"/>
+            <a:ext cx="2103120" cy="1234440"/>
+          </a:xfrm>
+          <a:prstGeom prst="roundRect">
+            <a:avLst>
+              <a:gd name="adj" fmla="val 8889"/>
+            </a:avLst>
+          </a:prstGeom>
+          <a:solidFill>
+            <a:schemeClr val="tx2"/>
+          </a:solidFill>
+          <a:ln/>
+        </p:spPr>
+      </p:sp>
+      <p:sp>
+        <p:nvSpPr>
+          <p:cNvPr id="32" name="Framed value"/>
+          <p:cNvSpPr txBox="1"/>
+          <p:nvPr/>
+        </p:nvSpPr>
+        <p:spPr>
+          <a:xfrm>
+            <a:off x="9509760" y="4251960"/>
+            <a:ext cx="2103120" cy="1234440"/>
+          </a:xfrm>
+          <a:prstGeom prst="rect">
+            <a:avLst/>
+          </a:prstGeom>
+          <a:noFill/>
+          <a:ln/>
+        </p:spPr>
+        <p:txBody>
+          <a:bodyPr wrap="square" lIns="0" tIns="0" rIns="0" bIns="0" rtlCol="0" anchor="ctr"/>
+          <a:lstStyle/>
+          <a:p>
+            <a:pPr algn="ctr" indent="0" marL="0">
+              <a:buNone/>
+            </a:pPr>
+            <a:r>
+              <a:rPr lang="en-US" sz="3000" b="1" dirty="0">
+                <a:solidFill>
+                  <a:schemeClr val="bg1"/>
+                </a:solidFill>
+              </a:rPr>
+              <a:t>≈ $669k</a:t>
+            </a:r>
+            <a:endParaRPr lang="en-US" sz="1400" dirty="0"/>
+          </a:p>
+          <a:p>
+            <a:pPr algn="ctr" indent="0" marL="0">
+              <a:buNone/>
+            </a:pPr>
+            <a:r>
+              <a:rPr lang="en-US" sz="1200" dirty="0">
+                <a:solidFill>
+                  <a:schemeClr val="accent3"/>
+                </a:solidFill>
+              </a:rPr>
+              <a:t>revenue upside p.a.</a:t>
+            </a:r>
+            <a:endParaRPr lang="en-US" sz="1400" dirty="0"/>
+          </a:p>
+        </p:txBody>
+      </p:sp>
+      <p:sp>
+        <p:nvSpPr>
+          <p:cNvPr id="33" name="Assumptions"/>
+          <p:cNvSpPr txBox="1"/>
+          <p:nvPr/>
+        </p:nvSpPr>
+        <p:spPr>
+          <a:xfrm>
+            <a:off x="548640" y="5669280"/>
+            <a:ext cx="11064240" cy="457200"/>
+          </a:xfrm>
+          <a:prstGeom prst="rect">
+            <a:avLst/>
+          </a:prstGeom>
+          <a:noFill/>
+          <a:ln/>
+        </p:spPr>
+        <p:txBody>
+          <a:bodyPr wrap="square" lIns="0" tIns="0" rIns="0" bIns="0" rtlCol="0" anchor="t"/>
+          <a:lstStyle/>
+          <a:p>
+            <a:pPr indent="0" marL="0">
+              <a:buNone/>
+            </a:pPr>
+            <a:r>
+              <a:rPr lang="en-US" sz="1100" i="1" dirty="0">
+                <a:solidFill>
+                  <a:schemeClr val="accent6"/>
+                </a:solidFill>
+              </a:rPr>
+              <a:t>Assumptions: annualised from 10 months of history; win-rate gap compares only deals that reached Negotiation; cycle-time gains not counted; half of the gap closed.</a:t>
+            </a:r>
+            <a:endParaRPr lang="en-US" sz="1100" dirty="0"/>
+          </a:p>
+        </p:txBody>
+      </p:sp>
+      <p:sp>
+        <p:nvSpPr>
+          <p:cNvPr id="25" name="Slide Number Placeholder 0"/>
+          <p:cNvSpPr>
+            <a:spLocks noGrp="1"/>
+          </p:cNvSpPr>
+          <p:nvPr>
+            <p:ph type="sldNum" sz="quarter" idx="4294967295"/>
+          </p:nvPr>
+        </p:nvSpPr>
+        <p:spPr>
+          <a:xfrm>
+            <a:off x="11155680" y="6400800"/>
+            <a:ext cx="457200" cy="274320"/>
+          </a:xfrm>
+          <a:prstGeom prst="rect">
+            <a:avLst/>
+          </a:prstGeom>
+          <a:extLst>
+            <a:ext uri="{C572A759-6A51-4108-AA02-DFA0A04FC94B}">
+              <ma14:wrappingTextBoxFlag xmlns:ma14="http://schemas.microsoft.com/office/mac/drawingml/2011/main" val="0"/>
+            </a:ext>
+          </a:extLst>
+        </p:spPr>
+        <p:txBody>
+          <a:bodyPr/>
+          <a:lstStyle>
+            <a:lvl1pPr>
+              <a:defRPr sz="1000">
+                <a:solidFill>
+                  <a:schemeClr val="accent6"/>
+                </a:solidFill>
+              </a:defRPr>
+            </a:lvl1pPr>
+          </a:lstStyle>
+          <a:p>
+            <a:pPr algn="r"/>
+            <a:fld id="{F7021451-1387-4CA6-816F-3879F97B5CBC}" type="slidenum">
+              <a:rPr b="0" lang="en-US"/>
+              <a:t>7</a:t>
+            </a:fld>
+            <a:endParaRPr lang="en-US"/>
+          </a:p>
+        </p:txBody>
+      </p:sp>
+    </p:spTree>
+  </p:cSld>
+  <p:clrMapOvr>
+    <a:masterClrMapping/>
+  </p:clrMapOvr>
+</p:sld>
+</file>
+
+<file path=ppt/slides/slide8.xml><?xml version="1.0" encoding="utf-8"?>
+<p:sld xmlns:a="http://schemas.openxmlformats.org/drawingml/2006/main" xmlns:r="http://schemas.openxmlformats.org/officeDocument/2006/relationships" xmlns:p="http://schemas.openxmlformats.org/presentationml/2006/main">
+  <p:cSld name="Slide 8">
     <p:spTree>
       <p:nvGrpSpPr>
         <p:cNvPr id="1" name=""/>

--- a/deck/salesforce-process-intelligence.pptx
+++ b/deck/salesforce-process-intelligence.pptx
@@ -114,26 +114,26 @@
   <p:extLst>
     <p:ext uri="{521415D9-36F7-43E2-AB2F-B90AF26B5E84}">
       <p14:sectionLst xmlns:p14="http://schemas.microsoft.com/office/powerpoint/2010/main">
-        <p14:section name="Opening" id="{d5783a8d-0375-479f-66a9-711c76928298}">
+        <p14:section name="Opening" id="{b050dd30-102d-29fc-b4ae-9b2030b869c0}">
           <p14:sldIdLst>
             <p14:sldId id="256"/>
             <p14:sldId id="257"/>
             <p14:sldId id="258"/>
           </p14:sldIdLst>
         </p14:section>
-        <p14:section name="Evidence" id="{745848bb-1833-4927-b61a-18bd3a33a0ee}">
+        <p14:section name="Evidence" id="{d2ec7e79-e8ef-e849-ad28-09df078927b7}">
           <p14:sldIdLst>
             <p14:sldId id="259"/>
             <p14:sldId id="260"/>
           </p14:sldIdLst>
         </p14:section>
-        <p14:section name="Value" id="{917a4510-0ac2-e60e-6387-7cd41e3296ba}">
+        <p14:section name="Value" id="{29e77a92-fce9-1b59-75ee-a1d313e0ef2f}">
           <p14:sldIdLst>
             <p14:sldId id="261"/>
             <p14:sldId id="262"/>
           </p14:sldIdLst>
         </p14:section>
-        <p14:section name="Close" id="{94860cf0-d90a-442e-6da5-05e8683e92f1}">
+        <p14:section name="Close" id="{5999a4a6-a7f4-b100-9ef8-d364f4755a58}">
           <p14:sldIdLst>
             <p14:sldId id="263"/>
           </p14:sldIdLst>
@@ -5173,7 +5173,7 @@
         </p:nvSpPr>
         <p:spPr>
           <a:xfrm>
-            <a:off x="548640" y="1508760"/>
+            <a:off x="548640" y="1371600"/>
             <a:ext cx="2651760" cy="822960"/>
           </a:xfrm>
           <a:prstGeom prst="rect">
@@ -5209,7 +5209,7 @@
         </p:nvSpPr>
         <p:spPr>
           <a:xfrm>
-            <a:off x="3291840" y="1508760"/>
+            <a:off x="3291840" y="1371600"/>
             <a:ext cx="3566160" cy="822960"/>
           </a:xfrm>
           <a:prstGeom prst="rect">
@@ -5245,7 +5245,7 @@
         </p:nvSpPr>
         <p:spPr>
           <a:xfrm>
-            <a:off x="548640" y="2926080"/>
+            <a:off x="548640" y="2560320"/>
             <a:ext cx="2651760" cy="822960"/>
           </a:xfrm>
           <a:prstGeom prst="rect">
@@ -5281,7 +5281,7 @@
         </p:nvSpPr>
         <p:spPr>
           <a:xfrm>
-            <a:off x="3291840" y="2926080"/>
+            <a:off x="3291840" y="2560320"/>
             <a:ext cx="3566160" cy="822960"/>
           </a:xfrm>
           <a:prstGeom prst="rect">
@@ -5317,7 +5317,7 @@
         </p:nvSpPr>
         <p:spPr>
           <a:xfrm>
-            <a:off x="548640" y="4343400"/>
+            <a:off x="548640" y="3749040"/>
             <a:ext cx="2651760" cy="822960"/>
           </a:xfrm>
           <a:prstGeom prst="rect">
@@ -5353,7 +5353,7 @@
         </p:nvSpPr>
         <p:spPr>
           <a:xfrm>
-            <a:off x="3291840" y="4343400"/>
+            <a:off x="3291840" y="3749040"/>
             <a:ext cx="3566160" cy="822960"/>
           </a:xfrm>
           <a:prstGeom prst="rect">
@@ -5389,8 +5389,8 @@
         </p:nvSpPr>
         <p:spPr>
           <a:xfrm>
-            <a:off x="548640" y="5715000"/>
-            <a:ext cx="6309360" cy="457200"/>
+            <a:off x="548640" y="4892040"/>
+            <a:ext cx="6309360" cy="411480"/>
           </a:xfrm>
           <a:prstGeom prst="rect">
             <a:avLst/>
@@ -5419,7 +5419,69 @@
       </p:sp>
       <p:sp>
         <p:nvSpPr>
-          <p:cNvPr id="10" name="Map frame"/>
+          <p:cNvPr id="10" name="Dashboard link"/>
+          <p:cNvSpPr/>
+          <p:nvPr/>
+        </p:nvSpPr>
+        <p:spPr>
+          <a:xfrm>
+            <a:off x="548640" y="5486400"/>
+            <a:ext cx="6309360" cy="548640"/>
+          </a:xfrm>
+          <a:prstGeom prst="roundRect">
+            <a:avLst>
+              <a:gd name="adj" fmla="val 25000"/>
+            </a:avLst>
+          </a:prstGeom>
+          <a:solidFill>
+            <a:schemeClr val="accent3"/>
+          </a:solidFill>
+          <a:ln w="19050">
+            <a:solidFill>
+              <a:schemeClr val="accent1"/>
+            </a:solidFill>
+          </a:ln>
+        </p:spPr>
+        <p:txBody>
+          <a:bodyPr wrap="square" lIns="1016" tIns="1016" rIns="1016" bIns="1016" rtlCol="0" anchor="ctr"/>
+          <a:lstStyle/>
+          <a:p>
+            <a:pPr algn="ctr" indent="0" marL="0">
+              <a:buNone/>
+            </a:pPr>
+            <a:r>
+              <a:rPr lang="en-US" sz="1400" b="1" dirty="0">
+                <a:solidFill>
+                  <a:schemeClr val="tx2"/>
+                </a:solidFill>
+              </a:rPr>
+              <a:t>Live process map:  </a:t>
+            </a:r>
+            <a:pPr algn="ctr" indent="0" marL="0">
+              <a:buNone/>
+            </a:pPr>
+            <a:r>
+              <a:rPr lang="en-US" sz="1400" b="1" u="sng" dirty="0">
+                <a:solidFill>
+                  <a:srgbClr val="000000"/>
+                </a:solidFill>
+                <a:hlinkClick r:id="rId1" invalidUrl="" action="" tgtFrame="" tooltip="Open the live dashboard" history="1" highlightClick="0" endSnd="0">
+                  <a:extLst>
+                    <a:ext uri="{A12FA001-AC4F-418D-AE19-62706E023703}">
+                      <ahyp:hlinkClr xmlns:ahyp="http://schemas.microsoft.com/office/drawing/2018/hyperlinkcolor" val="tx"/>
+                    </a:ext>
+                  </a:extLst>
+                </a:hlinkClick>
+              </a:rPr>
+              <a:t>salesforce-process-intelligence.vercel.app</a:t>
+            </a:r>
+            <a:endParaRPr lang="en-US" sz="1400" dirty="0"/>
+          </a:p>
+        </p:txBody>
+      </p:sp>
+      <p:sp>
+        <p:nvSpPr>
+          <p:cNvPr id="11" name="Map frame"/>
           <p:cNvSpPr/>
           <p:nvPr/>
         </p:nvSpPr>
@@ -5444,14 +5506,14 @@
       </p:sp>
       <p:pic>
         <p:nvPicPr>
-          <p:cNvPr id="11" name="Process map" descr="Process map from the hosted dashboard">    </p:cNvPr>
+          <p:cNvPr id="12" name="Process map" descr="Process map from the hosted dashboard">    </p:cNvPr>
           <p:cNvPicPr>
             <a:picLocks noChangeAspect="1"/>
           </p:cNvPicPr>
           <p:nvPr/>
         </p:nvPicPr>
         <p:blipFill>
-          <a:blip r:embed="rId1"/>
+          <a:blip r:embed="rId2"/>
           <a:stretch>
             <a:fillRect/>
           </a:stretch>

--- a/deck/salesforce-process-intelligence.pptx
+++ b/deck/salesforce-process-intelligence.pptx
@@ -114,26 +114,26 @@
   <p:extLst>
     <p:ext uri="{521415D9-36F7-43E2-AB2F-B90AF26B5E84}">
       <p14:sectionLst xmlns:p14="http://schemas.microsoft.com/office/powerpoint/2010/main">
-        <p14:section name="Opening" id="{b050dd30-102d-29fc-b4ae-9b2030b869c0}">
+        <p14:section name="Opening" id="{3af4691f-0fb7-5226-cb0f-abc31c1d42be}">
           <p14:sldIdLst>
             <p14:sldId id="256"/>
             <p14:sldId id="257"/>
             <p14:sldId id="258"/>
           </p14:sldIdLst>
         </p14:section>
-        <p14:section name="Evidence" id="{d2ec7e79-e8ef-e849-ad28-09df078927b7}">
+        <p14:section name="Evidence" id="{6a977af7-a138-5416-9f5c-76d5c5006097}">
           <p14:sldIdLst>
             <p14:sldId id="259"/>
             <p14:sldId id="260"/>
           </p14:sldIdLst>
         </p14:section>
-        <p14:section name="Value" id="{29e77a92-fce9-1b59-75ee-a1d313e0ef2f}">
+        <p14:section name="Value" id="{c6c7a964-23e0-d62a-86f8-93ff3444f8b3}">
           <p14:sldIdLst>
             <p14:sldId id="261"/>
             <p14:sldId id="262"/>
           </p14:sldIdLst>
         </p14:section>
-        <p14:section name="Close" id="{5999a4a6-a7f4-b100-9ef8-d364f4755a58}">
+        <p14:section name="Close" id="{2a813b7d-90a6-c94b-08ac-296adb9b2326}">
           <p14:sldIdLst>
             <p14:sldId id="263"/>
           </p14:sldIdLst>
@@ -5450,17 +5450,6 @@
               <a:buNone/>
             </a:pPr>
             <a:r>
-              <a:rPr lang="en-US" sz="1400" b="1" dirty="0">
-                <a:solidFill>
-                  <a:schemeClr val="tx2"/>
-                </a:solidFill>
-              </a:rPr>
-              <a:t>Live process map:  </a:t>
-            </a:r>
-            <a:pPr algn="ctr" indent="0" marL="0">
-              <a:buNone/>
-            </a:pPr>
-            <a:r>
               <a:rPr lang="en-US" sz="1400" b="1" u="sng" dirty="0">
                 <a:solidFill>
                   <a:srgbClr val="000000"/>
@@ -5473,7 +5462,7 @@
                   </a:extLst>
                 </a:hlinkClick>
               </a:rPr>
-              <a:t>salesforce-process-intelligence.vercel.app</a:t>
+              <a:t>Open the live process map  →</a:t>
             </a:r>
             <a:endParaRPr lang="en-US" sz="1400" dirty="0"/>
           </a:p>

--- a/deck/salesforce-process-intelligence.pptx
+++ b/deck/salesforce-process-intelligence.pptx
@@ -114,26 +114,26 @@
   <p:extLst>
     <p:ext uri="{521415D9-36F7-43E2-AB2F-B90AF26B5E84}">
       <p14:sectionLst xmlns:p14="http://schemas.microsoft.com/office/powerpoint/2010/main">
-        <p14:section name="Opening" id="{3af4691f-0fb7-5226-cb0f-abc31c1d42be}">
+        <p14:section name="Opening" id="{94d81707-862b-126d-e9c7-f6783de64c0a}">
           <p14:sldIdLst>
             <p14:sldId id="256"/>
             <p14:sldId id="257"/>
             <p14:sldId id="258"/>
           </p14:sldIdLst>
         </p14:section>
-        <p14:section name="Evidence" id="{6a977af7-a138-5416-9f5c-76d5c5006097}">
+        <p14:section name="Evidence" id="{cef6550d-f6b9-adcb-d1d5-0268788250c3}">
           <p14:sldIdLst>
             <p14:sldId id="259"/>
             <p14:sldId id="260"/>
           </p14:sldIdLst>
         </p14:section>
-        <p14:section name="Value" id="{c6c7a964-23e0-d62a-86f8-93ff3444f8b3}">
+        <p14:section name="Value" id="{a4da9e89-2ef9-8cff-a232-505eb71b89e1}">
           <p14:sldIdLst>
             <p14:sldId id="261"/>
             <p14:sldId id="262"/>
           </p14:sldIdLst>
         </p14:section>
-        <p14:section name="Close" id="{2a813b7d-90a6-c94b-08ac-296adb9b2326}">
+        <p14:section name="Close" id="{3429c88f-02b5-10ec-d6d9-02a8443e999f}">
           <p14:sldIdLst>
             <p14:sldId id="263"/>
           </p14:sldIdLst>
@@ -1563,7 +1563,7 @@
           <a:p>
             <a:r>
               <a:rPr lang="en-US" dirty="0"/>
-              <a:t>Framed value isn't committed value. Today's work stops at Frame on purpose: the numbers are evidence-backed but the improvement assumption belongs to the opportunity owner. Commit means signing off KPI definitions and values together; Realize means tracking the KPI against the baseline on a fixed cadence.</a:t>
+              <a:t>Framed value isn't committed value. Today's work stops at Frame on purpose: the numbers are illustrative and the improvement assumption belongs to the opportunity owner. Commit means signing off KPI definitions and values together; Realize means tracking the KPI against the baseline on a fixed cadence.</a:t>
             </a:r>
             <a:endParaRPr lang="en-US" dirty="0"/>
           </a:p>
@@ -1739,7 +1739,7 @@
           <a:p>
             <a:r>
               <a:rPr lang="en-US" dirty="0"/>
-              <a:t>Orange marks the problem cohort in each chart. Win-rate gaps compare like with like, for example only deals that reached Negotiation for re-quotes.</a:t>
+              <a:t>Orange marks the problem cohort in each chart. These are associations, not proven causes: they don't control for deal size, discount, region or rep. Win-rate gaps compare like with like, for example only deals that reached Negotiation for re-quotes.</a:t>
             </a:r>
             <a:endParaRPr lang="en-US" dirty="0"/>
           </a:p>
@@ -1827,7 +1827,7 @@
           <a:p>
             <a:r>
               <a:rPr lang="en-US" dirty="0"/>
-              <a:t>Portfolio view first, then one deep-dive. Framed values come straight from the data; Committed stays TBD until the owner signs off the KPI definition and the improvement assumption. Numbers on the grid match the table rows.</a:t>
+              <a:t>Portfolio view first, then one deep-dive. Full-gap values are illustrative and gross; the overlap counts are real and show why the total can't simply be added. Owners are proposed, not committed. Committed stays TBD until the owner and Finance sign off.</a:t>
             </a:r>
             <a:endParaRPr lang="en-US" dirty="0"/>
           </a:p>
@@ -1915,7 +1915,7 @@
           <a:p>
             <a:r>
               <a:rPr lang="en-US" dirty="0"/>
-              <a:t>This follows my value framing format: challenge, root cause, solution, then a multiplicative value chain. The customer owns the improvement assumption; we own the evidence. Root cause is labelled 'to capture' because it needs reason codes the CRM doesn't hold yet.</a:t>
+              <a:t>This follows my value framing format: challenge, root cause, solution, then a multiplicative value chain. The customer owns the improvement assumption; we own the evidence. Root cause is labelled 'to capture' because it needs reason codes the CRM doesn't hold yet. The chain multiplies to the displayed value using unrounded inputs.</a:t>
             </a:r>
             <a:endParaRPr lang="en-US" dirty="0"/>
           </a:p>
@@ -2003,7 +2003,7 @@
           <a:p>
             <a:r>
               <a:rPr lang="en-US" dirty="0"/>
-              <a:t>Close on the decision: validate on production data, pilot one policy change, then monitor value realised in Apromore.</a:t>
+              <a:t>Close on the decision: validate on production data, run a controlled pilot only after the causes are confirmed, then measure against a frozen baseline with Finance sign-off.</a:t>
             </a:r>
             <a:endParaRPr lang="en-US" dirty="0"/>
           </a:p>
@@ -2973,7 +2973,7 @@
                   <a:schemeClr val="accent3"/>
                 </a:solidFill>
               </a:rPr>
-              <a:t>Lead-to-close process intelligence: a working demo build</a:t>
+              <a:t>Simulated value case with a working Salesforce extraction pipeline</a:t>
             </a:r>
             <a:endParaRPr lang="en-US" sz="2000" dirty="0"/>
           </a:p>
@@ -3072,7 +3072,7 @@
                   <a:schemeClr val="tx2"/>
                 </a:solidFill>
               </a:rPr>
-              <a:t>The answer first: three process fixes worth $1.4M a year</a:t>
+              <a:t>Illustrative annual upside: $1.4M at 50% capture</a:t>
             </a:r>
             <a:endParaRPr lang="en-US" sz="3000" dirty="0"/>
           </a:p>
@@ -3147,7 +3147,7 @@
                   <a:schemeClr val="tx2"/>
                 </a:solidFill>
               </a:rPr>
-              <a:t>Annual revenue upside if half of the gap is closed on three issues found in the CRM data. Full gap: $2.8M.</a:t>
+              <a:t>Gross scenario across three overlapping opportunities, before deduplication. Full gap: $2.8M.</a:t>
             </a:r>
             <a:endParaRPr lang="en-US" sz="1600" dirty="0"/>
           </a:p>
@@ -3155,43 +3155,65 @@
       </p:sp>
       <p:sp>
         <p:nvSpPr>
-          <p:cNvPr id="5" name="Headline basis"/>
+          <p:cNvPr id="5" name="Data note"/>
+          <p:cNvSpPr/>
+          <p:nvPr/>
+        </p:nvSpPr>
+        <p:spPr>
+          <a:xfrm>
+            <a:off x="548640" y="3657600"/>
+            <a:ext cx="5120640" cy="1143000"/>
+          </a:xfrm>
+          <a:prstGeom prst="roundRect">
+            <a:avLst>
+              <a:gd name="adj" fmla="val 9600"/>
+            </a:avLst>
+          </a:prstGeom>
+          <a:solidFill>
+            <a:schemeClr val="accent3"/>
+          </a:solidFill>
+          <a:ln/>
+        </p:spPr>
+      </p:sp>
+      <p:sp>
+        <p:nvSpPr>
+          <p:cNvPr id="6" name="Headline basis"/>
           <p:cNvSpPr txBox="1"/>
           <p:nvPr/>
         </p:nvSpPr>
         <p:spPr>
           <a:xfrm>
-            <a:off x="548640" y="3703320"/>
-            <a:ext cx="4937760" cy="365760"/>
-          </a:xfrm>
-          <a:prstGeom prst="rect">
-            <a:avLst/>
-          </a:prstGeom>
-          <a:noFill/>
-          <a:ln/>
-        </p:spPr>
-        <p:txBody>
-          <a:bodyPr wrap="square" lIns="0" tIns="0" rIns="0" bIns="0" rtlCol="0" anchor="t"/>
+            <a:off x="731520" y="3730752"/>
+            <a:ext cx="4754880" cy="1005840"/>
+          </a:xfrm>
+          <a:prstGeom prst="rect">
+            <a:avLst/>
+          </a:prstGeom>
+          <a:noFill/>
+          <a:ln/>
+        </p:spPr>
+        <p:txBody>
+          <a:bodyPr wrap="square" lIns="0" tIns="0" rIns="0" bIns="0" rtlCol="0" anchor="ctr"/>
           <a:lstStyle/>
           <a:p>
             <a:pPr indent="0" marL="0">
               <a:buNone/>
             </a:pPr>
             <a:r>
-              <a:rPr lang="en-US" sz="1400" i="1" dirty="0">
-                <a:solidFill>
-                  <a:schemeClr val="accent6"/>
-                </a:solidFill>
-              </a:rPr>
-              <a:t>Sized from 800 opportunities over 10.4 months.</a:t>
-            </a:r>
-            <a:endParaRPr lang="en-US" sz="1400" dirty="0"/>
-          </a:p>
-        </p:txBody>
-      </p:sp>
-      <p:sp>
-        <p:nvSpPr>
-          <p:cNvPr id="6" name="Finding 1"/>
+              <a:rPr lang="en-US" sz="1300" dirty="0">
+                <a:solidFill>
+                  <a:schemeClr val="tx2"/>
+                </a:solidFill>
+              </a:rPr>
+              <a:t>Illustrative: 800 simulated opportunities in Salesforce's object shape (10.4 months). The same pipeline runs live on 40 seeded opportunities in a Salesforce trial org.</a:t>
+            </a:r>
+            <a:endParaRPr lang="en-US" sz="1300" dirty="0"/>
+          </a:p>
+        </p:txBody>
+      </p:sp>
+      <p:sp>
+        <p:nvSpPr>
+          <p:cNvPr id="7" name="Finding 1"/>
           <p:cNvSpPr/>
           <p:nvPr/>
         </p:nvSpPr>
@@ -3213,7 +3235,7 @@
       </p:sp>
       <p:sp>
         <p:nvSpPr>
-          <p:cNvPr id="7" name="Finding 1 chip"/>
+          <p:cNvPr id="8" name="Finding 1 chip"/>
           <p:cNvSpPr/>
           <p:nvPr/>
         </p:nvSpPr>
@@ -3235,7 +3257,7 @@
       </p:sp>
       <p:sp>
         <p:nvSpPr>
-          <p:cNvPr id="8" name="Finding 1 label"/>
+          <p:cNvPr id="9" name="Finding 1 label"/>
           <p:cNvSpPr txBox="1"/>
           <p:nvPr/>
         </p:nvSpPr>
@@ -3271,7 +3293,7 @@
       </p:sp>
       <p:sp>
         <p:nvSpPr>
-          <p:cNvPr id="9" name="Finding 1 text"/>
+          <p:cNvPr id="10" name="Finding 1 text"/>
           <p:cNvSpPr txBox="1"/>
           <p:nvPr/>
         </p:nvSpPr>
@@ -3307,7 +3329,7 @@
       </p:sp>
       <p:sp>
         <p:nvSpPr>
-          <p:cNvPr id="10" name="Finding 2"/>
+          <p:cNvPr id="11" name="Finding 2"/>
           <p:cNvSpPr/>
           <p:nvPr/>
         </p:nvSpPr>
@@ -3329,7 +3351,7 @@
       </p:sp>
       <p:sp>
         <p:nvSpPr>
-          <p:cNvPr id="11" name="Finding 2 chip"/>
+          <p:cNvPr id="12" name="Finding 2 chip"/>
           <p:cNvSpPr/>
           <p:nvPr/>
         </p:nvSpPr>
@@ -3351,7 +3373,7 @@
       </p:sp>
       <p:sp>
         <p:nvSpPr>
-          <p:cNvPr id="12" name="Finding 2 label"/>
+          <p:cNvPr id="13" name="Finding 2 label"/>
           <p:cNvSpPr txBox="1"/>
           <p:nvPr/>
         </p:nvSpPr>
@@ -3387,7 +3409,7 @@
       </p:sp>
       <p:sp>
         <p:nvSpPr>
-          <p:cNvPr id="13" name="Finding 2 text"/>
+          <p:cNvPr id="14" name="Finding 2 text"/>
           <p:cNvSpPr txBox="1"/>
           <p:nvPr/>
         </p:nvSpPr>
@@ -3423,7 +3445,7 @@
       </p:sp>
       <p:sp>
         <p:nvSpPr>
-          <p:cNvPr id="14" name="Finding 3"/>
+          <p:cNvPr id="15" name="Finding 3"/>
           <p:cNvSpPr/>
           <p:nvPr/>
         </p:nvSpPr>
@@ -3445,7 +3467,7 @@
       </p:sp>
       <p:sp>
         <p:nvSpPr>
-          <p:cNvPr id="15" name="Finding 3 chip"/>
+          <p:cNvPr id="16" name="Finding 3 chip"/>
           <p:cNvSpPr/>
           <p:nvPr/>
         </p:nvSpPr>
@@ -3467,7 +3489,7 @@
       </p:sp>
       <p:sp>
         <p:nvSpPr>
-          <p:cNvPr id="16" name="Finding 3 label"/>
+          <p:cNvPr id="17" name="Finding 3 label"/>
           <p:cNvSpPr txBox="1"/>
           <p:nvPr/>
         </p:nvSpPr>
@@ -3503,7 +3525,7 @@
       </p:sp>
       <p:sp>
         <p:nvSpPr>
-          <p:cNvPr id="17" name="Finding 3 text"/>
+          <p:cNvPr id="18" name="Finding 3 text"/>
           <p:cNvSpPr txBox="1"/>
           <p:nvPr/>
         </p:nvSpPr>
@@ -3539,7 +3561,7 @@
       </p:sp>
       <p:sp>
         <p:nvSpPr>
-          <p:cNvPr id="18" name="KPI 1"/>
+          <p:cNvPr id="19" name="KPI 1"/>
           <p:cNvSpPr/>
           <p:nvPr/>
         </p:nvSpPr>
@@ -3561,7 +3583,7 @@
       </p:sp>
       <p:sp>
         <p:nvSpPr>
-          <p:cNvPr id="19" name="KPI 1 value"/>
+          <p:cNvPr id="20" name="KPI 1 value"/>
           <p:cNvSpPr txBox="1"/>
           <p:nvPr/>
         </p:nvSpPr>
@@ -3597,7 +3619,7 @@
       </p:sp>
       <p:sp>
         <p:nvSpPr>
-          <p:cNvPr id="20" name="KPI 1 label"/>
+          <p:cNvPr id="21" name="KPI 1 label"/>
           <p:cNvSpPr txBox="1"/>
           <p:nvPr/>
         </p:nvSpPr>
@@ -3633,7 +3655,7 @@
       </p:sp>
       <p:sp>
         <p:nvSpPr>
-          <p:cNvPr id="21" name="KPI 2"/>
+          <p:cNvPr id="22" name="KPI 2"/>
           <p:cNvSpPr/>
           <p:nvPr/>
         </p:nvSpPr>
@@ -3655,7 +3677,7 @@
       </p:sp>
       <p:sp>
         <p:nvSpPr>
-          <p:cNvPr id="22" name="KPI 2 value"/>
+          <p:cNvPr id="23" name="KPI 2 value"/>
           <p:cNvSpPr txBox="1"/>
           <p:nvPr/>
         </p:nvSpPr>
@@ -3691,7 +3713,7 @@
       </p:sp>
       <p:sp>
         <p:nvSpPr>
-          <p:cNvPr id="23" name="KPI 2 label"/>
+          <p:cNvPr id="24" name="KPI 2 label"/>
           <p:cNvSpPr txBox="1"/>
           <p:nvPr/>
         </p:nvSpPr>
@@ -3727,7 +3749,7 @@
       </p:sp>
       <p:sp>
         <p:nvSpPr>
-          <p:cNvPr id="24" name="KPI 3"/>
+          <p:cNvPr id="25" name="KPI 3"/>
           <p:cNvSpPr/>
           <p:nvPr/>
         </p:nvSpPr>
@@ -3749,7 +3771,7 @@
       </p:sp>
       <p:sp>
         <p:nvSpPr>
-          <p:cNvPr id="25" name="KPI 3 value"/>
+          <p:cNvPr id="26" name="KPI 3 value"/>
           <p:cNvSpPr txBox="1"/>
           <p:nvPr/>
         </p:nvSpPr>
@@ -3785,7 +3807,7 @@
       </p:sp>
       <p:sp>
         <p:nvSpPr>
-          <p:cNvPr id="26" name="KPI 3 label"/>
+          <p:cNvPr id="27" name="KPI 3 label"/>
           <p:cNvSpPr txBox="1"/>
           <p:nvPr/>
         </p:nvSpPr>
@@ -3821,7 +3843,7 @@
       </p:sp>
       <p:sp>
         <p:nvSpPr>
-          <p:cNvPr id="27" name="KPI 4"/>
+          <p:cNvPr id="28" name="KPI 4"/>
           <p:cNvSpPr/>
           <p:nvPr/>
         </p:nvSpPr>
@@ -3843,7 +3865,7 @@
       </p:sp>
       <p:sp>
         <p:nvSpPr>
-          <p:cNvPr id="28" name="KPI 4 value"/>
+          <p:cNvPr id="29" name="KPI 4 value"/>
           <p:cNvSpPr txBox="1"/>
           <p:nvPr/>
         </p:nvSpPr>
@@ -3879,7 +3901,7 @@
       </p:sp>
       <p:sp>
         <p:nvSpPr>
-          <p:cNvPr id="29" name="KPI 4 label"/>
+          <p:cNvPr id="30" name="KPI 4 label"/>
           <p:cNvSpPr txBox="1"/>
           <p:nvPr/>
         </p:nvSpPr>
@@ -3915,7 +3937,7 @@
       </p:sp>
       <p:sp>
         <p:nvSpPr>
-          <p:cNvPr id="30" name="KPI 5"/>
+          <p:cNvPr id="31" name="KPI 5"/>
           <p:cNvSpPr/>
           <p:nvPr/>
         </p:nvSpPr>
@@ -3937,7 +3959,7 @@
       </p:sp>
       <p:sp>
         <p:nvSpPr>
-          <p:cNvPr id="31" name="KPI 5 value"/>
+          <p:cNvPr id="32" name="KPI 5 value"/>
           <p:cNvSpPr txBox="1"/>
           <p:nvPr/>
         </p:nvSpPr>
@@ -3973,7 +3995,7 @@
       </p:sp>
       <p:sp>
         <p:nvSpPr>
-          <p:cNvPr id="32" name="KPI 5 label"/>
+          <p:cNvPr id="33" name="KPI 5 label"/>
           <p:cNvSpPr txBox="1"/>
           <p:nvPr/>
         </p:nvSpPr>
@@ -4001,7 +4023,7 @@
                   <a:schemeClr val="accent6"/>
                 </a:solidFill>
               </a:rPr>
-              <a:t>follow the happy path</a:t>
+              <a:t>match the winning trace</a:t>
             </a:r>
             <a:endParaRPr lang="en-US" sz="1200" dirty="0"/>
           </a:p>
@@ -4476,7 +4498,7 @@
                   <a:schemeClr val="bg1"/>
                 </a:solidFill>
               </a:rPr>
-              <a:t>Size each opportunity from its KPI baseline and customer-owned assumptions.</a:t>
+              <a:t>Size each opportunity from its KPI baseline and illustrative assumptions to validate with process owners.</a:t>
             </a:r>
             <a:endParaRPr lang="en-US" sz="1400" dirty="0"/>
           </a:p>
@@ -4523,7 +4545,7 @@
                   <a:schemeClr val="accent3"/>
                 </a:solidFill>
               </a:rPr>
-              <a:t>$2.8M framed</a:t>
+              <a:t>$2.8M gross scenario</a:t>
             </a:r>
             <a:endParaRPr lang="en-US" sz="1300" dirty="0"/>
           </a:p>
@@ -5159,7 +5181,7 @@
                   <a:schemeClr val="tx2"/>
                 </a:solidFill>
               </a:rPr>
-              <a:t>Discover: the process as it actually runs</a:t>
+              <a:t>Discover: paths in the simulated event log</a:t>
             </a:r>
             <a:endParaRPr lang="en-US" sz="3000" dirty="0"/>
           </a:p>
@@ -5231,7 +5253,7 @@
                   <a:schemeClr val="tx2"/>
                 </a:solidFill>
               </a:rPr>
-              <a:t>of deals follow the designed happy path</a:t>
+              <a:t>match the selected winning trace (38% of won deals)</a:t>
             </a:r>
             <a:endParaRPr lang="en-US" sz="1800" dirty="0"/>
           </a:p>
@@ -5411,7 +5433,7 @@
                   <a:schemeClr val="accent6"/>
                 </a:solidFill>
               </a:rPr>
-              <a:t>Approval steps and re-quote loops show up as detours from the designed path.</a:t>
+              <a:t>Approval steps and re-quote loops show up as detours from the winning trace.</a:t>
             </a:r>
             <a:endParaRPr lang="en-US" sz="1400" dirty="0"/>
           </a:p>
@@ -5476,8 +5498,8 @@
         </p:nvSpPr>
         <p:spPr>
           <a:xfrm>
-            <a:off x="7419442" y="1280160"/>
-            <a:ext cx="4239158" cy="4892040"/>
+            <a:off x="7223760" y="1280160"/>
+            <a:ext cx="4434840" cy="4892040"/>
           </a:xfrm>
           <a:prstGeom prst="rect">
             <a:avLst/>
@@ -5495,7 +5517,7 @@
       </p:sp>
       <p:pic>
         <p:nvPicPr>
-          <p:cNvPr id="12" name="Process map" descr="Process map from the hosted dashboard">    </p:cNvPr>
+          <p:cNvPr id="12" name="Process map" descr="Approval and re-quote section of the process map">    </p:cNvPr>
           <p:cNvPicPr>
             <a:picLocks noChangeAspect="1"/>
           </p:cNvPicPr>
@@ -5509,8 +5531,8 @@
         </p:blipFill>
         <p:spPr>
           <a:xfrm>
-            <a:off x="7465162" y="1325880"/>
-            <a:ext cx="4147718" cy="4800600"/>
+            <a:off x="7269480" y="1325880"/>
+            <a:ext cx="4343400" cy="4800600"/>
           </a:xfrm>
           <a:prstGeom prst="rect">
             <a:avLst/>
@@ -5619,7 +5641,7 @@
                   <a:schemeClr val="tx2"/>
                 </a:solidFill>
               </a:rPr>
-              <a:t>Diagnose: three deviations explain most of the lost value</a:t>
+              <a:t>Diagnose: three patterns associated with lower win rates</a:t>
             </a:r>
             <a:endParaRPr lang="en-US" sz="3000" dirty="0"/>
           </a:p>
@@ -5693,7 +5715,7 @@
                   <a:schemeClr val="tx2"/>
                 </a:solidFill>
               </a:rPr>
-              <a:t>EMEA's single approver adds about 6 days per discounted deal.</a:t>
+              <a:t>EMEA approvals take 5.8 days longer than the fastest region (103 EMEA approvals).</a:t>
             </a:r>
             <a:endParaRPr lang="en-US" sz="1400" dirty="0"/>
           </a:p>
@@ -5767,7 +5789,7 @@
                   <a:schemeClr val="tx2"/>
                 </a:solidFill>
               </a:rPr>
-              <a:t>19% of negotiated deals are re-quoted, and they win 18 points less often.</a:t>
+              <a:t>Re-quoted deals win 18 points less often (n = 124 re-quoted vs 521 clean).</a:t>
             </a:r>
             <a:endParaRPr lang="en-US" sz="1400" dirty="0"/>
           </a:p>
@@ -5841,7 +5863,7 @@
                   <a:schemeClr val="tx2"/>
                 </a:solidFill>
               </a:rPr>
-              <a:t>12% of deals skip Qualification and win less than half as often.</a:t>
+              <a:t>Deals that skip Qualification win 21 points less often (n = 99 vs 701).</a:t>
             </a:r>
             <a:endParaRPr lang="en-US" sz="1400" dirty="0"/>
           </a:p>
@@ -6123,7 +6145,7 @@
                             <a:schemeClr val="bg1"/>
                           </a:solidFill>
                         </a:rPr>
-                        <a:t>Owner</a:t>
+                        <a:t>Proposed owner</a:t>
                       </a:r>
                       <a:endParaRPr lang="en-US" sz="1400" dirty="0"/>
                     </a:p>
@@ -6245,7 +6267,7 @@
                             <a:schemeClr val="bg1"/>
                           </a:solidFill>
                         </a:rPr>
-                        <a:t>Framed</a:t>
+                        <a:t>Full gap</a:t>
                       </a:r>
                       <a:endParaRPr lang="en-US" sz="1400" dirty="0"/>
                     </a:p>
@@ -7103,7 +7125,7 @@
                             <a:schemeClr val="tx1"/>
                           </a:solidFill>
                         </a:rPr>
-                        <a:t>$1.3M</a:t>
+                        <a:t>$1.33M</a:t>
                       </a:r>
                       <a:endParaRPr lang="en-US" sz="1400" dirty="0"/>
                     </a:p>
@@ -7532,7 +7554,7 @@
                             <a:schemeClr val="tx1"/>
                           </a:solidFill>
                         </a:rPr>
-                        <a:t>$1.3M</a:t>
+                        <a:t>$1.29M</a:t>
                       </a:r>
                       <a:endParaRPr lang="en-US" sz="1400" dirty="0"/>
                     </a:p>
@@ -7717,7 +7739,7 @@
                             <a:schemeClr val="tx1"/>
                           </a:solidFill>
                         </a:rPr>
-                        <a:t>Total</a:t>
+                        <a:t>Total (gross)</a:t>
                       </a:r>
                       <a:endParaRPr lang="en-US" sz="1400" dirty="0"/>
                     </a:p>
@@ -7937,7 +7959,7 @@
                             <a:schemeClr val="tx1"/>
                           </a:solidFill>
                         </a:rPr>
-                        <a:t>$2.8M</a:t>
+                        <a:t>$2.84M</a:t>
                       </a:r>
                       <a:endParaRPr lang="en-US" sz="1400" dirty="0"/>
                     </a:p>
@@ -8141,7 +8163,7 @@
                   <a:schemeClr val="accent6"/>
                 </a:solidFill>
               </a:rPr>
-              <a:t>Framed = full gap sized from Salesforce data. Committed is agreed with each owner after validation; realized is tracked against the baseline.</a:t>
+              <a:t>Full gap = illustrative scenario from simulated Salesforce data. Committed is agreed with each owner after validation; realized is tracked against a frozen baseline.</a:t>
             </a:r>
             <a:endParaRPr lang="en-US" sz="1200" dirty="0"/>
           </a:p>
@@ -8149,18 +8171,18 @@
       </p:sp>
       <p:sp>
         <p:nvSpPr>
-          <p:cNvPr id="5" name="Priority grid"/>
+          <p:cNvPr id="5" name="Overlap card"/>
           <p:cNvSpPr/>
           <p:nvPr/>
         </p:nvSpPr>
         <p:spPr>
           <a:xfrm>
-            <a:off x="548640" y="4160520"/>
-            <a:ext cx="4937760" cy="1874520"/>
+            <a:off x="548640" y="4206240"/>
+            <a:ext cx="5486400" cy="1691640"/>
           </a:xfrm>
           <a:prstGeom prst="roundRect">
             <a:avLst>
-              <a:gd name="adj" fmla="val 5854"/>
+              <a:gd name="adj" fmla="val 6486"/>
             </a:avLst>
           </a:prstGeom>
           <a:solidFill>
@@ -8171,22 +8193,140 @@
       </p:sp>
       <p:sp>
         <p:nvSpPr>
-          <p:cNvPr id="6" name="Grid vertical"/>
+          <p:cNvPr id="6" name="Overlap text"/>
+          <p:cNvSpPr txBox="1"/>
+          <p:nvPr/>
+        </p:nvSpPr>
+        <p:spPr>
+          <a:xfrm>
+            <a:off x="777240" y="4315968"/>
+            <a:ext cx="5029200" cy="1783080"/>
+          </a:xfrm>
+          <a:prstGeom prst="rect">
+            <a:avLst/>
+          </a:prstGeom>
+          <a:noFill/>
+          <a:ln/>
+        </p:spPr>
+        <p:txBody>
+          <a:bodyPr wrap="square" lIns="0" tIns="0" rIns="0" bIns="0" rtlCol="0" anchor="t"/>
+          <a:lstStyle/>
+          <a:p>
+            <a:pPr indent="0" marL="0">
+              <a:buNone/>
+            </a:pPr>
+            <a:r>
+              <a:rPr lang="en-US" sz="1400" b="1" dirty="0">
+                <a:solidFill>
+                  <a:schemeClr val="tx2"/>
+                </a:solidFill>
+              </a:rPr>
+              <a:t>Opportunities overlap</a:t>
+            </a:r>
+            <a:endParaRPr lang="en-US" sz="1400" dirty="0"/>
+          </a:p>
+          <a:p>
+            <a:pPr indent="0" marL="0">
+              <a:buNone/>
+            </a:pPr>
+            <a:r>
+              <a:rPr lang="en-US" sz="1400" dirty="0">
+                <a:solidFill>
+                  <a:schemeClr val="tx1"/>
+                </a:solidFill>
+              </a:rPr>
+              <a:t>22 deals are both re-quoted and unqualified, 7 re-quoted with slow approvals, 5 unqualified with slow approvals.</a:t>
+            </a:r>
+            <a:endParaRPr lang="en-US" sz="1400" dirty="0"/>
+          </a:p>
+          <a:p>
+            <a:pPr indent="0" marL="0">
+              <a:buNone/>
+            </a:pPr>
+            <a:r>
+              <a:rPr lang="en-US" sz="600" dirty="0">
+                <a:solidFill>
+                  <a:schemeClr val="tx1"/>
+                </a:solidFill>
+              </a:rPr>
+              <a:t> </a:t>
+            </a:r>
+            <a:endParaRPr lang="en-US" sz="1400" dirty="0"/>
+          </a:p>
+          <a:p>
+            <a:pPr indent="0" marL="0">
+              <a:buNone/>
+            </a:pPr>
+            <a:r>
+              <a:rPr lang="en-US" sz="1400" i="1" dirty="0">
+                <a:solidFill>
+                  <a:schemeClr val="accent6"/>
+                </a:solidFill>
+              </a:rPr>
+              <a:t>So the total is gross: incremental wins must be counted once per opportunity before anything is committed.</a:t>
+            </a:r>
+            <a:endParaRPr lang="en-US" sz="1400" dirty="0"/>
+          </a:p>
+        </p:txBody>
+      </p:sp>
+      <p:sp>
+        <p:nvSpPr>
+          <p:cNvPr id="7" name="Checklist heading"/>
+          <p:cNvSpPr txBox="1"/>
+          <p:nvPr/>
+        </p:nvSpPr>
+        <p:spPr>
+          <a:xfrm>
+            <a:off x="6355080" y="4206240"/>
+            <a:ext cx="5257800" cy="320040"/>
+          </a:xfrm>
+          <a:prstGeom prst="rect">
+            <a:avLst/>
+          </a:prstGeom>
+          <a:noFill/>
+          <a:ln/>
+        </p:spPr>
+        <p:txBody>
+          <a:bodyPr wrap="square" lIns="0" tIns="0" rIns="0" bIns="0" rtlCol="0" anchor="t"/>
+          <a:lstStyle/>
+          <a:p>
+            <a:pPr indent="0" marL="0">
+              <a:buNone/>
+            </a:pPr>
+            <a:r>
+              <a:rPr lang="en-US" sz="1400" b="1" dirty="0">
+                <a:solidFill>
+                  <a:schemeClr val="tx2"/>
+                </a:solidFill>
+              </a:rPr>
+              <a:t>Before value is committed</a:t>
+            </a:r>
+            <a:endParaRPr lang="en-US" sz="1400" dirty="0"/>
+          </a:p>
+        </p:txBody>
+      </p:sp>
+      <p:sp>
+        <p:nvSpPr>
+          <p:cNvPr id="8" name="Check 1 box"/>
           <p:cNvSpPr/>
           <p:nvPr/>
         </p:nvSpPr>
         <p:spPr>
           <a:xfrm>
-            <a:off x="3017520" y="4297680"/>
-            <a:ext cx="0" cy="1600200"/>
-          </a:xfrm>
-          <a:prstGeom prst="line">
-            <a:avLst/>
-          </a:prstGeom>
-          <a:noFill/>
-          <a:ln w="12700">
+            <a:off x="6355080" y="4645152"/>
+            <a:ext cx="219456" cy="219456"/>
+          </a:xfrm>
+          <a:prstGeom prst="roundRect">
+            <a:avLst>
+              <a:gd name="adj" fmla="val 16667"/>
+            </a:avLst>
+          </a:prstGeom>
+          <a:solidFill>
+            <a:schemeClr val="bg1"/>
+          </a:solidFill>
+          <a:ln w="19050">
             <a:solidFill>
-              <a:schemeClr val="accent3"/>
+              <a:schemeClr val="accent1"/>
             </a:solidFill>
             <a:prstDash val="solid"/>
           </a:ln>
@@ -8194,22 +8334,62 @@
       </p:sp>
       <p:sp>
         <p:nvSpPr>
-          <p:cNvPr id="7" name="Grid horizontal"/>
+          <p:cNvPr id="9" name="Check 1 text"/>
+          <p:cNvSpPr txBox="1"/>
+          <p:nvPr/>
+        </p:nvSpPr>
+        <p:spPr>
+          <a:xfrm>
+            <a:off x="6693408" y="4590288"/>
+            <a:ext cx="4937760" cy="347472"/>
+          </a:xfrm>
+          <a:prstGeom prst="rect">
+            <a:avLst/>
+          </a:prstGeom>
+          <a:noFill/>
+          <a:ln/>
+        </p:spPr>
+        <p:txBody>
+          <a:bodyPr wrap="square" lIns="0" tIns="0" rIns="0" bIns="0" rtlCol="0" anchor="ctr"/>
+          <a:lstStyle/>
+          <a:p>
+            <a:pPr indent="0" marL="0">
+              <a:buNone/>
+            </a:pPr>
+            <a:r>
+              <a:rPr lang="en-US" sz="1400" dirty="0">
+                <a:solidFill>
+                  <a:schemeClr val="tx1"/>
+                </a:solidFill>
+              </a:rPr>
+              <a:t>Deduplicate overlapping deals across opportunities</a:t>
+            </a:r>
+            <a:endParaRPr lang="en-US" sz="1400" dirty="0"/>
+          </a:p>
+        </p:txBody>
+      </p:sp>
+      <p:sp>
+        <p:nvSpPr>
+          <p:cNvPr id="10" name="Check 2 box"/>
           <p:cNvSpPr/>
           <p:nvPr/>
         </p:nvSpPr>
         <p:spPr>
           <a:xfrm>
-            <a:off x="685800" y="5097780"/>
-            <a:ext cx="4663440" cy="0"/>
-          </a:xfrm>
-          <a:prstGeom prst="line">
-            <a:avLst/>
-          </a:prstGeom>
-          <a:noFill/>
-          <a:ln w="12700">
+            <a:off x="6355080" y="5038344"/>
+            <a:ext cx="219456" cy="219456"/>
+          </a:xfrm>
+          <a:prstGeom prst="roundRect">
+            <a:avLst>
+              <a:gd name="adj" fmla="val 16667"/>
+            </a:avLst>
+          </a:prstGeom>
+          <a:solidFill>
+            <a:schemeClr val="bg1"/>
+          </a:solidFill>
+          <a:ln w="19050">
             <a:solidFill>
-              <a:schemeClr val="accent3"/>
+              <a:schemeClr val="accent1"/>
             </a:solidFill>
             <a:prstDash val="solid"/>
           </a:ln>
@@ -8217,403 +8397,161 @@
       </p:sp>
       <p:sp>
         <p:nvSpPr>
-          <p:cNvPr id="8" name="Grid quick wins"/>
+          <p:cNvPr id="11" name="Check 2 text"/>
           <p:cNvSpPr txBox="1"/>
           <p:nvPr/>
         </p:nvSpPr>
         <p:spPr>
           <a:xfrm>
-            <a:off x="685800" y="4251960"/>
-            <a:ext cx="1828800" cy="274320"/>
-          </a:xfrm>
-          <a:prstGeom prst="rect">
-            <a:avLst/>
-          </a:prstGeom>
-          <a:noFill/>
-          <a:ln/>
-        </p:spPr>
-        <p:txBody>
-          <a:bodyPr wrap="square" lIns="0" tIns="0" rIns="0" bIns="0" rtlCol="0" anchor="t"/>
+            <a:off x="6693408" y="4983480"/>
+            <a:ext cx="4937760" cy="347472"/>
+          </a:xfrm>
+          <a:prstGeom prst="rect">
+            <a:avLst/>
+          </a:prstGeom>
+          <a:noFill/>
+          <a:ln/>
+        </p:spPr>
+        <p:txBody>
+          <a:bodyPr wrap="square" lIns="0" tIns="0" rIns="0" bIns="0" rtlCol="0" anchor="ctr"/>
           <a:lstStyle/>
           <a:p>
             <a:pPr indent="0" marL="0">
               <a:buNone/>
             </a:pPr>
             <a:r>
-              <a:rPr lang="en-US" sz="1100" b="1" dirty="0">
-                <a:solidFill>
-                  <a:schemeClr val="accent6"/>
-                </a:solidFill>
-              </a:rPr>
-              <a:t>Quick wins</a:t>
-            </a:r>
-            <a:endParaRPr lang="en-US" sz="1100" dirty="0"/>
-          </a:p>
-        </p:txBody>
-      </p:sp>
-      <p:sp>
-        <p:nvSpPr>
-          <p:cNvPr id="9" name="Grid strategic"/>
+              <a:rPr lang="en-US" sz="1400" dirty="0">
+                <a:solidFill>
+                  <a:schemeClr val="tx1"/>
+                </a:solidFill>
+              </a:rPr>
+              <a:t>Agree cohort, period and Amount basis</a:t>
+            </a:r>
+            <a:endParaRPr lang="en-US" sz="1400" dirty="0"/>
+          </a:p>
+        </p:txBody>
+      </p:sp>
+      <p:sp>
+        <p:nvSpPr>
+          <p:cNvPr id="12" name="Check 3 box"/>
+          <p:cNvSpPr/>
+          <p:nvPr/>
+        </p:nvSpPr>
+        <p:spPr>
+          <a:xfrm>
+            <a:off x="6355080" y="5431536"/>
+            <a:ext cx="219456" cy="219456"/>
+          </a:xfrm>
+          <a:prstGeom prst="roundRect">
+            <a:avLst>
+              <a:gd name="adj" fmla="val 16667"/>
+            </a:avLst>
+          </a:prstGeom>
+          <a:solidFill>
+            <a:schemeClr val="bg1"/>
+          </a:solidFill>
+          <a:ln w="19050">
+            <a:solidFill>
+              <a:schemeClr val="accent1"/>
+            </a:solidFill>
+            <a:prstDash val="solid"/>
+          </a:ln>
+        </p:spPr>
+      </p:sp>
+      <p:sp>
+        <p:nvSpPr>
+          <p:cNvPr id="13" name="Check 3 text"/>
           <p:cNvSpPr txBox="1"/>
           <p:nvPr/>
         </p:nvSpPr>
         <p:spPr>
           <a:xfrm>
-            <a:off x="3154680" y="4251960"/>
-            <a:ext cx="1828800" cy="274320"/>
-          </a:xfrm>
-          <a:prstGeom prst="rect">
-            <a:avLst/>
-          </a:prstGeom>
-          <a:noFill/>
-          <a:ln/>
-        </p:spPr>
-        <p:txBody>
-          <a:bodyPr wrap="square" lIns="0" tIns="0" rIns="0" bIns="0" rtlCol="0" anchor="t"/>
+            <a:off x="6693408" y="5376672"/>
+            <a:ext cx="4937760" cy="347472"/>
+          </a:xfrm>
+          <a:prstGeom prst="rect">
+            <a:avLst/>
+          </a:prstGeom>
+          <a:noFill/>
+          <a:ln/>
+        </p:spPr>
+        <p:txBody>
+          <a:bodyPr wrap="square" lIns="0" tIns="0" rIns="0" bIns="0" rtlCol="0" anchor="ctr"/>
           <a:lstStyle/>
           <a:p>
             <a:pPr indent="0" marL="0">
               <a:buNone/>
             </a:pPr>
             <a:r>
-              <a:rPr lang="en-US" sz="1100" b="1" dirty="0">
-                <a:solidFill>
-                  <a:schemeClr val="accent6"/>
-                </a:solidFill>
-              </a:rPr>
-              <a:t>Strategic</a:t>
-            </a:r>
-            <a:endParaRPr lang="en-US" sz="1100" dirty="0"/>
-          </a:p>
-        </p:txBody>
-      </p:sp>
-      <p:sp>
-        <p:nvSpPr>
-          <p:cNvPr id="10" name="Grid x axis"/>
+              <a:rPr lang="en-US" sz="1400" dirty="0">
+                <a:solidFill>
+                  <a:schemeClr val="tx1"/>
+                </a:solidFill>
+              </a:rPr>
+              <a:t>Owner signs off KPI definition and improvement assumption</a:t>
+            </a:r>
+            <a:endParaRPr lang="en-US" sz="1400" dirty="0"/>
+          </a:p>
+        </p:txBody>
+      </p:sp>
+      <p:sp>
+        <p:nvSpPr>
+          <p:cNvPr id="14" name="Check 4 box"/>
+          <p:cNvSpPr/>
+          <p:nvPr/>
+        </p:nvSpPr>
+        <p:spPr>
+          <a:xfrm>
+            <a:off x="6355080" y="5824728"/>
+            <a:ext cx="219456" cy="219456"/>
+          </a:xfrm>
+          <a:prstGeom prst="roundRect">
+            <a:avLst>
+              <a:gd name="adj" fmla="val 16667"/>
+            </a:avLst>
+          </a:prstGeom>
+          <a:solidFill>
+            <a:schemeClr val="bg1"/>
+          </a:solidFill>
+          <a:ln w="19050">
+            <a:solidFill>
+              <a:schemeClr val="accent1"/>
+            </a:solidFill>
+            <a:prstDash val="solid"/>
+          </a:ln>
+        </p:spPr>
+      </p:sp>
+      <p:sp>
+        <p:nvSpPr>
+          <p:cNvPr id="15" name="Check 4 text"/>
           <p:cNvSpPr txBox="1"/>
           <p:nvPr/>
         </p:nvSpPr>
         <p:spPr>
           <a:xfrm>
-            <a:off x="548640" y="6053328"/>
-            <a:ext cx="4937760" cy="274320"/>
-          </a:xfrm>
-          <a:prstGeom prst="rect">
-            <a:avLst/>
-          </a:prstGeom>
-          <a:noFill/>
-          <a:ln/>
-        </p:spPr>
-        <p:txBody>
-          <a:bodyPr wrap="square" lIns="0" tIns="0" rIns="0" bIns="0" rtlCol="0" anchor="t"/>
-          <a:lstStyle/>
-          <a:p>
-            <a:pPr algn="ctr" indent="0" marL="0">
-              <a:buNone/>
-            </a:pPr>
-            <a:r>
-              <a:rPr lang="en-US" sz="1100" dirty="0">
-                <a:solidFill>
-                  <a:schemeClr val="accent6"/>
-                </a:solidFill>
-              </a:rPr>
-              <a:t>Faster  ←  time to value  →  slower</a:t>
-            </a:r>
-            <a:endParaRPr lang="en-US" sz="1100" dirty="0"/>
-          </a:p>
-        </p:txBody>
-      </p:sp>
-      <p:sp>
-        <p:nvSpPr>
-          <p:cNvPr id="11" name="Grid y axis"/>
-          <p:cNvSpPr txBox="1"/>
-          <p:nvPr/>
-        </p:nvSpPr>
-        <p:spPr>
-          <a:xfrm>
-            <a:off x="5577840" y="4251960"/>
-            <a:ext cx="1371600" cy="274320"/>
-          </a:xfrm>
-          <a:prstGeom prst="rect">
-            <a:avLst/>
-          </a:prstGeom>
-          <a:noFill/>
-          <a:ln/>
-        </p:spPr>
-        <p:txBody>
-          <a:bodyPr wrap="square" lIns="0" tIns="0" rIns="0" bIns="0" rtlCol="0" anchor="t"/>
+            <a:off x="6693408" y="5769864"/>
+            <a:ext cx="4937760" cy="347472"/>
+          </a:xfrm>
+          <a:prstGeom prst="rect">
+            <a:avLst/>
+          </a:prstGeom>
+          <a:noFill/>
+          <a:ln/>
+        </p:spPr>
+        <p:txBody>
+          <a:bodyPr wrap="square" lIns="0" tIns="0" rIns="0" bIns="0" rtlCol="0" anchor="ctr"/>
           <a:lstStyle/>
           <a:p>
             <a:pPr indent="0" marL="0">
               <a:buNone/>
             </a:pPr>
             <a:r>
-              <a:rPr lang="en-US" sz="1100" dirty="0">
-                <a:solidFill>
-                  <a:schemeClr val="accent6"/>
-                </a:solidFill>
-              </a:rPr>
-              <a:t>Higher value ↑</a:t>
-            </a:r>
-            <a:endParaRPr lang="en-US" sz="1100" dirty="0"/>
-          </a:p>
-        </p:txBody>
-      </p:sp>
-      <p:sp>
-        <p:nvSpPr>
-          <p:cNvPr id="12" name="Grid dot 1"/>
-          <p:cNvSpPr/>
-          <p:nvPr/>
-        </p:nvSpPr>
-        <p:spPr>
-          <a:xfrm>
-            <a:off x="1591056" y="5566410"/>
-            <a:ext cx="384048" cy="384048"/>
-          </a:xfrm>
-          <a:prstGeom prst="ellipse">
-            <a:avLst/>
-          </a:prstGeom>
-          <a:solidFill>
-            <a:schemeClr val="accent1"/>
-          </a:solidFill>
-          <a:ln/>
-        </p:spPr>
-      </p:sp>
-      <p:sp>
-        <p:nvSpPr>
-          <p:cNvPr id="13" name="Grid dot 1 label"/>
-          <p:cNvSpPr txBox="1"/>
-          <p:nvPr/>
-        </p:nvSpPr>
-        <p:spPr>
-          <a:xfrm>
-            <a:off x="1591056" y="5566410"/>
-            <a:ext cx="384048" cy="384048"/>
-          </a:xfrm>
-          <a:prstGeom prst="rect">
-            <a:avLst/>
-          </a:prstGeom>
-          <a:noFill/>
-          <a:ln/>
-        </p:spPr>
-        <p:txBody>
-          <a:bodyPr wrap="square" lIns="0" tIns="0" rIns="0" bIns="0" rtlCol="0" anchor="ctr"/>
-          <a:lstStyle/>
-          <a:p>
-            <a:pPr algn="ctr" indent="0" marL="0">
-              <a:buNone/>
-            </a:pPr>
-            <a:r>
-              <a:rPr lang="en-US" sz="1400" b="1" dirty="0">
-                <a:solidFill>
-                  <a:schemeClr val="bg1"/>
-                </a:solidFill>
-              </a:rPr>
-              <a:t>1</a:t>
-            </a:r>
-            <a:endParaRPr lang="en-US" sz="1400" dirty="0"/>
-          </a:p>
-        </p:txBody>
-      </p:sp>
-      <p:sp>
-        <p:nvSpPr>
-          <p:cNvPr id="14" name="Grid dot 2"/>
-          <p:cNvSpPr/>
-          <p:nvPr/>
-        </p:nvSpPr>
-        <p:spPr>
-          <a:xfrm>
-            <a:off x="3875227" y="4572914"/>
-            <a:ext cx="457200" cy="457200"/>
-          </a:xfrm>
-          <a:prstGeom prst="ellipse">
-            <a:avLst/>
-          </a:prstGeom>
-          <a:solidFill>
-            <a:schemeClr val="accent4"/>
-          </a:solidFill>
-          <a:ln/>
-        </p:spPr>
-      </p:sp>
-      <p:sp>
-        <p:nvSpPr>
-          <p:cNvPr id="15" name="Grid dot 2 label"/>
-          <p:cNvSpPr txBox="1"/>
-          <p:nvPr/>
-        </p:nvSpPr>
-        <p:spPr>
-          <a:xfrm>
-            <a:off x="3875227" y="4572914"/>
-            <a:ext cx="457200" cy="457200"/>
-          </a:xfrm>
-          <a:prstGeom prst="rect">
-            <a:avLst/>
-          </a:prstGeom>
-          <a:noFill/>
-          <a:ln/>
-        </p:spPr>
-        <p:txBody>
-          <a:bodyPr wrap="square" lIns="0" tIns="0" rIns="0" bIns="0" rtlCol="0" anchor="ctr"/>
-          <a:lstStyle/>
-          <a:p>
-            <a:pPr algn="ctr" indent="0" marL="0">
-              <a:buNone/>
-            </a:pPr>
-            <a:r>
-              <a:rPr lang="en-US" sz="1400" b="1" dirty="0">
-                <a:solidFill>
-                  <a:schemeClr val="bg1"/>
-                </a:solidFill>
-              </a:rPr>
-              <a:t>2</a:t>
-            </a:r>
-            <a:endParaRPr lang="en-US" sz="1400" dirty="0"/>
-          </a:p>
-        </p:txBody>
-      </p:sp>
-      <p:sp>
-        <p:nvSpPr>
-          <p:cNvPr id="16" name="Grid dot 3"/>
-          <p:cNvSpPr/>
-          <p:nvPr/>
-        </p:nvSpPr>
-        <p:spPr>
-          <a:xfrm>
-            <a:off x="1837944" y="4629150"/>
-            <a:ext cx="384048" cy="384048"/>
-          </a:xfrm>
-          <a:prstGeom prst="ellipse">
-            <a:avLst/>
-          </a:prstGeom>
-          <a:solidFill>
-            <a:schemeClr val="accent1"/>
-          </a:solidFill>
-          <a:ln/>
-        </p:spPr>
-      </p:sp>
-      <p:sp>
-        <p:nvSpPr>
-          <p:cNvPr id="17" name="Grid dot 3 label"/>
-          <p:cNvSpPr txBox="1"/>
-          <p:nvPr/>
-        </p:nvSpPr>
-        <p:spPr>
-          <a:xfrm>
-            <a:off x="1837944" y="4629150"/>
-            <a:ext cx="384048" cy="384048"/>
-          </a:xfrm>
-          <a:prstGeom prst="rect">
-            <a:avLst/>
-          </a:prstGeom>
-          <a:noFill/>
-          <a:ln/>
-        </p:spPr>
-        <p:txBody>
-          <a:bodyPr wrap="square" lIns="0" tIns="0" rIns="0" bIns="0" rtlCol="0" anchor="ctr"/>
-          <a:lstStyle/>
-          <a:p>
-            <a:pPr algn="ctr" indent="0" marL="0">
-              <a:buNone/>
-            </a:pPr>
-            <a:r>
-              <a:rPr lang="en-US" sz="1400" b="1" dirty="0">
-                <a:solidFill>
-                  <a:schemeClr val="bg1"/>
-                </a:solidFill>
-              </a:rPr>
-              <a:t>3</a:t>
-            </a:r>
-            <a:endParaRPr lang="en-US" sz="1400" dirty="0"/>
-          </a:p>
-        </p:txBody>
-      </p:sp>
-      <p:sp>
-        <p:nvSpPr>
-          <p:cNvPr id="18" name="Priority rationale"/>
-          <p:cNvSpPr txBox="1"/>
-          <p:nvPr/>
-        </p:nvSpPr>
-        <p:spPr>
-          <a:xfrm>
-            <a:off x="6949440" y="4160520"/>
-            <a:ext cx="4663440" cy="1874520"/>
-          </a:xfrm>
-          <a:prstGeom prst="rect">
-            <a:avLst/>
-          </a:prstGeom>
-          <a:noFill/>
-          <a:ln/>
-        </p:spPr>
-        <p:txBody>
-          <a:bodyPr wrap="square" lIns="0" tIns="0" rIns="0" bIns="0" rtlCol="0" anchor="t"/>
-          <a:lstStyle/>
-          <a:p>
-            <a:pPr indent="0" marL="0">
-              <a:buNone/>
-            </a:pPr>
-            <a:r>
-              <a:rPr lang="en-US" sz="1400" b="1" dirty="0">
-                <a:solidFill>
-                  <a:schemeClr val="tx2"/>
-                </a:solidFill>
-              </a:rPr>
-              <a:t>Why re-quotes first</a:t>
-            </a:r>
-            <a:endParaRPr lang="en-US" sz="1400" dirty="0"/>
-          </a:p>
-          <a:p>
-            <a:pPr indent="0" marL="0">
-              <a:buNone/>
-            </a:pPr>
-            <a:r>
               <a:rPr lang="en-US" sz="1400" dirty="0">
                 <a:solidFill>
                   <a:schemeClr val="tx1"/>
                 </a:solidFill>
               </a:rPr>
-              <a:t>Largest framed value, visible directly in OpportunityHistory, and a clear owner in RevOps.</a:t>
-            </a:r>
-            <a:endParaRPr lang="en-US" sz="1400" dirty="0"/>
-          </a:p>
-          <a:p>
-            <a:pPr indent="0" marL="0">
-              <a:buNone/>
-            </a:pPr>
-            <a:r>
-              <a:rPr lang="en-US" sz="600" dirty="0">
-                <a:solidFill>
-                  <a:schemeClr val="tx1"/>
-                </a:solidFill>
-              </a:rPr>
-              <a:t> </a:t>
-            </a:r>
-            <a:endParaRPr lang="en-US" sz="1400" dirty="0"/>
-          </a:p>
-          <a:p>
-            <a:pPr indent="0" marL="0">
-              <a:buNone/>
-            </a:pPr>
-            <a:r>
-              <a:rPr lang="en-US" sz="1400" b="1" dirty="0">
-                <a:solidFill>
-                  <a:schemeClr val="tx2"/>
-                </a:solidFill>
-              </a:rPr>
-              <a:t>Quick wins run alongside</a:t>
-            </a:r>
-            <a:endParaRPr lang="en-US" sz="1400" dirty="0"/>
-          </a:p>
-          <a:p>
-            <a:pPr indent="0" marL="0">
-              <a:buNone/>
-            </a:pPr>
-            <a:r>
-              <a:rPr lang="en-US" sz="1400" dirty="0">
-                <a:solidFill>
-                  <a:schemeClr val="tx1"/>
-                </a:solidFill>
-              </a:rPr>
-              <a:t>Delegated EMEA approvals (1) and a required Qualification gate (3) are policy changes, not projects.</a:t>
+              <a:t>Finance signs off the value formula</a:t>
             </a:r>
             <a:endParaRPr lang="en-US" sz="1400" dirty="0"/>
           </a:p>
@@ -8779,7 +8717,7 @@
                   <a:schemeClr val="tx2"/>
                 </a:solidFill>
               </a:rPr>
-              <a:t>Time frame: 2025-10 to 2026-09   ·   New business   ·   Deals that reached Negotiation   ·   Owner: VP Revenue Operations</a:t>
+              <a:t>Time frame: 2025-10 to 2026-09   ·   Deals that reached Negotiate   ·   Proposed owner: VP Revenue Operations   ·   Simulated data</a:t>
             </a:r>
             <a:endParaRPr lang="en-US" sz="1200" dirty="0"/>
           </a:p>
@@ -8855,7 +8793,7 @@
                   <a:schemeClr val="tx1"/>
                 </a:solidFill>
               </a:rPr>
-              <a:t>750 negotiated deals a year; 19% loop back for a re-quote</a:t>
+              <a:t>747 negotiated deals a year; 19% loop back for a re-quote</a:t>
             </a:r>
             <a:endParaRPr lang="en-US" sz="1400" dirty="0"/>
           </a:p>
@@ -9003,7 +8941,7 @@
                   <a:schemeClr val="tx1"/>
                 </a:solidFill>
               </a:rPr>
-              <a:t>Confirm: slow approval → expired quote → re-quote</a:t>
+              <a:t>Test whether approval delay causes expiry and re-quotes</a:t>
             </a:r>
             <a:endParaRPr lang="en-US" sz="1400" dirty="0"/>
           </a:p>
@@ -9039,7 +8977,7 @@
                   <a:schemeClr val="accent6"/>
                 </a:solidFill>
               </a:rPr>
-              <a:t>Solution with Apromore</a:t>
+              <a:t>Solution with process intelligence</a:t>
             </a:r>
             <a:endParaRPr lang="en-US" sz="1600" dirty="0"/>
           </a:p>
@@ -9115,7 +9053,7 @@
                   <a:schemeClr val="tx1"/>
                 </a:solidFill>
               </a:rPr>
-              <a:t>Simulate a delegated EMEA approval threshold first</a:t>
+              <a:t>Simulate a pilot before any policy change</a:t>
             </a:r>
             <a:endParaRPr lang="en-US" sz="1400" dirty="0"/>
           </a:p>
@@ -9209,7 +9147,7 @@
                   <a:schemeClr val="tx2"/>
                 </a:solidFill>
               </a:rPr>
-              <a:t>750</a:t>
+              <a:t>747</a:t>
             </a:r>
             <a:endParaRPr lang="en-US" sz="2200" dirty="0"/>
           </a:p>
@@ -9281,7 +9219,7 @@
                   <a:schemeClr val="tx2"/>
                 </a:solidFill>
               </a:rPr>
-              <a:t>Re-quotes per deal</a:t>
+              <a:t>Share re-quoted</a:t>
             </a:r>
             <a:endParaRPr lang="en-US" sz="1200" dirty="0"/>
           </a:p>
@@ -9339,7 +9277,7 @@
                   <a:schemeClr val="tx2"/>
                 </a:solidFill>
               </a:rPr>
-              <a:t>0.19</a:t>
+              <a:t>19.2%</a:t>
             </a:r>
             <a:endParaRPr lang="en-US" sz="2200" dirty="0"/>
           </a:p>
@@ -9599,7 +9537,7 @@
                   <a:schemeClr val="tx2"/>
                 </a:solidFill>
               </a:rPr>
-              <a:t>$53k</a:t>
+              <a:t>$53.1k</a:t>
             </a:r>
             <a:endParaRPr lang="en-US" sz="2200" dirty="0"/>
           </a:p>
@@ -9671,7 +9609,7 @@
                   <a:schemeClr val="tx2"/>
                 </a:solidFill>
               </a:rPr>
-              <a:t>Improvement</a:t>
+              <a:t>Scenario capture</a:t>
             </a:r>
             <a:endParaRPr lang="en-US" sz="1200" dirty="0"/>
           </a:p>
@@ -9823,7 +9761,7 @@
                   <a:schemeClr val="bg1"/>
                 </a:solidFill>
               </a:rPr>
-              <a:t>≈ $669k</a:t>
+              <a:t>≈ $667k</a:t>
             </a:r>
             <a:endParaRPr lang="en-US" sz="1400" dirty="0"/>
           </a:p>
@@ -9837,7 +9775,7 @@
                   <a:schemeClr val="accent3"/>
                 </a:solidFill>
               </a:rPr>
-              <a:t>revenue upside p.a.</a:t>
+              <a:t>modelled upside p.a.</a:t>
             </a:r>
             <a:endParaRPr lang="en-US" sz="1400" dirty="0"/>
           </a:p>
@@ -9873,7 +9811,7 @@
                   <a:schemeClr val="accent6"/>
                 </a:solidFill>
               </a:rPr>
-              <a:t>Assumptions: annualised from 10 months of history; win-rate gap compares only deals that reached Negotiation; cycle-time gains not counted; half of the gap closed.</a:t>
+              <a:t>Assumptions: simulated data, annualised over the 10.4-month event window (illustrative run rate); Amount = opportunity bookings; win-rate gap is an association among deals that reached Negotiate; 50% capture is a scenario. Tracking: share re-quoted vs a frozen baseline of 19.2%, win rate vs a comparison group; Finance validates realized revenue.</a:t>
             </a:r>
             <a:endParaRPr lang="en-US" sz="1100" dirty="0"/>
           </a:p>
@@ -10018,11 +9956,11 @@
         <p:spPr>
           <a:xfrm>
             <a:off x="731520" y="1828800"/>
-            <a:ext cx="3337560" cy="2286000"/>
+            <a:ext cx="3337560" cy="2423160"/>
           </a:xfrm>
           <a:prstGeom prst="roundRect">
             <a:avLst>
-              <a:gd name="adj" fmla="val 4800"/>
+              <a:gd name="adj" fmla="val 4528"/>
             </a:avLst>
           </a:prstGeom>
           <a:solidFill>
@@ -10076,7 +10014,7 @@
         <p:spPr>
           <a:xfrm>
             <a:off x="1005840" y="2697480"/>
-            <a:ext cx="2788920" cy="1280160"/>
+            <a:ext cx="2788920" cy="1188720"/>
           </a:xfrm>
           <a:prstGeom prst="rect">
             <a:avLst/>
@@ -10097,7 +10035,7 @@
                   <a:schemeClr val="bg1"/>
                 </a:solidFill>
               </a:rPr>
-              <a:t>Run the same extract on the production org and confirm approval waits and re-quote rates with RevOps.</a:t>
+              <a:t>Run the extract on the production org; confirm cohorts, causes and overlap.</a:t>
             </a:r>
             <a:endParaRPr lang="en-US" sz="1600" dirty="0"/>
           </a:p>
@@ -10105,18 +10043,54 @@
       </p:sp>
       <p:sp>
         <p:nvSpPr>
-          <p:cNvPr id="7" name="Next 2 card"/>
+          <p:cNvPr id="7" name="Next 1 owner"/>
+          <p:cNvSpPr txBox="1"/>
+          <p:nvPr/>
+        </p:nvSpPr>
+        <p:spPr>
+          <a:xfrm>
+            <a:off x="1005840" y="3657600"/>
+            <a:ext cx="2788920" cy="365760"/>
+          </a:xfrm>
+          <a:prstGeom prst="rect">
+            <a:avLst/>
+          </a:prstGeom>
+          <a:noFill/>
+          <a:ln/>
+        </p:spPr>
+        <p:txBody>
+          <a:bodyPr wrap="square" lIns="0" tIns="0" rIns="0" bIns="0" rtlCol="0" anchor="t"/>
+          <a:lstStyle/>
+          <a:p>
+            <a:pPr indent="0" marL="0">
+              <a:buNone/>
+            </a:pPr>
+            <a:r>
+              <a:rPr lang="en-US" sz="1200" dirty="0">
+                <a:solidFill>
+                  <a:schemeClr val="accent3"/>
+                </a:solidFill>
+              </a:rPr>
+              <a:t>RevOps + SE · weeks 1–2</a:t>
+            </a:r>
+            <a:endParaRPr lang="en-US" sz="1200" dirty="0"/>
+          </a:p>
+        </p:txBody>
+      </p:sp>
+      <p:sp>
+        <p:nvSpPr>
+          <p:cNvPr id="8" name="Next 2 card"/>
           <p:cNvSpPr/>
           <p:nvPr/>
         </p:nvSpPr>
         <p:spPr>
           <a:xfrm>
             <a:off x="4343400" y="1828800"/>
-            <a:ext cx="3337560" cy="2286000"/>
+            <a:ext cx="3337560" cy="2423160"/>
           </a:xfrm>
           <a:prstGeom prst="roundRect">
             <a:avLst>
-              <a:gd name="adj" fmla="val 4800"/>
+              <a:gd name="adj" fmla="val 4528"/>
             </a:avLst>
           </a:prstGeom>
           <a:solidFill>
@@ -10127,7 +10101,7 @@
       </p:sp>
       <p:sp>
         <p:nvSpPr>
-          <p:cNvPr id="8" name="Next 2 heading"/>
+          <p:cNvPr id="9" name="Next 2 heading"/>
           <p:cNvSpPr txBox="1"/>
           <p:nvPr/>
         </p:nvSpPr>
@@ -10155,7 +10129,7 @@
                   <a:schemeClr val="accent3"/>
                 </a:solidFill>
               </a:rPr>
-              <a:t>Act</a:t>
+              <a:t>Pilot</a:t>
             </a:r>
             <a:endParaRPr lang="en-US" sz="2200" dirty="0"/>
           </a:p>
@@ -10163,14 +10137,14 @@
       </p:sp>
       <p:sp>
         <p:nvSpPr>
-          <p:cNvPr id="9" name="Next 2 body"/>
+          <p:cNvPr id="10" name="Next 2 body"/>
           <p:cNvSpPr txBox="1"/>
           <p:nvPr/>
         </p:nvSpPr>
         <p:spPr>
           <a:xfrm>
             <a:off x="4617720" y="2697480"/>
-            <a:ext cx="2788920" cy="1280160"/>
+            <a:ext cx="2788920" cy="1188720"/>
           </a:xfrm>
           <a:prstGeom prst="rect">
             <a:avLst/>
@@ -10191,7 +10165,7 @@
                   <a:schemeClr val="bg1"/>
                 </a:solidFill>
               </a:rPr>
-              <a:t>Pilot a delegated approval threshold for EMEA discounts up to 30% and make Qualification a required gate.</a:t>
+              <a:t>Agree a controlled pilot with RevOps and Finance once re-quote causes are validated.</a:t>
             </a:r>
             <a:endParaRPr lang="en-US" sz="1600" dirty="0"/>
           </a:p>
@@ -10199,18 +10173,54 @@
       </p:sp>
       <p:sp>
         <p:nvSpPr>
-          <p:cNvPr id="10" name="Next 3 card"/>
+          <p:cNvPr id="11" name="Next 2 owner"/>
+          <p:cNvSpPr txBox="1"/>
+          <p:nvPr/>
+        </p:nvSpPr>
+        <p:spPr>
+          <a:xfrm>
+            <a:off x="4617720" y="3657600"/>
+            <a:ext cx="2788920" cy="365760"/>
+          </a:xfrm>
+          <a:prstGeom prst="rect">
+            <a:avLst/>
+          </a:prstGeom>
+          <a:noFill/>
+          <a:ln/>
+        </p:spPr>
+        <p:txBody>
+          <a:bodyPr wrap="square" lIns="0" tIns="0" rIns="0" bIns="0" rtlCol="0" anchor="t"/>
+          <a:lstStyle/>
+          <a:p>
+            <a:pPr indent="0" marL="0">
+              <a:buNone/>
+            </a:pPr>
+            <a:r>
+              <a:rPr lang="en-US" sz="1200" dirty="0">
+                <a:solidFill>
+                  <a:schemeClr val="accent3"/>
+                </a:solidFill>
+              </a:rPr>
+              <a:t>RevOps + Finance · weeks 3–8</a:t>
+            </a:r>
+            <a:endParaRPr lang="en-US" sz="1200" dirty="0"/>
+          </a:p>
+        </p:txBody>
+      </p:sp>
+      <p:sp>
+        <p:nvSpPr>
+          <p:cNvPr id="12" name="Next 3 card"/>
           <p:cNvSpPr/>
           <p:nvPr/>
         </p:nvSpPr>
         <p:spPr>
           <a:xfrm>
             <a:off x="7955280" y="1828800"/>
-            <a:ext cx="3337560" cy="2286000"/>
+            <a:ext cx="3337560" cy="2423160"/>
           </a:xfrm>
           <a:prstGeom prst="roundRect">
             <a:avLst>
-              <a:gd name="adj" fmla="val 4800"/>
+              <a:gd name="adj" fmla="val 4528"/>
             </a:avLst>
           </a:prstGeom>
           <a:solidFill>
@@ -10221,7 +10231,7 @@
       </p:sp>
       <p:sp>
         <p:nvSpPr>
-          <p:cNvPr id="11" name="Next 3 heading"/>
+          <p:cNvPr id="13" name="Next 3 heading"/>
           <p:cNvSpPr txBox="1"/>
           <p:nvPr/>
         </p:nvSpPr>
@@ -10249,7 +10259,7 @@
                   <a:schemeClr val="accent3"/>
                 </a:solidFill>
               </a:rPr>
-              <a:t>Monitor</a:t>
+              <a:t>Measure</a:t>
             </a:r>
             <a:endParaRPr lang="en-US" sz="2200" dirty="0"/>
           </a:p>
@@ -10257,14 +10267,14 @@
       </p:sp>
       <p:sp>
         <p:nvSpPr>
-          <p:cNvPr id="12" name="Next 3 body"/>
+          <p:cNvPr id="14" name="Next 3 body"/>
           <p:cNvSpPr txBox="1"/>
           <p:nvPr/>
         </p:nvSpPr>
         <p:spPr>
           <a:xfrm>
             <a:off x="8229600" y="2697480"/>
-            <a:ext cx="2788920" cy="1280160"/>
+            <a:ext cx="2788920" cy="1188720"/>
           </a:xfrm>
           <a:prstGeom prst="rect">
             <a:avLst/>
@@ -10285,7 +10295,7 @@
                   <a:schemeClr val="bg1"/>
                 </a:solidFill>
               </a:rPr>
-              <a:t>Schedule the extract into Apromore, track the KPIs against target and report value realised quarterly.</a:t>
+              <a:t>Track share re-quoted and win rate against a frozen baseline and a comparison group.</a:t>
             </a:r>
             <a:endParaRPr lang="en-US" sz="1600" dirty="0"/>
           </a:p>
@@ -10293,7 +10303,43 @@
       </p:sp>
       <p:sp>
         <p:nvSpPr>
-          <p:cNvPr id="13" name="Closing contact"/>
+          <p:cNvPr id="15" name="Next 3 owner"/>
+          <p:cNvSpPr txBox="1"/>
+          <p:nvPr/>
+        </p:nvSpPr>
+        <p:spPr>
+          <a:xfrm>
+            <a:off x="8229600" y="3657600"/>
+            <a:ext cx="2788920" cy="365760"/>
+          </a:xfrm>
+          <a:prstGeom prst="rect">
+            <a:avLst/>
+          </a:prstGeom>
+          <a:noFill/>
+          <a:ln/>
+        </p:spPr>
+        <p:txBody>
+          <a:bodyPr wrap="square" lIns="0" tIns="0" rIns="0" bIns="0" rtlCol="0" anchor="t"/>
+          <a:lstStyle/>
+          <a:p>
+            <a:pPr indent="0" marL="0">
+              <a:buNone/>
+            </a:pPr>
+            <a:r>
+              <a:rPr lang="en-US" sz="1200" dirty="0">
+                <a:solidFill>
+                  <a:schemeClr val="accent3"/>
+                </a:solidFill>
+              </a:rPr>
+              <a:t>Finance · monthly, signed off quarterly</a:t>
+            </a:r>
+            <a:endParaRPr lang="en-US" sz="1200" dirty="0"/>
+          </a:p>
+        </p:txBody>
+      </p:sp>
+      <p:sp>
+        <p:nvSpPr>
+          <p:cNvPr id="16" name="Closing contact"/>
           <p:cNvSpPr txBox="1"/>
           <p:nvPr/>
         </p:nvSpPr>

--- a/deck/salesforce-process-intelligence.pptx
+++ b/deck/salesforce-process-intelligence.pptx
@@ -114,26 +114,26 @@
   <p:extLst>
     <p:ext uri="{521415D9-36F7-43E2-AB2F-B90AF26B5E84}">
       <p14:sectionLst xmlns:p14="http://schemas.microsoft.com/office/powerpoint/2010/main">
-        <p14:section name="Opening" id="{94d81707-862b-126d-e9c7-f6783de64c0a}">
+        <p14:section name="Opening" id="{e22d0cf0-c5bb-235e-d3ce-c70c36e13009}">
           <p14:sldIdLst>
             <p14:sldId id="256"/>
             <p14:sldId id="257"/>
             <p14:sldId id="258"/>
           </p14:sldIdLst>
         </p14:section>
-        <p14:section name="Evidence" id="{cef6550d-f6b9-adcb-d1d5-0268788250c3}">
+        <p14:section name="Evidence" id="{745d9065-1b18-79d9-b8ce-1c158850e20d}">
           <p14:sldIdLst>
             <p14:sldId id="259"/>
             <p14:sldId id="260"/>
           </p14:sldIdLst>
         </p14:section>
-        <p14:section name="Value" id="{a4da9e89-2ef9-8cff-a232-505eb71b89e1}">
+        <p14:section name="Value" id="{464afebc-1619-f126-9fe5-cc8a539dd4d4}">
           <p14:sldIdLst>
             <p14:sldId id="261"/>
             <p14:sldId id="262"/>
           </p14:sldIdLst>
         </p14:section>
-        <p14:section name="Close" id="{3429c88f-02b5-10ec-d6d9-02a8443e999f}">
+        <p14:section name="Close" id="{1892500d-cf51-4285-0c47-ff2709800d16}">
           <p14:sldIdLst>
             <p14:sldId id="263"/>
           </p14:sldIdLst>
@@ -1915,7 +1915,7 @@
           <a:p>
             <a:r>
               <a:rPr lang="en-US" dirty="0"/>
-              <a:t>This follows my value framing format: challenge, root cause, solution, then a multiplicative value chain. The customer owns the improvement assumption; we own the evidence. Root cause is labelled 'to capture' because it needs reason codes the CRM doesn't hold yet. The chain multiplies to the displayed value using unrounded inputs.</a:t>
+              <a:t>This follows my value framing format: challenge, root cause, solution, then a multiplicative value chain. The customer owns the improvement assumption; we own the evidence. Root cause is labelled 'to capture' because it needs reason codes the CRM doesn't hold yet. The chain multiplies to the displayed value using unrounded inputs. Annualised over the 10.4-month event window as an illustrative run rate; the win-rate gap is an association among deals that reached Negotiation/Review.</a:t>
             </a:r>
             <a:endParaRPr lang="en-US" dirty="0"/>
           </a:p>
@@ -3285,7 +3285,7 @@
                   <a:schemeClr val="bg1"/>
                 </a:solidFill>
               </a:rPr>
-              <a:t>Accelerate revenue</a:t>
+              <a:t>Accelerate bookings</a:t>
             </a:r>
             <a:endParaRPr lang="en-US" sz="1200" dirty="0"/>
           </a:p>
@@ -5397,7 +5397,7 @@
                   <a:schemeClr val="tx2"/>
                 </a:solidFill>
               </a:rPr>
-              <a:t>median EMEA approval wait, the slowest hand-off</a:t>
+              <a:t>median EMEA discount approval, the slowest region</a:t>
             </a:r>
             <a:endParaRPr lang="en-US" sz="1800" dirty="0"/>
           </a:p>
@@ -5715,7 +5715,7 @@
                   <a:schemeClr val="tx2"/>
                 </a:solidFill>
               </a:rPr>
-              <a:t>EMEA approvals take 5.8 days longer than the fastest region (103 EMEA approvals).</a:t>
+              <a:t>5.8 days slower than the fastest region. EMEA deals waiting &gt;7 days won 47% vs 54% (n = 51 vs 52).</a:t>
             </a:r>
             <a:endParaRPr lang="en-US" sz="1400" dirty="0"/>
           </a:p>
@@ -6452,7 +6452,7 @@
                             <a:schemeClr val="tx1"/>
                           </a:solidFill>
                         </a:rPr>
-                        <a:t>Accelerate revenue</a:t>
+                        <a:t>Accelerate bookings</a:t>
                       </a:r>
                       <a:endParaRPr lang="en-US" sz="1400" dirty="0"/>
                     </a:p>
@@ -8235,7 +8235,7 @@
                   <a:schemeClr val="tx1"/>
                 </a:solidFill>
               </a:rPr>
-              <a:t>22 deals are both re-quoted and unqualified, 7 re-quoted with slow approvals, 5 unqualified with slow approvals.</a:t>
+              <a:t>22 deals were re-quoted and skipped Qualification, 7 were re-quoted with slow approvals, 5 skipped Qualification with slow approvals.</a:t>
             </a:r>
             <a:endParaRPr lang="en-US" sz="1400" dirty="0"/>
           </a:p>
@@ -8263,7 +8263,7 @@
                   <a:schemeClr val="accent6"/>
                 </a:solidFill>
               </a:rPr>
-              <a:t>So the total is gross: incremental wins must be counted once per opportunity before anything is committed.</a:t>
+              <a:t>So the total is gross: count each incremental deal win once across all three improvement opportunities before committing.</a:t>
             </a:r>
             <a:endParaRPr lang="en-US" sz="1400" dirty="0"/>
           </a:p>
@@ -8717,7 +8717,7 @@
                   <a:schemeClr val="tx2"/>
                 </a:solidFill>
               </a:rPr>
-              <a:t>Time frame: 2025-10 to 2026-09   ·   Deals that reached Negotiate   ·   Proposed owner: VP Revenue Operations   ·   Simulated data</a:t>
+              <a:t>2025-10 to 2026-09, annualised  ·  Reached Negotiation/Review  ·  Amount = bookings  ·  Proposed owner: VP Revenue Ops  ·  Simulated data</a:t>
             </a:r>
             <a:endParaRPr lang="en-US" sz="1200" dirty="0"/>
           </a:p>
@@ -9609,7 +9609,7 @@
                   <a:schemeClr val="tx2"/>
                 </a:solidFill>
               </a:rPr>
-              <a:t>Scenario capture</a:t>
+              <a:t>Re-quotes prevented</a:t>
             </a:r>
             <a:endParaRPr lang="en-US" sz="1200" dirty="0"/>
           </a:p>
@@ -9770,12 +9770,12 @@
               <a:buNone/>
             </a:pPr>
             <a:r>
-              <a:rPr lang="en-US" sz="1200" dirty="0">
+              <a:rPr lang="en-US" sz="1100" dirty="0">
                 <a:solidFill>
                   <a:schemeClr val="accent3"/>
                 </a:solidFill>
               </a:rPr>
-              <a:t>modelled upside p.a.</a:t>
+              <a:t>modelled incremental bookings p.a.</a:t>
             </a:r>
             <a:endParaRPr lang="en-US" sz="1400" dirty="0"/>
           </a:p>
@@ -9783,14 +9783,14 @@
       </p:sp>
       <p:sp>
         <p:nvSpPr>
-          <p:cNvPr id="33" name="Assumptions"/>
+          <p:cNvPr id="33" name="Scenario"/>
           <p:cNvSpPr txBox="1"/>
           <p:nvPr/>
         </p:nvSpPr>
         <p:spPr>
           <a:xfrm>
-            <a:off x="548640" y="5669280"/>
-            <a:ext cx="11064240" cy="457200"/>
+            <a:off x="548640" y="5596128"/>
+            <a:ext cx="11064240" cy="685800"/>
           </a:xfrm>
           <a:prstGeom prst="rect">
             <a:avLst/>
@@ -9806,14 +9806,25 @@
               <a:buNone/>
             </a:pPr>
             <a:r>
-              <a:rPr lang="en-US" sz="1100" i="1" dirty="0">
-                <a:solidFill>
-                  <a:schemeClr val="accent6"/>
-                </a:solidFill>
-              </a:rPr>
-              <a:t>Assumptions: simulated data, annualised over the 10.4-month event window (illustrative run rate); Amount = opportunity bookings; win-rate gap is an association among deals that reached Negotiate; 50% capture is a scenario. Tracking: share re-quoted vs a frozen baseline of 19.2%, win rate vs a comparison group; Finance validates realized revenue.</a:t>
-            </a:r>
-            <a:endParaRPr lang="en-US" sz="1100" dirty="0"/>
+              <a:rPr lang="en-US" sz="1400" b="1" dirty="0">
+                <a:solidFill>
+                  <a:schemeClr val="tx2"/>
+                </a:solidFill>
+              </a:rPr>
+              <a:t>Scenario to test: </a:t>
+            </a:r>
+            <a:pPr indent="0" marL="0">
+              <a:buNone/>
+            </a:pPr>
+            <a:r>
+              <a:rPr lang="en-US" sz="1400" dirty="0">
+                <a:solidFill>
+                  <a:schemeClr val="tx1"/>
+                </a:solidFill>
+              </a:rPr>
+              <a:t>cut re-quotes from 19.2% to 9.6% of negotiated deals, assuming each prevented re-quote recovers the 17.5-point win-rate gap. Measured against a comparison group; Finance validates incremental bookings, revenue recognition assessed separately.</a:t>
+            </a:r>
+            <a:endParaRPr lang="en-US" sz="1400" dirty="0"/>
           </a:p>
         </p:txBody>
       </p:sp>
@@ -10339,7 +10350,90 @@
       </p:sp>
       <p:sp>
         <p:nvSpPr>
-          <p:cNvPr id="16" name="Closing contact"/>
+          <p:cNvPr id="16" name="Schedule note"/>
+          <p:cNvSpPr txBox="1"/>
+          <p:nvPr/>
+        </p:nvSpPr>
+        <p:spPr>
+          <a:xfrm>
+            <a:off x="731520" y="4343400"/>
+            <a:ext cx="7315200" cy="274320"/>
+          </a:xfrm>
+          <a:prstGeom prst="rect">
+            <a:avLst/>
+          </a:prstGeom>
+          <a:noFill/>
+          <a:ln/>
+        </p:spPr>
+        <p:txBody>
+          <a:bodyPr wrap="square" lIns="0" tIns="0" rIns="0" bIns="0" rtlCol="0" anchor="t"/>
+          <a:lstStyle/>
+          <a:p>
+            <a:pPr indent="0" marL="0">
+              <a:buNone/>
+            </a:pPr>
+            <a:r>
+              <a:rPr lang="en-US" sz="1200" i="1" dirty="0">
+                <a:solidFill>
+                  <a:schemeClr val="accent3"/>
+                </a:solidFill>
+              </a:rPr>
+              <a:t>Illustrative schedule; owners are proposed.</a:t>
+            </a:r>
+            <a:endParaRPr lang="en-US" sz="1200" dirty="0"/>
+          </a:p>
+        </p:txBody>
+      </p:sp>
+      <p:sp>
+        <p:nvSpPr>
+          <p:cNvPr id="17" name="Decision"/>
+          <p:cNvSpPr txBox="1"/>
+          <p:nvPr/>
+        </p:nvSpPr>
+        <p:spPr>
+          <a:xfrm>
+            <a:off x="731520" y="4800600"/>
+            <a:ext cx="8412480" cy="548640"/>
+          </a:xfrm>
+          <a:prstGeom prst="rect">
+            <a:avLst/>
+          </a:prstGeom>
+          <a:noFill/>
+          <a:ln/>
+        </p:spPr>
+        <p:txBody>
+          <a:bodyPr wrap="square" lIns="0" tIns="0" rIns="0" bIns="0" rtlCol="0" anchor="t"/>
+          <a:lstStyle/>
+          <a:p>
+            <a:pPr indent="0" marL="0">
+              <a:buNone/>
+            </a:pPr>
+            <a:r>
+              <a:rPr lang="en-US" sz="1800" b="1" dirty="0">
+                <a:solidFill>
+                  <a:schemeClr val="bg1"/>
+                </a:solidFill>
+              </a:rPr>
+              <a:t>Decision today: </a:t>
+            </a:r>
+            <a:pPr indent="0" marL="0">
+              <a:buNone/>
+            </a:pPr>
+            <a:r>
+              <a:rPr lang="en-US" sz="1800" dirty="0">
+                <a:solidFill>
+                  <a:schemeClr val="accent3"/>
+                </a:solidFill>
+              </a:rPr>
+              <a:t>agree the validation scope, named owners and pilot success criteria.</a:t>
+            </a:r>
+            <a:endParaRPr lang="en-US" sz="1800" dirty="0"/>
+          </a:p>
+        </p:txBody>
+      </p:sp>
+      <p:sp>
+        <p:nvSpPr>
+          <p:cNvPr id="18" name="Closing contact"/>
           <p:cNvSpPr txBox="1"/>
           <p:nvPr/>
         </p:nvSpPr>

--- a/deck/salesforce-process-intelligence.pptx
+++ b/deck/salesforce-process-intelligence.pptx
@@ -114,26 +114,26 @@
   <p:extLst>
     <p:ext uri="{521415D9-36F7-43E2-AB2F-B90AF26B5E84}">
       <p14:sectionLst xmlns:p14="http://schemas.microsoft.com/office/powerpoint/2010/main">
-        <p14:section name="Opening" id="{e22d0cf0-c5bb-235e-d3ce-c70c36e13009}">
+        <p14:section name="Opening" id="{e7a16393-1e17-00f2-7ddb-8a3e774f869a}">
           <p14:sldIdLst>
             <p14:sldId id="256"/>
             <p14:sldId id="257"/>
             <p14:sldId id="258"/>
           </p14:sldIdLst>
         </p14:section>
-        <p14:section name="Evidence" id="{745d9065-1b18-79d9-b8ce-1c158850e20d}">
+        <p14:section name="Evidence" id="{bd00d09d-63d0-b955-58ce-b2e816f17092}">
           <p14:sldIdLst>
             <p14:sldId id="259"/>
             <p14:sldId id="260"/>
           </p14:sldIdLst>
         </p14:section>
-        <p14:section name="Value" id="{464afebc-1619-f126-9fe5-cc8a539dd4d4}">
+        <p14:section name="Value" id="{9b31670a-6fe9-58a0-1e57-574e9555caf1}">
           <p14:sldIdLst>
             <p14:sldId id="261"/>
             <p14:sldId id="262"/>
           </p14:sldIdLst>
         </p14:section>
-        <p14:section name="Close" id="{1892500d-cf51-4285-0c47-ff2709800d16}">
+        <p14:section name="Close" id="{da1b66c3-3bdc-1248-754b-59bd24a4c090}">
           <p14:sldIdLst>
             <p14:sldId id="263"/>
           </p14:sldIdLst>
@@ -10476,9 +10476,9 @@
 </file>
 
 <file path=ppt/theme/theme1.xml><?xml version="1.0" encoding="utf-8"?>
-<a:theme xmlns:a="http://schemas.openxmlformats.org/drawingml/2006/main" name="Salesforce Handbook">
+<a:theme xmlns:a="http://schemas.openxmlformats.org/drawingml/2006/main" name="Process Intelligence">
   <a:themeElements>
-    <a:clrScheme name="Salesforce Handbook">
+    <a:clrScheme name="Process Intelligence">
       <a:dk1>
         <a:srgbClr val="181818"/>
       </a:dk1>
@@ -10516,7 +10516,7 @@
         <a:srgbClr val="032D60"/>
       </a:folHlink>
     </a:clrScheme>
-    <a:fontScheme name="Salesforce Handbook">
+    <a:fontScheme name="Process Intelligence">
       <a:majorFont>
         <a:latin typeface="Arial"/>
         <a:ea typeface=""/>
